--- a/docs/presentation/pptx/hayabusa-plus.pptx
+++ b/docs/presentation/pptx/hayabusa-plus.pptx
@@ -3152,164 +3152,125 @@
         </p:nvSpPr>
         <p:spPr>
           <a:xfrm>
-            <a:off x="640080" y="914400"/>
-            <a:ext cx="1828800" cy="1097280"/>
-          </a:xfrm>
-          <a:prstGeom prst="rect">
-            <a:avLst/>
-          </a:prstGeom>
-          <a:noFill/>
-        </p:spPr>
-        <p:txBody>
-          <a:bodyPr wrap="square" lIns="0" rIns="0" tIns="0" bIns="0" anchor="t">
-            <a:spAutoFit/>
-          </a:bodyPr>
-          <a:lstStyle/>
-          <a:p>
-            <a:pPr algn="l">
-              <a:lnSpc>
-                <a:spcPct val="130000"/>
-              </a:lnSpc>
-            </a:pPr>
-            <a:r>
-              <a:rPr sz="8000" b="0" i="0">
+            <a:off x="548640" y="1371600"/>
+            <a:ext cx="10972800" cy="548640"/>
+          </a:xfrm>
+          <a:prstGeom prst="rect">
+            <a:avLst/>
+          </a:prstGeom>
+          <a:noFill/>
+        </p:spPr>
+        <p:txBody>
+          <a:bodyPr wrap="square" lIns="0" rIns="0" tIns="0" bIns="0" anchor="t">
+            <a:spAutoFit/>
+          </a:bodyPr>
+          <a:lstStyle/>
+          <a:p>
+            <a:pPr algn="ctr">
+              <a:lnSpc>
+                <a:spcPct val="130000"/>
+              </a:lnSpc>
+            </a:pPr>
+            <a:r>
+              <a:rPr sz="2600" b="0" i="0">
                 <a:solidFill>
                   <a:srgbClr val="CADCFC"/>
                 </a:solidFill>
+                <a:latin typeface="Cambria"/>
+              </a:rPr>
+              <a:t>OSS 解析エンジン「Hayabusa」の拡張による</a:t>
+            </a:r>
+          </a:p>
+        </p:txBody>
+      </p:sp>
+      <p:sp>
+        <p:nvSpPr>
+          <p:cNvPr id="4" name="TextBox 3"/>
+          <p:cNvSpPr txBox="1"/>
+          <p:nvPr/>
+        </p:nvSpPr>
+        <p:spPr>
+          <a:xfrm>
+            <a:off x="548640" y="1965960"/>
+            <a:ext cx="10972800" cy="914400"/>
+          </a:xfrm>
+          <a:prstGeom prst="rect">
+            <a:avLst/>
+          </a:prstGeom>
+          <a:noFill/>
+        </p:spPr>
+        <p:txBody>
+          <a:bodyPr wrap="square" lIns="0" rIns="0" tIns="0" bIns="0" anchor="t">
+            <a:spAutoFit/>
+          </a:bodyPr>
+          <a:lstStyle/>
+          <a:p>
+            <a:pPr algn="ctr">
+              <a:lnSpc>
+                <a:spcPct val="130000"/>
+              </a:lnSpc>
+            </a:pPr>
+            <a:r>
+              <a:rPr sz="4000" b="1" i="0">
+                <a:solidFill>
+                  <a:srgbClr val="FFFFFF"/>
+                </a:solidFill>
+                <a:latin typeface="Cambria"/>
+              </a:rPr>
+              <a:t>誰でも使えるサイバー攻撃調査ツールの開発</a:t>
+            </a:r>
+          </a:p>
+        </p:txBody>
+      </p:sp>
+      <p:sp>
+        <p:nvSpPr>
+          <p:cNvPr id="5" name="TextBox 4"/>
+          <p:cNvSpPr txBox="1"/>
+          <p:nvPr/>
+        </p:nvSpPr>
+        <p:spPr>
+          <a:xfrm>
+            <a:off x="548640" y="3246120"/>
+            <a:ext cx="10972800" cy="548640"/>
+          </a:xfrm>
+          <a:prstGeom prst="rect">
+            <a:avLst/>
+          </a:prstGeom>
+          <a:noFill/>
+        </p:spPr>
+        <p:txBody>
+          <a:bodyPr wrap="square" lIns="0" rIns="0" tIns="0" bIns="0" anchor="t">
+            <a:spAutoFit/>
+          </a:bodyPr>
+          <a:lstStyle/>
+          <a:p>
+            <a:pPr algn="ctr">
+              <a:lnSpc>
+                <a:spcPct val="130000"/>
+              </a:lnSpc>
+            </a:pPr>
+            <a:r>
+              <a:rPr sz="2000" b="0" i="1">
+                <a:solidFill>
+                  <a:srgbClr val="CADCFC"/>
+                </a:solidFill>
                 <a:latin typeface="Calibri"/>
               </a:rPr>
-              <a:t>🦅</a:t>
-            </a:r>
-          </a:p>
-        </p:txBody>
-      </p:sp>
-      <p:sp>
-        <p:nvSpPr>
-          <p:cNvPr id="4" name="TextBox 3"/>
-          <p:cNvSpPr txBox="1"/>
-          <p:nvPr/>
-        </p:nvSpPr>
-        <p:spPr>
-          <a:xfrm>
-            <a:off x="1920240" y="960120"/>
-            <a:ext cx="9601200" cy="1188720"/>
-          </a:xfrm>
-          <a:prstGeom prst="rect">
-            <a:avLst/>
-          </a:prstGeom>
-          <a:noFill/>
-        </p:spPr>
-        <p:txBody>
-          <a:bodyPr wrap="square" lIns="0" rIns="0" tIns="0" bIns="0" anchor="t">
-            <a:spAutoFit/>
-          </a:bodyPr>
-          <a:lstStyle/>
-          <a:p>
-            <a:pPr algn="l">
-              <a:lnSpc>
-                <a:spcPct val="130000"/>
-              </a:lnSpc>
-            </a:pPr>
-            <a:r>
-              <a:rPr sz="6800" b="1" i="0">
-                <a:solidFill>
-                  <a:srgbClr val="FFFFFF"/>
-                </a:solidFill>
-                <a:latin typeface="Cambria"/>
-              </a:rPr>
-              <a:t>hayabusa-plus</a:t>
-            </a:r>
-          </a:p>
-        </p:txBody>
-      </p:sp>
-      <p:sp>
-        <p:nvSpPr>
-          <p:cNvPr id="5" name="TextBox 4"/>
-          <p:cNvSpPr txBox="1"/>
-          <p:nvPr/>
-        </p:nvSpPr>
-        <p:spPr>
-          <a:xfrm>
-            <a:off x="548640" y="3017520"/>
-            <a:ext cx="10972800" cy="640080"/>
-          </a:xfrm>
-          <a:prstGeom prst="rect">
-            <a:avLst/>
-          </a:prstGeom>
-          <a:noFill/>
-        </p:spPr>
-        <p:txBody>
-          <a:bodyPr wrap="square" lIns="0" rIns="0" tIns="0" bIns="0" anchor="t">
-            <a:spAutoFit/>
-          </a:bodyPr>
-          <a:lstStyle/>
-          <a:p>
-            <a:pPr algn="ctr">
-              <a:lnSpc>
-                <a:spcPct val="130000"/>
-              </a:lnSpc>
-            </a:pPr>
-            <a:r>
-              <a:rPr sz="3000" b="0" i="1">
-                <a:solidFill>
-                  <a:srgbClr val="CADCFC"/>
-                </a:solidFill>
-                <a:latin typeface="Cambria"/>
-              </a:rPr>
-              <a:t>サイバー攻撃の痕跡を、誰でも読めるように</a:t>
-            </a:r>
-          </a:p>
-        </p:txBody>
-      </p:sp>
-      <p:sp>
-        <p:nvSpPr>
-          <p:cNvPr id="6" name="TextBox 5"/>
-          <p:cNvSpPr txBox="1"/>
-          <p:nvPr/>
-        </p:nvSpPr>
-        <p:spPr>
-          <a:xfrm>
-            <a:off x="548640" y="4114800"/>
-            <a:ext cx="10972800" cy="457200"/>
-          </a:xfrm>
-          <a:prstGeom prst="rect">
-            <a:avLst/>
-          </a:prstGeom>
-          <a:noFill/>
-        </p:spPr>
-        <p:txBody>
-          <a:bodyPr wrap="square" lIns="0" rIns="0" tIns="0" bIns="0" anchor="t">
-            <a:spAutoFit/>
-          </a:bodyPr>
-          <a:lstStyle/>
-          <a:p>
-            <a:pPr algn="ctr">
-              <a:lnSpc>
-                <a:spcPct val="130000"/>
-              </a:lnSpc>
-            </a:pPr>
-            <a:r>
-              <a:rPr sz="1700" b="0" i="0">
-                <a:solidFill>
-                  <a:srgbClr val="CADCFC"/>
-                </a:solidFill>
-                <a:latin typeface="Calibri"/>
-              </a:rPr>
-              <a:t>Windows のログから「何が起きたのか」を、ブラウザの画面で見える形にしました。</a:t>
-            </a:r>
-          </a:p>
-        </p:txBody>
-      </p:sp>
-      <p:sp>
-        <p:nvSpPr>
-          <p:cNvPr id="7" name="Rounded Rectangle 6"/>
+              <a:t>— サイバー攻撃の痕跡を、誰でも読めるように —</a:t>
+            </a:r>
+          </a:p>
+        </p:txBody>
+      </p:sp>
+      <p:sp>
+        <p:nvSpPr>
+          <p:cNvPr id="6" name="Rounded Rectangle 5"/>
           <p:cNvSpPr/>
           <p:nvPr/>
         </p:nvSpPr>
         <p:spPr>
           <a:xfrm>
-            <a:off x="3337560" y="5029200"/>
-            <a:ext cx="5486400" cy="777240"/>
+            <a:off x="2651760" y="4206240"/>
+            <a:ext cx="6858000" cy="1554480"/>
           </a:xfrm>
           <a:prstGeom prst="roundRect">
             <a:avLst/>
@@ -3348,39 +3309,78 @@
       </p:sp>
       <p:sp>
         <p:nvSpPr>
+          <p:cNvPr id="7" name="TextBox 6"/>
+          <p:cNvSpPr txBox="1"/>
+          <p:nvPr/>
+        </p:nvSpPr>
+        <p:spPr>
+          <a:xfrm>
+            <a:off x="3063240" y="4370832"/>
+            <a:ext cx="6217920" cy="411480"/>
+          </a:xfrm>
+          <a:prstGeom prst="rect">
+            <a:avLst/>
+          </a:prstGeom>
+          <a:noFill/>
+        </p:spPr>
+        <p:txBody>
+          <a:bodyPr wrap="square" lIns="0" rIns="0" tIns="0" bIns="0" anchor="t">
+            <a:spAutoFit/>
+          </a:bodyPr>
+          <a:lstStyle/>
+          <a:p>
+            <a:pPr algn="l">
+              <a:lnSpc>
+                <a:spcPct val="130000"/>
+              </a:lnSpc>
+            </a:pPr>
+            <a:r>
+              <a:rPr sz="1400" b="0" i="0">
+                <a:solidFill>
+                  <a:srgbClr val="FFFFFF"/>
+                </a:solidFill>
+                <a:latin typeface="Calibri"/>
+              </a:rPr>
+              <a:t>🦀 エンジン本体 (Rust) に新しい検知機能を追加</a:t>
+            </a:r>
+          </a:p>
+        </p:txBody>
+      </p:sp>
+      <p:sp>
+        <p:nvSpPr>
           <p:cNvPr id="8" name="TextBox 7"/>
           <p:cNvSpPr txBox="1"/>
           <p:nvPr/>
         </p:nvSpPr>
         <p:spPr>
           <a:xfrm>
-            <a:off x="3337560" y="5029200"/>
-            <a:ext cx="5486400" cy="777240"/>
-          </a:xfrm>
-          <a:prstGeom prst="rect">
-            <a:avLst/>
-          </a:prstGeom>
-          <a:noFill/>
-        </p:spPr>
-        <p:txBody>
-          <a:bodyPr wrap="square" lIns="0" rIns="0" tIns="0" bIns="0" anchor="ctr">
-            <a:spAutoFit/>
-          </a:bodyPr>
-          <a:lstStyle/>
-          <a:p>
-            <a:pPr algn="ctr">
-              <a:lnSpc>
-                <a:spcPct val="130000"/>
-              </a:lnSpc>
-            </a:pPr>
-            <a:r>
-              <a:rPr sz="1500" b="1" i="0">
+            <a:off x="3063240" y="4791456"/>
+            <a:ext cx="6217920" cy="411480"/>
+          </a:xfrm>
+          <a:prstGeom prst="rect">
+            <a:avLst/>
+          </a:prstGeom>
+          <a:noFill/>
+        </p:spPr>
+        <p:txBody>
+          <a:bodyPr wrap="square" lIns="0" rIns="0" tIns="0" bIns="0" anchor="t">
+            <a:spAutoFit/>
+          </a:bodyPr>
+          <a:lstStyle/>
+          <a:p>
+            <a:pPr algn="l">
+              <a:lnSpc>
+                <a:spcPct val="130000"/>
+              </a:lnSpc>
+            </a:pPr>
+            <a:r>
+              <a:rPr sz="1400" b="0" i="0">
                 <a:solidFill>
                   <a:srgbClr val="FFFFFF"/>
                 </a:solidFill>
                 <a:latin typeface="Calibri"/>
               </a:rPr>
-              <a:t>📦 ダウンロードして展開するだけで、すぐ使えます</a:t>
+              <a:t>📜 攻撃を見抜く検知ルールを 13 本自作</a:t>
             </a:r>
           </a:p>
         </p:txBody>
@@ -3388,6 +3388,45 @@
       <p:sp>
         <p:nvSpPr>
           <p:cNvPr id="9" name="TextBox 8"/>
+          <p:cNvSpPr txBox="1"/>
+          <p:nvPr/>
+        </p:nvSpPr>
+        <p:spPr>
+          <a:xfrm>
+            <a:off x="3063240" y="5212080"/>
+            <a:ext cx="6217920" cy="411480"/>
+          </a:xfrm>
+          <a:prstGeom prst="rect">
+            <a:avLst/>
+          </a:prstGeom>
+          <a:noFill/>
+        </p:spPr>
+        <p:txBody>
+          <a:bodyPr wrap="square" lIns="0" rIns="0" tIns="0" bIns="0" anchor="t">
+            <a:spAutoFit/>
+          </a:bodyPr>
+          <a:lstStyle/>
+          <a:p>
+            <a:pPr algn="l">
+              <a:lnSpc>
+                <a:spcPct val="130000"/>
+              </a:lnSpc>
+            </a:pPr>
+            <a:r>
+              <a:rPr sz="1400" b="0" i="0">
+                <a:solidFill>
+                  <a:srgbClr val="FFFFFF"/>
+                </a:solidFill>
+                <a:latin typeface="Calibri"/>
+              </a:rPr>
+              <a:t>🖥️ 結果を読み解ける GUI をゼロから開発 (約 8,000 行)</a:t>
+            </a:r>
+          </a:p>
+        </p:txBody>
+      </p:sp>
+      <p:sp>
+        <p:nvSpPr>
+          <p:cNvPr id="10" name="TextBox 9"/>
           <p:cNvSpPr txBox="1"/>
           <p:nvPr/>
         </p:nvSpPr>
@@ -3413,13 +3452,13 @@
               </a:lnSpc>
             </a:pPr>
             <a:r>
-              <a:rPr sz="1400" b="0" i="0">
+              <a:rPr sz="1300" b="0" i="0">
                 <a:solidFill>
                   <a:srgbClr val="CADCFC"/>
                 </a:solidFill>
                 <a:latin typeface="Consolas"/>
               </a:rPr>
-              <a:t>github.com/Assy2005/hayabusa-plus</a:t>
+              <a:t>プロジェクト名: hayabusa-plus   /   github.com/Assy2005/hayabusa-plus</a:t>
             </a:r>
           </a:p>
         </p:txBody>
@@ -3520,7 +3559,7 @@
                 </a:solidFill>
                 <a:latin typeface="Calibri"/>
               </a:rPr>
-              <a:t>08  new!</a:t>
+              <a:t>開発内容 +α   (自作の統計分析)</a:t>
             </a:r>
           </a:p>
         </p:txBody>
@@ -3559,21 +3598,60 @@
                 </a:solidFill>
                 <a:latin typeface="Cambria"/>
               </a:rPr>
-              <a:t>最近のアップデート — もっと「誰でも使える」へ</a:t>
-            </a:r>
-          </a:p>
-        </p:txBody>
-      </p:sp>
-      <p:sp>
-        <p:nvSpPr>
-          <p:cNvPr id="5" name="Rounded Rectangle 4"/>
+              <a:t>さらに: ルールでは書けない「いつもと違う」も検出</a:t>
+            </a:r>
+          </a:p>
+        </p:txBody>
+      </p:sp>
+      <p:sp>
+        <p:nvSpPr>
+          <p:cNvPr id="5" name="TextBox 4"/>
+          <p:cNvSpPr txBox="1"/>
+          <p:nvPr/>
+        </p:nvSpPr>
+        <p:spPr>
+          <a:xfrm>
+            <a:off x="548640" y="1600200"/>
+            <a:ext cx="10972800" cy="457200"/>
+          </a:xfrm>
+          <a:prstGeom prst="rect">
+            <a:avLst/>
+          </a:prstGeom>
+          <a:noFill/>
+        </p:spPr>
+        <p:txBody>
+          <a:bodyPr wrap="square" lIns="0" rIns="0" tIns="0" bIns="0" anchor="t">
+            <a:spAutoFit/>
+          </a:bodyPr>
+          <a:lstStyle/>
+          <a:p>
+            <a:pPr algn="l">
+              <a:lnSpc>
+                <a:spcPct val="130000"/>
+              </a:lnSpc>
+            </a:pPr>
+            <a:r>
+              <a:rPr sz="1500" b="0" i="1">
+                <a:solidFill>
+                  <a:srgbClr val="5B6472"/>
+                </a:solidFill>
+                <a:latin typeface="Calibri"/>
+              </a:rPr>
+              <a:t>ルールは 1 件ずつしか判定できない。そこで「全体の傾向」を統計で見る分析を自作しました。</a:t>
+            </a:r>
+          </a:p>
+        </p:txBody>
+      </p:sp>
+      <p:sp>
+        <p:nvSpPr>
+          <p:cNvPr id="6" name="Rounded Rectangle 5"/>
           <p:cNvSpPr/>
           <p:nvPr/>
         </p:nvSpPr>
         <p:spPr>
           <a:xfrm>
-            <a:off x="548640" y="1691640"/>
-            <a:ext cx="5486400" cy="2103120"/>
+            <a:off x="548640" y="2240280"/>
+            <a:ext cx="2697480" cy="2743200"/>
           </a:xfrm>
           <a:prstGeom prst="roundRect">
             <a:avLst/>
@@ -3612,14 +3690,14 @@
       </p:sp>
       <p:sp>
         <p:nvSpPr>
-          <p:cNvPr id="6" name="Rectangle 5"/>
+          <p:cNvPr id="7" name="Rectangle 6"/>
           <p:cNvSpPr/>
           <p:nvPr/>
         </p:nvSpPr>
         <p:spPr>
           <a:xfrm>
-            <a:off x="548640" y="1691640"/>
-            <a:ext cx="73152" cy="2103120"/>
+            <a:off x="548640" y="2240280"/>
+            <a:ext cx="73152" cy="2743200"/>
           </a:xfrm>
           <a:prstGeom prst="rect">
             <a:avLst/>
@@ -3656,14 +3734,14 @@
       </p:sp>
       <p:sp>
         <p:nvSpPr>
-          <p:cNvPr id="7" name="TextBox 6"/>
-          <p:cNvSpPr txBox="1"/>
-          <p:nvPr/>
-        </p:nvSpPr>
-        <p:spPr>
-          <a:xfrm>
-            <a:off x="777240" y="1892808"/>
-            <a:ext cx="731520" cy="640080"/>
+          <p:cNvPr id="8" name="TextBox 7"/>
+          <p:cNvSpPr txBox="1"/>
+          <p:nvPr/>
+        </p:nvSpPr>
+        <p:spPr>
+          <a:xfrm>
+            <a:off x="731520" y="2404872"/>
+            <a:ext cx="914400" cy="594360"/>
           </a:xfrm>
           <a:prstGeom prst="rect">
             <a:avLst/>
@@ -3688,21 +3766,21 @@
                 </a:solidFill>
                 <a:latin typeface="Calibri"/>
               </a:rPr>
-              <a:t>🎨</a:t>
-            </a:r>
-          </a:p>
-        </p:txBody>
-      </p:sp>
-      <p:sp>
-        <p:nvSpPr>
-          <p:cNvPr id="8" name="TextBox 7"/>
-          <p:cNvSpPr txBox="1"/>
-          <p:nvPr/>
-        </p:nvSpPr>
-        <p:spPr>
-          <a:xfrm>
-            <a:off x="1508760" y="1920240"/>
-            <a:ext cx="4297680" cy="457200"/>
+              <a:t>🔥</a:t>
+            </a:r>
+          </a:p>
+        </p:txBody>
+      </p:sp>
+      <p:sp>
+        <p:nvSpPr>
+          <p:cNvPr id="9" name="TextBox 8"/>
+          <p:cNvSpPr txBox="1"/>
+          <p:nvPr/>
+        </p:nvSpPr>
+        <p:spPr>
+          <a:xfrm>
+            <a:off x="731520" y="3017520"/>
+            <a:ext cx="2423160" cy="457200"/>
           </a:xfrm>
           <a:prstGeom prst="rect">
             <a:avLst/>
@@ -3727,21 +3805,21 @@
                 </a:solidFill>
                 <a:latin typeface="Cambria"/>
               </a:rPr>
-              <a:t>画面を全面リニューアル</a:t>
-            </a:r>
-          </a:p>
-        </p:txBody>
-      </p:sp>
-      <p:sp>
-        <p:nvSpPr>
-          <p:cNvPr id="9" name="TextBox 8"/>
-          <p:cNvSpPr txBox="1"/>
-          <p:nvPr/>
-        </p:nvSpPr>
-        <p:spPr>
-          <a:xfrm>
-            <a:off x="1508760" y="2423160"/>
-            <a:ext cx="4251960" cy="1280160"/>
+              <a:t>急増している</a:t>
+            </a:r>
+          </a:p>
+        </p:txBody>
+      </p:sp>
+      <p:sp>
+        <p:nvSpPr>
+          <p:cNvPr id="10" name="TextBox 9"/>
+          <p:cNvSpPr txBox="1"/>
+          <p:nvPr/>
+        </p:nvSpPr>
+        <p:spPr>
+          <a:xfrm>
+            <a:off x="731520" y="3520440"/>
+            <a:ext cx="2331720" cy="822960"/>
           </a:xfrm>
           <a:prstGeom prst="rect">
             <a:avLst/>
@@ -3760,29 +3838,67 @@
               </a:lnSpc>
             </a:pPr>
             <a:r>
-              <a:rPr sz="1150" b="0" i="0">
+              <a:rPr sz="1100" b="0" i="0">
+                <a:solidFill>
+                  <a:srgbClr val="1F2937"/>
+                </a:solidFill>
+                <a:latin typeface="Calibri"/>
+              </a:rPr>
+              <a:t>平常の数十〜数千倍の
+動きが急に発生</a:t>
+            </a:r>
+          </a:p>
+        </p:txBody>
+      </p:sp>
+      <p:sp>
+        <p:nvSpPr>
+          <p:cNvPr id="11" name="TextBox 10"/>
+          <p:cNvSpPr txBox="1"/>
+          <p:nvPr/>
+        </p:nvSpPr>
+        <p:spPr>
+          <a:xfrm>
+            <a:off x="731520" y="4434840"/>
+            <a:ext cx="2331720" cy="457200"/>
+          </a:xfrm>
+          <a:prstGeom prst="rect">
+            <a:avLst/>
+          </a:prstGeom>
+          <a:noFill/>
+        </p:spPr>
+        <p:txBody>
+          <a:bodyPr wrap="square" lIns="0" rIns="0" tIns="0" bIns="0" anchor="t">
+            <a:spAutoFit/>
+          </a:bodyPr>
+          <a:lstStyle/>
+          <a:p>
+            <a:pPr algn="l">
+              <a:lnSpc>
+                <a:spcPct val="130000"/>
+              </a:lnSpc>
+            </a:pPr>
+            <a:r>
+              <a:rPr sz="1000" b="0" i="1">
                 <a:solidFill>
                   <a:srgbClr val="5B6472"/>
                 </a:solidFill>
                 <a:latin typeface="Calibri"/>
               </a:rPr>
-              <a:t>明るく親しみやすいデザインに一新。
-ホーム画面の 3 ステップガイドと
-用語のその場解説で、初めてでも迷いません。</a:t>
-            </a:r>
-          </a:p>
-        </p:txBody>
-      </p:sp>
-      <p:sp>
-        <p:nvSpPr>
-          <p:cNvPr id="10" name="Rounded Rectangle 9"/>
+              <a:t>例: 大量のパスワード試行</a:t>
+            </a:r>
+          </a:p>
+        </p:txBody>
+      </p:sp>
+      <p:sp>
+        <p:nvSpPr>
+          <p:cNvPr id="12" name="Rounded Rectangle 11"/>
           <p:cNvSpPr/>
           <p:nvPr/>
         </p:nvSpPr>
         <p:spPr>
           <a:xfrm>
-            <a:off x="6263640" y="1691640"/>
-            <a:ext cx="5486400" cy="2103120"/>
+            <a:off x="3429000" y="2240280"/>
+            <a:ext cx="2697480" cy="2743200"/>
           </a:xfrm>
           <a:prstGeom prst="roundRect">
             <a:avLst/>
@@ -3821,14 +3937,14 @@
       </p:sp>
       <p:sp>
         <p:nvSpPr>
-          <p:cNvPr id="11" name="Rectangle 10"/>
+          <p:cNvPr id="13" name="Rectangle 12"/>
           <p:cNvSpPr/>
           <p:nvPr/>
         </p:nvSpPr>
         <p:spPr>
           <a:xfrm>
-            <a:off x="6263640" y="1691640"/>
-            <a:ext cx="73152" cy="2103120"/>
+            <a:off x="3429000" y="2240280"/>
+            <a:ext cx="73152" cy="2743200"/>
           </a:xfrm>
           <a:prstGeom prst="rect">
             <a:avLst/>
@@ -3865,14 +3981,14 @@
       </p:sp>
       <p:sp>
         <p:nvSpPr>
-          <p:cNvPr id="12" name="TextBox 11"/>
-          <p:cNvSpPr txBox="1"/>
-          <p:nvPr/>
-        </p:nvSpPr>
-        <p:spPr>
-          <a:xfrm>
-            <a:off x="6492240" y="1892808"/>
-            <a:ext cx="731520" cy="640080"/>
+          <p:cNvPr id="14" name="TextBox 13"/>
+          <p:cNvSpPr txBox="1"/>
+          <p:nvPr/>
+        </p:nvSpPr>
+        <p:spPr>
+          <a:xfrm>
+            <a:off x="3611880" y="2404872"/>
+            <a:ext cx="914400" cy="594360"/>
           </a:xfrm>
           <a:prstGeom prst="rect">
             <a:avLst/>
@@ -3897,21 +4013,21 @@
                 </a:solidFill>
                 <a:latin typeface="Calibri"/>
               </a:rPr>
-              <a:t>⏳</a:t>
-            </a:r>
-          </a:p>
-        </p:txBody>
-      </p:sp>
-      <p:sp>
-        <p:nvSpPr>
-          <p:cNvPr id="13" name="TextBox 12"/>
-          <p:cNvSpPr txBox="1"/>
-          <p:nvPr/>
-        </p:nvSpPr>
-        <p:spPr>
-          <a:xfrm>
-            <a:off x="7223759" y="1920240"/>
-            <a:ext cx="4297680" cy="457200"/>
+              <a:t>🌐</a:t>
+            </a:r>
+          </a:p>
+        </p:txBody>
+      </p:sp>
+      <p:sp>
+        <p:nvSpPr>
+          <p:cNvPr id="15" name="TextBox 14"/>
+          <p:cNvSpPr txBox="1"/>
+          <p:nvPr/>
+        </p:nvSpPr>
+        <p:spPr>
+          <a:xfrm>
+            <a:off x="3611880" y="3017520"/>
+            <a:ext cx="2423160" cy="457200"/>
           </a:xfrm>
           <a:prstGeom prst="rect">
             <a:avLst/>
@@ -3936,21 +4052,21 @@
                 </a:solidFill>
                 <a:latin typeface="Cambria"/>
               </a:rPr>
-              <a:t>スキャンの進み具合が見える</a:t>
-            </a:r>
-          </a:p>
-        </p:txBody>
-      </p:sp>
-      <p:sp>
-        <p:nvSpPr>
-          <p:cNvPr id="14" name="TextBox 13"/>
-          <p:cNvSpPr txBox="1"/>
-          <p:nvPr/>
-        </p:nvSpPr>
-        <p:spPr>
-          <a:xfrm>
-            <a:off x="7223759" y="2423160"/>
-            <a:ext cx="4251960" cy="1280160"/>
+              <a:t>広がっている</a:t>
+            </a:r>
+          </a:p>
+        </p:txBody>
+      </p:sp>
+      <p:sp>
+        <p:nvSpPr>
+          <p:cNvPr id="16" name="TextBox 15"/>
+          <p:cNvSpPr txBox="1"/>
+          <p:nvPr/>
+        </p:nvSpPr>
+        <p:spPr>
+          <a:xfrm>
+            <a:off x="3611880" y="3520440"/>
+            <a:ext cx="2331720" cy="822960"/>
           </a:xfrm>
           <a:prstGeom prst="rect">
             <a:avLst/>
@@ -3969,29 +4085,67 @@
               </a:lnSpc>
             </a:pPr>
             <a:r>
-              <a:rPr sz="1150" b="0" i="0">
+              <a:rPr sz="1100" b="0" i="0">
+                <a:solidFill>
+                  <a:srgbClr val="1F2937"/>
+                </a:solidFill>
+                <a:latin typeface="Calibri"/>
+              </a:rPr>
+              <a:t>同じ動きが
+複数の PC で同時発生</a:t>
+            </a:r>
+          </a:p>
+        </p:txBody>
+      </p:sp>
+      <p:sp>
+        <p:nvSpPr>
+          <p:cNvPr id="17" name="TextBox 16"/>
+          <p:cNvSpPr txBox="1"/>
+          <p:nvPr/>
+        </p:nvSpPr>
+        <p:spPr>
+          <a:xfrm>
+            <a:off x="3611880" y="4434840"/>
+            <a:ext cx="2331720" cy="457200"/>
+          </a:xfrm>
+          <a:prstGeom prst="rect">
+            <a:avLst/>
+          </a:prstGeom>
+          <a:noFill/>
+        </p:spPr>
+        <p:txBody>
+          <a:bodyPr wrap="square" lIns="0" rIns="0" tIns="0" bIns="0" anchor="t">
+            <a:spAutoFit/>
+          </a:bodyPr>
+          <a:lstStyle/>
+          <a:p>
+            <a:pPr algn="l">
+              <a:lnSpc>
+                <a:spcPct val="130000"/>
+              </a:lnSpc>
+            </a:pPr>
+            <a:r>
+              <a:rPr sz="1000" b="0" i="1">
                 <a:solidFill>
                   <a:srgbClr val="5B6472"/>
                 </a:solidFill>
                 <a:latin typeface="Calibri"/>
               </a:rPr>
-              <a:t>「あと何 %・残り何秒」を表示。
-長いスキャンも安心して待てます。
-途中でやめる「中止」ボタンも付きました。</a:t>
-            </a:r>
-          </a:p>
-        </p:txBody>
-      </p:sp>
-      <p:sp>
-        <p:nvSpPr>
-          <p:cNvPr id="15" name="Rounded Rectangle 14"/>
+              <a:t>例: ウイルスが社内に拡大</a:t>
+            </a:r>
+          </a:p>
+        </p:txBody>
+      </p:sp>
+      <p:sp>
+        <p:nvSpPr>
+          <p:cNvPr id="18" name="Rounded Rectangle 17"/>
           <p:cNvSpPr/>
           <p:nvPr/>
         </p:nvSpPr>
         <p:spPr>
           <a:xfrm>
-            <a:off x="548640" y="4023360"/>
-            <a:ext cx="5486400" cy="2103120"/>
+            <a:off x="6309360" y="2240280"/>
+            <a:ext cx="2697480" cy="2743200"/>
           </a:xfrm>
           <a:prstGeom prst="roundRect">
             <a:avLst/>
@@ -4030,14 +4184,14 @@
       </p:sp>
       <p:sp>
         <p:nvSpPr>
-          <p:cNvPr id="16" name="Rectangle 15"/>
+          <p:cNvPr id="19" name="Rectangle 18"/>
           <p:cNvSpPr/>
           <p:nvPr/>
         </p:nvSpPr>
         <p:spPr>
           <a:xfrm>
-            <a:off x="548640" y="4023360"/>
-            <a:ext cx="73152" cy="2103120"/>
+            <a:off x="6309360" y="2240280"/>
+            <a:ext cx="73152" cy="2743200"/>
           </a:xfrm>
           <a:prstGeom prst="rect">
             <a:avLst/>
@@ -4074,14 +4228,14 @@
       </p:sp>
       <p:sp>
         <p:nvSpPr>
-          <p:cNvPr id="17" name="TextBox 16"/>
-          <p:cNvSpPr txBox="1"/>
-          <p:nvPr/>
-        </p:nvSpPr>
-        <p:spPr>
-          <a:xfrm>
-            <a:off x="777240" y="4224528"/>
-            <a:ext cx="731520" cy="640080"/>
+          <p:cNvPr id="20" name="TextBox 19"/>
+          <p:cNvSpPr txBox="1"/>
+          <p:nvPr/>
+        </p:nvSpPr>
+        <p:spPr>
+          <a:xfrm>
+            <a:off x="6492240" y="2404872"/>
+            <a:ext cx="914400" cy="594360"/>
           </a:xfrm>
           <a:prstGeom prst="rect">
             <a:avLst/>
@@ -4106,21 +4260,21 @@
                 </a:solidFill>
                 <a:latin typeface="Calibri"/>
               </a:rPr>
-              <a:t>🗑</a:t>
-            </a:r>
-          </a:p>
-        </p:txBody>
-      </p:sp>
-      <p:sp>
-        <p:nvSpPr>
-          <p:cNvPr id="18" name="TextBox 17"/>
-          <p:cNvSpPr txBox="1"/>
-          <p:nvPr/>
-        </p:nvSpPr>
-        <p:spPr>
-          <a:xfrm>
-            <a:off x="1508760" y="4251960"/>
-            <a:ext cx="4297680" cy="457200"/>
+              <a:t>🤫</a:t>
+            </a:r>
+          </a:p>
+        </p:txBody>
+      </p:sp>
+      <p:sp>
+        <p:nvSpPr>
+          <p:cNvPr id="21" name="TextBox 20"/>
+          <p:cNvSpPr txBox="1"/>
+          <p:nvPr/>
+        </p:nvSpPr>
+        <p:spPr>
+          <a:xfrm>
+            <a:off x="6492240" y="3017520"/>
+            <a:ext cx="2423160" cy="457200"/>
           </a:xfrm>
           <a:prstGeom prst="rect">
             <a:avLst/>
@@ -4145,21 +4299,21 @@
                 </a:solidFill>
                 <a:latin typeface="Cambria"/>
               </a:rPr>
-              <a:t>履歴のお掃除機能</a:t>
-            </a:r>
-          </a:p>
-        </p:txBody>
-      </p:sp>
-      <p:sp>
-        <p:nvSpPr>
-          <p:cNvPr id="19" name="TextBox 18"/>
-          <p:cNvSpPr txBox="1"/>
-          <p:nvPr/>
-        </p:nvSpPr>
-        <p:spPr>
-          <a:xfrm>
-            <a:off x="1508760" y="4754880"/>
-            <a:ext cx="4251960" cy="1280160"/>
+              <a:t>急に静かに</a:t>
+            </a:r>
+          </a:p>
+        </p:txBody>
+      </p:sp>
+      <p:sp>
+        <p:nvSpPr>
+          <p:cNvPr id="22" name="TextBox 21"/>
+          <p:cNvSpPr txBox="1"/>
+          <p:nvPr/>
+        </p:nvSpPr>
+        <p:spPr>
+          <a:xfrm>
+            <a:off x="6492240" y="3520440"/>
+            <a:ext cx="2331720" cy="822960"/>
           </a:xfrm>
           <a:prstGeom prst="rect">
             <a:avLst/>
@@ -4178,29 +4332,67 @@
               </a:lnSpc>
             </a:pPr>
             <a:r>
-              <a:rPr sz="1150" b="0" i="0">
+              <a:rPr sz="1100" b="0" i="0">
+                <a:solidFill>
+                  <a:srgbClr val="1F2937"/>
+                </a:solidFill>
+                <a:latin typeface="Calibri"/>
+              </a:rPr>
+              <a:t>普段活動している PC が
+急にログを残さなくなる</a:t>
+            </a:r>
+          </a:p>
+        </p:txBody>
+      </p:sp>
+      <p:sp>
+        <p:nvSpPr>
+          <p:cNvPr id="23" name="TextBox 22"/>
+          <p:cNvSpPr txBox="1"/>
+          <p:nvPr/>
+        </p:nvSpPr>
+        <p:spPr>
+          <a:xfrm>
+            <a:off x="6492240" y="4434840"/>
+            <a:ext cx="2331720" cy="457200"/>
+          </a:xfrm>
+          <a:prstGeom prst="rect">
+            <a:avLst/>
+          </a:prstGeom>
+          <a:noFill/>
+        </p:spPr>
+        <p:txBody>
+          <a:bodyPr wrap="square" lIns="0" rIns="0" tIns="0" bIns="0" anchor="t">
+            <a:spAutoFit/>
+          </a:bodyPr>
+          <a:lstStyle/>
+          <a:p>
+            <a:pPr algn="l">
+              <a:lnSpc>
+                <a:spcPct val="130000"/>
+              </a:lnSpc>
+            </a:pPr>
+            <a:r>
+              <a:rPr sz="1000" b="0" i="1">
                 <a:solidFill>
                   <a:srgbClr val="5B6472"/>
                 </a:solidFill>
                 <a:latin typeface="Calibri"/>
               </a:rPr>
-              <a:t>要らなくなったスキャン結果を
-ワンクリックで削除。
-「すべて消去」でまっさらにもできます。</a:t>
-            </a:r>
-          </a:p>
-        </p:txBody>
-      </p:sp>
-      <p:sp>
-        <p:nvSpPr>
-          <p:cNvPr id="20" name="Rounded Rectangle 19"/>
+              <a:t>例: 攻撃者がログを消した</a:t>
+            </a:r>
+          </a:p>
+        </p:txBody>
+      </p:sp>
+      <p:sp>
+        <p:nvSpPr>
+          <p:cNvPr id="24" name="Rounded Rectangle 23"/>
           <p:cNvSpPr/>
           <p:nvPr/>
         </p:nvSpPr>
         <p:spPr>
           <a:xfrm>
-            <a:off x="6263640" y="4023360"/>
-            <a:ext cx="5486400" cy="2103120"/>
+            <a:off x="9189720" y="2240280"/>
+            <a:ext cx="2697480" cy="2743200"/>
           </a:xfrm>
           <a:prstGeom prst="roundRect">
             <a:avLst/>
@@ -4239,14 +4431,14 @@
       </p:sp>
       <p:sp>
         <p:nvSpPr>
-          <p:cNvPr id="21" name="Rectangle 20"/>
+          <p:cNvPr id="25" name="Rectangle 24"/>
           <p:cNvSpPr/>
           <p:nvPr/>
         </p:nvSpPr>
         <p:spPr>
           <a:xfrm>
-            <a:off x="6263640" y="4023360"/>
-            <a:ext cx="73152" cy="2103120"/>
+            <a:off x="9189720" y="2240280"/>
+            <a:ext cx="73152" cy="2743200"/>
           </a:xfrm>
           <a:prstGeom prst="rect">
             <a:avLst/>
@@ -4283,14 +4475,14 @@
       </p:sp>
       <p:sp>
         <p:nvSpPr>
-          <p:cNvPr id="22" name="TextBox 21"/>
-          <p:cNvSpPr txBox="1"/>
-          <p:nvPr/>
-        </p:nvSpPr>
-        <p:spPr>
-          <a:xfrm>
-            <a:off x="6492240" y="4224528"/>
-            <a:ext cx="731520" cy="640080"/>
+          <p:cNvPr id="26" name="TextBox 25"/>
+          <p:cNvSpPr txBox="1"/>
+          <p:nvPr/>
+        </p:nvSpPr>
+        <p:spPr>
+          <a:xfrm>
+            <a:off x="9372600" y="2404872"/>
+            <a:ext cx="914400" cy="594360"/>
           </a:xfrm>
           <a:prstGeom prst="rect">
             <a:avLst/>
@@ -4315,21 +4507,21 @@
                 </a:solidFill>
                 <a:latin typeface="Calibri"/>
               </a:rPr>
-              <a:t>📦</a:t>
-            </a:r>
-          </a:p>
-        </p:txBody>
-      </p:sp>
-      <p:sp>
-        <p:nvSpPr>
-          <p:cNvPr id="23" name="TextBox 22"/>
-          <p:cNvSpPr txBox="1"/>
-          <p:nvPr/>
-        </p:nvSpPr>
-        <p:spPr>
-          <a:xfrm>
-            <a:off x="7223759" y="4251960"/>
-            <a:ext cx="4297680" cy="457200"/>
+              <a:t>🌙</a:t>
+            </a:r>
+          </a:p>
+        </p:txBody>
+      </p:sp>
+      <p:sp>
+        <p:nvSpPr>
+          <p:cNvPr id="27" name="TextBox 26"/>
+          <p:cNvSpPr txBox="1"/>
+          <p:nvPr/>
+        </p:nvSpPr>
+        <p:spPr>
+          <a:xfrm>
+            <a:off x="9372600" y="3017520"/>
+            <a:ext cx="2423160" cy="457200"/>
           </a:xfrm>
           <a:prstGeom prst="rect">
             <a:avLst/>
@@ -4354,21 +4546,21 @@
                 </a:solidFill>
                 <a:latin typeface="Cambria"/>
               </a:rPr>
-              <a:t>ダウンロードしてすぐ使える</a:t>
-            </a:r>
-          </a:p>
-        </p:txBody>
-      </p:sp>
-      <p:sp>
-        <p:nvSpPr>
-          <p:cNvPr id="24" name="TextBox 23"/>
-          <p:cNvSpPr txBox="1"/>
-          <p:nvPr/>
-        </p:nvSpPr>
-        <p:spPr>
-          <a:xfrm>
-            <a:off x="7223759" y="4754880"/>
-            <a:ext cx="4251960" cy="1280160"/>
+              <a:t>時間外の活動</a:t>
+            </a:r>
+          </a:p>
+        </p:txBody>
+      </p:sp>
+      <p:sp>
+        <p:nvSpPr>
+          <p:cNvPr id="28" name="TextBox 27"/>
+          <p:cNvSpPr txBox="1"/>
+          <p:nvPr/>
+        </p:nvSpPr>
+        <p:spPr>
+          <a:xfrm>
+            <a:off x="9372600" y="3520440"/>
+            <a:ext cx="2331720" cy="822960"/>
           </a:xfrm>
           <a:prstGeom prst="rect">
             <a:avLst/>
@@ -4387,67 +4579,487 @@
               </a:lnSpc>
             </a:pPr>
             <a:r>
+              <a:rPr sz="1100" b="0" i="0">
+                <a:solidFill>
+                  <a:srgbClr val="1F2937"/>
+                </a:solidFill>
+                <a:latin typeface="Calibri"/>
+              </a:rPr>
+              <a:t>深夜などの業務時間外に
+重要な動きが発生</a:t>
+            </a:r>
+          </a:p>
+        </p:txBody>
+      </p:sp>
+      <p:sp>
+        <p:nvSpPr>
+          <p:cNvPr id="29" name="TextBox 28"/>
+          <p:cNvSpPr txBox="1"/>
+          <p:nvPr/>
+        </p:nvSpPr>
+        <p:spPr>
+          <a:xfrm>
+            <a:off x="9372600" y="4434840"/>
+            <a:ext cx="2331720" cy="457200"/>
+          </a:xfrm>
+          <a:prstGeom prst="rect">
+            <a:avLst/>
+          </a:prstGeom>
+          <a:noFill/>
+        </p:spPr>
+        <p:txBody>
+          <a:bodyPr wrap="square" lIns="0" rIns="0" tIns="0" bIns="0" anchor="t">
+            <a:spAutoFit/>
+          </a:bodyPr>
+          <a:lstStyle/>
+          <a:p>
+            <a:pPr algn="l">
+              <a:lnSpc>
+                <a:spcPct val="130000"/>
+              </a:lnSpc>
+            </a:pPr>
+            <a:r>
+              <a:rPr sz="1000" b="0" i="1">
+                <a:solidFill>
+                  <a:srgbClr val="5B6472"/>
+                </a:solidFill>
+                <a:latin typeface="Calibri"/>
+              </a:rPr>
+              <a:t>例: 業務外を狙った侵入</a:t>
+            </a:r>
+          </a:p>
+        </p:txBody>
+      </p:sp>
+      <p:sp>
+        <p:nvSpPr>
+          <p:cNvPr id="30" name="Rounded Rectangle 29"/>
+          <p:cNvSpPr/>
+          <p:nvPr/>
+        </p:nvSpPr>
+        <p:spPr>
+          <a:xfrm>
+            <a:off x="548640" y="5166360"/>
+            <a:ext cx="11064240" cy="1188720"/>
+          </a:xfrm>
+          <a:prstGeom prst="roundRect">
+            <a:avLst/>
+          </a:prstGeom>
+          <a:solidFill>
+            <a:srgbClr val="E8F0FE"/>
+          </a:solidFill>
+          <a:ln w="9525">
+            <a:solidFill>
+              <a:srgbClr val="E8F0FE"/>
+            </a:solidFill>
+          </a:ln>
+          <a:effectLst/>
+        </p:spPr>
+        <p:style>
+          <a:lnRef idx="1">
+            <a:schemeClr val="accent1"/>
+          </a:lnRef>
+          <a:fillRef idx="3">
+            <a:schemeClr val="accent1"/>
+          </a:fillRef>
+          <a:effectRef idx="2">
+            <a:schemeClr val="accent1"/>
+          </a:effectRef>
+          <a:fontRef idx="minor">
+            <a:schemeClr val="lt1"/>
+          </a:fontRef>
+        </p:style>
+        <p:txBody>
+          <a:bodyPr rtlCol="0" anchor="ctr"/>
+          <a:lstStyle/>
+          <a:p>
+            <a:pPr algn="ctr"/>
+          </a:p>
+        </p:txBody>
+      </p:sp>
+      <p:sp>
+        <p:nvSpPr>
+          <p:cNvPr id="31" name="TextBox 30"/>
+          <p:cNvSpPr txBox="1"/>
+          <p:nvPr/>
+        </p:nvSpPr>
+        <p:spPr>
+          <a:xfrm>
+            <a:off x="868680" y="5285232"/>
+            <a:ext cx="10515600" cy="365760"/>
+          </a:xfrm>
+          <a:prstGeom prst="rect">
+            <a:avLst/>
+          </a:prstGeom>
+          <a:noFill/>
+        </p:spPr>
+        <p:txBody>
+          <a:bodyPr wrap="square" lIns="0" rIns="0" tIns="0" bIns="0" anchor="t">
+            <a:spAutoFit/>
+          </a:bodyPr>
+          <a:lstStyle/>
+          <a:p>
+            <a:pPr algn="l">
+              <a:lnSpc>
+                <a:spcPct val="130000"/>
+              </a:lnSpc>
+            </a:pPr>
+            <a:r>
+              <a:rPr sz="1350" b="1" i="0">
+                <a:solidFill>
+                  <a:srgbClr val="1F2937"/>
+                </a:solidFill>
+                <a:latin typeface="Calibri"/>
+              </a:rPr>
+              <a:t>💡 実例:  自分の PC を実際にスキャン → 「疑わしい PowerShell 実行」の急増を自動検出</a:t>
+            </a:r>
+          </a:p>
+        </p:txBody>
+      </p:sp>
+      <p:sp>
+        <p:nvSpPr>
+          <p:cNvPr id="32" name="TextBox 31"/>
+          <p:cNvSpPr txBox="1"/>
+          <p:nvPr/>
+        </p:nvSpPr>
+        <p:spPr>
+          <a:xfrm>
+            <a:off x="868680" y="5715000"/>
+            <a:ext cx="2788920" cy="274320"/>
+          </a:xfrm>
+          <a:prstGeom prst="rect">
+            <a:avLst/>
+          </a:prstGeom>
+          <a:noFill/>
+        </p:spPr>
+        <p:txBody>
+          <a:bodyPr wrap="square" lIns="0" rIns="0" tIns="0" bIns="0" anchor="ctr">
+            <a:spAutoFit/>
+          </a:bodyPr>
+          <a:lstStyle/>
+          <a:p>
+            <a:pPr algn="l">
+              <a:lnSpc>
+                <a:spcPct val="130000"/>
+              </a:lnSpc>
+            </a:pPr>
+            <a:r>
+              <a:rPr sz="1100" b="0" i="0">
+                <a:solidFill>
+                  <a:srgbClr val="5B6472"/>
+                </a:solidFill>
+                <a:latin typeface="Calibri"/>
+              </a:rPr>
+              <a:t>平常時 (この PC の全期間平均)</a:t>
+            </a:r>
+          </a:p>
+        </p:txBody>
+      </p:sp>
+      <p:sp>
+        <p:nvSpPr>
+          <p:cNvPr id="33" name="Rounded Rectangle 32"/>
+          <p:cNvSpPr/>
+          <p:nvPr/>
+        </p:nvSpPr>
+        <p:spPr>
+          <a:xfrm>
+            <a:off x="3749039" y="5751576"/>
+            <a:ext cx="5486400" cy="201168"/>
+          </a:xfrm>
+          <a:prstGeom prst="roundRect">
+            <a:avLst/>
+          </a:prstGeom>
+          <a:solidFill>
+            <a:srgbClr val="FFFFFF"/>
+          </a:solidFill>
+          <a:ln>
+            <a:solidFill>
+              <a:srgbClr val="DDE3EE"/>
+            </a:solidFill>
+          </a:ln>
+          <a:effectLst/>
+        </p:spPr>
+        <p:style>
+          <a:lnRef idx="1">
+            <a:schemeClr val="accent1"/>
+          </a:lnRef>
+          <a:fillRef idx="3">
+            <a:schemeClr val="accent1"/>
+          </a:fillRef>
+          <a:effectRef idx="2">
+            <a:schemeClr val="accent1"/>
+          </a:effectRef>
+          <a:fontRef idx="minor">
+            <a:schemeClr val="lt1"/>
+          </a:fontRef>
+        </p:style>
+        <p:txBody>
+          <a:bodyPr rtlCol="0" anchor="ctr"/>
+          <a:lstStyle/>
+          <a:p>
+            <a:pPr algn="ctr"/>
+          </a:p>
+        </p:txBody>
+      </p:sp>
+      <p:sp>
+        <p:nvSpPr>
+          <p:cNvPr id="34" name="Rounded Rectangle 33"/>
+          <p:cNvSpPr/>
+          <p:nvPr/>
+        </p:nvSpPr>
+        <p:spPr>
+          <a:xfrm>
+            <a:off x="3749039" y="5751576"/>
+            <a:ext cx="91440" cy="201168"/>
+          </a:xfrm>
+          <a:prstGeom prst="roundRect">
+            <a:avLst/>
+          </a:prstGeom>
+          <a:solidFill>
+            <a:srgbClr val="5B6472"/>
+          </a:solidFill>
+          <a:ln>
+            <a:noFill/>
+          </a:ln>
+          <a:effectLst/>
+        </p:spPr>
+        <p:style>
+          <a:lnRef idx="1">
+            <a:schemeClr val="accent1"/>
+          </a:lnRef>
+          <a:fillRef idx="3">
+            <a:schemeClr val="accent1"/>
+          </a:fillRef>
+          <a:effectRef idx="2">
+            <a:schemeClr val="accent1"/>
+          </a:effectRef>
+          <a:fontRef idx="minor">
+            <a:schemeClr val="lt1"/>
+          </a:fontRef>
+        </p:style>
+        <p:txBody>
+          <a:bodyPr rtlCol="0" anchor="ctr"/>
+          <a:lstStyle/>
+          <a:p>
+            <a:pPr algn="ctr"/>
+          </a:p>
+        </p:txBody>
+      </p:sp>
+      <p:sp>
+        <p:nvSpPr>
+          <p:cNvPr id="35" name="TextBox 34"/>
+          <p:cNvSpPr txBox="1"/>
+          <p:nvPr/>
+        </p:nvSpPr>
+        <p:spPr>
+          <a:xfrm>
+            <a:off x="9372600" y="5715000"/>
+            <a:ext cx="2148840" cy="274320"/>
+          </a:xfrm>
+          <a:prstGeom prst="rect">
+            <a:avLst/>
+          </a:prstGeom>
+          <a:noFill/>
+        </p:spPr>
+        <p:txBody>
+          <a:bodyPr wrap="square" lIns="0" rIns="0" tIns="0" bIns="0" anchor="ctr">
+            <a:spAutoFit/>
+          </a:bodyPr>
+          <a:lstStyle/>
+          <a:p>
+            <a:pPr algn="l">
+              <a:lnSpc>
+                <a:spcPct val="130000"/>
+              </a:lnSpc>
+            </a:pPr>
+            <a:r>
               <a:rPr sz="1150" b="0" i="0">
                 <a:solidFill>
+                  <a:srgbClr val="1F2937"/>
+                </a:solidFill>
+                <a:latin typeface="Calibri"/>
+              </a:rPr>
+              <a:t>1 時間に 約1回</a:t>
+            </a:r>
+          </a:p>
+        </p:txBody>
+      </p:sp>
+      <p:sp>
+        <p:nvSpPr>
+          <p:cNvPr id="36" name="TextBox 35"/>
+          <p:cNvSpPr txBox="1"/>
+          <p:nvPr/>
+        </p:nvSpPr>
+        <p:spPr>
+          <a:xfrm>
+            <a:off x="868680" y="6053328"/>
+            <a:ext cx="2788920" cy="274320"/>
+          </a:xfrm>
+          <a:prstGeom prst="rect">
+            <a:avLst/>
+          </a:prstGeom>
+          <a:noFill/>
+        </p:spPr>
+        <p:txBody>
+          <a:bodyPr wrap="square" lIns="0" rIns="0" tIns="0" bIns="0" anchor="ctr">
+            <a:spAutoFit/>
+          </a:bodyPr>
+          <a:lstStyle/>
+          <a:p>
+            <a:pPr algn="l">
+              <a:lnSpc>
+                <a:spcPct val="130000"/>
+              </a:lnSpc>
+            </a:pPr>
+            <a:r>
+              <a:rPr sz="1100" b="0" i="0">
+                <a:solidFill>
                   <a:srgbClr val="5B6472"/>
                 </a:solidFill>
                 <a:latin typeface="Calibri"/>
               </a:rPr>
-              <a:t>必要なもの全部入りの zip を配布開始。
-展開して start.ps1 を実行するだけ。
-難しい準備は一切不要になりました。</a:t>
-            </a:r>
-          </a:p>
-        </p:txBody>
-      </p:sp>
-      <p:sp>
-        <p:nvSpPr>
-          <p:cNvPr id="25" name="TextBox 24"/>
-          <p:cNvSpPr txBox="1"/>
-          <p:nvPr/>
-        </p:nvSpPr>
-        <p:spPr>
-          <a:xfrm>
-            <a:off x="548640" y="6172200"/>
-            <a:ext cx="11064240" cy="365760"/>
-          </a:xfrm>
-          <a:prstGeom prst="rect">
-            <a:avLst/>
-          </a:prstGeom>
-          <a:noFill/>
-        </p:spPr>
-        <p:txBody>
-          <a:bodyPr wrap="square" lIns="0" rIns="0" tIns="0" bIns="0" anchor="t">
-            <a:spAutoFit/>
-          </a:bodyPr>
-          <a:lstStyle/>
-          <a:p>
-            <a:pPr algn="ctr">
-              <a:lnSpc>
-                <a:spcPct val="130000"/>
-              </a:lnSpc>
-            </a:pPr>
-            <a:r>
-              <a:rPr sz="1200" b="1" i="0">
+              <a:t>ある日の 13 時台</a:t>
+            </a:r>
+          </a:p>
+        </p:txBody>
+      </p:sp>
+      <p:sp>
+        <p:nvSpPr>
+          <p:cNvPr id="37" name="Rounded Rectangle 36"/>
+          <p:cNvSpPr/>
+          <p:nvPr/>
+        </p:nvSpPr>
+        <p:spPr>
+          <a:xfrm>
+            <a:off x="3749039" y="6089904"/>
+            <a:ext cx="5486400" cy="201168"/>
+          </a:xfrm>
+          <a:prstGeom prst="roundRect">
+            <a:avLst/>
+          </a:prstGeom>
+          <a:solidFill>
+            <a:srgbClr val="FFFFFF"/>
+          </a:solidFill>
+          <a:ln>
+            <a:solidFill>
+              <a:srgbClr val="DDE3EE"/>
+            </a:solidFill>
+          </a:ln>
+          <a:effectLst/>
+        </p:spPr>
+        <p:style>
+          <a:lnRef idx="1">
+            <a:schemeClr val="accent1"/>
+          </a:lnRef>
+          <a:fillRef idx="3">
+            <a:schemeClr val="accent1"/>
+          </a:fillRef>
+          <a:effectRef idx="2">
+            <a:schemeClr val="accent1"/>
+          </a:effectRef>
+          <a:fontRef idx="minor">
+            <a:schemeClr val="lt1"/>
+          </a:fontRef>
+        </p:style>
+        <p:txBody>
+          <a:bodyPr rtlCol="0" anchor="ctr"/>
+          <a:lstStyle/>
+          <a:p>
+            <a:pPr algn="ctr"/>
+          </a:p>
+        </p:txBody>
+      </p:sp>
+      <p:sp>
+        <p:nvSpPr>
+          <p:cNvPr id="38" name="Rounded Rectangle 37"/>
+          <p:cNvSpPr/>
+          <p:nvPr/>
+        </p:nvSpPr>
+        <p:spPr>
+          <a:xfrm>
+            <a:off x="3749039" y="6089904"/>
+            <a:ext cx="5486400" cy="201168"/>
+          </a:xfrm>
+          <a:prstGeom prst="roundRect">
+            <a:avLst/>
+          </a:prstGeom>
+          <a:solidFill>
+            <a:srgbClr val="2563EB"/>
+          </a:solidFill>
+          <a:ln>
+            <a:noFill/>
+          </a:ln>
+          <a:effectLst/>
+        </p:spPr>
+        <p:style>
+          <a:lnRef idx="1">
+            <a:schemeClr val="accent1"/>
+          </a:lnRef>
+          <a:fillRef idx="3">
+            <a:schemeClr val="accent1"/>
+          </a:fillRef>
+          <a:effectRef idx="2">
+            <a:schemeClr val="accent1"/>
+          </a:effectRef>
+          <a:fontRef idx="minor">
+            <a:schemeClr val="lt1"/>
+          </a:fontRef>
+        </p:style>
+        <p:txBody>
+          <a:bodyPr rtlCol="0" anchor="ctr"/>
+          <a:lstStyle/>
+          <a:p>
+            <a:pPr algn="ctr"/>
+          </a:p>
+        </p:txBody>
+      </p:sp>
+      <p:sp>
+        <p:nvSpPr>
+          <p:cNvPr id="39" name="TextBox 38"/>
+          <p:cNvSpPr txBox="1"/>
+          <p:nvPr/>
+        </p:nvSpPr>
+        <p:spPr>
+          <a:xfrm>
+            <a:off x="9372600" y="6053328"/>
+            <a:ext cx="2148840" cy="274320"/>
+          </a:xfrm>
+          <a:prstGeom prst="rect">
+            <a:avLst/>
+          </a:prstGeom>
+          <a:noFill/>
+        </p:spPr>
+        <p:txBody>
+          <a:bodyPr wrap="square" lIns="0" rIns="0" tIns="0" bIns="0" anchor="ctr">
+            <a:spAutoFit/>
+          </a:bodyPr>
+          <a:lstStyle/>
+          <a:p>
+            <a:pPr algn="l">
+              <a:lnSpc>
+                <a:spcPct val="130000"/>
+              </a:lnSpc>
+            </a:pPr>
+            <a:r>
+              <a:rPr sz="1150" b="1" i="0">
                 <a:solidFill>
                   <a:srgbClr val="1D4ED8"/>
                 </a:solidFill>
                 <a:latin typeface="Calibri"/>
               </a:rPr>
-              <a:t>最新版 v0.1.1 を GitHub の Releases で公開中</a:t>
-            </a:r>
-          </a:p>
-        </p:txBody>
-      </p:sp>
-      <p:sp>
-        <p:nvSpPr>
-          <p:cNvPr id="26" name="TextBox 25"/>
-          <p:cNvSpPr txBox="1"/>
-          <p:nvPr/>
-        </p:nvSpPr>
-        <p:spPr>
-          <a:xfrm>
-            <a:off x="11247120" y="6492240"/>
+              <a:t>1 時間に 110回 (約117倍)</a:t>
+            </a:r>
+          </a:p>
+        </p:txBody>
+      </p:sp>
+      <p:sp>
+        <p:nvSpPr>
+          <p:cNvPr id="40" name="TextBox 39"/>
+          <p:cNvSpPr txBox="1"/>
+          <p:nvPr/>
+        </p:nvSpPr>
+        <p:spPr>
+          <a:xfrm>
+            <a:off x="10972800" y="6446520"/>
             <a:ext cx="914400" cy="274320"/>
           </a:xfrm>
           <a:prstGeom prst="rect">
@@ -4665,7 +5277,7 @@
         </p:nvSpPr>
         <p:spPr>
           <a:xfrm>
-            <a:off x="11247120" y="6492240"/>
+            <a:off x="10972800" y="6446520"/>
             <a:ext cx="914400" cy="274320"/>
           </a:xfrm>
           <a:prstGeom prst="rect">
@@ -4792,7 +5404,7 @@
                 </a:solidFill>
                 <a:latin typeface="Calibri"/>
               </a:rPr>
-              <a:t>09  規模感</a:t>
+              <a:t>成果</a:t>
             </a:r>
           </a:p>
         </p:txBody>
@@ -4831,7 +5443,7 @@
                 </a:solidFill>
                 <a:latin typeface="Cambria"/>
               </a:rPr>
-              <a:t>数字で見ると</a:t>
+              <a:t>まとめ — 開発したもの</a:t>
             </a:r>
           </a:p>
         </p:txBody>
@@ -4844,8 +5456,8 @@
         </p:nvSpPr>
         <p:spPr>
           <a:xfrm>
-            <a:off x="548640" y="2194560"/>
-            <a:ext cx="2697480" cy="3657600"/>
+            <a:off x="548640" y="1783080"/>
+            <a:ext cx="2697480" cy="3291840"/>
           </a:xfrm>
           <a:prstGeom prst="roundRect">
             <a:avLst/>
@@ -4890,8 +5502,8 @@
         </p:nvSpPr>
         <p:spPr>
           <a:xfrm>
-            <a:off x="548640" y="2194560"/>
-            <a:ext cx="73152" cy="3657600"/>
+            <a:off x="548640" y="1783080"/>
+            <a:ext cx="73152" cy="3291840"/>
           </a:xfrm>
           <a:prstGeom prst="rect">
             <a:avLst/>
@@ -4934,8 +5546,8 @@
         </p:nvSpPr>
         <p:spPr>
           <a:xfrm>
-            <a:off x="713232" y="2697480"/>
-            <a:ext cx="2368296" cy="1371600"/>
+            <a:off x="713232" y="2194560"/>
+            <a:ext cx="2368296" cy="1005840"/>
           </a:xfrm>
           <a:prstGeom prst="rect">
             <a:avLst/>
@@ -4954,13 +5566,13 @@
               </a:lnSpc>
             </a:pPr>
             <a:r>
-              <a:rPr sz="4400" b="1" i="0">
+              <a:rPr sz="4000" b="1" i="0">
                 <a:solidFill>
                   <a:srgbClr val="1D4ED8"/>
                 </a:solidFill>
                 <a:latin typeface="Cambria"/>
               </a:rPr>
-              <a:t>約5,000</a:t>
+              <a:t>新文法</a:t>
             </a:r>
           </a:p>
         </p:txBody>
@@ -4973,7 +5585,7 @@
         </p:nvSpPr>
         <p:spPr>
           <a:xfrm>
-            <a:off x="548640" y="4023360"/>
+            <a:off x="548640" y="3200400"/>
             <a:ext cx="2697480" cy="457200"/>
           </a:xfrm>
           <a:prstGeom prst="rect">
@@ -4993,13 +5605,13 @@
               </a:lnSpc>
             </a:pPr>
             <a:r>
-              <a:rPr sz="2400" b="0" i="0">
+              <a:rPr sz="2000" b="0" i="0">
                 <a:solidFill>
                   <a:srgbClr val="1F2937"/>
                 </a:solidFill>
                 <a:latin typeface="Cambria"/>
               </a:rPr>
-              <a:t>本</a:t>
+              <a:t>lookup:</a:t>
             </a:r>
           </a:p>
         </p:txBody>
@@ -5012,8 +5624,8 @@
         </p:nvSpPr>
         <p:spPr>
           <a:xfrm>
-            <a:off x="731520" y="4892040"/>
-            <a:ext cx="2331720" cy="822960"/>
+            <a:off x="731520" y="3840480"/>
+            <a:ext cx="2331720" cy="1005840"/>
           </a:xfrm>
           <a:prstGeom prst="rect">
             <a:avLst/>
@@ -5032,13 +5644,14 @@
               </a:lnSpc>
             </a:pPr>
             <a:r>
-              <a:rPr sz="1400" b="0" i="0">
+              <a:rPr sz="1200" b="0" i="0">
                 <a:solidFill>
                   <a:srgbClr val="5B6472"/>
                 </a:solidFill>
                 <a:latin typeface="Calibri"/>
               </a:rPr>
-              <a:t>検知ルールを同梱</a:t>
+              <a:t>エンジン本体 (Rust) を改造し
+リスト照合機能を追加</a:t>
             </a:r>
           </a:p>
         </p:txBody>
@@ -5051,8 +5664,8 @@
         </p:nvSpPr>
         <p:spPr>
           <a:xfrm>
-            <a:off x="3429000" y="2194560"/>
-            <a:ext cx="2697480" cy="3657600"/>
+            <a:off x="3429000" y="1783080"/>
+            <a:ext cx="2697480" cy="3291840"/>
           </a:xfrm>
           <a:prstGeom prst="roundRect">
             <a:avLst/>
@@ -5097,8 +5710,8 @@
         </p:nvSpPr>
         <p:spPr>
           <a:xfrm>
-            <a:off x="3429000" y="2194560"/>
-            <a:ext cx="73152" cy="3657600"/>
+            <a:off x="3429000" y="1783080"/>
+            <a:ext cx="73152" cy="3291840"/>
           </a:xfrm>
           <a:prstGeom prst="rect">
             <a:avLst/>
@@ -5141,8 +5754,8 @@
         </p:nvSpPr>
         <p:spPr>
           <a:xfrm>
-            <a:off x="3593592" y="2697480"/>
-            <a:ext cx="2368296" cy="1371600"/>
+            <a:off x="3593592" y="2194560"/>
+            <a:ext cx="2368296" cy="1005840"/>
           </a:xfrm>
           <a:prstGeom prst="rect">
             <a:avLst/>
@@ -5161,13 +5774,13 @@
               </a:lnSpc>
             </a:pPr>
             <a:r>
-              <a:rPr sz="4400" b="1" i="0">
+              <a:rPr sz="4000" b="1" i="0">
                 <a:solidFill>
                   <a:srgbClr val="EA580C"/>
                 </a:solidFill>
                 <a:latin typeface="Cambria"/>
               </a:rPr>
-              <a:t>約8万</a:t>
+              <a:t>13</a:t>
             </a:r>
           </a:p>
         </p:txBody>
@@ -5180,7 +5793,7 @@
         </p:nvSpPr>
         <p:spPr>
           <a:xfrm>
-            <a:off x="3429000" y="4023360"/>
+            <a:off x="3429000" y="3200400"/>
             <a:ext cx="2697480" cy="457200"/>
           </a:xfrm>
           <a:prstGeom prst="rect">
@@ -5200,13 +5813,13 @@
               </a:lnSpc>
             </a:pPr>
             <a:r>
-              <a:rPr sz="2400" b="0" i="0">
+              <a:rPr sz="2000" b="0" i="0">
                 <a:solidFill>
                   <a:srgbClr val="1F2937"/>
                 </a:solidFill>
                 <a:latin typeface="Cambria"/>
               </a:rPr>
-              <a:t>件</a:t>
+              <a:t>本</a:t>
             </a:r>
           </a:p>
         </p:txBody>
@@ -5219,8 +5832,8 @@
         </p:nvSpPr>
         <p:spPr>
           <a:xfrm>
-            <a:off x="3611880" y="4892040"/>
-            <a:ext cx="2331720" cy="822960"/>
+            <a:off x="3611880" y="3840480"/>
+            <a:ext cx="2331720" cy="1005840"/>
           </a:xfrm>
           <a:prstGeom prst="rect">
             <a:avLst/>
@@ -5239,13 +5852,14 @@
               </a:lnSpc>
             </a:pPr>
             <a:r>
-              <a:rPr sz="1400" b="0" i="0">
+              <a:rPr sz="1200" b="0" i="0">
                 <a:solidFill>
                   <a:srgbClr val="5B6472"/>
                 </a:solidFill>
                 <a:latin typeface="Calibri"/>
               </a:rPr>
-              <a:t>既知の悪いものリスト</a:t>
+              <a:t>攻撃を見抜く検知ルールを
+自作 (痕跡隠蔽の検知など)</a:t>
             </a:r>
           </a:p>
         </p:txBody>
@@ -5258,8 +5872,8 @@
         </p:nvSpPr>
         <p:spPr>
           <a:xfrm>
-            <a:off x="6309360" y="2194560"/>
-            <a:ext cx="2697480" cy="3657600"/>
+            <a:off x="6309360" y="1783080"/>
+            <a:ext cx="2697480" cy="3291840"/>
           </a:xfrm>
           <a:prstGeom prst="roundRect">
             <a:avLst/>
@@ -5304,8 +5918,8 @@
         </p:nvSpPr>
         <p:spPr>
           <a:xfrm>
-            <a:off x="6309360" y="2194560"/>
-            <a:ext cx="73152" cy="3657600"/>
+            <a:off x="6309360" y="1783080"/>
+            <a:ext cx="73152" cy="3291840"/>
           </a:xfrm>
           <a:prstGeom prst="rect">
             <a:avLst/>
@@ -5348,8 +5962,8 @@
         </p:nvSpPr>
         <p:spPr>
           <a:xfrm>
-            <a:off x="6473952" y="2697480"/>
-            <a:ext cx="2368296" cy="1371600"/>
+            <a:off x="6473952" y="2194560"/>
+            <a:ext cx="2368296" cy="1005840"/>
           </a:xfrm>
           <a:prstGeom prst="rect">
             <a:avLst/>
@@ -5368,13 +5982,13 @@
               </a:lnSpc>
             </a:pPr>
             <a:r>
-              <a:rPr sz="4400" b="1" i="0">
+              <a:rPr sz="4000" b="1" i="0">
                 <a:solidFill>
                   <a:srgbClr val="CA8A04"/>
                 </a:solidFill>
                 <a:latin typeface="Cambria"/>
               </a:rPr>
-              <a:t>30+</a:t>
+              <a:t>約8,000</a:t>
             </a:r>
           </a:p>
         </p:txBody>
@@ -5387,7 +6001,7 @@
         </p:nvSpPr>
         <p:spPr>
           <a:xfrm>
-            <a:off x="6309360" y="4023360"/>
+            <a:off x="6309360" y="3200400"/>
             <a:ext cx="2697480" cy="457200"/>
           </a:xfrm>
           <a:prstGeom prst="rect">
@@ -5407,13 +6021,13 @@
               </a:lnSpc>
             </a:pPr>
             <a:r>
-              <a:rPr sz="2400" b="0" i="0">
+              <a:rPr sz="2000" b="0" i="0">
                 <a:solidFill>
                   <a:srgbClr val="1F2937"/>
                 </a:solidFill>
                 <a:latin typeface="Cambria"/>
               </a:rPr>
-              <a:t>種類</a:t>
+              <a:t>行</a:t>
             </a:r>
           </a:p>
         </p:txBody>
@@ -5426,8 +6040,8 @@
         </p:nvSpPr>
         <p:spPr>
           <a:xfrm>
-            <a:off x="6492240" y="4892040"/>
-            <a:ext cx="2331720" cy="822960"/>
+            <a:off x="6492240" y="3840480"/>
+            <a:ext cx="2331720" cy="1005840"/>
           </a:xfrm>
           <a:prstGeom prst="rect">
             <a:avLst/>
@@ -5446,13 +6060,14 @@
               </a:lnSpc>
             </a:pPr>
             <a:r>
-              <a:rPr sz="1400" b="0" i="0">
+              <a:rPr sz="1200" b="0" i="0">
                 <a:solidFill>
                   <a:srgbClr val="5B6472"/>
                 </a:solidFill>
                 <a:latin typeface="Calibri"/>
               </a:rPr>
-              <a:t>対応する攻撃の手口</a:t>
+              <a:t>結果を読み解く GUI を
+ゼロから開発</a:t>
             </a:r>
           </a:p>
         </p:txBody>
@@ -5465,8 +6080,8 @@
         </p:nvSpPr>
         <p:spPr>
           <a:xfrm>
-            <a:off x="9189720" y="2194560"/>
-            <a:ext cx="2697480" cy="3657600"/>
+            <a:off x="9189720" y="1783080"/>
+            <a:ext cx="2697480" cy="3291840"/>
           </a:xfrm>
           <a:prstGeom prst="roundRect">
             <a:avLst/>
@@ -5511,8 +6126,8 @@
         </p:nvSpPr>
         <p:spPr>
           <a:xfrm>
-            <a:off x="9189720" y="2194560"/>
-            <a:ext cx="73152" cy="3657600"/>
+            <a:off x="9189720" y="1783080"/>
+            <a:ext cx="73152" cy="3291840"/>
           </a:xfrm>
           <a:prstGeom prst="rect">
             <a:avLst/>
@@ -5555,8 +6170,8 @@
         </p:nvSpPr>
         <p:spPr>
           <a:xfrm>
-            <a:off x="9354312" y="2697480"/>
-            <a:ext cx="2368296" cy="1371600"/>
+            <a:off x="9354312" y="2194560"/>
+            <a:ext cx="2368296" cy="1005840"/>
           </a:xfrm>
           <a:prstGeom prst="rect">
             <a:avLst/>
@@ -5575,13 +6190,13 @@
               </a:lnSpc>
             </a:pPr>
             <a:r>
-              <a:rPr sz="4400" b="1" i="0">
+              <a:rPr sz="4000" b="1" i="0">
                 <a:solidFill>
                   <a:srgbClr val="16A34A"/>
                 </a:solidFill>
                 <a:latin typeface="Cambria"/>
               </a:rPr>
-              <a:t>0</a:t>
+              <a:t>約8万</a:t>
             </a:r>
           </a:p>
         </p:txBody>
@@ -5594,7 +6209,7 @@
         </p:nvSpPr>
         <p:spPr>
           <a:xfrm>
-            <a:off x="9189720" y="4023360"/>
+            <a:off x="9189720" y="3200400"/>
             <a:ext cx="2697480" cy="457200"/>
           </a:xfrm>
           <a:prstGeom prst="rect">
@@ -5614,13 +6229,13 @@
               </a:lnSpc>
             </a:pPr>
             <a:r>
-              <a:rPr sz="2400" b="0" i="0">
+              <a:rPr sz="2000" b="0" i="0">
                 <a:solidFill>
                   <a:srgbClr val="1F2937"/>
                 </a:solidFill>
                 <a:latin typeface="Cambria"/>
               </a:rPr>
-              <a:t>個</a:t>
+              <a:t>件</a:t>
             </a:r>
           </a:p>
         </p:txBody>
@@ -5633,8 +6248,8 @@
         </p:nvSpPr>
         <p:spPr>
           <a:xfrm>
-            <a:off x="9372600" y="4892040"/>
-            <a:ext cx="2331720" cy="822960"/>
+            <a:off x="9372600" y="3840480"/>
+            <a:ext cx="2331720" cy="1005840"/>
           </a:xfrm>
           <a:prstGeom prst="rect">
             <a:avLst/>
@@ -5653,65 +6268,112 @@
               </a:lnSpc>
             </a:pPr>
             <a:r>
+              <a:rPr sz="1200" b="0" i="0">
+                <a:solidFill>
+                  <a:srgbClr val="5B6472"/>
+                </a:solidFill>
+                <a:latin typeface="Calibri"/>
+              </a:rPr>
+              <a:t>「悪いものリスト」を
+自動で取り込んで照合</a:t>
+            </a:r>
+          </a:p>
+        </p:txBody>
+      </p:sp>
+      <p:sp>
+        <p:nvSpPr>
+          <p:cNvPr id="25" name="Rounded Rectangle 24"/>
+          <p:cNvSpPr/>
+          <p:nvPr/>
+        </p:nvSpPr>
+        <p:spPr>
+          <a:xfrm>
+            <a:off x="548640" y="5440680"/>
+            <a:ext cx="11064240" cy="1005840"/>
+          </a:xfrm>
+          <a:prstGeom prst="roundRect">
+            <a:avLst/>
+          </a:prstGeom>
+          <a:solidFill>
+            <a:srgbClr val="E8F0FE"/>
+          </a:solidFill>
+          <a:ln w="9525">
+            <a:solidFill>
+              <a:srgbClr val="E8F0FE"/>
+            </a:solidFill>
+          </a:ln>
+          <a:effectLst/>
+        </p:spPr>
+        <p:style>
+          <a:lnRef idx="1">
+            <a:schemeClr val="accent1"/>
+          </a:lnRef>
+          <a:fillRef idx="3">
+            <a:schemeClr val="accent1"/>
+          </a:fillRef>
+          <a:effectRef idx="2">
+            <a:schemeClr val="accent1"/>
+          </a:effectRef>
+          <a:fontRef idx="minor">
+            <a:schemeClr val="lt1"/>
+          </a:fontRef>
+        </p:style>
+        <p:txBody>
+          <a:bodyPr rtlCol="0" anchor="ctr"/>
+          <a:lstStyle/>
+          <a:p>
+            <a:pPr algn="ctr"/>
+          </a:p>
+        </p:txBody>
+      </p:sp>
+      <p:sp>
+        <p:nvSpPr>
+          <p:cNvPr id="26" name="TextBox 25"/>
+          <p:cNvSpPr txBox="1"/>
+          <p:nvPr/>
+        </p:nvSpPr>
+        <p:spPr>
+          <a:xfrm>
+            <a:off x="868680" y="5440680"/>
+            <a:ext cx="10515600" cy="1005840"/>
+          </a:xfrm>
+          <a:prstGeom prst="rect">
+            <a:avLst/>
+          </a:prstGeom>
+          <a:noFill/>
+        </p:spPr>
+        <p:txBody>
+          <a:bodyPr wrap="square" lIns="0" rIns="0" tIns="0" bIns="0" anchor="ctr">
+            <a:spAutoFit/>
+          </a:bodyPr>
+          <a:lstStyle/>
+          <a:p>
+            <a:pPr algn="l">
+              <a:lnSpc>
+                <a:spcPct val="130000"/>
+              </a:lnSpc>
+            </a:pPr>
+            <a:r>
               <a:rPr sz="1400" b="0" i="0">
                 <a:solidFill>
-                  <a:srgbClr val="5B6472"/>
+                  <a:srgbClr val="1F2937"/>
                 </a:solidFill>
                 <a:latin typeface="Calibri"/>
               </a:rPr>
-              <a:t>追加で必要なソフト</a:t>
-            </a:r>
-          </a:p>
-        </p:txBody>
-      </p:sp>
-      <p:sp>
-        <p:nvSpPr>
-          <p:cNvPr id="25" name="TextBox 24"/>
-          <p:cNvSpPr txBox="1"/>
-          <p:nvPr/>
-        </p:nvSpPr>
-        <p:spPr>
-          <a:xfrm>
-            <a:off x="548640" y="6217920"/>
-            <a:ext cx="10972800" cy="365760"/>
-          </a:xfrm>
-          <a:prstGeom prst="rect">
-            <a:avLst/>
-          </a:prstGeom>
-          <a:noFill/>
-        </p:spPr>
-        <p:txBody>
-          <a:bodyPr wrap="square" lIns="0" rIns="0" tIns="0" bIns="0" anchor="t">
-            <a:spAutoFit/>
-          </a:bodyPr>
-          <a:lstStyle/>
-          <a:p>
-            <a:pPr algn="ctr">
-              <a:lnSpc>
-                <a:spcPct val="130000"/>
-              </a:lnSpc>
-            </a:pPr>
-            <a:r>
-              <a:rPr sz="1300" b="0" i="1">
-                <a:solidFill>
-                  <a:srgbClr val="5B6472"/>
-                </a:solidFill>
-                <a:latin typeface="Calibri"/>
-              </a:rPr>
-              <a:t>個人で開発、すべて公開しています。</a:t>
-            </a:r>
-          </a:p>
-        </p:txBody>
-      </p:sp>
-      <p:sp>
-        <p:nvSpPr>
-          <p:cNvPr id="26" name="TextBox 25"/>
-          <p:cNvSpPr txBox="1"/>
-          <p:nvPr/>
-        </p:nvSpPr>
-        <p:spPr>
-          <a:xfrm>
-            <a:off x="11247120" y="6492240"/>
+              <a:t>🚀 今後:  時間の流れを追った相関分析 (「A の後に B が起きたら怪しい」) や、AI による検知ルールの自動生成へ。</a:t>
+            </a:r>
+          </a:p>
+        </p:txBody>
+      </p:sp>
+      <p:sp>
+        <p:nvSpPr>
+          <p:cNvPr id="27" name="TextBox 26"/>
+          <p:cNvSpPr txBox="1"/>
+          <p:nvPr/>
+        </p:nvSpPr>
+        <p:spPr>
+          <a:xfrm>
+            <a:off x="10972800" y="6446520"/>
             <a:ext cx="914400" cy="274320"/>
           </a:xfrm>
           <a:prstGeom prst="rect">
@@ -5962,7 +6624,7 @@
                 </a:solidFill>
                 <a:latin typeface="Calibri"/>
               </a:rPr>
-              <a:t>GitHub で公開中 — 今日から試せます</a:t>
+              <a:t>成果物はすべて GitHub で公開しています</a:t>
             </a:r>
           </a:p>
         </p:txBody>
@@ -6040,7 +6702,7 @@
                 </a:solidFill>
                 <a:latin typeface="Calibri"/>
               </a:rPr>
-              <a:t>Releases から zip をダウンロード → 展開 → start.ps1 を実行するだけ。</a:t>
+              <a:t>ソースコード・検知ルール・設計書・この資料まで、どなたでも使えます (OSS)。</a:t>
             </a:r>
           </a:p>
         </p:txBody>
@@ -6079,7 +6741,7 @@
                 </a:solidFill>
                 <a:latin typeface="Calibri"/>
               </a:rPr>
-              <a:t>どなたでも自由にお使いいただけます (OSS)</a:t>
+              <a:t>zip をダウンロード → 展開 → 実行、ですぐ試せます</a:t>
             </a:r>
           </a:p>
         </p:txBody>
@@ -6193,6 +6855,45 @@
         </p:nvSpPr>
         <p:spPr>
           <a:xfrm>
+            <a:off x="548640" y="411480"/>
+            <a:ext cx="2743200" cy="411480"/>
+          </a:xfrm>
+          <a:prstGeom prst="rect">
+            <a:avLst/>
+          </a:prstGeom>
+          <a:noFill/>
+        </p:spPr>
+        <p:txBody>
+          <a:bodyPr wrap="square" lIns="0" rIns="0" tIns="0" bIns="0" anchor="t">
+            <a:spAutoFit/>
+          </a:bodyPr>
+          <a:lstStyle/>
+          <a:p>
+            <a:pPr algn="l">
+              <a:lnSpc>
+                <a:spcPct val="130000"/>
+              </a:lnSpc>
+            </a:pPr>
+            <a:r>
+              <a:rPr sz="1500" b="1" i="0">
+                <a:solidFill>
+                  <a:srgbClr val="CADCFC"/>
+                </a:solidFill>
+                <a:latin typeface="Calibri"/>
+              </a:rPr>
+              <a:t>背景</a:t>
+            </a:r>
+          </a:p>
+        </p:txBody>
+      </p:sp>
+      <p:sp>
+        <p:nvSpPr>
+          <p:cNvPr id="4" name="TextBox 3"/>
+          <p:cNvSpPr txBox="1"/>
+          <p:nvPr/>
+        </p:nvSpPr>
+        <p:spPr>
+          <a:xfrm>
             <a:off x="548640" y="1188720"/>
             <a:ext cx="10972800" cy="731520"/>
           </a:xfrm>
@@ -6226,7 +6927,7 @@
       </p:sp>
       <p:sp>
         <p:nvSpPr>
-          <p:cNvPr id="4" name="TextBox 3"/>
+          <p:cNvPr id="5" name="TextBox 4"/>
           <p:cNvSpPr txBox="1"/>
           <p:nvPr/>
         </p:nvSpPr>
@@ -6265,7 +6966,7 @@
       </p:sp>
       <p:sp>
         <p:nvSpPr>
-          <p:cNvPr id="5" name="TextBox 4"/>
+          <p:cNvPr id="6" name="TextBox 5"/>
           <p:cNvSpPr txBox="1"/>
           <p:nvPr/>
         </p:nvSpPr>
@@ -6304,7 +7005,7 @@
       </p:sp>
       <p:sp>
         <p:nvSpPr>
-          <p:cNvPr id="6" name="Rounded Rectangle 5"/>
+          <p:cNvPr id="7" name="Rounded Rectangle 6"/>
           <p:cNvSpPr/>
           <p:nvPr/>
         </p:nvSpPr>
@@ -6350,7 +7051,7 @@
       </p:sp>
       <p:sp>
         <p:nvSpPr>
-          <p:cNvPr id="7" name="TextBox 6"/>
+          <p:cNvPr id="8" name="TextBox 7"/>
           <p:cNvSpPr txBox="1"/>
           <p:nvPr/>
         </p:nvSpPr>
@@ -6389,7 +7090,7 @@
       </p:sp>
       <p:sp>
         <p:nvSpPr>
-          <p:cNvPr id="8" name="TextBox 7"/>
+          <p:cNvPr id="9" name="TextBox 8"/>
           <p:cNvSpPr txBox="1"/>
           <p:nvPr/>
         </p:nvSpPr>
@@ -6428,7 +7129,7 @@
       </p:sp>
       <p:sp>
         <p:nvSpPr>
-          <p:cNvPr id="9" name="Rounded Rectangle 8"/>
+          <p:cNvPr id="10" name="Rounded Rectangle 9"/>
           <p:cNvSpPr/>
           <p:nvPr/>
         </p:nvSpPr>
@@ -6474,7 +7175,7 @@
       </p:sp>
       <p:sp>
         <p:nvSpPr>
-          <p:cNvPr id="10" name="TextBox 9"/>
+          <p:cNvPr id="11" name="TextBox 10"/>
           <p:cNvSpPr txBox="1"/>
           <p:nvPr/>
         </p:nvSpPr>
@@ -6513,7 +7214,7 @@
       </p:sp>
       <p:sp>
         <p:nvSpPr>
-          <p:cNvPr id="11" name="TextBox 10"/>
+          <p:cNvPr id="12" name="TextBox 11"/>
           <p:cNvSpPr txBox="1"/>
           <p:nvPr/>
         </p:nvSpPr>
@@ -6552,7 +7253,7 @@
       </p:sp>
       <p:sp>
         <p:nvSpPr>
-          <p:cNvPr id="12" name="Rounded Rectangle 11"/>
+          <p:cNvPr id="13" name="Rounded Rectangle 12"/>
           <p:cNvSpPr/>
           <p:nvPr/>
         </p:nvSpPr>
@@ -6598,7 +7299,7 @@
       </p:sp>
       <p:sp>
         <p:nvSpPr>
-          <p:cNvPr id="13" name="TextBox 12"/>
+          <p:cNvPr id="14" name="TextBox 13"/>
           <p:cNvSpPr txBox="1"/>
           <p:nvPr/>
         </p:nvSpPr>
@@ -6637,7 +7338,7 @@
       </p:sp>
       <p:sp>
         <p:nvSpPr>
-          <p:cNvPr id="14" name="TextBox 13"/>
+          <p:cNvPr id="15" name="TextBox 14"/>
           <p:cNvSpPr txBox="1"/>
           <p:nvPr/>
         </p:nvSpPr>
@@ -6676,7 +7377,7 @@
       </p:sp>
       <p:sp>
         <p:nvSpPr>
-          <p:cNvPr id="15" name="TextBox 14"/>
+          <p:cNvPr id="16" name="TextBox 15"/>
           <p:cNvSpPr txBox="1"/>
           <p:nvPr/>
         </p:nvSpPr>
@@ -6715,13 +7416,13 @@
       </p:sp>
       <p:sp>
         <p:nvSpPr>
-          <p:cNvPr id="16" name="TextBox 15"/>
-          <p:cNvSpPr txBox="1"/>
-          <p:nvPr/>
-        </p:nvSpPr>
-        <p:spPr>
-          <a:xfrm>
-            <a:off x="11247120" y="6492240"/>
+          <p:cNvPr id="17" name="TextBox 16"/>
+          <p:cNvSpPr txBox="1"/>
+          <p:nvPr/>
+        </p:nvSpPr>
+        <p:spPr>
+          <a:xfrm>
+            <a:off x="10972800" y="6446520"/>
             <a:ext cx="914400" cy="274320"/>
           </a:xfrm>
           <a:prstGeom prst="rect">
@@ -6848,7 +7549,7 @@
                 </a:solidFill>
                 <a:latin typeface="Calibri"/>
               </a:rPr>
-              <a:t>01  でも...</a:t>
+              <a:t>背景</a:t>
             </a:r>
           </a:p>
         </p:txBody>
@@ -7699,7 +8400,7 @@
         </p:nvSpPr>
         <p:spPr>
           <a:xfrm>
-            <a:off x="11247120" y="6492240"/>
+            <a:off x="10972800" y="6446520"/>
             <a:ext cx="914400" cy="274320"/>
           </a:xfrm>
           <a:prstGeom prst="rect">
@@ -7826,7 +8527,7 @@
                 </a:solidFill>
                 <a:latin typeface="Calibri"/>
               </a:rPr>
-              <a:t>02  hayabusa-plus とは</a:t>
+              <a:t>既存技術</a:t>
             </a:r>
           </a:p>
         </p:txBody>
@@ -7865,21 +8566,60 @@
                 </a:solidFill>
                 <a:latin typeface="Cambria"/>
               </a:rPr>
-              <a:t>それを、ブラウザで見える形にしました</a:t>
-            </a:r>
-          </a:p>
-        </p:txBody>
-      </p:sp>
-      <p:sp>
-        <p:nvSpPr>
-          <p:cNvPr id="5" name="Rounded Rectangle 4"/>
+              <a:t>土台にした既存ツール: Hayabusa</a:t>
+            </a:r>
+          </a:p>
+        </p:txBody>
+      </p:sp>
+      <p:sp>
+        <p:nvSpPr>
+          <p:cNvPr id="5" name="TextBox 4"/>
+          <p:cNvSpPr txBox="1"/>
+          <p:nvPr/>
+        </p:nvSpPr>
+        <p:spPr>
+          <a:xfrm>
+            <a:off x="548640" y="1554480"/>
+            <a:ext cx="11064240" cy="411480"/>
+          </a:xfrm>
+          <a:prstGeom prst="rect">
+            <a:avLst/>
+          </a:prstGeom>
+          <a:noFill/>
+        </p:spPr>
+        <p:txBody>
+          <a:bodyPr wrap="square" lIns="0" rIns="0" tIns="0" bIns="0" anchor="t">
+            <a:spAutoFit/>
+          </a:bodyPr>
+          <a:lstStyle/>
+          <a:p>
+            <a:pPr algn="l">
+              <a:lnSpc>
+                <a:spcPct val="130000"/>
+              </a:lnSpc>
+            </a:pPr>
+            <a:r>
+              <a:rPr sz="1500" b="0" i="1">
+                <a:solidFill>
+                  <a:srgbClr val="5B6472"/>
+                </a:solidFill>
+                <a:latin typeface="Calibri"/>
+              </a:rPr>
+              <a:t>日本のセキュリティチーム Yamato Security が公開している無料ツール (OSS)。</a:t>
+            </a:r>
+          </a:p>
+        </p:txBody>
+      </p:sp>
+      <p:sp>
+        <p:nvSpPr>
+          <p:cNvPr id="6" name="Rounded Rectangle 5"/>
           <p:cNvSpPr/>
           <p:nvPr/>
         </p:nvSpPr>
         <p:spPr>
           <a:xfrm>
-            <a:off x="548640" y="1691640"/>
-            <a:ext cx="4846320" cy="1417320"/>
+            <a:off x="548640" y="2103120"/>
+            <a:ext cx="5486400" cy="4023360"/>
           </a:xfrm>
           <a:prstGeom prst="roundRect">
             <a:avLst/>
@@ -7918,20 +8658,20 @@
       </p:sp>
       <p:sp>
         <p:nvSpPr>
-          <p:cNvPr id="6" name="Rectangle 5"/>
+          <p:cNvPr id="7" name="Rectangle 6"/>
           <p:cNvSpPr/>
           <p:nvPr/>
         </p:nvSpPr>
         <p:spPr>
           <a:xfrm>
-            <a:off x="548640" y="1691640"/>
-            <a:ext cx="73152" cy="1417320"/>
+            <a:off x="548640" y="2103120"/>
+            <a:ext cx="73152" cy="4023360"/>
           </a:xfrm>
           <a:prstGeom prst="rect">
             <a:avLst/>
           </a:prstGeom>
           <a:solidFill>
-            <a:srgbClr val="2563EB"/>
+            <a:srgbClr val="16A34A"/>
           </a:solidFill>
           <a:ln>
             <a:noFill/>
@@ -7962,14 +8702,14 @@
       </p:sp>
       <p:sp>
         <p:nvSpPr>
-          <p:cNvPr id="7" name="TextBox 6"/>
-          <p:cNvSpPr txBox="1"/>
-          <p:nvPr/>
-        </p:nvSpPr>
-        <p:spPr>
-          <a:xfrm>
-            <a:off x="777240" y="1856232"/>
-            <a:ext cx="731520" cy="640080"/>
+          <p:cNvPr id="8" name="TextBox 7"/>
+          <p:cNvSpPr txBox="1"/>
+          <p:nvPr/>
+        </p:nvSpPr>
+        <p:spPr>
+          <a:xfrm>
+            <a:off x="822960" y="2331720"/>
+            <a:ext cx="5029200" cy="411480"/>
           </a:xfrm>
           <a:prstGeom prst="rect">
             <a:avLst/>
@@ -7988,27 +8728,66 @@
               </a:lnSpc>
             </a:pPr>
             <a:r>
-              <a:rPr sz="2800" b="0" i="0">
-                <a:solidFill>
-                  <a:srgbClr val="2563EB"/>
+              <a:rPr sz="1700" b="1" i="0">
+                <a:solidFill>
+                  <a:srgbClr val="1F2937"/>
+                </a:solidFill>
+                <a:latin typeface="Cambria"/>
+              </a:rPr>
+              <a:t>✅ Hayabusa ができること</a:t>
+            </a:r>
+          </a:p>
+        </p:txBody>
+      </p:sp>
+      <p:sp>
+        <p:nvSpPr>
+          <p:cNvPr id="9" name="TextBox 8"/>
+          <p:cNvSpPr txBox="1"/>
+          <p:nvPr/>
+        </p:nvSpPr>
+        <p:spPr>
+          <a:xfrm>
+            <a:off x="822960" y="2926080"/>
+            <a:ext cx="4937760" cy="411480"/>
+          </a:xfrm>
+          <a:prstGeom prst="rect">
+            <a:avLst/>
+          </a:prstGeom>
+          <a:noFill/>
+        </p:spPr>
+        <p:txBody>
+          <a:bodyPr wrap="square" lIns="0" rIns="0" tIns="0" bIns="0" anchor="t">
+            <a:spAutoFit/>
+          </a:bodyPr>
+          <a:lstStyle/>
+          <a:p>
+            <a:pPr algn="l">
+              <a:lnSpc>
+                <a:spcPct val="130000"/>
+              </a:lnSpc>
+            </a:pPr>
+            <a:r>
+              <a:rPr sz="1300" b="0" i="0">
+                <a:solidFill>
+                  <a:srgbClr val="1F2937"/>
                 </a:solidFill>
                 <a:latin typeface="Calibri"/>
               </a:rPr>
-              <a:t>🖥️</a:t>
-            </a:r>
-          </a:p>
-        </p:txBody>
-      </p:sp>
-      <p:sp>
-        <p:nvSpPr>
-          <p:cNvPr id="8" name="TextBox 7"/>
-          <p:cNvSpPr txBox="1"/>
-          <p:nvPr/>
-        </p:nvSpPr>
-        <p:spPr>
-          <a:xfrm>
-            <a:off x="1554480" y="1856232"/>
-            <a:ext cx="3657600" cy="411480"/>
+              <a:t>• 世界中の研究者が作った「攻撃の特徴パターン」</a:t>
+            </a:r>
+          </a:p>
+        </p:txBody>
+      </p:sp>
+      <p:sp>
+        <p:nvSpPr>
+          <p:cNvPr id="10" name="TextBox 9"/>
+          <p:cNvSpPr txBox="1"/>
+          <p:nvPr/>
+        </p:nvSpPr>
+        <p:spPr>
+          <a:xfrm>
+            <a:off x="822960" y="3310128"/>
+            <a:ext cx="4937760" cy="365760"/>
           </a:xfrm>
           <a:prstGeom prst="rect">
             <a:avLst/>
@@ -8027,27 +8806,66 @@
               </a:lnSpc>
             </a:pPr>
             <a:r>
-              <a:rPr sz="1700" b="1" i="0">
+              <a:rPr sz="1150" b="0" i="0">
+                <a:solidFill>
+                  <a:srgbClr val="5B6472"/>
+                </a:solidFill>
+                <a:latin typeface="Calibri"/>
+              </a:rPr>
+              <a:t>   (Sigma ルール・約 5,000 本) と照合</a:t>
+            </a:r>
+          </a:p>
+        </p:txBody>
+      </p:sp>
+      <p:sp>
+        <p:nvSpPr>
+          <p:cNvPr id="11" name="TextBox 10"/>
+          <p:cNvSpPr txBox="1"/>
+          <p:nvPr/>
+        </p:nvSpPr>
+        <p:spPr>
+          <a:xfrm>
+            <a:off x="822960" y="3794760"/>
+            <a:ext cx="4937760" cy="411480"/>
+          </a:xfrm>
+          <a:prstGeom prst="rect">
+            <a:avLst/>
+          </a:prstGeom>
+          <a:noFill/>
+        </p:spPr>
+        <p:txBody>
+          <a:bodyPr wrap="square" lIns="0" rIns="0" tIns="0" bIns="0" anchor="t">
+            <a:spAutoFit/>
+          </a:bodyPr>
+          <a:lstStyle/>
+          <a:p>
+            <a:pPr algn="l">
+              <a:lnSpc>
+                <a:spcPct val="130000"/>
+              </a:lnSpc>
+            </a:pPr>
+            <a:r>
+              <a:rPr sz="1300" b="0" i="0">
                 <a:solidFill>
                   <a:srgbClr val="1F2937"/>
                 </a:solidFill>
-                <a:latin typeface="Cambria"/>
-              </a:rPr>
-              <a:t>ブラウザだけで完結</a:t>
-            </a:r>
-          </a:p>
-        </p:txBody>
-      </p:sp>
-      <p:sp>
-        <p:nvSpPr>
-          <p:cNvPr id="9" name="TextBox 8"/>
-          <p:cNvSpPr txBox="1"/>
-          <p:nvPr/>
-        </p:nvSpPr>
-        <p:spPr>
-          <a:xfrm>
-            <a:off x="1554480" y="2286000"/>
-            <a:ext cx="3657600" cy="731520"/>
+                <a:latin typeface="Calibri"/>
+              </a:rPr>
+              <a:t>• 数万件のログを数十秒〜数分で全チェック</a:t>
+            </a:r>
+          </a:p>
+        </p:txBody>
+      </p:sp>
+      <p:sp>
+        <p:nvSpPr>
+          <p:cNvPr id="12" name="TextBox 11"/>
+          <p:cNvSpPr txBox="1"/>
+          <p:nvPr/>
+        </p:nvSpPr>
+        <p:spPr>
+          <a:xfrm>
+            <a:off x="822960" y="4178808"/>
+            <a:ext cx="4937760" cy="365760"/>
           </a:xfrm>
           <a:prstGeom prst="rect">
             <a:avLst/>
@@ -8062,32 +8880,70 @@
           <a:p>
             <a:pPr algn="l">
               <a:lnSpc>
-                <a:spcPct val="135000"/>
-              </a:lnSpc>
-            </a:pPr>
-            <a:r>
-              <a:rPr sz="1100" b="0" i="0">
+                <a:spcPct val="130000"/>
+              </a:lnSpc>
+            </a:pPr>
+            <a:r>
+              <a:rPr sz="1150" b="0" i="0">
                 <a:solidFill>
                   <a:srgbClr val="5B6472"/>
                 </a:solidFill>
                 <a:latin typeface="Calibri"/>
               </a:rPr>
-              <a:t>データは外部に送りません。
-手元の PC の中だけで動きます。</a:t>
-            </a:r>
-          </a:p>
-        </p:txBody>
-      </p:sp>
-      <p:sp>
-        <p:nvSpPr>
-          <p:cNvPr id="10" name="Rounded Rectangle 9"/>
+              <a:t>   (Rust 製で高速)</a:t>
+            </a:r>
+          </a:p>
+        </p:txBody>
+      </p:sp>
+      <p:sp>
+        <p:nvSpPr>
+          <p:cNvPr id="13" name="TextBox 12"/>
+          <p:cNvSpPr txBox="1"/>
+          <p:nvPr/>
+        </p:nvSpPr>
+        <p:spPr>
+          <a:xfrm>
+            <a:off x="822960" y="4663440"/>
+            <a:ext cx="4937760" cy="411480"/>
+          </a:xfrm>
+          <a:prstGeom prst="rect">
+            <a:avLst/>
+          </a:prstGeom>
+          <a:noFill/>
+        </p:spPr>
+        <p:txBody>
+          <a:bodyPr wrap="square" lIns="0" rIns="0" tIns="0" bIns="0" anchor="t">
+            <a:spAutoFit/>
+          </a:bodyPr>
+          <a:lstStyle/>
+          <a:p>
+            <a:pPr algn="l">
+              <a:lnSpc>
+                <a:spcPct val="130000"/>
+              </a:lnSpc>
+            </a:pPr>
+            <a:r>
+              <a:rPr sz="1300" b="0" i="0">
+                <a:solidFill>
+                  <a:srgbClr val="1F2937"/>
+                </a:solidFill>
+                <a:latin typeface="Calibri"/>
+              </a:rPr>
+              <a:t>• 世界中の調査現場で使われている実績</a:t>
+            </a:r>
+          </a:p>
+        </p:txBody>
+      </p:sp>
+      <p:sp>
+        <p:nvSpPr>
+          <p:cNvPr id="14" name="Rounded Rectangle 13"/>
           <p:cNvSpPr/>
           <p:nvPr/>
         </p:nvSpPr>
         <p:spPr>
           <a:xfrm>
-            <a:off x="548640" y="3291840"/>
-            <a:ext cx="4846320" cy="1417320"/>
+            <a:off x="6263640" y="2103120"/>
+            <a:ext cx="5486400" cy="4023360"/>
           </a:xfrm>
           <a:prstGeom prst="roundRect">
             <a:avLst/>
@@ -8126,20 +8982,20 @@
       </p:sp>
       <p:sp>
         <p:nvSpPr>
-          <p:cNvPr id="11" name="Rectangle 10"/>
+          <p:cNvPr id="15" name="Rectangle 14"/>
           <p:cNvSpPr/>
           <p:nvPr/>
         </p:nvSpPr>
         <p:spPr>
           <a:xfrm>
-            <a:off x="548640" y="3291840"/>
-            <a:ext cx="73152" cy="1417320"/>
+            <a:off x="6263640" y="2103120"/>
+            <a:ext cx="73152" cy="4023360"/>
           </a:xfrm>
           <a:prstGeom prst="rect">
             <a:avLst/>
           </a:prstGeom>
           <a:solidFill>
-            <a:srgbClr val="2563EB"/>
+            <a:srgbClr val="EA580C"/>
           </a:solidFill>
           <a:ln>
             <a:noFill/>
@@ -8170,14 +9026,14 @@
       </p:sp>
       <p:sp>
         <p:nvSpPr>
-          <p:cNvPr id="12" name="TextBox 11"/>
-          <p:cNvSpPr txBox="1"/>
-          <p:nvPr/>
-        </p:nvSpPr>
-        <p:spPr>
-          <a:xfrm>
-            <a:off x="777240" y="3456432"/>
-            <a:ext cx="731520" cy="640080"/>
+          <p:cNvPr id="16" name="TextBox 15"/>
+          <p:cNvSpPr txBox="1"/>
+          <p:nvPr/>
+        </p:nvSpPr>
+        <p:spPr>
+          <a:xfrm>
+            <a:off x="6537960" y="2331720"/>
+            <a:ext cx="5120640" cy="411480"/>
           </a:xfrm>
           <a:prstGeom prst="rect">
             <a:avLst/>
@@ -8196,27 +9052,66 @@
               </a:lnSpc>
             </a:pPr>
             <a:r>
-              <a:rPr sz="2800" b="0" i="0">
-                <a:solidFill>
-                  <a:srgbClr val="2563EB"/>
+              <a:rPr sz="1700" b="1" i="0">
+                <a:solidFill>
+                  <a:srgbClr val="1F2937"/>
+                </a:solidFill>
+                <a:latin typeface="Cambria"/>
+              </a:rPr>
+              <a:t>⚠ そのままでは専門家にしか使えない</a:t>
+            </a:r>
+          </a:p>
+        </p:txBody>
+      </p:sp>
+      <p:sp>
+        <p:nvSpPr>
+          <p:cNvPr id="17" name="TextBox 16"/>
+          <p:cNvSpPr txBox="1"/>
+          <p:nvPr/>
+        </p:nvSpPr>
+        <p:spPr>
+          <a:xfrm>
+            <a:off x="6537960" y="2926080"/>
+            <a:ext cx="5029200" cy="457200"/>
+          </a:xfrm>
+          <a:prstGeom prst="rect">
+            <a:avLst/>
+          </a:prstGeom>
+          <a:noFill/>
+        </p:spPr>
+        <p:txBody>
+          <a:bodyPr wrap="square" lIns="0" rIns="0" tIns="0" bIns="0" anchor="t">
+            <a:spAutoFit/>
+          </a:bodyPr>
+          <a:lstStyle/>
+          <a:p>
+            <a:pPr algn="l">
+              <a:lnSpc>
+                <a:spcPct val="130000"/>
+              </a:lnSpc>
+            </a:pPr>
+            <a:r>
+              <a:rPr sz="1300" b="0" i="0">
+                <a:solidFill>
+                  <a:srgbClr val="1F2937"/>
                 </a:solidFill>
                 <a:latin typeface="Calibri"/>
               </a:rPr>
-              <a:t>📦</a:t>
-            </a:r>
-          </a:p>
-        </p:txBody>
-      </p:sp>
-      <p:sp>
-        <p:nvSpPr>
-          <p:cNvPr id="13" name="TextBox 12"/>
-          <p:cNvSpPr txBox="1"/>
-          <p:nvPr/>
-        </p:nvSpPr>
-        <p:spPr>
-          <a:xfrm>
-            <a:off x="1554480" y="3456432"/>
-            <a:ext cx="3657600" cy="411480"/>
+              <a:t>• 黒い画面でコマンドを打つ必要がある</a:t>
+            </a:r>
+          </a:p>
+        </p:txBody>
+      </p:sp>
+      <p:sp>
+        <p:nvSpPr>
+          <p:cNvPr id="18" name="TextBox 17"/>
+          <p:cNvSpPr txBox="1"/>
+          <p:nvPr/>
+        </p:nvSpPr>
+        <p:spPr>
+          <a:xfrm>
+            <a:off x="6537960" y="3493008"/>
+            <a:ext cx="5029200" cy="457200"/>
           </a:xfrm>
           <a:prstGeom prst="rect">
             <a:avLst/>
@@ -8235,27 +9130,27 @@
               </a:lnSpc>
             </a:pPr>
             <a:r>
-              <a:rPr sz="1700" b="1" i="0">
+              <a:rPr sz="1300" b="0" i="0">
                 <a:solidFill>
                   <a:srgbClr val="1F2937"/>
                 </a:solidFill>
-                <a:latin typeface="Cambria"/>
-              </a:rPr>
-              <a:t>ダウンロードしてすぐ</a:t>
-            </a:r>
-          </a:p>
-        </p:txBody>
-      </p:sp>
-      <p:sp>
-        <p:nvSpPr>
-          <p:cNvPr id="14" name="TextBox 13"/>
-          <p:cNvSpPr txBox="1"/>
-          <p:nvPr/>
-        </p:nvSpPr>
-        <p:spPr>
-          <a:xfrm>
-            <a:off x="1554480" y="3886200"/>
-            <a:ext cx="3657600" cy="731520"/>
+                <a:latin typeface="Calibri"/>
+              </a:rPr>
+              <a:t>• 結果は CSV ファイル数万行 — 結局「読めない」</a:t>
+            </a:r>
+          </a:p>
+        </p:txBody>
+      </p:sp>
+      <p:sp>
+        <p:nvSpPr>
+          <p:cNvPr id="19" name="TextBox 18"/>
+          <p:cNvSpPr txBox="1"/>
+          <p:nvPr/>
+        </p:nvSpPr>
+        <p:spPr>
+          <a:xfrm>
+            <a:off x="6537960" y="4059936"/>
+            <a:ext cx="5029200" cy="457200"/>
           </a:xfrm>
           <a:prstGeom prst="rect">
             <a:avLst/>
@@ -8270,122 +9165,31 @@
           <a:p>
             <a:pPr algn="l">
               <a:lnSpc>
-                <a:spcPct val="135000"/>
-              </a:lnSpc>
-            </a:pPr>
-            <a:r>
-              <a:rPr sz="1100" b="0" i="0">
-                <a:solidFill>
-                  <a:srgbClr val="5B6472"/>
+                <a:spcPct val="130000"/>
+              </a:lnSpc>
+            </a:pPr>
+            <a:r>
+              <a:rPr sz="1300" b="0" i="0">
+                <a:solidFill>
+                  <a:srgbClr val="1F2937"/>
                 </a:solidFill>
                 <a:latin typeface="Calibri"/>
               </a:rPr>
-              <a:t>zip を展開してダブルクリック。
-難しいインストールは不要。</a:t>
-            </a:r>
-          </a:p>
-        </p:txBody>
-      </p:sp>
-      <p:sp>
-        <p:nvSpPr>
-          <p:cNvPr id="15" name="Rounded Rectangle 14"/>
-          <p:cNvSpPr/>
-          <p:nvPr/>
-        </p:nvSpPr>
-        <p:spPr>
-          <a:xfrm>
-            <a:off x="548640" y="4892040"/>
-            <a:ext cx="4846320" cy="1417320"/>
-          </a:xfrm>
-          <a:prstGeom prst="roundRect">
-            <a:avLst/>
-          </a:prstGeom>
-          <a:solidFill>
-            <a:srgbClr val="FFFFFF"/>
-          </a:solidFill>
-          <a:ln w="9525">
-            <a:solidFill>
-              <a:srgbClr val="DDE3EE"/>
-            </a:solidFill>
-          </a:ln>
-          <a:effectLst/>
-        </p:spPr>
-        <p:style>
-          <a:lnRef idx="1">
-            <a:schemeClr val="accent1"/>
-          </a:lnRef>
-          <a:fillRef idx="3">
-            <a:schemeClr val="accent1"/>
-          </a:fillRef>
-          <a:effectRef idx="2">
-            <a:schemeClr val="accent1"/>
-          </a:effectRef>
-          <a:fontRef idx="minor">
-            <a:schemeClr val="lt1"/>
-          </a:fontRef>
-        </p:style>
-        <p:txBody>
-          <a:bodyPr rtlCol="0" anchor="ctr"/>
-          <a:lstStyle/>
-          <a:p>
-            <a:pPr algn="ctr"/>
-          </a:p>
-        </p:txBody>
-      </p:sp>
-      <p:sp>
-        <p:nvSpPr>
-          <p:cNvPr id="16" name="Rectangle 15"/>
-          <p:cNvSpPr/>
-          <p:nvPr/>
-        </p:nvSpPr>
-        <p:spPr>
-          <a:xfrm>
-            <a:off x="548640" y="4892040"/>
-            <a:ext cx="73152" cy="1417320"/>
-          </a:xfrm>
-          <a:prstGeom prst="rect">
-            <a:avLst/>
-          </a:prstGeom>
-          <a:solidFill>
-            <a:srgbClr val="2563EB"/>
-          </a:solidFill>
-          <a:ln>
-            <a:noFill/>
-          </a:ln>
-          <a:effectLst/>
-        </p:spPr>
-        <p:style>
-          <a:lnRef idx="1">
-            <a:schemeClr val="accent1"/>
-          </a:lnRef>
-          <a:fillRef idx="3">
-            <a:schemeClr val="accent1"/>
-          </a:fillRef>
-          <a:effectRef idx="2">
-            <a:schemeClr val="accent1"/>
-          </a:effectRef>
-          <a:fontRef idx="minor">
-            <a:schemeClr val="lt1"/>
-          </a:fontRef>
-        </p:style>
-        <p:txBody>
-          <a:bodyPr rtlCol="0" anchor="ctr"/>
-          <a:lstStyle/>
-          <a:p>
-            <a:pPr algn="ctr"/>
-          </a:p>
-        </p:txBody>
-      </p:sp>
-      <p:sp>
-        <p:nvSpPr>
-          <p:cNvPr id="17" name="TextBox 16"/>
-          <p:cNvSpPr txBox="1"/>
-          <p:nvPr/>
-        </p:nvSpPr>
-        <p:spPr>
-          <a:xfrm>
-            <a:off x="777240" y="5056631"/>
-            <a:ext cx="731520" cy="640080"/>
+              <a:t>• 出力は英語 + 専門用語だらけ</a:t>
+            </a:r>
+          </a:p>
+        </p:txBody>
+      </p:sp>
+      <p:sp>
+        <p:nvSpPr>
+          <p:cNvPr id="20" name="TextBox 19"/>
+          <p:cNvSpPr txBox="1"/>
+          <p:nvPr/>
+        </p:nvSpPr>
+        <p:spPr>
+          <a:xfrm>
+            <a:off x="6537960" y="4626864"/>
+            <a:ext cx="5029200" cy="457200"/>
           </a:xfrm>
           <a:prstGeom prst="rect">
             <a:avLst/>
@@ -8404,161 +9208,52 @@
               </a:lnSpc>
             </a:pPr>
             <a:r>
-              <a:rPr sz="2800" b="0" i="0">
-                <a:solidFill>
-                  <a:srgbClr val="2563EB"/>
+              <a:rPr sz="1300" b="0" i="0">
+                <a:solidFill>
+                  <a:srgbClr val="1F2937"/>
                 </a:solidFill>
                 <a:latin typeface="Calibri"/>
               </a:rPr>
-              <a:t>🆓</a:t>
-            </a:r>
-          </a:p>
-        </p:txBody>
-      </p:sp>
-      <p:sp>
-        <p:nvSpPr>
-          <p:cNvPr id="18" name="TextBox 17"/>
-          <p:cNvSpPr txBox="1"/>
-          <p:nvPr/>
-        </p:nvSpPr>
-        <p:spPr>
-          <a:xfrm>
-            <a:off x="1554480" y="5056631"/>
-            <a:ext cx="3657600" cy="411480"/>
-          </a:xfrm>
-          <a:prstGeom prst="rect">
-            <a:avLst/>
-          </a:prstGeom>
-          <a:noFill/>
-        </p:spPr>
-        <p:txBody>
-          <a:bodyPr wrap="square" lIns="0" rIns="0" tIns="0" bIns="0" anchor="t">
-            <a:spAutoFit/>
-          </a:bodyPr>
-          <a:lstStyle/>
-          <a:p>
-            <a:pPr algn="l">
-              <a:lnSpc>
-                <a:spcPct val="130000"/>
-              </a:lnSpc>
-            </a:pPr>
-            <a:r>
-              <a:rPr sz="1700" b="1" i="0">
-                <a:solidFill>
-                  <a:srgbClr val="1F2937"/>
-                </a:solidFill>
-                <a:latin typeface="Cambria"/>
-              </a:rPr>
-              <a:t>無料・公開ソフト</a:t>
-            </a:r>
-          </a:p>
-        </p:txBody>
-      </p:sp>
-      <p:sp>
-        <p:nvSpPr>
-          <p:cNvPr id="19" name="TextBox 18"/>
-          <p:cNvSpPr txBox="1"/>
-          <p:nvPr/>
-        </p:nvSpPr>
-        <p:spPr>
-          <a:xfrm>
-            <a:off x="1554480" y="5486400"/>
-            <a:ext cx="3657600" cy="731520"/>
-          </a:xfrm>
-          <a:prstGeom prst="rect">
-            <a:avLst/>
-          </a:prstGeom>
-          <a:noFill/>
-        </p:spPr>
-        <p:txBody>
-          <a:bodyPr wrap="square" lIns="0" rIns="0" tIns="0" bIns="0" anchor="t">
-            <a:spAutoFit/>
-          </a:bodyPr>
-          <a:lstStyle/>
-          <a:p>
-            <a:pPr algn="l">
-              <a:lnSpc>
-                <a:spcPct val="135000"/>
-              </a:lnSpc>
-            </a:pPr>
-            <a:r>
-              <a:rPr sz="1100" b="0" i="0">
-                <a:solidFill>
-                  <a:srgbClr val="5B6472"/>
+              <a:t>• 「で、次にどうすれば?」を教えてくれない</a:t>
+            </a:r>
+          </a:p>
+        </p:txBody>
+      </p:sp>
+      <p:sp>
+        <p:nvSpPr>
+          <p:cNvPr id="21" name="TextBox 20"/>
+          <p:cNvSpPr txBox="1"/>
+          <p:nvPr/>
+        </p:nvSpPr>
+        <p:spPr>
+          <a:xfrm>
+            <a:off x="548640" y="6263640"/>
+            <a:ext cx="11064240" cy="365760"/>
+          </a:xfrm>
+          <a:prstGeom prst="rect">
+            <a:avLst/>
+          </a:prstGeom>
+          <a:noFill/>
+        </p:spPr>
+        <p:txBody>
+          <a:bodyPr wrap="square" lIns="0" rIns="0" tIns="0" bIns="0" anchor="t">
+            <a:spAutoFit/>
+          </a:bodyPr>
+          <a:lstStyle/>
+          <a:p>
+            <a:pPr algn="ctr">
+              <a:lnSpc>
+                <a:spcPct val="130000"/>
+              </a:lnSpc>
+            </a:pPr>
+            <a:r>
+              <a:rPr sz="1400" b="1" i="0">
+                <a:solidFill>
+                  <a:srgbClr val="1D4ED8"/>
                 </a:solidFill>
                 <a:latin typeface="Calibri"/>
               </a:rPr>
-              <a:t>GitHub で公開中。
-誰でも自由に使えます。</a:t>
-            </a:r>
-          </a:p>
-        </p:txBody>
-      </p:sp>
-      <p:pic>
-        <p:nvPicPr>
-          <p:cNvPr id="20" name="Picture 19" descr="dashboard.png"/>
-          <p:cNvPicPr>
-            <a:picLocks noChangeAspect="1"/>
-          </p:cNvPicPr>
-          <p:nvPr/>
-        </p:nvPicPr>
-        <p:blipFill>
-          <a:blip r:embed="rId2"/>
-          <a:stretch>
-            <a:fillRect/>
-          </a:stretch>
-        </p:blipFill>
-        <p:spPr>
-          <a:xfrm>
-            <a:off x="6484620" y="1645920"/>
-            <a:ext cx="4450080" cy="4572000"/>
-          </a:xfrm>
-          <a:prstGeom prst="rect">
-            <a:avLst/>
-          </a:prstGeom>
-          <a:ln w="12700">
-            <a:solidFill>
-              <a:srgbClr val="DDE3EE"/>
-            </a:solidFill>
-          </a:ln>
-          <a:effectLst/>
-        </p:spPr>
-      </p:pic>
-      <p:sp>
-        <p:nvSpPr>
-          <p:cNvPr id="21" name="TextBox 20"/>
-          <p:cNvSpPr txBox="1"/>
-          <p:nvPr/>
-        </p:nvSpPr>
-        <p:spPr>
-          <a:xfrm>
-            <a:off x="5760720" y="6291072"/>
-            <a:ext cx="5897880" cy="320040"/>
-          </a:xfrm>
-          <a:prstGeom prst="rect">
-            <a:avLst/>
-          </a:prstGeom>
-          <a:noFill/>
-        </p:spPr>
-        <p:txBody>
-          <a:bodyPr wrap="square" lIns="0" rIns="0" tIns="0" bIns="0" anchor="t">
-            <a:spAutoFit/>
-          </a:bodyPr>
-          <a:lstStyle/>
-          <a:p>
-            <a:pPr algn="ctr">
-              <a:lnSpc>
-                <a:spcPct val="130000"/>
-              </a:lnSpc>
-            </a:pPr>
-            <a:r>
-              <a:rPr sz="1100" b="0" i="0">
-                <a:solidFill>
-                  <a:srgbClr val="5B6472"/>
-                </a:solidFill>
-                <a:latin typeface="Calibri"/>
-              </a:rPr>
-              <a:t>▲ 実際の画面 — 検出結果の全体像が一目で分かります</a:t>
+              <a:t>→ この「強力だが使いにくい」を出発点にしました</a:t>
             </a:r>
           </a:p>
         </p:txBody>
@@ -8571,7 +9266,7 @@
         </p:nvSpPr>
         <p:spPr>
           <a:xfrm>
-            <a:off x="11247120" y="6492240"/>
+            <a:off x="10972800" y="6446520"/>
             <a:ext cx="914400" cy="274320"/>
           </a:xfrm>
           <a:prstGeom prst="rect">
@@ -8698,7 +9393,7 @@
                 </a:solidFill>
                 <a:latin typeface="Calibri"/>
               </a:rPr>
-              <a:t>03  かんたん</a:t>
+              <a:t>この開発で目指したこと</a:t>
             </a:r>
           </a:p>
         </p:txBody>
@@ -8737,21 +9432,99 @@
                 </a:solidFill>
                 <a:latin typeface="Cambria"/>
               </a:rPr>
-              <a:t>使い方は、たった 3 ステップ</a:t>
-            </a:r>
-          </a:p>
-        </p:txBody>
-      </p:sp>
-      <p:sp>
-        <p:nvSpPr>
-          <p:cNvPr id="5" name="Rounded Rectangle 4"/>
+              <a:t>目的</a:t>
+            </a:r>
+          </a:p>
+        </p:txBody>
+      </p:sp>
+      <p:sp>
+        <p:nvSpPr>
+          <p:cNvPr id="5" name="TextBox 4"/>
+          <p:cNvSpPr txBox="1"/>
+          <p:nvPr/>
+        </p:nvSpPr>
+        <p:spPr>
+          <a:xfrm>
+            <a:off x="548640" y="1737360"/>
+            <a:ext cx="10972800" cy="548640"/>
+          </a:xfrm>
+          <a:prstGeom prst="rect">
+            <a:avLst/>
+          </a:prstGeom>
+          <a:noFill/>
+        </p:spPr>
+        <p:txBody>
+          <a:bodyPr wrap="square" lIns="0" rIns="0" tIns="0" bIns="0" anchor="t">
+            <a:spAutoFit/>
+          </a:bodyPr>
+          <a:lstStyle/>
+          <a:p>
+            <a:pPr algn="ctr">
+              <a:lnSpc>
+                <a:spcPct val="130000"/>
+              </a:lnSpc>
+            </a:pPr>
+            <a:r>
+              <a:rPr sz="2400" b="0" i="0">
+                <a:solidFill>
+                  <a:srgbClr val="5B6472"/>
+                </a:solidFill>
+                <a:latin typeface="Calibri"/>
+              </a:rPr>
+              <a:t>「専門家の道具」を</a:t>
+            </a:r>
+          </a:p>
+        </p:txBody>
+      </p:sp>
+      <p:sp>
+        <p:nvSpPr>
+          <p:cNvPr id="6" name="TextBox 5"/>
+          <p:cNvSpPr txBox="1"/>
+          <p:nvPr/>
+        </p:nvSpPr>
+        <p:spPr>
+          <a:xfrm>
+            <a:off x="548640" y="2286000"/>
+            <a:ext cx="10972800" cy="731520"/>
+          </a:xfrm>
+          <a:prstGeom prst="rect">
+            <a:avLst/>
+          </a:prstGeom>
+          <a:noFill/>
+        </p:spPr>
+        <p:txBody>
+          <a:bodyPr wrap="square" lIns="0" rIns="0" tIns="0" bIns="0" anchor="t">
+            <a:spAutoFit/>
+          </a:bodyPr>
+          <a:lstStyle/>
+          <a:p>
+            <a:pPr algn="ctr">
+              <a:lnSpc>
+                <a:spcPct val="130000"/>
+              </a:lnSpc>
+            </a:pPr>
+            <a:r>
+              <a:rPr sz="3200" b="1" i="0">
+                <a:solidFill>
+                  <a:srgbClr val="1F2937"/>
+                </a:solidFill>
+                <a:latin typeface="Cambria"/>
+              </a:rPr>
+              <a:t>「誰でも使える調査プラットフォーム」に</a:t>
+            </a:r>
+          </a:p>
+        </p:txBody>
+      </p:sp>
+      <p:sp>
+        <p:nvSpPr>
+          <p:cNvPr id="7" name="Rounded Rectangle 6"/>
           <p:cNvSpPr/>
           <p:nvPr/>
         </p:nvSpPr>
         <p:spPr>
           <a:xfrm>
-            <a:off x="548640" y="1691640"/>
-            <a:ext cx="4206240" cy="1417320"/>
+            <a:off x="548640" y="3474720"/>
+            <a:ext cx="3566160" cy="2468880"/>
           </a:xfrm>
           <a:prstGeom prst="roundRect">
             <a:avLst/>
@@ -8790,14 +9563,14 @@
       </p:sp>
       <p:sp>
         <p:nvSpPr>
-          <p:cNvPr id="6" name="Rectangle 5"/>
+          <p:cNvPr id="8" name="Rectangle 7"/>
           <p:cNvSpPr/>
           <p:nvPr/>
         </p:nvSpPr>
         <p:spPr>
           <a:xfrm>
-            <a:off x="548640" y="1691640"/>
-            <a:ext cx="73152" cy="1417320"/>
+            <a:off x="548640" y="3474720"/>
+            <a:ext cx="73152" cy="2468880"/>
           </a:xfrm>
           <a:prstGeom prst="rect">
             <a:avLst/>
@@ -8834,146 +9607,133 @@
       </p:sp>
       <p:sp>
         <p:nvSpPr>
-          <p:cNvPr id="7" name="Oval 6"/>
+          <p:cNvPr id="9" name="TextBox 8"/>
+          <p:cNvSpPr txBox="1"/>
+          <p:nvPr/>
+        </p:nvSpPr>
+        <p:spPr>
+          <a:xfrm>
+            <a:off x="777240" y="3657600"/>
+            <a:ext cx="640080" cy="548640"/>
+          </a:xfrm>
+          <a:prstGeom prst="rect">
+            <a:avLst/>
+          </a:prstGeom>
+          <a:noFill/>
+        </p:spPr>
+        <p:txBody>
+          <a:bodyPr wrap="square" lIns="0" rIns="0" tIns="0" bIns="0" anchor="t">
+            <a:spAutoFit/>
+          </a:bodyPr>
+          <a:lstStyle/>
+          <a:p>
+            <a:pPr algn="l">
+              <a:lnSpc>
+                <a:spcPct val="130000"/>
+              </a:lnSpc>
+            </a:pPr>
+            <a:r>
+              <a:rPr sz="2800" b="1" i="0">
+                <a:solidFill>
+                  <a:srgbClr val="2563EB"/>
+                </a:solidFill>
+                <a:latin typeface="Cambria"/>
+              </a:rPr>
+              <a:t>①</a:t>
+            </a:r>
+          </a:p>
+        </p:txBody>
+      </p:sp>
+      <p:sp>
+        <p:nvSpPr>
+          <p:cNvPr id="10" name="TextBox 9"/>
+          <p:cNvSpPr txBox="1"/>
+          <p:nvPr/>
+        </p:nvSpPr>
+        <p:spPr>
+          <a:xfrm>
+            <a:off x="1371600" y="3730752"/>
+            <a:ext cx="2560320" cy="457200"/>
+          </a:xfrm>
+          <a:prstGeom prst="rect">
+            <a:avLst/>
+          </a:prstGeom>
+          <a:noFill/>
+        </p:spPr>
+        <p:txBody>
+          <a:bodyPr wrap="square" lIns="0" rIns="0" tIns="0" bIns="0" anchor="t">
+            <a:spAutoFit/>
+          </a:bodyPr>
+          <a:lstStyle/>
+          <a:p>
+            <a:pPr algn="l">
+              <a:lnSpc>
+                <a:spcPct val="130000"/>
+              </a:lnSpc>
+            </a:pPr>
+            <a:r>
+              <a:rPr sz="1600" b="1" i="0">
+                <a:solidFill>
+                  <a:srgbClr val="1F2937"/>
+                </a:solidFill>
+                <a:latin typeface="Cambria"/>
+              </a:rPr>
+              <a:t>見つける力を強くする</a:t>
+            </a:r>
+          </a:p>
+        </p:txBody>
+      </p:sp>
+      <p:sp>
+        <p:nvSpPr>
+          <p:cNvPr id="11" name="TextBox 10"/>
+          <p:cNvSpPr txBox="1"/>
+          <p:nvPr/>
+        </p:nvSpPr>
+        <p:spPr>
+          <a:xfrm>
+            <a:off x="822959" y="4343400"/>
+            <a:ext cx="3063239" cy="1463040"/>
+          </a:xfrm>
+          <a:prstGeom prst="rect">
+            <a:avLst/>
+          </a:prstGeom>
+          <a:noFill/>
+        </p:spPr>
+        <p:txBody>
+          <a:bodyPr wrap="square" lIns="0" rIns="0" tIns="0" bIns="0" anchor="t">
+            <a:spAutoFit/>
+          </a:bodyPr>
+          <a:lstStyle/>
+          <a:p>
+            <a:pPr algn="l">
+              <a:lnSpc>
+                <a:spcPct val="145000"/>
+              </a:lnSpc>
+            </a:pPr>
+            <a:r>
+              <a:rPr sz="1200" b="0" i="0">
+                <a:solidFill>
+                  <a:srgbClr val="5B6472"/>
+                </a:solidFill>
+                <a:latin typeface="Calibri"/>
+              </a:rPr>
+              <a:t>エンジン本体を改造して
+新しい検知機能を追加 +
+検知ルールを自作</a:t>
+            </a:r>
+          </a:p>
+        </p:txBody>
+      </p:sp>
+      <p:sp>
+        <p:nvSpPr>
+          <p:cNvPr id="12" name="Rounded Rectangle 11"/>
           <p:cNvSpPr/>
           <p:nvPr/>
         </p:nvSpPr>
         <p:spPr>
           <a:xfrm>
-            <a:off x="777240" y="2103120"/>
-            <a:ext cx="566928" cy="566928"/>
-          </a:xfrm>
-          <a:prstGeom prst="ellipse">
-            <a:avLst/>
-          </a:prstGeom>
-          <a:solidFill>
-            <a:srgbClr val="2563EB"/>
-          </a:solidFill>
-          <a:ln>
-            <a:noFill/>
-          </a:ln>
-          <a:effectLst/>
-        </p:spPr>
-        <p:style>
-          <a:lnRef idx="1">
-            <a:schemeClr val="accent1"/>
-          </a:lnRef>
-          <a:fillRef idx="3">
-            <a:schemeClr val="accent1"/>
-          </a:fillRef>
-          <a:effectRef idx="2">
-            <a:schemeClr val="accent1"/>
-          </a:effectRef>
-          <a:fontRef idx="minor">
-            <a:schemeClr val="lt1"/>
-          </a:fontRef>
-        </p:style>
-        <p:txBody>
-          <a:bodyPr rtlCol="0" anchor="ctr" wrap="none"/>
-          <a:lstStyle/>
-          <a:p>
-            <a:pPr algn="ctr"/>
-            <a:r>
-              <a:rPr sz="2200" b="1">
-                <a:solidFill>
-                  <a:srgbClr val="FFFFFF"/>
-                </a:solidFill>
-                <a:latin typeface="Cambria"/>
-              </a:rPr>
-              <a:t>1</a:t>
-            </a:r>
-          </a:p>
-        </p:txBody>
-      </p:sp>
-      <p:sp>
-        <p:nvSpPr>
-          <p:cNvPr id="8" name="TextBox 7"/>
-          <p:cNvSpPr txBox="1"/>
-          <p:nvPr/>
-        </p:nvSpPr>
-        <p:spPr>
-          <a:xfrm>
-            <a:off x="1554480" y="1856232"/>
-            <a:ext cx="3017520" cy="411480"/>
-          </a:xfrm>
-          <a:prstGeom prst="rect">
-            <a:avLst/>
-          </a:prstGeom>
-          <a:noFill/>
-        </p:spPr>
-        <p:txBody>
-          <a:bodyPr wrap="square" lIns="0" rIns="0" tIns="0" bIns="0" anchor="t">
-            <a:spAutoFit/>
-          </a:bodyPr>
-          <a:lstStyle/>
-          <a:p>
-            <a:pPr algn="l">
-              <a:lnSpc>
-                <a:spcPct val="130000"/>
-              </a:lnSpc>
-            </a:pPr>
-            <a:r>
-              <a:rPr sz="1700" b="1" i="0">
-                <a:solidFill>
-                  <a:srgbClr val="1F2937"/>
-                </a:solidFill>
-                <a:latin typeface="Cambria"/>
-              </a:rPr>
-              <a:t>ログを選ぶ</a:t>
-            </a:r>
-          </a:p>
-        </p:txBody>
-      </p:sp>
-      <p:sp>
-        <p:nvSpPr>
-          <p:cNvPr id="9" name="TextBox 8"/>
-          <p:cNvSpPr txBox="1"/>
-          <p:nvPr/>
-        </p:nvSpPr>
-        <p:spPr>
-          <a:xfrm>
-            <a:off x="1554480" y="2286000"/>
-            <a:ext cx="3017520" cy="731520"/>
-          </a:xfrm>
-          <a:prstGeom prst="rect">
-            <a:avLst/>
-          </a:prstGeom>
-          <a:noFill/>
-        </p:spPr>
-        <p:txBody>
-          <a:bodyPr wrap="square" lIns="0" rIns="0" tIns="0" bIns="0" anchor="t">
-            <a:spAutoFit/>
-          </a:bodyPr>
-          <a:lstStyle/>
-          <a:p>
-            <a:pPr algn="l">
-              <a:lnSpc>
-                <a:spcPct val="135000"/>
-              </a:lnSpc>
-            </a:pPr>
-            <a:r>
-              <a:rPr sz="1100" b="0" i="0">
-                <a:solidFill>
-                  <a:srgbClr val="5B6472"/>
-                </a:solidFill>
-                <a:latin typeface="Calibri"/>
-              </a:rPr>
-              <a:t>「このパソコンを検査」を
-押すだけでも OK</a:t>
-            </a:r>
-          </a:p>
-        </p:txBody>
-      </p:sp>
-      <p:sp>
-        <p:nvSpPr>
-          <p:cNvPr id="10" name="Rounded Rectangle 9"/>
-          <p:cNvSpPr/>
-          <p:nvPr/>
-        </p:nvSpPr>
-        <p:spPr>
-          <a:xfrm>
-            <a:off x="548640" y="3291840"/>
-            <a:ext cx="4206240" cy="1417320"/>
+            <a:off x="4343400" y="3474720"/>
+            <a:ext cx="3566160" cy="2468880"/>
           </a:xfrm>
           <a:prstGeom prst="roundRect">
             <a:avLst/>
@@ -9012,14 +9772,14 @@
       </p:sp>
       <p:sp>
         <p:nvSpPr>
-          <p:cNvPr id="11" name="Rectangle 10"/>
+          <p:cNvPr id="13" name="Rectangle 12"/>
           <p:cNvSpPr/>
           <p:nvPr/>
         </p:nvSpPr>
         <p:spPr>
           <a:xfrm>
-            <a:off x="548640" y="3291840"/>
-            <a:ext cx="73152" cy="1417320"/>
+            <a:off x="4343400" y="3474720"/>
+            <a:ext cx="73152" cy="2468880"/>
           </a:xfrm>
           <a:prstGeom prst="rect">
             <a:avLst/>
@@ -9056,146 +9816,133 @@
       </p:sp>
       <p:sp>
         <p:nvSpPr>
-          <p:cNvPr id="12" name="Oval 11"/>
+          <p:cNvPr id="14" name="TextBox 13"/>
+          <p:cNvSpPr txBox="1"/>
+          <p:nvPr/>
+        </p:nvSpPr>
+        <p:spPr>
+          <a:xfrm>
+            <a:off x="4572000" y="3657600"/>
+            <a:ext cx="640080" cy="548640"/>
+          </a:xfrm>
+          <a:prstGeom prst="rect">
+            <a:avLst/>
+          </a:prstGeom>
+          <a:noFill/>
+        </p:spPr>
+        <p:txBody>
+          <a:bodyPr wrap="square" lIns="0" rIns="0" tIns="0" bIns="0" anchor="t">
+            <a:spAutoFit/>
+          </a:bodyPr>
+          <a:lstStyle/>
+          <a:p>
+            <a:pPr algn="l">
+              <a:lnSpc>
+                <a:spcPct val="130000"/>
+              </a:lnSpc>
+            </a:pPr>
+            <a:r>
+              <a:rPr sz="2800" b="1" i="0">
+                <a:solidFill>
+                  <a:srgbClr val="2563EB"/>
+                </a:solidFill>
+                <a:latin typeface="Cambria"/>
+              </a:rPr>
+              <a:t>②</a:t>
+            </a:r>
+          </a:p>
+        </p:txBody>
+      </p:sp>
+      <p:sp>
+        <p:nvSpPr>
+          <p:cNvPr id="15" name="TextBox 14"/>
+          <p:cNvSpPr txBox="1"/>
+          <p:nvPr/>
+        </p:nvSpPr>
+        <p:spPr>
+          <a:xfrm>
+            <a:off x="5166360" y="3730752"/>
+            <a:ext cx="2560320" cy="457200"/>
+          </a:xfrm>
+          <a:prstGeom prst="rect">
+            <a:avLst/>
+          </a:prstGeom>
+          <a:noFill/>
+        </p:spPr>
+        <p:txBody>
+          <a:bodyPr wrap="square" lIns="0" rIns="0" tIns="0" bIns="0" anchor="t">
+            <a:spAutoFit/>
+          </a:bodyPr>
+          <a:lstStyle/>
+          <a:p>
+            <a:pPr algn="l">
+              <a:lnSpc>
+                <a:spcPct val="130000"/>
+              </a:lnSpc>
+            </a:pPr>
+            <a:r>
+              <a:rPr sz="1600" b="1" i="0">
+                <a:solidFill>
+                  <a:srgbClr val="1F2937"/>
+                </a:solidFill>
+                <a:latin typeface="Cambria"/>
+              </a:rPr>
+              <a:t>結果を読めるようにする</a:t>
+            </a:r>
+          </a:p>
+        </p:txBody>
+      </p:sp>
+      <p:sp>
+        <p:nvSpPr>
+          <p:cNvPr id="16" name="TextBox 15"/>
+          <p:cNvSpPr txBox="1"/>
+          <p:nvPr/>
+        </p:nvSpPr>
+        <p:spPr>
+          <a:xfrm>
+            <a:off x="4617720" y="4343400"/>
+            <a:ext cx="3063239" cy="1463040"/>
+          </a:xfrm>
+          <a:prstGeom prst="rect">
+            <a:avLst/>
+          </a:prstGeom>
+          <a:noFill/>
+        </p:spPr>
+        <p:txBody>
+          <a:bodyPr wrap="square" lIns="0" rIns="0" tIns="0" bIns="0" anchor="t">
+            <a:spAutoFit/>
+          </a:bodyPr>
+          <a:lstStyle/>
+          <a:p>
+            <a:pPr algn="l">
+              <a:lnSpc>
+                <a:spcPct val="145000"/>
+              </a:lnSpc>
+            </a:pPr>
+            <a:r>
+              <a:rPr sz="1200" b="0" i="0">
+                <a:solidFill>
+                  <a:srgbClr val="5B6472"/>
+                </a:solidFill>
+                <a:latin typeface="Calibri"/>
+              </a:rPr>
+              <a:t>ブラウザで見られる GUI を
+ゼロから開発。日本語解説と
+「次にすべきこと」を表示</a:t>
+            </a:r>
+          </a:p>
+        </p:txBody>
+      </p:sp>
+      <p:sp>
+        <p:nvSpPr>
+          <p:cNvPr id="17" name="Rounded Rectangle 16"/>
           <p:cNvSpPr/>
           <p:nvPr/>
         </p:nvSpPr>
         <p:spPr>
           <a:xfrm>
-            <a:off x="777240" y="3703320"/>
-            <a:ext cx="566928" cy="566928"/>
-          </a:xfrm>
-          <a:prstGeom prst="ellipse">
-            <a:avLst/>
-          </a:prstGeom>
-          <a:solidFill>
-            <a:srgbClr val="2563EB"/>
-          </a:solidFill>
-          <a:ln>
-            <a:noFill/>
-          </a:ln>
-          <a:effectLst/>
-        </p:spPr>
-        <p:style>
-          <a:lnRef idx="1">
-            <a:schemeClr val="accent1"/>
-          </a:lnRef>
-          <a:fillRef idx="3">
-            <a:schemeClr val="accent1"/>
-          </a:fillRef>
-          <a:effectRef idx="2">
-            <a:schemeClr val="accent1"/>
-          </a:effectRef>
-          <a:fontRef idx="minor">
-            <a:schemeClr val="lt1"/>
-          </a:fontRef>
-        </p:style>
-        <p:txBody>
-          <a:bodyPr rtlCol="0" anchor="ctr" wrap="none"/>
-          <a:lstStyle/>
-          <a:p>
-            <a:pPr algn="ctr"/>
-            <a:r>
-              <a:rPr sz="2200" b="1">
-                <a:solidFill>
-                  <a:srgbClr val="FFFFFF"/>
-                </a:solidFill>
-                <a:latin typeface="Cambria"/>
-              </a:rPr>
-              <a:t>2</a:t>
-            </a:r>
-          </a:p>
-        </p:txBody>
-      </p:sp>
-      <p:sp>
-        <p:nvSpPr>
-          <p:cNvPr id="13" name="TextBox 12"/>
-          <p:cNvSpPr txBox="1"/>
-          <p:nvPr/>
-        </p:nvSpPr>
-        <p:spPr>
-          <a:xfrm>
-            <a:off x="1554480" y="3456432"/>
-            <a:ext cx="3017520" cy="411480"/>
-          </a:xfrm>
-          <a:prstGeom prst="rect">
-            <a:avLst/>
-          </a:prstGeom>
-          <a:noFill/>
-        </p:spPr>
-        <p:txBody>
-          <a:bodyPr wrap="square" lIns="0" rIns="0" tIns="0" bIns="0" anchor="t">
-            <a:spAutoFit/>
-          </a:bodyPr>
-          <a:lstStyle/>
-          <a:p>
-            <a:pPr algn="l">
-              <a:lnSpc>
-                <a:spcPct val="130000"/>
-              </a:lnSpc>
-            </a:pPr>
-            <a:r>
-              <a:rPr sz="1700" b="1" i="0">
-                <a:solidFill>
-                  <a:srgbClr val="1F2937"/>
-                </a:solidFill>
-                <a:latin typeface="Cambria"/>
-              </a:rPr>
-              <a:t>スキャンする</a:t>
-            </a:r>
-          </a:p>
-        </p:txBody>
-      </p:sp>
-      <p:sp>
-        <p:nvSpPr>
-          <p:cNvPr id="14" name="TextBox 13"/>
-          <p:cNvSpPr txBox="1"/>
-          <p:nvPr/>
-        </p:nvSpPr>
-        <p:spPr>
-          <a:xfrm>
-            <a:off x="1554480" y="3886200"/>
-            <a:ext cx="3017520" cy="731520"/>
-          </a:xfrm>
-          <a:prstGeom prst="rect">
-            <a:avLst/>
-          </a:prstGeom>
-          <a:noFill/>
-        </p:spPr>
-        <p:txBody>
-          <a:bodyPr wrap="square" lIns="0" rIns="0" tIns="0" bIns="0" anchor="t">
-            <a:spAutoFit/>
-          </a:bodyPr>
-          <a:lstStyle/>
-          <a:p>
-            <a:pPr algn="l">
-              <a:lnSpc>
-                <a:spcPct val="135000"/>
-              </a:lnSpc>
-            </a:pPr>
-            <a:r>
-              <a:rPr sz="1100" b="0" i="0">
-                <a:solidFill>
-                  <a:srgbClr val="5B6472"/>
-                </a:solidFill>
-                <a:latin typeface="Calibri"/>
-              </a:rPr>
-              <a:t>ボタン 1 つで自動チェック。
-進み具合も % で見えます</a:t>
-            </a:r>
-          </a:p>
-        </p:txBody>
-      </p:sp>
-      <p:sp>
-        <p:nvSpPr>
-          <p:cNvPr id="15" name="Rounded Rectangle 14"/>
-          <p:cNvSpPr/>
-          <p:nvPr/>
-        </p:nvSpPr>
-        <p:spPr>
-          <a:xfrm>
-            <a:off x="548640" y="4892040"/>
-            <a:ext cx="4206240" cy="1417320"/>
+            <a:off x="8138160" y="3474720"/>
+            <a:ext cx="3566160" cy="2468880"/>
           </a:xfrm>
           <a:prstGeom prst="roundRect">
             <a:avLst/>
@@ -9234,14 +9981,14 @@
       </p:sp>
       <p:sp>
         <p:nvSpPr>
-          <p:cNvPr id="16" name="Rectangle 15"/>
+          <p:cNvPr id="18" name="Rectangle 17"/>
           <p:cNvSpPr/>
           <p:nvPr/>
         </p:nvSpPr>
         <p:spPr>
           <a:xfrm>
-            <a:off x="548640" y="4892040"/>
-            <a:ext cx="73152" cy="1417320"/>
+            <a:off x="8138160" y="3474720"/>
+            <a:ext cx="73152" cy="2468880"/>
           </a:xfrm>
           <a:prstGeom prst="rect">
             <a:avLst/>
@@ -9278,67 +10025,53 @@
       </p:sp>
       <p:sp>
         <p:nvSpPr>
-          <p:cNvPr id="17" name="Oval 16"/>
-          <p:cNvSpPr/>
-          <p:nvPr/>
-        </p:nvSpPr>
-        <p:spPr>
-          <a:xfrm>
-            <a:off x="777240" y="5303520"/>
-            <a:ext cx="566928" cy="566928"/>
-          </a:xfrm>
-          <a:prstGeom prst="ellipse">
-            <a:avLst/>
-          </a:prstGeom>
-          <a:solidFill>
-            <a:srgbClr val="2563EB"/>
-          </a:solidFill>
-          <a:ln>
-            <a:noFill/>
-          </a:ln>
-          <a:effectLst/>
-        </p:spPr>
-        <p:style>
-          <a:lnRef idx="1">
-            <a:schemeClr val="accent1"/>
-          </a:lnRef>
-          <a:fillRef idx="3">
-            <a:schemeClr val="accent1"/>
-          </a:fillRef>
-          <a:effectRef idx="2">
-            <a:schemeClr val="accent1"/>
-          </a:effectRef>
-          <a:fontRef idx="minor">
-            <a:schemeClr val="lt1"/>
-          </a:fontRef>
-        </p:style>
-        <p:txBody>
-          <a:bodyPr rtlCol="0" anchor="ctr" wrap="none"/>
-          <a:lstStyle/>
-          <a:p>
-            <a:pPr algn="ctr"/>
-            <a:r>
-              <a:rPr sz="2200" b="1">
-                <a:solidFill>
-                  <a:srgbClr val="FFFFFF"/>
+          <p:cNvPr id="19" name="TextBox 18"/>
+          <p:cNvSpPr txBox="1"/>
+          <p:nvPr/>
+        </p:nvSpPr>
+        <p:spPr>
+          <a:xfrm>
+            <a:off x="8366760" y="3657600"/>
+            <a:ext cx="640080" cy="548640"/>
+          </a:xfrm>
+          <a:prstGeom prst="rect">
+            <a:avLst/>
+          </a:prstGeom>
+          <a:noFill/>
+        </p:spPr>
+        <p:txBody>
+          <a:bodyPr wrap="square" lIns="0" rIns="0" tIns="0" bIns="0" anchor="t">
+            <a:spAutoFit/>
+          </a:bodyPr>
+          <a:lstStyle/>
+          <a:p>
+            <a:pPr algn="l">
+              <a:lnSpc>
+                <a:spcPct val="130000"/>
+              </a:lnSpc>
+            </a:pPr>
+            <a:r>
+              <a:rPr sz="2800" b="1" i="0">
+                <a:solidFill>
+                  <a:srgbClr val="2563EB"/>
                 </a:solidFill>
                 <a:latin typeface="Cambria"/>
               </a:rPr>
-              <a:t>3</a:t>
-            </a:r>
-          </a:p>
-        </p:txBody>
-      </p:sp>
-      <p:sp>
-        <p:nvSpPr>
-          <p:cNvPr id="18" name="TextBox 17"/>
-          <p:cNvSpPr txBox="1"/>
-          <p:nvPr/>
-        </p:nvSpPr>
-        <p:spPr>
-          <a:xfrm>
-            <a:off x="1554480" y="5056631"/>
-            <a:ext cx="3017520" cy="411480"/>
+              <a:t>③</a:t>
+            </a:r>
+          </a:p>
+        </p:txBody>
+      </p:sp>
+      <p:sp>
+        <p:nvSpPr>
+          <p:cNvPr id="20" name="TextBox 19"/>
+          <p:cNvSpPr txBox="1"/>
+          <p:nvPr/>
+        </p:nvSpPr>
+        <p:spPr>
+          <a:xfrm>
+            <a:off x="8961120" y="3730752"/>
+            <a:ext cx="2560320" cy="457200"/>
           </a:xfrm>
           <a:prstGeom prst="rect">
             <a:avLst/>
@@ -9357,27 +10090,27 @@
               </a:lnSpc>
             </a:pPr>
             <a:r>
-              <a:rPr sz="1700" b="1" i="0">
+              <a:rPr sz="1600" b="1" i="0">
                 <a:solidFill>
                   <a:srgbClr val="1F2937"/>
                 </a:solidFill>
                 <a:latin typeface="Cambria"/>
               </a:rPr>
-              <a:t>結果を見る</a:t>
-            </a:r>
-          </a:p>
-        </p:txBody>
-      </p:sp>
-      <p:sp>
-        <p:nvSpPr>
-          <p:cNvPr id="19" name="TextBox 18"/>
-          <p:cNvSpPr txBox="1"/>
-          <p:nvPr/>
-        </p:nvSpPr>
-        <p:spPr>
-          <a:xfrm>
-            <a:off x="1554480" y="5486400"/>
-            <a:ext cx="3017520" cy="731520"/>
+              <a:t>手元だけで完結させる</a:t>
+            </a:r>
+          </a:p>
+        </p:txBody>
+      </p:sp>
+      <p:sp>
+        <p:nvSpPr>
+          <p:cNvPr id="21" name="TextBox 20"/>
+          <p:cNvSpPr txBox="1"/>
+          <p:nvPr/>
+        </p:nvSpPr>
+        <p:spPr>
+          <a:xfrm>
+            <a:off x="8412480" y="4343400"/>
+            <a:ext cx="3063239" cy="1463040"/>
           </a:xfrm>
           <a:prstGeom prst="rect">
             <a:avLst/>
@@ -9392,87 +10125,19 @@
           <a:p>
             <a:pPr algn="l">
               <a:lnSpc>
-                <a:spcPct val="135000"/>
-              </a:lnSpc>
-            </a:pPr>
-            <a:r>
-              <a:rPr sz="1100" b="0" i="0">
+                <a:spcPct val="145000"/>
+              </a:lnSpc>
+            </a:pPr>
+            <a:r>
+              <a:rPr sz="1200" b="0" i="0">
                 <a:solidFill>
                   <a:srgbClr val="5B6472"/>
                 </a:solidFill>
                 <a:latin typeface="Calibri"/>
               </a:rPr>
-              <a:t>気になる項目をクリックすると
-意味と対応方法が日本語で</a:t>
-            </a:r>
-          </a:p>
-        </p:txBody>
-      </p:sp>
-      <p:pic>
-        <p:nvPicPr>
-          <p:cNvPr id="20" name="Picture 19" descr="home.png"/>
-          <p:cNvPicPr>
-            <a:picLocks noChangeAspect="1"/>
-          </p:cNvPicPr>
-          <p:nvPr/>
-        </p:nvPicPr>
-        <p:blipFill>
-          <a:blip r:embed="rId2"/>
-          <a:stretch>
-            <a:fillRect/>
-          </a:stretch>
-        </p:blipFill>
-        <p:spPr>
-          <a:xfrm>
-            <a:off x="5152186" y="1783080"/>
-            <a:ext cx="6474866" cy="4434840"/>
-          </a:xfrm>
-          <a:prstGeom prst="rect">
-            <a:avLst/>
-          </a:prstGeom>
-          <a:ln w="12700">
-            <a:solidFill>
-              <a:srgbClr val="DDE3EE"/>
-            </a:solidFill>
-          </a:ln>
-          <a:effectLst/>
-        </p:spPr>
-      </p:pic>
-      <p:sp>
-        <p:nvSpPr>
-          <p:cNvPr id="21" name="TextBox 20"/>
-          <p:cNvSpPr txBox="1"/>
-          <p:nvPr/>
-        </p:nvSpPr>
-        <p:spPr>
-          <a:xfrm>
-            <a:off x="5120640" y="6291072"/>
-            <a:ext cx="6537960" cy="320040"/>
-          </a:xfrm>
-          <a:prstGeom prst="rect">
-            <a:avLst/>
-          </a:prstGeom>
-          <a:noFill/>
-        </p:spPr>
-        <p:txBody>
-          <a:bodyPr wrap="square" lIns="0" rIns="0" tIns="0" bIns="0" anchor="t">
-            <a:spAutoFit/>
-          </a:bodyPr>
-          <a:lstStyle/>
-          <a:p>
-            <a:pPr algn="ctr">
-              <a:lnSpc>
-                <a:spcPct val="130000"/>
-              </a:lnSpc>
-            </a:pPr>
-            <a:r>
-              <a:rPr sz="1100" b="0" i="0">
-                <a:solidFill>
-                  <a:srgbClr val="5B6472"/>
-                </a:solidFill>
-                <a:latin typeface="Calibri"/>
-              </a:rPr>
-              <a:t>▲ 起動するとこの画面。専門用語も画面の中で説明します</a:t>
+              <a:t>データを外部に送らない。
+追加ソフト無しで動く
+(オフライン・依存ゼロ)</a:t>
             </a:r>
           </a:p>
         </p:txBody>
@@ -9485,7 +10150,7 @@
         </p:nvSpPr>
         <p:spPr>
           <a:xfrm>
-            <a:off x="11247120" y="6492240"/>
+            <a:off x="10972800" y="6446520"/>
             <a:ext cx="914400" cy="274320"/>
           </a:xfrm>
           <a:prstGeom prst="rect">
@@ -9612,7 +10277,7 @@
                 </a:solidFill>
                 <a:latin typeface="Calibri"/>
               </a:rPr>
-              <a:t>04  機能 1 / 4</a:t>
+              <a:t>どこを開発したか</a:t>
             </a:r>
           </a:p>
         </p:txBody>
@@ -9651,29 +10316,75 @@
                 </a:solidFill>
                 <a:latin typeface="Cambria"/>
               </a:rPr>
-              <a:t>①  「どこから調べるべきか」が分かる</a:t>
-            </a:r>
-          </a:p>
-        </p:txBody>
-      </p:sp>
-      <p:sp>
-        <p:nvSpPr>
-          <p:cNvPr id="5" name="TextBox 4"/>
-          <p:cNvSpPr txBox="1"/>
-          <p:nvPr/>
-        </p:nvSpPr>
-        <p:spPr>
-          <a:xfrm>
-            <a:off x="548640" y="1783080"/>
-            <a:ext cx="5212080" cy="457200"/>
-          </a:xfrm>
-          <a:prstGeom prst="rect">
-            <a:avLst/>
-          </a:prstGeom>
-          <a:noFill/>
-        </p:spPr>
-        <p:txBody>
-          <a:bodyPr wrap="square" lIns="0" rIns="0" tIns="0" bIns="0" anchor="t">
+              <a:t>作ったものの全体像</a:t>
+            </a:r>
+          </a:p>
+        </p:txBody>
+      </p:sp>
+      <p:sp>
+        <p:nvSpPr>
+          <p:cNvPr id="5" name="Rectangle 4"/>
+          <p:cNvSpPr/>
+          <p:nvPr/>
+        </p:nvSpPr>
+        <p:spPr>
+          <a:xfrm>
+            <a:off x="7680960" y="457200"/>
+            <a:ext cx="256032" cy="256032"/>
+          </a:xfrm>
+          <a:prstGeom prst="rect">
+            <a:avLst/>
+          </a:prstGeom>
+          <a:solidFill>
+            <a:srgbClr val="E9ECF2"/>
+          </a:solidFill>
+          <a:ln>
+            <a:solidFill>
+              <a:srgbClr val="DDE3EE"/>
+            </a:solidFill>
+          </a:ln>
+          <a:effectLst/>
+        </p:spPr>
+        <p:style>
+          <a:lnRef idx="1">
+            <a:schemeClr val="accent1"/>
+          </a:lnRef>
+          <a:fillRef idx="3">
+            <a:schemeClr val="accent1"/>
+          </a:fillRef>
+          <a:effectRef idx="2">
+            <a:schemeClr val="accent1"/>
+          </a:effectRef>
+          <a:fontRef idx="minor">
+            <a:schemeClr val="lt1"/>
+          </a:fontRef>
+        </p:style>
+        <p:txBody>
+          <a:bodyPr rtlCol="0" anchor="ctr"/>
+          <a:lstStyle/>
+          <a:p>
+            <a:pPr algn="ctr"/>
+          </a:p>
+        </p:txBody>
+      </p:sp>
+      <p:sp>
+        <p:nvSpPr>
+          <p:cNvPr id="6" name="TextBox 5"/>
+          <p:cNvSpPr txBox="1"/>
+          <p:nvPr/>
+        </p:nvSpPr>
+        <p:spPr>
+          <a:xfrm>
+            <a:off x="8001000" y="457200"/>
+            <a:ext cx="1645920" cy="274320"/>
+          </a:xfrm>
+          <a:prstGeom prst="rect">
+            <a:avLst/>
+          </a:prstGeom>
+          <a:noFill/>
+        </p:spPr>
+        <p:txBody>
+          <a:bodyPr wrap="square" lIns="0" rIns="0" tIns="0" bIns="0" anchor="ctr">
             <a:spAutoFit/>
           </a:bodyPr>
           <a:lstStyle/>
@@ -9684,35 +10395,81 @@
               </a:lnSpc>
             </a:pPr>
             <a:r>
-              <a:rPr sz="1800" b="0" i="0">
-                <a:solidFill>
-                  <a:srgbClr val="1F2937"/>
+              <a:rPr sz="1100" b="0" i="0">
+                <a:solidFill>
+                  <a:srgbClr val="5B6472"/>
                 </a:solidFill>
                 <a:latin typeface="Calibri"/>
               </a:rPr>
-              <a:t>会社のすべての PC を</a:t>
-            </a:r>
-          </a:p>
-        </p:txBody>
-      </p:sp>
-      <p:sp>
-        <p:nvSpPr>
-          <p:cNvPr id="6" name="TextBox 5"/>
-          <p:cNvSpPr txBox="1"/>
-          <p:nvPr/>
-        </p:nvSpPr>
-        <p:spPr>
-          <a:xfrm>
-            <a:off x="548640" y="2286000"/>
-            <a:ext cx="5486400" cy="548640"/>
-          </a:xfrm>
-          <a:prstGeom prst="rect">
-            <a:avLst/>
-          </a:prstGeom>
-          <a:noFill/>
-        </p:spPr>
-        <p:txBody>
-          <a:bodyPr wrap="square" lIns="0" rIns="0" tIns="0" bIns="0" anchor="t">
+              <a:t>= 既存 OSS (土台)</a:t>
+            </a:r>
+          </a:p>
+        </p:txBody>
+      </p:sp>
+      <p:sp>
+        <p:nvSpPr>
+          <p:cNvPr id="7" name="Rectangle 6"/>
+          <p:cNvSpPr/>
+          <p:nvPr/>
+        </p:nvSpPr>
+        <p:spPr>
+          <a:xfrm>
+            <a:off x="9692640" y="457200"/>
+            <a:ext cx="256032" cy="256032"/>
+          </a:xfrm>
+          <a:prstGeom prst="rect">
+            <a:avLst/>
+          </a:prstGeom>
+          <a:solidFill>
+            <a:srgbClr val="E8F0FE"/>
+          </a:solidFill>
+          <a:ln>
+            <a:solidFill>
+              <a:srgbClr val="2563EB"/>
+            </a:solidFill>
+          </a:ln>
+          <a:effectLst/>
+        </p:spPr>
+        <p:style>
+          <a:lnRef idx="1">
+            <a:schemeClr val="accent1"/>
+          </a:lnRef>
+          <a:fillRef idx="3">
+            <a:schemeClr val="accent1"/>
+          </a:fillRef>
+          <a:effectRef idx="2">
+            <a:schemeClr val="accent1"/>
+          </a:effectRef>
+          <a:fontRef idx="minor">
+            <a:schemeClr val="lt1"/>
+          </a:fontRef>
+        </p:style>
+        <p:txBody>
+          <a:bodyPr rtlCol="0" anchor="ctr"/>
+          <a:lstStyle/>
+          <a:p>
+            <a:pPr algn="ctr"/>
+          </a:p>
+        </p:txBody>
+      </p:sp>
+      <p:sp>
+        <p:nvSpPr>
+          <p:cNvPr id="8" name="TextBox 7"/>
+          <p:cNvSpPr txBox="1"/>
+          <p:nvPr/>
+        </p:nvSpPr>
+        <p:spPr>
+          <a:xfrm>
+            <a:off x="10012680" y="457200"/>
+            <a:ext cx="1828800" cy="274320"/>
+          </a:xfrm>
+          <a:prstGeom prst="rect">
+            <a:avLst/>
+          </a:prstGeom>
+          <a:noFill/>
+        </p:spPr>
+        <p:txBody>
+          <a:bodyPr wrap="square" lIns="0" rIns="0" tIns="0" bIns="0" anchor="ctr">
             <a:spAutoFit/>
           </a:bodyPr>
           <a:lstStyle/>
@@ -9723,91 +10480,13 @@
               </a:lnSpc>
             </a:pPr>
             <a:r>
-              <a:rPr sz="2600" b="1" i="0">
-                <a:solidFill>
-                  <a:srgbClr val="1F2937"/>
-                </a:solidFill>
-                <a:latin typeface="Cambria"/>
-              </a:rPr>
-              <a:t>「危険度」順に並べます</a:t>
-            </a:r>
-          </a:p>
-        </p:txBody>
-      </p:sp>
-      <p:sp>
-        <p:nvSpPr>
-          <p:cNvPr id="7" name="TextBox 6"/>
-          <p:cNvSpPr txBox="1"/>
-          <p:nvPr/>
-        </p:nvSpPr>
-        <p:spPr>
-          <a:xfrm>
-            <a:off x="548640" y="3291840"/>
-            <a:ext cx="5394960" cy="457200"/>
-          </a:xfrm>
-          <a:prstGeom prst="rect">
-            <a:avLst/>
-          </a:prstGeom>
-          <a:noFill/>
-        </p:spPr>
-        <p:txBody>
-          <a:bodyPr wrap="square" lIns="0" rIns="0" tIns="0" bIns="0" anchor="t">
-            <a:spAutoFit/>
-          </a:bodyPr>
-          <a:lstStyle/>
-          <a:p>
-            <a:pPr algn="l">
-              <a:lnSpc>
-                <a:spcPct val="150000"/>
-              </a:lnSpc>
-            </a:pPr>
-            <a:r>
-              <a:rPr sz="1400" b="0" i="0">
-                <a:solidFill>
-                  <a:srgbClr val="1F2937"/>
+              <a:rPr sz="1100" b="1" i="0">
+                <a:solidFill>
+                  <a:srgbClr val="1D4ED8"/>
                 </a:solidFill>
                 <a:latin typeface="Calibri"/>
               </a:rPr>
-              <a:t>「どの PC から手を付ければいいか」が、</a:t>
-            </a:r>
-          </a:p>
-        </p:txBody>
-      </p:sp>
-      <p:sp>
-        <p:nvSpPr>
-          <p:cNvPr id="8" name="TextBox 7"/>
-          <p:cNvSpPr txBox="1"/>
-          <p:nvPr/>
-        </p:nvSpPr>
-        <p:spPr>
-          <a:xfrm>
-            <a:off x="548640" y="3703320"/>
-            <a:ext cx="5394960" cy="457200"/>
-          </a:xfrm>
-          <a:prstGeom prst="rect">
-            <a:avLst/>
-          </a:prstGeom>
-          <a:noFill/>
-        </p:spPr>
-        <p:txBody>
-          <a:bodyPr wrap="square" lIns="0" rIns="0" tIns="0" bIns="0" anchor="t">
-            <a:spAutoFit/>
-          </a:bodyPr>
-          <a:lstStyle/>
-          <a:p>
-            <a:pPr algn="l">
-              <a:lnSpc>
-                <a:spcPct val="150000"/>
-              </a:lnSpc>
-            </a:pPr>
-            <a:r>
-              <a:rPr sz="1500" b="1" i="0">
-                <a:solidFill>
-                  <a:srgbClr val="2563EB"/>
-                </a:solidFill>
-                <a:latin typeface="Calibri"/>
-              </a:rPr>
-              <a:t>一目で分かります。</a:t>
+              <a:t>= 今回開発した部分</a:t>
             </a:r>
           </a:p>
         </p:txBody>
@@ -9820,8 +10499,753 @@
         </p:nvSpPr>
         <p:spPr>
           <a:xfrm>
-            <a:off x="548640" y="4572000"/>
-            <a:ext cx="5212080" cy="1554480"/>
+            <a:off x="548640" y="2103120"/>
+            <a:ext cx="2194560" cy="1737360"/>
+          </a:xfrm>
+          <a:prstGeom prst="roundRect">
+            <a:avLst/>
+          </a:prstGeom>
+          <a:solidFill>
+            <a:srgbClr val="FFFFFF"/>
+          </a:solidFill>
+          <a:ln w="9525">
+            <a:solidFill>
+              <a:srgbClr val="DDE3EE"/>
+            </a:solidFill>
+          </a:ln>
+          <a:effectLst/>
+        </p:spPr>
+        <p:style>
+          <a:lnRef idx="1">
+            <a:schemeClr val="accent1"/>
+          </a:lnRef>
+          <a:fillRef idx="3">
+            <a:schemeClr val="accent1"/>
+          </a:fillRef>
+          <a:effectRef idx="2">
+            <a:schemeClr val="accent1"/>
+          </a:effectRef>
+          <a:fontRef idx="minor">
+            <a:schemeClr val="lt1"/>
+          </a:fontRef>
+        </p:style>
+        <p:txBody>
+          <a:bodyPr rtlCol="0" anchor="ctr"/>
+          <a:lstStyle/>
+          <a:p>
+            <a:pPr algn="ctr"/>
+          </a:p>
+        </p:txBody>
+      </p:sp>
+      <p:sp>
+        <p:nvSpPr>
+          <p:cNvPr id="10" name="TextBox 9"/>
+          <p:cNvSpPr txBox="1"/>
+          <p:nvPr/>
+        </p:nvSpPr>
+        <p:spPr>
+          <a:xfrm>
+            <a:off x="548640" y="2286000"/>
+            <a:ext cx="2194560" cy="548640"/>
+          </a:xfrm>
+          <a:prstGeom prst="rect">
+            <a:avLst/>
+          </a:prstGeom>
+          <a:noFill/>
+        </p:spPr>
+        <p:txBody>
+          <a:bodyPr wrap="square" lIns="0" rIns="0" tIns="0" bIns="0" anchor="t">
+            <a:spAutoFit/>
+          </a:bodyPr>
+          <a:lstStyle/>
+          <a:p>
+            <a:pPr algn="ctr">
+              <a:lnSpc>
+                <a:spcPct val="130000"/>
+              </a:lnSpc>
+            </a:pPr>
+            <a:r>
+              <a:rPr sz="2800" b="0" i="0">
+                <a:solidFill>
+                  <a:srgbClr val="1F2937"/>
+                </a:solidFill>
+                <a:latin typeface="Calibri"/>
+              </a:rPr>
+              <a:t>📄</a:t>
+            </a:r>
+          </a:p>
+        </p:txBody>
+      </p:sp>
+      <p:sp>
+        <p:nvSpPr>
+          <p:cNvPr id="11" name="TextBox 10"/>
+          <p:cNvSpPr txBox="1"/>
+          <p:nvPr/>
+        </p:nvSpPr>
+        <p:spPr>
+          <a:xfrm>
+            <a:off x="548640" y="2880360"/>
+            <a:ext cx="2194560" cy="365760"/>
+          </a:xfrm>
+          <a:prstGeom prst="rect">
+            <a:avLst/>
+          </a:prstGeom>
+          <a:noFill/>
+        </p:spPr>
+        <p:txBody>
+          <a:bodyPr wrap="square" lIns="0" rIns="0" tIns="0" bIns="0" anchor="t">
+            <a:spAutoFit/>
+          </a:bodyPr>
+          <a:lstStyle/>
+          <a:p>
+            <a:pPr algn="ctr">
+              <a:lnSpc>
+                <a:spcPct val="130000"/>
+              </a:lnSpc>
+            </a:pPr>
+            <a:r>
+              <a:rPr sz="1300" b="1" i="0">
+                <a:solidFill>
+                  <a:srgbClr val="1F2937"/>
+                </a:solidFill>
+                <a:latin typeface="Calibri"/>
+              </a:rPr>
+              <a:t>Windows のログ</a:t>
+            </a:r>
+          </a:p>
+        </p:txBody>
+      </p:sp>
+      <p:sp>
+        <p:nvSpPr>
+          <p:cNvPr id="12" name="TextBox 11"/>
+          <p:cNvSpPr txBox="1"/>
+          <p:nvPr/>
+        </p:nvSpPr>
+        <p:spPr>
+          <a:xfrm>
+            <a:off x="548640" y="3246120"/>
+            <a:ext cx="2194560" cy="320040"/>
+          </a:xfrm>
+          <a:prstGeom prst="rect">
+            <a:avLst/>
+          </a:prstGeom>
+          <a:noFill/>
+        </p:spPr>
+        <p:txBody>
+          <a:bodyPr wrap="square" lIns="0" rIns="0" tIns="0" bIns="0" anchor="t">
+            <a:spAutoFit/>
+          </a:bodyPr>
+          <a:lstStyle/>
+          <a:p>
+            <a:pPr algn="ctr">
+              <a:lnSpc>
+                <a:spcPct val="130000"/>
+              </a:lnSpc>
+            </a:pPr>
+            <a:r>
+              <a:rPr sz="1100" b="0" i="0">
+                <a:solidFill>
+                  <a:srgbClr val="5B6472"/>
+                </a:solidFill>
+                <a:latin typeface="Calibri"/>
+              </a:rPr>
+              <a:t>数万件</a:t>
+            </a:r>
+          </a:p>
+        </p:txBody>
+      </p:sp>
+      <p:sp>
+        <p:nvSpPr>
+          <p:cNvPr id="13" name="Right Arrow 12"/>
+          <p:cNvSpPr/>
+          <p:nvPr/>
+        </p:nvSpPr>
+        <p:spPr>
+          <a:xfrm>
+            <a:off x="2880360" y="2788920"/>
+            <a:ext cx="502920" cy="365760"/>
+          </a:xfrm>
+          <a:prstGeom prst="rightArrow">
+            <a:avLst/>
+          </a:prstGeom>
+          <a:solidFill>
+            <a:srgbClr val="5B6472"/>
+          </a:solidFill>
+          <a:ln>
+            <a:noFill/>
+          </a:ln>
+          <a:effectLst/>
+        </p:spPr>
+        <p:style>
+          <a:lnRef idx="1">
+            <a:schemeClr val="accent1"/>
+          </a:lnRef>
+          <a:fillRef idx="3">
+            <a:schemeClr val="accent1"/>
+          </a:fillRef>
+          <a:effectRef idx="2">
+            <a:schemeClr val="accent1"/>
+          </a:effectRef>
+          <a:fontRef idx="minor">
+            <a:schemeClr val="lt1"/>
+          </a:fontRef>
+        </p:style>
+        <p:txBody>
+          <a:bodyPr rtlCol="0" anchor="ctr"/>
+          <a:lstStyle/>
+          <a:p>
+            <a:pPr algn="ctr"/>
+          </a:p>
+        </p:txBody>
+      </p:sp>
+      <p:sp>
+        <p:nvSpPr>
+          <p:cNvPr id="14" name="Rounded Rectangle 13"/>
+          <p:cNvSpPr/>
+          <p:nvPr/>
+        </p:nvSpPr>
+        <p:spPr>
+          <a:xfrm>
+            <a:off x="3520440" y="2103120"/>
+            <a:ext cx="3291840" cy="1737360"/>
+          </a:xfrm>
+          <a:prstGeom prst="roundRect">
+            <a:avLst/>
+          </a:prstGeom>
+          <a:solidFill>
+            <a:srgbClr val="E9ECF2"/>
+          </a:solidFill>
+          <a:ln w="9525">
+            <a:solidFill>
+              <a:srgbClr val="DDE3EE"/>
+            </a:solidFill>
+          </a:ln>
+          <a:effectLst/>
+        </p:spPr>
+        <p:style>
+          <a:lnRef idx="1">
+            <a:schemeClr val="accent1"/>
+          </a:lnRef>
+          <a:fillRef idx="3">
+            <a:schemeClr val="accent1"/>
+          </a:fillRef>
+          <a:effectRef idx="2">
+            <a:schemeClr val="accent1"/>
+          </a:effectRef>
+          <a:fontRef idx="minor">
+            <a:schemeClr val="lt1"/>
+          </a:fontRef>
+        </p:style>
+        <p:txBody>
+          <a:bodyPr rtlCol="0" anchor="ctr"/>
+          <a:lstStyle/>
+          <a:p>
+            <a:pPr algn="ctr"/>
+          </a:p>
+        </p:txBody>
+      </p:sp>
+      <p:sp>
+        <p:nvSpPr>
+          <p:cNvPr id="15" name="TextBox 14"/>
+          <p:cNvSpPr txBox="1"/>
+          <p:nvPr/>
+        </p:nvSpPr>
+        <p:spPr>
+          <a:xfrm>
+            <a:off x="3520440" y="2304288"/>
+            <a:ext cx="3291840" cy="365760"/>
+          </a:xfrm>
+          <a:prstGeom prst="rect">
+            <a:avLst/>
+          </a:prstGeom>
+          <a:noFill/>
+        </p:spPr>
+        <p:txBody>
+          <a:bodyPr wrap="square" lIns="0" rIns="0" tIns="0" bIns="0" anchor="t">
+            <a:spAutoFit/>
+          </a:bodyPr>
+          <a:lstStyle/>
+          <a:p>
+            <a:pPr algn="ctr">
+              <a:lnSpc>
+                <a:spcPct val="130000"/>
+              </a:lnSpc>
+            </a:pPr>
+            <a:r>
+              <a:rPr sz="1400" b="1" i="0">
+                <a:solidFill>
+                  <a:srgbClr val="1F2937"/>
+                </a:solidFill>
+                <a:latin typeface="Calibri"/>
+              </a:rPr>
+              <a:t>Hayabusa エンジン</a:t>
+            </a:r>
+          </a:p>
+        </p:txBody>
+      </p:sp>
+      <p:sp>
+        <p:nvSpPr>
+          <p:cNvPr id="16" name="TextBox 15"/>
+          <p:cNvSpPr txBox="1"/>
+          <p:nvPr/>
+        </p:nvSpPr>
+        <p:spPr>
+          <a:xfrm>
+            <a:off x="3520440" y="2651760"/>
+            <a:ext cx="3291840" cy="320040"/>
+          </a:xfrm>
+          <a:prstGeom prst="rect">
+            <a:avLst/>
+          </a:prstGeom>
+          <a:noFill/>
+        </p:spPr>
+        <p:txBody>
+          <a:bodyPr wrap="square" lIns="0" rIns="0" tIns="0" bIns="0" anchor="t">
+            <a:spAutoFit/>
+          </a:bodyPr>
+          <a:lstStyle/>
+          <a:p>
+            <a:pPr algn="ctr">
+              <a:lnSpc>
+                <a:spcPct val="130000"/>
+              </a:lnSpc>
+            </a:pPr>
+            <a:r>
+              <a:rPr sz="1100" b="0" i="0">
+                <a:solidFill>
+                  <a:srgbClr val="5B6472"/>
+                </a:solidFill>
+                <a:latin typeface="Calibri"/>
+              </a:rPr>
+              <a:t>(既存 OSS・Rust 製)</a:t>
+            </a:r>
+          </a:p>
+        </p:txBody>
+      </p:sp>
+      <p:sp>
+        <p:nvSpPr>
+          <p:cNvPr id="17" name="Rounded Rectangle 16"/>
+          <p:cNvSpPr/>
+          <p:nvPr/>
+        </p:nvSpPr>
+        <p:spPr>
+          <a:xfrm>
+            <a:off x="3794760" y="3063239"/>
+            <a:ext cx="2743200" cy="548640"/>
+          </a:xfrm>
+          <a:prstGeom prst="roundRect">
+            <a:avLst/>
+          </a:prstGeom>
+          <a:solidFill>
+            <a:srgbClr val="E8F0FE"/>
+          </a:solidFill>
+          <a:ln w="15875">
+            <a:solidFill>
+              <a:srgbClr val="2563EB"/>
+            </a:solidFill>
+          </a:ln>
+          <a:effectLst/>
+        </p:spPr>
+        <p:style>
+          <a:lnRef idx="1">
+            <a:schemeClr val="accent1"/>
+          </a:lnRef>
+          <a:fillRef idx="3">
+            <a:schemeClr val="accent1"/>
+          </a:fillRef>
+          <a:effectRef idx="2">
+            <a:schemeClr val="accent1"/>
+          </a:effectRef>
+          <a:fontRef idx="minor">
+            <a:schemeClr val="lt1"/>
+          </a:fontRef>
+        </p:style>
+        <p:txBody>
+          <a:bodyPr rtlCol="0" anchor="ctr"/>
+          <a:lstStyle/>
+          <a:p>
+            <a:pPr algn="ctr"/>
+          </a:p>
+        </p:txBody>
+      </p:sp>
+      <p:sp>
+        <p:nvSpPr>
+          <p:cNvPr id="18" name="TextBox 17"/>
+          <p:cNvSpPr txBox="1"/>
+          <p:nvPr/>
+        </p:nvSpPr>
+        <p:spPr>
+          <a:xfrm>
+            <a:off x="3794760" y="3063239"/>
+            <a:ext cx="2743200" cy="548640"/>
+          </a:xfrm>
+          <a:prstGeom prst="rect">
+            <a:avLst/>
+          </a:prstGeom>
+          <a:noFill/>
+        </p:spPr>
+        <p:txBody>
+          <a:bodyPr wrap="square" lIns="0" rIns="0" tIns="0" bIns="0" anchor="ctr">
+            <a:spAutoFit/>
+          </a:bodyPr>
+          <a:lstStyle/>
+          <a:p>
+            <a:pPr algn="ctr">
+              <a:lnSpc>
+                <a:spcPct val="130000"/>
+              </a:lnSpc>
+            </a:pPr>
+            <a:r>
+              <a:rPr sz="1150" b="1" i="0">
+                <a:solidFill>
+                  <a:srgbClr val="1D4ED8"/>
+                </a:solidFill>
+                <a:latin typeface="Calibri"/>
+              </a:rPr>
+              <a:t>★ 中身を改造して新機能を追加</a:t>
+            </a:r>
+          </a:p>
+        </p:txBody>
+      </p:sp>
+      <p:sp>
+        <p:nvSpPr>
+          <p:cNvPr id="19" name="Right Arrow 18"/>
+          <p:cNvSpPr/>
+          <p:nvPr/>
+        </p:nvSpPr>
+        <p:spPr>
+          <a:xfrm>
+            <a:off x="6949440" y="2788920"/>
+            <a:ext cx="502920" cy="365760"/>
+          </a:xfrm>
+          <a:prstGeom prst="rightArrow">
+            <a:avLst/>
+          </a:prstGeom>
+          <a:solidFill>
+            <a:srgbClr val="5B6472"/>
+          </a:solidFill>
+          <a:ln>
+            <a:noFill/>
+          </a:ln>
+          <a:effectLst/>
+        </p:spPr>
+        <p:style>
+          <a:lnRef idx="1">
+            <a:schemeClr val="accent1"/>
+          </a:lnRef>
+          <a:fillRef idx="3">
+            <a:schemeClr val="accent1"/>
+          </a:fillRef>
+          <a:effectRef idx="2">
+            <a:schemeClr val="accent1"/>
+          </a:effectRef>
+          <a:fontRef idx="minor">
+            <a:schemeClr val="lt1"/>
+          </a:fontRef>
+        </p:style>
+        <p:txBody>
+          <a:bodyPr rtlCol="0" anchor="ctr"/>
+          <a:lstStyle/>
+          <a:p>
+            <a:pPr algn="ctr"/>
+          </a:p>
+        </p:txBody>
+      </p:sp>
+      <p:sp>
+        <p:nvSpPr>
+          <p:cNvPr id="20" name="Rounded Rectangle 19"/>
+          <p:cNvSpPr/>
+          <p:nvPr/>
+        </p:nvSpPr>
+        <p:spPr>
+          <a:xfrm>
+            <a:off x="7589520" y="2103120"/>
+            <a:ext cx="2743200" cy="1737360"/>
+          </a:xfrm>
+          <a:prstGeom prst="roundRect">
+            <a:avLst/>
+          </a:prstGeom>
+          <a:solidFill>
+            <a:srgbClr val="E8F0FE"/>
+          </a:solidFill>
+          <a:ln w="19050">
+            <a:solidFill>
+              <a:srgbClr val="2563EB"/>
+            </a:solidFill>
+          </a:ln>
+          <a:effectLst/>
+        </p:spPr>
+        <p:style>
+          <a:lnRef idx="1">
+            <a:schemeClr val="accent1"/>
+          </a:lnRef>
+          <a:fillRef idx="3">
+            <a:schemeClr val="accent1"/>
+          </a:fillRef>
+          <a:effectRef idx="2">
+            <a:schemeClr val="accent1"/>
+          </a:effectRef>
+          <a:fontRef idx="minor">
+            <a:schemeClr val="lt1"/>
+          </a:fontRef>
+        </p:style>
+        <p:txBody>
+          <a:bodyPr rtlCol="0" anchor="ctr"/>
+          <a:lstStyle/>
+          <a:p>
+            <a:pPr algn="ctr"/>
+          </a:p>
+        </p:txBody>
+      </p:sp>
+      <p:sp>
+        <p:nvSpPr>
+          <p:cNvPr id="21" name="TextBox 20"/>
+          <p:cNvSpPr txBox="1"/>
+          <p:nvPr/>
+        </p:nvSpPr>
+        <p:spPr>
+          <a:xfrm>
+            <a:off x="7589520" y="2267712"/>
+            <a:ext cx="2743200" cy="502920"/>
+          </a:xfrm>
+          <a:prstGeom prst="rect">
+            <a:avLst/>
+          </a:prstGeom>
+          <a:noFill/>
+        </p:spPr>
+        <p:txBody>
+          <a:bodyPr wrap="square" lIns="0" rIns="0" tIns="0" bIns="0" anchor="t">
+            <a:spAutoFit/>
+          </a:bodyPr>
+          <a:lstStyle/>
+          <a:p>
+            <a:pPr algn="ctr">
+              <a:lnSpc>
+                <a:spcPct val="130000"/>
+              </a:lnSpc>
+            </a:pPr>
+            <a:r>
+              <a:rPr sz="2400" b="0" i="0">
+                <a:solidFill>
+                  <a:srgbClr val="1F2937"/>
+                </a:solidFill>
+                <a:latin typeface="Calibri"/>
+              </a:rPr>
+              <a:t>🖥️</a:t>
+            </a:r>
+          </a:p>
+        </p:txBody>
+      </p:sp>
+      <p:sp>
+        <p:nvSpPr>
+          <p:cNvPr id="22" name="TextBox 21"/>
+          <p:cNvSpPr txBox="1"/>
+          <p:nvPr/>
+        </p:nvSpPr>
+        <p:spPr>
+          <a:xfrm>
+            <a:off x="7589520" y="2816352"/>
+            <a:ext cx="2743200" cy="365760"/>
+          </a:xfrm>
+          <a:prstGeom prst="rect">
+            <a:avLst/>
+          </a:prstGeom>
+          <a:noFill/>
+        </p:spPr>
+        <p:txBody>
+          <a:bodyPr wrap="square" lIns="0" rIns="0" tIns="0" bIns="0" anchor="t">
+            <a:spAutoFit/>
+          </a:bodyPr>
+          <a:lstStyle/>
+          <a:p>
+            <a:pPr algn="ctr">
+              <a:lnSpc>
+                <a:spcPct val="130000"/>
+              </a:lnSpc>
+            </a:pPr>
+            <a:r>
+              <a:rPr sz="1400" b="1" i="0">
+                <a:solidFill>
+                  <a:srgbClr val="1D4ED8"/>
+                </a:solidFill>
+                <a:latin typeface="Calibri"/>
+              </a:rPr>
+              <a:t>調査用 GUI</a:t>
+            </a:r>
+          </a:p>
+        </p:txBody>
+      </p:sp>
+      <p:sp>
+        <p:nvSpPr>
+          <p:cNvPr id="23" name="TextBox 22"/>
+          <p:cNvSpPr txBox="1"/>
+          <p:nvPr/>
+        </p:nvSpPr>
+        <p:spPr>
+          <a:xfrm>
+            <a:off x="7589520" y="3200400"/>
+            <a:ext cx="2743200" cy="320040"/>
+          </a:xfrm>
+          <a:prstGeom prst="rect">
+            <a:avLst/>
+          </a:prstGeom>
+          <a:noFill/>
+        </p:spPr>
+        <p:txBody>
+          <a:bodyPr wrap="square" lIns="0" rIns="0" tIns="0" bIns="0" anchor="t">
+            <a:spAutoFit/>
+          </a:bodyPr>
+          <a:lstStyle/>
+          <a:p>
+            <a:pPr algn="ctr">
+              <a:lnSpc>
+                <a:spcPct val="130000"/>
+              </a:lnSpc>
+            </a:pPr>
+            <a:r>
+              <a:rPr sz="1100" b="0" i="0">
+                <a:solidFill>
+                  <a:srgbClr val="5B6472"/>
+                </a:solidFill>
+                <a:latin typeface="Calibri"/>
+              </a:rPr>
+              <a:t>ゼロから開発 (約 8,000 行)</a:t>
+            </a:r>
+          </a:p>
+        </p:txBody>
+      </p:sp>
+      <p:sp>
+        <p:nvSpPr>
+          <p:cNvPr id="24" name="Right Arrow 23"/>
+          <p:cNvSpPr/>
+          <p:nvPr/>
+        </p:nvSpPr>
+        <p:spPr>
+          <a:xfrm>
+            <a:off x="10469880" y="2788920"/>
+            <a:ext cx="502920" cy="365760"/>
+          </a:xfrm>
+          <a:prstGeom prst="rightArrow">
+            <a:avLst/>
+          </a:prstGeom>
+          <a:solidFill>
+            <a:srgbClr val="5B6472"/>
+          </a:solidFill>
+          <a:ln>
+            <a:noFill/>
+          </a:ln>
+          <a:effectLst/>
+        </p:spPr>
+        <p:style>
+          <a:lnRef idx="1">
+            <a:schemeClr val="accent1"/>
+          </a:lnRef>
+          <a:fillRef idx="3">
+            <a:schemeClr val="accent1"/>
+          </a:fillRef>
+          <a:effectRef idx="2">
+            <a:schemeClr val="accent1"/>
+          </a:effectRef>
+          <a:fontRef idx="minor">
+            <a:schemeClr val="lt1"/>
+          </a:fontRef>
+        </p:style>
+        <p:txBody>
+          <a:bodyPr rtlCol="0" anchor="ctr"/>
+          <a:lstStyle/>
+          <a:p>
+            <a:pPr algn="ctr"/>
+          </a:p>
+        </p:txBody>
+      </p:sp>
+      <p:sp>
+        <p:nvSpPr>
+          <p:cNvPr id="25" name="TextBox 24"/>
+          <p:cNvSpPr txBox="1"/>
+          <p:nvPr/>
+        </p:nvSpPr>
+        <p:spPr>
+          <a:xfrm>
+            <a:off x="10927080" y="2423160"/>
+            <a:ext cx="914400" cy="640080"/>
+          </a:xfrm>
+          <a:prstGeom prst="rect">
+            <a:avLst/>
+          </a:prstGeom>
+          <a:noFill/>
+        </p:spPr>
+        <p:txBody>
+          <a:bodyPr wrap="square" lIns="0" rIns="0" tIns="0" bIns="0" anchor="t">
+            <a:spAutoFit/>
+          </a:bodyPr>
+          <a:lstStyle/>
+          <a:p>
+            <a:pPr algn="ctr">
+              <a:lnSpc>
+                <a:spcPct val="130000"/>
+              </a:lnSpc>
+            </a:pPr>
+            <a:r>
+              <a:rPr sz="3400" b="0" i="0">
+                <a:solidFill>
+                  <a:srgbClr val="1F2937"/>
+                </a:solidFill>
+                <a:latin typeface="Calibri"/>
+              </a:rPr>
+              <a:t>🧑‍💻</a:t>
+            </a:r>
+          </a:p>
+        </p:txBody>
+      </p:sp>
+      <p:sp>
+        <p:nvSpPr>
+          <p:cNvPr id="26" name="TextBox 25"/>
+          <p:cNvSpPr txBox="1"/>
+          <p:nvPr/>
+        </p:nvSpPr>
+        <p:spPr>
+          <a:xfrm>
+            <a:off x="10835640" y="3108960"/>
+            <a:ext cx="1097280" cy="365760"/>
+          </a:xfrm>
+          <a:prstGeom prst="rect">
+            <a:avLst/>
+          </a:prstGeom>
+          <a:noFill/>
+        </p:spPr>
+        <p:txBody>
+          <a:bodyPr wrap="square" lIns="0" rIns="0" tIns="0" bIns="0" anchor="t">
+            <a:spAutoFit/>
+          </a:bodyPr>
+          <a:lstStyle/>
+          <a:p>
+            <a:pPr algn="ctr">
+              <a:lnSpc>
+                <a:spcPct val="130000"/>
+              </a:lnSpc>
+            </a:pPr>
+            <a:r>
+              <a:rPr sz="1200" b="1" i="0">
+                <a:solidFill>
+                  <a:srgbClr val="1F2937"/>
+                </a:solidFill>
+                <a:latin typeface="Calibri"/>
+              </a:rPr>
+              <a:t>調べる人</a:t>
+            </a:r>
+          </a:p>
+        </p:txBody>
+      </p:sp>
+      <p:sp>
+        <p:nvSpPr>
+          <p:cNvPr id="27" name="Rounded Rectangle 26"/>
+          <p:cNvSpPr/>
+          <p:nvPr/>
+        </p:nvSpPr>
+        <p:spPr>
+          <a:xfrm>
+            <a:off x="2286000" y="4846320"/>
+            <a:ext cx="2743200" cy="1371600"/>
           </a:xfrm>
           <a:prstGeom prst="roundRect">
             <a:avLst/>
@@ -9831,7 +11255,7 @@
           </a:solidFill>
           <a:ln w="9525">
             <a:solidFill>
-              <a:srgbClr val="E8F0FE"/>
+              <a:srgbClr val="2563EB"/>
             </a:solidFill>
           </a:ln>
           <a:effectLst/>
@@ -9860,68 +11284,68 @@
       </p:sp>
       <p:sp>
         <p:nvSpPr>
-          <p:cNvPr id="10" name="TextBox 9"/>
-          <p:cNvSpPr txBox="1"/>
-          <p:nvPr/>
-        </p:nvSpPr>
-        <p:spPr>
-          <a:xfrm>
-            <a:off x="777240" y="4754880"/>
-            <a:ext cx="4846320" cy="365760"/>
-          </a:xfrm>
-          <a:prstGeom prst="rect">
-            <a:avLst/>
-          </a:prstGeom>
-          <a:noFill/>
-        </p:spPr>
-        <p:txBody>
-          <a:bodyPr wrap="square" lIns="0" rIns="0" tIns="0" bIns="0" anchor="t">
-            <a:spAutoFit/>
-          </a:bodyPr>
-          <a:lstStyle/>
-          <a:p>
-            <a:pPr algn="l">
-              <a:lnSpc>
-                <a:spcPct val="130000"/>
-              </a:lnSpc>
-            </a:pPr>
-            <a:r>
-              <a:rPr sz="1200" b="1" i="0">
-                <a:solidFill>
-                  <a:srgbClr val="1F2937"/>
+          <p:cNvPr id="28" name="TextBox 27"/>
+          <p:cNvSpPr txBox="1"/>
+          <p:nvPr/>
+        </p:nvSpPr>
+        <p:spPr>
+          <a:xfrm>
+            <a:off x="2286000" y="5029200"/>
+            <a:ext cx="2743200" cy="365760"/>
+          </a:xfrm>
+          <a:prstGeom prst="rect">
+            <a:avLst/>
+          </a:prstGeom>
+          <a:noFill/>
+        </p:spPr>
+        <p:txBody>
+          <a:bodyPr wrap="square" lIns="0" rIns="0" tIns="0" bIns="0" anchor="t">
+            <a:spAutoFit/>
+          </a:bodyPr>
+          <a:lstStyle/>
+          <a:p>
+            <a:pPr algn="ctr">
+              <a:lnSpc>
+                <a:spcPct val="130000"/>
+              </a:lnSpc>
+            </a:pPr>
+            <a:r>
+              <a:rPr sz="1300" b="1" i="0">
+                <a:solidFill>
+                  <a:srgbClr val="1D4ED8"/>
                 </a:solidFill>
                 <a:latin typeface="Calibri"/>
               </a:rPr>
-              <a:t>💡 危険度は過去の検出履歴から自動計算</a:t>
-            </a:r>
-          </a:p>
-        </p:txBody>
-      </p:sp>
-      <p:sp>
-        <p:nvSpPr>
-          <p:cNvPr id="11" name="TextBox 10"/>
-          <p:cNvSpPr txBox="1"/>
-          <p:nvPr/>
-        </p:nvSpPr>
-        <p:spPr>
-          <a:xfrm>
-            <a:off x="777240" y="5166360"/>
-            <a:ext cx="4846320" cy="777240"/>
-          </a:xfrm>
-          <a:prstGeom prst="rect">
-            <a:avLst/>
-          </a:prstGeom>
-          <a:noFill/>
-        </p:spPr>
-        <p:txBody>
-          <a:bodyPr wrap="square" lIns="0" rIns="0" tIns="0" bIns="0" anchor="t">
-            <a:spAutoFit/>
-          </a:bodyPr>
-          <a:lstStyle/>
-          <a:p>
-            <a:pPr algn="l">
-              <a:lnSpc>
-                <a:spcPct val="140000"/>
+              <a:t>📜 自作の検知ルール</a:t>
+            </a:r>
+          </a:p>
+        </p:txBody>
+      </p:sp>
+      <p:sp>
+        <p:nvSpPr>
+          <p:cNvPr id="29" name="TextBox 28"/>
+          <p:cNvSpPr txBox="1"/>
+          <p:nvPr/>
+        </p:nvSpPr>
+        <p:spPr>
+          <a:xfrm>
+            <a:off x="2286000" y="5440680"/>
+            <a:ext cx="2743200" cy="365760"/>
+          </a:xfrm>
+          <a:prstGeom prst="rect">
+            <a:avLst/>
+          </a:prstGeom>
+          <a:noFill/>
+        </p:spPr>
+        <p:txBody>
+          <a:bodyPr wrap="square" lIns="0" rIns="0" tIns="0" bIns="0" anchor="t">
+            <a:spAutoFit/>
+          </a:bodyPr>
+          <a:lstStyle/>
+          <a:p>
+            <a:pPr algn="ctr">
+              <a:lnSpc>
+                <a:spcPct val="130000"/>
               </a:lnSpc>
             </a:pPr>
             <a:r>
@@ -9931,52 +11355,67 @@
                 </a:solidFill>
                 <a:latin typeface="Calibri"/>
               </a:rPr>
-              <a:t>重大なものほど高く、最近のものほど高く。
-「誤検知だった」という判定は引き下げます。</a:t>
-            </a:r>
-          </a:p>
-        </p:txBody>
-      </p:sp>
-      <p:pic>
-        <p:nvPicPr>
-          <p:cNvPr id="12" name="Picture 11" descr="hosts_top.png"/>
-          <p:cNvPicPr>
-            <a:picLocks noChangeAspect="1"/>
-          </p:cNvPicPr>
-          <p:nvPr/>
-        </p:nvPicPr>
-        <p:blipFill>
-          <a:blip r:embed="rId2"/>
-          <a:stretch>
-            <a:fillRect/>
-          </a:stretch>
-        </p:blipFill>
-        <p:spPr>
-          <a:xfrm>
-            <a:off x="6035040" y="2706561"/>
-            <a:ext cx="5623560" cy="2542157"/>
-          </a:xfrm>
-          <a:prstGeom prst="rect">
-            <a:avLst/>
-          </a:prstGeom>
-          <a:ln w="12700">
+              <a:t>13 本 (痕跡隠蔽の検知など)</a:t>
+            </a:r>
+          </a:p>
+        </p:txBody>
+      </p:sp>
+      <p:sp>
+        <p:nvSpPr>
+          <p:cNvPr id="30" name="Rounded Rectangle 29"/>
+          <p:cNvSpPr/>
+          <p:nvPr/>
+        </p:nvSpPr>
+        <p:spPr>
+          <a:xfrm>
+            <a:off x="5394960" y="4846320"/>
+            <a:ext cx="2743200" cy="1371600"/>
+          </a:xfrm>
+          <a:prstGeom prst="roundRect">
+            <a:avLst/>
+          </a:prstGeom>
+          <a:solidFill>
+            <a:srgbClr val="E8F0FE"/>
+          </a:solidFill>
+          <a:ln w="9525">
             <a:solidFill>
-              <a:srgbClr val="DDE3EE"/>
+              <a:srgbClr val="2563EB"/>
             </a:solidFill>
           </a:ln>
           <a:effectLst/>
         </p:spPr>
-      </p:pic>
-      <p:sp>
-        <p:nvSpPr>
-          <p:cNvPr id="13" name="TextBox 12"/>
-          <p:cNvSpPr txBox="1"/>
-          <p:nvPr/>
-        </p:nvSpPr>
-        <p:spPr>
-          <a:xfrm>
-            <a:off x="6035040" y="6291072"/>
-            <a:ext cx="5623560" cy="320040"/>
+        <p:style>
+          <a:lnRef idx="1">
+            <a:schemeClr val="accent1"/>
+          </a:lnRef>
+          <a:fillRef idx="3">
+            <a:schemeClr val="accent1"/>
+          </a:fillRef>
+          <a:effectRef idx="2">
+            <a:schemeClr val="accent1"/>
+          </a:effectRef>
+          <a:fontRef idx="minor">
+            <a:schemeClr val="lt1"/>
+          </a:fontRef>
+        </p:style>
+        <p:txBody>
+          <a:bodyPr rtlCol="0" anchor="ctr"/>
+          <a:lstStyle/>
+          <a:p>
+            <a:pPr algn="ctr"/>
+          </a:p>
+        </p:txBody>
+      </p:sp>
+      <p:sp>
+        <p:nvSpPr>
+          <p:cNvPr id="31" name="TextBox 30"/>
+          <p:cNvSpPr txBox="1"/>
+          <p:nvPr/>
+        </p:nvSpPr>
+        <p:spPr>
+          <a:xfrm>
+            <a:off x="5394960" y="5029200"/>
+            <a:ext cx="2743200" cy="365760"/>
           </a:xfrm>
           <a:prstGeom prst="rect">
             <a:avLst/>
@@ -9995,26 +11434,153 @@
               </a:lnSpc>
             </a:pPr>
             <a:r>
+              <a:rPr sz="1300" b="1" i="0">
+                <a:solidFill>
+                  <a:srgbClr val="1D4ED8"/>
+                </a:solidFill>
+                <a:latin typeface="Calibri"/>
+              </a:rPr>
+              <a:t>🌐 悪いものリスト</a:t>
+            </a:r>
+          </a:p>
+        </p:txBody>
+      </p:sp>
+      <p:sp>
+        <p:nvSpPr>
+          <p:cNvPr id="32" name="TextBox 31"/>
+          <p:cNvSpPr txBox="1"/>
+          <p:nvPr/>
+        </p:nvSpPr>
+        <p:spPr>
+          <a:xfrm>
+            <a:off x="5394960" y="5440680"/>
+            <a:ext cx="2743200" cy="365760"/>
+          </a:xfrm>
+          <a:prstGeom prst="rect">
+            <a:avLst/>
+          </a:prstGeom>
+          <a:noFill/>
+        </p:spPr>
+        <p:txBody>
+          <a:bodyPr wrap="square" lIns="0" rIns="0" tIns="0" bIns="0" anchor="t">
+            <a:spAutoFit/>
+          </a:bodyPr>
+          <a:lstStyle/>
+          <a:p>
+            <a:pPr algn="ctr">
+              <a:lnSpc>
+                <a:spcPct val="130000"/>
+              </a:lnSpc>
+            </a:pPr>
+            <a:r>
               <a:rPr sz="1100" b="0" i="0">
                 <a:solidFill>
                   <a:srgbClr val="5B6472"/>
                 </a:solidFill>
                 <a:latin typeface="Calibri"/>
               </a:rPr>
-              <a:t>▲ 実際の画面 — 危険度バー付きでランキング表示</a:t>
-            </a:r>
-          </a:p>
-        </p:txBody>
-      </p:sp>
-      <p:sp>
-        <p:nvSpPr>
-          <p:cNvPr id="14" name="TextBox 13"/>
-          <p:cNvSpPr txBox="1"/>
-          <p:nvPr/>
-        </p:nvSpPr>
-        <p:spPr>
-          <a:xfrm>
-            <a:off x="11247120" y="6492240"/>
+              <a:t>約 8 万件を自動で取り込み</a:t>
+            </a:r>
+          </a:p>
+        </p:txBody>
+      </p:sp>
+      <p:sp>
+        <p:nvSpPr>
+          <p:cNvPr id="33" name="Up Arrow 32"/>
+          <p:cNvSpPr/>
+          <p:nvPr/>
+        </p:nvSpPr>
+        <p:spPr>
+          <a:xfrm>
+            <a:off x="3474720" y="4069080"/>
+            <a:ext cx="365760" cy="457200"/>
+          </a:xfrm>
+          <a:prstGeom prst="upArrow">
+            <a:avLst/>
+          </a:prstGeom>
+          <a:solidFill>
+            <a:srgbClr val="2563EB"/>
+          </a:solidFill>
+          <a:ln>
+            <a:noFill/>
+          </a:ln>
+          <a:effectLst/>
+        </p:spPr>
+        <p:style>
+          <a:lnRef idx="1">
+            <a:schemeClr val="accent1"/>
+          </a:lnRef>
+          <a:fillRef idx="3">
+            <a:schemeClr val="accent1"/>
+          </a:fillRef>
+          <a:effectRef idx="2">
+            <a:schemeClr val="accent1"/>
+          </a:effectRef>
+          <a:fontRef idx="minor">
+            <a:schemeClr val="lt1"/>
+          </a:fontRef>
+        </p:style>
+        <p:txBody>
+          <a:bodyPr rtlCol="0" anchor="ctr"/>
+          <a:lstStyle/>
+          <a:p>
+            <a:pPr algn="ctr"/>
+          </a:p>
+        </p:txBody>
+      </p:sp>
+      <p:sp>
+        <p:nvSpPr>
+          <p:cNvPr id="34" name="Up Arrow 33"/>
+          <p:cNvSpPr/>
+          <p:nvPr/>
+        </p:nvSpPr>
+        <p:spPr>
+          <a:xfrm>
+            <a:off x="6583680" y="4069080"/>
+            <a:ext cx="365760" cy="457200"/>
+          </a:xfrm>
+          <a:prstGeom prst="upArrow">
+            <a:avLst/>
+          </a:prstGeom>
+          <a:solidFill>
+            <a:srgbClr val="2563EB"/>
+          </a:solidFill>
+          <a:ln>
+            <a:noFill/>
+          </a:ln>
+          <a:effectLst/>
+        </p:spPr>
+        <p:style>
+          <a:lnRef idx="1">
+            <a:schemeClr val="accent1"/>
+          </a:lnRef>
+          <a:fillRef idx="3">
+            <a:schemeClr val="accent1"/>
+          </a:fillRef>
+          <a:effectRef idx="2">
+            <a:schemeClr val="accent1"/>
+          </a:effectRef>
+          <a:fontRef idx="minor">
+            <a:schemeClr val="lt1"/>
+          </a:fontRef>
+        </p:style>
+        <p:txBody>
+          <a:bodyPr rtlCol="0" anchor="ctr"/>
+          <a:lstStyle/>
+          <a:p>
+            <a:pPr algn="ctr"/>
+          </a:p>
+        </p:txBody>
+      </p:sp>
+      <p:sp>
+        <p:nvSpPr>
+          <p:cNvPr id="35" name="TextBox 34"/>
+          <p:cNvSpPr txBox="1"/>
+          <p:nvPr/>
+        </p:nvSpPr>
+        <p:spPr>
+          <a:xfrm>
+            <a:off x="10972800" y="6446520"/>
             <a:ext cx="914400" cy="274320"/>
           </a:xfrm>
           <a:prstGeom prst="rect">
@@ -10141,7 +11707,7 @@
                 </a:solidFill>
                 <a:latin typeface="Calibri"/>
               </a:rPr>
-              <a:t>05  機能 2 / 4</a:t>
+              <a:t>開発内容 1 / 3   (Rust)</a:t>
             </a:r>
           </a:p>
         </p:txBody>
@@ -10180,7 +11746,7 @@
                 </a:solidFill>
                 <a:latin typeface="Cambria"/>
               </a:rPr>
-              <a:t>②  「何が起きているか」が分かる</a:t>
+              <a:t>①  エンジン本体の改造 — 新しい文法を追加</a:t>
             </a:r>
           </a:p>
         </p:txBody>
@@ -10193,8 +11759,8 @@
         </p:nvSpPr>
         <p:spPr>
           <a:xfrm>
-            <a:off x="548640" y="1783080"/>
-            <a:ext cx="5486400" cy="457200"/>
+            <a:off x="548640" y="1691640"/>
+            <a:ext cx="5760720" cy="457200"/>
           </a:xfrm>
           <a:prstGeom prst="rect">
             <a:avLst/>
@@ -10213,13 +11779,13 @@
               </a:lnSpc>
             </a:pPr>
             <a:r>
-              <a:rPr sz="1800" b="0" i="0">
+              <a:rPr sz="1600" b="1" i="0">
                 <a:solidFill>
                   <a:srgbClr val="1F2937"/>
                 </a:solidFill>
                 <a:latin typeface="Calibri"/>
               </a:rPr>
-              <a:t>怪しい動きが見つかったら、</a:t>
+              <a:t>Hayabusa の「ルールの書き方」自体を拡張しました。</a:t>
             </a:r>
           </a:p>
         </p:txBody>
@@ -10232,8 +11798,8 @@
         </p:nvSpPr>
         <p:spPr>
           <a:xfrm>
-            <a:off x="548640" y="2286000"/>
-            <a:ext cx="5943600" cy="548640"/>
+            <a:off x="548640" y="2377440"/>
+            <a:ext cx="5760720" cy="411480"/>
           </a:xfrm>
           <a:prstGeom prst="rect">
             <a:avLst/>
@@ -10252,27 +11818,66 @@
               </a:lnSpc>
             </a:pPr>
             <a:r>
-              <a:rPr sz="2600" b="1" i="0">
+              <a:rPr sz="1500" b="0" i="0">
                 <a:solidFill>
                   <a:srgbClr val="1F2937"/>
                 </a:solidFill>
+                <a:latin typeface="Calibri"/>
+              </a:rPr>
+              <a:t>ルールに 1 行、</a:t>
+            </a:r>
+          </a:p>
+        </p:txBody>
+      </p:sp>
+      <p:sp>
+        <p:nvSpPr>
+          <p:cNvPr id="7" name="TextBox 6"/>
+          <p:cNvSpPr txBox="1"/>
+          <p:nvPr/>
+        </p:nvSpPr>
+        <p:spPr>
+          <a:xfrm>
+            <a:off x="548640" y="2788920"/>
+            <a:ext cx="5760720" cy="548640"/>
+          </a:xfrm>
+          <a:prstGeom prst="rect">
+            <a:avLst/>
+          </a:prstGeom>
+          <a:noFill/>
+        </p:spPr>
+        <p:txBody>
+          <a:bodyPr wrap="square" lIns="0" rIns="0" tIns="0" bIns="0" anchor="t">
+            <a:spAutoFit/>
+          </a:bodyPr>
+          <a:lstStyle/>
+          <a:p>
+            <a:pPr algn="l">
+              <a:lnSpc>
+                <a:spcPct val="130000"/>
+              </a:lnSpc>
+            </a:pPr>
+            <a:r>
+              <a:rPr sz="2100" b="1" i="0">
+                <a:solidFill>
+                  <a:srgbClr val="1D4ED8"/>
+                </a:solidFill>
                 <a:latin typeface="Cambria"/>
               </a:rPr>
-              <a:t>クリックするだけで</a:t>
-            </a:r>
-          </a:p>
-        </p:txBody>
-      </p:sp>
-      <p:sp>
-        <p:nvSpPr>
-          <p:cNvPr id="7" name="TextBox 6"/>
-          <p:cNvSpPr txBox="1"/>
-          <p:nvPr/>
-        </p:nvSpPr>
-        <p:spPr>
-          <a:xfrm>
-            <a:off x="548640" y="2880360"/>
-            <a:ext cx="5943600" cy="548640"/>
+              <a:t>「このリストに載っていたら警告して」</a:t>
+            </a:r>
+          </a:p>
+        </p:txBody>
+      </p:sp>
+      <p:sp>
+        <p:nvSpPr>
+          <p:cNvPr id="8" name="TextBox 7"/>
+          <p:cNvSpPr txBox="1"/>
+          <p:nvPr/>
+        </p:nvSpPr>
+        <p:spPr>
+          <a:xfrm>
+            <a:off x="548640" y="3383280"/>
+            <a:ext cx="5760720" cy="411480"/>
           </a:xfrm>
           <a:prstGeom prst="rect">
             <a:avLst/>
@@ -10291,27 +11896,27 @@
               </a:lnSpc>
             </a:pPr>
             <a:r>
-              <a:rPr sz="2600" b="1" i="0">
-                <a:solidFill>
-                  <a:srgbClr val="2563EB"/>
-                </a:solidFill>
-                <a:latin typeface="Cambria"/>
-              </a:rPr>
-              <a:t>意味と対応方法を表示します</a:t>
-            </a:r>
-          </a:p>
-        </p:txBody>
-      </p:sp>
-      <p:sp>
-        <p:nvSpPr>
-          <p:cNvPr id="8" name="TextBox 7"/>
-          <p:cNvSpPr txBox="1"/>
-          <p:nvPr/>
-        </p:nvSpPr>
-        <p:spPr>
-          <a:xfrm>
-            <a:off x="548640" y="3977639"/>
-            <a:ext cx="5943600" cy="457200"/>
+              <a:rPr sz="1500" b="0" i="0">
+                <a:solidFill>
+                  <a:srgbClr val="1F2937"/>
+                </a:solidFill>
+                <a:latin typeface="Calibri"/>
+              </a:rPr>
+              <a:t>と書けるようにする機能 (lookup:) を、</a:t>
+            </a:r>
+          </a:p>
+        </p:txBody>
+      </p:sp>
+      <p:sp>
+        <p:nvSpPr>
+          <p:cNvPr id="9" name="TextBox 8"/>
+          <p:cNvSpPr txBox="1"/>
+          <p:nvPr/>
+        </p:nvSpPr>
+        <p:spPr>
+          <a:xfrm>
+            <a:off x="548640" y="3794760"/>
+            <a:ext cx="5760720" cy="411480"/>
           </a:xfrm>
           <a:prstGeom prst="rect">
             <a:avLst/>
@@ -10330,27 +11935,73 @@
               </a:lnSpc>
             </a:pPr>
             <a:r>
-              <a:rPr sz="1400" b="0" i="0">
+              <a:rPr sz="1500" b="0" i="0">
                 <a:solidFill>
                   <a:srgbClr val="1F2937"/>
                 </a:solidFill>
                 <a:latin typeface="Calibri"/>
               </a:rPr>
-              <a:t>従来は専門家が翻訳していた情報を、</a:t>
-            </a:r>
-          </a:p>
-        </p:txBody>
-      </p:sp>
-      <p:sp>
-        <p:nvSpPr>
-          <p:cNvPr id="9" name="TextBox 8"/>
-          <p:cNvSpPr txBox="1"/>
-          <p:nvPr/>
-        </p:nvSpPr>
-        <p:spPr>
-          <a:xfrm>
-            <a:off x="548640" y="4389120"/>
-            <a:ext cx="5943600" cy="457200"/>
+              <a:t>エンジンのソースコード (Rust) に追加。</a:t>
+            </a:r>
+          </a:p>
+        </p:txBody>
+      </p:sp>
+      <p:sp>
+        <p:nvSpPr>
+          <p:cNvPr id="10" name="Rounded Rectangle 9"/>
+          <p:cNvSpPr/>
+          <p:nvPr/>
+        </p:nvSpPr>
+        <p:spPr>
+          <a:xfrm>
+            <a:off x="548640" y="4572000"/>
+            <a:ext cx="5760720" cy="1600200"/>
+          </a:xfrm>
+          <a:prstGeom prst="roundRect">
+            <a:avLst/>
+          </a:prstGeom>
+          <a:solidFill>
+            <a:srgbClr val="E8F0FE"/>
+          </a:solidFill>
+          <a:ln w="9525">
+            <a:solidFill>
+              <a:srgbClr val="E8F0FE"/>
+            </a:solidFill>
+          </a:ln>
+          <a:effectLst/>
+        </p:spPr>
+        <p:style>
+          <a:lnRef idx="1">
+            <a:schemeClr val="accent1"/>
+          </a:lnRef>
+          <a:fillRef idx="3">
+            <a:schemeClr val="accent1"/>
+          </a:fillRef>
+          <a:effectRef idx="2">
+            <a:schemeClr val="accent1"/>
+          </a:effectRef>
+          <a:fontRef idx="minor">
+            <a:schemeClr val="lt1"/>
+          </a:fontRef>
+        </p:style>
+        <p:txBody>
+          <a:bodyPr rtlCol="0" anchor="ctr"/>
+          <a:lstStyle/>
+          <a:p>
+            <a:pPr algn="ctr"/>
+          </a:p>
+        </p:txBody>
+      </p:sp>
+      <p:sp>
+        <p:nvSpPr>
+          <p:cNvPr id="11" name="TextBox 10"/>
+          <p:cNvSpPr txBox="1"/>
+          <p:nvPr/>
+        </p:nvSpPr>
+        <p:spPr>
+          <a:xfrm>
+            <a:off x="777240" y="4736592"/>
+            <a:ext cx="5394960" cy="365760"/>
           </a:xfrm>
           <a:prstGeom prst="rect">
             <a:avLst/>
@@ -10369,27 +12020,27 @@
               </a:lnSpc>
             </a:pPr>
             <a:r>
-              <a:rPr sz="1400" b="0" i="0">
+              <a:rPr sz="1250" b="1" i="0">
                 <a:solidFill>
                   <a:srgbClr val="1F2937"/>
                 </a:solidFill>
                 <a:latin typeface="Calibri"/>
               </a:rPr>
-              <a:t>日本語の解説でその場で表示します。</a:t>
-            </a:r>
-          </a:p>
-        </p:txBody>
-      </p:sp>
-      <p:sp>
-        <p:nvSpPr>
-          <p:cNvPr id="10" name="TextBox 9"/>
-          <p:cNvSpPr txBox="1"/>
-          <p:nvPr/>
-        </p:nvSpPr>
-        <p:spPr>
-          <a:xfrm>
-            <a:off x="548640" y="5303520"/>
-            <a:ext cx="5943600" cy="365760"/>
+              <a:t>💡 これで何が嬉しい?</a:t>
+            </a:r>
+          </a:p>
+        </p:txBody>
+      </p:sp>
+      <p:sp>
+        <p:nvSpPr>
+          <p:cNvPr id="12" name="TextBox 11"/>
+          <p:cNvSpPr txBox="1"/>
+          <p:nvPr/>
+        </p:nvSpPr>
+        <p:spPr>
+          <a:xfrm>
+            <a:off x="777240" y="5138928"/>
+            <a:ext cx="5394960" cy="868680"/>
           </a:xfrm>
           <a:prstGeom prst="rect">
             <a:avLst/>
@@ -10404,7 +12055,7 @@
           <a:p>
             <a:pPr algn="l">
               <a:lnSpc>
-                <a:spcPct val="130000"/>
+                <a:spcPct val="145000"/>
               </a:lnSpc>
             </a:pPr>
             <a:r>
@@ -10414,21 +12065,68 @@
                 </a:solidFill>
                 <a:latin typeface="Calibri"/>
               </a:rPr>
-              <a:t>💡 「次にすべきこと」も提示するので、</a:t>
-            </a:r>
-          </a:p>
-        </p:txBody>
-      </p:sp>
-      <p:sp>
-        <p:nvSpPr>
-          <p:cNvPr id="11" name="TextBox 10"/>
-          <p:cNvSpPr txBox="1"/>
-          <p:nvPr/>
-        </p:nvSpPr>
-        <p:spPr>
-          <a:xfrm>
-            <a:off x="548640" y="5623560"/>
-            <a:ext cx="5943600" cy="365760"/>
+              <a:t>世界中で共有されている「悪いものリスト」(約 8 万件) を、
+ルールを書き換えずにそのまま検知に使えるようになった。</a:t>
+            </a:r>
+          </a:p>
+        </p:txBody>
+      </p:sp>
+      <p:sp>
+        <p:nvSpPr>
+          <p:cNvPr id="13" name="Rounded Rectangle 12"/>
+          <p:cNvSpPr/>
+          <p:nvPr/>
+        </p:nvSpPr>
+        <p:spPr>
+          <a:xfrm>
+            <a:off x="6675120" y="1691640"/>
+            <a:ext cx="4983480" cy="3108960"/>
+          </a:xfrm>
+          <a:prstGeom prst="roundRect">
+            <a:avLst/>
+          </a:prstGeom>
+          <a:solidFill>
+            <a:srgbClr val="0F172A"/>
+          </a:solidFill>
+          <a:ln w="9525">
+            <a:solidFill>
+              <a:srgbClr val="0F172A"/>
+            </a:solidFill>
+          </a:ln>
+          <a:effectLst/>
+        </p:spPr>
+        <p:style>
+          <a:lnRef idx="1">
+            <a:schemeClr val="accent1"/>
+          </a:lnRef>
+          <a:fillRef idx="3">
+            <a:schemeClr val="accent1"/>
+          </a:fillRef>
+          <a:effectRef idx="2">
+            <a:schemeClr val="accent1"/>
+          </a:effectRef>
+          <a:fontRef idx="minor">
+            <a:schemeClr val="lt1"/>
+          </a:fontRef>
+        </p:style>
+        <p:txBody>
+          <a:bodyPr rtlCol="0" anchor="ctr"/>
+          <a:lstStyle/>
+          <a:p>
+            <a:pPr algn="ctr"/>
+          </a:p>
+        </p:txBody>
+      </p:sp>
+      <p:sp>
+        <p:nvSpPr>
+          <p:cNvPr id="14" name="TextBox 13"/>
+          <p:cNvSpPr txBox="1"/>
+          <p:nvPr/>
+        </p:nvSpPr>
+        <p:spPr>
+          <a:xfrm>
+            <a:off x="6949440" y="1874519"/>
+            <a:ext cx="4480560" cy="274320"/>
           </a:xfrm>
           <a:prstGeom prst="rect">
             <a:avLst/>
@@ -10447,27 +12145,300 @@
               </a:lnSpc>
             </a:pPr>
             <a:r>
-              <a:rPr sz="1200" b="0" i="0">
-                <a:solidFill>
-                  <a:srgbClr val="5B6472"/>
-                </a:solidFill>
-                <a:latin typeface="Calibri"/>
-              </a:rPr>
-              <a:t>    初心者でも調査の進め方が分かります。</a:t>
-            </a:r>
-          </a:p>
-        </p:txBody>
-      </p:sp>
-      <p:sp>
-        <p:nvSpPr>
-          <p:cNvPr id="12" name="Rounded Rectangle 11"/>
+              <a:rPr sz="1000" b="0" i="0">
+                <a:solidFill>
+                  <a:srgbClr val="94A3B8"/>
+                </a:solidFill>
+                <a:latin typeface="Consolas"/>
+              </a:rPr>
+              <a:t>自作ルールの実例 (簡略化)</a:t>
+            </a:r>
+          </a:p>
+        </p:txBody>
+      </p:sp>
+      <p:sp>
+        <p:nvSpPr>
+          <p:cNvPr id="15" name="TextBox 14"/>
+          <p:cNvSpPr txBox="1"/>
+          <p:nvPr/>
+        </p:nvSpPr>
+        <p:spPr>
+          <a:xfrm>
+            <a:off x="6949440" y="2286000"/>
+            <a:ext cx="4480560" cy="310896"/>
+          </a:xfrm>
+          <a:prstGeom prst="rect">
+            <a:avLst/>
+          </a:prstGeom>
+          <a:noFill/>
+        </p:spPr>
+        <p:txBody>
+          <a:bodyPr wrap="square" lIns="0" rIns="0" tIns="0" bIns="0" anchor="t">
+            <a:spAutoFit/>
+          </a:bodyPr>
+          <a:lstStyle/>
+          <a:p>
+            <a:pPr algn="l">
+              <a:lnSpc>
+                <a:spcPct val="130000"/>
+              </a:lnSpc>
+            </a:pPr>
+            <a:r>
+              <a:rPr sz="1150" b="0" i="0">
+                <a:solidFill>
+                  <a:srgbClr val="CBD5E1"/>
+                </a:solidFill>
+                <a:latin typeface="Consolas"/>
+              </a:rPr>
+              <a:t>title: 危険なドライバの読み込みを検知</a:t>
+            </a:r>
+          </a:p>
+        </p:txBody>
+      </p:sp>
+      <p:sp>
+        <p:nvSpPr>
+          <p:cNvPr id="16" name="TextBox 15"/>
+          <p:cNvSpPr txBox="1"/>
+          <p:nvPr/>
+        </p:nvSpPr>
+        <p:spPr>
+          <a:xfrm>
+            <a:off x="6949440" y="2642616"/>
+            <a:ext cx="4480560" cy="310896"/>
+          </a:xfrm>
+          <a:prstGeom prst="rect">
+            <a:avLst/>
+          </a:prstGeom>
+          <a:noFill/>
+        </p:spPr>
+        <p:txBody>
+          <a:bodyPr wrap="square" lIns="0" rIns="0" tIns="0" bIns="0" anchor="t">
+            <a:spAutoFit/>
+          </a:bodyPr>
+          <a:lstStyle/>
+          <a:p>
+            <a:pPr algn="l">
+              <a:lnSpc>
+                <a:spcPct val="130000"/>
+              </a:lnSpc>
+            </a:pPr>
+            <a:r>
+              <a:rPr sz="1150" b="0" i="0">
+                <a:solidFill>
+                  <a:srgbClr val="7DD3FC"/>
+                </a:solidFill>
+                <a:latin typeface="Consolas"/>
+              </a:rPr>
+              <a:t>lookup:</a:t>
+            </a:r>
+          </a:p>
+        </p:txBody>
+      </p:sp>
+      <p:sp>
+        <p:nvSpPr>
+          <p:cNvPr id="17" name="TextBox 16"/>
+          <p:cNvSpPr txBox="1"/>
+          <p:nvPr/>
+        </p:nvSpPr>
+        <p:spPr>
+          <a:xfrm>
+            <a:off x="6949440" y="2999232"/>
+            <a:ext cx="4480560" cy="310896"/>
+          </a:xfrm>
+          <a:prstGeom prst="rect">
+            <a:avLst/>
+          </a:prstGeom>
+          <a:noFill/>
+        </p:spPr>
+        <p:txBody>
+          <a:bodyPr wrap="square" lIns="0" rIns="0" tIns="0" bIns="0" anchor="t">
+            <a:spAutoFit/>
+          </a:bodyPr>
+          <a:lstStyle/>
+          <a:p>
+            <a:pPr algn="l">
+              <a:lnSpc>
+                <a:spcPct val="130000"/>
+              </a:lnSpc>
+            </a:pPr>
+            <a:r>
+              <a:rPr sz="1150" b="0" i="0">
+                <a:solidFill>
+                  <a:srgbClr val="7DD3FC"/>
+                </a:solidFill>
+                <a:latin typeface="Consolas"/>
+              </a:rPr>
+              <a:t>  file: loldrivers.txt   # 悪い指紋 1,929 件</a:t>
+            </a:r>
+          </a:p>
+        </p:txBody>
+      </p:sp>
+      <p:sp>
+        <p:nvSpPr>
+          <p:cNvPr id="18" name="TextBox 17"/>
+          <p:cNvSpPr txBox="1"/>
+          <p:nvPr/>
+        </p:nvSpPr>
+        <p:spPr>
+          <a:xfrm>
+            <a:off x="6949440" y="3355848"/>
+            <a:ext cx="4480560" cy="310896"/>
+          </a:xfrm>
+          <a:prstGeom prst="rect">
+            <a:avLst/>
+          </a:prstGeom>
+          <a:noFill/>
+        </p:spPr>
+        <p:txBody>
+          <a:bodyPr wrap="square" lIns="0" rIns="0" tIns="0" bIns="0" anchor="t">
+            <a:spAutoFit/>
+          </a:bodyPr>
+          <a:lstStyle/>
+          <a:p>
+            <a:pPr algn="l">
+              <a:lnSpc>
+                <a:spcPct val="130000"/>
+              </a:lnSpc>
+            </a:pPr>
+            <a:r>
+              <a:rPr sz="1150" b="0" i="0">
+                <a:solidFill>
+                  <a:srgbClr val="CBD5E1"/>
+                </a:solidFill>
+                <a:latin typeface="Consolas"/>
+              </a:rPr>
+              <a:t>detection:</a:t>
+            </a:r>
+          </a:p>
+        </p:txBody>
+      </p:sp>
+      <p:sp>
+        <p:nvSpPr>
+          <p:cNvPr id="19" name="TextBox 18"/>
+          <p:cNvSpPr txBox="1"/>
+          <p:nvPr/>
+        </p:nvSpPr>
+        <p:spPr>
+          <a:xfrm>
+            <a:off x="6949440" y="3712464"/>
+            <a:ext cx="4480560" cy="310896"/>
+          </a:xfrm>
+          <a:prstGeom prst="rect">
+            <a:avLst/>
+          </a:prstGeom>
+          <a:noFill/>
+        </p:spPr>
+        <p:txBody>
+          <a:bodyPr wrap="square" lIns="0" rIns="0" tIns="0" bIns="0" anchor="t">
+            <a:spAutoFit/>
+          </a:bodyPr>
+          <a:lstStyle/>
+          <a:p>
+            <a:pPr algn="l">
+              <a:lnSpc>
+                <a:spcPct val="130000"/>
+              </a:lnSpc>
+            </a:pPr>
+            <a:r>
+              <a:rPr sz="1150" b="0" i="0">
+                <a:solidFill>
+                  <a:srgbClr val="7DD3FC"/>
+                </a:solidFill>
+                <a:latin typeface="Consolas"/>
+              </a:rPr>
+              <a:t>  Hashes|lookup: lol_drivers</a:t>
+            </a:r>
+          </a:p>
+        </p:txBody>
+      </p:sp>
+      <p:sp>
+        <p:nvSpPr>
+          <p:cNvPr id="20" name="TextBox 19"/>
+          <p:cNvSpPr txBox="1"/>
+          <p:nvPr/>
+        </p:nvSpPr>
+        <p:spPr>
+          <a:xfrm>
+            <a:off x="6949440" y="4069080"/>
+            <a:ext cx="4480560" cy="310896"/>
+          </a:xfrm>
+          <a:prstGeom prst="rect">
+            <a:avLst/>
+          </a:prstGeom>
+          <a:noFill/>
+        </p:spPr>
+        <p:txBody>
+          <a:bodyPr wrap="square" lIns="0" rIns="0" tIns="0" bIns="0" anchor="t">
+            <a:spAutoFit/>
+          </a:bodyPr>
+          <a:lstStyle/>
+          <a:p>
+            <a:pPr algn="l">
+              <a:lnSpc>
+                <a:spcPct val="130000"/>
+              </a:lnSpc>
+            </a:pPr>
+            <a:r>
+              <a:rPr sz="1150" b="0" i="0">
+                <a:solidFill>
+                  <a:srgbClr val="94A3B8"/>
+                </a:solidFill>
+                <a:latin typeface="Consolas"/>
+              </a:rPr>
+              <a:t>            ↑ 追加した新しい文法</a:t>
+            </a:r>
+          </a:p>
+        </p:txBody>
+      </p:sp>
+      <p:sp>
+        <p:nvSpPr>
+          <p:cNvPr id="21" name="TextBox 20"/>
+          <p:cNvSpPr txBox="1"/>
+          <p:nvPr/>
+        </p:nvSpPr>
+        <p:spPr>
+          <a:xfrm>
+            <a:off x="6949440" y="4425696"/>
+            <a:ext cx="4480560" cy="310896"/>
+          </a:xfrm>
+          <a:prstGeom prst="rect">
+            <a:avLst/>
+          </a:prstGeom>
+          <a:noFill/>
+        </p:spPr>
+        <p:txBody>
+          <a:bodyPr wrap="square" lIns="0" rIns="0" tIns="0" bIns="0" anchor="t">
+            <a:spAutoFit/>
+          </a:bodyPr>
+          <a:lstStyle/>
+          <a:p>
+            <a:pPr algn="l">
+              <a:lnSpc>
+                <a:spcPct val="130000"/>
+              </a:lnSpc>
+            </a:pPr>
+            <a:r>
+              <a:rPr sz="1150" b="0" i="0">
+                <a:solidFill>
+                  <a:srgbClr val="CBD5E1"/>
+                </a:solidFill>
+                <a:latin typeface="Consolas"/>
+              </a:rPr>
+              <a:t>level: critical</a:t>
+            </a:r>
+          </a:p>
+        </p:txBody>
+      </p:sp>
+      <p:sp>
+        <p:nvSpPr>
+          <p:cNvPr id="22" name="Rounded Rectangle 21"/>
           <p:cNvSpPr/>
           <p:nvPr/>
         </p:nvSpPr>
         <p:spPr>
           <a:xfrm>
-            <a:off x="6675120" y="1737360"/>
-            <a:ext cx="4983480" cy="4572000"/>
+            <a:off x="6675120" y="5029200"/>
+            <a:ext cx="4983480" cy="1143000"/>
           </a:xfrm>
           <a:prstGeom prst="roundRect">
             <a:avLst/>
@@ -10506,20 +12477,20 @@
       </p:sp>
       <p:sp>
         <p:nvSpPr>
-          <p:cNvPr id="13" name="Rectangle 12"/>
+          <p:cNvPr id="23" name="Rectangle 22"/>
           <p:cNvSpPr/>
           <p:nvPr/>
         </p:nvSpPr>
         <p:spPr>
           <a:xfrm>
-            <a:off x="6675120" y="1737360"/>
-            <a:ext cx="73152" cy="4572000"/>
+            <a:off x="6675120" y="5029200"/>
+            <a:ext cx="73152" cy="1143000"/>
           </a:xfrm>
           <a:prstGeom prst="rect">
             <a:avLst/>
           </a:prstGeom>
           <a:solidFill>
-            <a:srgbClr val="DC2626"/>
+            <a:srgbClr val="2563EB"/>
           </a:solidFill>
           <a:ln>
             <a:noFill/>
@@ -10550,14 +12521,14 @@
       </p:sp>
       <p:sp>
         <p:nvSpPr>
-          <p:cNvPr id="14" name="TextBox 13"/>
-          <p:cNvSpPr txBox="1"/>
-          <p:nvPr/>
-        </p:nvSpPr>
-        <p:spPr>
-          <a:xfrm>
-            <a:off x="6903720" y="1901952"/>
-            <a:ext cx="914400" cy="365760"/>
+          <p:cNvPr id="24" name="TextBox 23"/>
+          <p:cNvSpPr txBox="1"/>
+          <p:nvPr/>
+        </p:nvSpPr>
+        <p:spPr>
+          <a:xfrm>
+            <a:off x="6903720" y="5193792"/>
+            <a:ext cx="4572000" cy="411480"/>
           </a:xfrm>
           <a:prstGeom prst="rect">
             <a:avLst/>
@@ -10576,27 +12547,27 @@
               </a:lnSpc>
             </a:pPr>
             <a:r>
-              <a:rPr sz="1100" b="1" i="0">
-                <a:solidFill>
-                  <a:srgbClr val="DC2626"/>
-                </a:solidFill>
-                <a:latin typeface="Consolas"/>
-              </a:rPr>
-              <a:t>[重大]</a:t>
-            </a:r>
-          </a:p>
-        </p:txBody>
-      </p:sp>
-      <p:sp>
-        <p:nvSpPr>
-          <p:cNvPr id="15" name="TextBox 14"/>
-          <p:cNvSpPr txBox="1"/>
-          <p:nvPr/>
-        </p:nvSpPr>
-        <p:spPr>
-          <a:xfrm>
-            <a:off x="7589520" y="1847088"/>
-            <a:ext cx="3931920" cy="457200"/>
+              <a:rPr sz="1200" b="1" i="0">
+                <a:solidFill>
+                  <a:srgbClr val="1F2937"/>
+                </a:solidFill>
+                <a:latin typeface="Calibri"/>
+              </a:rPr>
+              <a:t>ログ 1 件ごとにリスト 8 万件と照合しても速度が落ちない</a:t>
+            </a:r>
+          </a:p>
+        </p:txBody>
+      </p:sp>
+      <p:sp>
+        <p:nvSpPr>
+          <p:cNvPr id="25" name="TextBox 24"/>
+          <p:cNvSpPr txBox="1"/>
+          <p:nvPr/>
+        </p:nvSpPr>
+        <p:spPr>
+          <a:xfrm>
+            <a:off x="6903720" y="5596128"/>
+            <a:ext cx="4572000" cy="411480"/>
           </a:xfrm>
           <a:prstGeom prst="rect">
             <a:avLst/>
@@ -10615,264 +12586,26 @@
               </a:lnSpc>
             </a:pPr>
             <a:r>
-              <a:rPr sz="1500" b="1" i="0">
-                <a:solidFill>
-                  <a:srgbClr val="1F2937"/>
-                </a:solidFill>
-                <a:latin typeface="Cambria"/>
-              </a:rPr>
-              <a:t>ID 情報の不正取得を検知</a:t>
-            </a:r>
-          </a:p>
-        </p:txBody>
-      </p:sp>
-      <p:sp>
-        <p:nvSpPr>
-          <p:cNvPr id="16" name="TextBox 15"/>
-          <p:cNvSpPr txBox="1"/>
-          <p:nvPr/>
-        </p:nvSpPr>
-        <p:spPr>
-          <a:xfrm>
-            <a:off x="6903720" y="2423160"/>
-            <a:ext cx="4572000" cy="320040"/>
-          </a:xfrm>
-          <a:prstGeom prst="rect">
-            <a:avLst/>
-          </a:prstGeom>
-          <a:noFill/>
-        </p:spPr>
-        <p:txBody>
-          <a:bodyPr wrap="square" lIns="0" rIns="0" tIns="0" bIns="0" anchor="t">
-            <a:spAutoFit/>
-          </a:bodyPr>
-          <a:lstStyle/>
-          <a:p>
-            <a:pPr algn="l">
-              <a:lnSpc>
-                <a:spcPct val="130000"/>
-              </a:lnSpc>
-            </a:pPr>
-            <a:r>
-              <a:rPr sz="1200" b="1" i="0">
-                <a:solidFill>
-                  <a:srgbClr val="1D4ED8"/>
+              <a:rPr sz="1200" b="0" i="0">
+                <a:solidFill>
+                  <a:srgbClr val="5B6472"/>
                 </a:solidFill>
                 <a:latin typeface="Calibri"/>
               </a:rPr>
-              <a:t>📋 何を検知?</a:t>
-            </a:r>
-          </a:p>
-        </p:txBody>
-      </p:sp>
-      <p:sp>
-        <p:nvSpPr>
-          <p:cNvPr id="17" name="TextBox 16"/>
-          <p:cNvSpPr txBox="1"/>
-          <p:nvPr/>
-        </p:nvSpPr>
-        <p:spPr>
-          <a:xfrm>
-            <a:off x="7040880" y="2788920"/>
-            <a:ext cx="4480560" cy="914400"/>
-          </a:xfrm>
-          <a:prstGeom prst="rect">
-            <a:avLst/>
-          </a:prstGeom>
-          <a:noFill/>
-        </p:spPr>
-        <p:txBody>
-          <a:bodyPr wrap="square" lIns="0" rIns="0" tIns="0" bIns="0" anchor="t">
-            <a:spAutoFit/>
-          </a:bodyPr>
-          <a:lstStyle/>
-          <a:p>
-            <a:pPr algn="l">
-              <a:lnSpc>
-                <a:spcPct val="135000"/>
-              </a:lnSpc>
-            </a:pPr>
-            <a:r>
-              <a:rPr sz="1100" b="0" i="0">
-                <a:solidFill>
-                  <a:srgbClr val="1F2937"/>
-                </a:solidFill>
-                <a:latin typeface="Calibri"/>
-              </a:rPr>
-              <a:t>本来アクセスしてはいけない、パスワード情報の
-メモリ領域へのアクセスが行われた</a:t>
-            </a:r>
-          </a:p>
-        </p:txBody>
-      </p:sp>
-      <p:sp>
-        <p:nvSpPr>
-          <p:cNvPr id="18" name="TextBox 17"/>
-          <p:cNvSpPr txBox="1"/>
-          <p:nvPr/>
-        </p:nvSpPr>
-        <p:spPr>
-          <a:xfrm>
-            <a:off x="6903720" y="3749039"/>
-            <a:ext cx="4572000" cy="320040"/>
-          </a:xfrm>
-          <a:prstGeom prst="rect">
-            <a:avLst/>
-          </a:prstGeom>
-          <a:noFill/>
-        </p:spPr>
-        <p:txBody>
-          <a:bodyPr wrap="square" lIns="0" rIns="0" tIns="0" bIns="0" anchor="t">
-            <a:spAutoFit/>
-          </a:bodyPr>
-          <a:lstStyle/>
-          <a:p>
-            <a:pPr algn="l">
-              <a:lnSpc>
-                <a:spcPct val="130000"/>
-              </a:lnSpc>
-            </a:pPr>
-            <a:r>
-              <a:rPr sz="1200" b="1" i="0">
-                <a:solidFill>
-                  <a:srgbClr val="1D4ED8"/>
-                </a:solidFill>
-                <a:latin typeface="Calibri"/>
-              </a:rPr>
-              <a:t>⚠ 重要度の意味</a:t>
-            </a:r>
-          </a:p>
-        </p:txBody>
-      </p:sp>
-      <p:sp>
-        <p:nvSpPr>
-          <p:cNvPr id="19" name="TextBox 18"/>
-          <p:cNvSpPr txBox="1"/>
-          <p:nvPr/>
-        </p:nvSpPr>
-        <p:spPr>
-          <a:xfrm>
-            <a:off x="7040880" y="4114800"/>
-            <a:ext cx="4480560" cy="914400"/>
-          </a:xfrm>
-          <a:prstGeom prst="rect">
-            <a:avLst/>
-          </a:prstGeom>
-          <a:noFill/>
-        </p:spPr>
-        <p:txBody>
-          <a:bodyPr wrap="square" lIns="0" rIns="0" tIns="0" bIns="0" anchor="t">
-            <a:spAutoFit/>
-          </a:bodyPr>
-          <a:lstStyle/>
-          <a:p>
-            <a:pPr algn="l">
-              <a:lnSpc>
-                <a:spcPct val="135000"/>
-              </a:lnSpc>
-            </a:pPr>
-            <a:r>
-              <a:rPr sz="1100" b="0" i="0">
-                <a:solidFill>
-                  <a:srgbClr val="1F2937"/>
-                </a:solidFill>
-                <a:latin typeface="Calibri"/>
-              </a:rPr>
-              <a:t>今すぐ確認が必要なレベル。
-攻撃が成功している可能性大</a:t>
-            </a:r>
-          </a:p>
-        </p:txBody>
-      </p:sp>
-      <p:sp>
-        <p:nvSpPr>
-          <p:cNvPr id="20" name="TextBox 19"/>
-          <p:cNvSpPr txBox="1"/>
-          <p:nvPr/>
-        </p:nvSpPr>
-        <p:spPr>
-          <a:xfrm>
-            <a:off x="6903720" y="5074920"/>
-            <a:ext cx="4572000" cy="320040"/>
-          </a:xfrm>
-          <a:prstGeom prst="rect">
-            <a:avLst/>
-          </a:prstGeom>
-          <a:noFill/>
-        </p:spPr>
-        <p:txBody>
-          <a:bodyPr wrap="square" lIns="0" rIns="0" tIns="0" bIns="0" anchor="t">
-            <a:spAutoFit/>
-          </a:bodyPr>
-          <a:lstStyle/>
-          <a:p>
-            <a:pPr algn="l">
-              <a:lnSpc>
-                <a:spcPct val="130000"/>
-              </a:lnSpc>
-            </a:pPr>
-            <a:r>
-              <a:rPr sz="1200" b="1" i="0">
-                <a:solidFill>
-                  <a:srgbClr val="1D4ED8"/>
-                </a:solidFill>
-                <a:latin typeface="Calibri"/>
-              </a:rPr>
-              <a:t>→ 次にすべきこと</a:t>
-            </a:r>
-          </a:p>
-        </p:txBody>
-      </p:sp>
-      <p:sp>
-        <p:nvSpPr>
-          <p:cNvPr id="21" name="TextBox 20"/>
-          <p:cNvSpPr txBox="1"/>
-          <p:nvPr/>
-        </p:nvSpPr>
-        <p:spPr>
-          <a:xfrm>
-            <a:off x="7040880" y="5440680"/>
-            <a:ext cx="4480560" cy="914400"/>
-          </a:xfrm>
-          <a:prstGeom prst="rect">
-            <a:avLst/>
-          </a:prstGeom>
-          <a:noFill/>
-        </p:spPr>
-        <p:txBody>
-          <a:bodyPr wrap="square" lIns="0" rIns="0" tIns="0" bIns="0" anchor="t">
-            <a:spAutoFit/>
-          </a:bodyPr>
-          <a:lstStyle/>
-          <a:p>
-            <a:pPr algn="l">
-              <a:lnSpc>
-                <a:spcPct val="135000"/>
-              </a:lnSpc>
-            </a:pPr>
-            <a:r>
-              <a:rPr sz="1100" b="0" i="0">
-                <a:solidFill>
-                  <a:srgbClr val="1F2937"/>
-                </a:solidFill>
-                <a:latin typeface="Calibri"/>
-              </a:rPr>
-              <a:t>1. 該当 PC をネットから切断
-2. 直前の操作履歴を確認
-3. パスワードの一斉変更</a:t>
-            </a:r>
-          </a:p>
-        </p:txBody>
-      </p:sp>
-      <p:sp>
-        <p:nvSpPr>
-          <p:cNvPr id="22" name="TextBox 21"/>
-          <p:cNvSpPr txBox="1"/>
-          <p:nvPr/>
-        </p:nvSpPr>
-        <p:spPr>
-          <a:xfrm>
-            <a:off x="11247120" y="6492240"/>
+              <a:t>よう、起動時に一度だけ読み込んで記憶する設計 (Rust)。</a:t>
+            </a:r>
+          </a:p>
+        </p:txBody>
+      </p:sp>
+      <p:sp>
+        <p:nvSpPr>
+          <p:cNvPr id="26" name="TextBox 25"/>
+          <p:cNvSpPr txBox="1"/>
+          <p:nvPr/>
+        </p:nvSpPr>
+        <p:spPr>
+          <a:xfrm>
+            <a:off x="10972800" y="6446520"/>
             <a:ext cx="914400" cy="274320"/>
           </a:xfrm>
           <a:prstGeom prst="rect">
@@ -10999,7 +12732,7 @@
                 </a:solidFill>
                 <a:latin typeface="Calibri"/>
               </a:rPr>
-              <a:t>06  機能 3 / 4</a:t>
+              <a:t>開発内容 2 / 3   (検知ルール)</a:t>
             </a:r>
           </a:p>
         </p:txBody>
@@ -11038,7 +12771,7 @@
                 </a:solidFill>
                 <a:latin typeface="Cambria"/>
               </a:rPr>
-              <a:t>③  「いつもと違う」を見つける</a:t>
+              <a:t>②  攻撃を見抜く検知ルールを 13 本自作</a:t>
             </a:r>
           </a:p>
         </p:txBody>
@@ -11051,8 +12784,8 @@
         </p:nvSpPr>
         <p:spPr>
           <a:xfrm>
-            <a:off x="548640" y="1600200"/>
-            <a:ext cx="10972800" cy="457200"/>
+            <a:off x="548640" y="1645920"/>
+            <a:ext cx="11064240" cy="457200"/>
           </a:xfrm>
           <a:prstGeom prst="rect">
             <a:avLst/>
@@ -11071,13 +12804,13 @@
               </a:lnSpc>
             </a:pPr>
             <a:r>
-              <a:rPr sz="1500" b="0" i="1">
-                <a:solidFill>
-                  <a:srgbClr val="5B6472"/>
+              <a:rPr sz="1500" b="1" i="1">
+                <a:solidFill>
+                  <a:srgbClr val="1D4ED8"/>
                 </a:solidFill>
                 <a:latin typeface="Calibri"/>
               </a:rPr>
-              <a:t>個別のログが普通でも、全体の傾向で「おかしさ」を検出します。</a:t>
+              <a:t>着眼点: 攻撃者は必ず「証拠隠し」をする。なら、消す行為そのものを検知すればいい。</a:t>
             </a:r>
           </a:p>
         </p:txBody>
@@ -11090,8 +12823,8 @@
         </p:nvSpPr>
         <p:spPr>
           <a:xfrm>
-            <a:off x="548640" y="2240280"/>
-            <a:ext cx="2697480" cy="3063240"/>
+            <a:off x="548640" y="2286000"/>
+            <a:ext cx="2697480" cy="2926080"/>
           </a:xfrm>
           <a:prstGeom prst="roundRect">
             <a:avLst/>
@@ -11136,8 +12869,8 @@
         </p:nvSpPr>
         <p:spPr>
           <a:xfrm>
-            <a:off x="548640" y="2240280"/>
-            <a:ext cx="73152" cy="3063240"/>
+            <a:off x="548640" y="2286000"/>
+            <a:ext cx="73152" cy="2926080"/>
           </a:xfrm>
           <a:prstGeom prst="rect">
             <a:avLst/>
@@ -11180,7 +12913,7 @@
         </p:nvSpPr>
         <p:spPr>
           <a:xfrm>
-            <a:off x="731520" y="2423160"/>
+            <a:off x="731520" y="2468880"/>
             <a:ext cx="914400" cy="640080"/>
           </a:xfrm>
           <a:prstGeom prst="rect">
@@ -11206,7 +12939,7 @@
                 </a:solidFill>
                 <a:latin typeface="Calibri"/>
               </a:rPr>
-              <a:t>🔥</a:t>
+              <a:t>🧹</a:t>
             </a:r>
           </a:p>
         </p:txBody>
@@ -11219,7 +12952,7 @@
         </p:nvSpPr>
         <p:spPr>
           <a:xfrm>
-            <a:off x="731520" y="3108960"/>
+            <a:off x="731520" y="3154680"/>
             <a:ext cx="2423160" cy="457200"/>
           </a:xfrm>
           <a:prstGeom prst="rect">
@@ -11239,13 +12972,13 @@
               </a:lnSpc>
             </a:pPr>
             <a:r>
-              <a:rPr sz="1800" b="1" i="0">
+              <a:rPr sz="1700" b="1" i="0">
                 <a:solidFill>
                   <a:srgbClr val="1F2937"/>
                 </a:solidFill>
                 <a:latin typeface="Cambria"/>
               </a:rPr>
-              <a:t>急増している</a:t>
+              <a:t>ログの消去</a:t>
             </a:r>
           </a:p>
         </p:txBody>
@@ -11259,7 +12992,7 @@
         <p:spPr>
           <a:xfrm>
             <a:off x="731520" y="3657600"/>
-            <a:ext cx="2331720" cy="822960"/>
+            <a:ext cx="2331720" cy="868680"/>
           </a:xfrm>
           <a:prstGeom prst="rect">
             <a:avLst/>
@@ -11284,8 +13017,8 @@
                 </a:solidFill>
                 <a:latin typeface="Calibri"/>
               </a:rPr>
-              <a:t>平常の数十〜数千倍の
-動きが急に発生</a:t>
+              <a:t>調査の手がかりになる
+ログを消すコマンドの実行</a:t>
             </a:r>
           </a:p>
         </p:txBody>
@@ -11299,7 +13032,7 @@
         <p:spPr>
           <a:xfrm>
             <a:off x="731520" y="4617720"/>
-            <a:ext cx="2331720" cy="548640"/>
+            <a:ext cx="2331720" cy="365760"/>
           </a:xfrm>
           <a:prstGeom prst="rect">
             <a:avLst/>
@@ -11324,7 +13057,7 @@
                 </a:solidFill>
                 <a:latin typeface="Calibri"/>
               </a:rPr>
-              <a:t>例: 大量のパスワード試行</a:t>
+              <a:t>(wevtutil 等)</a:t>
             </a:r>
           </a:p>
         </p:txBody>
@@ -11337,8 +13070,8 @@
         </p:nvSpPr>
         <p:spPr>
           <a:xfrm>
-            <a:off x="3429000" y="2240280"/>
-            <a:ext cx="2697480" cy="3063240"/>
+            <a:off x="3429000" y="2286000"/>
+            <a:ext cx="2697480" cy="2926080"/>
           </a:xfrm>
           <a:prstGeom prst="roundRect">
             <a:avLst/>
@@ -11383,8 +13116,8 @@
         </p:nvSpPr>
         <p:spPr>
           <a:xfrm>
-            <a:off x="3429000" y="2240280"/>
-            <a:ext cx="73152" cy="3063240"/>
+            <a:off x="3429000" y="2286000"/>
+            <a:ext cx="73152" cy="2926080"/>
           </a:xfrm>
           <a:prstGeom prst="rect">
             <a:avLst/>
@@ -11427,7 +13160,7 @@
         </p:nvSpPr>
         <p:spPr>
           <a:xfrm>
-            <a:off x="3611880" y="2423160"/>
+            <a:off x="3611880" y="2468880"/>
             <a:ext cx="914400" cy="640080"/>
           </a:xfrm>
           <a:prstGeom prst="rect">
@@ -11453,7 +13186,7 @@
                 </a:solidFill>
                 <a:latin typeface="Calibri"/>
               </a:rPr>
-              <a:t>🌐</a:t>
+              <a:t>💣</a:t>
             </a:r>
           </a:p>
         </p:txBody>
@@ -11466,7 +13199,7 @@
         </p:nvSpPr>
         <p:spPr>
           <a:xfrm>
-            <a:off x="3611880" y="3108960"/>
+            <a:off x="3611880" y="3154680"/>
             <a:ext cx="2423160" cy="457200"/>
           </a:xfrm>
           <a:prstGeom prst="rect">
@@ -11486,13 +13219,13 @@
               </a:lnSpc>
             </a:pPr>
             <a:r>
-              <a:rPr sz="1800" b="1" i="0">
+              <a:rPr sz="1700" b="1" i="0">
                 <a:solidFill>
                   <a:srgbClr val="1F2937"/>
                 </a:solidFill>
                 <a:latin typeface="Cambria"/>
               </a:rPr>
-              <a:t>広がっている</a:t>
+              <a:t>復元データの削除</a:t>
             </a:r>
           </a:p>
         </p:txBody>
@@ -11506,7 +13239,7 @@
         <p:spPr>
           <a:xfrm>
             <a:off x="3611880" y="3657600"/>
-            <a:ext cx="2331720" cy="822960"/>
+            <a:ext cx="2331720" cy="868680"/>
           </a:xfrm>
           <a:prstGeom prst="rect">
             <a:avLst/>
@@ -11531,8 +13264,8 @@
                 </a:solidFill>
                 <a:latin typeface="Calibri"/>
               </a:rPr>
-              <a:t>同じ動きが
-複数の PC で同時発生</a:t>
+              <a:t>バックアップを消す行為
+(ランサムウェアの前兆)</a:t>
             </a:r>
           </a:p>
         </p:txBody>
@@ -11546,7 +13279,7 @@
         <p:spPr>
           <a:xfrm>
             <a:off x="3611880" y="4617720"/>
-            <a:ext cx="2331720" cy="548640"/>
+            <a:ext cx="2331720" cy="365760"/>
           </a:xfrm>
           <a:prstGeom prst="rect">
             <a:avLst/>
@@ -11571,7 +13304,7 @@
                 </a:solidFill>
                 <a:latin typeface="Calibri"/>
               </a:rPr>
-              <a:t>例: ウイルスが社内に拡大</a:t>
+              <a:t>(シャドウコピー削除)</a:t>
             </a:r>
           </a:p>
         </p:txBody>
@@ -11584,8 +13317,8 @@
         </p:nvSpPr>
         <p:spPr>
           <a:xfrm>
-            <a:off x="6309360" y="2240280"/>
-            <a:ext cx="2697480" cy="3063240"/>
+            <a:off x="6309360" y="2286000"/>
+            <a:ext cx="2697480" cy="2926080"/>
           </a:xfrm>
           <a:prstGeom prst="roundRect">
             <a:avLst/>
@@ -11630,8 +13363,8 @@
         </p:nvSpPr>
         <p:spPr>
           <a:xfrm>
-            <a:off x="6309360" y="2240280"/>
-            <a:ext cx="73152" cy="3063240"/>
+            <a:off x="6309360" y="2286000"/>
+            <a:ext cx="73152" cy="2926080"/>
           </a:xfrm>
           <a:prstGeom prst="rect">
             <a:avLst/>
@@ -11674,7 +13407,7 @@
         </p:nvSpPr>
         <p:spPr>
           <a:xfrm>
-            <a:off x="6492240" y="2423160"/>
+            <a:off x="6492240" y="2468880"/>
             <a:ext cx="914400" cy="640080"/>
           </a:xfrm>
           <a:prstGeom prst="rect">
@@ -11700,7 +13433,7 @@
                 </a:solidFill>
                 <a:latin typeface="Calibri"/>
               </a:rPr>
-              <a:t>🤫</a:t>
+              <a:t>🙈</a:t>
             </a:r>
           </a:p>
         </p:txBody>
@@ -11713,7 +13446,7 @@
         </p:nvSpPr>
         <p:spPr>
           <a:xfrm>
-            <a:off x="6492240" y="3108960"/>
+            <a:off x="6492240" y="3154680"/>
             <a:ext cx="2423160" cy="457200"/>
           </a:xfrm>
           <a:prstGeom prst="rect">
@@ -11733,13 +13466,13 @@
               </a:lnSpc>
             </a:pPr>
             <a:r>
-              <a:rPr sz="1800" b="1" i="0">
+              <a:rPr sz="1700" b="1" i="0">
                 <a:solidFill>
                   <a:srgbClr val="1F2937"/>
                 </a:solidFill>
                 <a:latin typeface="Cambria"/>
               </a:rPr>
-              <a:t>急に静かに</a:t>
+              <a:t>監視の無効化</a:t>
             </a:r>
           </a:p>
         </p:txBody>
@@ -11753,7 +13486,7 @@
         <p:spPr>
           <a:xfrm>
             <a:off x="6492240" y="3657600"/>
-            <a:ext cx="2331720" cy="822960"/>
+            <a:ext cx="2331720" cy="868680"/>
           </a:xfrm>
           <a:prstGeom prst="rect">
             <a:avLst/>
@@ -11778,8 +13511,8 @@
                 </a:solidFill>
                 <a:latin typeface="Calibri"/>
               </a:rPr>
-              <a:t>普段活動している PC が
-急にログを残さなくなる</a:t>
+              <a:t>ログを記録する機能や
+監査そのものを止める行為</a:t>
             </a:r>
           </a:p>
         </p:txBody>
@@ -11793,7 +13526,7 @@
         <p:spPr>
           <a:xfrm>
             <a:off x="6492240" y="4617720"/>
-            <a:ext cx="2331720" cy="548640"/>
+            <a:ext cx="2331720" cy="365760"/>
           </a:xfrm>
           <a:prstGeom prst="rect">
             <a:avLst/>
@@ -11818,7 +13551,7 @@
                 </a:solidFill>
                 <a:latin typeface="Calibri"/>
               </a:rPr>
-              <a:t>例: 攻撃者がログを消した</a:t>
+              <a:t>(監査ポリシー改変)</a:t>
             </a:r>
           </a:p>
         </p:txBody>
@@ -11831,8 +13564,8 @@
         </p:nvSpPr>
         <p:spPr>
           <a:xfrm>
-            <a:off x="9189720" y="2240280"/>
-            <a:ext cx="2697480" cy="3063240"/>
+            <a:off x="9189720" y="2286000"/>
+            <a:ext cx="2697480" cy="2926080"/>
           </a:xfrm>
           <a:prstGeom prst="roundRect">
             <a:avLst/>
@@ -11877,8 +13610,8 @@
         </p:nvSpPr>
         <p:spPr>
           <a:xfrm>
-            <a:off x="9189720" y="2240280"/>
-            <a:ext cx="73152" cy="3063240"/>
+            <a:off x="9189720" y="2286000"/>
+            <a:ext cx="73152" cy="2926080"/>
           </a:xfrm>
           <a:prstGeom prst="rect">
             <a:avLst/>
@@ -11921,7 +13654,7 @@
         </p:nvSpPr>
         <p:spPr>
           <a:xfrm>
-            <a:off x="9372600" y="2423160"/>
+            <a:off x="9372600" y="2468880"/>
             <a:ext cx="914400" cy="640080"/>
           </a:xfrm>
           <a:prstGeom prst="rect">
@@ -11947,7 +13680,7 @@
                 </a:solidFill>
                 <a:latin typeface="Calibri"/>
               </a:rPr>
-              <a:t>🌙</a:t>
+              <a:t>🔑</a:t>
             </a:r>
           </a:p>
         </p:txBody>
@@ -11960,7 +13693,7 @@
         </p:nvSpPr>
         <p:spPr>
           <a:xfrm>
-            <a:off x="9372600" y="3108960"/>
+            <a:off x="9372600" y="3154680"/>
             <a:ext cx="2423160" cy="457200"/>
           </a:xfrm>
           <a:prstGeom prst="rect">
@@ -11980,13 +13713,13 @@
               </a:lnSpc>
             </a:pPr>
             <a:r>
-              <a:rPr sz="1800" b="1" i="0">
+              <a:rPr sz="1700" b="1" i="0">
                 <a:solidFill>
                   <a:srgbClr val="1F2937"/>
                 </a:solidFill>
                 <a:latin typeface="Cambria"/>
               </a:rPr>
-              <a:t>時間外の活動</a:t>
+              <a:t>パスワード抜き取り</a:t>
             </a:r>
           </a:p>
         </p:txBody>
@@ -12000,7 +13733,7 @@
         <p:spPr>
           <a:xfrm>
             <a:off x="9372600" y="3657600"/>
-            <a:ext cx="2331720" cy="822960"/>
+            <a:ext cx="2331720" cy="868680"/>
           </a:xfrm>
           <a:prstGeom prst="rect">
             <a:avLst/>
@@ -12025,8 +13758,8 @@
                 </a:solidFill>
                 <a:latin typeface="Calibri"/>
               </a:rPr>
-              <a:t>深夜などの業務時間外に
-重要な動きが発生</a:t>
+              <a:t>Windows が記憶している
+認証情報への不正アクセス</a:t>
             </a:r>
           </a:p>
         </p:txBody>
@@ -12040,7 +13773,7 @@
         <p:spPr>
           <a:xfrm>
             <a:off x="9372600" y="4617720"/>
-            <a:ext cx="2331720" cy="548640"/>
+            <a:ext cx="2331720" cy="365760"/>
           </a:xfrm>
           <a:prstGeom prst="rect">
             <a:avLst/>
@@ -12065,7 +13798,7 @@
                 </a:solidFill>
                 <a:latin typeface="Calibri"/>
               </a:rPr>
-              <a:t>例: 業務外を狙った侵入</a:t>
+              <a:t>(LSASS ダンプ)</a:t>
             </a:r>
           </a:p>
         </p:txBody>
@@ -12078,7 +13811,7 @@
         </p:nvSpPr>
         <p:spPr>
           <a:xfrm>
-            <a:off x="548640" y="5623560"/>
+            <a:off x="548640" y="5486400"/>
             <a:ext cx="11064240" cy="868680"/>
           </a:xfrm>
           <a:prstGeom prst="roundRect">
@@ -12124,8 +13857,8 @@
         </p:nvSpPr>
         <p:spPr>
           <a:xfrm>
-            <a:off x="1554480" y="5623560"/>
-            <a:ext cx="3566160" cy="868680"/>
+            <a:off x="868680" y="5486400"/>
+            <a:ext cx="10515600" cy="868680"/>
           </a:xfrm>
           <a:prstGeom prst="rect">
             <a:avLst/>
@@ -12144,13 +13877,13 @@
               </a:lnSpc>
             </a:pPr>
             <a:r>
-              <a:rPr sz="1400" b="0" i="0">
+              <a:rPr sz="1350" b="0" i="0">
                 <a:solidFill>
                   <a:srgbClr val="1F2937"/>
                 </a:solidFill>
                 <a:latin typeface="Calibri"/>
               </a:rPr>
-              <a:t>💡 実例:  ある PC で疑わしい動きが</a:t>
+              <a:t>誤検知を減らす工夫:  1 つの特徴では鳴らさず、複数の特徴が同時に揃ったときだけ警告する設計に。</a:t>
             </a:r>
           </a:p>
         </p:txBody>
@@ -12163,85 +13896,7 @@
         </p:nvSpPr>
         <p:spPr>
           <a:xfrm>
-            <a:off x="5166360" y="5623560"/>
-            <a:ext cx="2286000" cy="868680"/>
-          </a:xfrm>
-          <a:prstGeom prst="rect">
-            <a:avLst/>
-          </a:prstGeom>
-          <a:noFill/>
-        </p:spPr>
-        <p:txBody>
-          <a:bodyPr wrap="square" lIns="0" rIns="0" tIns="0" bIns="0" anchor="ctr">
-            <a:spAutoFit/>
-          </a:bodyPr>
-          <a:lstStyle/>
-          <a:p>
-            <a:pPr algn="l">
-              <a:lnSpc>
-                <a:spcPct val="130000"/>
-              </a:lnSpc>
-            </a:pPr>
-            <a:r>
-              <a:rPr sz="1900" b="1" i="0">
-                <a:solidFill>
-                  <a:srgbClr val="1D4ED8"/>
-                </a:solidFill>
-                <a:latin typeface="Cambria"/>
-              </a:rPr>
-              <a:t>いつもの 2,492 倍</a:t>
-            </a:r>
-          </a:p>
-        </p:txBody>
-      </p:sp>
-      <p:sp>
-        <p:nvSpPr>
-          <p:cNvPr id="33" name="TextBox 32"/>
-          <p:cNvSpPr txBox="1"/>
-          <p:nvPr/>
-        </p:nvSpPr>
-        <p:spPr>
-          <a:xfrm>
-            <a:off x="7452360" y="5623560"/>
-            <a:ext cx="3840480" cy="868680"/>
-          </a:xfrm>
-          <a:prstGeom prst="rect">
-            <a:avLst/>
-          </a:prstGeom>
-          <a:noFill/>
-        </p:spPr>
-        <p:txBody>
-          <a:bodyPr wrap="square" lIns="0" rIns="0" tIns="0" bIns="0" anchor="ctr">
-            <a:spAutoFit/>
-          </a:bodyPr>
-          <a:lstStyle/>
-          <a:p>
-            <a:pPr algn="l">
-              <a:lnSpc>
-                <a:spcPct val="130000"/>
-              </a:lnSpc>
-            </a:pPr>
-            <a:r>
-              <a:rPr sz="1400" b="0" i="0">
-                <a:solidFill>
-                  <a:srgbClr val="1F2937"/>
-                </a:solidFill>
-                <a:latin typeface="Calibri"/>
-              </a:rPr>
-              <a:t>発生していたのを自動検出。</a:t>
-            </a:r>
-          </a:p>
-        </p:txBody>
-      </p:sp>
-      <p:sp>
-        <p:nvSpPr>
-          <p:cNvPr id="34" name="TextBox 33"/>
-          <p:cNvSpPr txBox="1"/>
-          <p:nvPr/>
-        </p:nvSpPr>
-        <p:spPr>
-          <a:xfrm>
-            <a:off x="11247120" y="6492240"/>
+            <a:off x="10972800" y="6446520"/>
             <a:ext cx="914400" cy="274320"/>
           </a:xfrm>
           <a:prstGeom prst="rect">
@@ -12368,7 +14023,7 @@
                 </a:solidFill>
                 <a:latin typeface="Calibri"/>
               </a:rPr>
-              <a:t>07  機能 4 / 4</a:t>
+              <a:t>開発内容 3 / 3   (Python + JavaScript 約 8,000 行)</a:t>
             </a:r>
           </a:p>
         </p:txBody>
@@ -12407,294 +14062,21 @@
                 </a:solidFill>
                 <a:latin typeface="Cambria"/>
               </a:rPr>
-              <a:t>④  世界中の「悪いものリスト」と自動照合</a:t>
-            </a:r>
-          </a:p>
-        </p:txBody>
-      </p:sp>
-      <p:sp>
-        <p:nvSpPr>
-          <p:cNvPr id="5" name="TextBox 4"/>
-          <p:cNvSpPr txBox="1"/>
+              <a:t>③  結果を「読める」にする GUI をゼロから開発</a:t>
+            </a:r>
+          </a:p>
+        </p:txBody>
+      </p:sp>
+      <p:sp>
+        <p:nvSpPr>
+          <p:cNvPr id="5" name="Rounded Rectangle 4"/>
+          <p:cNvSpPr/>
           <p:nvPr/>
         </p:nvSpPr>
         <p:spPr>
           <a:xfrm>
             <a:off x="548640" y="1783080"/>
-            <a:ext cx="5943600" cy="457200"/>
-          </a:xfrm>
-          <a:prstGeom prst="rect">
-            <a:avLst/>
-          </a:prstGeom>
-          <a:noFill/>
-        </p:spPr>
-        <p:txBody>
-          <a:bodyPr wrap="square" lIns="0" rIns="0" tIns="0" bIns="0" anchor="t">
-            <a:spAutoFit/>
-          </a:bodyPr>
-          <a:lstStyle/>
-          <a:p>
-            <a:pPr algn="l">
-              <a:lnSpc>
-                <a:spcPct val="130000"/>
-              </a:lnSpc>
-            </a:pPr>
-            <a:r>
-              <a:rPr sz="1500" b="0" i="0">
-                <a:solidFill>
-                  <a:srgbClr val="1F2937"/>
-                </a:solidFill>
-                <a:latin typeface="Calibri"/>
-              </a:rPr>
-              <a:t>セキュリティ研究者が日々まとめている</a:t>
-            </a:r>
-          </a:p>
-        </p:txBody>
-      </p:sp>
-      <p:sp>
-        <p:nvSpPr>
-          <p:cNvPr id="6" name="TextBox 5"/>
-          <p:cNvSpPr txBox="1"/>
-          <p:nvPr/>
-        </p:nvSpPr>
-        <p:spPr>
-          <a:xfrm>
-            <a:off x="548640" y="2286000"/>
-            <a:ext cx="5943600" cy="548640"/>
-          </a:xfrm>
-          <a:prstGeom prst="rect">
-            <a:avLst/>
-          </a:prstGeom>
-          <a:noFill/>
-        </p:spPr>
-        <p:txBody>
-          <a:bodyPr wrap="square" lIns="0" rIns="0" tIns="0" bIns="0" anchor="t">
-            <a:spAutoFit/>
-          </a:bodyPr>
-          <a:lstStyle/>
-          <a:p>
-            <a:pPr algn="l">
-              <a:lnSpc>
-                <a:spcPct val="130000"/>
-              </a:lnSpc>
-            </a:pPr>
-            <a:r>
-              <a:rPr sz="2600" b="1" i="0">
-                <a:solidFill>
-                  <a:srgbClr val="1F2937"/>
-                </a:solidFill>
-                <a:latin typeface="Cambria"/>
-              </a:rPr>
-              <a:t>「既知の悪いもの」</a:t>
-            </a:r>
-          </a:p>
-        </p:txBody>
-      </p:sp>
-      <p:sp>
-        <p:nvSpPr>
-          <p:cNvPr id="7" name="TextBox 6"/>
-          <p:cNvSpPr txBox="1"/>
-          <p:nvPr/>
-        </p:nvSpPr>
-        <p:spPr>
-          <a:xfrm>
-            <a:off x="548640" y="2880360"/>
-            <a:ext cx="5943600" cy="457200"/>
-          </a:xfrm>
-          <a:prstGeom prst="rect">
-            <a:avLst/>
-          </a:prstGeom>
-          <a:noFill/>
-        </p:spPr>
-        <p:txBody>
-          <a:bodyPr wrap="square" lIns="0" rIns="0" tIns="0" bIns="0" anchor="t">
-            <a:spAutoFit/>
-          </a:bodyPr>
-          <a:lstStyle/>
-          <a:p>
-            <a:pPr algn="l">
-              <a:lnSpc>
-                <a:spcPct val="130000"/>
-              </a:lnSpc>
-            </a:pPr>
-            <a:r>
-              <a:rPr sz="1800" b="0" i="0">
-                <a:solidFill>
-                  <a:srgbClr val="1D4ED8"/>
-                </a:solidFill>
-                <a:latin typeface="Calibri"/>
-              </a:rPr>
-              <a:t>を 自動で取り込みます。</a:t>
-            </a:r>
-          </a:p>
-        </p:txBody>
-      </p:sp>
-      <p:sp>
-        <p:nvSpPr>
-          <p:cNvPr id="8" name="TextBox 7"/>
-          <p:cNvSpPr txBox="1"/>
-          <p:nvPr/>
-        </p:nvSpPr>
-        <p:spPr>
-          <a:xfrm>
-            <a:off x="548640" y="3840480"/>
-            <a:ext cx="5943600" cy="365760"/>
-          </a:xfrm>
-          <a:prstGeom prst="rect">
-            <a:avLst/>
-          </a:prstGeom>
-          <a:noFill/>
-        </p:spPr>
-        <p:txBody>
-          <a:bodyPr wrap="square" lIns="0" rIns="0" tIns="0" bIns="0" anchor="t">
-            <a:spAutoFit/>
-          </a:bodyPr>
-          <a:lstStyle/>
-          <a:p>
-            <a:pPr algn="l">
-              <a:lnSpc>
-                <a:spcPct val="130000"/>
-              </a:lnSpc>
-            </a:pPr>
-            <a:r>
-              <a:rPr sz="1400" b="0" i="0">
-                <a:solidFill>
-                  <a:srgbClr val="1F2937"/>
-                </a:solidFill>
-                <a:latin typeface="Calibri"/>
-              </a:rPr>
-              <a:t>もしあなたの PC でそれらに該当する動きがあれば、</a:t>
-            </a:r>
-          </a:p>
-        </p:txBody>
-      </p:sp>
-      <p:sp>
-        <p:nvSpPr>
-          <p:cNvPr id="9" name="TextBox 8"/>
-          <p:cNvSpPr txBox="1"/>
-          <p:nvPr/>
-        </p:nvSpPr>
-        <p:spPr>
-          <a:xfrm>
-            <a:off x="548640" y="4297680"/>
-            <a:ext cx="5943600" cy="457200"/>
-          </a:xfrm>
-          <a:prstGeom prst="rect">
-            <a:avLst/>
-          </a:prstGeom>
-          <a:noFill/>
-        </p:spPr>
-        <p:txBody>
-          <a:bodyPr wrap="square" lIns="0" rIns="0" tIns="0" bIns="0" anchor="t">
-            <a:spAutoFit/>
-          </a:bodyPr>
-          <a:lstStyle/>
-          <a:p>
-            <a:pPr algn="l">
-              <a:lnSpc>
-                <a:spcPct val="130000"/>
-              </a:lnSpc>
-            </a:pPr>
-            <a:r>
-              <a:rPr sz="1800" b="1" i="0">
-                <a:solidFill>
-                  <a:srgbClr val="DC2626"/>
-                </a:solidFill>
-                <a:latin typeface="Calibri"/>
-              </a:rPr>
-              <a:t>即座に警告します。</a:t>
-            </a:r>
-          </a:p>
-        </p:txBody>
-      </p:sp>
-      <p:sp>
-        <p:nvSpPr>
-          <p:cNvPr id="10" name="TextBox 9"/>
-          <p:cNvSpPr txBox="1"/>
-          <p:nvPr/>
-        </p:nvSpPr>
-        <p:spPr>
-          <a:xfrm>
-            <a:off x="548640" y="5394960"/>
-            <a:ext cx="5943600" cy="365760"/>
-          </a:xfrm>
-          <a:prstGeom prst="rect">
-            <a:avLst/>
-          </a:prstGeom>
-          <a:noFill/>
-        </p:spPr>
-        <p:txBody>
-          <a:bodyPr wrap="square" lIns="0" rIns="0" tIns="0" bIns="0" anchor="t">
-            <a:spAutoFit/>
-          </a:bodyPr>
-          <a:lstStyle/>
-          <a:p>
-            <a:pPr algn="l">
-              <a:lnSpc>
-                <a:spcPct val="130000"/>
-              </a:lnSpc>
-            </a:pPr>
-            <a:r>
-              <a:rPr sz="1200" b="0" i="0">
-                <a:solidFill>
-                  <a:srgbClr val="5B6472"/>
-                </a:solidFill>
-                <a:latin typeface="Calibri"/>
-              </a:rPr>
-              <a:t>💡 リストはボタン一発、または自動で更新。</a:t>
-            </a:r>
-          </a:p>
-        </p:txBody>
-      </p:sp>
-      <p:sp>
-        <p:nvSpPr>
-          <p:cNvPr id="11" name="TextBox 10"/>
-          <p:cNvSpPr txBox="1"/>
-          <p:nvPr/>
-        </p:nvSpPr>
-        <p:spPr>
-          <a:xfrm>
-            <a:off x="548640" y="5715000"/>
-            <a:ext cx="5943600" cy="365760"/>
-          </a:xfrm>
-          <a:prstGeom prst="rect">
-            <a:avLst/>
-          </a:prstGeom>
-          <a:noFill/>
-        </p:spPr>
-        <p:txBody>
-          <a:bodyPr wrap="square" lIns="0" rIns="0" tIns="0" bIns="0" anchor="t">
-            <a:spAutoFit/>
-          </a:bodyPr>
-          <a:lstStyle/>
-          <a:p>
-            <a:pPr algn="l">
-              <a:lnSpc>
-                <a:spcPct val="130000"/>
-              </a:lnSpc>
-            </a:pPr>
-            <a:r>
-              <a:rPr sz="1200" b="0" i="0">
-                <a:solidFill>
-                  <a:srgbClr val="5B6472"/>
-                </a:solidFill>
-                <a:latin typeface="Calibri"/>
-              </a:rPr>
-              <a:t>    常に最新の脅威情報で守られます。</a:t>
-            </a:r>
-          </a:p>
-        </p:txBody>
-      </p:sp>
-      <p:sp>
-        <p:nvSpPr>
-          <p:cNvPr id="12" name="Rounded Rectangle 11"/>
-          <p:cNvSpPr/>
-          <p:nvPr/>
-        </p:nvSpPr>
-        <p:spPr>
-          <a:xfrm>
-            <a:off x="6675120" y="1737360"/>
-            <a:ext cx="4983480" cy="4572000"/>
+            <a:ext cx="4846320" cy="1371600"/>
           </a:xfrm>
           <a:prstGeom prst="roundRect">
             <a:avLst/>
@@ -12733,14 +14115,14 @@
       </p:sp>
       <p:sp>
         <p:nvSpPr>
-          <p:cNvPr id="13" name="Rectangle 12"/>
+          <p:cNvPr id="6" name="Rectangle 5"/>
           <p:cNvSpPr/>
           <p:nvPr/>
         </p:nvSpPr>
         <p:spPr>
           <a:xfrm>
-            <a:off x="6675120" y="1737360"/>
-            <a:ext cx="73152" cy="4572000"/>
+            <a:off x="548640" y="1783080"/>
+            <a:ext cx="73152" cy="1371600"/>
           </a:xfrm>
           <a:prstGeom prst="rect">
             <a:avLst/>
@@ -12777,14 +14159,300 @@
       </p:sp>
       <p:sp>
         <p:nvSpPr>
+          <p:cNvPr id="7" name="TextBox 6"/>
+          <p:cNvSpPr txBox="1"/>
+          <p:nvPr/>
+        </p:nvSpPr>
+        <p:spPr>
+          <a:xfrm>
+            <a:off x="777240" y="1947672"/>
+            <a:ext cx="731520" cy="640080"/>
+          </a:xfrm>
+          <a:prstGeom prst="rect">
+            <a:avLst/>
+          </a:prstGeom>
+          <a:noFill/>
+        </p:spPr>
+        <p:txBody>
+          <a:bodyPr wrap="square" lIns="0" rIns="0" tIns="0" bIns="0" anchor="t">
+            <a:spAutoFit/>
+          </a:bodyPr>
+          <a:lstStyle/>
+          <a:p>
+            <a:pPr algn="l">
+              <a:lnSpc>
+                <a:spcPct val="130000"/>
+              </a:lnSpc>
+            </a:pPr>
+            <a:r>
+              <a:rPr sz="2600" b="0" i="0">
+                <a:solidFill>
+                  <a:srgbClr val="2563EB"/>
+                </a:solidFill>
+                <a:latin typeface="Calibri"/>
+              </a:rPr>
+              <a:t>🇯🇵</a:t>
+            </a:r>
+          </a:p>
+        </p:txBody>
+      </p:sp>
+      <p:sp>
+        <p:nvSpPr>
+          <p:cNvPr id="8" name="TextBox 7"/>
+          <p:cNvSpPr txBox="1"/>
+          <p:nvPr/>
+        </p:nvSpPr>
+        <p:spPr>
+          <a:xfrm>
+            <a:off x="1554480" y="1929384"/>
+            <a:ext cx="3657600" cy="411480"/>
+          </a:xfrm>
+          <a:prstGeom prst="rect">
+            <a:avLst/>
+          </a:prstGeom>
+          <a:noFill/>
+        </p:spPr>
+        <p:txBody>
+          <a:bodyPr wrap="square" lIns="0" rIns="0" tIns="0" bIns="0" anchor="t">
+            <a:spAutoFit/>
+          </a:bodyPr>
+          <a:lstStyle/>
+          <a:p>
+            <a:pPr algn="l">
+              <a:lnSpc>
+                <a:spcPct val="130000"/>
+              </a:lnSpc>
+            </a:pPr>
+            <a:r>
+              <a:rPr sz="1600" b="1" i="0">
+                <a:solidFill>
+                  <a:srgbClr val="1F2937"/>
+                </a:solidFill>
+                <a:latin typeface="Cambria"/>
+              </a:rPr>
+              <a:t>日本語の解説付き</a:t>
+            </a:r>
+          </a:p>
+        </p:txBody>
+      </p:sp>
+      <p:sp>
+        <p:nvSpPr>
+          <p:cNvPr id="9" name="TextBox 8"/>
+          <p:cNvSpPr txBox="1"/>
+          <p:nvPr/>
+        </p:nvSpPr>
+        <p:spPr>
+          <a:xfrm>
+            <a:off x="1554480" y="2350008"/>
+            <a:ext cx="3703320" cy="731520"/>
+          </a:xfrm>
+          <a:prstGeom prst="rect">
+            <a:avLst/>
+          </a:prstGeom>
+          <a:noFill/>
+        </p:spPr>
+        <p:txBody>
+          <a:bodyPr wrap="square" lIns="0" rIns="0" tIns="0" bIns="0" anchor="t">
+            <a:spAutoFit/>
+          </a:bodyPr>
+          <a:lstStyle/>
+          <a:p>
+            <a:pPr algn="l">
+              <a:lnSpc>
+                <a:spcPct val="135000"/>
+              </a:lnSpc>
+            </a:pPr>
+            <a:r>
+              <a:rPr sz="1100" b="0" i="0">
+                <a:solidFill>
+                  <a:srgbClr val="5B6472"/>
+                </a:solidFill>
+                <a:latin typeface="Calibri"/>
+              </a:rPr>
+              <a:t>検知をクリックすると「何が起きた?
+次にどうする?」を日本語で表示</a:t>
+            </a:r>
+          </a:p>
+        </p:txBody>
+      </p:sp>
+      <p:sp>
+        <p:nvSpPr>
+          <p:cNvPr id="10" name="Rounded Rectangle 9"/>
+          <p:cNvSpPr/>
+          <p:nvPr/>
+        </p:nvSpPr>
+        <p:spPr>
+          <a:xfrm>
+            <a:off x="548640" y="3337560"/>
+            <a:ext cx="4846320" cy="1371600"/>
+          </a:xfrm>
+          <a:prstGeom prst="roundRect">
+            <a:avLst/>
+          </a:prstGeom>
+          <a:solidFill>
+            <a:srgbClr val="FFFFFF"/>
+          </a:solidFill>
+          <a:ln w="9525">
+            <a:solidFill>
+              <a:srgbClr val="DDE3EE"/>
+            </a:solidFill>
+          </a:ln>
+          <a:effectLst/>
+        </p:spPr>
+        <p:style>
+          <a:lnRef idx="1">
+            <a:schemeClr val="accent1"/>
+          </a:lnRef>
+          <a:fillRef idx="3">
+            <a:schemeClr val="accent1"/>
+          </a:fillRef>
+          <a:effectRef idx="2">
+            <a:schemeClr val="accent1"/>
+          </a:effectRef>
+          <a:fontRef idx="minor">
+            <a:schemeClr val="lt1"/>
+          </a:fontRef>
+        </p:style>
+        <p:txBody>
+          <a:bodyPr rtlCol="0" anchor="ctr"/>
+          <a:lstStyle/>
+          <a:p>
+            <a:pPr algn="ctr"/>
+          </a:p>
+        </p:txBody>
+      </p:sp>
+      <p:sp>
+        <p:nvSpPr>
+          <p:cNvPr id="11" name="Rectangle 10"/>
+          <p:cNvSpPr/>
+          <p:nvPr/>
+        </p:nvSpPr>
+        <p:spPr>
+          <a:xfrm>
+            <a:off x="548640" y="3337560"/>
+            <a:ext cx="73152" cy="1371600"/>
+          </a:xfrm>
+          <a:prstGeom prst="rect">
+            <a:avLst/>
+          </a:prstGeom>
+          <a:solidFill>
+            <a:srgbClr val="2563EB"/>
+          </a:solidFill>
+          <a:ln>
+            <a:noFill/>
+          </a:ln>
+          <a:effectLst/>
+        </p:spPr>
+        <p:style>
+          <a:lnRef idx="1">
+            <a:schemeClr val="accent1"/>
+          </a:lnRef>
+          <a:fillRef idx="3">
+            <a:schemeClr val="accent1"/>
+          </a:fillRef>
+          <a:effectRef idx="2">
+            <a:schemeClr val="accent1"/>
+          </a:effectRef>
+          <a:fontRef idx="minor">
+            <a:schemeClr val="lt1"/>
+          </a:fontRef>
+        </p:style>
+        <p:txBody>
+          <a:bodyPr rtlCol="0" anchor="ctr"/>
+          <a:lstStyle/>
+          <a:p>
+            <a:pPr algn="ctr"/>
+          </a:p>
+        </p:txBody>
+      </p:sp>
+      <p:sp>
+        <p:nvSpPr>
+          <p:cNvPr id="12" name="TextBox 11"/>
+          <p:cNvSpPr txBox="1"/>
+          <p:nvPr/>
+        </p:nvSpPr>
+        <p:spPr>
+          <a:xfrm>
+            <a:off x="777240" y="3502152"/>
+            <a:ext cx="731520" cy="640080"/>
+          </a:xfrm>
+          <a:prstGeom prst="rect">
+            <a:avLst/>
+          </a:prstGeom>
+          <a:noFill/>
+        </p:spPr>
+        <p:txBody>
+          <a:bodyPr wrap="square" lIns="0" rIns="0" tIns="0" bIns="0" anchor="t">
+            <a:spAutoFit/>
+          </a:bodyPr>
+          <a:lstStyle/>
+          <a:p>
+            <a:pPr algn="l">
+              <a:lnSpc>
+                <a:spcPct val="130000"/>
+              </a:lnSpc>
+            </a:pPr>
+            <a:r>
+              <a:rPr sz="2600" b="0" i="0">
+                <a:solidFill>
+                  <a:srgbClr val="2563EB"/>
+                </a:solidFill>
+                <a:latin typeface="Calibri"/>
+              </a:rPr>
+              <a:t>🚨</a:t>
+            </a:r>
+          </a:p>
+        </p:txBody>
+      </p:sp>
+      <p:sp>
+        <p:nvSpPr>
+          <p:cNvPr id="13" name="TextBox 12"/>
+          <p:cNvSpPr txBox="1"/>
+          <p:nvPr/>
+        </p:nvSpPr>
+        <p:spPr>
+          <a:xfrm>
+            <a:off x="1554480" y="3483864"/>
+            <a:ext cx="3657600" cy="411480"/>
+          </a:xfrm>
+          <a:prstGeom prst="rect">
+            <a:avLst/>
+          </a:prstGeom>
+          <a:noFill/>
+        </p:spPr>
+        <p:txBody>
+          <a:bodyPr wrap="square" lIns="0" rIns="0" tIns="0" bIns="0" anchor="t">
+            <a:spAutoFit/>
+          </a:bodyPr>
+          <a:lstStyle/>
+          <a:p>
+            <a:pPr algn="l">
+              <a:lnSpc>
+                <a:spcPct val="130000"/>
+              </a:lnSpc>
+            </a:pPr>
+            <a:r>
+              <a:rPr sz="1600" b="1" i="0">
+                <a:solidFill>
+                  <a:srgbClr val="1F2937"/>
+                </a:solidFill>
+                <a:latin typeface="Cambria"/>
+              </a:rPr>
+              <a:t>危険度ランキング</a:t>
+            </a:r>
+          </a:p>
+        </p:txBody>
+      </p:sp>
+      <p:sp>
+        <p:nvSpPr>
           <p:cNvPr id="14" name="TextBox 13"/>
           <p:cNvSpPr txBox="1"/>
           <p:nvPr/>
         </p:nvSpPr>
         <p:spPr>
           <a:xfrm>
-            <a:off x="6903720" y="1920240"/>
-            <a:ext cx="4572000" cy="365760"/>
+            <a:off x="1554480" y="3904487"/>
+            <a:ext cx="3703320" cy="731520"/>
           </a:xfrm>
           <a:prstGeom prst="rect">
             <a:avLst/>
@@ -12799,7 +14467,7 @@
           <a:p>
             <a:pPr algn="l">
               <a:lnSpc>
-                <a:spcPct val="130000"/>
+                <a:spcPct val="135000"/>
               </a:lnSpc>
             </a:pPr>
             <a:r>
@@ -12809,21 +14477,260 @@
                 </a:solidFill>
                 <a:latin typeface="Calibri"/>
               </a:rPr>
-              <a:t>現在の取り込み実績</a:t>
-            </a:r>
-          </a:p>
-        </p:txBody>
-      </p:sp>
-      <p:sp>
-        <p:nvSpPr>
-          <p:cNvPr id="15" name="TextBox 14"/>
-          <p:cNvSpPr txBox="1"/>
-          <p:nvPr/>
-        </p:nvSpPr>
-        <p:spPr>
-          <a:xfrm>
-            <a:off x="6812280" y="2331720"/>
-            <a:ext cx="4754880" cy="1463040"/>
+              <a:t>どの PC から調べるべきかを
+自動採点して並べ替え</a:t>
+            </a:r>
+          </a:p>
+        </p:txBody>
+      </p:sp>
+      <p:sp>
+        <p:nvSpPr>
+          <p:cNvPr id="15" name="Rounded Rectangle 14"/>
+          <p:cNvSpPr/>
+          <p:nvPr/>
+        </p:nvSpPr>
+        <p:spPr>
+          <a:xfrm>
+            <a:off x="548640" y="4892040"/>
+            <a:ext cx="4846320" cy="1371600"/>
+          </a:xfrm>
+          <a:prstGeom prst="roundRect">
+            <a:avLst/>
+          </a:prstGeom>
+          <a:solidFill>
+            <a:srgbClr val="FFFFFF"/>
+          </a:solidFill>
+          <a:ln w="9525">
+            <a:solidFill>
+              <a:srgbClr val="DDE3EE"/>
+            </a:solidFill>
+          </a:ln>
+          <a:effectLst/>
+        </p:spPr>
+        <p:style>
+          <a:lnRef idx="1">
+            <a:schemeClr val="accent1"/>
+          </a:lnRef>
+          <a:fillRef idx="3">
+            <a:schemeClr val="accent1"/>
+          </a:fillRef>
+          <a:effectRef idx="2">
+            <a:schemeClr val="accent1"/>
+          </a:effectRef>
+          <a:fontRef idx="minor">
+            <a:schemeClr val="lt1"/>
+          </a:fontRef>
+        </p:style>
+        <p:txBody>
+          <a:bodyPr rtlCol="0" anchor="ctr"/>
+          <a:lstStyle/>
+          <a:p>
+            <a:pPr algn="ctr"/>
+          </a:p>
+        </p:txBody>
+      </p:sp>
+      <p:sp>
+        <p:nvSpPr>
+          <p:cNvPr id="16" name="Rectangle 15"/>
+          <p:cNvSpPr/>
+          <p:nvPr/>
+        </p:nvSpPr>
+        <p:spPr>
+          <a:xfrm>
+            <a:off x="548640" y="4892040"/>
+            <a:ext cx="73152" cy="1371600"/>
+          </a:xfrm>
+          <a:prstGeom prst="rect">
+            <a:avLst/>
+          </a:prstGeom>
+          <a:solidFill>
+            <a:srgbClr val="2563EB"/>
+          </a:solidFill>
+          <a:ln>
+            <a:noFill/>
+          </a:ln>
+          <a:effectLst/>
+        </p:spPr>
+        <p:style>
+          <a:lnRef idx="1">
+            <a:schemeClr val="accent1"/>
+          </a:lnRef>
+          <a:fillRef idx="3">
+            <a:schemeClr val="accent1"/>
+          </a:fillRef>
+          <a:effectRef idx="2">
+            <a:schemeClr val="accent1"/>
+          </a:effectRef>
+          <a:fontRef idx="minor">
+            <a:schemeClr val="lt1"/>
+          </a:fontRef>
+        </p:style>
+        <p:txBody>
+          <a:bodyPr rtlCol="0" anchor="ctr"/>
+          <a:lstStyle/>
+          <a:p>
+            <a:pPr algn="ctr"/>
+          </a:p>
+        </p:txBody>
+      </p:sp>
+      <p:sp>
+        <p:nvSpPr>
+          <p:cNvPr id="17" name="TextBox 16"/>
+          <p:cNvSpPr txBox="1"/>
+          <p:nvPr/>
+        </p:nvSpPr>
+        <p:spPr>
+          <a:xfrm>
+            <a:off x="777240" y="5056631"/>
+            <a:ext cx="731520" cy="640080"/>
+          </a:xfrm>
+          <a:prstGeom prst="rect">
+            <a:avLst/>
+          </a:prstGeom>
+          <a:noFill/>
+        </p:spPr>
+        <p:txBody>
+          <a:bodyPr wrap="square" lIns="0" rIns="0" tIns="0" bIns="0" anchor="t">
+            <a:spAutoFit/>
+          </a:bodyPr>
+          <a:lstStyle/>
+          <a:p>
+            <a:pPr algn="l">
+              <a:lnSpc>
+                <a:spcPct val="130000"/>
+              </a:lnSpc>
+            </a:pPr>
+            <a:r>
+              <a:rPr sz="2600" b="0" i="0">
+                <a:solidFill>
+                  <a:srgbClr val="2563EB"/>
+                </a:solidFill>
+                <a:latin typeface="Calibri"/>
+              </a:rPr>
+              <a:t>📊</a:t>
+            </a:r>
+          </a:p>
+        </p:txBody>
+      </p:sp>
+      <p:sp>
+        <p:nvSpPr>
+          <p:cNvPr id="18" name="TextBox 17"/>
+          <p:cNvSpPr txBox="1"/>
+          <p:nvPr/>
+        </p:nvSpPr>
+        <p:spPr>
+          <a:xfrm>
+            <a:off x="1554480" y="5038344"/>
+            <a:ext cx="3657600" cy="411480"/>
+          </a:xfrm>
+          <a:prstGeom prst="rect">
+            <a:avLst/>
+          </a:prstGeom>
+          <a:noFill/>
+        </p:spPr>
+        <p:txBody>
+          <a:bodyPr wrap="square" lIns="0" rIns="0" tIns="0" bIns="0" anchor="t">
+            <a:spAutoFit/>
+          </a:bodyPr>
+          <a:lstStyle/>
+          <a:p>
+            <a:pPr algn="l">
+              <a:lnSpc>
+                <a:spcPct val="130000"/>
+              </a:lnSpc>
+            </a:pPr>
+            <a:r>
+              <a:rPr sz="1600" b="1" i="0">
+                <a:solidFill>
+                  <a:srgbClr val="1F2937"/>
+                </a:solidFill>
+                <a:latin typeface="Cambria"/>
+              </a:rPr>
+              <a:t>全体が一目で</a:t>
+            </a:r>
+          </a:p>
+        </p:txBody>
+      </p:sp>
+      <p:sp>
+        <p:nvSpPr>
+          <p:cNvPr id="19" name="TextBox 18"/>
+          <p:cNvSpPr txBox="1"/>
+          <p:nvPr/>
+        </p:nvSpPr>
+        <p:spPr>
+          <a:xfrm>
+            <a:off x="1554480" y="5458968"/>
+            <a:ext cx="3703320" cy="731520"/>
+          </a:xfrm>
+          <a:prstGeom prst="rect">
+            <a:avLst/>
+          </a:prstGeom>
+          <a:noFill/>
+        </p:spPr>
+        <p:txBody>
+          <a:bodyPr wrap="square" lIns="0" rIns="0" tIns="0" bIns="0" anchor="t">
+            <a:spAutoFit/>
+          </a:bodyPr>
+          <a:lstStyle/>
+          <a:p>
+            <a:pPr algn="l">
+              <a:lnSpc>
+                <a:spcPct val="135000"/>
+              </a:lnSpc>
+            </a:pPr>
+            <a:r>
+              <a:rPr sz="1100" b="0" i="0">
+                <a:solidFill>
+                  <a:srgbClr val="5B6472"/>
+                </a:solidFill>
+                <a:latin typeface="Calibri"/>
+              </a:rPr>
+              <a:t>重大度・時間の流れ・多い攻撃を
+グラフで俯瞰</a:t>
+            </a:r>
+          </a:p>
+        </p:txBody>
+      </p:sp>
+      <p:pic>
+        <p:nvPicPr>
+          <p:cNvPr id="20" name="Picture 19" descr="dashboard.png"/>
+          <p:cNvPicPr>
+            <a:picLocks noChangeAspect="1"/>
+          </p:cNvPicPr>
+          <p:nvPr/>
+        </p:nvPicPr>
+        <p:blipFill>
+          <a:blip r:embed="rId2"/>
+          <a:stretch>
+            <a:fillRect/>
+          </a:stretch>
+        </p:blipFill>
+        <p:spPr>
+          <a:xfrm>
+            <a:off x="6484620" y="1691640"/>
+            <a:ext cx="4450080" cy="4572000"/>
+          </a:xfrm>
+          <a:prstGeom prst="rect">
+            <a:avLst/>
+          </a:prstGeom>
+          <a:ln w="12700">
+            <a:solidFill>
+              <a:srgbClr val="DDE3EE"/>
+            </a:solidFill>
+          </a:ln>
+          <a:effectLst/>
+        </p:spPr>
+      </p:pic>
+      <p:sp>
+        <p:nvSpPr>
+          <p:cNvPr id="21" name="TextBox 20"/>
+          <p:cNvSpPr txBox="1"/>
+          <p:nvPr/>
+        </p:nvSpPr>
+        <p:spPr>
+          <a:xfrm>
+            <a:off x="5760720" y="6309360"/>
+            <a:ext cx="5897880" cy="320040"/>
           </a:xfrm>
           <a:prstGeom prst="rect">
             <a:avLst/>
@@ -12842,247 +14749,13 @@
               </a:lnSpc>
             </a:pPr>
             <a:r>
-              <a:rPr sz="8800" b="1" i="0">
-                <a:solidFill>
-                  <a:srgbClr val="1D4ED8"/>
-                </a:solidFill>
-                <a:latin typeface="Cambria"/>
-              </a:rPr>
-              <a:t>約 8 万</a:t>
-            </a:r>
-          </a:p>
-        </p:txBody>
-      </p:sp>
-      <p:sp>
-        <p:nvSpPr>
-          <p:cNvPr id="16" name="TextBox 15"/>
-          <p:cNvSpPr txBox="1"/>
-          <p:nvPr/>
-        </p:nvSpPr>
-        <p:spPr>
-          <a:xfrm>
-            <a:off x="6812280" y="3840480"/>
-            <a:ext cx="4754880" cy="457200"/>
-          </a:xfrm>
-          <a:prstGeom prst="rect">
-            <a:avLst/>
-          </a:prstGeom>
-          <a:noFill/>
-        </p:spPr>
-        <p:txBody>
-          <a:bodyPr wrap="square" lIns="0" rIns="0" tIns="0" bIns="0" anchor="t">
-            <a:spAutoFit/>
-          </a:bodyPr>
-          <a:lstStyle/>
-          <a:p>
-            <a:pPr algn="ctr">
-              <a:lnSpc>
-                <a:spcPct val="130000"/>
-              </a:lnSpc>
-            </a:pPr>
-            <a:r>
-              <a:rPr sz="1500" b="0" i="0">
-                <a:solidFill>
-                  <a:srgbClr val="1F2937"/>
+              <a:rPr sz="1100" b="0" i="0">
+                <a:solidFill>
+                  <a:srgbClr val="5B6472"/>
                 </a:solidFill>
                 <a:latin typeface="Calibri"/>
               </a:rPr>
-              <a:t>件の「既知の悪」を保持</a:t>
-            </a:r>
-          </a:p>
-        </p:txBody>
-      </p:sp>
-      <p:sp>
-        <p:nvSpPr>
-          <p:cNvPr id="17" name="TextBox 16"/>
-          <p:cNvSpPr txBox="1"/>
-          <p:nvPr/>
-        </p:nvSpPr>
-        <p:spPr>
-          <a:xfrm>
-            <a:off x="6903720" y="4572000"/>
-            <a:ext cx="3566160" cy="320040"/>
-          </a:xfrm>
-          <a:prstGeom prst="rect">
-            <a:avLst/>
-          </a:prstGeom>
-          <a:noFill/>
-        </p:spPr>
-        <p:txBody>
-          <a:bodyPr wrap="square" lIns="0" rIns="0" tIns="0" bIns="0" anchor="t">
-            <a:spAutoFit/>
-          </a:bodyPr>
-          <a:lstStyle/>
-          <a:p>
-            <a:pPr algn="l">
-              <a:lnSpc>
-                <a:spcPct val="130000"/>
-              </a:lnSpc>
-            </a:pPr>
-            <a:r>
-              <a:rPr sz="1100" b="0" i="0">
-                <a:solidFill>
-                  <a:srgbClr val="1F2937"/>
-                </a:solidFill>
-                <a:latin typeface="Calibri"/>
-              </a:rPr>
-              <a:t>• 攻撃に使われる URL</a:t>
-            </a:r>
-          </a:p>
-        </p:txBody>
-      </p:sp>
-      <p:sp>
-        <p:nvSpPr>
-          <p:cNvPr id="18" name="TextBox 17"/>
-          <p:cNvSpPr txBox="1"/>
-          <p:nvPr/>
-        </p:nvSpPr>
-        <p:spPr>
-          <a:xfrm>
-            <a:off x="10058400" y="4572000"/>
-            <a:ext cx="1463040" cy="320040"/>
-          </a:xfrm>
-          <a:prstGeom prst="rect">
-            <a:avLst/>
-          </a:prstGeom>
-          <a:noFill/>
-        </p:spPr>
-        <p:txBody>
-          <a:bodyPr wrap="square" lIns="0" rIns="0" tIns="0" bIns="0" anchor="t">
-            <a:spAutoFit/>
-          </a:bodyPr>
-          <a:lstStyle/>
-          <a:p>
-            <a:pPr algn="r">
-              <a:lnSpc>
-                <a:spcPct val="130000"/>
-              </a:lnSpc>
-            </a:pPr>
-            <a:r>
-              <a:rPr sz="1100" b="1" i="0">
-                <a:solidFill>
-                  <a:srgbClr val="1D4ED8"/>
-                </a:solidFill>
-                <a:latin typeface="Calibri"/>
-              </a:rPr>
-              <a:t>約 78,000 件</a:t>
-            </a:r>
-          </a:p>
-        </p:txBody>
-      </p:sp>
-      <p:sp>
-        <p:nvSpPr>
-          <p:cNvPr id="19" name="TextBox 18"/>
-          <p:cNvSpPr txBox="1"/>
-          <p:nvPr/>
-        </p:nvSpPr>
-        <p:spPr>
-          <a:xfrm>
-            <a:off x="6903720" y="4956048"/>
-            <a:ext cx="3566160" cy="320040"/>
-          </a:xfrm>
-          <a:prstGeom prst="rect">
-            <a:avLst/>
-          </a:prstGeom>
-          <a:noFill/>
-        </p:spPr>
-        <p:txBody>
-          <a:bodyPr wrap="square" lIns="0" rIns="0" tIns="0" bIns="0" anchor="t">
-            <a:spAutoFit/>
-          </a:bodyPr>
-          <a:lstStyle/>
-          <a:p>
-            <a:pPr algn="l">
-              <a:lnSpc>
-                <a:spcPct val="130000"/>
-              </a:lnSpc>
-            </a:pPr>
-            <a:r>
-              <a:rPr sz="1100" b="0" i="0">
-                <a:solidFill>
-                  <a:srgbClr val="1F2937"/>
-                </a:solidFill>
-                <a:latin typeface="Calibri"/>
-              </a:rPr>
-              <a:t>• 悪性プログラムの指紋 (ハッシュ)</a:t>
-            </a:r>
-          </a:p>
-        </p:txBody>
-      </p:sp>
-      <p:sp>
-        <p:nvSpPr>
-          <p:cNvPr id="20" name="TextBox 19"/>
-          <p:cNvSpPr txBox="1"/>
-          <p:nvPr/>
-        </p:nvSpPr>
-        <p:spPr>
-          <a:xfrm>
-            <a:off x="10058400" y="4956048"/>
-            <a:ext cx="1463040" cy="320040"/>
-          </a:xfrm>
-          <a:prstGeom prst="rect">
-            <a:avLst/>
-          </a:prstGeom>
-          <a:noFill/>
-        </p:spPr>
-        <p:txBody>
-          <a:bodyPr wrap="square" lIns="0" rIns="0" tIns="0" bIns="0" anchor="t">
-            <a:spAutoFit/>
-          </a:bodyPr>
-          <a:lstStyle/>
-          <a:p>
-            <a:pPr algn="r">
-              <a:lnSpc>
-                <a:spcPct val="130000"/>
-              </a:lnSpc>
-            </a:pPr>
-            <a:r>
-              <a:rPr sz="1100" b="1" i="0">
-                <a:solidFill>
-                  <a:srgbClr val="1D4ED8"/>
-                </a:solidFill>
-                <a:latin typeface="Calibri"/>
-              </a:rPr>
-              <a:t>約 2,500 件</a:t>
-            </a:r>
-          </a:p>
-        </p:txBody>
-      </p:sp>
-      <p:sp>
-        <p:nvSpPr>
-          <p:cNvPr id="21" name="TextBox 20"/>
-          <p:cNvSpPr txBox="1"/>
-          <p:nvPr/>
-        </p:nvSpPr>
-        <p:spPr>
-          <a:xfrm>
-            <a:off x="6903720" y="5340096"/>
-            <a:ext cx="3566160" cy="320040"/>
-          </a:xfrm>
-          <a:prstGeom prst="rect">
-            <a:avLst/>
-          </a:prstGeom>
-          <a:noFill/>
-        </p:spPr>
-        <p:txBody>
-          <a:bodyPr wrap="square" lIns="0" rIns="0" tIns="0" bIns="0" anchor="t">
-            <a:spAutoFit/>
-          </a:bodyPr>
-          <a:lstStyle/>
-          <a:p>
-            <a:pPr algn="l">
-              <a:lnSpc>
-                <a:spcPct val="130000"/>
-              </a:lnSpc>
-            </a:pPr>
-            <a:r>
-              <a:rPr sz="1100" b="0" i="0">
-                <a:solidFill>
-                  <a:srgbClr val="1F2937"/>
-                </a:solidFill>
-                <a:latin typeface="Calibri"/>
-              </a:rPr>
-              <a:t>• 乗っ取りに悪用されるドライバ</a:t>
+              <a:t>▲ 実際の画面 (ブラウザで動作・データは外部に送らない)</a:t>
             </a:r>
           </a:p>
         </p:txBody>
@@ -13095,46 +14768,7 @@
         </p:nvSpPr>
         <p:spPr>
           <a:xfrm>
-            <a:off x="10058400" y="5340096"/>
-            <a:ext cx="1463040" cy="320040"/>
-          </a:xfrm>
-          <a:prstGeom prst="rect">
-            <a:avLst/>
-          </a:prstGeom>
-          <a:noFill/>
-        </p:spPr>
-        <p:txBody>
-          <a:bodyPr wrap="square" lIns="0" rIns="0" tIns="0" bIns="0" anchor="t">
-            <a:spAutoFit/>
-          </a:bodyPr>
-          <a:lstStyle/>
-          <a:p>
-            <a:pPr algn="r">
-              <a:lnSpc>
-                <a:spcPct val="130000"/>
-              </a:lnSpc>
-            </a:pPr>
-            <a:r>
-              <a:rPr sz="1100" b="1" i="0">
-                <a:solidFill>
-                  <a:srgbClr val="1D4ED8"/>
-                </a:solidFill>
-                <a:latin typeface="Calibri"/>
-              </a:rPr>
-              <a:t>約 1,900 件</a:t>
-            </a:r>
-          </a:p>
-        </p:txBody>
-      </p:sp>
-      <p:sp>
-        <p:nvSpPr>
-          <p:cNvPr id="23" name="TextBox 22"/>
-          <p:cNvSpPr txBox="1"/>
-          <p:nvPr/>
-        </p:nvSpPr>
-        <p:spPr>
-          <a:xfrm>
-            <a:off x="11247120" y="6492240"/>
+            <a:off x="10972800" y="6446520"/>
             <a:ext cx="914400" cy="274320"/>
           </a:xfrm>
           <a:prstGeom prst="rect">

--- a/docs/presentation/pptx/hayabusa-plus.pptx
+++ b/docs/presentation/pptx/hayabusa-plus.pptx
@@ -3651,7 +3651,7 @@
         <p:spPr>
           <a:xfrm>
             <a:off x="548640" y="2240280"/>
-            <a:ext cx="2697480" cy="2743200"/>
+            <a:ext cx="2697480" cy="2606040"/>
           </a:xfrm>
           <a:prstGeom prst="roundRect">
             <a:avLst/>
@@ -3697,7 +3697,7 @@
         <p:spPr>
           <a:xfrm>
             <a:off x="548640" y="2240280"/>
-            <a:ext cx="73152" cy="2743200"/>
+            <a:ext cx="73152" cy="2606040"/>
           </a:xfrm>
           <a:prstGeom prst="rect">
             <a:avLst/>
@@ -3740,8 +3740,8 @@
         </p:nvSpPr>
         <p:spPr>
           <a:xfrm>
-            <a:off x="731520" y="2404872"/>
-            <a:ext cx="914400" cy="594360"/>
+            <a:off x="731520" y="2386584"/>
+            <a:ext cx="914400" cy="566928"/>
           </a:xfrm>
           <a:prstGeom prst="rect">
             <a:avLst/>
@@ -3760,7 +3760,7 @@
               </a:lnSpc>
             </a:pPr>
             <a:r>
-              <a:rPr sz="2800" b="0" i="0">
+              <a:rPr sz="2600" b="0" i="0">
                 <a:solidFill>
                   <a:srgbClr val="2563EB"/>
                 </a:solidFill>
@@ -3779,7 +3779,7 @@
         </p:nvSpPr>
         <p:spPr>
           <a:xfrm>
-            <a:off x="731520" y="3017520"/>
+            <a:off x="731520" y="2971800"/>
             <a:ext cx="2423160" cy="457200"/>
           </a:xfrm>
           <a:prstGeom prst="rect">
@@ -3818,7 +3818,7 @@
         </p:nvSpPr>
         <p:spPr>
           <a:xfrm>
-            <a:off x="731520" y="3520440"/>
+            <a:off x="731520" y="3456432"/>
             <a:ext cx="2331720" cy="822960"/>
           </a:xfrm>
           <a:prstGeom prst="rect">
@@ -3858,7 +3858,7 @@
         </p:nvSpPr>
         <p:spPr>
           <a:xfrm>
-            <a:off x="731520" y="4434840"/>
+            <a:off x="731520" y="4325112"/>
             <a:ext cx="2331720" cy="457200"/>
           </a:xfrm>
           <a:prstGeom prst="rect">
@@ -3898,7 +3898,7 @@
         <p:spPr>
           <a:xfrm>
             <a:off x="3429000" y="2240280"/>
-            <a:ext cx="2697480" cy="2743200"/>
+            <a:ext cx="2697480" cy="2606040"/>
           </a:xfrm>
           <a:prstGeom prst="roundRect">
             <a:avLst/>
@@ -3944,7 +3944,7 @@
         <p:spPr>
           <a:xfrm>
             <a:off x="3429000" y="2240280"/>
-            <a:ext cx="73152" cy="2743200"/>
+            <a:ext cx="73152" cy="2606040"/>
           </a:xfrm>
           <a:prstGeom prst="rect">
             <a:avLst/>
@@ -3987,8 +3987,8 @@
         </p:nvSpPr>
         <p:spPr>
           <a:xfrm>
-            <a:off x="3611880" y="2404872"/>
-            <a:ext cx="914400" cy="594360"/>
+            <a:off x="3611880" y="2386584"/>
+            <a:ext cx="914400" cy="566928"/>
           </a:xfrm>
           <a:prstGeom prst="rect">
             <a:avLst/>
@@ -4007,7 +4007,7 @@
               </a:lnSpc>
             </a:pPr>
             <a:r>
-              <a:rPr sz="2800" b="0" i="0">
+              <a:rPr sz="2600" b="0" i="0">
                 <a:solidFill>
                   <a:srgbClr val="2563EB"/>
                 </a:solidFill>
@@ -4026,7 +4026,7 @@
         </p:nvSpPr>
         <p:spPr>
           <a:xfrm>
-            <a:off x="3611880" y="3017520"/>
+            <a:off x="3611880" y="2971800"/>
             <a:ext cx="2423160" cy="457200"/>
           </a:xfrm>
           <a:prstGeom prst="rect">
@@ -4065,7 +4065,7 @@
         </p:nvSpPr>
         <p:spPr>
           <a:xfrm>
-            <a:off x="3611880" y="3520440"/>
+            <a:off x="3611880" y="3456432"/>
             <a:ext cx="2331720" cy="822960"/>
           </a:xfrm>
           <a:prstGeom prst="rect">
@@ -4105,7 +4105,7 @@
         </p:nvSpPr>
         <p:spPr>
           <a:xfrm>
-            <a:off x="3611880" y="4434840"/>
+            <a:off x="3611880" y="4325112"/>
             <a:ext cx="2331720" cy="457200"/>
           </a:xfrm>
           <a:prstGeom prst="rect">
@@ -4145,7 +4145,7 @@
         <p:spPr>
           <a:xfrm>
             <a:off x="6309360" y="2240280"/>
-            <a:ext cx="2697480" cy="2743200"/>
+            <a:ext cx="2697480" cy="2606040"/>
           </a:xfrm>
           <a:prstGeom prst="roundRect">
             <a:avLst/>
@@ -4191,7 +4191,7 @@
         <p:spPr>
           <a:xfrm>
             <a:off x="6309360" y="2240280"/>
-            <a:ext cx="73152" cy="2743200"/>
+            <a:ext cx="73152" cy="2606040"/>
           </a:xfrm>
           <a:prstGeom prst="rect">
             <a:avLst/>
@@ -4234,8 +4234,8 @@
         </p:nvSpPr>
         <p:spPr>
           <a:xfrm>
-            <a:off x="6492240" y="2404872"/>
-            <a:ext cx="914400" cy="594360"/>
+            <a:off x="6492240" y="2386584"/>
+            <a:ext cx="914400" cy="566928"/>
           </a:xfrm>
           <a:prstGeom prst="rect">
             <a:avLst/>
@@ -4254,7 +4254,7 @@
               </a:lnSpc>
             </a:pPr>
             <a:r>
-              <a:rPr sz="2800" b="0" i="0">
+              <a:rPr sz="2600" b="0" i="0">
                 <a:solidFill>
                   <a:srgbClr val="2563EB"/>
                 </a:solidFill>
@@ -4273,7 +4273,7 @@
         </p:nvSpPr>
         <p:spPr>
           <a:xfrm>
-            <a:off x="6492240" y="3017520"/>
+            <a:off x="6492240" y="2971800"/>
             <a:ext cx="2423160" cy="457200"/>
           </a:xfrm>
           <a:prstGeom prst="rect">
@@ -4312,7 +4312,7 @@
         </p:nvSpPr>
         <p:spPr>
           <a:xfrm>
-            <a:off x="6492240" y="3520440"/>
+            <a:off x="6492240" y="3456432"/>
             <a:ext cx="2331720" cy="822960"/>
           </a:xfrm>
           <a:prstGeom prst="rect">
@@ -4352,7 +4352,7 @@
         </p:nvSpPr>
         <p:spPr>
           <a:xfrm>
-            <a:off x="6492240" y="4434840"/>
+            <a:off x="6492240" y="4325112"/>
             <a:ext cx="2331720" cy="457200"/>
           </a:xfrm>
           <a:prstGeom prst="rect">
@@ -4392,7 +4392,7 @@
         <p:spPr>
           <a:xfrm>
             <a:off x="9189720" y="2240280"/>
-            <a:ext cx="2697480" cy="2743200"/>
+            <a:ext cx="2697480" cy="2606040"/>
           </a:xfrm>
           <a:prstGeom prst="roundRect">
             <a:avLst/>
@@ -4438,7 +4438,7 @@
         <p:spPr>
           <a:xfrm>
             <a:off x="9189720" y="2240280"/>
-            <a:ext cx="73152" cy="2743200"/>
+            <a:ext cx="73152" cy="2606040"/>
           </a:xfrm>
           <a:prstGeom prst="rect">
             <a:avLst/>
@@ -4481,8 +4481,8 @@
         </p:nvSpPr>
         <p:spPr>
           <a:xfrm>
-            <a:off x="9372600" y="2404872"/>
-            <a:ext cx="914400" cy="594360"/>
+            <a:off x="9372600" y="2386584"/>
+            <a:ext cx="914400" cy="566928"/>
           </a:xfrm>
           <a:prstGeom prst="rect">
             <a:avLst/>
@@ -4501,7 +4501,7 @@
               </a:lnSpc>
             </a:pPr>
             <a:r>
-              <a:rPr sz="2800" b="0" i="0">
+              <a:rPr sz="2600" b="0" i="0">
                 <a:solidFill>
                   <a:srgbClr val="2563EB"/>
                 </a:solidFill>
@@ -4520,7 +4520,7 @@
         </p:nvSpPr>
         <p:spPr>
           <a:xfrm>
-            <a:off x="9372600" y="3017520"/>
+            <a:off x="9372600" y="2971800"/>
             <a:ext cx="2423160" cy="457200"/>
           </a:xfrm>
           <a:prstGeom prst="rect">
@@ -4559,7 +4559,7 @@
         </p:nvSpPr>
         <p:spPr>
           <a:xfrm>
-            <a:off x="9372600" y="3520440"/>
+            <a:off x="9372600" y="3456432"/>
             <a:ext cx="2331720" cy="822960"/>
           </a:xfrm>
           <a:prstGeom prst="rect">
@@ -4599,7 +4599,7 @@
         </p:nvSpPr>
         <p:spPr>
           <a:xfrm>
-            <a:off x="9372600" y="4434840"/>
+            <a:off x="9372600" y="4325112"/>
             <a:ext cx="2331720" cy="457200"/>
           </a:xfrm>
           <a:prstGeom prst="rect">
@@ -4638,8 +4638,8 @@
         </p:nvSpPr>
         <p:spPr>
           <a:xfrm>
-            <a:off x="548640" y="5166360"/>
-            <a:ext cx="11064240" cy="1188720"/>
+            <a:off x="548640" y="5029200"/>
+            <a:ext cx="11064240" cy="1371600"/>
           </a:xfrm>
           <a:prstGeom prst="roundRect">
             <a:avLst/>
@@ -4684,7 +4684,7 @@
         </p:nvSpPr>
         <p:spPr>
           <a:xfrm>
-            <a:off x="868680" y="5285232"/>
+            <a:off x="868680" y="5138928"/>
             <a:ext cx="10515600" cy="365760"/>
           </a:xfrm>
           <a:prstGeom prst="rect">
@@ -4710,7 +4710,7 @@
                 </a:solidFill>
                 <a:latin typeface="Calibri"/>
               </a:rPr>
-              <a:t>💡 実例:  自分の PC を実際にスキャン → 「疑わしい PowerShell 実行」の急増を自動検出</a:t>
+              <a:t>💡 実例:  自分の PC のスキャンで、「疑わしい PowerShell 実行」の急増に自動で気づけた</a:t>
             </a:r>
           </a:p>
         </p:txBody>
@@ -4723,7 +4723,7 @@
         </p:nvSpPr>
         <p:spPr>
           <a:xfrm>
-            <a:off x="868680" y="5715000"/>
+            <a:off x="868680" y="5541264"/>
             <a:ext cx="2788920" cy="274320"/>
           </a:xfrm>
           <a:prstGeom prst="rect">
@@ -4762,7 +4762,7 @@
         </p:nvSpPr>
         <p:spPr>
           <a:xfrm>
-            <a:off x="3749039" y="5751576"/>
+            <a:off x="3749039" y="5577840"/>
             <a:ext cx="5486400" cy="201168"/>
           </a:xfrm>
           <a:prstGeom prst="roundRect">
@@ -4808,7 +4808,7 @@
         </p:nvSpPr>
         <p:spPr>
           <a:xfrm>
-            <a:off x="3749039" y="5751576"/>
+            <a:off x="3749039" y="5577840"/>
             <a:ext cx="91440" cy="201168"/>
           </a:xfrm>
           <a:prstGeom prst="roundRect">
@@ -4852,7 +4852,7 @@
         </p:nvSpPr>
         <p:spPr>
           <a:xfrm>
-            <a:off x="9372600" y="5715000"/>
+            <a:off x="9372600" y="5541264"/>
             <a:ext cx="2148840" cy="274320"/>
           </a:xfrm>
           <a:prstGeom prst="rect">
@@ -4891,7 +4891,7 @@
         </p:nvSpPr>
         <p:spPr>
           <a:xfrm>
-            <a:off x="868680" y="6053328"/>
+            <a:off x="868680" y="5870448"/>
             <a:ext cx="2788920" cy="274320"/>
           </a:xfrm>
           <a:prstGeom prst="rect">
@@ -4930,7 +4930,7 @@
         </p:nvSpPr>
         <p:spPr>
           <a:xfrm>
-            <a:off x="3749039" y="6089904"/>
+            <a:off x="3749039" y="5907024"/>
             <a:ext cx="5486400" cy="201168"/>
           </a:xfrm>
           <a:prstGeom prst="roundRect">
@@ -4976,7 +4976,7 @@
         </p:nvSpPr>
         <p:spPr>
           <a:xfrm>
-            <a:off x="3749039" y="6089904"/>
+            <a:off x="3749039" y="5907024"/>
             <a:ext cx="5486400" cy="201168"/>
           </a:xfrm>
           <a:prstGeom prst="roundRect">
@@ -5020,7 +5020,7 @@
         </p:nvSpPr>
         <p:spPr>
           <a:xfrm>
-            <a:off x="9372600" y="6053328"/>
+            <a:off x="9372600" y="5870448"/>
             <a:ext cx="2148840" cy="274320"/>
           </a:xfrm>
           <a:prstGeom prst="rect">
@@ -5054,6 +5054,45 @@
       <p:sp>
         <p:nvSpPr>
           <p:cNvPr id="40" name="TextBox 39"/>
+          <p:cNvSpPr txBox="1"/>
+          <p:nvPr/>
+        </p:nvSpPr>
+        <p:spPr>
+          <a:xfrm>
+            <a:off x="868680" y="6163056"/>
+            <a:ext cx="10515600" cy="292608"/>
+          </a:xfrm>
+          <a:prstGeom prst="rect">
+            <a:avLst/>
+          </a:prstGeom>
+          <a:noFill/>
+        </p:spPr>
+        <p:txBody>
+          <a:bodyPr wrap="square" lIns="0" rIns="0" tIns="0" bIns="0" anchor="t">
+            <a:spAutoFit/>
+          </a:bodyPr>
+          <a:lstStyle/>
+          <a:p>
+            <a:pPr algn="ctr">
+              <a:lnSpc>
+                <a:spcPct val="130000"/>
+              </a:lnSpc>
+            </a:pPr>
+            <a:r>
+              <a:rPr sz="1050" b="0" i="0">
+                <a:solidFill>
+                  <a:srgbClr val="5B6472"/>
+                </a:solidFill>
+                <a:latin typeface="Calibri"/>
+              </a:rPr>
+              <a:t>中身を確認すると無害な開発作業と判定できた。役目は「普段と違う」への気づき — 中身の確認まで同じ画面で完結します。</a:t>
+            </a:r>
+          </a:p>
+        </p:txBody>
+      </p:sp>
+      <p:sp>
+        <p:nvSpPr>
+          <p:cNvPr id="41" name="TextBox 40"/>
           <p:cNvSpPr txBox="1"/>
           <p:nvPr/>
         </p:nvSpPr>

--- a/docs/presentation/pptx/hayabusa-plus.pptx
+++ b/docs/presentation/pptx/hayabusa-plus.pptx
@@ -4684,8 +4684,8 @@
         </p:nvSpPr>
         <p:spPr>
           <a:xfrm>
-            <a:off x="868680" y="5138928"/>
-            <a:ext cx="10515600" cy="365760"/>
+            <a:off x="914400" y="5230368"/>
+            <a:ext cx="4937760" cy="365760"/>
           </a:xfrm>
           <a:prstGeom prst="rect">
             <a:avLst/>
@@ -4710,7 +4710,7 @@
                 </a:solidFill>
                 <a:latin typeface="Calibri"/>
               </a:rPr>
-              <a:t>💡 実例:  自分の PC のスキャンで、「疑わしい PowerShell 実行」の急増に自動で気づけた</a:t>
+              <a:t>📏 ルールによる検知 (既存の方法)</a:t>
             </a:r>
           </a:p>
         </p:txBody>
@@ -4723,58 +4723,57 @@
         </p:nvSpPr>
         <p:spPr>
           <a:xfrm>
-            <a:off x="868680" y="5541264"/>
-            <a:ext cx="2788920" cy="274320"/>
-          </a:xfrm>
-          <a:prstGeom prst="rect">
-            <a:avLst/>
-          </a:prstGeom>
-          <a:noFill/>
-        </p:spPr>
-        <p:txBody>
-          <a:bodyPr wrap="square" lIns="0" rIns="0" tIns="0" bIns="0" anchor="ctr">
+            <a:off x="914400" y="5614416"/>
+            <a:ext cx="4937760" cy="685800"/>
+          </a:xfrm>
+          <a:prstGeom prst="rect">
+            <a:avLst/>
+          </a:prstGeom>
+          <a:noFill/>
+        </p:spPr>
+        <p:txBody>
+          <a:bodyPr wrap="square" lIns="0" rIns="0" tIns="0" bIns="0" anchor="t">
             <a:spAutoFit/>
           </a:bodyPr>
           <a:lstStyle/>
           <a:p>
             <a:pPr algn="l">
               <a:lnSpc>
-                <a:spcPct val="130000"/>
-              </a:lnSpc>
-            </a:pPr>
-            <a:r>
-              <a:rPr sz="1100" b="0" i="0">
+                <a:spcPct val="140000"/>
+              </a:lnSpc>
+            </a:pPr>
+            <a:r>
+              <a:rPr sz="1150" b="0" i="0">
                 <a:solidFill>
                   <a:srgbClr val="5B6472"/>
                 </a:solidFill>
                 <a:latin typeface="Calibri"/>
               </a:rPr>
-              <a:t>平常時 (この PC の全期間平均)</a:t>
-            </a:r>
-          </a:p>
-        </p:txBody>
-      </p:sp>
-      <p:sp>
-        <p:nvSpPr>
-          <p:cNvPr id="33" name="Rounded Rectangle 32"/>
+              <a:t>事前に知っている「悪い特徴」と一致したら警告。
+既に知られている手口には確実で強い。</a:t>
+            </a:r>
+          </a:p>
+        </p:txBody>
+      </p:sp>
+      <p:sp>
+        <p:nvSpPr>
+          <p:cNvPr id="33" name="Rectangle 32"/>
           <p:cNvSpPr/>
           <p:nvPr/>
         </p:nvSpPr>
         <p:spPr>
           <a:xfrm>
-            <a:off x="3749039" y="5577840"/>
-            <a:ext cx="5486400" cy="201168"/>
-          </a:xfrm>
-          <a:prstGeom prst="roundRect">
+            <a:off x="6053328" y="5257800"/>
+            <a:ext cx="16459" cy="914400"/>
+          </a:xfrm>
+          <a:prstGeom prst="rect">
             <a:avLst/>
           </a:prstGeom>
           <a:solidFill>
-            <a:srgbClr val="FFFFFF"/>
+            <a:srgbClr val="DDE3EE"/>
           </a:solidFill>
           <a:ln>
-            <a:solidFill>
-              <a:srgbClr val="DDE3EE"/>
-            </a:solidFill>
+            <a:noFill/>
           </a:ln>
           <a:effectLst/>
         </p:spPr>
@@ -4802,45 +4801,40 @@
       </p:sp>
       <p:sp>
         <p:nvSpPr>
-          <p:cNvPr id="34" name="Rounded Rectangle 33"/>
-          <p:cNvSpPr/>
-          <p:nvPr/>
-        </p:nvSpPr>
-        <p:spPr>
-          <a:xfrm>
-            <a:off x="3749039" y="5577840"/>
-            <a:ext cx="91440" cy="201168"/>
-          </a:xfrm>
-          <a:prstGeom prst="roundRect">
-            <a:avLst/>
-          </a:prstGeom>
-          <a:solidFill>
-            <a:srgbClr val="5B6472"/>
-          </a:solidFill>
-          <a:ln>
-            <a:noFill/>
-          </a:ln>
-          <a:effectLst/>
-        </p:spPr>
-        <p:style>
-          <a:lnRef idx="1">
-            <a:schemeClr val="accent1"/>
-          </a:lnRef>
-          <a:fillRef idx="3">
-            <a:schemeClr val="accent1"/>
-          </a:fillRef>
-          <a:effectRef idx="2">
-            <a:schemeClr val="accent1"/>
-          </a:effectRef>
-          <a:fontRef idx="minor">
-            <a:schemeClr val="lt1"/>
-          </a:fontRef>
-        </p:style>
-        <p:txBody>
-          <a:bodyPr rtlCol="0" anchor="ctr"/>
-          <a:lstStyle/>
-          <a:p>
-            <a:pPr algn="ctr"/>
+          <p:cNvPr id="34" name="TextBox 33"/>
+          <p:cNvSpPr txBox="1"/>
+          <p:nvPr/>
+        </p:nvSpPr>
+        <p:spPr>
+          <a:xfrm>
+            <a:off x="6400800" y="5230368"/>
+            <a:ext cx="4937760" cy="365760"/>
+          </a:xfrm>
+          <a:prstGeom prst="rect">
+            <a:avLst/>
+          </a:prstGeom>
+          <a:noFill/>
+        </p:spPr>
+        <p:txBody>
+          <a:bodyPr wrap="square" lIns="0" rIns="0" tIns="0" bIns="0" anchor="t">
+            <a:spAutoFit/>
+          </a:bodyPr>
+          <a:lstStyle/>
+          <a:p>
+            <a:pPr algn="l">
+              <a:lnSpc>
+                <a:spcPct val="130000"/>
+              </a:lnSpc>
+            </a:pPr>
+            <a:r>
+              <a:rPr sz="1350" b="1" i="0">
+                <a:solidFill>
+                  <a:srgbClr val="1D4ED8"/>
+                </a:solidFill>
+                <a:latin typeface="Calibri"/>
+              </a:rPr>
+              <a:t>📈 振舞いによる検知 (今回自作した分析)</a:t>
+            </a:r>
           </a:p>
         </p:txBody>
       </p:sp>
@@ -4852,33 +4846,34 @@
         </p:nvSpPr>
         <p:spPr>
           <a:xfrm>
-            <a:off x="9372600" y="5541264"/>
-            <a:ext cx="2148840" cy="274320"/>
-          </a:xfrm>
-          <a:prstGeom prst="rect">
-            <a:avLst/>
-          </a:prstGeom>
-          <a:noFill/>
-        </p:spPr>
-        <p:txBody>
-          <a:bodyPr wrap="square" lIns="0" rIns="0" tIns="0" bIns="0" anchor="ctr">
+            <a:off x="6400800" y="5614416"/>
+            <a:ext cx="4937760" cy="685800"/>
+          </a:xfrm>
+          <a:prstGeom prst="rect">
+            <a:avLst/>
+          </a:prstGeom>
+          <a:noFill/>
+        </p:spPr>
+        <p:txBody>
+          <a:bodyPr wrap="square" lIns="0" rIns="0" tIns="0" bIns="0" anchor="t">
             <a:spAutoFit/>
           </a:bodyPr>
           <a:lstStyle/>
           <a:p>
             <a:pPr algn="l">
               <a:lnSpc>
-                <a:spcPct val="130000"/>
+                <a:spcPct val="140000"/>
               </a:lnSpc>
             </a:pPr>
             <a:r>
               <a:rPr sz="1150" b="0" i="0">
                 <a:solidFill>
-                  <a:srgbClr val="1F2937"/>
+                  <a:srgbClr val="5B6472"/>
                 </a:solidFill>
                 <a:latin typeface="Calibri"/>
               </a:rPr>
-              <a:t>1 時間に 約1回</a:t>
+              <a:t>「普段との違い」に反応して知らせる。
+ルールがまだ無い未知の手口への「気づき」になる。</a:t>
             </a:r>
           </a:p>
         </p:txBody>
@@ -4886,213 +4881,6 @@
       <p:sp>
         <p:nvSpPr>
           <p:cNvPr id="36" name="TextBox 35"/>
-          <p:cNvSpPr txBox="1"/>
-          <p:nvPr/>
-        </p:nvSpPr>
-        <p:spPr>
-          <a:xfrm>
-            <a:off x="868680" y="5870448"/>
-            <a:ext cx="2788920" cy="274320"/>
-          </a:xfrm>
-          <a:prstGeom prst="rect">
-            <a:avLst/>
-          </a:prstGeom>
-          <a:noFill/>
-        </p:spPr>
-        <p:txBody>
-          <a:bodyPr wrap="square" lIns="0" rIns="0" tIns="0" bIns="0" anchor="ctr">
-            <a:spAutoFit/>
-          </a:bodyPr>
-          <a:lstStyle/>
-          <a:p>
-            <a:pPr algn="l">
-              <a:lnSpc>
-                <a:spcPct val="130000"/>
-              </a:lnSpc>
-            </a:pPr>
-            <a:r>
-              <a:rPr sz="1100" b="0" i="0">
-                <a:solidFill>
-                  <a:srgbClr val="5B6472"/>
-                </a:solidFill>
-                <a:latin typeface="Calibri"/>
-              </a:rPr>
-              <a:t>ある日の 13 時台</a:t>
-            </a:r>
-          </a:p>
-        </p:txBody>
-      </p:sp>
-      <p:sp>
-        <p:nvSpPr>
-          <p:cNvPr id="37" name="Rounded Rectangle 36"/>
-          <p:cNvSpPr/>
-          <p:nvPr/>
-        </p:nvSpPr>
-        <p:spPr>
-          <a:xfrm>
-            <a:off x="3749039" y="5907024"/>
-            <a:ext cx="5486400" cy="201168"/>
-          </a:xfrm>
-          <a:prstGeom prst="roundRect">
-            <a:avLst/>
-          </a:prstGeom>
-          <a:solidFill>
-            <a:srgbClr val="FFFFFF"/>
-          </a:solidFill>
-          <a:ln>
-            <a:solidFill>
-              <a:srgbClr val="DDE3EE"/>
-            </a:solidFill>
-          </a:ln>
-          <a:effectLst/>
-        </p:spPr>
-        <p:style>
-          <a:lnRef idx="1">
-            <a:schemeClr val="accent1"/>
-          </a:lnRef>
-          <a:fillRef idx="3">
-            <a:schemeClr val="accent1"/>
-          </a:fillRef>
-          <a:effectRef idx="2">
-            <a:schemeClr val="accent1"/>
-          </a:effectRef>
-          <a:fontRef idx="minor">
-            <a:schemeClr val="lt1"/>
-          </a:fontRef>
-        </p:style>
-        <p:txBody>
-          <a:bodyPr rtlCol="0" anchor="ctr"/>
-          <a:lstStyle/>
-          <a:p>
-            <a:pPr algn="ctr"/>
-          </a:p>
-        </p:txBody>
-      </p:sp>
-      <p:sp>
-        <p:nvSpPr>
-          <p:cNvPr id="38" name="Rounded Rectangle 37"/>
-          <p:cNvSpPr/>
-          <p:nvPr/>
-        </p:nvSpPr>
-        <p:spPr>
-          <a:xfrm>
-            <a:off x="3749039" y="5907024"/>
-            <a:ext cx="5486400" cy="201168"/>
-          </a:xfrm>
-          <a:prstGeom prst="roundRect">
-            <a:avLst/>
-          </a:prstGeom>
-          <a:solidFill>
-            <a:srgbClr val="2563EB"/>
-          </a:solidFill>
-          <a:ln>
-            <a:noFill/>
-          </a:ln>
-          <a:effectLst/>
-        </p:spPr>
-        <p:style>
-          <a:lnRef idx="1">
-            <a:schemeClr val="accent1"/>
-          </a:lnRef>
-          <a:fillRef idx="3">
-            <a:schemeClr val="accent1"/>
-          </a:fillRef>
-          <a:effectRef idx="2">
-            <a:schemeClr val="accent1"/>
-          </a:effectRef>
-          <a:fontRef idx="minor">
-            <a:schemeClr val="lt1"/>
-          </a:fontRef>
-        </p:style>
-        <p:txBody>
-          <a:bodyPr rtlCol="0" anchor="ctr"/>
-          <a:lstStyle/>
-          <a:p>
-            <a:pPr algn="ctr"/>
-          </a:p>
-        </p:txBody>
-      </p:sp>
-      <p:sp>
-        <p:nvSpPr>
-          <p:cNvPr id="39" name="TextBox 38"/>
-          <p:cNvSpPr txBox="1"/>
-          <p:nvPr/>
-        </p:nvSpPr>
-        <p:spPr>
-          <a:xfrm>
-            <a:off x="9372600" y="5870448"/>
-            <a:ext cx="2148840" cy="274320"/>
-          </a:xfrm>
-          <a:prstGeom prst="rect">
-            <a:avLst/>
-          </a:prstGeom>
-          <a:noFill/>
-        </p:spPr>
-        <p:txBody>
-          <a:bodyPr wrap="square" lIns="0" rIns="0" tIns="0" bIns="0" anchor="ctr">
-            <a:spAutoFit/>
-          </a:bodyPr>
-          <a:lstStyle/>
-          <a:p>
-            <a:pPr algn="l">
-              <a:lnSpc>
-                <a:spcPct val="130000"/>
-              </a:lnSpc>
-            </a:pPr>
-            <a:r>
-              <a:rPr sz="1150" b="1" i="0">
-                <a:solidFill>
-                  <a:srgbClr val="1D4ED8"/>
-                </a:solidFill>
-                <a:latin typeface="Calibri"/>
-              </a:rPr>
-              <a:t>1 時間に 110回 (約117倍)</a:t>
-            </a:r>
-          </a:p>
-        </p:txBody>
-      </p:sp>
-      <p:sp>
-        <p:nvSpPr>
-          <p:cNvPr id="40" name="TextBox 39"/>
-          <p:cNvSpPr txBox="1"/>
-          <p:nvPr/>
-        </p:nvSpPr>
-        <p:spPr>
-          <a:xfrm>
-            <a:off x="868680" y="6163056"/>
-            <a:ext cx="10515600" cy="292608"/>
-          </a:xfrm>
-          <a:prstGeom prst="rect">
-            <a:avLst/>
-          </a:prstGeom>
-          <a:noFill/>
-        </p:spPr>
-        <p:txBody>
-          <a:bodyPr wrap="square" lIns="0" rIns="0" tIns="0" bIns="0" anchor="t">
-            <a:spAutoFit/>
-          </a:bodyPr>
-          <a:lstStyle/>
-          <a:p>
-            <a:pPr algn="ctr">
-              <a:lnSpc>
-                <a:spcPct val="130000"/>
-              </a:lnSpc>
-            </a:pPr>
-            <a:r>
-              <a:rPr sz="1050" b="0" i="0">
-                <a:solidFill>
-                  <a:srgbClr val="5B6472"/>
-                </a:solidFill>
-                <a:latin typeface="Calibri"/>
-              </a:rPr>
-              <a:t>中身を確認すると無害な開発作業と判定できた。役目は「普段と違う」への気づき — 中身の確認まで同じ画面で完結します。</a:t>
-            </a:r>
-          </a:p>
-        </p:txBody>
-      </p:sp>
-      <p:sp>
-        <p:nvSpPr>
-          <p:cNvPr id="41" name="TextBox 40"/>
           <p:cNvSpPr txBox="1"/>
           <p:nvPr/>
         </p:nvSpPr>

--- a/docs/presentation/pptx/hayabusa-plus.pptx
+++ b/docs/presentation/pptx/hayabusa-plus.pptx
@@ -18,6 +18,7 @@
     <p:sldId id="266" r:id="rId17"/>
     <p:sldId id="267" r:id="rId18"/>
     <p:sldId id="268" r:id="rId19"/>
+    <p:sldId id="269" r:id="rId20"/>
   </p:sldIdLst>
   <p:sldSz cx="12191695" cy="6858000" type="screen4x3"/>
   <p:notesSz cx="6858000" cy="9144000"/>
@@ -3559,7 +3560,7 @@
                 </a:solidFill>
                 <a:latin typeface="Calibri"/>
               </a:rPr>
-              <a:t>開発内容 +α   (自作の統計分析)</a:t>
+              <a:t>開発内容 3 / 3   (Python + JavaScript 約 8,000 行)</a:t>
             </a:r>
           </a:p>
         </p:txBody>
@@ -3598,60 +3599,21 @@
                 </a:solidFill>
                 <a:latin typeface="Cambria"/>
               </a:rPr>
-              <a:t>さらに: ルールでは書けない「いつもと違う」も検出</a:t>
-            </a:r>
-          </a:p>
-        </p:txBody>
-      </p:sp>
-      <p:sp>
-        <p:nvSpPr>
-          <p:cNvPr id="5" name="TextBox 4"/>
-          <p:cNvSpPr txBox="1"/>
-          <p:nvPr/>
-        </p:nvSpPr>
-        <p:spPr>
-          <a:xfrm>
-            <a:off x="548640" y="1600200"/>
-            <a:ext cx="10972800" cy="457200"/>
-          </a:xfrm>
-          <a:prstGeom prst="rect">
-            <a:avLst/>
-          </a:prstGeom>
-          <a:noFill/>
-        </p:spPr>
-        <p:txBody>
-          <a:bodyPr wrap="square" lIns="0" rIns="0" tIns="0" bIns="0" anchor="t">
-            <a:spAutoFit/>
-          </a:bodyPr>
-          <a:lstStyle/>
-          <a:p>
-            <a:pPr algn="l">
-              <a:lnSpc>
-                <a:spcPct val="130000"/>
-              </a:lnSpc>
-            </a:pPr>
-            <a:r>
-              <a:rPr sz="1500" b="0" i="1">
-                <a:solidFill>
-                  <a:srgbClr val="5B6472"/>
-                </a:solidFill>
-                <a:latin typeface="Calibri"/>
-              </a:rPr>
-              <a:t>ルールは 1 件ずつしか判定できない。そこで「全体の傾向」を統計で見る分析を自作しました。</a:t>
-            </a:r>
-          </a:p>
-        </p:txBody>
-      </p:sp>
-      <p:sp>
-        <p:nvSpPr>
-          <p:cNvPr id="6" name="Rounded Rectangle 5"/>
+              <a:t>③  結果を「読める」にする GUI をゼロから開発</a:t>
+            </a:r>
+          </a:p>
+        </p:txBody>
+      </p:sp>
+      <p:sp>
+        <p:nvSpPr>
+          <p:cNvPr id="5" name="Rounded Rectangle 4"/>
           <p:cNvSpPr/>
           <p:nvPr/>
         </p:nvSpPr>
         <p:spPr>
           <a:xfrm>
-            <a:off x="548640" y="2240280"/>
-            <a:ext cx="2697480" cy="2606040"/>
+            <a:off x="548640" y="1783080"/>
+            <a:ext cx="4846320" cy="1371600"/>
           </a:xfrm>
           <a:prstGeom prst="roundRect">
             <a:avLst/>
@@ -3690,14 +3652,14 @@
       </p:sp>
       <p:sp>
         <p:nvSpPr>
-          <p:cNvPr id="7" name="Rectangle 6"/>
+          <p:cNvPr id="6" name="Rectangle 5"/>
           <p:cNvSpPr/>
           <p:nvPr/>
         </p:nvSpPr>
         <p:spPr>
           <a:xfrm>
-            <a:off x="548640" y="2240280"/>
-            <a:ext cx="73152" cy="2606040"/>
+            <a:off x="548640" y="1783080"/>
+            <a:ext cx="73152" cy="1371600"/>
           </a:xfrm>
           <a:prstGeom prst="rect">
             <a:avLst/>
@@ -3734,14 +3696,53 @@
       </p:sp>
       <p:sp>
         <p:nvSpPr>
+          <p:cNvPr id="7" name="TextBox 6"/>
+          <p:cNvSpPr txBox="1"/>
+          <p:nvPr/>
+        </p:nvSpPr>
+        <p:spPr>
+          <a:xfrm>
+            <a:off x="777240" y="1947672"/>
+            <a:ext cx="731520" cy="640080"/>
+          </a:xfrm>
+          <a:prstGeom prst="rect">
+            <a:avLst/>
+          </a:prstGeom>
+          <a:noFill/>
+        </p:spPr>
+        <p:txBody>
+          <a:bodyPr wrap="square" lIns="0" rIns="0" tIns="0" bIns="0" anchor="t">
+            <a:spAutoFit/>
+          </a:bodyPr>
+          <a:lstStyle/>
+          <a:p>
+            <a:pPr algn="l">
+              <a:lnSpc>
+                <a:spcPct val="130000"/>
+              </a:lnSpc>
+            </a:pPr>
+            <a:r>
+              <a:rPr sz="2600" b="0" i="0">
+                <a:solidFill>
+                  <a:srgbClr val="2563EB"/>
+                </a:solidFill>
+                <a:latin typeface="Calibri"/>
+              </a:rPr>
+              <a:t>🇯🇵</a:t>
+            </a:r>
+          </a:p>
+        </p:txBody>
+      </p:sp>
+      <p:sp>
+        <p:nvSpPr>
           <p:cNvPr id="8" name="TextBox 7"/>
           <p:cNvSpPr txBox="1"/>
           <p:nvPr/>
         </p:nvSpPr>
         <p:spPr>
           <a:xfrm>
-            <a:off x="731520" y="2386584"/>
-            <a:ext cx="914400" cy="566928"/>
+            <a:off x="1554480" y="1929384"/>
+            <a:ext cx="3657600" cy="411480"/>
           </a:xfrm>
           <a:prstGeom prst="rect">
             <a:avLst/>
@@ -3760,145 +3761,67 @@
               </a:lnSpc>
             </a:pPr>
             <a:r>
-              <a:rPr sz="2600" b="0" i="0">
-                <a:solidFill>
-                  <a:srgbClr val="2563EB"/>
+              <a:rPr sz="1600" b="1" i="0">
+                <a:solidFill>
+                  <a:srgbClr val="1F2937"/>
+                </a:solidFill>
+                <a:latin typeface="Cambria"/>
+              </a:rPr>
+              <a:t>日本語の解説付き</a:t>
+            </a:r>
+          </a:p>
+        </p:txBody>
+      </p:sp>
+      <p:sp>
+        <p:nvSpPr>
+          <p:cNvPr id="9" name="TextBox 8"/>
+          <p:cNvSpPr txBox="1"/>
+          <p:nvPr/>
+        </p:nvSpPr>
+        <p:spPr>
+          <a:xfrm>
+            <a:off x="1554480" y="2350008"/>
+            <a:ext cx="3703320" cy="731520"/>
+          </a:xfrm>
+          <a:prstGeom prst="rect">
+            <a:avLst/>
+          </a:prstGeom>
+          <a:noFill/>
+        </p:spPr>
+        <p:txBody>
+          <a:bodyPr wrap="square" lIns="0" rIns="0" tIns="0" bIns="0" anchor="t">
+            <a:spAutoFit/>
+          </a:bodyPr>
+          <a:lstStyle/>
+          <a:p>
+            <a:pPr algn="l">
+              <a:lnSpc>
+                <a:spcPct val="135000"/>
+              </a:lnSpc>
+            </a:pPr>
+            <a:r>
+              <a:rPr sz="1100" b="0" i="0">
+                <a:solidFill>
+                  <a:srgbClr val="5B6472"/>
                 </a:solidFill>
                 <a:latin typeface="Calibri"/>
               </a:rPr>
-              <a:t>🔥</a:t>
-            </a:r>
-          </a:p>
-        </p:txBody>
-      </p:sp>
-      <p:sp>
-        <p:nvSpPr>
-          <p:cNvPr id="9" name="TextBox 8"/>
-          <p:cNvSpPr txBox="1"/>
-          <p:nvPr/>
-        </p:nvSpPr>
-        <p:spPr>
-          <a:xfrm>
-            <a:off x="731520" y="2971800"/>
-            <a:ext cx="2423160" cy="457200"/>
-          </a:xfrm>
-          <a:prstGeom prst="rect">
-            <a:avLst/>
-          </a:prstGeom>
-          <a:noFill/>
-        </p:spPr>
-        <p:txBody>
-          <a:bodyPr wrap="square" lIns="0" rIns="0" tIns="0" bIns="0" anchor="t">
-            <a:spAutoFit/>
-          </a:bodyPr>
-          <a:lstStyle/>
-          <a:p>
-            <a:pPr algn="l">
-              <a:lnSpc>
-                <a:spcPct val="130000"/>
-              </a:lnSpc>
-            </a:pPr>
-            <a:r>
-              <a:rPr sz="1700" b="1" i="0">
-                <a:solidFill>
-                  <a:srgbClr val="1F2937"/>
-                </a:solidFill>
-                <a:latin typeface="Cambria"/>
-              </a:rPr>
-              <a:t>急増している</a:t>
-            </a:r>
-          </a:p>
-        </p:txBody>
-      </p:sp>
-      <p:sp>
-        <p:nvSpPr>
-          <p:cNvPr id="10" name="TextBox 9"/>
-          <p:cNvSpPr txBox="1"/>
-          <p:nvPr/>
-        </p:nvSpPr>
-        <p:spPr>
-          <a:xfrm>
-            <a:off x="731520" y="3456432"/>
-            <a:ext cx="2331720" cy="822960"/>
-          </a:xfrm>
-          <a:prstGeom prst="rect">
-            <a:avLst/>
-          </a:prstGeom>
-          <a:noFill/>
-        </p:spPr>
-        <p:txBody>
-          <a:bodyPr wrap="square" lIns="0" rIns="0" tIns="0" bIns="0" anchor="t">
-            <a:spAutoFit/>
-          </a:bodyPr>
-          <a:lstStyle/>
-          <a:p>
-            <a:pPr algn="l">
-              <a:lnSpc>
-                <a:spcPct val="140000"/>
-              </a:lnSpc>
-            </a:pPr>
-            <a:r>
-              <a:rPr sz="1100" b="0" i="0">
-                <a:solidFill>
-                  <a:srgbClr val="1F2937"/>
-                </a:solidFill>
-                <a:latin typeface="Calibri"/>
-              </a:rPr>
-              <a:t>平常の数十〜数千倍の
-動きが急に発生</a:t>
-            </a:r>
-          </a:p>
-        </p:txBody>
-      </p:sp>
-      <p:sp>
-        <p:nvSpPr>
-          <p:cNvPr id="11" name="TextBox 10"/>
-          <p:cNvSpPr txBox="1"/>
-          <p:nvPr/>
-        </p:nvSpPr>
-        <p:spPr>
-          <a:xfrm>
-            <a:off x="731520" y="4325112"/>
-            <a:ext cx="2331720" cy="457200"/>
-          </a:xfrm>
-          <a:prstGeom prst="rect">
-            <a:avLst/>
-          </a:prstGeom>
-          <a:noFill/>
-        </p:spPr>
-        <p:txBody>
-          <a:bodyPr wrap="square" lIns="0" rIns="0" tIns="0" bIns="0" anchor="t">
-            <a:spAutoFit/>
-          </a:bodyPr>
-          <a:lstStyle/>
-          <a:p>
-            <a:pPr algn="l">
-              <a:lnSpc>
-                <a:spcPct val="130000"/>
-              </a:lnSpc>
-            </a:pPr>
-            <a:r>
-              <a:rPr sz="1000" b="0" i="1">
-                <a:solidFill>
-                  <a:srgbClr val="5B6472"/>
-                </a:solidFill>
-                <a:latin typeface="Calibri"/>
-              </a:rPr>
-              <a:t>例: 大量のパスワード試行</a:t>
-            </a:r>
-          </a:p>
-        </p:txBody>
-      </p:sp>
-      <p:sp>
-        <p:nvSpPr>
-          <p:cNvPr id="12" name="Rounded Rectangle 11"/>
+              <a:t>検知をクリックすると「何が起きた?
+次にどうする?」を日本語で表示</a:t>
+            </a:r>
+          </a:p>
+        </p:txBody>
+      </p:sp>
+      <p:sp>
+        <p:nvSpPr>
+          <p:cNvPr id="10" name="Rounded Rectangle 9"/>
           <p:cNvSpPr/>
           <p:nvPr/>
         </p:nvSpPr>
         <p:spPr>
           <a:xfrm>
-            <a:off x="3429000" y="2240280"/>
-            <a:ext cx="2697480" cy="2606040"/>
+            <a:off x="548640" y="3337560"/>
+            <a:ext cx="4846320" cy="1371600"/>
           </a:xfrm>
           <a:prstGeom prst="roundRect">
             <a:avLst/>
@@ -3937,14 +3860,14 @@
       </p:sp>
       <p:sp>
         <p:nvSpPr>
-          <p:cNvPr id="13" name="Rectangle 12"/>
+          <p:cNvPr id="11" name="Rectangle 10"/>
           <p:cNvSpPr/>
           <p:nvPr/>
         </p:nvSpPr>
         <p:spPr>
           <a:xfrm>
-            <a:off x="3429000" y="2240280"/>
-            <a:ext cx="73152" cy="2606040"/>
+            <a:off x="548640" y="3337560"/>
+            <a:ext cx="73152" cy="1371600"/>
           </a:xfrm>
           <a:prstGeom prst="rect">
             <a:avLst/>
@@ -3981,14 +3904,92 @@
       </p:sp>
       <p:sp>
         <p:nvSpPr>
+          <p:cNvPr id="12" name="TextBox 11"/>
+          <p:cNvSpPr txBox="1"/>
+          <p:nvPr/>
+        </p:nvSpPr>
+        <p:spPr>
+          <a:xfrm>
+            <a:off x="777240" y="3502152"/>
+            <a:ext cx="731520" cy="640080"/>
+          </a:xfrm>
+          <a:prstGeom prst="rect">
+            <a:avLst/>
+          </a:prstGeom>
+          <a:noFill/>
+        </p:spPr>
+        <p:txBody>
+          <a:bodyPr wrap="square" lIns="0" rIns="0" tIns="0" bIns="0" anchor="t">
+            <a:spAutoFit/>
+          </a:bodyPr>
+          <a:lstStyle/>
+          <a:p>
+            <a:pPr algn="l">
+              <a:lnSpc>
+                <a:spcPct val="130000"/>
+              </a:lnSpc>
+            </a:pPr>
+            <a:r>
+              <a:rPr sz="2600" b="0" i="0">
+                <a:solidFill>
+                  <a:srgbClr val="2563EB"/>
+                </a:solidFill>
+                <a:latin typeface="Calibri"/>
+              </a:rPr>
+              <a:t>🚨</a:t>
+            </a:r>
+          </a:p>
+        </p:txBody>
+      </p:sp>
+      <p:sp>
+        <p:nvSpPr>
+          <p:cNvPr id="13" name="TextBox 12"/>
+          <p:cNvSpPr txBox="1"/>
+          <p:nvPr/>
+        </p:nvSpPr>
+        <p:spPr>
+          <a:xfrm>
+            <a:off x="1554480" y="3483864"/>
+            <a:ext cx="3657600" cy="411480"/>
+          </a:xfrm>
+          <a:prstGeom prst="rect">
+            <a:avLst/>
+          </a:prstGeom>
+          <a:noFill/>
+        </p:spPr>
+        <p:txBody>
+          <a:bodyPr wrap="square" lIns="0" rIns="0" tIns="0" bIns="0" anchor="t">
+            <a:spAutoFit/>
+          </a:bodyPr>
+          <a:lstStyle/>
+          <a:p>
+            <a:pPr algn="l">
+              <a:lnSpc>
+                <a:spcPct val="130000"/>
+              </a:lnSpc>
+            </a:pPr>
+            <a:r>
+              <a:rPr sz="1600" b="1" i="0">
+                <a:solidFill>
+                  <a:srgbClr val="1F2937"/>
+                </a:solidFill>
+                <a:latin typeface="Cambria"/>
+              </a:rPr>
+              <a:t>危険度ランキング</a:t>
+            </a:r>
+          </a:p>
+        </p:txBody>
+      </p:sp>
+      <p:sp>
+        <p:nvSpPr>
           <p:cNvPr id="14" name="TextBox 13"/>
           <p:cNvSpPr txBox="1"/>
           <p:nvPr/>
         </p:nvSpPr>
         <p:spPr>
           <a:xfrm>
-            <a:off x="3611880" y="2386584"/>
-            <a:ext cx="914400" cy="566928"/>
+            <a:off x="1554480" y="3904487"/>
+            <a:ext cx="3703320" cy="731520"/>
           </a:xfrm>
           <a:prstGeom prst="rect">
             <a:avLst/>
@@ -4003,149 +4004,32 @@
           <a:p>
             <a:pPr algn="l">
               <a:lnSpc>
-                <a:spcPct val="130000"/>
-              </a:lnSpc>
-            </a:pPr>
-            <a:r>
-              <a:rPr sz="2600" b="0" i="0">
-                <a:solidFill>
-                  <a:srgbClr val="2563EB"/>
+                <a:spcPct val="135000"/>
+              </a:lnSpc>
+            </a:pPr>
+            <a:r>
+              <a:rPr sz="1100" b="0" i="0">
+                <a:solidFill>
+                  <a:srgbClr val="5B6472"/>
                 </a:solidFill>
                 <a:latin typeface="Calibri"/>
               </a:rPr>
-              <a:t>🌐</a:t>
-            </a:r>
-          </a:p>
-        </p:txBody>
-      </p:sp>
-      <p:sp>
-        <p:nvSpPr>
-          <p:cNvPr id="15" name="TextBox 14"/>
-          <p:cNvSpPr txBox="1"/>
-          <p:nvPr/>
-        </p:nvSpPr>
-        <p:spPr>
-          <a:xfrm>
-            <a:off x="3611880" y="2971800"/>
-            <a:ext cx="2423160" cy="457200"/>
-          </a:xfrm>
-          <a:prstGeom prst="rect">
-            <a:avLst/>
-          </a:prstGeom>
-          <a:noFill/>
-        </p:spPr>
-        <p:txBody>
-          <a:bodyPr wrap="square" lIns="0" rIns="0" tIns="0" bIns="0" anchor="t">
-            <a:spAutoFit/>
-          </a:bodyPr>
-          <a:lstStyle/>
-          <a:p>
-            <a:pPr algn="l">
-              <a:lnSpc>
-                <a:spcPct val="130000"/>
-              </a:lnSpc>
-            </a:pPr>
-            <a:r>
-              <a:rPr sz="1700" b="1" i="0">
-                <a:solidFill>
-                  <a:srgbClr val="1F2937"/>
-                </a:solidFill>
-                <a:latin typeface="Cambria"/>
-              </a:rPr>
-              <a:t>広がっている</a:t>
-            </a:r>
-          </a:p>
-        </p:txBody>
-      </p:sp>
-      <p:sp>
-        <p:nvSpPr>
-          <p:cNvPr id="16" name="TextBox 15"/>
-          <p:cNvSpPr txBox="1"/>
-          <p:nvPr/>
-        </p:nvSpPr>
-        <p:spPr>
-          <a:xfrm>
-            <a:off x="3611880" y="3456432"/>
-            <a:ext cx="2331720" cy="822960"/>
-          </a:xfrm>
-          <a:prstGeom prst="rect">
-            <a:avLst/>
-          </a:prstGeom>
-          <a:noFill/>
-        </p:spPr>
-        <p:txBody>
-          <a:bodyPr wrap="square" lIns="0" rIns="0" tIns="0" bIns="0" anchor="t">
-            <a:spAutoFit/>
-          </a:bodyPr>
-          <a:lstStyle/>
-          <a:p>
-            <a:pPr algn="l">
-              <a:lnSpc>
-                <a:spcPct val="140000"/>
-              </a:lnSpc>
-            </a:pPr>
-            <a:r>
-              <a:rPr sz="1100" b="0" i="0">
-                <a:solidFill>
-                  <a:srgbClr val="1F2937"/>
-                </a:solidFill>
-                <a:latin typeface="Calibri"/>
-              </a:rPr>
-              <a:t>同じ動きが
-複数の PC で同時発生</a:t>
-            </a:r>
-          </a:p>
-        </p:txBody>
-      </p:sp>
-      <p:sp>
-        <p:nvSpPr>
-          <p:cNvPr id="17" name="TextBox 16"/>
-          <p:cNvSpPr txBox="1"/>
-          <p:nvPr/>
-        </p:nvSpPr>
-        <p:spPr>
-          <a:xfrm>
-            <a:off x="3611880" y="4325112"/>
-            <a:ext cx="2331720" cy="457200"/>
-          </a:xfrm>
-          <a:prstGeom prst="rect">
-            <a:avLst/>
-          </a:prstGeom>
-          <a:noFill/>
-        </p:spPr>
-        <p:txBody>
-          <a:bodyPr wrap="square" lIns="0" rIns="0" tIns="0" bIns="0" anchor="t">
-            <a:spAutoFit/>
-          </a:bodyPr>
-          <a:lstStyle/>
-          <a:p>
-            <a:pPr algn="l">
-              <a:lnSpc>
-                <a:spcPct val="130000"/>
-              </a:lnSpc>
-            </a:pPr>
-            <a:r>
-              <a:rPr sz="1000" b="0" i="1">
-                <a:solidFill>
-                  <a:srgbClr val="5B6472"/>
-                </a:solidFill>
-                <a:latin typeface="Calibri"/>
-              </a:rPr>
-              <a:t>例: ウイルスが社内に拡大</a:t>
-            </a:r>
-          </a:p>
-        </p:txBody>
-      </p:sp>
-      <p:sp>
-        <p:nvSpPr>
-          <p:cNvPr id="18" name="Rounded Rectangle 17"/>
+              <a:t>どの PC から調べるべきかを
+自動採点して並べ替え</a:t>
+            </a:r>
+          </a:p>
+        </p:txBody>
+      </p:sp>
+      <p:sp>
+        <p:nvSpPr>
+          <p:cNvPr id="15" name="Rounded Rectangle 14"/>
           <p:cNvSpPr/>
           <p:nvPr/>
         </p:nvSpPr>
         <p:spPr>
           <a:xfrm>
-            <a:off x="6309360" y="2240280"/>
-            <a:ext cx="2697480" cy="2606040"/>
+            <a:off x="548640" y="4892040"/>
+            <a:ext cx="4846320" cy="1371600"/>
           </a:xfrm>
           <a:prstGeom prst="roundRect">
             <a:avLst/>
@@ -4184,14 +4068,14 @@
       </p:sp>
       <p:sp>
         <p:nvSpPr>
-          <p:cNvPr id="19" name="Rectangle 18"/>
+          <p:cNvPr id="16" name="Rectangle 15"/>
           <p:cNvSpPr/>
           <p:nvPr/>
         </p:nvSpPr>
         <p:spPr>
           <a:xfrm>
-            <a:off x="6309360" y="2240280"/>
-            <a:ext cx="73152" cy="2606040"/>
+            <a:off x="548640" y="4892040"/>
+            <a:ext cx="73152" cy="1371600"/>
           </a:xfrm>
           <a:prstGeom prst="rect">
             <a:avLst/>
@@ -4228,14 +4112,14 @@
       </p:sp>
       <p:sp>
         <p:nvSpPr>
-          <p:cNvPr id="20" name="TextBox 19"/>
-          <p:cNvSpPr txBox="1"/>
-          <p:nvPr/>
-        </p:nvSpPr>
-        <p:spPr>
-          <a:xfrm>
-            <a:off x="6492240" y="2386584"/>
-            <a:ext cx="914400" cy="566928"/>
+          <p:cNvPr id="17" name="TextBox 16"/>
+          <p:cNvSpPr txBox="1"/>
+          <p:nvPr/>
+        </p:nvSpPr>
+        <p:spPr>
+          <a:xfrm>
+            <a:off x="777240" y="5056631"/>
+            <a:ext cx="731520" cy="640080"/>
           </a:xfrm>
           <a:prstGeom prst="rect">
             <a:avLst/>
@@ -4260,21 +4144,21 @@
                 </a:solidFill>
                 <a:latin typeface="Calibri"/>
               </a:rPr>
-              <a:t>🤫</a:t>
-            </a:r>
-          </a:p>
-        </p:txBody>
-      </p:sp>
-      <p:sp>
-        <p:nvSpPr>
-          <p:cNvPr id="21" name="TextBox 20"/>
-          <p:cNvSpPr txBox="1"/>
-          <p:nvPr/>
-        </p:nvSpPr>
-        <p:spPr>
-          <a:xfrm>
-            <a:off x="6492240" y="2971800"/>
-            <a:ext cx="2423160" cy="457200"/>
+              <a:t>📊</a:t>
+            </a:r>
+          </a:p>
+        </p:txBody>
+      </p:sp>
+      <p:sp>
+        <p:nvSpPr>
+          <p:cNvPr id="18" name="TextBox 17"/>
+          <p:cNvSpPr txBox="1"/>
+          <p:nvPr/>
+        </p:nvSpPr>
+        <p:spPr>
+          <a:xfrm>
+            <a:off x="1554480" y="5038344"/>
+            <a:ext cx="3657600" cy="411480"/>
           </a:xfrm>
           <a:prstGeom prst="rect">
             <a:avLst/>
@@ -4293,27 +4177,27 @@
               </a:lnSpc>
             </a:pPr>
             <a:r>
-              <a:rPr sz="1700" b="1" i="0">
+              <a:rPr sz="1600" b="1" i="0">
                 <a:solidFill>
                   <a:srgbClr val="1F2937"/>
                 </a:solidFill>
                 <a:latin typeface="Cambria"/>
               </a:rPr>
-              <a:t>急に静かに</a:t>
-            </a:r>
-          </a:p>
-        </p:txBody>
-      </p:sp>
-      <p:sp>
-        <p:nvSpPr>
-          <p:cNvPr id="22" name="TextBox 21"/>
-          <p:cNvSpPr txBox="1"/>
-          <p:nvPr/>
-        </p:nvSpPr>
-        <p:spPr>
-          <a:xfrm>
-            <a:off x="6492240" y="3456432"/>
-            <a:ext cx="2331720" cy="822960"/>
+              <a:t>全体が一目で</a:t>
+            </a:r>
+          </a:p>
+        </p:txBody>
+      </p:sp>
+      <p:sp>
+        <p:nvSpPr>
+          <p:cNvPr id="19" name="TextBox 18"/>
+          <p:cNvSpPr txBox="1"/>
+          <p:nvPr/>
+        </p:nvSpPr>
+        <p:spPr>
+          <a:xfrm>
+            <a:off x="1554480" y="5458968"/>
+            <a:ext cx="3703320" cy="731520"/>
           </a:xfrm>
           <a:prstGeom prst="rect">
             <a:avLst/>
@@ -4328,559 +4212,94 @@
           <a:p>
             <a:pPr algn="l">
               <a:lnSpc>
-                <a:spcPct val="140000"/>
+                <a:spcPct val="135000"/>
               </a:lnSpc>
             </a:pPr>
             <a:r>
               <a:rPr sz="1100" b="0" i="0">
                 <a:solidFill>
-                  <a:srgbClr val="1F2937"/>
+                  <a:srgbClr val="5B6472"/>
                 </a:solidFill>
                 <a:latin typeface="Calibri"/>
               </a:rPr>
-              <a:t>普段活動している PC が
-急にログを残さなくなる</a:t>
-            </a:r>
-          </a:p>
-        </p:txBody>
-      </p:sp>
-      <p:sp>
-        <p:nvSpPr>
-          <p:cNvPr id="23" name="TextBox 22"/>
-          <p:cNvSpPr txBox="1"/>
-          <p:nvPr/>
-        </p:nvSpPr>
-        <p:spPr>
-          <a:xfrm>
-            <a:off x="6492240" y="4325112"/>
-            <a:ext cx="2331720" cy="457200"/>
-          </a:xfrm>
-          <a:prstGeom prst="rect">
-            <a:avLst/>
-          </a:prstGeom>
-          <a:noFill/>
-        </p:spPr>
-        <p:txBody>
-          <a:bodyPr wrap="square" lIns="0" rIns="0" tIns="0" bIns="0" anchor="t">
-            <a:spAutoFit/>
-          </a:bodyPr>
-          <a:lstStyle/>
-          <a:p>
-            <a:pPr algn="l">
-              <a:lnSpc>
-                <a:spcPct val="130000"/>
-              </a:lnSpc>
-            </a:pPr>
-            <a:r>
-              <a:rPr sz="1000" b="0" i="1">
-                <a:solidFill>
-                  <a:srgbClr val="5B6472"/>
-                </a:solidFill>
-                <a:latin typeface="Calibri"/>
-              </a:rPr>
-              <a:t>例: 攻撃者がログを消した</a:t>
-            </a:r>
-          </a:p>
-        </p:txBody>
-      </p:sp>
-      <p:sp>
-        <p:nvSpPr>
-          <p:cNvPr id="24" name="Rounded Rectangle 23"/>
-          <p:cNvSpPr/>
-          <p:nvPr/>
-        </p:nvSpPr>
-        <p:spPr>
-          <a:xfrm>
-            <a:off x="9189720" y="2240280"/>
-            <a:ext cx="2697480" cy="2606040"/>
-          </a:xfrm>
-          <a:prstGeom prst="roundRect">
-            <a:avLst/>
-          </a:prstGeom>
-          <a:solidFill>
-            <a:srgbClr val="FFFFFF"/>
-          </a:solidFill>
-          <a:ln w="9525">
+              <a:t>重大度・時間の流れ・多い攻撃を
+グラフで俯瞰</a:t>
+            </a:r>
+          </a:p>
+        </p:txBody>
+      </p:sp>
+      <p:pic>
+        <p:nvPicPr>
+          <p:cNvPr id="20" name="Picture 19" descr="dashboard.png"/>
+          <p:cNvPicPr>
+            <a:picLocks noChangeAspect="1"/>
+          </p:cNvPicPr>
+          <p:nvPr/>
+        </p:nvPicPr>
+        <p:blipFill>
+          <a:blip r:embed="rId2"/>
+          <a:stretch>
+            <a:fillRect/>
+          </a:stretch>
+        </p:blipFill>
+        <p:spPr>
+          <a:xfrm>
+            <a:off x="6484620" y="1691640"/>
+            <a:ext cx="4450080" cy="4572000"/>
+          </a:xfrm>
+          <a:prstGeom prst="rect">
+            <a:avLst/>
+          </a:prstGeom>
+          <a:ln w="12700">
             <a:solidFill>
               <a:srgbClr val="DDE3EE"/>
             </a:solidFill>
           </a:ln>
           <a:effectLst/>
         </p:spPr>
-        <p:style>
-          <a:lnRef idx="1">
-            <a:schemeClr val="accent1"/>
-          </a:lnRef>
-          <a:fillRef idx="3">
-            <a:schemeClr val="accent1"/>
-          </a:fillRef>
-          <a:effectRef idx="2">
-            <a:schemeClr val="accent1"/>
-          </a:effectRef>
-          <a:fontRef idx="minor">
-            <a:schemeClr val="lt1"/>
-          </a:fontRef>
-        </p:style>
-        <p:txBody>
-          <a:bodyPr rtlCol="0" anchor="ctr"/>
-          <a:lstStyle/>
-          <a:p>
-            <a:pPr algn="ctr"/>
-          </a:p>
-        </p:txBody>
-      </p:sp>
-      <p:sp>
-        <p:nvSpPr>
-          <p:cNvPr id="25" name="Rectangle 24"/>
-          <p:cNvSpPr/>
-          <p:nvPr/>
-        </p:nvSpPr>
-        <p:spPr>
-          <a:xfrm>
-            <a:off x="9189720" y="2240280"/>
-            <a:ext cx="73152" cy="2606040"/>
-          </a:xfrm>
-          <a:prstGeom prst="rect">
-            <a:avLst/>
-          </a:prstGeom>
-          <a:solidFill>
-            <a:srgbClr val="2563EB"/>
-          </a:solidFill>
-          <a:ln>
-            <a:noFill/>
-          </a:ln>
-          <a:effectLst/>
-        </p:spPr>
-        <p:style>
-          <a:lnRef idx="1">
-            <a:schemeClr val="accent1"/>
-          </a:lnRef>
-          <a:fillRef idx="3">
-            <a:schemeClr val="accent1"/>
-          </a:fillRef>
-          <a:effectRef idx="2">
-            <a:schemeClr val="accent1"/>
-          </a:effectRef>
-          <a:fontRef idx="minor">
-            <a:schemeClr val="lt1"/>
-          </a:fontRef>
-        </p:style>
-        <p:txBody>
-          <a:bodyPr rtlCol="0" anchor="ctr"/>
-          <a:lstStyle/>
-          <a:p>
-            <a:pPr algn="ctr"/>
-          </a:p>
-        </p:txBody>
-      </p:sp>
-      <p:sp>
-        <p:nvSpPr>
-          <p:cNvPr id="26" name="TextBox 25"/>
-          <p:cNvSpPr txBox="1"/>
-          <p:nvPr/>
-        </p:nvSpPr>
-        <p:spPr>
-          <a:xfrm>
-            <a:off x="9372600" y="2386584"/>
-            <a:ext cx="914400" cy="566928"/>
-          </a:xfrm>
-          <a:prstGeom prst="rect">
-            <a:avLst/>
-          </a:prstGeom>
-          <a:noFill/>
-        </p:spPr>
-        <p:txBody>
-          <a:bodyPr wrap="square" lIns="0" rIns="0" tIns="0" bIns="0" anchor="t">
-            <a:spAutoFit/>
-          </a:bodyPr>
-          <a:lstStyle/>
-          <a:p>
-            <a:pPr algn="l">
-              <a:lnSpc>
-                <a:spcPct val="130000"/>
-              </a:lnSpc>
-            </a:pPr>
-            <a:r>
-              <a:rPr sz="2600" b="0" i="0">
-                <a:solidFill>
-                  <a:srgbClr val="2563EB"/>
+      </p:pic>
+      <p:sp>
+        <p:nvSpPr>
+          <p:cNvPr id="21" name="TextBox 20"/>
+          <p:cNvSpPr txBox="1"/>
+          <p:nvPr/>
+        </p:nvSpPr>
+        <p:spPr>
+          <a:xfrm>
+            <a:off x="5760720" y="6309360"/>
+            <a:ext cx="5897880" cy="320040"/>
+          </a:xfrm>
+          <a:prstGeom prst="rect">
+            <a:avLst/>
+          </a:prstGeom>
+          <a:noFill/>
+        </p:spPr>
+        <p:txBody>
+          <a:bodyPr wrap="square" lIns="0" rIns="0" tIns="0" bIns="0" anchor="t">
+            <a:spAutoFit/>
+          </a:bodyPr>
+          <a:lstStyle/>
+          <a:p>
+            <a:pPr algn="ctr">
+              <a:lnSpc>
+                <a:spcPct val="130000"/>
+              </a:lnSpc>
+            </a:pPr>
+            <a:r>
+              <a:rPr sz="1100" b="0" i="0">
+                <a:solidFill>
+                  <a:srgbClr val="5B6472"/>
                 </a:solidFill>
                 <a:latin typeface="Calibri"/>
               </a:rPr>
-              <a:t>🌙</a:t>
-            </a:r>
-          </a:p>
-        </p:txBody>
-      </p:sp>
-      <p:sp>
-        <p:nvSpPr>
-          <p:cNvPr id="27" name="TextBox 26"/>
-          <p:cNvSpPr txBox="1"/>
-          <p:nvPr/>
-        </p:nvSpPr>
-        <p:spPr>
-          <a:xfrm>
-            <a:off x="9372600" y="2971800"/>
-            <a:ext cx="2423160" cy="457200"/>
-          </a:xfrm>
-          <a:prstGeom prst="rect">
-            <a:avLst/>
-          </a:prstGeom>
-          <a:noFill/>
-        </p:spPr>
-        <p:txBody>
-          <a:bodyPr wrap="square" lIns="0" rIns="0" tIns="0" bIns="0" anchor="t">
-            <a:spAutoFit/>
-          </a:bodyPr>
-          <a:lstStyle/>
-          <a:p>
-            <a:pPr algn="l">
-              <a:lnSpc>
-                <a:spcPct val="130000"/>
-              </a:lnSpc>
-            </a:pPr>
-            <a:r>
-              <a:rPr sz="1700" b="1" i="0">
-                <a:solidFill>
-                  <a:srgbClr val="1F2937"/>
-                </a:solidFill>
-                <a:latin typeface="Cambria"/>
-              </a:rPr>
-              <a:t>時間外の活動</a:t>
-            </a:r>
-          </a:p>
-        </p:txBody>
-      </p:sp>
-      <p:sp>
-        <p:nvSpPr>
-          <p:cNvPr id="28" name="TextBox 27"/>
-          <p:cNvSpPr txBox="1"/>
-          <p:nvPr/>
-        </p:nvSpPr>
-        <p:spPr>
-          <a:xfrm>
-            <a:off x="9372600" y="3456432"/>
-            <a:ext cx="2331720" cy="822960"/>
-          </a:xfrm>
-          <a:prstGeom prst="rect">
-            <a:avLst/>
-          </a:prstGeom>
-          <a:noFill/>
-        </p:spPr>
-        <p:txBody>
-          <a:bodyPr wrap="square" lIns="0" rIns="0" tIns="0" bIns="0" anchor="t">
-            <a:spAutoFit/>
-          </a:bodyPr>
-          <a:lstStyle/>
-          <a:p>
-            <a:pPr algn="l">
-              <a:lnSpc>
-                <a:spcPct val="140000"/>
-              </a:lnSpc>
-            </a:pPr>
-            <a:r>
-              <a:rPr sz="1100" b="0" i="0">
-                <a:solidFill>
-                  <a:srgbClr val="1F2937"/>
-                </a:solidFill>
-                <a:latin typeface="Calibri"/>
-              </a:rPr>
-              <a:t>深夜などの業務時間外に
-重要な動きが発生</a:t>
-            </a:r>
-          </a:p>
-        </p:txBody>
-      </p:sp>
-      <p:sp>
-        <p:nvSpPr>
-          <p:cNvPr id="29" name="TextBox 28"/>
-          <p:cNvSpPr txBox="1"/>
-          <p:nvPr/>
-        </p:nvSpPr>
-        <p:spPr>
-          <a:xfrm>
-            <a:off x="9372600" y="4325112"/>
-            <a:ext cx="2331720" cy="457200"/>
-          </a:xfrm>
-          <a:prstGeom prst="rect">
-            <a:avLst/>
-          </a:prstGeom>
-          <a:noFill/>
-        </p:spPr>
-        <p:txBody>
-          <a:bodyPr wrap="square" lIns="0" rIns="0" tIns="0" bIns="0" anchor="t">
-            <a:spAutoFit/>
-          </a:bodyPr>
-          <a:lstStyle/>
-          <a:p>
-            <a:pPr algn="l">
-              <a:lnSpc>
-                <a:spcPct val="130000"/>
-              </a:lnSpc>
-            </a:pPr>
-            <a:r>
-              <a:rPr sz="1000" b="0" i="1">
-                <a:solidFill>
-                  <a:srgbClr val="5B6472"/>
-                </a:solidFill>
-                <a:latin typeface="Calibri"/>
-              </a:rPr>
-              <a:t>例: 業務外を狙った侵入</a:t>
-            </a:r>
-          </a:p>
-        </p:txBody>
-      </p:sp>
-      <p:sp>
-        <p:nvSpPr>
-          <p:cNvPr id="30" name="Rounded Rectangle 29"/>
-          <p:cNvSpPr/>
-          <p:nvPr/>
-        </p:nvSpPr>
-        <p:spPr>
-          <a:xfrm>
-            <a:off x="548640" y="5029200"/>
-            <a:ext cx="11064240" cy="1371600"/>
-          </a:xfrm>
-          <a:prstGeom prst="roundRect">
-            <a:avLst/>
-          </a:prstGeom>
-          <a:solidFill>
-            <a:srgbClr val="E8F0FE"/>
-          </a:solidFill>
-          <a:ln w="9525">
-            <a:solidFill>
-              <a:srgbClr val="E8F0FE"/>
-            </a:solidFill>
-          </a:ln>
-          <a:effectLst/>
-        </p:spPr>
-        <p:style>
-          <a:lnRef idx="1">
-            <a:schemeClr val="accent1"/>
-          </a:lnRef>
-          <a:fillRef idx="3">
-            <a:schemeClr val="accent1"/>
-          </a:fillRef>
-          <a:effectRef idx="2">
-            <a:schemeClr val="accent1"/>
-          </a:effectRef>
-          <a:fontRef idx="minor">
-            <a:schemeClr val="lt1"/>
-          </a:fontRef>
-        </p:style>
-        <p:txBody>
-          <a:bodyPr rtlCol="0" anchor="ctr"/>
-          <a:lstStyle/>
-          <a:p>
-            <a:pPr algn="ctr"/>
-          </a:p>
-        </p:txBody>
-      </p:sp>
-      <p:sp>
-        <p:nvSpPr>
-          <p:cNvPr id="31" name="TextBox 30"/>
-          <p:cNvSpPr txBox="1"/>
-          <p:nvPr/>
-        </p:nvSpPr>
-        <p:spPr>
-          <a:xfrm>
-            <a:off x="914400" y="5230368"/>
-            <a:ext cx="4937760" cy="365760"/>
-          </a:xfrm>
-          <a:prstGeom prst="rect">
-            <a:avLst/>
-          </a:prstGeom>
-          <a:noFill/>
-        </p:spPr>
-        <p:txBody>
-          <a:bodyPr wrap="square" lIns="0" rIns="0" tIns="0" bIns="0" anchor="t">
-            <a:spAutoFit/>
-          </a:bodyPr>
-          <a:lstStyle/>
-          <a:p>
-            <a:pPr algn="l">
-              <a:lnSpc>
-                <a:spcPct val="130000"/>
-              </a:lnSpc>
-            </a:pPr>
-            <a:r>
-              <a:rPr sz="1350" b="1" i="0">
-                <a:solidFill>
-                  <a:srgbClr val="1F2937"/>
-                </a:solidFill>
-                <a:latin typeface="Calibri"/>
-              </a:rPr>
-              <a:t>📏 ルールによる検知 (既存の方法)</a:t>
-            </a:r>
-          </a:p>
-        </p:txBody>
-      </p:sp>
-      <p:sp>
-        <p:nvSpPr>
-          <p:cNvPr id="32" name="TextBox 31"/>
-          <p:cNvSpPr txBox="1"/>
-          <p:nvPr/>
-        </p:nvSpPr>
-        <p:spPr>
-          <a:xfrm>
-            <a:off x="914400" y="5614416"/>
-            <a:ext cx="4937760" cy="685800"/>
-          </a:xfrm>
-          <a:prstGeom prst="rect">
-            <a:avLst/>
-          </a:prstGeom>
-          <a:noFill/>
-        </p:spPr>
-        <p:txBody>
-          <a:bodyPr wrap="square" lIns="0" rIns="0" tIns="0" bIns="0" anchor="t">
-            <a:spAutoFit/>
-          </a:bodyPr>
-          <a:lstStyle/>
-          <a:p>
-            <a:pPr algn="l">
-              <a:lnSpc>
-                <a:spcPct val="140000"/>
-              </a:lnSpc>
-            </a:pPr>
-            <a:r>
-              <a:rPr sz="1150" b="0" i="0">
-                <a:solidFill>
-                  <a:srgbClr val="5B6472"/>
-                </a:solidFill>
-                <a:latin typeface="Calibri"/>
-              </a:rPr>
-              <a:t>事前に知っている「悪い特徴」と一致したら警告。
-既に知られている手口には確実で強い。</a:t>
-            </a:r>
-          </a:p>
-        </p:txBody>
-      </p:sp>
-      <p:sp>
-        <p:nvSpPr>
-          <p:cNvPr id="33" name="Rectangle 32"/>
-          <p:cNvSpPr/>
-          <p:nvPr/>
-        </p:nvSpPr>
-        <p:spPr>
-          <a:xfrm>
-            <a:off x="6053328" y="5257800"/>
-            <a:ext cx="16459" cy="914400"/>
-          </a:xfrm>
-          <a:prstGeom prst="rect">
-            <a:avLst/>
-          </a:prstGeom>
-          <a:solidFill>
-            <a:srgbClr val="DDE3EE"/>
-          </a:solidFill>
-          <a:ln>
-            <a:noFill/>
-          </a:ln>
-          <a:effectLst/>
-        </p:spPr>
-        <p:style>
-          <a:lnRef idx="1">
-            <a:schemeClr val="accent1"/>
-          </a:lnRef>
-          <a:fillRef idx="3">
-            <a:schemeClr val="accent1"/>
-          </a:fillRef>
-          <a:effectRef idx="2">
-            <a:schemeClr val="accent1"/>
-          </a:effectRef>
-          <a:fontRef idx="minor">
-            <a:schemeClr val="lt1"/>
-          </a:fontRef>
-        </p:style>
-        <p:txBody>
-          <a:bodyPr rtlCol="0" anchor="ctr"/>
-          <a:lstStyle/>
-          <a:p>
-            <a:pPr algn="ctr"/>
-          </a:p>
-        </p:txBody>
-      </p:sp>
-      <p:sp>
-        <p:nvSpPr>
-          <p:cNvPr id="34" name="TextBox 33"/>
-          <p:cNvSpPr txBox="1"/>
-          <p:nvPr/>
-        </p:nvSpPr>
-        <p:spPr>
-          <a:xfrm>
-            <a:off x="6400800" y="5230368"/>
-            <a:ext cx="4937760" cy="365760"/>
-          </a:xfrm>
-          <a:prstGeom prst="rect">
-            <a:avLst/>
-          </a:prstGeom>
-          <a:noFill/>
-        </p:spPr>
-        <p:txBody>
-          <a:bodyPr wrap="square" lIns="0" rIns="0" tIns="0" bIns="0" anchor="t">
-            <a:spAutoFit/>
-          </a:bodyPr>
-          <a:lstStyle/>
-          <a:p>
-            <a:pPr algn="l">
-              <a:lnSpc>
-                <a:spcPct val="130000"/>
-              </a:lnSpc>
-            </a:pPr>
-            <a:r>
-              <a:rPr sz="1350" b="1" i="0">
-                <a:solidFill>
-                  <a:srgbClr val="1D4ED8"/>
-                </a:solidFill>
-                <a:latin typeface="Calibri"/>
-              </a:rPr>
-              <a:t>📈 振舞いによる検知 (今回自作した分析)</a:t>
-            </a:r>
-          </a:p>
-        </p:txBody>
-      </p:sp>
-      <p:sp>
-        <p:nvSpPr>
-          <p:cNvPr id="35" name="TextBox 34"/>
-          <p:cNvSpPr txBox="1"/>
-          <p:nvPr/>
-        </p:nvSpPr>
-        <p:spPr>
-          <a:xfrm>
-            <a:off x="6400800" y="5614416"/>
-            <a:ext cx="4937760" cy="685800"/>
-          </a:xfrm>
-          <a:prstGeom prst="rect">
-            <a:avLst/>
-          </a:prstGeom>
-          <a:noFill/>
-        </p:spPr>
-        <p:txBody>
-          <a:bodyPr wrap="square" lIns="0" rIns="0" tIns="0" bIns="0" anchor="t">
-            <a:spAutoFit/>
-          </a:bodyPr>
-          <a:lstStyle/>
-          <a:p>
-            <a:pPr algn="l">
-              <a:lnSpc>
-                <a:spcPct val="140000"/>
-              </a:lnSpc>
-            </a:pPr>
-            <a:r>
-              <a:rPr sz="1150" b="0" i="0">
-                <a:solidFill>
-                  <a:srgbClr val="5B6472"/>
-                </a:solidFill>
-                <a:latin typeface="Calibri"/>
-              </a:rPr>
-              <a:t>「普段との違い」に反応して知らせる。
-ルールがまだ無い未知の手口への「気づき」になる。</a:t>
-            </a:r>
-          </a:p>
-        </p:txBody>
-      </p:sp>
-      <p:sp>
-        <p:nvSpPr>
-          <p:cNvPr id="36" name="TextBox 35"/>
+              <a:t>▲ 実際の画面 (ブラウザで動作・データは外部に送らない)</a:t>
+            </a:r>
+          </a:p>
+        </p:txBody>
+      </p:sp>
+      <p:sp>
+        <p:nvSpPr>
+          <p:cNvPr id="22" name="TextBox 21"/>
           <p:cNvSpPr txBox="1"/>
           <p:nvPr/>
         </p:nvSpPr>
@@ -4912,7 +4331,7 @@
                 </a:solidFill>
                 <a:latin typeface="Calibri"/>
               </a:rPr>
-              <a:t>10 / 13</a:t>
+              <a:t>10 / 14</a:t>
             </a:r>
           </a:p>
         </p:txBody>
@@ -4950,7 +4369,7 @@
             <a:avLst/>
           </a:prstGeom>
           <a:solidFill>
-            <a:srgbClr val="1B254F"/>
+            <a:srgbClr val="F4F6FA"/>
           </a:solidFill>
           <a:ln>
             <a:noFill/>
@@ -4987,118 +4406,1354 @@
         </p:nvSpPr>
         <p:spPr>
           <a:xfrm>
-            <a:off x="548640" y="1737360"/>
-            <a:ext cx="10972800" cy="1463040"/>
-          </a:xfrm>
-          <a:prstGeom prst="rect">
-            <a:avLst/>
-          </a:prstGeom>
-          <a:noFill/>
-        </p:spPr>
-        <p:txBody>
-          <a:bodyPr wrap="square" lIns="0" rIns="0" tIns="0" bIns="0" anchor="t">
-            <a:spAutoFit/>
-          </a:bodyPr>
-          <a:lstStyle/>
-          <a:p>
-            <a:pPr algn="ctr">
-              <a:lnSpc>
-                <a:spcPct val="130000"/>
-              </a:lnSpc>
-            </a:pPr>
-            <a:r>
-              <a:rPr sz="11000" b="1" i="0">
-                <a:solidFill>
-                  <a:srgbClr val="FFFFFF"/>
+            <a:off x="548640" y="347472"/>
+            <a:ext cx="10972800" cy="274320"/>
+          </a:xfrm>
+          <a:prstGeom prst="rect">
+            <a:avLst/>
+          </a:prstGeom>
+          <a:noFill/>
+        </p:spPr>
+        <p:txBody>
+          <a:bodyPr wrap="square" lIns="0" rIns="0" tIns="0" bIns="0" anchor="t">
+            <a:spAutoFit/>
+          </a:bodyPr>
+          <a:lstStyle/>
+          <a:p>
+            <a:pPr algn="l">
+              <a:lnSpc>
+                <a:spcPct val="130000"/>
+              </a:lnSpc>
+            </a:pPr>
+            <a:r>
+              <a:rPr sz="1100" b="1" i="0">
+                <a:solidFill>
+                  <a:srgbClr val="2563EB"/>
+                </a:solidFill>
+                <a:latin typeface="Calibri"/>
+              </a:rPr>
+              <a:t>開発内容 +α   (自作の統計分析)</a:t>
+            </a:r>
+          </a:p>
+        </p:txBody>
+      </p:sp>
+      <p:sp>
+        <p:nvSpPr>
+          <p:cNvPr id="4" name="TextBox 3"/>
+          <p:cNvSpPr txBox="1"/>
+          <p:nvPr/>
+        </p:nvSpPr>
+        <p:spPr>
+          <a:xfrm>
+            <a:off x="548640" y="621792"/>
+            <a:ext cx="11155680" cy="640080"/>
+          </a:xfrm>
+          <a:prstGeom prst="rect">
+            <a:avLst/>
+          </a:prstGeom>
+          <a:noFill/>
+        </p:spPr>
+        <p:txBody>
+          <a:bodyPr wrap="square" lIns="0" rIns="0" tIns="0" bIns="0" anchor="t">
+            <a:spAutoFit/>
+          </a:bodyPr>
+          <a:lstStyle/>
+          <a:p>
+            <a:pPr algn="l">
+              <a:lnSpc>
+                <a:spcPct val="130000"/>
+              </a:lnSpc>
+            </a:pPr>
+            <a:r>
+              <a:rPr sz="2800" b="1" i="0">
+                <a:solidFill>
+                  <a:srgbClr val="1F2937"/>
                 </a:solidFill>
                 <a:latin typeface="Cambria"/>
               </a:rPr>
-              <a:t>DEMO</a:t>
-            </a:r>
-          </a:p>
-        </p:txBody>
-      </p:sp>
-      <p:sp>
-        <p:nvSpPr>
-          <p:cNvPr id="4" name="TextBox 3"/>
-          <p:cNvSpPr txBox="1"/>
-          <p:nvPr/>
-        </p:nvSpPr>
-        <p:spPr>
-          <a:xfrm>
-            <a:off x="548640" y="3977639"/>
-            <a:ext cx="10972800" cy="548640"/>
-          </a:xfrm>
-          <a:prstGeom prst="rect">
-            <a:avLst/>
-          </a:prstGeom>
-          <a:noFill/>
-        </p:spPr>
-        <p:txBody>
-          <a:bodyPr wrap="square" lIns="0" rIns="0" tIns="0" bIns="0" anchor="t">
-            <a:spAutoFit/>
-          </a:bodyPr>
-          <a:lstStyle/>
-          <a:p>
-            <a:pPr algn="ctr">
-              <a:lnSpc>
-                <a:spcPct val="130000"/>
-              </a:lnSpc>
-            </a:pPr>
-            <a:r>
-              <a:rPr sz="2400" b="0" i="1">
-                <a:solidFill>
-                  <a:srgbClr val="CADCFC"/>
+              <a:t>さらに: ルールでは書けない「いつもと違う」も検出</a:t>
+            </a:r>
+          </a:p>
+        </p:txBody>
+      </p:sp>
+      <p:sp>
+        <p:nvSpPr>
+          <p:cNvPr id="5" name="TextBox 4"/>
+          <p:cNvSpPr txBox="1"/>
+          <p:nvPr/>
+        </p:nvSpPr>
+        <p:spPr>
+          <a:xfrm>
+            <a:off x="548640" y="1600200"/>
+            <a:ext cx="10972800" cy="457200"/>
+          </a:xfrm>
+          <a:prstGeom prst="rect">
+            <a:avLst/>
+          </a:prstGeom>
+          <a:noFill/>
+        </p:spPr>
+        <p:txBody>
+          <a:bodyPr wrap="square" lIns="0" rIns="0" tIns="0" bIns="0" anchor="t">
+            <a:spAutoFit/>
+          </a:bodyPr>
+          <a:lstStyle/>
+          <a:p>
+            <a:pPr algn="l">
+              <a:lnSpc>
+                <a:spcPct val="130000"/>
+              </a:lnSpc>
+            </a:pPr>
+            <a:r>
+              <a:rPr sz="1500" b="0" i="1">
+                <a:solidFill>
+                  <a:srgbClr val="5B6472"/>
                 </a:solidFill>
                 <a:latin typeface="Calibri"/>
               </a:rPr>
-              <a:t>実際の画面で動かしてみます</a:t>
-            </a:r>
-          </a:p>
-        </p:txBody>
-      </p:sp>
-      <p:sp>
-        <p:nvSpPr>
-          <p:cNvPr id="5" name="TextBox 4"/>
-          <p:cNvSpPr txBox="1"/>
-          <p:nvPr/>
-        </p:nvSpPr>
-        <p:spPr>
-          <a:xfrm>
-            <a:off x="548640" y="4709160"/>
-            <a:ext cx="10972800" cy="457200"/>
-          </a:xfrm>
-          <a:prstGeom prst="rect">
-            <a:avLst/>
-          </a:prstGeom>
-          <a:noFill/>
-        </p:spPr>
-        <p:txBody>
-          <a:bodyPr wrap="square" lIns="0" rIns="0" tIns="0" bIns="0" anchor="t">
-            <a:spAutoFit/>
-          </a:bodyPr>
-          <a:lstStyle/>
-          <a:p>
-            <a:pPr algn="ctr">
-              <a:lnSpc>
-                <a:spcPct val="130000"/>
-              </a:lnSpc>
-            </a:pPr>
-            <a:r>
-              <a:rPr sz="1500" b="0" i="0">
-                <a:solidFill>
-                  <a:srgbClr val="CADCFC"/>
+              <a:t>ルールは 1 件ずつしか判定できない。そこで「全体の傾向」を統計で見る分析を自作しました。</a:t>
+            </a:r>
+          </a:p>
+        </p:txBody>
+      </p:sp>
+      <p:sp>
+        <p:nvSpPr>
+          <p:cNvPr id="6" name="Rounded Rectangle 5"/>
+          <p:cNvSpPr/>
+          <p:nvPr/>
+        </p:nvSpPr>
+        <p:spPr>
+          <a:xfrm>
+            <a:off x="548640" y="2240280"/>
+            <a:ext cx="2697480" cy="2606040"/>
+          </a:xfrm>
+          <a:prstGeom prst="roundRect">
+            <a:avLst/>
+          </a:prstGeom>
+          <a:solidFill>
+            <a:srgbClr val="FFFFFF"/>
+          </a:solidFill>
+          <a:ln w="9525">
+            <a:solidFill>
+              <a:srgbClr val="DDE3EE"/>
+            </a:solidFill>
+          </a:ln>
+          <a:effectLst/>
+        </p:spPr>
+        <p:style>
+          <a:lnRef idx="1">
+            <a:schemeClr val="accent1"/>
+          </a:lnRef>
+          <a:fillRef idx="3">
+            <a:schemeClr val="accent1"/>
+          </a:fillRef>
+          <a:effectRef idx="2">
+            <a:schemeClr val="accent1"/>
+          </a:effectRef>
+          <a:fontRef idx="minor">
+            <a:schemeClr val="lt1"/>
+          </a:fontRef>
+        </p:style>
+        <p:txBody>
+          <a:bodyPr rtlCol="0" anchor="ctr"/>
+          <a:lstStyle/>
+          <a:p>
+            <a:pPr algn="ctr"/>
+          </a:p>
+        </p:txBody>
+      </p:sp>
+      <p:sp>
+        <p:nvSpPr>
+          <p:cNvPr id="7" name="Rectangle 6"/>
+          <p:cNvSpPr/>
+          <p:nvPr/>
+        </p:nvSpPr>
+        <p:spPr>
+          <a:xfrm>
+            <a:off x="548640" y="2240280"/>
+            <a:ext cx="73152" cy="2606040"/>
+          </a:xfrm>
+          <a:prstGeom prst="rect">
+            <a:avLst/>
+          </a:prstGeom>
+          <a:solidFill>
+            <a:srgbClr val="2563EB"/>
+          </a:solidFill>
+          <a:ln>
+            <a:noFill/>
+          </a:ln>
+          <a:effectLst/>
+        </p:spPr>
+        <p:style>
+          <a:lnRef idx="1">
+            <a:schemeClr val="accent1"/>
+          </a:lnRef>
+          <a:fillRef idx="3">
+            <a:schemeClr val="accent1"/>
+          </a:fillRef>
+          <a:effectRef idx="2">
+            <a:schemeClr val="accent1"/>
+          </a:effectRef>
+          <a:fontRef idx="minor">
+            <a:schemeClr val="lt1"/>
+          </a:fontRef>
+        </p:style>
+        <p:txBody>
+          <a:bodyPr rtlCol="0" anchor="ctr"/>
+          <a:lstStyle/>
+          <a:p>
+            <a:pPr algn="ctr"/>
+          </a:p>
+        </p:txBody>
+      </p:sp>
+      <p:sp>
+        <p:nvSpPr>
+          <p:cNvPr id="8" name="TextBox 7"/>
+          <p:cNvSpPr txBox="1"/>
+          <p:nvPr/>
+        </p:nvSpPr>
+        <p:spPr>
+          <a:xfrm>
+            <a:off x="731520" y="2386584"/>
+            <a:ext cx="914400" cy="566928"/>
+          </a:xfrm>
+          <a:prstGeom prst="rect">
+            <a:avLst/>
+          </a:prstGeom>
+          <a:noFill/>
+        </p:spPr>
+        <p:txBody>
+          <a:bodyPr wrap="square" lIns="0" rIns="0" tIns="0" bIns="0" anchor="t">
+            <a:spAutoFit/>
+          </a:bodyPr>
+          <a:lstStyle/>
+          <a:p>
+            <a:pPr algn="l">
+              <a:lnSpc>
+                <a:spcPct val="130000"/>
+              </a:lnSpc>
+            </a:pPr>
+            <a:r>
+              <a:rPr sz="2600" b="0" i="0">
+                <a:solidFill>
+                  <a:srgbClr val="2563EB"/>
                 </a:solidFill>
                 <a:latin typeface="Calibri"/>
               </a:rPr>
-              <a:t>サンプルログを読み込み、調査の流れを見ていただきます。</a:t>
-            </a:r>
-          </a:p>
-        </p:txBody>
-      </p:sp>
-      <p:sp>
-        <p:nvSpPr>
-          <p:cNvPr id="6" name="TextBox 5"/>
+              <a:t>🔥</a:t>
+            </a:r>
+          </a:p>
+        </p:txBody>
+      </p:sp>
+      <p:sp>
+        <p:nvSpPr>
+          <p:cNvPr id="9" name="TextBox 8"/>
+          <p:cNvSpPr txBox="1"/>
+          <p:nvPr/>
+        </p:nvSpPr>
+        <p:spPr>
+          <a:xfrm>
+            <a:off x="731520" y="2971800"/>
+            <a:ext cx="2423160" cy="457200"/>
+          </a:xfrm>
+          <a:prstGeom prst="rect">
+            <a:avLst/>
+          </a:prstGeom>
+          <a:noFill/>
+        </p:spPr>
+        <p:txBody>
+          <a:bodyPr wrap="square" lIns="0" rIns="0" tIns="0" bIns="0" anchor="t">
+            <a:spAutoFit/>
+          </a:bodyPr>
+          <a:lstStyle/>
+          <a:p>
+            <a:pPr algn="l">
+              <a:lnSpc>
+                <a:spcPct val="130000"/>
+              </a:lnSpc>
+            </a:pPr>
+            <a:r>
+              <a:rPr sz="1700" b="1" i="0">
+                <a:solidFill>
+                  <a:srgbClr val="1F2937"/>
+                </a:solidFill>
+                <a:latin typeface="Cambria"/>
+              </a:rPr>
+              <a:t>急増している</a:t>
+            </a:r>
+          </a:p>
+        </p:txBody>
+      </p:sp>
+      <p:sp>
+        <p:nvSpPr>
+          <p:cNvPr id="10" name="TextBox 9"/>
+          <p:cNvSpPr txBox="1"/>
+          <p:nvPr/>
+        </p:nvSpPr>
+        <p:spPr>
+          <a:xfrm>
+            <a:off x="731520" y="3456432"/>
+            <a:ext cx="2331720" cy="822960"/>
+          </a:xfrm>
+          <a:prstGeom prst="rect">
+            <a:avLst/>
+          </a:prstGeom>
+          <a:noFill/>
+        </p:spPr>
+        <p:txBody>
+          <a:bodyPr wrap="square" lIns="0" rIns="0" tIns="0" bIns="0" anchor="t">
+            <a:spAutoFit/>
+          </a:bodyPr>
+          <a:lstStyle/>
+          <a:p>
+            <a:pPr algn="l">
+              <a:lnSpc>
+                <a:spcPct val="140000"/>
+              </a:lnSpc>
+            </a:pPr>
+            <a:r>
+              <a:rPr sz="1100" b="0" i="0">
+                <a:solidFill>
+                  <a:srgbClr val="1F2937"/>
+                </a:solidFill>
+                <a:latin typeface="Calibri"/>
+              </a:rPr>
+              <a:t>平常の数十〜数千倍の
+動きが急に発生</a:t>
+            </a:r>
+          </a:p>
+        </p:txBody>
+      </p:sp>
+      <p:sp>
+        <p:nvSpPr>
+          <p:cNvPr id="11" name="TextBox 10"/>
+          <p:cNvSpPr txBox="1"/>
+          <p:nvPr/>
+        </p:nvSpPr>
+        <p:spPr>
+          <a:xfrm>
+            <a:off x="731520" y="4325112"/>
+            <a:ext cx="2331720" cy="457200"/>
+          </a:xfrm>
+          <a:prstGeom prst="rect">
+            <a:avLst/>
+          </a:prstGeom>
+          <a:noFill/>
+        </p:spPr>
+        <p:txBody>
+          <a:bodyPr wrap="square" lIns="0" rIns="0" tIns="0" bIns="0" anchor="t">
+            <a:spAutoFit/>
+          </a:bodyPr>
+          <a:lstStyle/>
+          <a:p>
+            <a:pPr algn="l">
+              <a:lnSpc>
+                <a:spcPct val="130000"/>
+              </a:lnSpc>
+            </a:pPr>
+            <a:r>
+              <a:rPr sz="1000" b="0" i="1">
+                <a:solidFill>
+                  <a:srgbClr val="5B6472"/>
+                </a:solidFill>
+                <a:latin typeface="Calibri"/>
+              </a:rPr>
+              <a:t>例: 大量のパスワード試行</a:t>
+            </a:r>
+          </a:p>
+        </p:txBody>
+      </p:sp>
+      <p:sp>
+        <p:nvSpPr>
+          <p:cNvPr id="12" name="Rounded Rectangle 11"/>
+          <p:cNvSpPr/>
+          <p:nvPr/>
+        </p:nvSpPr>
+        <p:spPr>
+          <a:xfrm>
+            <a:off x="3429000" y="2240280"/>
+            <a:ext cx="2697480" cy="2606040"/>
+          </a:xfrm>
+          <a:prstGeom prst="roundRect">
+            <a:avLst/>
+          </a:prstGeom>
+          <a:solidFill>
+            <a:srgbClr val="FFFFFF"/>
+          </a:solidFill>
+          <a:ln w="9525">
+            <a:solidFill>
+              <a:srgbClr val="DDE3EE"/>
+            </a:solidFill>
+          </a:ln>
+          <a:effectLst/>
+        </p:spPr>
+        <p:style>
+          <a:lnRef idx="1">
+            <a:schemeClr val="accent1"/>
+          </a:lnRef>
+          <a:fillRef idx="3">
+            <a:schemeClr val="accent1"/>
+          </a:fillRef>
+          <a:effectRef idx="2">
+            <a:schemeClr val="accent1"/>
+          </a:effectRef>
+          <a:fontRef idx="minor">
+            <a:schemeClr val="lt1"/>
+          </a:fontRef>
+        </p:style>
+        <p:txBody>
+          <a:bodyPr rtlCol="0" anchor="ctr"/>
+          <a:lstStyle/>
+          <a:p>
+            <a:pPr algn="ctr"/>
+          </a:p>
+        </p:txBody>
+      </p:sp>
+      <p:sp>
+        <p:nvSpPr>
+          <p:cNvPr id="13" name="Rectangle 12"/>
+          <p:cNvSpPr/>
+          <p:nvPr/>
+        </p:nvSpPr>
+        <p:spPr>
+          <a:xfrm>
+            <a:off x="3429000" y="2240280"/>
+            <a:ext cx="73152" cy="2606040"/>
+          </a:xfrm>
+          <a:prstGeom prst="rect">
+            <a:avLst/>
+          </a:prstGeom>
+          <a:solidFill>
+            <a:srgbClr val="2563EB"/>
+          </a:solidFill>
+          <a:ln>
+            <a:noFill/>
+          </a:ln>
+          <a:effectLst/>
+        </p:spPr>
+        <p:style>
+          <a:lnRef idx="1">
+            <a:schemeClr val="accent1"/>
+          </a:lnRef>
+          <a:fillRef idx="3">
+            <a:schemeClr val="accent1"/>
+          </a:fillRef>
+          <a:effectRef idx="2">
+            <a:schemeClr val="accent1"/>
+          </a:effectRef>
+          <a:fontRef idx="minor">
+            <a:schemeClr val="lt1"/>
+          </a:fontRef>
+        </p:style>
+        <p:txBody>
+          <a:bodyPr rtlCol="0" anchor="ctr"/>
+          <a:lstStyle/>
+          <a:p>
+            <a:pPr algn="ctr"/>
+          </a:p>
+        </p:txBody>
+      </p:sp>
+      <p:sp>
+        <p:nvSpPr>
+          <p:cNvPr id="14" name="TextBox 13"/>
+          <p:cNvSpPr txBox="1"/>
+          <p:nvPr/>
+        </p:nvSpPr>
+        <p:spPr>
+          <a:xfrm>
+            <a:off x="3611880" y="2386584"/>
+            <a:ext cx="914400" cy="566928"/>
+          </a:xfrm>
+          <a:prstGeom prst="rect">
+            <a:avLst/>
+          </a:prstGeom>
+          <a:noFill/>
+        </p:spPr>
+        <p:txBody>
+          <a:bodyPr wrap="square" lIns="0" rIns="0" tIns="0" bIns="0" anchor="t">
+            <a:spAutoFit/>
+          </a:bodyPr>
+          <a:lstStyle/>
+          <a:p>
+            <a:pPr algn="l">
+              <a:lnSpc>
+                <a:spcPct val="130000"/>
+              </a:lnSpc>
+            </a:pPr>
+            <a:r>
+              <a:rPr sz="2600" b="0" i="0">
+                <a:solidFill>
+                  <a:srgbClr val="2563EB"/>
+                </a:solidFill>
+                <a:latin typeface="Calibri"/>
+              </a:rPr>
+              <a:t>🌐</a:t>
+            </a:r>
+          </a:p>
+        </p:txBody>
+      </p:sp>
+      <p:sp>
+        <p:nvSpPr>
+          <p:cNvPr id="15" name="TextBox 14"/>
+          <p:cNvSpPr txBox="1"/>
+          <p:nvPr/>
+        </p:nvSpPr>
+        <p:spPr>
+          <a:xfrm>
+            <a:off x="3611880" y="2971800"/>
+            <a:ext cx="2423160" cy="457200"/>
+          </a:xfrm>
+          <a:prstGeom prst="rect">
+            <a:avLst/>
+          </a:prstGeom>
+          <a:noFill/>
+        </p:spPr>
+        <p:txBody>
+          <a:bodyPr wrap="square" lIns="0" rIns="0" tIns="0" bIns="0" anchor="t">
+            <a:spAutoFit/>
+          </a:bodyPr>
+          <a:lstStyle/>
+          <a:p>
+            <a:pPr algn="l">
+              <a:lnSpc>
+                <a:spcPct val="130000"/>
+              </a:lnSpc>
+            </a:pPr>
+            <a:r>
+              <a:rPr sz="1700" b="1" i="0">
+                <a:solidFill>
+                  <a:srgbClr val="1F2937"/>
+                </a:solidFill>
+                <a:latin typeface="Cambria"/>
+              </a:rPr>
+              <a:t>広がっている</a:t>
+            </a:r>
+          </a:p>
+        </p:txBody>
+      </p:sp>
+      <p:sp>
+        <p:nvSpPr>
+          <p:cNvPr id="16" name="TextBox 15"/>
+          <p:cNvSpPr txBox="1"/>
+          <p:nvPr/>
+        </p:nvSpPr>
+        <p:spPr>
+          <a:xfrm>
+            <a:off x="3611880" y="3456432"/>
+            <a:ext cx="2331720" cy="822960"/>
+          </a:xfrm>
+          <a:prstGeom prst="rect">
+            <a:avLst/>
+          </a:prstGeom>
+          <a:noFill/>
+        </p:spPr>
+        <p:txBody>
+          <a:bodyPr wrap="square" lIns="0" rIns="0" tIns="0" bIns="0" anchor="t">
+            <a:spAutoFit/>
+          </a:bodyPr>
+          <a:lstStyle/>
+          <a:p>
+            <a:pPr algn="l">
+              <a:lnSpc>
+                <a:spcPct val="140000"/>
+              </a:lnSpc>
+            </a:pPr>
+            <a:r>
+              <a:rPr sz="1100" b="0" i="0">
+                <a:solidFill>
+                  <a:srgbClr val="1F2937"/>
+                </a:solidFill>
+                <a:latin typeface="Calibri"/>
+              </a:rPr>
+              <a:t>同じ動きが
+複数の PC で同時発生</a:t>
+            </a:r>
+          </a:p>
+        </p:txBody>
+      </p:sp>
+      <p:sp>
+        <p:nvSpPr>
+          <p:cNvPr id="17" name="TextBox 16"/>
+          <p:cNvSpPr txBox="1"/>
+          <p:nvPr/>
+        </p:nvSpPr>
+        <p:spPr>
+          <a:xfrm>
+            <a:off x="3611880" y="4325112"/>
+            <a:ext cx="2331720" cy="457200"/>
+          </a:xfrm>
+          <a:prstGeom prst="rect">
+            <a:avLst/>
+          </a:prstGeom>
+          <a:noFill/>
+        </p:spPr>
+        <p:txBody>
+          <a:bodyPr wrap="square" lIns="0" rIns="0" tIns="0" bIns="0" anchor="t">
+            <a:spAutoFit/>
+          </a:bodyPr>
+          <a:lstStyle/>
+          <a:p>
+            <a:pPr algn="l">
+              <a:lnSpc>
+                <a:spcPct val="130000"/>
+              </a:lnSpc>
+            </a:pPr>
+            <a:r>
+              <a:rPr sz="1000" b="0" i="1">
+                <a:solidFill>
+                  <a:srgbClr val="5B6472"/>
+                </a:solidFill>
+                <a:latin typeface="Calibri"/>
+              </a:rPr>
+              <a:t>例: ウイルスが社内に拡大</a:t>
+            </a:r>
+          </a:p>
+        </p:txBody>
+      </p:sp>
+      <p:sp>
+        <p:nvSpPr>
+          <p:cNvPr id="18" name="Rounded Rectangle 17"/>
+          <p:cNvSpPr/>
+          <p:nvPr/>
+        </p:nvSpPr>
+        <p:spPr>
+          <a:xfrm>
+            <a:off x="6309360" y="2240280"/>
+            <a:ext cx="2697480" cy="2606040"/>
+          </a:xfrm>
+          <a:prstGeom prst="roundRect">
+            <a:avLst/>
+          </a:prstGeom>
+          <a:solidFill>
+            <a:srgbClr val="FFFFFF"/>
+          </a:solidFill>
+          <a:ln w="9525">
+            <a:solidFill>
+              <a:srgbClr val="DDE3EE"/>
+            </a:solidFill>
+          </a:ln>
+          <a:effectLst/>
+        </p:spPr>
+        <p:style>
+          <a:lnRef idx="1">
+            <a:schemeClr val="accent1"/>
+          </a:lnRef>
+          <a:fillRef idx="3">
+            <a:schemeClr val="accent1"/>
+          </a:fillRef>
+          <a:effectRef idx="2">
+            <a:schemeClr val="accent1"/>
+          </a:effectRef>
+          <a:fontRef idx="minor">
+            <a:schemeClr val="lt1"/>
+          </a:fontRef>
+        </p:style>
+        <p:txBody>
+          <a:bodyPr rtlCol="0" anchor="ctr"/>
+          <a:lstStyle/>
+          <a:p>
+            <a:pPr algn="ctr"/>
+          </a:p>
+        </p:txBody>
+      </p:sp>
+      <p:sp>
+        <p:nvSpPr>
+          <p:cNvPr id="19" name="Rectangle 18"/>
+          <p:cNvSpPr/>
+          <p:nvPr/>
+        </p:nvSpPr>
+        <p:spPr>
+          <a:xfrm>
+            <a:off x="6309360" y="2240280"/>
+            <a:ext cx="73152" cy="2606040"/>
+          </a:xfrm>
+          <a:prstGeom prst="rect">
+            <a:avLst/>
+          </a:prstGeom>
+          <a:solidFill>
+            <a:srgbClr val="2563EB"/>
+          </a:solidFill>
+          <a:ln>
+            <a:noFill/>
+          </a:ln>
+          <a:effectLst/>
+        </p:spPr>
+        <p:style>
+          <a:lnRef idx="1">
+            <a:schemeClr val="accent1"/>
+          </a:lnRef>
+          <a:fillRef idx="3">
+            <a:schemeClr val="accent1"/>
+          </a:fillRef>
+          <a:effectRef idx="2">
+            <a:schemeClr val="accent1"/>
+          </a:effectRef>
+          <a:fontRef idx="minor">
+            <a:schemeClr val="lt1"/>
+          </a:fontRef>
+        </p:style>
+        <p:txBody>
+          <a:bodyPr rtlCol="0" anchor="ctr"/>
+          <a:lstStyle/>
+          <a:p>
+            <a:pPr algn="ctr"/>
+          </a:p>
+        </p:txBody>
+      </p:sp>
+      <p:sp>
+        <p:nvSpPr>
+          <p:cNvPr id="20" name="TextBox 19"/>
+          <p:cNvSpPr txBox="1"/>
+          <p:nvPr/>
+        </p:nvSpPr>
+        <p:spPr>
+          <a:xfrm>
+            <a:off x="6492240" y="2386584"/>
+            <a:ext cx="914400" cy="566928"/>
+          </a:xfrm>
+          <a:prstGeom prst="rect">
+            <a:avLst/>
+          </a:prstGeom>
+          <a:noFill/>
+        </p:spPr>
+        <p:txBody>
+          <a:bodyPr wrap="square" lIns="0" rIns="0" tIns="0" bIns="0" anchor="t">
+            <a:spAutoFit/>
+          </a:bodyPr>
+          <a:lstStyle/>
+          <a:p>
+            <a:pPr algn="l">
+              <a:lnSpc>
+                <a:spcPct val="130000"/>
+              </a:lnSpc>
+            </a:pPr>
+            <a:r>
+              <a:rPr sz="2600" b="0" i="0">
+                <a:solidFill>
+                  <a:srgbClr val="2563EB"/>
+                </a:solidFill>
+                <a:latin typeface="Calibri"/>
+              </a:rPr>
+              <a:t>🤫</a:t>
+            </a:r>
+          </a:p>
+        </p:txBody>
+      </p:sp>
+      <p:sp>
+        <p:nvSpPr>
+          <p:cNvPr id="21" name="TextBox 20"/>
+          <p:cNvSpPr txBox="1"/>
+          <p:nvPr/>
+        </p:nvSpPr>
+        <p:spPr>
+          <a:xfrm>
+            <a:off x="6492240" y="2971800"/>
+            <a:ext cx="2423160" cy="457200"/>
+          </a:xfrm>
+          <a:prstGeom prst="rect">
+            <a:avLst/>
+          </a:prstGeom>
+          <a:noFill/>
+        </p:spPr>
+        <p:txBody>
+          <a:bodyPr wrap="square" lIns="0" rIns="0" tIns="0" bIns="0" anchor="t">
+            <a:spAutoFit/>
+          </a:bodyPr>
+          <a:lstStyle/>
+          <a:p>
+            <a:pPr algn="l">
+              <a:lnSpc>
+                <a:spcPct val="130000"/>
+              </a:lnSpc>
+            </a:pPr>
+            <a:r>
+              <a:rPr sz="1700" b="1" i="0">
+                <a:solidFill>
+                  <a:srgbClr val="1F2937"/>
+                </a:solidFill>
+                <a:latin typeface="Cambria"/>
+              </a:rPr>
+              <a:t>急に静かに</a:t>
+            </a:r>
+          </a:p>
+        </p:txBody>
+      </p:sp>
+      <p:sp>
+        <p:nvSpPr>
+          <p:cNvPr id="22" name="TextBox 21"/>
+          <p:cNvSpPr txBox="1"/>
+          <p:nvPr/>
+        </p:nvSpPr>
+        <p:spPr>
+          <a:xfrm>
+            <a:off x="6492240" y="3456432"/>
+            <a:ext cx="2331720" cy="822960"/>
+          </a:xfrm>
+          <a:prstGeom prst="rect">
+            <a:avLst/>
+          </a:prstGeom>
+          <a:noFill/>
+        </p:spPr>
+        <p:txBody>
+          <a:bodyPr wrap="square" lIns="0" rIns="0" tIns="0" bIns="0" anchor="t">
+            <a:spAutoFit/>
+          </a:bodyPr>
+          <a:lstStyle/>
+          <a:p>
+            <a:pPr algn="l">
+              <a:lnSpc>
+                <a:spcPct val="140000"/>
+              </a:lnSpc>
+            </a:pPr>
+            <a:r>
+              <a:rPr sz="1100" b="0" i="0">
+                <a:solidFill>
+                  <a:srgbClr val="1F2937"/>
+                </a:solidFill>
+                <a:latin typeface="Calibri"/>
+              </a:rPr>
+              <a:t>普段活動している PC が
+急にログを残さなくなる</a:t>
+            </a:r>
+          </a:p>
+        </p:txBody>
+      </p:sp>
+      <p:sp>
+        <p:nvSpPr>
+          <p:cNvPr id="23" name="TextBox 22"/>
+          <p:cNvSpPr txBox="1"/>
+          <p:nvPr/>
+        </p:nvSpPr>
+        <p:spPr>
+          <a:xfrm>
+            <a:off x="6492240" y="4325112"/>
+            <a:ext cx="2331720" cy="457200"/>
+          </a:xfrm>
+          <a:prstGeom prst="rect">
+            <a:avLst/>
+          </a:prstGeom>
+          <a:noFill/>
+        </p:spPr>
+        <p:txBody>
+          <a:bodyPr wrap="square" lIns="0" rIns="0" tIns="0" bIns="0" anchor="t">
+            <a:spAutoFit/>
+          </a:bodyPr>
+          <a:lstStyle/>
+          <a:p>
+            <a:pPr algn="l">
+              <a:lnSpc>
+                <a:spcPct val="130000"/>
+              </a:lnSpc>
+            </a:pPr>
+            <a:r>
+              <a:rPr sz="1000" b="0" i="1">
+                <a:solidFill>
+                  <a:srgbClr val="5B6472"/>
+                </a:solidFill>
+                <a:latin typeface="Calibri"/>
+              </a:rPr>
+              <a:t>例: 攻撃者がログを消した</a:t>
+            </a:r>
+          </a:p>
+        </p:txBody>
+      </p:sp>
+      <p:sp>
+        <p:nvSpPr>
+          <p:cNvPr id="24" name="Rounded Rectangle 23"/>
+          <p:cNvSpPr/>
+          <p:nvPr/>
+        </p:nvSpPr>
+        <p:spPr>
+          <a:xfrm>
+            <a:off x="9189720" y="2240280"/>
+            <a:ext cx="2697480" cy="2606040"/>
+          </a:xfrm>
+          <a:prstGeom prst="roundRect">
+            <a:avLst/>
+          </a:prstGeom>
+          <a:solidFill>
+            <a:srgbClr val="FFFFFF"/>
+          </a:solidFill>
+          <a:ln w="9525">
+            <a:solidFill>
+              <a:srgbClr val="DDE3EE"/>
+            </a:solidFill>
+          </a:ln>
+          <a:effectLst/>
+        </p:spPr>
+        <p:style>
+          <a:lnRef idx="1">
+            <a:schemeClr val="accent1"/>
+          </a:lnRef>
+          <a:fillRef idx="3">
+            <a:schemeClr val="accent1"/>
+          </a:fillRef>
+          <a:effectRef idx="2">
+            <a:schemeClr val="accent1"/>
+          </a:effectRef>
+          <a:fontRef idx="minor">
+            <a:schemeClr val="lt1"/>
+          </a:fontRef>
+        </p:style>
+        <p:txBody>
+          <a:bodyPr rtlCol="0" anchor="ctr"/>
+          <a:lstStyle/>
+          <a:p>
+            <a:pPr algn="ctr"/>
+          </a:p>
+        </p:txBody>
+      </p:sp>
+      <p:sp>
+        <p:nvSpPr>
+          <p:cNvPr id="25" name="Rectangle 24"/>
+          <p:cNvSpPr/>
+          <p:nvPr/>
+        </p:nvSpPr>
+        <p:spPr>
+          <a:xfrm>
+            <a:off x="9189720" y="2240280"/>
+            <a:ext cx="73152" cy="2606040"/>
+          </a:xfrm>
+          <a:prstGeom prst="rect">
+            <a:avLst/>
+          </a:prstGeom>
+          <a:solidFill>
+            <a:srgbClr val="2563EB"/>
+          </a:solidFill>
+          <a:ln>
+            <a:noFill/>
+          </a:ln>
+          <a:effectLst/>
+        </p:spPr>
+        <p:style>
+          <a:lnRef idx="1">
+            <a:schemeClr val="accent1"/>
+          </a:lnRef>
+          <a:fillRef idx="3">
+            <a:schemeClr val="accent1"/>
+          </a:fillRef>
+          <a:effectRef idx="2">
+            <a:schemeClr val="accent1"/>
+          </a:effectRef>
+          <a:fontRef idx="minor">
+            <a:schemeClr val="lt1"/>
+          </a:fontRef>
+        </p:style>
+        <p:txBody>
+          <a:bodyPr rtlCol="0" anchor="ctr"/>
+          <a:lstStyle/>
+          <a:p>
+            <a:pPr algn="ctr"/>
+          </a:p>
+        </p:txBody>
+      </p:sp>
+      <p:sp>
+        <p:nvSpPr>
+          <p:cNvPr id="26" name="TextBox 25"/>
+          <p:cNvSpPr txBox="1"/>
+          <p:nvPr/>
+        </p:nvSpPr>
+        <p:spPr>
+          <a:xfrm>
+            <a:off x="9372600" y="2386584"/>
+            <a:ext cx="914400" cy="566928"/>
+          </a:xfrm>
+          <a:prstGeom prst="rect">
+            <a:avLst/>
+          </a:prstGeom>
+          <a:noFill/>
+        </p:spPr>
+        <p:txBody>
+          <a:bodyPr wrap="square" lIns="0" rIns="0" tIns="0" bIns="0" anchor="t">
+            <a:spAutoFit/>
+          </a:bodyPr>
+          <a:lstStyle/>
+          <a:p>
+            <a:pPr algn="l">
+              <a:lnSpc>
+                <a:spcPct val="130000"/>
+              </a:lnSpc>
+            </a:pPr>
+            <a:r>
+              <a:rPr sz="2600" b="0" i="0">
+                <a:solidFill>
+                  <a:srgbClr val="2563EB"/>
+                </a:solidFill>
+                <a:latin typeface="Calibri"/>
+              </a:rPr>
+              <a:t>🌙</a:t>
+            </a:r>
+          </a:p>
+        </p:txBody>
+      </p:sp>
+      <p:sp>
+        <p:nvSpPr>
+          <p:cNvPr id="27" name="TextBox 26"/>
+          <p:cNvSpPr txBox="1"/>
+          <p:nvPr/>
+        </p:nvSpPr>
+        <p:spPr>
+          <a:xfrm>
+            <a:off x="9372600" y="2971800"/>
+            <a:ext cx="2423160" cy="457200"/>
+          </a:xfrm>
+          <a:prstGeom prst="rect">
+            <a:avLst/>
+          </a:prstGeom>
+          <a:noFill/>
+        </p:spPr>
+        <p:txBody>
+          <a:bodyPr wrap="square" lIns="0" rIns="0" tIns="0" bIns="0" anchor="t">
+            <a:spAutoFit/>
+          </a:bodyPr>
+          <a:lstStyle/>
+          <a:p>
+            <a:pPr algn="l">
+              <a:lnSpc>
+                <a:spcPct val="130000"/>
+              </a:lnSpc>
+            </a:pPr>
+            <a:r>
+              <a:rPr sz="1700" b="1" i="0">
+                <a:solidFill>
+                  <a:srgbClr val="1F2937"/>
+                </a:solidFill>
+                <a:latin typeface="Cambria"/>
+              </a:rPr>
+              <a:t>時間外の活動</a:t>
+            </a:r>
+          </a:p>
+        </p:txBody>
+      </p:sp>
+      <p:sp>
+        <p:nvSpPr>
+          <p:cNvPr id="28" name="TextBox 27"/>
+          <p:cNvSpPr txBox="1"/>
+          <p:nvPr/>
+        </p:nvSpPr>
+        <p:spPr>
+          <a:xfrm>
+            <a:off x="9372600" y="3456432"/>
+            <a:ext cx="2331720" cy="822960"/>
+          </a:xfrm>
+          <a:prstGeom prst="rect">
+            <a:avLst/>
+          </a:prstGeom>
+          <a:noFill/>
+        </p:spPr>
+        <p:txBody>
+          <a:bodyPr wrap="square" lIns="0" rIns="0" tIns="0" bIns="0" anchor="t">
+            <a:spAutoFit/>
+          </a:bodyPr>
+          <a:lstStyle/>
+          <a:p>
+            <a:pPr algn="l">
+              <a:lnSpc>
+                <a:spcPct val="140000"/>
+              </a:lnSpc>
+            </a:pPr>
+            <a:r>
+              <a:rPr sz="1100" b="0" i="0">
+                <a:solidFill>
+                  <a:srgbClr val="1F2937"/>
+                </a:solidFill>
+                <a:latin typeface="Calibri"/>
+              </a:rPr>
+              <a:t>深夜などの業務時間外に
+重要な動きが発生</a:t>
+            </a:r>
+          </a:p>
+        </p:txBody>
+      </p:sp>
+      <p:sp>
+        <p:nvSpPr>
+          <p:cNvPr id="29" name="TextBox 28"/>
+          <p:cNvSpPr txBox="1"/>
+          <p:nvPr/>
+        </p:nvSpPr>
+        <p:spPr>
+          <a:xfrm>
+            <a:off x="9372600" y="4325112"/>
+            <a:ext cx="2331720" cy="457200"/>
+          </a:xfrm>
+          <a:prstGeom prst="rect">
+            <a:avLst/>
+          </a:prstGeom>
+          <a:noFill/>
+        </p:spPr>
+        <p:txBody>
+          <a:bodyPr wrap="square" lIns="0" rIns="0" tIns="0" bIns="0" anchor="t">
+            <a:spAutoFit/>
+          </a:bodyPr>
+          <a:lstStyle/>
+          <a:p>
+            <a:pPr algn="l">
+              <a:lnSpc>
+                <a:spcPct val="130000"/>
+              </a:lnSpc>
+            </a:pPr>
+            <a:r>
+              <a:rPr sz="1000" b="0" i="1">
+                <a:solidFill>
+                  <a:srgbClr val="5B6472"/>
+                </a:solidFill>
+                <a:latin typeface="Calibri"/>
+              </a:rPr>
+              <a:t>例: 業務外を狙った侵入</a:t>
+            </a:r>
+          </a:p>
+        </p:txBody>
+      </p:sp>
+      <p:sp>
+        <p:nvSpPr>
+          <p:cNvPr id="30" name="Rounded Rectangle 29"/>
+          <p:cNvSpPr/>
+          <p:nvPr/>
+        </p:nvSpPr>
+        <p:spPr>
+          <a:xfrm>
+            <a:off x="548640" y="5029200"/>
+            <a:ext cx="11064240" cy="1371600"/>
+          </a:xfrm>
+          <a:prstGeom prst="roundRect">
+            <a:avLst/>
+          </a:prstGeom>
+          <a:solidFill>
+            <a:srgbClr val="E8F0FE"/>
+          </a:solidFill>
+          <a:ln w="9525">
+            <a:solidFill>
+              <a:srgbClr val="E8F0FE"/>
+            </a:solidFill>
+          </a:ln>
+          <a:effectLst/>
+        </p:spPr>
+        <p:style>
+          <a:lnRef idx="1">
+            <a:schemeClr val="accent1"/>
+          </a:lnRef>
+          <a:fillRef idx="3">
+            <a:schemeClr val="accent1"/>
+          </a:fillRef>
+          <a:effectRef idx="2">
+            <a:schemeClr val="accent1"/>
+          </a:effectRef>
+          <a:fontRef idx="minor">
+            <a:schemeClr val="lt1"/>
+          </a:fontRef>
+        </p:style>
+        <p:txBody>
+          <a:bodyPr rtlCol="0" anchor="ctr"/>
+          <a:lstStyle/>
+          <a:p>
+            <a:pPr algn="ctr"/>
+          </a:p>
+        </p:txBody>
+      </p:sp>
+      <p:sp>
+        <p:nvSpPr>
+          <p:cNvPr id="31" name="TextBox 30"/>
+          <p:cNvSpPr txBox="1"/>
+          <p:nvPr/>
+        </p:nvSpPr>
+        <p:spPr>
+          <a:xfrm>
+            <a:off x="914400" y="5230368"/>
+            <a:ext cx="4937760" cy="365760"/>
+          </a:xfrm>
+          <a:prstGeom prst="rect">
+            <a:avLst/>
+          </a:prstGeom>
+          <a:noFill/>
+        </p:spPr>
+        <p:txBody>
+          <a:bodyPr wrap="square" lIns="0" rIns="0" tIns="0" bIns="0" anchor="t">
+            <a:spAutoFit/>
+          </a:bodyPr>
+          <a:lstStyle/>
+          <a:p>
+            <a:pPr algn="l">
+              <a:lnSpc>
+                <a:spcPct val="130000"/>
+              </a:lnSpc>
+            </a:pPr>
+            <a:r>
+              <a:rPr sz="1350" b="1" i="0">
+                <a:solidFill>
+                  <a:srgbClr val="1F2937"/>
+                </a:solidFill>
+                <a:latin typeface="Calibri"/>
+              </a:rPr>
+              <a:t>📏 ルールによる検知 (既存の方法)</a:t>
+            </a:r>
+          </a:p>
+        </p:txBody>
+      </p:sp>
+      <p:sp>
+        <p:nvSpPr>
+          <p:cNvPr id="32" name="TextBox 31"/>
+          <p:cNvSpPr txBox="1"/>
+          <p:nvPr/>
+        </p:nvSpPr>
+        <p:spPr>
+          <a:xfrm>
+            <a:off x="914400" y="5614416"/>
+            <a:ext cx="4937760" cy="685800"/>
+          </a:xfrm>
+          <a:prstGeom prst="rect">
+            <a:avLst/>
+          </a:prstGeom>
+          <a:noFill/>
+        </p:spPr>
+        <p:txBody>
+          <a:bodyPr wrap="square" lIns="0" rIns="0" tIns="0" bIns="0" anchor="t">
+            <a:spAutoFit/>
+          </a:bodyPr>
+          <a:lstStyle/>
+          <a:p>
+            <a:pPr algn="l">
+              <a:lnSpc>
+                <a:spcPct val="140000"/>
+              </a:lnSpc>
+            </a:pPr>
+            <a:r>
+              <a:rPr sz="1150" b="0" i="0">
+                <a:solidFill>
+                  <a:srgbClr val="5B6472"/>
+                </a:solidFill>
+                <a:latin typeface="Calibri"/>
+              </a:rPr>
+              <a:t>事前に知っている「悪い特徴」と一致したら警告。
+既に知られている手口には確実で強い。</a:t>
+            </a:r>
+          </a:p>
+        </p:txBody>
+      </p:sp>
+      <p:sp>
+        <p:nvSpPr>
+          <p:cNvPr id="33" name="Rectangle 32"/>
+          <p:cNvSpPr/>
+          <p:nvPr/>
+        </p:nvSpPr>
+        <p:spPr>
+          <a:xfrm>
+            <a:off x="6053328" y="5257800"/>
+            <a:ext cx="16459" cy="914400"/>
+          </a:xfrm>
+          <a:prstGeom prst="rect">
+            <a:avLst/>
+          </a:prstGeom>
+          <a:solidFill>
+            <a:srgbClr val="DDE3EE"/>
+          </a:solidFill>
+          <a:ln>
+            <a:noFill/>
+          </a:ln>
+          <a:effectLst/>
+        </p:spPr>
+        <p:style>
+          <a:lnRef idx="1">
+            <a:schemeClr val="accent1"/>
+          </a:lnRef>
+          <a:fillRef idx="3">
+            <a:schemeClr val="accent1"/>
+          </a:fillRef>
+          <a:effectRef idx="2">
+            <a:schemeClr val="accent1"/>
+          </a:effectRef>
+          <a:fontRef idx="minor">
+            <a:schemeClr val="lt1"/>
+          </a:fontRef>
+        </p:style>
+        <p:txBody>
+          <a:bodyPr rtlCol="0" anchor="ctr"/>
+          <a:lstStyle/>
+          <a:p>
+            <a:pPr algn="ctr"/>
+          </a:p>
+        </p:txBody>
+      </p:sp>
+      <p:sp>
+        <p:nvSpPr>
+          <p:cNvPr id="34" name="TextBox 33"/>
+          <p:cNvSpPr txBox="1"/>
+          <p:nvPr/>
+        </p:nvSpPr>
+        <p:spPr>
+          <a:xfrm>
+            <a:off x="6400800" y="5230368"/>
+            <a:ext cx="4937760" cy="365760"/>
+          </a:xfrm>
+          <a:prstGeom prst="rect">
+            <a:avLst/>
+          </a:prstGeom>
+          <a:noFill/>
+        </p:spPr>
+        <p:txBody>
+          <a:bodyPr wrap="square" lIns="0" rIns="0" tIns="0" bIns="0" anchor="t">
+            <a:spAutoFit/>
+          </a:bodyPr>
+          <a:lstStyle/>
+          <a:p>
+            <a:pPr algn="l">
+              <a:lnSpc>
+                <a:spcPct val="130000"/>
+              </a:lnSpc>
+            </a:pPr>
+            <a:r>
+              <a:rPr sz="1350" b="1" i="0">
+                <a:solidFill>
+                  <a:srgbClr val="1D4ED8"/>
+                </a:solidFill>
+                <a:latin typeface="Calibri"/>
+              </a:rPr>
+              <a:t>📈 振舞いによる検知 (今回自作した分析)</a:t>
+            </a:r>
+          </a:p>
+        </p:txBody>
+      </p:sp>
+      <p:sp>
+        <p:nvSpPr>
+          <p:cNvPr id="35" name="TextBox 34"/>
+          <p:cNvSpPr txBox="1"/>
+          <p:nvPr/>
+        </p:nvSpPr>
+        <p:spPr>
+          <a:xfrm>
+            <a:off x="6400800" y="5614416"/>
+            <a:ext cx="4937760" cy="685800"/>
+          </a:xfrm>
+          <a:prstGeom prst="rect">
+            <a:avLst/>
+          </a:prstGeom>
+          <a:noFill/>
+        </p:spPr>
+        <p:txBody>
+          <a:bodyPr wrap="square" lIns="0" rIns="0" tIns="0" bIns="0" anchor="t">
+            <a:spAutoFit/>
+          </a:bodyPr>
+          <a:lstStyle/>
+          <a:p>
+            <a:pPr algn="l">
+              <a:lnSpc>
+                <a:spcPct val="140000"/>
+              </a:lnSpc>
+            </a:pPr>
+            <a:r>
+              <a:rPr sz="1150" b="0" i="0">
+                <a:solidFill>
+                  <a:srgbClr val="5B6472"/>
+                </a:solidFill>
+                <a:latin typeface="Calibri"/>
+              </a:rPr>
+              <a:t>「普段との違い」に反応して知らせる。
+ルールがまだ無い未知の手口への「気づき」になる。</a:t>
+            </a:r>
+          </a:p>
+        </p:txBody>
+      </p:sp>
+      <p:sp>
+        <p:nvSpPr>
+          <p:cNvPr id="36" name="TextBox 35"/>
           <p:cNvSpPr txBox="1"/>
           <p:nvPr/>
         </p:nvSpPr>
@@ -5126,11 +5781,11 @@
             <a:r>
               <a:rPr sz="900" b="0" i="0">
                 <a:solidFill>
-                  <a:srgbClr val="CADCFC"/>
+                  <a:srgbClr val="5B6472"/>
                 </a:solidFill>
                 <a:latin typeface="Calibri"/>
               </a:rPr>
-              <a:t>11 / 13</a:t>
+              <a:t>11 / 14</a:t>
             </a:r>
           </a:p>
         </p:txBody>
@@ -5168,7 +5823,7 @@
             <a:avLst/>
           </a:prstGeom>
           <a:solidFill>
-            <a:srgbClr val="F4F6FA"/>
+            <a:srgbClr val="1B254F"/>
           </a:solidFill>
           <a:ln>
             <a:noFill/>
@@ -5205,176 +5860,86 @@
         </p:nvSpPr>
         <p:spPr>
           <a:xfrm>
-            <a:off x="548640" y="347472"/>
-            <a:ext cx="10972800" cy="274320"/>
-          </a:xfrm>
-          <a:prstGeom prst="rect">
-            <a:avLst/>
-          </a:prstGeom>
-          <a:noFill/>
-        </p:spPr>
-        <p:txBody>
-          <a:bodyPr wrap="square" lIns="0" rIns="0" tIns="0" bIns="0" anchor="t">
-            <a:spAutoFit/>
-          </a:bodyPr>
-          <a:lstStyle/>
-          <a:p>
-            <a:pPr algn="l">
-              <a:lnSpc>
-                <a:spcPct val="130000"/>
-              </a:lnSpc>
-            </a:pPr>
-            <a:r>
-              <a:rPr sz="1100" b="1" i="0">
-                <a:solidFill>
-                  <a:srgbClr val="2563EB"/>
+            <a:off x="548640" y="1737360"/>
+            <a:ext cx="10972800" cy="1463040"/>
+          </a:xfrm>
+          <a:prstGeom prst="rect">
+            <a:avLst/>
+          </a:prstGeom>
+          <a:noFill/>
+        </p:spPr>
+        <p:txBody>
+          <a:bodyPr wrap="square" lIns="0" rIns="0" tIns="0" bIns="0" anchor="t">
+            <a:spAutoFit/>
+          </a:bodyPr>
+          <a:lstStyle/>
+          <a:p>
+            <a:pPr algn="ctr">
+              <a:lnSpc>
+                <a:spcPct val="130000"/>
+              </a:lnSpc>
+            </a:pPr>
+            <a:r>
+              <a:rPr sz="11000" b="1" i="0">
+                <a:solidFill>
+                  <a:srgbClr val="FFFFFF"/>
+                </a:solidFill>
+                <a:latin typeface="Cambria"/>
+              </a:rPr>
+              <a:t>DEMO</a:t>
+            </a:r>
+          </a:p>
+        </p:txBody>
+      </p:sp>
+      <p:sp>
+        <p:nvSpPr>
+          <p:cNvPr id="4" name="TextBox 3"/>
+          <p:cNvSpPr txBox="1"/>
+          <p:nvPr/>
+        </p:nvSpPr>
+        <p:spPr>
+          <a:xfrm>
+            <a:off x="548640" y="3977639"/>
+            <a:ext cx="10972800" cy="548640"/>
+          </a:xfrm>
+          <a:prstGeom prst="rect">
+            <a:avLst/>
+          </a:prstGeom>
+          <a:noFill/>
+        </p:spPr>
+        <p:txBody>
+          <a:bodyPr wrap="square" lIns="0" rIns="0" tIns="0" bIns="0" anchor="t">
+            <a:spAutoFit/>
+          </a:bodyPr>
+          <a:lstStyle/>
+          <a:p>
+            <a:pPr algn="ctr">
+              <a:lnSpc>
+                <a:spcPct val="130000"/>
+              </a:lnSpc>
+            </a:pPr>
+            <a:r>
+              <a:rPr sz="2400" b="0" i="1">
+                <a:solidFill>
+                  <a:srgbClr val="CADCFC"/>
                 </a:solidFill>
                 <a:latin typeface="Calibri"/>
               </a:rPr>
-              <a:t>成果</a:t>
-            </a:r>
-          </a:p>
-        </p:txBody>
-      </p:sp>
-      <p:sp>
-        <p:nvSpPr>
-          <p:cNvPr id="4" name="TextBox 3"/>
-          <p:cNvSpPr txBox="1"/>
-          <p:nvPr/>
-        </p:nvSpPr>
-        <p:spPr>
-          <a:xfrm>
-            <a:off x="548640" y="621792"/>
-            <a:ext cx="11155680" cy="640080"/>
-          </a:xfrm>
-          <a:prstGeom prst="rect">
-            <a:avLst/>
-          </a:prstGeom>
-          <a:noFill/>
-        </p:spPr>
-        <p:txBody>
-          <a:bodyPr wrap="square" lIns="0" rIns="0" tIns="0" bIns="0" anchor="t">
-            <a:spAutoFit/>
-          </a:bodyPr>
-          <a:lstStyle/>
-          <a:p>
-            <a:pPr algn="l">
-              <a:lnSpc>
-                <a:spcPct val="130000"/>
-              </a:lnSpc>
-            </a:pPr>
-            <a:r>
-              <a:rPr sz="2800" b="1" i="0">
-                <a:solidFill>
-                  <a:srgbClr val="1F2937"/>
-                </a:solidFill>
-                <a:latin typeface="Cambria"/>
-              </a:rPr>
-              <a:t>まとめ — 開発したもの</a:t>
-            </a:r>
-          </a:p>
-        </p:txBody>
-      </p:sp>
-      <p:sp>
-        <p:nvSpPr>
-          <p:cNvPr id="5" name="Rounded Rectangle 4"/>
-          <p:cNvSpPr/>
-          <p:nvPr/>
-        </p:nvSpPr>
-        <p:spPr>
-          <a:xfrm>
-            <a:off x="548640" y="1783080"/>
-            <a:ext cx="2697480" cy="3291840"/>
-          </a:xfrm>
-          <a:prstGeom prst="roundRect">
-            <a:avLst/>
-          </a:prstGeom>
-          <a:solidFill>
-            <a:srgbClr val="FFFFFF"/>
-          </a:solidFill>
-          <a:ln w="9525">
-            <a:solidFill>
-              <a:srgbClr val="DDE3EE"/>
-            </a:solidFill>
-          </a:ln>
-          <a:effectLst/>
-        </p:spPr>
-        <p:style>
-          <a:lnRef idx="1">
-            <a:schemeClr val="accent1"/>
-          </a:lnRef>
-          <a:fillRef idx="3">
-            <a:schemeClr val="accent1"/>
-          </a:fillRef>
-          <a:effectRef idx="2">
-            <a:schemeClr val="accent1"/>
-          </a:effectRef>
-          <a:fontRef idx="minor">
-            <a:schemeClr val="lt1"/>
-          </a:fontRef>
-        </p:style>
-        <p:txBody>
-          <a:bodyPr rtlCol="0" anchor="ctr"/>
-          <a:lstStyle/>
-          <a:p>
-            <a:pPr algn="ctr"/>
-          </a:p>
-        </p:txBody>
-      </p:sp>
-      <p:sp>
-        <p:nvSpPr>
-          <p:cNvPr id="6" name="Rectangle 5"/>
-          <p:cNvSpPr/>
-          <p:nvPr/>
-        </p:nvSpPr>
-        <p:spPr>
-          <a:xfrm>
-            <a:off x="548640" y="1783080"/>
-            <a:ext cx="73152" cy="3291840"/>
-          </a:xfrm>
-          <a:prstGeom prst="rect">
-            <a:avLst/>
-          </a:prstGeom>
-          <a:solidFill>
-            <a:srgbClr val="1D4ED8"/>
-          </a:solidFill>
-          <a:ln>
-            <a:noFill/>
-          </a:ln>
-          <a:effectLst/>
-        </p:spPr>
-        <p:style>
-          <a:lnRef idx="1">
-            <a:schemeClr val="accent1"/>
-          </a:lnRef>
-          <a:fillRef idx="3">
-            <a:schemeClr val="accent1"/>
-          </a:fillRef>
-          <a:effectRef idx="2">
-            <a:schemeClr val="accent1"/>
-          </a:effectRef>
-          <a:fontRef idx="minor">
-            <a:schemeClr val="lt1"/>
-          </a:fontRef>
-        </p:style>
-        <p:txBody>
-          <a:bodyPr rtlCol="0" anchor="ctr"/>
-          <a:lstStyle/>
-          <a:p>
-            <a:pPr algn="ctr"/>
-          </a:p>
-        </p:txBody>
-      </p:sp>
-      <p:sp>
-        <p:nvSpPr>
-          <p:cNvPr id="7" name="TextBox 6"/>
-          <p:cNvSpPr txBox="1"/>
-          <p:nvPr/>
-        </p:nvSpPr>
-        <p:spPr>
-          <a:xfrm>
-            <a:off x="713232" y="2194560"/>
-            <a:ext cx="2368296" cy="1005840"/>
+              <a:t>実際の画面で動かしてみます</a:t>
+            </a:r>
+          </a:p>
+        </p:txBody>
+      </p:sp>
+      <p:sp>
+        <p:nvSpPr>
+          <p:cNvPr id="5" name="TextBox 4"/>
+          <p:cNvSpPr txBox="1"/>
+          <p:nvPr/>
+        </p:nvSpPr>
+        <p:spPr>
+          <a:xfrm>
+            <a:off x="548640" y="4709160"/>
+            <a:ext cx="10972800" cy="457200"/>
           </a:xfrm>
           <a:prstGeom prst="rect">
             <a:avLst/>
@@ -5393,808 +5958,20 @@
               </a:lnSpc>
             </a:pPr>
             <a:r>
-              <a:rPr sz="4000" b="1" i="0">
-                <a:solidFill>
-                  <a:srgbClr val="1D4ED8"/>
-                </a:solidFill>
-                <a:latin typeface="Cambria"/>
-              </a:rPr>
-              <a:t>新文法</a:t>
-            </a:r>
-          </a:p>
-        </p:txBody>
-      </p:sp>
-      <p:sp>
-        <p:nvSpPr>
-          <p:cNvPr id="8" name="TextBox 7"/>
-          <p:cNvSpPr txBox="1"/>
-          <p:nvPr/>
-        </p:nvSpPr>
-        <p:spPr>
-          <a:xfrm>
-            <a:off x="548640" y="3200400"/>
-            <a:ext cx="2697480" cy="457200"/>
-          </a:xfrm>
-          <a:prstGeom prst="rect">
-            <a:avLst/>
-          </a:prstGeom>
-          <a:noFill/>
-        </p:spPr>
-        <p:txBody>
-          <a:bodyPr wrap="square" lIns="0" rIns="0" tIns="0" bIns="0" anchor="t">
-            <a:spAutoFit/>
-          </a:bodyPr>
-          <a:lstStyle/>
-          <a:p>
-            <a:pPr algn="ctr">
-              <a:lnSpc>
-                <a:spcPct val="130000"/>
-              </a:lnSpc>
-            </a:pPr>
-            <a:r>
-              <a:rPr sz="2000" b="0" i="0">
-                <a:solidFill>
-                  <a:srgbClr val="1F2937"/>
-                </a:solidFill>
-                <a:latin typeface="Cambria"/>
-              </a:rPr>
-              <a:t>lookup:</a:t>
-            </a:r>
-          </a:p>
-        </p:txBody>
-      </p:sp>
-      <p:sp>
-        <p:nvSpPr>
-          <p:cNvPr id="9" name="TextBox 8"/>
-          <p:cNvSpPr txBox="1"/>
-          <p:nvPr/>
-        </p:nvSpPr>
-        <p:spPr>
-          <a:xfrm>
-            <a:off x="731520" y="3840480"/>
-            <a:ext cx="2331720" cy="1005840"/>
-          </a:xfrm>
-          <a:prstGeom prst="rect">
-            <a:avLst/>
-          </a:prstGeom>
-          <a:noFill/>
-        </p:spPr>
-        <p:txBody>
-          <a:bodyPr wrap="square" lIns="0" rIns="0" tIns="0" bIns="0" anchor="t">
-            <a:spAutoFit/>
-          </a:bodyPr>
-          <a:lstStyle/>
-          <a:p>
-            <a:pPr algn="ctr">
-              <a:lnSpc>
-                <a:spcPct val="140000"/>
-              </a:lnSpc>
-            </a:pPr>
-            <a:r>
-              <a:rPr sz="1200" b="0" i="0">
-                <a:solidFill>
-                  <a:srgbClr val="5B6472"/>
+              <a:rPr sz="1500" b="0" i="0">
+                <a:solidFill>
+                  <a:srgbClr val="CADCFC"/>
                 </a:solidFill>
                 <a:latin typeface="Calibri"/>
               </a:rPr>
-              <a:t>エンジン本体 (Rust) を改造し
-リスト照合機能を追加</a:t>
-            </a:r>
-          </a:p>
-        </p:txBody>
-      </p:sp>
-      <p:sp>
-        <p:nvSpPr>
-          <p:cNvPr id="10" name="Rounded Rectangle 9"/>
-          <p:cNvSpPr/>
-          <p:nvPr/>
-        </p:nvSpPr>
-        <p:spPr>
-          <a:xfrm>
-            <a:off x="3429000" y="1783080"/>
-            <a:ext cx="2697480" cy="3291840"/>
-          </a:xfrm>
-          <a:prstGeom prst="roundRect">
-            <a:avLst/>
-          </a:prstGeom>
-          <a:solidFill>
-            <a:srgbClr val="FFFFFF"/>
-          </a:solidFill>
-          <a:ln w="9525">
-            <a:solidFill>
-              <a:srgbClr val="DDE3EE"/>
-            </a:solidFill>
-          </a:ln>
-          <a:effectLst/>
-        </p:spPr>
-        <p:style>
-          <a:lnRef idx="1">
-            <a:schemeClr val="accent1"/>
-          </a:lnRef>
-          <a:fillRef idx="3">
-            <a:schemeClr val="accent1"/>
-          </a:fillRef>
-          <a:effectRef idx="2">
-            <a:schemeClr val="accent1"/>
-          </a:effectRef>
-          <a:fontRef idx="minor">
-            <a:schemeClr val="lt1"/>
-          </a:fontRef>
-        </p:style>
-        <p:txBody>
-          <a:bodyPr rtlCol="0" anchor="ctr"/>
-          <a:lstStyle/>
-          <a:p>
-            <a:pPr algn="ctr"/>
-          </a:p>
-        </p:txBody>
-      </p:sp>
-      <p:sp>
-        <p:nvSpPr>
-          <p:cNvPr id="11" name="Rectangle 10"/>
-          <p:cNvSpPr/>
-          <p:nvPr/>
-        </p:nvSpPr>
-        <p:spPr>
-          <a:xfrm>
-            <a:off x="3429000" y="1783080"/>
-            <a:ext cx="73152" cy="3291840"/>
-          </a:xfrm>
-          <a:prstGeom prst="rect">
-            <a:avLst/>
-          </a:prstGeom>
-          <a:solidFill>
-            <a:srgbClr val="EA580C"/>
-          </a:solidFill>
-          <a:ln>
-            <a:noFill/>
-          </a:ln>
-          <a:effectLst/>
-        </p:spPr>
-        <p:style>
-          <a:lnRef idx="1">
-            <a:schemeClr val="accent1"/>
-          </a:lnRef>
-          <a:fillRef idx="3">
-            <a:schemeClr val="accent1"/>
-          </a:fillRef>
-          <a:effectRef idx="2">
-            <a:schemeClr val="accent1"/>
-          </a:effectRef>
-          <a:fontRef idx="minor">
-            <a:schemeClr val="lt1"/>
-          </a:fontRef>
-        </p:style>
-        <p:txBody>
-          <a:bodyPr rtlCol="0" anchor="ctr"/>
-          <a:lstStyle/>
-          <a:p>
-            <a:pPr algn="ctr"/>
-          </a:p>
-        </p:txBody>
-      </p:sp>
-      <p:sp>
-        <p:nvSpPr>
-          <p:cNvPr id="12" name="TextBox 11"/>
-          <p:cNvSpPr txBox="1"/>
-          <p:nvPr/>
-        </p:nvSpPr>
-        <p:spPr>
-          <a:xfrm>
-            <a:off x="3593592" y="2194560"/>
-            <a:ext cx="2368296" cy="1005840"/>
-          </a:xfrm>
-          <a:prstGeom prst="rect">
-            <a:avLst/>
-          </a:prstGeom>
-          <a:noFill/>
-        </p:spPr>
-        <p:txBody>
-          <a:bodyPr wrap="square" lIns="0" rIns="0" tIns="0" bIns="0" anchor="t">
-            <a:spAutoFit/>
-          </a:bodyPr>
-          <a:lstStyle/>
-          <a:p>
-            <a:pPr algn="ctr">
-              <a:lnSpc>
-                <a:spcPct val="130000"/>
-              </a:lnSpc>
-            </a:pPr>
-            <a:r>
-              <a:rPr sz="4000" b="1" i="0">
-                <a:solidFill>
-                  <a:srgbClr val="EA580C"/>
-                </a:solidFill>
-                <a:latin typeface="Cambria"/>
-              </a:rPr>
-              <a:t>13</a:t>
-            </a:r>
-          </a:p>
-        </p:txBody>
-      </p:sp>
-      <p:sp>
-        <p:nvSpPr>
-          <p:cNvPr id="13" name="TextBox 12"/>
-          <p:cNvSpPr txBox="1"/>
-          <p:nvPr/>
-        </p:nvSpPr>
-        <p:spPr>
-          <a:xfrm>
-            <a:off x="3429000" y="3200400"/>
-            <a:ext cx="2697480" cy="457200"/>
-          </a:xfrm>
-          <a:prstGeom prst="rect">
-            <a:avLst/>
-          </a:prstGeom>
-          <a:noFill/>
-        </p:spPr>
-        <p:txBody>
-          <a:bodyPr wrap="square" lIns="0" rIns="0" tIns="0" bIns="0" anchor="t">
-            <a:spAutoFit/>
-          </a:bodyPr>
-          <a:lstStyle/>
-          <a:p>
-            <a:pPr algn="ctr">
-              <a:lnSpc>
-                <a:spcPct val="130000"/>
-              </a:lnSpc>
-            </a:pPr>
-            <a:r>
-              <a:rPr sz="2000" b="0" i="0">
-                <a:solidFill>
-                  <a:srgbClr val="1F2937"/>
-                </a:solidFill>
-                <a:latin typeface="Cambria"/>
-              </a:rPr>
-              <a:t>本</a:t>
-            </a:r>
-          </a:p>
-        </p:txBody>
-      </p:sp>
-      <p:sp>
-        <p:nvSpPr>
-          <p:cNvPr id="14" name="TextBox 13"/>
-          <p:cNvSpPr txBox="1"/>
-          <p:nvPr/>
-        </p:nvSpPr>
-        <p:spPr>
-          <a:xfrm>
-            <a:off x="3611880" y="3840480"/>
-            <a:ext cx="2331720" cy="1005840"/>
-          </a:xfrm>
-          <a:prstGeom prst="rect">
-            <a:avLst/>
-          </a:prstGeom>
-          <a:noFill/>
-        </p:spPr>
-        <p:txBody>
-          <a:bodyPr wrap="square" lIns="0" rIns="0" tIns="0" bIns="0" anchor="t">
-            <a:spAutoFit/>
-          </a:bodyPr>
-          <a:lstStyle/>
-          <a:p>
-            <a:pPr algn="ctr">
-              <a:lnSpc>
-                <a:spcPct val="140000"/>
-              </a:lnSpc>
-            </a:pPr>
-            <a:r>
-              <a:rPr sz="1200" b="0" i="0">
-                <a:solidFill>
-                  <a:srgbClr val="5B6472"/>
-                </a:solidFill>
-                <a:latin typeface="Calibri"/>
-              </a:rPr>
-              <a:t>攻撃を見抜く検知ルールを
-自作 (痕跡隠蔽の検知など)</a:t>
-            </a:r>
-          </a:p>
-        </p:txBody>
-      </p:sp>
-      <p:sp>
-        <p:nvSpPr>
-          <p:cNvPr id="15" name="Rounded Rectangle 14"/>
-          <p:cNvSpPr/>
-          <p:nvPr/>
-        </p:nvSpPr>
-        <p:spPr>
-          <a:xfrm>
-            <a:off x="6309360" y="1783080"/>
-            <a:ext cx="2697480" cy="3291840"/>
-          </a:xfrm>
-          <a:prstGeom prst="roundRect">
-            <a:avLst/>
-          </a:prstGeom>
-          <a:solidFill>
-            <a:srgbClr val="FFFFFF"/>
-          </a:solidFill>
-          <a:ln w="9525">
-            <a:solidFill>
-              <a:srgbClr val="DDE3EE"/>
-            </a:solidFill>
-          </a:ln>
-          <a:effectLst/>
-        </p:spPr>
-        <p:style>
-          <a:lnRef idx="1">
-            <a:schemeClr val="accent1"/>
-          </a:lnRef>
-          <a:fillRef idx="3">
-            <a:schemeClr val="accent1"/>
-          </a:fillRef>
-          <a:effectRef idx="2">
-            <a:schemeClr val="accent1"/>
-          </a:effectRef>
-          <a:fontRef idx="minor">
-            <a:schemeClr val="lt1"/>
-          </a:fontRef>
-        </p:style>
-        <p:txBody>
-          <a:bodyPr rtlCol="0" anchor="ctr"/>
-          <a:lstStyle/>
-          <a:p>
-            <a:pPr algn="ctr"/>
-          </a:p>
-        </p:txBody>
-      </p:sp>
-      <p:sp>
-        <p:nvSpPr>
-          <p:cNvPr id="16" name="Rectangle 15"/>
-          <p:cNvSpPr/>
-          <p:nvPr/>
-        </p:nvSpPr>
-        <p:spPr>
-          <a:xfrm>
-            <a:off x="6309360" y="1783080"/>
-            <a:ext cx="73152" cy="3291840"/>
-          </a:xfrm>
-          <a:prstGeom prst="rect">
-            <a:avLst/>
-          </a:prstGeom>
-          <a:solidFill>
-            <a:srgbClr val="CA8A04"/>
-          </a:solidFill>
-          <a:ln>
-            <a:noFill/>
-          </a:ln>
-          <a:effectLst/>
-        </p:spPr>
-        <p:style>
-          <a:lnRef idx="1">
-            <a:schemeClr val="accent1"/>
-          </a:lnRef>
-          <a:fillRef idx="3">
-            <a:schemeClr val="accent1"/>
-          </a:fillRef>
-          <a:effectRef idx="2">
-            <a:schemeClr val="accent1"/>
-          </a:effectRef>
-          <a:fontRef idx="minor">
-            <a:schemeClr val="lt1"/>
-          </a:fontRef>
-        </p:style>
-        <p:txBody>
-          <a:bodyPr rtlCol="0" anchor="ctr"/>
-          <a:lstStyle/>
-          <a:p>
-            <a:pPr algn="ctr"/>
-          </a:p>
-        </p:txBody>
-      </p:sp>
-      <p:sp>
-        <p:nvSpPr>
-          <p:cNvPr id="17" name="TextBox 16"/>
-          <p:cNvSpPr txBox="1"/>
-          <p:nvPr/>
-        </p:nvSpPr>
-        <p:spPr>
-          <a:xfrm>
-            <a:off x="6473952" y="2194560"/>
-            <a:ext cx="2368296" cy="1005840"/>
-          </a:xfrm>
-          <a:prstGeom prst="rect">
-            <a:avLst/>
-          </a:prstGeom>
-          <a:noFill/>
-        </p:spPr>
-        <p:txBody>
-          <a:bodyPr wrap="square" lIns="0" rIns="0" tIns="0" bIns="0" anchor="t">
-            <a:spAutoFit/>
-          </a:bodyPr>
-          <a:lstStyle/>
-          <a:p>
-            <a:pPr algn="ctr">
-              <a:lnSpc>
-                <a:spcPct val="130000"/>
-              </a:lnSpc>
-            </a:pPr>
-            <a:r>
-              <a:rPr sz="4000" b="1" i="0">
-                <a:solidFill>
-                  <a:srgbClr val="CA8A04"/>
-                </a:solidFill>
-                <a:latin typeface="Cambria"/>
-              </a:rPr>
-              <a:t>約8,000</a:t>
-            </a:r>
-          </a:p>
-        </p:txBody>
-      </p:sp>
-      <p:sp>
-        <p:nvSpPr>
-          <p:cNvPr id="18" name="TextBox 17"/>
-          <p:cNvSpPr txBox="1"/>
-          <p:nvPr/>
-        </p:nvSpPr>
-        <p:spPr>
-          <a:xfrm>
-            <a:off x="6309360" y="3200400"/>
-            <a:ext cx="2697480" cy="457200"/>
-          </a:xfrm>
-          <a:prstGeom prst="rect">
-            <a:avLst/>
-          </a:prstGeom>
-          <a:noFill/>
-        </p:spPr>
-        <p:txBody>
-          <a:bodyPr wrap="square" lIns="0" rIns="0" tIns="0" bIns="0" anchor="t">
-            <a:spAutoFit/>
-          </a:bodyPr>
-          <a:lstStyle/>
-          <a:p>
-            <a:pPr algn="ctr">
-              <a:lnSpc>
-                <a:spcPct val="130000"/>
-              </a:lnSpc>
-            </a:pPr>
-            <a:r>
-              <a:rPr sz="2000" b="0" i="0">
-                <a:solidFill>
-                  <a:srgbClr val="1F2937"/>
-                </a:solidFill>
-                <a:latin typeface="Cambria"/>
-              </a:rPr>
-              <a:t>行</a:t>
-            </a:r>
-          </a:p>
-        </p:txBody>
-      </p:sp>
-      <p:sp>
-        <p:nvSpPr>
-          <p:cNvPr id="19" name="TextBox 18"/>
-          <p:cNvSpPr txBox="1"/>
-          <p:nvPr/>
-        </p:nvSpPr>
-        <p:spPr>
-          <a:xfrm>
-            <a:off x="6492240" y="3840480"/>
-            <a:ext cx="2331720" cy="1005840"/>
-          </a:xfrm>
-          <a:prstGeom prst="rect">
-            <a:avLst/>
-          </a:prstGeom>
-          <a:noFill/>
-        </p:spPr>
-        <p:txBody>
-          <a:bodyPr wrap="square" lIns="0" rIns="0" tIns="0" bIns="0" anchor="t">
-            <a:spAutoFit/>
-          </a:bodyPr>
-          <a:lstStyle/>
-          <a:p>
-            <a:pPr algn="ctr">
-              <a:lnSpc>
-                <a:spcPct val="140000"/>
-              </a:lnSpc>
-            </a:pPr>
-            <a:r>
-              <a:rPr sz="1200" b="0" i="0">
-                <a:solidFill>
-                  <a:srgbClr val="5B6472"/>
-                </a:solidFill>
-                <a:latin typeface="Calibri"/>
-              </a:rPr>
-              <a:t>結果を読み解く GUI を
-ゼロから開発</a:t>
-            </a:r>
-          </a:p>
-        </p:txBody>
-      </p:sp>
-      <p:sp>
-        <p:nvSpPr>
-          <p:cNvPr id="20" name="Rounded Rectangle 19"/>
-          <p:cNvSpPr/>
-          <p:nvPr/>
-        </p:nvSpPr>
-        <p:spPr>
-          <a:xfrm>
-            <a:off x="9189720" y="1783080"/>
-            <a:ext cx="2697480" cy="3291840"/>
-          </a:xfrm>
-          <a:prstGeom prst="roundRect">
-            <a:avLst/>
-          </a:prstGeom>
-          <a:solidFill>
-            <a:srgbClr val="FFFFFF"/>
-          </a:solidFill>
-          <a:ln w="9525">
-            <a:solidFill>
-              <a:srgbClr val="DDE3EE"/>
-            </a:solidFill>
-          </a:ln>
-          <a:effectLst/>
-        </p:spPr>
-        <p:style>
-          <a:lnRef idx="1">
-            <a:schemeClr val="accent1"/>
-          </a:lnRef>
-          <a:fillRef idx="3">
-            <a:schemeClr val="accent1"/>
-          </a:fillRef>
-          <a:effectRef idx="2">
-            <a:schemeClr val="accent1"/>
-          </a:effectRef>
-          <a:fontRef idx="minor">
-            <a:schemeClr val="lt1"/>
-          </a:fontRef>
-        </p:style>
-        <p:txBody>
-          <a:bodyPr rtlCol="0" anchor="ctr"/>
-          <a:lstStyle/>
-          <a:p>
-            <a:pPr algn="ctr"/>
-          </a:p>
-        </p:txBody>
-      </p:sp>
-      <p:sp>
-        <p:nvSpPr>
-          <p:cNvPr id="21" name="Rectangle 20"/>
-          <p:cNvSpPr/>
-          <p:nvPr/>
-        </p:nvSpPr>
-        <p:spPr>
-          <a:xfrm>
-            <a:off x="9189720" y="1783080"/>
-            <a:ext cx="73152" cy="3291840"/>
-          </a:xfrm>
-          <a:prstGeom prst="rect">
-            <a:avLst/>
-          </a:prstGeom>
-          <a:solidFill>
-            <a:srgbClr val="16A34A"/>
-          </a:solidFill>
-          <a:ln>
-            <a:noFill/>
-          </a:ln>
-          <a:effectLst/>
-        </p:spPr>
-        <p:style>
-          <a:lnRef idx="1">
-            <a:schemeClr val="accent1"/>
-          </a:lnRef>
-          <a:fillRef idx="3">
-            <a:schemeClr val="accent1"/>
-          </a:fillRef>
-          <a:effectRef idx="2">
-            <a:schemeClr val="accent1"/>
-          </a:effectRef>
-          <a:fontRef idx="minor">
-            <a:schemeClr val="lt1"/>
-          </a:fontRef>
-        </p:style>
-        <p:txBody>
-          <a:bodyPr rtlCol="0" anchor="ctr"/>
-          <a:lstStyle/>
-          <a:p>
-            <a:pPr algn="ctr"/>
-          </a:p>
-        </p:txBody>
-      </p:sp>
-      <p:sp>
-        <p:nvSpPr>
-          <p:cNvPr id="22" name="TextBox 21"/>
-          <p:cNvSpPr txBox="1"/>
-          <p:nvPr/>
-        </p:nvSpPr>
-        <p:spPr>
-          <a:xfrm>
-            <a:off x="9354312" y="2194560"/>
-            <a:ext cx="2368296" cy="1005840"/>
-          </a:xfrm>
-          <a:prstGeom prst="rect">
-            <a:avLst/>
-          </a:prstGeom>
-          <a:noFill/>
-        </p:spPr>
-        <p:txBody>
-          <a:bodyPr wrap="square" lIns="0" rIns="0" tIns="0" bIns="0" anchor="t">
-            <a:spAutoFit/>
-          </a:bodyPr>
-          <a:lstStyle/>
-          <a:p>
-            <a:pPr algn="ctr">
-              <a:lnSpc>
-                <a:spcPct val="130000"/>
-              </a:lnSpc>
-            </a:pPr>
-            <a:r>
-              <a:rPr sz="4000" b="1" i="0">
-                <a:solidFill>
-                  <a:srgbClr val="16A34A"/>
-                </a:solidFill>
-                <a:latin typeface="Cambria"/>
-              </a:rPr>
-              <a:t>約8万</a:t>
-            </a:r>
-          </a:p>
-        </p:txBody>
-      </p:sp>
-      <p:sp>
-        <p:nvSpPr>
-          <p:cNvPr id="23" name="TextBox 22"/>
-          <p:cNvSpPr txBox="1"/>
-          <p:nvPr/>
-        </p:nvSpPr>
-        <p:spPr>
-          <a:xfrm>
-            <a:off x="9189720" y="3200400"/>
-            <a:ext cx="2697480" cy="457200"/>
-          </a:xfrm>
-          <a:prstGeom prst="rect">
-            <a:avLst/>
-          </a:prstGeom>
-          <a:noFill/>
-        </p:spPr>
-        <p:txBody>
-          <a:bodyPr wrap="square" lIns="0" rIns="0" tIns="0" bIns="0" anchor="t">
-            <a:spAutoFit/>
-          </a:bodyPr>
-          <a:lstStyle/>
-          <a:p>
-            <a:pPr algn="ctr">
-              <a:lnSpc>
-                <a:spcPct val="130000"/>
-              </a:lnSpc>
-            </a:pPr>
-            <a:r>
-              <a:rPr sz="2000" b="0" i="0">
-                <a:solidFill>
-                  <a:srgbClr val="1F2937"/>
-                </a:solidFill>
-                <a:latin typeface="Cambria"/>
-              </a:rPr>
-              <a:t>件</a:t>
-            </a:r>
-          </a:p>
-        </p:txBody>
-      </p:sp>
-      <p:sp>
-        <p:nvSpPr>
-          <p:cNvPr id="24" name="TextBox 23"/>
-          <p:cNvSpPr txBox="1"/>
-          <p:nvPr/>
-        </p:nvSpPr>
-        <p:spPr>
-          <a:xfrm>
-            <a:off x="9372600" y="3840480"/>
-            <a:ext cx="2331720" cy="1005840"/>
-          </a:xfrm>
-          <a:prstGeom prst="rect">
-            <a:avLst/>
-          </a:prstGeom>
-          <a:noFill/>
-        </p:spPr>
-        <p:txBody>
-          <a:bodyPr wrap="square" lIns="0" rIns="0" tIns="0" bIns="0" anchor="t">
-            <a:spAutoFit/>
-          </a:bodyPr>
-          <a:lstStyle/>
-          <a:p>
-            <a:pPr algn="ctr">
-              <a:lnSpc>
-                <a:spcPct val="140000"/>
-              </a:lnSpc>
-            </a:pPr>
-            <a:r>
-              <a:rPr sz="1200" b="0" i="0">
-                <a:solidFill>
-                  <a:srgbClr val="5B6472"/>
-                </a:solidFill>
-                <a:latin typeface="Calibri"/>
-              </a:rPr>
-              <a:t>「悪いものリスト」を
-自動で取り込んで照合</a:t>
-            </a:r>
-          </a:p>
-        </p:txBody>
-      </p:sp>
-      <p:sp>
-        <p:nvSpPr>
-          <p:cNvPr id="25" name="Rounded Rectangle 24"/>
-          <p:cNvSpPr/>
-          <p:nvPr/>
-        </p:nvSpPr>
-        <p:spPr>
-          <a:xfrm>
-            <a:off x="548640" y="5440680"/>
-            <a:ext cx="11064240" cy="1005840"/>
-          </a:xfrm>
-          <a:prstGeom prst="roundRect">
-            <a:avLst/>
-          </a:prstGeom>
-          <a:solidFill>
-            <a:srgbClr val="E8F0FE"/>
-          </a:solidFill>
-          <a:ln w="9525">
-            <a:solidFill>
-              <a:srgbClr val="E8F0FE"/>
-            </a:solidFill>
-          </a:ln>
-          <a:effectLst/>
-        </p:spPr>
-        <p:style>
-          <a:lnRef idx="1">
-            <a:schemeClr val="accent1"/>
-          </a:lnRef>
-          <a:fillRef idx="3">
-            <a:schemeClr val="accent1"/>
-          </a:fillRef>
-          <a:effectRef idx="2">
-            <a:schemeClr val="accent1"/>
-          </a:effectRef>
-          <a:fontRef idx="minor">
-            <a:schemeClr val="lt1"/>
-          </a:fontRef>
-        </p:style>
-        <p:txBody>
-          <a:bodyPr rtlCol="0" anchor="ctr"/>
-          <a:lstStyle/>
-          <a:p>
-            <a:pPr algn="ctr"/>
-          </a:p>
-        </p:txBody>
-      </p:sp>
-      <p:sp>
-        <p:nvSpPr>
-          <p:cNvPr id="26" name="TextBox 25"/>
-          <p:cNvSpPr txBox="1"/>
-          <p:nvPr/>
-        </p:nvSpPr>
-        <p:spPr>
-          <a:xfrm>
-            <a:off x="868680" y="5440680"/>
-            <a:ext cx="10515600" cy="1005840"/>
-          </a:xfrm>
-          <a:prstGeom prst="rect">
-            <a:avLst/>
-          </a:prstGeom>
-          <a:noFill/>
-        </p:spPr>
-        <p:txBody>
-          <a:bodyPr wrap="square" lIns="0" rIns="0" tIns="0" bIns="0" anchor="ctr">
-            <a:spAutoFit/>
-          </a:bodyPr>
-          <a:lstStyle/>
-          <a:p>
-            <a:pPr algn="l">
-              <a:lnSpc>
-                <a:spcPct val="130000"/>
-              </a:lnSpc>
-            </a:pPr>
-            <a:r>
-              <a:rPr sz="1400" b="0" i="0">
-                <a:solidFill>
-                  <a:srgbClr val="1F2937"/>
-                </a:solidFill>
-                <a:latin typeface="Calibri"/>
-              </a:rPr>
-              <a:t>🚀 今後:  時間の流れを追った相関分析 (「A の後に B が起きたら怪しい」) や、AI による検知ルールの自動生成へ。</a:t>
-            </a:r>
-          </a:p>
-        </p:txBody>
-      </p:sp>
-      <p:sp>
-        <p:nvSpPr>
-          <p:cNvPr id="27" name="TextBox 26"/>
+              <a:t>サンプルログを読み込み、調査の流れを見ていただきます。</a:t>
+            </a:r>
+          </a:p>
+        </p:txBody>
+      </p:sp>
+      <p:sp>
+        <p:nvSpPr>
+          <p:cNvPr id="6" name="TextBox 5"/>
           <p:cNvSpPr txBox="1"/>
           <p:nvPr/>
         </p:nvSpPr>
@@ -6222,11 +5999,11 @@
             <a:r>
               <a:rPr sz="900" b="0" i="0">
                 <a:solidFill>
-                  <a:srgbClr val="5B6472"/>
+                  <a:srgbClr val="CADCFC"/>
                 </a:solidFill>
                 <a:latin typeface="Calibri"/>
               </a:rPr>
-              <a:t>12 / 13</a:t>
+              <a:t>12 / 14</a:t>
             </a:r>
           </a:p>
         </p:txBody>
@@ -6264,6 +6041,1102 @@
             <a:avLst/>
           </a:prstGeom>
           <a:solidFill>
+            <a:srgbClr val="F4F6FA"/>
+          </a:solidFill>
+          <a:ln>
+            <a:noFill/>
+          </a:ln>
+          <a:effectLst/>
+        </p:spPr>
+        <p:style>
+          <a:lnRef idx="1">
+            <a:schemeClr val="accent1"/>
+          </a:lnRef>
+          <a:fillRef idx="3">
+            <a:schemeClr val="accent1"/>
+          </a:fillRef>
+          <a:effectRef idx="2">
+            <a:schemeClr val="accent1"/>
+          </a:effectRef>
+          <a:fontRef idx="minor">
+            <a:schemeClr val="lt1"/>
+          </a:fontRef>
+        </p:style>
+        <p:txBody>
+          <a:bodyPr rtlCol="0" anchor="ctr"/>
+          <a:lstStyle/>
+          <a:p>
+            <a:pPr algn="ctr"/>
+          </a:p>
+        </p:txBody>
+      </p:sp>
+      <p:sp>
+        <p:nvSpPr>
+          <p:cNvPr id="3" name="TextBox 2"/>
+          <p:cNvSpPr txBox="1"/>
+          <p:nvPr/>
+        </p:nvSpPr>
+        <p:spPr>
+          <a:xfrm>
+            <a:off x="548640" y="347472"/>
+            <a:ext cx="10972800" cy="274320"/>
+          </a:xfrm>
+          <a:prstGeom prst="rect">
+            <a:avLst/>
+          </a:prstGeom>
+          <a:noFill/>
+        </p:spPr>
+        <p:txBody>
+          <a:bodyPr wrap="square" lIns="0" rIns="0" tIns="0" bIns="0" anchor="t">
+            <a:spAutoFit/>
+          </a:bodyPr>
+          <a:lstStyle/>
+          <a:p>
+            <a:pPr algn="l">
+              <a:lnSpc>
+                <a:spcPct val="130000"/>
+              </a:lnSpc>
+            </a:pPr>
+            <a:r>
+              <a:rPr sz="1100" b="1" i="0">
+                <a:solidFill>
+                  <a:srgbClr val="2563EB"/>
+                </a:solidFill>
+                <a:latin typeface="Calibri"/>
+              </a:rPr>
+              <a:t>成果</a:t>
+            </a:r>
+          </a:p>
+        </p:txBody>
+      </p:sp>
+      <p:sp>
+        <p:nvSpPr>
+          <p:cNvPr id="4" name="TextBox 3"/>
+          <p:cNvSpPr txBox="1"/>
+          <p:nvPr/>
+        </p:nvSpPr>
+        <p:spPr>
+          <a:xfrm>
+            <a:off x="548640" y="621792"/>
+            <a:ext cx="11155680" cy="640080"/>
+          </a:xfrm>
+          <a:prstGeom prst="rect">
+            <a:avLst/>
+          </a:prstGeom>
+          <a:noFill/>
+        </p:spPr>
+        <p:txBody>
+          <a:bodyPr wrap="square" lIns="0" rIns="0" tIns="0" bIns="0" anchor="t">
+            <a:spAutoFit/>
+          </a:bodyPr>
+          <a:lstStyle/>
+          <a:p>
+            <a:pPr algn="l">
+              <a:lnSpc>
+                <a:spcPct val="130000"/>
+              </a:lnSpc>
+            </a:pPr>
+            <a:r>
+              <a:rPr sz="2800" b="1" i="0">
+                <a:solidFill>
+                  <a:srgbClr val="1F2937"/>
+                </a:solidFill>
+                <a:latin typeface="Cambria"/>
+              </a:rPr>
+              <a:t>まとめ — 開発したもの</a:t>
+            </a:r>
+          </a:p>
+        </p:txBody>
+      </p:sp>
+      <p:sp>
+        <p:nvSpPr>
+          <p:cNvPr id="5" name="Rounded Rectangle 4"/>
+          <p:cNvSpPr/>
+          <p:nvPr/>
+        </p:nvSpPr>
+        <p:spPr>
+          <a:xfrm>
+            <a:off x="548640" y="1783080"/>
+            <a:ext cx="2697480" cy="3291840"/>
+          </a:xfrm>
+          <a:prstGeom prst="roundRect">
+            <a:avLst/>
+          </a:prstGeom>
+          <a:solidFill>
+            <a:srgbClr val="FFFFFF"/>
+          </a:solidFill>
+          <a:ln w="9525">
+            <a:solidFill>
+              <a:srgbClr val="DDE3EE"/>
+            </a:solidFill>
+          </a:ln>
+          <a:effectLst/>
+        </p:spPr>
+        <p:style>
+          <a:lnRef idx="1">
+            <a:schemeClr val="accent1"/>
+          </a:lnRef>
+          <a:fillRef idx="3">
+            <a:schemeClr val="accent1"/>
+          </a:fillRef>
+          <a:effectRef idx="2">
+            <a:schemeClr val="accent1"/>
+          </a:effectRef>
+          <a:fontRef idx="minor">
+            <a:schemeClr val="lt1"/>
+          </a:fontRef>
+        </p:style>
+        <p:txBody>
+          <a:bodyPr rtlCol="0" anchor="ctr"/>
+          <a:lstStyle/>
+          <a:p>
+            <a:pPr algn="ctr"/>
+          </a:p>
+        </p:txBody>
+      </p:sp>
+      <p:sp>
+        <p:nvSpPr>
+          <p:cNvPr id="6" name="Rectangle 5"/>
+          <p:cNvSpPr/>
+          <p:nvPr/>
+        </p:nvSpPr>
+        <p:spPr>
+          <a:xfrm>
+            <a:off x="548640" y="1783080"/>
+            <a:ext cx="73152" cy="3291840"/>
+          </a:xfrm>
+          <a:prstGeom prst="rect">
+            <a:avLst/>
+          </a:prstGeom>
+          <a:solidFill>
+            <a:srgbClr val="1D4ED8"/>
+          </a:solidFill>
+          <a:ln>
+            <a:noFill/>
+          </a:ln>
+          <a:effectLst/>
+        </p:spPr>
+        <p:style>
+          <a:lnRef idx="1">
+            <a:schemeClr val="accent1"/>
+          </a:lnRef>
+          <a:fillRef idx="3">
+            <a:schemeClr val="accent1"/>
+          </a:fillRef>
+          <a:effectRef idx="2">
+            <a:schemeClr val="accent1"/>
+          </a:effectRef>
+          <a:fontRef idx="minor">
+            <a:schemeClr val="lt1"/>
+          </a:fontRef>
+        </p:style>
+        <p:txBody>
+          <a:bodyPr rtlCol="0" anchor="ctr"/>
+          <a:lstStyle/>
+          <a:p>
+            <a:pPr algn="ctr"/>
+          </a:p>
+        </p:txBody>
+      </p:sp>
+      <p:sp>
+        <p:nvSpPr>
+          <p:cNvPr id="7" name="TextBox 6"/>
+          <p:cNvSpPr txBox="1"/>
+          <p:nvPr/>
+        </p:nvSpPr>
+        <p:spPr>
+          <a:xfrm>
+            <a:off x="713232" y="2194560"/>
+            <a:ext cx="2368296" cy="1005840"/>
+          </a:xfrm>
+          <a:prstGeom prst="rect">
+            <a:avLst/>
+          </a:prstGeom>
+          <a:noFill/>
+        </p:spPr>
+        <p:txBody>
+          <a:bodyPr wrap="square" lIns="0" rIns="0" tIns="0" bIns="0" anchor="t">
+            <a:spAutoFit/>
+          </a:bodyPr>
+          <a:lstStyle/>
+          <a:p>
+            <a:pPr algn="ctr">
+              <a:lnSpc>
+                <a:spcPct val="130000"/>
+              </a:lnSpc>
+            </a:pPr>
+            <a:r>
+              <a:rPr sz="4000" b="1" i="0">
+                <a:solidFill>
+                  <a:srgbClr val="1D4ED8"/>
+                </a:solidFill>
+                <a:latin typeface="Cambria"/>
+              </a:rPr>
+              <a:t>新文法</a:t>
+            </a:r>
+          </a:p>
+        </p:txBody>
+      </p:sp>
+      <p:sp>
+        <p:nvSpPr>
+          <p:cNvPr id="8" name="TextBox 7"/>
+          <p:cNvSpPr txBox="1"/>
+          <p:nvPr/>
+        </p:nvSpPr>
+        <p:spPr>
+          <a:xfrm>
+            <a:off x="548640" y="3200400"/>
+            <a:ext cx="2697480" cy="457200"/>
+          </a:xfrm>
+          <a:prstGeom prst="rect">
+            <a:avLst/>
+          </a:prstGeom>
+          <a:noFill/>
+        </p:spPr>
+        <p:txBody>
+          <a:bodyPr wrap="square" lIns="0" rIns="0" tIns="0" bIns="0" anchor="t">
+            <a:spAutoFit/>
+          </a:bodyPr>
+          <a:lstStyle/>
+          <a:p>
+            <a:pPr algn="ctr">
+              <a:lnSpc>
+                <a:spcPct val="130000"/>
+              </a:lnSpc>
+            </a:pPr>
+            <a:r>
+              <a:rPr sz="2000" b="0" i="0">
+                <a:solidFill>
+                  <a:srgbClr val="1F2937"/>
+                </a:solidFill>
+                <a:latin typeface="Cambria"/>
+              </a:rPr>
+              <a:t>lookup:</a:t>
+            </a:r>
+          </a:p>
+        </p:txBody>
+      </p:sp>
+      <p:sp>
+        <p:nvSpPr>
+          <p:cNvPr id="9" name="TextBox 8"/>
+          <p:cNvSpPr txBox="1"/>
+          <p:nvPr/>
+        </p:nvSpPr>
+        <p:spPr>
+          <a:xfrm>
+            <a:off x="731520" y="3840480"/>
+            <a:ext cx="2331720" cy="1005840"/>
+          </a:xfrm>
+          <a:prstGeom prst="rect">
+            <a:avLst/>
+          </a:prstGeom>
+          <a:noFill/>
+        </p:spPr>
+        <p:txBody>
+          <a:bodyPr wrap="square" lIns="0" rIns="0" tIns="0" bIns="0" anchor="t">
+            <a:spAutoFit/>
+          </a:bodyPr>
+          <a:lstStyle/>
+          <a:p>
+            <a:pPr algn="ctr">
+              <a:lnSpc>
+                <a:spcPct val="140000"/>
+              </a:lnSpc>
+            </a:pPr>
+            <a:r>
+              <a:rPr sz="1200" b="0" i="0">
+                <a:solidFill>
+                  <a:srgbClr val="5B6472"/>
+                </a:solidFill>
+                <a:latin typeface="Calibri"/>
+              </a:rPr>
+              <a:t>エンジン本体 (Rust) を改造し
+リスト照合機能を追加</a:t>
+            </a:r>
+          </a:p>
+        </p:txBody>
+      </p:sp>
+      <p:sp>
+        <p:nvSpPr>
+          <p:cNvPr id="10" name="Rounded Rectangle 9"/>
+          <p:cNvSpPr/>
+          <p:nvPr/>
+        </p:nvSpPr>
+        <p:spPr>
+          <a:xfrm>
+            <a:off x="3429000" y="1783080"/>
+            <a:ext cx="2697480" cy="3291840"/>
+          </a:xfrm>
+          <a:prstGeom prst="roundRect">
+            <a:avLst/>
+          </a:prstGeom>
+          <a:solidFill>
+            <a:srgbClr val="FFFFFF"/>
+          </a:solidFill>
+          <a:ln w="9525">
+            <a:solidFill>
+              <a:srgbClr val="DDE3EE"/>
+            </a:solidFill>
+          </a:ln>
+          <a:effectLst/>
+        </p:spPr>
+        <p:style>
+          <a:lnRef idx="1">
+            <a:schemeClr val="accent1"/>
+          </a:lnRef>
+          <a:fillRef idx="3">
+            <a:schemeClr val="accent1"/>
+          </a:fillRef>
+          <a:effectRef idx="2">
+            <a:schemeClr val="accent1"/>
+          </a:effectRef>
+          <a:fontRef idx="minor">
+            <a:schemeClr val="lt1"/>
+          </a:fontRef>
+        </p:style>
+        <p:txBody>
+          <a:bodyPr rtlCol="0" anchor="ctr"/>
+          <a:lstStyle/>
+          <a:p>
+            <a:pPr algn="ctr"/>
+          </a:p>
+        </p:txBody>
+      </p:sp>
+      <p:sp>
+        <p:nvSpPr>
+          <p:cNvPr id="11" name="Rectangle 10"/>
+          <p:cNvSpPr/>
+          <p:nvPr/>
+        </p:nvSpPr>
+        <p:spPr>
+          <a:xfrm>
+            <a:off x="3429000" y="1783080"/>
+            <a:ext cx="73152" cy="3291840"/>
+          </a:xfrm>
+          <a:prstGeom prst="rect">
+            <a:avLst/>
+          </a:prstGeom>
+          <a:solidFill>
+            <a:srgbClr val="EA580C"/>
+          </a:solidFill>
+          <a:ln>
+            <a:noFill/>
+          </a:ln>
+          <a:effectLst/>
+        </p:spPr>
+        <p:style>
+          <a:lnRef idx="1">
+            <a:schemeClr val="accent1"/>
+          </a:lnRef>
+          <a:fillRef idx="3">
+            <a:schemeClr val="accent1"/>
+          </a:fillRef>
+          <a:effectRef idx="2">
+            <a:schemeClr val="accent1"/>
+          </a:effectRef>
+          <a:fontRef idx="minor">
+            <a:schemeClr val="lt1"/>
+          </a:fontRef>
+        </p:style>
+        <p:txBody>
+          <a:bodyPr rtlCol="0" anchor="ctr"/>
+          <a:lstStyle/>
+          <a:p>
+            <a:pPr algn="ctr"/>
+          </a:p>
+        </p:txBody>
+      </p:sp>
+      <p:sp>
+        <p:nvSpPr>
+          <p:cNvPr id="12" name="TextBox 11"/>
+          <p:cNvSpPr txBox="1"/>
+          <p:nvPr/>
+        </p:nvSpPr>
+        <p:spPr>
+          <a:xfrm>
+            <a:off x="3593592" y="2194560"/>
+            <a:ext cx="2368296" cy="1005840"/>
+          </a:xfrm>
+          <a:prstGeom prst="rect">
+            <a:avLst/>
+          </a:prstGeom>
+          <a:noFill/>
+        </p:spPr>
+        <p:txBody>
+          <a:bodyPr wrap="square" lIns="0" rIns="0" tIns="0" bIns="0" anchor="t">
+            <a:spAutoFit/>
+          </a:bodyPr>
+          <a:lstStyle/>
+          <a:p>
+            <a:pPr algn="ctr">
+              <a:lnSpc>
+                <a:spcPct val="130000"/>
+              </a:lnSpc>
+            </a:pPr>
+            <a:r>
+              <a:rPr sz="4000" b="1" i="0">
+                <a:solidFill>
+                  <a:srgbClr val="EA580C"/>
+                </a:solidFill>
+                <a:latin typeface="Cambria"/>
+              </a:rPr>
+              <a:t>13</a:t>
+            </a:r>
+          </a:p>
+        </p:txBody>
+      </p:sp>
+      <p:sp>
+        <p:nvSpPr>
+          <p:cNvPr id="13" name="TextBox 12"/>
+          <p:cNvSpPr txBox="1"/>
+          <p:nvPr/>
+        </p:nvSpPr>
+        <p:spPr>
+          <a:xfrm>
+            <a:off x="3429000" y="3200400"/>
+            <a:ext cx="2697480" cy="457200"/>
+          </a:xfrm>
+          <a:prstGeom prst="rect">
+            <a:avLst/>
+          </a:prstGeom>
+          <a:noFill/>
+        </p:spPr>
+        <p:txBody>
+          <a:bodyPr wrap="square" lIns="0" rIns="0" tIns="0" bIns="0" anchor="t">
+            <a:spAutoFit/>
+          </a:bodyPr>
+          <a:lstStyle/>
+          <a:p>
+            <a:pPr algn="ctr">
+              <a:lnSpc>
+                <a:spcPct val="130000"/>
+              </a:lnSpc>
+            </a:pPr>
+            <a:r>
+              <a:rPr sz="2000" b="0" i="0">
+                <a:solidFill>
+                  <a:srgbClr val="1F2937"/>
+                </a:solidFill>
+                <a:latin typeface="Cambria"/>
+              </a:rPr>
+              <a:t>本</a:t>
+            </a:r>
+          </a:p>
+        </p:txBody>
+      </p:sp>
+      <p:sp>
+        <p:nvSpPr>
+          <p:cNvPr id="14" name="TextBox 13"/>
+          <p:cNvSpPr txBox="1"/>
+          <p:nvPr/>
+        </p:nvSpPr>
+        <p:spPr>
+          <a:xfrm>
+            <a:off x="3611880" y="3840480"/>
+            <a:ext cx="2331720" cy="1005840"/>
+          </a:xfrm>
+          <a:prstGeom prst="rect">
+            <a:avLst/>
+          </a:prstGeom>
+          <a:noFill/>
+        </p:spPr>
+        <p:txBody>
+          <a:bodyPr wrap="square" lIns="0" rIns="0" tIns="0" bIns="0" anchor="t">
+            <a:spAutoFit/>
+          </a:bodyPr>
+          <a:lstStyle/>
+          <a:p>
+            <a:pPr algn="ctr">
+              <a:lnSpc>
+                <a:spcPct val="140000"/>
+              </a:lnSpc>
+            </a:pPr>
+            <a:r>
+              <a:rPr sz="1200" b="0" i="0">
+                <a:solidFill>
+                  <a:srgbClr val="5B6472"/>
+                </a:solidFill>
+                <a:latin typeface="Calibri"/>
+              </a:rPr>
+              <a:t>攻撃を見抜く検知ルールを
+自作 (痕跡隠蔽の検知など)</a:t>
+            </a:r>
+          </a:p>
+        </p:txBody>
+      </p:sp>
+      <p:sp>
+        <p:nvSpPr>
+          <p:cNvPr id="15" name="Rounded Rectangle 14"/>
+          <p:cNvSpPr/>
+          <p:nvPr/>
+        </p:nvSpPr>
+        <p:spPr>
+          <a:xfrm>
+            <a:off x="6309360" y="1783080"/>
+            <a:ext cx="2697480" cy="3291840"/>
+          </a:xfrm>
+          <a:prstGeom prst="roundRect">
+            <a:avLst/>
+          </a:prstGeom>
+          <a:solidFill>
+            <a:srgbClr val="FFFFFF"/>
+          </a:solidFill>
+          <a:ln w="9525">
+            <a:solidFill>
+              <a:srgbClr val="DDE3EE"/>
+            </a:solidFill>
+          </a:ln>
+          <a:effectLst/>
+        </p:spPr>
+        <p:style>
+          <a:lnRef idx="1">
+            <a:schemeClr val="accent1"/>
+          </a:lnRef>
+          <a:fillRef idx="3">
+            <a:schemeClr val="accent1"/>
+          </a:fillRef>
+          <a:effectRef idx="2">
+            <a:schemeClr val="accent1"/>
+          </a:effectRef>
+          <a:fontRef idx="minor">
+            <a:schemeClr val="lt1"/>
+          </a:fontRef>
+        </p:style>
+        <p:txBody>
+          <a:bodyPr rtlCol="0" anchor="ctr"/>
+          <a:lstStyle/>
+          <a:p>
+            <a:pPr algn="ctr"/>
+          </a:p>
+        </p:txBody>
+      </p:sp>
+      <p:sp>
+        <p:nvSpPr>
+          <p:cNvPr id="16" name="Rectangle 15"/>
+          <p:cNvSpPr/>
+          <p:nvPr/>
+        </p:nvSpPr>
+        <p:spPr>
+          <a:xfrm>
+            <a:off x="6309360" y="1783080"/>
+            <a:ext cx="73152" cy="3291840"/>
+          </a:xfrm>
+          <a:prstGeom prst="rect">
+            <a:avLst/>
+          </a:prstGeom>
+          <a:solidFill>
+            <a:srgbClr val="CA8A04"/>
+          </a:solidFill>
+          <a:ln>
+            <a:noFill/>
+          </a:ln>
+          <a:effectLst/>
+        </p:spPr>
+        <p:style>
+          <a:lnRef idx="1">
+            <a:schemeClr val="accent1"/>
+          </a:lnRef>
+          <a:fillRef idx="3">
+            <a:schemeClr val="accent1"/>
+          </a:fillRef>
+          <a:effectRef idx="2">
+            <a:schemeClr val="accent1"/>
+          </a:effectRef>
+          <a:fontRef idx="minor">
+            <a:schemeClr val="lt1"/>
+          </a:fontRef>
+        </p:style>
+        <p:txBody>
+          <a:bodyPr rtlCol="0" anchor="ctr"/>
+          <a:lstStyle/>
+          <a:p>
+            <a:pPr algn="ctr"/>
+          </a:p>
+        </p:txBody>
+      </p:sp>
+      <p:sp>
+        <p:nvSpPr>
+          <p:cNvPr id="17" name="TextBox 16"/>
+          <p:cNvSpPr txBox="1"/>
+          <p:nvPr/>
+        </p:nvSpPr>
+        <p:spPr>
+          <a:xfrm>
+            <a:off x="6473952" y="2194560"/>
+            <a:ext cx="2368296" cy="1005840"/>
+          </a:xfrm>
+          <a:prstGeom prst="rect">
+            <a:avLst/>
+          </a:prstGeom>
+          <a:noFill/>
+        </p:spPr>
+        <p:txBody>
+          <a:bodyPr wrap="square" lIns="0" rIns="0" tIns="0" bIns="0" anchor="t">
+            <a:spAutoFit/>
+          </a:bodyPr>
+          <a:lstStyle/>
+          <a:p>
+            <a:pPr algn="ctr">
+              <a:lnSpc>
+                <a:spcPct val="130000"/>
+              </a:lnSpc>
+            </a:pPr>
+            <a:r>
+              <a:rPr sz="4000" b="1" i="0">
+                <a:solidFill>
+                  <a:srgbClr val="CA8A04"/>
+                </a:solidFill>
+                <a:latin typeface="Cambria"/>
+              </a:rPr>
+              <a:t>約8,000</a:t>
+            </a:r>
+          </a:p>
+        </p:txBody>
+      </p:sp>
+      <p:sp>
+        <p:nvSpPr>
+          <p:cNvPr id="18" name="TextBox 17"/>
+          <p:cNvSpPr txBox="1"/>
+          <p:nvPr/>
+        </p:nvSpPr>
+        <p:spPr>
+          <a:xfrm>
+            <a:off x="6309360" y="3200400"/>
+            <a:ext cx="2697480" cy="457200"/>
+          </a:xfrm>
+          <a:prstGeom prst="rect">
+            <a:avLst/>
+          </a:prstGeom>
+          <a:noFill/>
+        </p:spPr>
+        <p:txBody>
+          <a:bodyPr wrap="square" lIns="0" rIns="0" tIns="0" bIns="0" anchor="t">
+            <a:spAutoFit/>
+          </a:bodyPr>
+          <a:lstStyle/>
+          <a:p>
+            <a:pPr algn="ctr">
+              <a:lnSpc>
+                <a:spcPct val="130000"/>
+              </a:lnSpc>
+            </a:pPr>
+            <a:r>
+              <a:rPr sz="2000" b="0" i="0">
+                <a:solidFill>
+                  <a:srgbClr val="1F2937"/>
+                </a:solidFill>
+                <a:latin typeface="Cambria"/>
+              </a:rPr>
+              <a:t>行</a:t>
+            </a:r>
+          </a:p>
+        </p:txBody>
+      </p:sp>
+      <p:sp>
+        <p:nvSpPr>
+          <p:cNvPr id="19" name="TextBox 18"/>
+          <p:cNvSpPr txBox="1"/>
+          <p:nvPr/>
+        </p:nvSpPr>
+        <p:spPr>
+          <a:xfrm>
+            <a:off x="6492240" y="3840480"/>
+            <a:ext cx="2331720" cy="1005840"/>
+          </a:xfrm>
+          <a:prstGeom prst="rect">
+            <a:avLst/>
+          </a:prstGeom>
+          <a:noFill/>
+        </p:spPr>
+        <p:txBody>
+          <a:bodyPr wrap="square" lIns="0" rIns="0" tIns="0" bIns="0" anchor="t">
+            <a:spAutoFit/>
+          </a:bodyPr>
+          <a:lstStyle/>
+          <a:p>
+            <a:pPr algn="ctr">
+              <a:lnSpc>
+                <a:spcPct val="140000"/>
+              </a:lnSpc>
+            </a:pPr>
+            <a:r>
+              <a:rPr sz="1200" b="0" i="0">
+                <a:solidFill>
+                  <a:srgbClr val="5B6472"/>
+                </a:solidFill>
+                <a:latin typeface="Calibri"/>
+              </a:rPr>
+              <a:t>結果を読み解く GUI を
+ゼロから開発</a:t>
+            </a:r>
+          </a:p>
+        </p:txBody>
+      </p:sp>
+      <p:sp>
+        <p:nvSpPr>
+          <p:cNvPr id="20" name="Rounded Rectangle 19"/>
+          <p:cNvSpPr/>
+          <p:nvPr/>
+        </p:nvSpPr>
+        <p:spPr>
+          <a:xfrm>
+            <a:off x="9189720" y="1783080"/>
+            <a:ext cx="2697480" cy="3291840"/>
+          </a:xfrm>
+          <a:prstGeom prst="roundRect">
+            <a:avLst/>
+          </a:prstGeom>
+          <a:solidFill>
+            <a:srgbClr val="FFFFFF"/>
+          </a:solidFill>
+          <a:ln w="9525">
+            <a:solidFill>
+              <a:srgbClr val="DDE3EE"/>
+            </a:solidFill>
+          </a:ln>
+          <a:effectLst/>
+        </p:spPr>
+        <p:style>
+          <a:lnRef idx="1">
+            <a:schemeClr val="accent1"/>
+          </a:lnRef>
+          <a:fillRef idx="3">
+            <a:schemeClr val="accent1"/>
+          </a:fillRef>
+          <a:effectRef idx="2">
+            <a:schemeClr val="accent1"/>
+          </a:effectRef>
+          <a:fontRef idx="minor">
+            <a:schemeClr val="lt1"/>
+          </a:fontRef>
+        </p:style>
+        <p:txBody>
+          <a:bodyPr rtlCol="0" anchor="ctr"/>
+          <a:lstStyle/>
+          <a:p>
+            <a:pPr algn="ctr"/>
+          </a:p>
+        </p:txBody>
+      </p:sp>
+      <p:sp>
+        <p:nvSpPr>
+          <p:cNvPr id="21" name="Rectangle 20"/>
+          <p:cNvSpPr/>
+          <p:nvPr/>
+        </p:nvSpPr>
+        <p:spPr>
+          <a:xfrm>
+            <a:off x="9189720" y="1783080"/>
+            <a:ext cx="73152" cy="3291840"/>
+          </a:xfrm>
+          <a:prstGeom prst="rect">
+            <a:avLst/>
+          </a:prstGeom>
+          <a:solidFill>
+            <a:srgbClr val="16A34A"/>
+          </a:solidFill>
+          <a:ln>
+            <a:noFill/>
+          </a:ln>
+          <a:effectLst/>
+        </p:spPr>
+        <p:style>
+          <a:lnRef idx="1">
+            <a:schemeClr val="accent1"/>
+          </a:lnRef>
+          <a:fillRef idx="3">
+            <a:schemeClr val="accent1"/>
+          </a:fillRef>
+          <a:effectRef idx="2">
+            <a:schemeClr val="accent1"/>
+          </a:effectRef>
+          <a:fontRef idx="minor">
+            <a:schemeClr val="lt1"/>
+          </a:fontRef>
+        </p:style>
+        <p:txBody>
+          <a:bodyPr rtlCol="0" anchor="ctr"/>
+          <a:lstStyle/>
+          <a:p>
+            <a:pPr algn="ctr"/>
+          </a:p>
+        </p:txBody>
+      </p:sp>
+      <p:sp>
+        <p:nvSpPr>
+          <p:cNvPr id="22" name="TextBox 21"/>
+          <p:cNvSpPr txBox="1"/>
+          <p:nvPr/>
+        </p:nvSpPr>
+        <p:spPr>
+          <a:xfrm>
+            <a:off x="9354312" y="2194560"/>
+            <a:ext cx="2368296" cy="1005840"/>
+          </a:xfrm>
+          <a:prstGeom prst="rect">
+            <a:avLst/>
+          </a:prstGeom>
+          <a:noFill/>
+        </p:spPr>
+        <p:txBody>
+          <a:bodyPr wrap="square" lIns="0" rIns="0" tIns="0" bIns="0" anchor="t">
+            <a:spAutoFit/>
+          </a:bodyPr>
+          <a:lstStyle/>
+          <a:p>
+            <a:pPr algn="ctr">
+              <a:lnSpc>
+                <a:spcPct val="130000"/>
+              </a:lnSpc>
+            </a:pPr>
+            <a:r>
+              <a:rPr sz="4000" b="1" i="0">
+                <a:solidFill>
+                  <a:srgbClr val="16A34A"/>
+                </a:solidFill>
+                <a:latin typeface="Cambria"/>
+              </a:rPr>
+              <a:t>約8万</a:t>
+            </a:r>
+          </a:p>
+        </p:txBody>
+      </p:sp>
+      <p:sp>
+        <p:nvSpPr>
+          <p:cNvPr id="23" name="TextBox 22"/>
+          <p:cNvSpPr txBox="1"/>
+          <p:nvPr/>
+        </p:nvSpPr>
+        <p:spPr>
+          <a:xfrm>
+            <a:off x="9189720" y="3200400"/>
+            <a:ext cx="2697480" cy="457200"/>
+          </a:xfrm>
+          <a:prstGeom prst="rect">
+            <a:avLst/>
+          </a:prstGeom>
+          <a:noFill/>
+        </p:spPr>
+        <p:txBody>
+          <a:bodyPr wrap="square" lIns="0" rIns="0" tIns="0" bIns="0" anchor="t">
+            <a:spAutoFit/>
+          </a:bodyPr>
+          <a:lstStyle/>
+          <a:p>
+            <a:pPr algn="ctr">
+              <a:lnSpc>
+                <a:spcPct val="130000"/>
+              </a:lnSpc>
+            </a:pPr>
+            <a:r>
+              <a:rPr sz="2000" b="0" i="0">
+                <a:solidFill>
+                  <a:srgbClr val="1F2937"/>
+                </a:solidFill>
+                <a:latin typeface="Cambria"/>
+              </a:rPr>
+              <a:t>件</a:t>
+            </a:r>
+          </a:p>
+        </p:txBody>
+      </p:sp>
+      <p:sp>
+        <p:nvSpPr>
+          <p:cNvPr id="24" name="TextBox 23"/>
+          <p:cNvSpPr txBox="1"/>
+          <p:nvPr/>
+        </p:nvSpPr>
+        <p:spPr>
+          <a:xfrm>
+            <a:off x="9372600" y="3840480"/>
+            <a:ext cx="2331720" cy="1005840"/>
+          </a:xfrm>
+          <a:prstGeom prst="rect">
+            <a:avLst/>
+          </a:prstGeom>
+          <a:noFill/>
+        </p:spPr>
+        <p:txBody>
+          <a:bodyPr wrap="square" lIns="0" rIns="0" tIns="0" bIns="0" anchor="t">
+            <a:spAutoFit/>
+          </a:bodyPr>
+          <a:lstStyle/>
+          <a:p>
+            <a:pPr algn="ctr">
+              <a:lnSpc>
+                <a:spcPct val="140000"/>
+              </a:lnSpc>
+            </a:pPr>
+            <a:r>
+              <a:rPr sz="1200" b="0" i="0">
+                <a:solidFill>
+                  <a:srgbClr val="5B6472"/>
+                </a:solidFill>
+                <a:latin typeface="Calibri"/>
+              </a:rPr>
+              <a:t>「悪いものリスト」を
+自動で取り込んで照合</a:t>
+            </a:r>
+          </a:p>
+        </p:txBody>
+      </p:sp>
+      <p:sp>
+        <p:nvSpPr>
+          <p:cNvPr id="25" name="Rounded Rectangle 24"/>
+          <p:cNvSpPr/>
+          <p:nvPr/>
+        </p:nvSpPr>
+        <p:spPr>
+          <a:xfrm>
+            <a:off x="548640" y="5440680"/>
+            <a:ext cx="11064240" cy="1005840"/>
+          </a:xfrm>
+          <a:prstGeom prst="roundRect">
+            <a:avLst/>
+          </a:prstGeom>
+          <a:solidFill>
+            <a:srgbClr val="E8F0FE"/>
+          </a:solidFill>
+          <a:ln w="9525">
+            <a:solidFill>
+              <a:srgbClr val="E8F0FE"/>
+            </a:solidFill>
+          </a:ln>
+          <a:effectLst/>
+        </p:spPr>
+        <p:style>
+          <a:lnRef idx="1">
+            <a:schemeClr val="accent1"/>
+          </a:lnRef>
+          <a:fillRef idx="3">
+            <a:schemeClr val="accent1"/>
+          </a:fillRef>
+          <a:effectRef idx="2">
+            <a:schemeClr val="accent1"/>
+          </a:effectRef>
+          <a:fontRef idx="minor">
+            <a:schemeClr val="lt1"/>
+          </a:fontRef>
+        </p:style>
+        <p:txBody>
+          <a:bodyPr rtlCol="0" anchor="ctr"/>
+          <a:lstStyle/>
+          <a:p>
+            <a:pPr algn="ctr"/>
+          </a:p>
+        </p:txBody>
+      </p:sp>
+      <p:sp>
+        <p:nvSpPr>
+          <p:cNvPr id="26" name="TextBox 25"/>
+          <p:cNvSpPr txBox="1"/>
+          <p:nvPr/>
+        </p:nvSpPr>
+        <p:spPr>
+          <a:xfrm>
+            <a:off x="868680" y="5440680"/>
+            <a:ext cx="10515600" cy="1005840"/>
+          </a:xfrm>
+          <a:prstGeom prst="rect">
+            <a:avLst/>
+          </a:prstGeom>
+          <a:noFill/>
+        </p:spPr>
+        <p:txBody>
+          <a:bodyPr wrap="square" lIns="0" rIns="0" tIns="0" bIns="0" anchor="ctr">
+            <a:spAutoFit/>
+          </a:bodyPr>
+          <a:lstStyle/>
+          <a:p>
+            <a:pPr algn="l">
+              <a:lnSpc>
+                <a:spcPct val="130000"/>
+              </a:lnSpc>
+            </a:pPr>
+            <a:r>
+              <a:rPr sz="1400" b="0" i="0">
+                <a:solidFill>
+                  <a:srgbClr val="1F2937"/>
+                </a:solidFill>
+                <a:latin typeface="Calibri"/>
+              </a:rPr>
+              <a:t>🚀 今後:  時間の流れを追った相関分析 (「A の後に B が起きたら怪しい」) や、AI による検知ルールの自動生成へ。</a:t>
+            </a:r>
+          </a:p>
+        </p:txBody>
+      </p:sp>
+      <p:sp>
+        <p:nvSpPr>
+          <p:cNvPr id="27" name="TextBox 26"/>
+          <p:cNvSpPr txBox="1"/>
+          <p:nvPr/>
+        </p:nvSpPr>
+        <p:spPr>
+          <a:xfrm>
+            <a:off x="10972800" y="6446520"/>
+            <a:ext cx="914400" cy="274320"/>
+          </a:xfrm>
+          <a:prstGeom prst="rect">
+            <a:avLst/>
+          </a:prstGeom>
+          <a:noFill/>
+        </p:spPr>
+        <p:txBody>
+          <a:bodyPr wrap="square" lIns="0" rIns="0" tIns="0" bIns="0" anchor="t">
+            <a:spAutoFit/>
+          </a:bodyPr>
+          <a:lstStyle/>
+          <a:p>
+            <a:pPr algn="r">
+              <a:lnSpc>
+                <a:spcPct val="130000"/>
+              </a:lnSpc>
+            </a:pPr>
+            <a:r>
+              <a:rPr sz="900" b="0" i="0">
+                <a:solidFill>
+                  <a:srgbClr val="5B6472"/>
+                </a:solidFill>
+                <a:latin typeface="Calibri"/>
+              </a:rPr>
+              <a:t>13 / 14</a:t>
+            </a:r>
+          </a:p>
+        </p:txBody>
+      </p:sp>
+    </p:spTree>
+  </p:cSld>
+  <p:clrMapOvr>
+    <a:masterClrMapping/>
+  </p:clrMapOvr>
+</p:sld>
+</file>
+
+<file path=ppt/slides/slide14.xml><?xml version="1.0" encoding="utf-8"?>
+<p:sld xmlns:a="http://schemas.openxmlformats.org/drawingml/2006/main" xmlns:p="http://schemas.openxmlformats.org/presentationml/2006/main" xmlns:r="http://schemas.openxmlformats.org/officeDocument/2006/relationships">
+  <p:cSld>
+    <p:spTree>
+      <p:nvGrpSpPr>
+        <p:cNvPr id="1" name=""/>
+        <p:cNvGrpSpPr/>
+        <p:nvPr/>
+      </p:nvGrpSpPr>
+      <p:grpSpPr/>
+      <p:sp>
+        <p:nvSpPr>
+          <p:cNvPr id="2" name="Rectangle 1"/>
+          <p:cNvSpPr/>
+          <p:nvPr/>
+        </p:nvSpPr>
+        <p:spPr>
+          <a:xfrm>
+            <a:off x="0" y="0"/>
+            <a:ext cx="12191695" cy="6858000"/>
+          </a:xfrm>
+          <a:prstGeom prst="rect">
+            <a:avLst/>
+          </a:prstGeom>
+          <a:solidFill>
             <a:srgbClr val="1B254F"/>
           </a:solidFill>
           <a:ln>
@@ -7275,7 +8148,7 @@
                 </a:solidFill>
                 <a:latin typeface="Calibri"/>
               </a:rPr>
-              <a:t>2 / 13</a:t>
+              <a:t>2 / 14</a:t>
             </a:r>
           </a:p>
         </p:txBody>
@@ -8253,7 +9126,7 @@
                 </a:solidFill>
                 <a:latin typeface="Calibri"/>
               </a:rPr>
-              <a:t>3 / 13</a:t>
+              <a:t>3 / 14</a:t>
             </a:r>
           </a:p>
         </p:txBody>
@@ -9119,7 +9992,7 @@
                 </a:solidFill>
                 <a:latin typeface="Calibri"/>
               </a:rPr>
-              <a:t>4 / 13</a:t>
+              <a:t>4 / 14</a:t>
             </a:r>
           </a:p>
         </p:txBody>
@@ -10003,7 +10876,7 @@
                 </a:solidFill>
                 <a:latin typeface="Calibri"/>
               </a:rPr>
-              <a:t>5 / 13</a:t>
+              <a:t>5 / 14</a:t>
             </a:r>
           </a:p>
         </p:txBody>
@@ -11433,7 +12306,7 @@
                 </a:solidFill>
                 <a:latin typeface="Calibri"/>
               </a:rPr>
-              <a:t>6 / 13</a:t>
+              <a:t>6 / 14</a:t>
             </a:r>
           </a:p>
         </p:txBody>
@@ -11991,7 +12864,7 @@
         </p:nvSpPr>
         <p:spPr>
           <a:xfrm>
-            <a:off x="6949440" y="2286000"/>
+            <a:off x="6949440" y="2240280"/>
             <a:ext cx="4480560" cy="310896"/>
           </a:xfrm>
           <a:prstGeom prst="rect">
@@ -12030,7 +12903,7 @@
         </p:nvSpPr>
         <p:spPr>
           <a:xfrm>
-            <a:off x="6949440" y="2642616"/>
+            <a:off x="6949440" y="2564892"/>
             <a:ext cx="4480560" cy="310896"/>
           </a:xfrm>
           <a:prstGeom prst="rect">
@@ -12069,7 +12942,7 @@
         </p:nvSpPr>
         <p:spPr>
           <a:xfrm>
-            <a:off x="6949440" y="2999232"/>
+            <a:off x="6949440" y="2889504"/>
             <a:ext cx="4480560" cy="310896"/>
           </a:xfrm>
           <a:prstGeom prst="rect">
@@ -12095,7 +12968,7 @@
                 </a:solidFill>
                 <a:latin typeface="Consolas"/>
               </a:rPr>
-              <a:t>  file: loldrivers.txt   # 悪い指紋 1,929 件</a:t>
+              <a:t>  - name: lol_drivers</a:t>
             </a:r>
           </a:p>
         </p:txBody>
@@ -12108,7 +12981,7 @@
         </p:nvSpPr>
         <p:spPr>
           <a:xfrm>
-            <a:off x="6949440" y="3355848"/>
+            <a:off x="6949440" y="3214116"/>
             <a:ext cx="4480560" cy="310896"/>
           </a:xfrm>
           <a:prstGeom prst="rect">
@@ -12130,6 +13003,45 @@
             <a:r>
               <a:rPr sz="1150" b="0" i="0">
                 <a:solidFill>
+                  <a:srgbClr val="7DD3FC"/>
+                </a:solidFill>
+                <a:latin typeface="Consolas"/>
+              </a:rPr>
+              <a:t>    file: loldrivers.txt  # 悪い指紋 1,929 件</a:t>
+            </a:r>
+          </a:p>
+        </p:txBody>
+      </p:sp>
+      <p:sp>
+        <p:nvSpPr>
+          <p:cNvPr id="19" name="TextBox 18"/>
+          <p:cNvSpPr txBox="1"/>
+          <p:nvPr/>
+        </p:nvSpPr>
+        <p:spPr>
+          <a:xfrm>
+            <a:off x="6949440" y="3538728"/>
+            <a:ext cx="4480560" cy="310896"/>
+          </a:xfrm>
+          <a:prstGeom prst="rect">
+            <a:avLst/>
+          </a:prstGeom>
+          <a:noFill/>
+        </p:spPr>
+        <p:txBody>
+          <a:bodyPr wrap="square" lIns="0" rIns="0" tIns="0" bIns="0" anchor="t">
+            <a:spAutoFit/>
+          </a:bodyPr>
+          <a:lstStyle/>
+          <a:p>
+            <a:pPr algn="l">
+              <a:lnSpc>
+                <a:spcPct val="130000"/>
+              </a:lnSpc>
+            </a:pPr>
+            <a:r>
+              <a:rPr sz="1150" b="0" i="0">
+                <a:solidFill>
                   <a:srgbClr val="CBD5E1"/>
                 </a:solidFill>
                 <a:latin typeface="Consolas"/>
@@ -12141,13 +13053,13 @@
       </p:sp>
       <p:sp>
         <p:nvSpPr>
-          <p:cNvPr id="19" name="TextBox 18"/>
-          <p:cNvSpPr txBox="1"/>
-          <p:nvPr/>
-        </p:nvSpPr>
-        <p:spPr>
-          <a:xfrm>
-            <a:off x="6949440" y="3712464"/>
+          <p:cNvPr id="20" name="TextBox 19"/>
+          <p:cNvSpPr txBox="1"/>
+          <p:nvPr/>
+        </p:nvSpPr>
+        <p:spPr>
+          <a:xfrm>
+            <a:off x="6949440" y="3863339"/>
             <a:ext cx="4480560" cy="310896"/>
           </a:xfrm>
           <a:prstGeom prst="rect">
@@ -12180,13 +13092,13 @@
       </p:sp>
       <p:sp>
         <p:nvSpPr>
-          <p:cNvPr id="20" name="TextBox 19"/>
-          <p:cNvSpPr txBox="1"/>
-          <p:nvPr/>
-        </p:nvSpPr>
-        <p:spPr>
-          <a:xfrm>
-            <a:off x="6949440" y="4069080"/>
+          <p:cNvPr id="21" name="TextBox 20"/>
+          <p:cNvSpPr txBox="1"/>
+          <p:nvPr/>
+        </p:nvSpPr>
+        <p:spPr>
+          <a:xfrm>
+            <a:off x="6949440" y="4187952"/>
             <a:ext cx="4480560" cy="310896"/>
           </a:xfrm>
           <a:prstGeom prst="rect">
@@ -12212,20 +13124,20 @@
                 </a:solidFill>
                 <a:latin typeface="Consolas"/>
               </a:rPr>
-              <a:t>            ↑ 追加した新しい文法</a:t>
-            </a:r>
-          </a:p>
-        </p:txBody>
-      </p:sp>
-      <p:sp>
-        <p:nvSpPr>
-          <p:cNvPr id="21" name="TextBox 20"/>
-          <p:cNvSpPr txBox="1"/>
-          <p:nvPr/>
-        </p:nvSpPr>
-        <p:spPr>
-          <a:xfrm>
-            <a:off x="6949440" y="4425696"/>
+              <a:t>           ↑ 追加した新しい文法</a:t>
+            </a:r>
+          </a:p>
+        </p:txBody>
+      </p:sp>
+      <p:sp>
+        <p:nvSpPr>
+          <p:cNvPr id="22" name="TextBox 21"/>
+          <p:cNvSpPr txBox="1"/>
+          <p:nvPr/>
+        </p:nvSpPr>
+        <p:spPr>
+          <a:xfrm>
+            <a:off x="6949440" y="4512564"/>
             <a:ext cx="4480560" cy="310896"/>
           </a:xfrm>
           <a:prstGeom prst="rect">
@@ -12258,7 +13170,7 @@
       </p:sp>
       <p:sp>
         <p:nvSpPr>
-          <p:cNvPr id="22" name="Rounded Rectangle 21"/>
+          <p:cNvPr id="23" name="Rounded Rectangle 22"/>
           <p:cNvSpPr/>
           <p:nvPr/>
         </p:nvSpPr>
@@ -12304,7 +13216,7 @@
       </p:sp>
       <p:sp>
         <p:nvSpPr>
-          <p:cNvPr id="23" name="Rectangle 22"/>
+          <p:cNvPr id="24" name="Rectangle 23"/>
           <p:cNvSpPr/>
           <p:nvPr/>
         </p:nvSpPr>
@@ -12348,13 +13260,13 @@
       </p:sp>
       <p:sp>
         <p:nvSpPr>
-          <p:cNvPr id="24" name="TextBox 23"/>
-          <p:cNvSpPr txBox="1"/>
-          <p:nvPr/>
-        </p:nvSpPr>
-        <p:spPr>
-          <a:xfrm>
-            <a:off x="6903720" y="5193792"/>
+          <p:cNvPr id="25" name="TextBox 24"/>
+          <p:cNvSpPr txBox="1"/>
+          <p:nvPr/>
+        </p:nvSpPr>
+        <p:spPr>
+          <a:xfrm>
+            <a:off x="6903720" y="5175504"/>
             <a:ext cx="4572000" cy="411480"/>
           </a:xfrm>
           <a:prstGeom prst="rect">
@@ -12380,21 +13292,21 @@
                 </a:solidFill>
                 <a:latin typeface="Calibri"/>
               </a:rPr>
-              <a:t>ログ 1 件ごとにリスト 8 万件と照合しても速度が落ちない</a:t>
-            </a:r>
-          </a:p>
-        </p:txBody>
-      </p:sp>
-      <p:sp>
-        <p:nvSpPr>
-          <p:cNvPr id="25" name="TextBox 24"/>
-          <p:cNvSpPr txBox="1"/>
-          <p:nvPr/>
-        </p:nvSpPr>
-        <p:spPr>
-          <a:xfrm>
-            <a:off x="6903720" y="5596128"/>
-            <a:ext cx="4572000" cy="411480"/>
+              <a:t>この「悪い指紋リスト」は世界中の研究者が集めた公開情報</a:t>
+            </a:r>
+          </a:p>
+        </p:txBody>
+      </p:sp>
+      <p:sp>
+        <p:nvSpPr>
+          <p:cNvPr id="26" name="TextBox 25"/>
+          <p:cNvSpPr txBox="1"/>
+          <p:nvPr/>
+        </p:nvSpPr>
+        <p:spPr>
+          <a:xfrm>
+            <a:off x="6903720" y="5550408"/>
+            <a:ext cx="4572000" cy="365760"/>
           </a:xfrm>
           <a:prstGeom prst="rect">
             <a:avLst/>
@@ -12413,20 +13325,59 @@
               </a:lnSpc>
             </a:pPr>
             <a:r>
-              <a:rPr sz="1200" b="0" i="0">
+              <a:rPr sz="1150" b="0" i="0">
                 <a:solidFill>
                   <a:srgbClr val="5B6472"/>
                 </a:solidFill>
                 <a:latin typeface="Calibri"/>
               </a:rPr>
-              <a:t>よう、起動時に一度だけ読み込んで記憶する設計 (Rust)。</a:t>
-            </a:r>
-          </a:p>
-        </p:txBody>
-      </p:sp>
-      <p:sp>
-        <p:nvSpPr>
-          <p:cNvPr id="26" name="TextBox 25"/>
+              <a:t>(例: loldrivers.io の悪用ドライバ一覧)。出どころと処理の</a:t>
+            </a:r>
+          </a:p>
+        </p:txBody>
+      </p:sp>
+      <p:sp>
+        <p:nvSpPr>
+          <p:cNvPr id="27" name="TextBox 26"/>
+          <p:cNvSpPr txBox="1"/>
+          <p:nvPr/>
+        </p:nvSpPr>
+        <p:spPr>
+          <a:xfrm>
+            <a:off x="6903720" y="5861304"/>
+            <a:ext cx="4572000" cy="365760"/>
+          </a:xfrm>
+          <a:prstGeom prst="rect">
+            <a:avLst/>
+          </a:prstGeom>
+          <a:noFill/>
+        </p:spPr>
+        <p:txBody>
+          <a:bodyPr wrap="square" lIns="0" rIns="0" tIns="0" bIns="0" anchor="t">
+            <a:spAutoFit/>
+          </a:bodyPr>
+          <a:lstStyle/>
+          <a:p>
+            <a:pPr algn="l">
+              <a:lnSpc>
+                <a:spcPct val="130000"/>
+              </a:lnSpc>
+            </a:pPr>
+            <a:r>
+              <a:rPr sz="1150" b="0" i="0">
+                <a:solidFill>
+                  <a:srgbClr val="5B6472"/>
+                </a:solidFill>
+                <a:latin typeface="Calibri"/>
+              </a:rPr>
+              <a:t>流れは次ページで説明します。</a:t>
+            </a:r>
+          </a:p>
+        </p:txBody>
+      </p:sp>
+      <p:sp>
+        <p:nvSpPr>
+          <p:cNvPr id="28" name="TextBox 27"/>
           <p:cNvSpPr txBox="1"/>
           <p:nvPr/>
         </p:nvSpPr>
@@ -12458,7 +13409,7 @@
                 </a:solidFill>
                 <a:latin typeface="Calibri"/>
               </a:rPr>
-              <a:t>7 / 13</a:t>
+              <a:t>7 / 14</a:t>
             </a:r>
           </a:p>
         </p:txBody>
@@ -12559,7 +13510,7 @@
                 </a:solidFill>
                 <a:latin typeface="Calibri"/>
               </a:rPr>
-              <a:t>開発内容 2 / 3   (検知ルール)</a:t>
+              <a:t>開発内容① の中身   (内部フロー)</a:t>
             </a:r>
           </a:p>
         </p:txBody>
@@ -12598,7 +13549,7 @@
                 </a:solidFill>
                 <a:latin typeface="Cambria"/>
               </a:rPr>
-              <a:t>②  攻撃を見抜く検知ルールを 13 本自作</a:t>
+              <a:t>lookup の内部フロー — リストはどこから来て、どう照合されるか</a:t>
             </a:r>
           </a:p>
         </p:txBody>
@@ -12611,8 +13562,8 @@
         </p:nvSpPr>
         <p:spPr>
           <a:xfrm>
-            <a:off x="548640" y="1645920"/>
-            <a:ext cx="11064240" cy="457200"/>
+            <a:off x="548640" y="1627632"/>
+            <a:ext cx="11064240" cy="411480"/>
           </a:xfrm>
           <a:prstGeom prst="rect">
             <a:avLst/>
@@ -12631,13 +13582,13 @@
               </a:lnSpc>
             </a:pPr>
             <a:r>
-              <a:rPr sz="1500" b="1" i="1">
-                <a:solidFill>
-                  <a:srgbClr val="1D4ED8"/>
+              <a:rPr sz="1400" b="0" i="1">
+                <a:solidFill>
+                  <a:srgbClr val="5B6472"/>
                 </a:solidFill>
                 <a:latin typeface="Calibri"/>
               </a:rPr>
-              <a:t>着眼点: 攻撃者は必ず「証拠隠し」をする。なら、消す行為そのものを検知すればいい。</a:t>
+              <a:t>具体例: 「悪用される脆弱ドライバの読み込み (BYOVD)」を検知するまでの流れ。</a:t>
             </a:r>
           </a:p>
         </p:txBody>
@@ -12650,8 +13601,8 @@
         </p:nvSpPr>
         <p:spPr>
           <a:xfrm>
-            <a:off x="548640" y="2286000"/>
-            <a:ext cx="2697480" cy="2926080"/>
+            <a:off x="548640" y="2103120"/>
+            <a:ext cx="3200400" cy="1874519"/>
           </a:xfrm>
           <a:prstGeom prst="roundRect">
             <a:avLst/>
@@ -12696,8 +13647,8 @@
         </p:nvSpPr>
         <p:spPr>
           <a:xfrm>
-            <a:off x="548640" y="2286000"/>
-            <a:ext cx="73152" cy="2926080"/>
+            <a:off x="548640" y="2103120"/>
+            <a:ext cx="73152" cy="1874519"/>
           </a:xfrm>
           <a:prstGeom prst="rect">
             <a:avLst/>
@@ -12740,8 +13691,8 @@
         </p:nvSpPr>
         <p:spPr>
           <a:xfrm>
-            <a:off x="731520" y="2468880"/>
-            <a:ext cx="914400" cy="640080"/>
+            <a:off x="749808" y="2249424"/>
+            <a:ext cx="731520" cy="548640"/>
           </a:xfrm>
           <a:prstGeom prst="rect">
             <a:avLst/>
@@ -12760,13 +13711,13 @@
               </a:lnSpc>
             </a:pPr>
             <a:r>
-              <a:rPr sz="3000" b="0" i="0">
+              <a:rPr sz="2300" b="0" i="0">
                 <a:solidFill>
                   <a:srgbClr val="2563EB"/>
                 </a:solidFill>
                 <a:latin typeface="Calibri"/>
               </a:rPr>
-              <a:t>🧹</a:t>
+              <a:t>🌐</a:t>
             </a:r>
           </a:p>
         </p:txBody>
@@ -12779,8 +13730,8 @@
         </p:nvSpPr>
         <p:spPr>
           <a:xfrm>
-            <a:off x="731520" y="3154680"/>
-            <a:ext cx="2423160" cy="457200"/>
+            <a:off x="1389888" y="2286000"/>
+            <a:ext cx="2240280" cy="457200"/>
           </a:xfrm>
           <a:prstGeom prst="rect">
             <a:avLst/>
@@ -12799,13 +13750,13 @@
               </a:lnSpc>
             </a:pPr>
             <a:r>
-              <a:rPr sz="1700" b="1" i="0">
+              <a:rPr sz="1450" b="1" i="0">
                 <a:solidFill>
                   <a:srgbClr val="1F2937"/>
                 </a:solidFill>
                 <a:latin typeface="Cambria"/>
               </a:rPr>
-              <a:t>ログの消去</a:t>
+              <a:t>loldrivers.io</a:t>
             </a:r>
           </a:p>
         </p:txBody>
@@ -12818,8 +13769,8 @@
         </p:nvSpPr>
         <p:spPr>
           <a:xfrm>
-            <a:off x="731520" y="3657600"/>
-            <a:ext cx="2331720" cy="868680"/>
+            <a:off x="768096" y="2834639"/>
+            <a:ext cx="2788920" cy="777239"/>
           </a:xfrm>
           <a:prstGeom prst="rect">
             <a:avLst/>
@@ -12834,18 +13785,19 @@
           <a:p>
             <a:pPr algn="l">
               <a:lnSpc>
-                <a:spcPct val="140000"/>
+                <a:spcPct val="132000"/>
               </a:lnSpc>
             </a:pPr>
             <a:r>
               <a:rPr sz="1100" b="0" i="0">
                 <a:solidFill>
-                  <a:srgbClr val="1F2937"/>
+                  <a:srgbClr val="5B6472"/>
                 </a:solidFill>
                 <a:latin typeface="Calibri"/>
               </a:rPr>
-              <a:t>調査の手がかりになる
-ログを消すコマンドの実行</a:t>
+              <a:t>世界中の研究者が集めた
+「悪用される脆弱ドライバ」の
+ハッシュ一覧 (誰でも入手可・無料)</a:t>
             </a:r>
           </a:p>
         </p:txBody>
@@ -12858,8 +13810,8 @@
         </p:nvSpPr>
         <p:spPr>
           <a:xfrm>
-            <a:off x="731520" y="4617720"/>
-            <a:ext cx="2331720" cy="365760"/>
+            <a:off x="768096" y="3630168"/>
+            <a:ext cx="2788920" cy="292608"/>
           </a:xfrm>
           <a:prstGeom prst="rect">
             <a:avLst/>
@@ -12878,27 +13830,71 @@
               </a:lnSpc>
             </a:pPr>
             <a:r>
-              <a:rPr sz="1000" b="0" i="1">
-                <a:solidFill>
-                  <a:srgbClr val="5B6472"/>
-                </a:solidFill>
-                <a:latin typeface="Calibri"/>
-              </a:rPr>
-              <a:t>(wevtutil 等)</a:t>
-            </a:r>
-          </a:p>
-        </p:txBody>
-      </p:sp>
-      <p:sp>
-        <p:nvSpPr>
-          <p:cNvPr id="12" name="Rounded Rectangle 11"/>
+              <a:rPr sz="1000" b="1" i="0">
+                <a:solidFill>
+                  <a:srgbClr val="2563EB"/>
+                </a:solidFill>
+                <a:latin typeface="Consolas"/>
+              </a:rPr>
+              <a:t>出どころ (Source)</a:t>
+            </a:r>
+          </a:p>
+        </p:txBody>
+      </p:sp>
+      <p:sp>
+        <p:nvSpPr>
+          <p:cNvPr id="12" name="Right Arrow 11"/>
           <p:cNvSpPr/>
           <p:nvPr/>
         </p:nvSpPr>
         <p:spPr>
           <a:xfrm>
-            <a:off x="3429000" y="2286000"/>
-            <a:ext cx="2697480" cy="2926080"/>
+            <a:off x="3803904" y="2852927"/>
+            <a:ext cx="457200" cy="365760"/>
+          </a:xfrm>
+          <a:prstGeom prst="rightArrow">
+            <a:avLst/>
+          </a:prstGeom>
+          <a:solidFill>
+            <a:srgbClr val="5B6472"/>
+          </a:solidFill>
+          <a:ln>
+            <a:noFill/>
+          </a:ln>
+          <a:effectLst/>
+        </p:spPr>
+        <p:style>
+          <a:lnRef idx="1">
+            <a:schemeClr val="accent1"/>
+          </a:lnRef>
+          <a:fillRef idx="3">
+            <a:schemeClr val="accent1"/>
+          </a:fillRef>
+          <a:effectRef idx="2">
+            <a:schemeClr val="accent1"/>
+          </a:effectRef>
+          <a:fontRef idx="minor">
+            <a:schemeClr val="lt1"/>
+          </a:fontRef>
+        </p:style>
+        <p:txBody>
+          <a:bodyPr rtlCol="0" anchor="ctr"/>
+          <a:lstStyle/>
+          <a:p>
+            <a:pPr algn="ctr"/>
+          </a:p>
+        </p:txBody>
+      </p:sp>
+      <p:sp>
+        <p:nvSpPr>
+          <p:cNvPr id="13" name="Rounded Rectangle 12"/>
+          <p:cNvSpPr/>
+          <p:nvPr/>
+        </p:nvSpPr>
+        <p:spPr>
+          <a:xfrm>
+            <a:off x="4315968" y="2103120"/>
+            <a:ext cx="3200400" cy="1874519"/>
           </a:xfrm>
           <a:prstGeom prst="roundRect">
             <a:avLst/>
@@ -12937,14 +13933,14 @@
       </p:sp>
       <p:sp>
         <p:nvSpPr>
-          <p:cNvPr id="13" name="Rectangle 12"/>
+          <p:cNvPr id="14" name="Rectangle 13"/>
           <p:cNvSpPr/>
           <p:nvPr/>
         </p:nvSpPr>
         <p:spPr>
           <a:xfrm>
-            <a:off x="3429000" y="2286000"/>
-            <a:ext cx="73152" cy="2926080"/>
+            <a:off x="4315968" y="2103120"/>
+            <a:ext cx="73152" cy="1874519"/>
           </a:xfrm>
           <a:prstGeom prst="rect">
             <a:avLst/>
@@ -12981,14 +13977,14 @@
       </p:sp>
       <p:sp>
         <p:nvSpPr>
-          <p:cNvPr id="14" name="TextBox 13"/>
-          <p:cNvSpPr txBox="1"/>
-          <p:nvPr/>
-        </p:nvSpPr>
-        <p:spPr>
-          <a:xfrm>
-            <a:off x="3611880" y="2468880"/>
-            <a:ext cx="914400" cy="640080"/>
+          <p:cNvPr id="15" name="TextBox 14"/>
+          <p:cNvSpPr txBox="1"/>
+          <p:nvPr/>
+        </p:nvSpPr>
+        <p:spPr>
+          <a:xfrm>
+            <a:off x="4517136" y="2249424"/>
+            <a:ext cx="731520" cy="548640"/>
           </a:xfrm>
           <a:prstGeom prst="rect">
             <a:avLst/>
@@ -13007,27 +14003,27 @@
               </a:lnSpc>
             </a:pPr>
             <a:r>
-              <a:rPr sz="3000" b="0" i="0">
+              <a:rPr sz="2300" b="0" i="0">
                 <a:solidFill>
                   <a:srgbClr val="2563EB"/>
                 </a:solidFill>
                 <a:latin typeface="Calibri"/>
               </a:rPr>
-              <a:t>💣</a:t>
-            </a:r>
-          </a:p>
-        </p:txBody>
-      </p:sp>
-      <p:sp>
-        <p:nvSpPr>
-          <p:cNvPr id="15" name="TextBox 14"/>
-          <p:cNvSpPr txBox="1"/>
-          <p:nvPr/>
-        </p:nvSpPr>
-        <p:spPr>
-          <a:xfrm>
-            <a:off x="3611880" y="3154680"/>
-            <a:ext cx="2423160" cy="457200"/>
+              <a:t>⬇</a:t>
+            </a:r>
+          </a:p>
+        </p:txBody>
+      </p:sp>
+      <p:sp>
+        <p:nvSpPr>
+          <p:cNvPr id="16" name="TextBox 15"/>
+          <p:cNvSpPr txBox="1"/>
+          <p:nvPr/>
+        </p:nvSpPr>
+        <p:spPr>
+          <a:xfrm>
+            <a:off x="5157216" y="2286000"/>
+            <a:ext cx="2240280" cy="457200"/>
           </a:xfrm>
           <a:prstGeom prst="rect">
             <a:avLst/>
@@ -13046,27 +14042,27 @@
               </a:lnSpc>
             </a:pPr>
             <a:r>
-              <a:rPr sz="1700" b="1" i="0">
+              <a:rPr sz="1450" b="1" i="0">
                 <a:solidFill>
                   <a:srgbClr val="1F2937"/>
                 </a:solidFill>
                 <a:latin typeface="Cambria"/>
               </a:rPr>
-              <a:t>復元データの削除</a:t>
-            </a:r>
-          </a:p>
-        </p:txBody>
-      </p:sp>
-      <p:sp>
-        <p:nvSpPr>
-          <p:cNvPr id="16" name="TextBox 15"/>
-          <p:cNvSpPr txBox="1"/>
-          <p:nvPr/>
-        </p:nvSpPr>
-        <p:spPr>
-          <a:xfrm>
-            <a:off x="3611880" y="3657600"/>
-            <a:ext cx="2331720" cy="868680"/>
+              <a:t>取得して整形</a:t>
+            </a:r>
+          </a:p>
+        </p:txBody>
+      </p:sp>
+      <p:sp>
+        <p:nvSpPr>
+          <p:cNvPr id="17" name="TextBox 16"/>
+          <p:cNvSpPr txBox="1"/>
+          <p:nvPr/>
+        </p:nvSpPr>
+        <p:spPr>
+          <a:xfrm>
+            <a:off x="4535424" y="2834639"/>
+            <a:ext cx="2788920" cy="777239"/>
           </a:xfrm>
           <a:prstGeom prst="rect">
             <a:avLst/>
@@ -13081,32 +14077,33 @@
           <a:p>
             <a:pPr algn="l">
               <a:lnSpc>
-                <a:spcPct val="140000"/>
+                <a:spcPct val="132000"/>
               </a:lnSpc>
             </a:pPr>
             <a:r>
               <a:rPr sz="1100" b="0" i="0">
                 <a:solidFill>
-                  <a:srgbClr val="1F2937"/>
+                  <a:srgbClr val="5B6472"/>
                 </a:solidFill>
                 <a:latin typeface="Calibri"/>
               </a:rPr>
-              <a:t>バックアップを消す行為
-(ランサムウェアの前兆)</a:t>
-            </a:r>
-          </a:p>
-        </p:txBody>
-      </p:sp>
-      <p:sp>
-        <p:nvSpPr>
-          <p:cNvPr id="17" name="TextBox 16"/>
-          <p:cNvSpPr txBox="1"/>
-          <p:nvPr/>
-        </p:nvSpPr>
-        <p:spPr>
-          <a:xfrm>
-            <a:off x="3611880" y="4617720"/>
-            <a:ext cx="2331720" cy="365760"/>
+              <a:t>CSV を取得し、1 行 1 ハッシュの
+テキストに変換して保存する
+(GUI のボタン 1 つで実行)</a:t>
+            </a:r>
+          </a:p>
+        </p:txBody>
+      </p:sp>
+      <p:sp>
+        <p:nvSpPr>
+          <p:cNvPr id="18" name="TextBox 17"/>
+          <p:cNvSpPr txBox="1"/>
+          <p:nvPr/>
+        </p:nvSpPr>
+        <p:spPr>
+          <a:xfrm>
+            <a:off x="4535424" y="3630168"/>
+            <a:ext cx="2788920" cy="292608"/>
           </a:xfrm>
           <a:prstGeom prst="rect">
             <a:avLst/>
@@ -13125,27 +14122,71 @@
               </a:lnSpc>
             </a:pPr>
             <a:r>
-              <a:rPr sz="1000" b="0" i="1">
-                <a:solidFill>
-                  <a:srgbClr val="5B6472"/>
-                </a:solidFill>
-                <a:latin typeface="Calibri"/>
-              </a:rPr>
-              <a:t>(シャドウコピー削除)</a:t>
-            </a:r>
-          </a:p>
-        </p:txBody>
-      </p:sp>
-      <p:sp>
-        <p:nvSpPr>
-          <p:cNvPr id="18" name="Rounded Rectangle 17"/>
+              <a:rPr sz="1000" b="1" i="0">
+                <a:solidFill>
+                  <a:srgbClr val="2563EB"/>
+                </a:solidFill>
+                <a:latin typeface="Consolas"/>
+              </a:rPr>
+              <a:t>→ loldrivers.txt (1,929 件)</a:t>
+            </a:r>
+          </a:p>
+        </p:txBody>
+      </p:sp>
+      <p:sp>
+        <p:nvSpPr>
+          <p:cNvPr id="19" name="Right Arrow 18"/>
           <p:cNvSpPr/>
           <p:nvPr/>
         </p:nvSpPr>
         <p:spPr>
           <a:xfrm>
-            <a:off x="6309360" y="2286000"/>
-            <a:ext cx="2697480" cy="2926080"/>
+            <a:off x="7571231" y="2852927"/>
+            <a:ext cx="457200" cy="365760"/>
+          </a:xfrm>
+          <a:prstGeom prst="rightArrow">
+            <a:avLst/>
+          </a:prstGeom>
+          <a:solidFill>
+            <a:srgbClr val="5B6472"/>
+          </a:solidFill>
+          <a:ln>
+            <a:noFill/>
+          </a:ln>
+          <a:effectLst/>
+        </p:spPr>
+        <p:style>
+          <a:lnRef idx="1">
+            <a:schemeClr val="accent1"/>
+          </a:lnRef>
+          <a:fillRef idx="3">
+            <a:schemeClr val="accent1"/>
+          </a:fillRef>
+          <a:effectRef idx="2">
+            <a:schemeClr val="accent1"/>
+          </a:effectRef>
+          <a:fontRef idx="minor">
+            <a:schemeClr val="lt1"/>
+          </a:fontRef>
+        </p:style>
+        <p:txBody>
+          <a:bodyPr rtlCol="0" anchor="ctr"/>
+          <a:lstStyle/>
+          <a:p>
+            <a:pPr algn="ctr"/>
+          </a:p>
+        </p:txBody>
+      </p:sp>
+      <p:sp>
+        <p:nvSpPr>
+          <p:cNvPr id="20" name="Rounded Rectangle 19"/>
+          <p:cNvSpPr/>
+          <p:nvPr/>
+        </p:nvSpPr>
+        <p:spPr>
+          <a:xfrm>
+            <a:off x="8083296" y="2103120"/>
+            <a:ext cx="3200400" cy="1874519"/>
           </a:xfrm>
           <a:prstGeom prst="roundRect">
             <a:avLst/>
@@ -13184,14 +14225,14 @@
       </p:sp>
       <p:sp>
         <p:nvSpPr>
-          <p:cNvPr id="19" name="Rectangle 18"/>
+          <p:cNvPr id="21" name="Rectangle 20"/>
           <p:cNvSpPr/>
           <p:nvPr/>
         </p:nvSpPr>
         <p:spPr>
           <a:xfrm>
-            <a:off x="6309360" y="2286000"/>
-            <a:ext cx="73152" cy="2926080"/>
+            <a:off x="8083296" y="2103120"/>
+            <a:ext cx="73152" cy="1874519"/>
           </a:xfrm>
           <a:prstGeom prst="rect">
             <a:avLst/>
@@ -13228,14 +14269,14 @@
       </p:sp>
       <p:sp>
         <p:nvSpPr>
-          <p:cNvPr id="20" name="TextBox 19"/>
-          <p:cNvSpPr txBox="1"/>
-          <p:nvPr/>
-        </p:nvSpPr>
-        <p:spPr>
-          <a:xfrm>
-            <a:off x="6492240" y="2468880"/>
-            <a:ext cx="914400" cy="640080"/>
+          <p:cNvPr id="22" name="TextBox 21"/>
+          <p:cNvSpPr txBox="1"/>
+          <p:nvPr/>
+        </p:nvSpPr>
+        <p:spPr>
+          <a:xfrm>
+            <a:off x="8284464" y="2249424"/>
+            <a:ext cx="731520" cy="548640"/>
           </a:xfrm>
           <a:prstGeom prst="rect">
             <a:avLst/>
@@ -13254,27 +14295,27 @@
               </a:lnSpc>
             </a:pPr>
             <a:r>
-              <a:rPr sz="3000" b="0" i="0">
+              <a:rPr sz="2300" b="0" i="0">
                 <a:solidFill>
                   <a:srgbClr val="2563EB"/>
                 </a:solidFill>
                 <a:latin typeface="Calibri"/>
               </a:rPr>
-              <a:t>🙈</a:t>
-            </a:r>
-          </a:p>
-        </p:txBody>
-      </p:sp>
-      <p:sp>
-        <p:nvSpPr>
-          <p:cNvPr id="21" name="TextBox 20"/>
-          <p:cNvSpPr txBox="1"/>
-          <p:nvPr/>
-        </p:nvSpPr>
-        <p:spPr>
-          <a:xfrm>
-            <a:off x="6492240" y="3154680"/>
-            <a:ext cx="2423160" cy="457200"/>
+              <a:t>🦀</a:t>
+            </a:r>
+          </a:p>
+        </p:txBody>
+      </p:sp>
+      <p:sp>
+        <p:nvSpPr>
+          <p:cNvPr id="23" name="TextBox 22"/>
+          <p:cNvSpPr txBox="1"/>
+          <p:nvPr/>
+        </p:nvSpPr>
+        <p:spPr>
+          <a:xfrm>
+            <a:off x="8924544" y="2286000"/>
+            <a:ext cx="2240280" cy="457200"/>
           </a:xfrm>
           <a:prstGeom prst="rect">
             <a:avLst/>
@@ -13293,27 +14334,27 @@
               </a:lnSpc>
             </a:pPr>
             <a:r>
-              <a:rPr sz="1700" b="1" i="0">
+              <a:rPr sz="1450" b="1" i="0">
                 <a:solidFill>
                   <a:srgbClr val="1F2937"/>
                 </a:solidFill>
                 <a:latin typeface="Cambria"/>
               </a:rPr>
-              <a:t>監視の無効化</a:t>
-            </a:r>
-          </a:p>
-        </p:txBody>
-      </p:sp>
-      <p:sp>
-        <p:nvSpPr>
-          <p:cNvPr id="22" name="TextBox 21"/>
-          <p:cNvSpPr txBox="1"/>
-          <p:nvPr/>
-        </p:nvSpPr>
-        <p:spPr>
-          <a:xfrm>
-            <a:off x="6492240" y="3657600"/>
-            <a:ext cx="2331720" cy="868680"/>
+              <a:t>起動時に記憶</a:t>
+            </a:r>
+          </a:p>
+        </p:txBody>
+      </p:sp>
+      <p:sp>
+        <p:nvSpPr>
+          <p:cNvPr id="24" name="TextBox 23"/>
+          <p:cNvSpPr txBox="1"/>
+          <p:nvPr/>
+        </p:nvSpPr>
+        <p:spPr>
+          <a:xfrm>
+            <a:off x="8302752" y="2834639"/>
+            <a:ext cx="2788920" cy="777239"/>
           </a:xfrm>
           <a:prstGeom prst="rect">
             <a:avLst/>
@@ -13328,32 +14369,33 @@
           <a:p>
             <a:pPr algn="l">
               <a:lnSpc>
-                <a:spcPct val="140000"/>
+                <a:spcPct val="132000"/>
               </a:lnSpc>
             </a:pPr>
             <a:r>
               <a:rPr sz="1100" b="0" i="0">
                 <a:solidFill>
-                  <a:srgbClr val="1F2937"/>
+                  <a:srgbClr val="5B6472"/>
                 </a:solidFill>
                 <a:latin typeface="Calibri"/>
               </a:rPr>
-              <a:t>ログを記録する機能や
-監査そのものを止める行為</a:t>
-            </a:r>
-          </a:p>
-        </p:txBody>
-      </p:sp>
-      <p:sp>
-        <p:nvSpPr>
-          <p:cNvPr id="23" name="TextBox 22"/>
-          <p:cNvSpPr txBox="1"/>
-          <p:nvPr/>
-        </p:nvSpPr>
-        <p:spPr>
-          <a:xfrm>
-            <a:off x="6492240" y="4617720"/>
-            <a:ext cx="2331720" cy="365760"/>
+              <a:t>エンジン起動時に一度だけ読み込み、
+メモリ上の高速な表に保持する
+(RwLock&lt;HashMap&gt;)</a:t>
+            </a:r>
+          </a:p>
+        </p:txBody>
+      </p:sp>
+      <p:sp>
+        <p:nvSpPr>
+          <p:cNvPr id="25" name="TextBox 24"/>
+          <p:cNvSpPr txBox="1"/>
+          <p:nvPr/>
+        </p:nvSpPr>
+        <p:spPr>
+          <a:xfrm>
+            <a:off x="8302752" y="3630168"/>
+            <a:ext cx="2788920" cy="292608"/>
           </a:xfrm>
           <a:prstGeom prst="rect">
             <a:avLst/>
@@ -13372,27 +14414,110 @@
               </a:lnSpc>
             </a:pPr>
             <a:r>
-              <a:rPr sz="1000" b="0" i="1">
-                <a:solidFill>
-                  <a:srgbClr val="5B6472"/>
+              <a:rPr sz="1000" b="1" i="0">
+                <a:solidFill>
+                  <a:srgbClr val="2563EB"/>
+                </a:solidFill>
+                <a:latin typeface="Consolas"/>
+              </a:rPr>
+              <a:t>Rust・読み込みは起動時の 1 回だけ</a:t>
+            </a:r>
+          </a:p>
+        </p:txBody>
+      </p:sp>
+      <p:sp>
+        <p:nvSpPr>
+          <p:cNvPr id="26" name="Down Arrow 25"/>
+          <p:cNvSpPr/>
+          <p:nvPr/>
+        </p:nvSpPr>
+        <p:spPr>
+          <a:xfrm>
+            <a:off x="5897880" y="4069080"/>
+            <a:ext cx="411480" cy="384048"/>
+          </a:xfrm>
+          <a:prstGeom prst="downArrow">
+            <a:avLst/>
+          </a:prstGeom>
+          <a:solidFill>
+            <a:srgbClr val="2563EB"/>
+          </a:solidFill>
+          <a:ln>
+            <a:noFill/>
+          </a:ln>
+          <a:effectLst/>
+        </p:spPr>
+        <p:style>
+          <a:lnRef idx="1">
+            <a:schemeClr val="accent1"/>
+          </a:lnRef>
+          <a:fillRef idx="3">
+            <a:schemeClr val="accent1"/>
+          </a:fillRef>
+          <a:effectRef idx="2">
+            <a:schemeClr val="accent1"/>
+          </a:effectRef>
+          <a:fontRef idx="minor">
+            <a:schemeClr val="lt1"/>
+          </a:fontRef>
+        </p:style>
+        <p:txBody>
+          <a:bodyPr rtlCol="0" anchor="ctr"/>
+          <a:lstStyle/>
+          <a:p>
+            <a:pPr algn="ctr"/>
+          </a:p>
+        </p:txBody>
+      </p:sp>
+      <p:sp>
+        <p:nvSpPr>
+          <p:cNvPr id="27" name="TextBox 26"/>
+          <p:cNvSpPr txBox="1"/>
+          <p:nvPr/>
+        </p:nvSpPr>
+        <p:spPr>
+          <a:xfrm>
+            <a:off x="6446520" y="4114800"/>
+            <a:ext cx="5029200" cy="365760"/>
+          </a:xfrm>
+          <a:prstGeom prst="rect">
+            <a:avLst/>
+          </a:prstGeom>
+          <a:noFill/>
+        </p:spPr>
+        <p:txBody>
+          <a:bodyPr wrap="square" lIns="0" rIns="0" tIns="0" bIns="0" anchor="t">
+            <a:spAutoFit/>
+          </a:bodyPr>
+          <a:lstStyle/>
+          <a:p>
+            <a:pPr algn="l">
+              <a:lnSpc>
+                <a:spcPct val="130000"/>
+              </a:lnSpc>
+            </a:pPr>
+            <a:r>
+              <a:rPr sz="1200" b="1" i="1">
+                <a:solidFill>
+                  <a:srgbClr val="1D4ED8"/>
                 </a:solidFill>
                 <a:latin typeface="Calibri"/>
               </a:rPr>
-              <a:t>(監査ポリシー改変)</a:t>
-            </a:r>
-          </a:p>
-        </p:txBody>
-      </p:sp>
-      <p:sp>
-        <p:nvSpPr>
-          <p:cNvPr id="24" name="Rounded Rectangle 23"/>
+              <a:t>スキャン実行中 — ログを 1 件ずつ処理</a:t>
+            </a:r>
+          </a:p>
+        </p:txBody>
+      </p:sp>
+      <p:sp>
+        <p:nvSpPr>
+          <p:cNvPr id="28" name="Rounded Rectangle 27"/>
           <p:cNvSpPr/>
           <p:nvPr/>
         </p:nvSpPr>
         <p:spPr>
           <a:xfrm>
-            <a:off x="9189720" y="2286000"/>
-            <a:ext cx="2697480" cy="2926080"/>
+            <a:off x="1280160" y="4526280"/>
+            <a:ext cx="4297680" cy="1417320"/>
           </a:xfrm>
           <a:prstGeom prst="roundRect">
             <a:avLst/>
@@ -13431,14 +14556,14 @@
       </p:sp>
       <p:sp>
         <p:nvSpPr>
-          <p:cNvPr id="25" name="Rectangle 24"/>
+          <p:cNvPr id="29" name="Rectangle 28"/>
           <p:cNvSpPr/>
           <p:nvPr/>
         </p:nvSpPr>
         <p:spPr>
           <a:xfrm>
-            <a:off x="9189720" y="2286000"/>
-            <a:ext cx="73152" cy="2926080"/>
+            <a:off x="1280160" y="4526280"/>
+            <a:ext cx="73152" cy="1417320"/>
           </a:xfrm>
           <a:prstGeom prst="rect">
             <a:avLst/>
@@ -13475,14 +14600,14 @@
       </p:sp>
       <p:sp>
         <p:nvSpPr>
-          <p:cNvPr id="26" name="TextBox 25"/>
-          <p:cNvSpPr txBox="1"/>
-          <p:nvPr/>
-        </p:nvSpPr>
-        <p:spPr>
-          <a:xfrm>
-            <a:off x="9372600" y="2468880"/>
-            <a:ext cx="914400" cy="640080"/>
+          <p:cNvPr id="30" name="TextBox 29"/>
+          <p:cNvSpPr txBox="1"/>
+          <p:nvPr/>
+        </p:nvSpPr>
+        <p:spPr>
+          <a:xfrm>
+            <a:off x="1481328" y="4672584"/>
+            <a:ext cx="731520" cy="548640"/>
           </a:xfrm>
           <a:prstGeom prst="rect">
             <a:avLst/>
@@ -13501,27 +14626,27 @@
               </a:lnSpc>
             </a:pPr>
             <a:r>
-              <a:rPr sz="3000" b="0" i="0">
+              <a:rPr sz="2300" b="0" i="0">
                 <a:solidFill>
                   <a:srgbClr val="2563EB"/>
                 </a:solidFill>
                 <a:latin typeface="Calibri"/>
               </a:rPr>
-              <a:t>🔑</a:t>
-            </a:r>
-          </a:p>
-        </p:txBody>
-      </p:sp>
-      <p:sp>
-        <p:nvSpPr>
-          <p:cNvPr id="27" name="TextBox 26"/>
-          <p:cNvSpPr txBox="1"/>
-          <p:nvPr/>
-        </p:nvSpPr>
-        <p:spPr>
-          <a:xfrm>
-            <a:off x="9372600" y="3154680"/>
-            <a:ext cx="2423160" cy="457200"/>
+              <a:t>🔍</a:t>
+            </a:r>
+          </a:p>
+        </p:txBody>
+      </p:sp>
+      <p:sp>
+        <p:nvSpPr>
+          <p:cNvPr id="31" name="TextBox 30"/>
+          <p:cNvSpPr txBox="1"/>
+          <p:nvPr/>
+        </p:nvSpPr>
+        <p:spPr>
+          <a:xfrm>
+            <a:off x="2121408" y="4709160"/>
+            <a:ext cx="3337560" cy="457200"/>
           </a:xfrm>
           <a:prstGeom prst="rect">
             <a:avLst/>
@@ -13540,27 +14665,27 @@
               </a:lnSpc>
             </a:pPr>
             <a:r>
-              <a:rPr sz="1700" b="1" i="0">
+              <a:rPr sz="1450" b="1" i="0">
                 <a:solidFill>
                   <a:srgbClr val="1F2937"/>
                 </a:solidFill>
                 <a:latin typeface="Cambria"/>
               </a:rPr>
-              <a:t>パスワード抜き取り</a:t>
-            </a:r>
-          </a:p>
-        </p:txBody>
-      </p:sp>
-      <p:sp>
-        <p:nvSpPr>
-          <p:cNvPr id="28" name="TextBox 27"/>
-          <p:cNvSpPr txBox="1"/>
-          <p:nvPr/>
-        </p:nvSpPr>
-        <p:spPr>
-          <a:xfrm>
-            <a:off x="9372600" y="3657600"/>
-            <a:ext cx="2331720" cy="868680"/>
+              <a:t>ログ 1 件ごとに照合</a:t>
+            </a:r>
+          </a:p>
+        </p:txBody>
+      </p:sp>
+      <p:sp>
+        <p:nvSpPr>
+          <p:cNvPr id="32" name="TextBox 31"/>
+          <p:cNvSpPr txBox="1"/>
+          <p:nvPr/>
+        </p:nvSpPr>
+        <p:spPr>
+          <a:xfrm>
+            <a:off x="1499616" y="5257800"/>
+            <a:ext cx="3886200" cy="320040"/>
           </a:xfrm>
           <a:prstGeom prst="rect">
             <a:avLst/>
@@ -13575,82 +14700,42 @@
           <a:p>
             <a:pPr algn="l">
               <a:lnSpc>
-                <a:spcPct val="140000"/>
+                <a:spcPct val="132000"/>
               </a:lnSpc>
             </a:pPr>
             <a:r>
               <a:rPr sz="1100" b="0" i="0">
                 <a:solidFill>
-                  <a:srgbClr val="1F2937"/>
+                  <a:srgbClr val="5B6472"/>
                 </a:solidFill>
                 <a:latin typeface="Calibri"/>
               </a:rPr>
-              <a:t>Windows が記憶している
-認証情報への不正アクセス</a:t>
-            </a:r>
-          </a:p>
-        </p:txBody>
-      </p:sp>
-      <p:sp>
-        <p:nvSpPr>
-          <p:cNvPr id="29" name="TextBox 28"/>
-          <p:cNvSpPr txBox="1"/>
-          <p:nvPr/>
-        </p:nvSpPr>
-        <p:spPr>
-          <a:xfrm>
-            <a:off x="9372600" y="4617720"/>
-            <a:ext cx="2331720" cy="365760"/>
-          </a:xfrm>
-          <a:prstGeom prst="rect">
-            <a:avLst/>
-          </a:prstGeom>
-          <a:noFill/>
-        </p:spPr>
-        <p:txBody>
-          <a:bodyPr wrap="square" lIns="0" rIns="0" tIns="0" bIns="0" anchor="t">
-            <a:spAutoFit/>
-          </a:bodyPr>
-          <a:lstStyle/>
-          <a:p>
-            <a:pPr algn="l">
-              <a:lnSpc>
-                <a:spcPct val="130000"/>
-              </a:lnSpc>
-            </a:pPr>
-            <a:r>
-              <a:rPr sz="1000" b="0" i="1">
-                <a:solidFill>
-                  <a:srgbClr val="5B6472"/>
-                </a:solidFill>
-                <a:latin typeface="Calibri"/>
-              </a:rPr>
-              <a:t>(LSASS ダンプ)</a:t>
-            </a:r>
-          </a:p>
-        </p:txBody>
-      </p:sp>
-      <p:sp>
-        <p:nvSpPr>
-          <p:cNvPr id="30" name="Rounded Rectangle 29"/>
+              <a:t>Sysmon EID 6 (ドライバ読込) の
+ハッシュを、記憶した表と突合。
+1 件あたりほぼ一瞬 (O(1))</a:t>
+            </a:r>
+          </a:p>
+        </p:txBody>
+      </p:sp>
+      <p:sp>
+        <p:nvSpPr>
+          <p:cNvPr id="33" name="Right Arrow 32"/>
           <p:cNvSpPr/>
           <p:nvPr/>
         </p:nvSpPr>
         <p:spPr>
           <a:xfrm>
-            <a:off x="548640" y="5486400"/>
-            <a:ext cx="11064240" cy="868680"/>
-          </a:xfrm>
-          <a:prstGeom prst="roundRect">
+            <a:off x="5650992" y="5029200"/>
+            <a:ext cx="502920" cy="365760"/>
+          </a:xfrm>
+          <a:prstGeom prst="rightArrow">
             <a:avLst/>
           </a:prstGeom>
           <a:solidFill>
-            <a:srgbClr val="E8F0FE"/>
+            <a:srgbClr val="5B6472"/>
           </a:solidFill>
-          <a:ln w="9525">
-            <a:solidFill>
-              <a:srgbClr val="E8F0FE"/>
-            </a:solidFill>
+          <a:ln>
+            <a:noFill/>
           </a:ln>
           <a:effectLst/>
         </p:spPr>
@@ -13678,22 +14763,112 @@
       </p:sp>
       <p:sp>
         <p:nvSpPr>
-          <p:cNvPr id="31" name="TextBox 30"/>
-          <p:cNvSpPr txBox="1"/>
-          <p:nvPr/>
-        </p:nvSpPr>
-        <p:spPr>
-          <a:xfrm>
-            <a:off x="868680" y="5486400"/>
-            <a:ext cx="10515600" cy="868680"/>
-          </a:xfrm>
-          <a:prstGeom prst="rect">
-            <a:avLst/>
-          </a:prstGeom>
-          <a:noFill/>
-        </p:spPr>
-        <p:txBody>
-          <a:bodyPr wrap="square" lIns="0" rIns="0" tIns="0" bIns="0" anchor="ctr">
+          <p:cNvPr id="34" name="Rounded Rectangle 33"/>
+          <p:cNvSpPr/>
+          <p:nvPr/>
+        </p:nvSpPr>
+        <p:spPr>
+          <a:xfrm>
+            <a:off x="6355080" y="4526280"/>
+            <a:ext cx="4297680" cy="1417320"/>
+          </a:xfrm>
+          <a:prstGeom prst="roundRect">
+            <a:avLst/>
+          </a:prstGeom>
+          <a:solidFill>
+            <a:srgbClr val="FFFFFF"/>
+          </a:solidFill>
+          <a:ln w="9525">
+            <a:solidFill>
+              <a:srgbClr val="DDE3EE"/>
+            </a:solidFill>
+          </a:ln>
+          <a:effectLst/>
+        </p:spPr>
+        <p:style>
+          <a:lnRef idx="1">
+            <a:schemeClr val="accent1"/>
+          </a:lnRef>
+          <a:fillRef idx="3">
+            <a:schemeClr val="accent1"/>
+          </a:fillRef>
+          <a:effectRef idx="2">
+            <a:schemeClr val="accent1"/>
+          </a:effectRef>
+          <a:fontRef idx="minor">
+            <a:schemeClr val="lt1"/>
+          </a:fontRef>
+        </p:style>
+        <p:txBody>
+          <a:bodyPr rtlCol="0" anchor="ctr"/>
+          <a:lstStyle/>
+          <a:p>
+            <a:pPr algn="ctr"/>
+          </a:p>
+        </p:txBody>
+      </p:sp>
+      <p:sp>
+        <p:nvSpPr>
+          <p:cNvPr id="35" name="Rectangle 34"/>
+          <p:cNvSpPr/>
+          <p:nvPr/>
+        </p:nvSpPr>
+        <p:spPr>
+          <a:xfrm>
+            <a:off x="6355080" y="4526280"/>
+            <a:ext cx="73152" cy="1417320"/>
+          </a:xfrm>
+          <a:prstGeom prst="rect">
+            <a:avLst/>
+          </a:prstGeom>
+          <a:solidFill>
+            <a:srgbClr val="DC2626"/>
+          </a:solidFill>
+          <a:ln>
+            <a:noFill/>
+          </a:ln>
+          <a:effectLst/>
+        </p:spPr>
+        <p:style>
+          <a:lnRef idx="1">
+            <a:schemeClr val="accent1"/>
+          </a:lnRef>
+          <a:fillRef idx="3">
+            <a:schemeClr val="accent1"/>
+          </a:fillRef>
+          <a:effectRef idx="2">
+            <a:schemeClr val="accent1"/>
+          </a:effectRef>
+          <a:fontRef idx="minor">
+            <a:schemeClr val="lt1"/>
+          </a:fontRef>
+        </p:style>
+        <p:txBody>
+          <a:bodyPr rtlCol="0" anchor="ctr"/>
+          <a:lstStyle/>
+          <a:p>
+            <a:pPr algn="ctr"/>
+          </a:p>
+        </p:txBody>
+      </p:sp>
+      <p:sp>
+        <p:nvSpPr>
+          <p:cNvPr id="36" name="TextBox 35"/>
+          <p:cNvSpPr txBox="1"/>
+          <p:nvPr/>
+        </p:nvSpPr>
+        <p:spPr>
+          <a:xfrm>
+            <a:off x="6556248" y="4672584"/>
+            <a:ext cx="731520" cy="548640"/>
+          </a:xfrm>
+          <a:prstGeom prst="rect">
+            <a:avLst/>
+          </a:prstGeom>
+          <a:noFill/>
+        </p:spPr>
+        <p:txBody>
+          <a:bodyPr wrap="square" lIns="0" rIns="0" tIns="0" bIns="0" anchor="t">
             <a:spAutoFit/>
           </a:bodyPr>
           <a:lstStyle/>
@@ -13704,20 +14879,139 @@
               </a:lnSpc>
             </a:pPr>
             <a:r>
-              <a:rPr sz="1350" b="0" i="0">
-                <a:solidFill>
-                  <a:srgbClr val="1F2937"/>
+              <a:rPr sz="2300" b="0" i="0">
+                <a:solidFill>
+                  <a:srgbClr val="DC2626"/>
                 </a:solidFill>
                 <a:latin typeface="Calibri"/>
               </a:rPr>
-              <a:t>誤検知を減らす工夫:  1 つの特徴では鳴らさず、複数の特徴が同時に揃ったときだけ警告する設計に。</a:t>
-            </a:r>
-          </a:p>
-        </p:txBody>
-      </p:sp>
-      <p:sp>
-        <p:nvSpPr>
-          <p:cNvPr id="32" name="TextBox 31"/>
+              <a:t>🚨</a:t>
+            </a:r>
+          </a:p>
+        </p:txBody>
+      </p:sp>
+      <p:sp>
+        <p:nvSpPr>
+          <p:cNvPr id="37" name="TextBox 36"/>
+          <p:cNvSpPr txBox="1"/>
+          <p:nvPr/>
+        </p:nvSpPr>
+        <p:spPr>
+          <a:xfrm>
+            <a:off x="7196328" y="4709160"/>
+            <a:ext cx="3337560" cy="457200"/>
+          </a:xfrm>
+          <a:prstGeom prst="rect">
+            <a:avLst/>
+          </a:prstGeom>
+          <a:noFill/>
+        </p:spPr>
+        <p:txBody>
+          <a:bodyPr wrap="square" lIns="0" rIns="0" tIns="0" bIns="0" anchor="t">
+            <a:spAutoFit/>
+          </a:bodyPr>
+          <a:lstStyle/>
+          <a:p>
+            <a:pPr algn="l">
+              <a:lnSpc>
+                <a:spcPct val="130000"/>
+              </a:lnSpc>
+            </a:pPr>
+            <a:r>
+              <a:rPr sz="1450" b="1" i="0">
+                <a:solidFill>
+                  <a:srgbClr val="DC2626"/>
+                </a:solidFill>
+                <a:latin typeface="Cambria"/>
+              </a:rPr>
+              <a:t>一致したら critical 通知</a:t>
+            </a:r>
+          </a:p>
+        </p:txBody>
+      </p:sp>
+      <p:sp>
+        <p:nvSpPr>
+          <p:cNvPr id="38" name="TextBox 37"/>
+          <p:cNvSpPr txBox="1"/>
+          <p:nvPr/>
+        </p:nvSpPr>
+        <p:spPr>
+          <a:xfrm>
+            <a:off x="6574536" y="5257800"/>
+            <a:ext cx="3886200" cy="320040"/>
+          </a:xfrm>
+          <a:prstGeom prst="rect">
+            <a:avLst/>
+          </a:prstGeom>
+          <a:noFill/>
+        </p:spPr>
+        <p:txBody>
+          <a:bodyPr wrap="square" lIns="0" rIns="0" tIns="0" bIns="0" anchor="t">
+            <a:spAutoFit/>
+          </a:bodyPr>
+          <a:lstStyle/>
+          <a:p>
+            <a:pPr algn="l">
+              <a:lnSpc>
+                <a:spcPct val="132000"/>
+              </a:lnSpc>
+            </a:pPr>
+            <a:r>
+              <a:rPr sz="1100" b="0" i="0">
+                <a:solidFill>
+                  <a:srgbClr val="5B6472"/>
+                </a:solidFill>
+                <a:latin typeface="Calibri"/>
+              </a:rPr>
+              <a:t>既知の悪用ドライバが読み込まれた
+= BYOVD 攻撃の痕跡。
+最高レベル (critical) で警告。</a:t>
+            </a:r>
+          </a:p>
+        </p:txBody>
+      </p:sp>
+      <p:sp>
+        <p:nvSpPr>
+          <p:cNvPr id="39" name="TextBox 38"/>
+          <p:cNvSpPr txBox="1"/>
+          <p:nvPr/>
+        </p:nvSpPr>
+        <p:spPr>
+          <a:xfrm>
+            <a:off x="548640" y="6053328"/>
+            <a:ext cx="11064240" cy="365760"/>
+          </a:xfrm>
+          <a:prstGeom prst="rect">
+            <a:avLst/>
+          </a:prstGeom>
+          <a:noFill/>
+        </p:spPr>
+        <p:txBody>
+          <a:bodyPr wrap="square" lIns="0" rIns="0" tIns="0" bIns="0" anchor="t">
+            <a:spAutoFit/>
+          </a:bodyPr>
+          <a:lstStyle/>
+          <a:p>
+            <a:pPr algn="l">
+              <a:lnSpc>
+                <a:spcPct val="130000"/>
+              </a:lnSpc>
+            </a:pPr>
+            <a:r>
+              <a:rPr sz="1150" b="1" i="0">
+                <a:solidFill>
+                  <a:srgbClr val="1D4ED8"/>
+                </a:solidFill>
+                <a:latin typeface="Calibri"/>
+              </a:rPr>
+              <a:t>ポイント:  リストが何万件に増えても照合速度は一定。ルール本文は 1 行のまま、リスト側を更新するだけで最新の脅威に追従できる。</a:t>
+            </a:r>
+          </a:p>
+        </p:txBody>
+      </p:sp>
+      <p:sp>
+        <p:nvSpPr>
+          <p:cNvPr id="40" name="TextBox 39"/>
           <p:cNvSpPr txBox="1"/>
           <p:nvPr/>
         </p:nvSpPr>
@@ -13749,7 +15043,7 @@
                 </a:solidFill>
                 <a:latin typeface="Calibri"/>
               </a:rPr>
-              <a:t>8 / 13</a:t>
+              <a:t>8 / 14</a:t>
             </a:r>
           </a:p>
         </p:txBody>
@@ -13850,7 +15144,7 @@
                 </a:solidFill>
                 <a:latin typeface="Calibri"/>
               </a:rPr>
-              <a:t>開発内容 3 / 3   (Python + JavaScript 約 8,000 行)</a:t>
+              <a:t>開発内容 2 / 3   (検知ルール)</a:t>
             </a:r>
           </a:p>
         </p:txBody>
@@ -13889,21 +15183,60 @@
                 </a:solidFill>
                 <a:latin typeface="Cambria"/>
               </a:rPr>
-              <a:t>③  結果を「読める」にする GUI をゼロから開発</a:t>
-            </a:r>
-          </a:p>
-        </p:txBody>
-      </p:sp>
-      <p:sp>
-        <p:nvSpPr>
-          <p:cNvPr id="5" name="Rounded Rectangle 4"/>
+              <a:t>②  攻撃を見抜く検知ルールを 13 本自作</a:t>
+            </a:r>
+          </a:p>
+        </p:txBody>
+      </p:sp>
+      <p:sp>
+        <p:nvSpPr>
+          <p:cNvPr id="5" name="TextBox 4"/>
+          <p:cNvSpPr txBox="1"/>
+          <p:nvPr/>
+        </p:nvSpPr>
+        <p:spPr>
+          <a:xfrm>
+            <a:off x="548640" y="1645920"/>
+            <a:ext cx="11064240" cy="457200"/>
+          </a:xfrm>
+          <a:prstGeom prst="rect">
+            <a:avLst/>
+          </a:prstGeom>
+          <a:noFill/>
+        </p:spPr>
+        <p:txBody>
+          <a:bodyPr wrap="square" lIns="0" rIns="0" tIns="0" bIns="0" anchor="t">
+            <a:spAutoFit/>
+          </a:bodyPr>
+          <a:lstStyle/>
+          <a:p>
+            <a:pPr algn="l">
+              <a:lnSpc>
+                <a:spcPct val="130000"/>
+              </a:lnSpc>
+            </a:pPr>
+            <a:r>
+              <a:rPr sz="1500" b="1" i="1">
+                <a:solidFill>
+                  <a:srgbClr val="1D4ED8"/>
+                </a:solidFill>
+                <a:latin typeface="Calibri"/>
+              </a:rPr>
+              <a:t>着眼点: 攻撃者は必ず「証拠隠し」をする。なら、消す行為そのものを検知すればいい。</a:t>
+            </a:r>
+          </a:p>
+        </p:txBody>
+      </p:sp>
+      <p:sp>
+        <p:nvSpPr>
+          <p:cNvPr id="6" name="Rounded Rectangle 5"/>
           <p:cNvSpPr/>
           <p:nvPr/>
         </p:nvSpPr>
         <p:spPr>
           <a:xfrm>
-            <a:off x="548640" y="1783080"/>
-            <a:ext cx="4846320" cy="1371600"/>
+            <a:off x="548640" y="2286000"/>
+            <a:ext cx="2697480" cy="2926080"/>
           </a:xfrm>
           <a:prstGeom prst="roundRect">
             <a:avLst/>
@@ -13942,14 +15275,14 @@
       </p:sp>
       <p:sp>
         <p:nvSpPr>
-          <p:cNvPr id="6" name="Rectangle 5"/>
+          <p:cNvPr id="7" name="Rectangle 6"/>
           <p:cNvSpPr/>
           <p:nvPr/>
         </p:nvSpPr>
         <p:spPr>
           <a:xfrm>
-            <a:off x="548640" y="1783080"/>
-            <a:ext cx="73152" cy="1371600"/>
+            <a:off x="548640" y="2286000"/>
+            <a:ext cx="73152" cy="2926080"/>
           </a:xfrm>
           <a:prstGeom prst="rect">
             <a:avLst/>
@@ -13986,14 +15319,14 @@
       </p:sp>
       <p:sp>
         <p:nvSpPr>
-          <p:cNvPr id="7" name="TextBox 6"/>
-          <p:cNvSpPr txBox="1"/>
-          <p:nvPr/>
-        </p:nvSpPr>
-        <p:spPr>
-          <a:xfrm>
-            <a:off x="777240" y="1947672"/>
-            <a:ext cx="731520" cy="640080"/>
+          <p:cNvPr id="8" name="TextBox 7"/>
+          <p:cNvSpPr txBox="1"/>
+          <p:nvPr/>
+        </p:nvSpPr>
+        <p:spPr>
+          <a:xfrm>
+            <a:off x="731520" y="2468880"/>
+            <a:ext cx="914400" cy="640080"/>
           </a:xfrm>
           <a:prstGeom prst="rect">
             <a:avLst/>
@@ -14012,27 +15345,27 @@
               </a:lnSpc>
             </a:pPr>
             <a:r>
-              <a:rPr sz="2600" b="0" i="0">
+              <a:rPr sz="3000" b="0" i="0">
                 <a:solidFill>
                   <a:srgbClr val="2563EB"/>
                 </a:solidFill>
                 <a:latin typeface="Calibri"/>
               </a:rPr>
-              <a:t>🇯🇵</a:t>
-            </a:r>
-          </a:p>
-        </p:txBody>
-      </p:sp>
-      <p:sp>
-        <p:nvSpPr>
-          <p:cNvPr id="8" name="TextBox 7"/>
-          <p:cNvSpPr txBox="1"/>
-          <p:nvPr/>
-        </p:nvSpPr>
-        <p:spPr>
-          <a:xfrm>
-            <a:off x="1554480" y="1929384"/>
-            <a:ext cx="3657600" cy="411480"/>
+              <a:t>🧹</a:t>
+            </a:r>
+          </a:p>
+        </p:txBody>
+      </p:sp>
+      <p:sp>
+        <p:nvSpPr>
+          <p:cNvPr id="9" name="TextBox 8"/>
+          <p:cNvSpPr txBox="1"/>
+          <p:nvPr/>
+        </p:nvSpPr>
+        <p:spPr>
+          <a:xfrm>
+            <a:off x="731520" y="3154680"/>
+            <a:ext cx="2423160" cy="457200"/>
           </a:xfrm>
           <a:prstGeom prst="rect">
             <a:avLst/>
@@ -14051,27 +15384,27 @@
               </a:lnSpc>
             </a:pPr>
             <a:r>
-              <a:rPr sz="1600" b="1" i="0">
+              <a:rPr sz="1700" b="1" i="0">
                 <a:solidFill>
                   <a:srgbClr val="1F2937"/>
                 </a:solidFill>
                 <a:latin typeface="Cambria"/>
               </a:rPr>
-              <a:t>日本語の解説付き</a:t>
-            </a:r>
-          </a:p>
-        </p:txBody>
-      </p:sp>
-      <p:sp>
-        <p:nvSpPr>
-          <p:cNvPr id="9" name="TextBox 8"/>
-          <p:cNvSpPr txBox="1"/>
-          <p:nvPr/>
-        </p:nvSpPr>
-        <p:spPr>
-          <a:xfrm>
-            <a:off x="1554480" y="2350008"/>
-            <a:ext cx="3703320" cy="731520"/>
+              <a:t>ログの消去</a:t>
+            </a:r>
+          </a:p>
+        </p:txBody>
+      </p:sp>
+      <p:sp>
+        <p:nvSpPr>
+          <p:cNvPr id="10" name="TextBox 9"/>
+          <p:cNvSpPr txBox="1"/>
+          <p:nvPr/>
+        </p:nvSpPr>
+        <p:spPr>
+          <a:xfrm>
+            <a:off x="731520" y="3657600"/>
+            <a:ext cx="2331720" cy="868680"/>
           </a:xfrm>
           <a:prstGeom prst="rect">
             <a:avLst/>
@@ -14086,32 +15419,71 @@
           <a:p>
             <a:pPr algn="l">
               <a:lnSpc>
-                <a:spcPct val="135000"/>
+                <a:spcPct val="140000"/>
               </a:lnSpc>
             </a:pPr>
             <a:r>
               <a:rPr sz="1100" b="0" i="0">
                 <a:solidFill>
+                  <a:srgbClr val="1F2937"/>
+                </a:solidFill>
+                <a:latin typeface="Calibri"/>
+              </a:rPr>
+              <a:t>調査の手がかりになる
+ログを消すコマンドの実行</a:t>
+            </a:r>
+          </a:p>
+        </p:txBody>
+      </p:sp>
+      <p:sp>
+        <p:nvSpPr>
+          <p:cNvPr id="11" name="TextBox 10"/>
+          <p:cNvSpPr txBox="1"/>
+          <p:nvPr/>
+        </p:nvSpPr>
+        <p:spPr>
+          <a:xfrm>
+            <a:off x="731520" y="4617720"/>
+            <a:ext cx="2331720" cy="365760"/>
+          </a:xfrm>
+          <a:prstGeom prst="rect">
+            <a:avLst/>
+          </a:prstGeom>
+          <a:noFill/>
+        </p:spPr>
+        <p:txBody>
+          <a:bodyPr wrap="square" lIns="0" rIns="0" tIns="0" bIns="0" anchor="t">
+            <a:spAutoFit/>
+          </a:bodyPr>
+          <a:lstStyle/>
+          <a:p>
+            <a:pPr algn="l">
+              <a:lnSpc>
+                <a:spcPct val="130000"/>
+              </a:lnSpc>
+            </a:pPr>
+            <a:r>
+              <a:rPr sz="1000" b="0" i="1">
+                <a:solidFill>
                   <a:srgbClr val="5B6472"/>
                 </a:solidFill>
                 <a:latin typeface="Calibri"/>
               </a:rPr>
-              <a:t>検知をクリックすると「何が起きた?
-次にどうする?」を日本語で表示</a:t>
-            </a:r>
-          </a:p>
-        </p:txBody>
-      </p:sp>
-      <p:sp>
-        <p:nvSpPr>
-          <p:cNvPr id="10" name="Rounded Rectangle 9"/>
+              <a:t>(wevtutil 等)</a:t>
+            </a:r>
+          </a:p>
+        </p:txBody>
+      </p:sp>
+      <p:sp>
+        <p:nvSpPr>
+          <p:cNvPr id="12" name="Rounded Rectangle 11"/>
           <p:cNvSpPr/>
           <p:nvPr/>
         </p:nvSpPr>
         <p:spPr>
           <a:xfrm>
-            <a:off x="548640" y="3337560"/>
-            <a:ext cx="4846320" cy="1371600"/>
+            <a:off x="3429000" y="2286000"/>
+            <a:ext cx="2697480" cy="2926080"/>
           </a:xfrm>
           <a:prstGeom prst="roundRect">
             <a:avLst/>
@@ -14150,14 +15522,14 @@
       </p:sp>
       <p:sp>
         <p:nvSpPr>
-          <p:cNvPr id="11" name="Rectangle 10"/>
+          <p:cNvPr id="13" name="Rectangle 12"/>
           <p:cNvSpPr/>
           <p:nvPr/>
         </p:nvSpPr>
         <p:spPr>
           <a:xfrm>
-            <a:off x="548640" y="3337560"/>
-            <a:ext cx="73152" cy="1371600"/>
+            <a:off x="3429000" y="2286000"/>
+            <a:ext cx="73152" cy="2926080"/>
           </a:xfrm>
           <a:prstGeom prst="rect">
             <a:avLst/>
@@ -14194,14 +15566,14 @@
       </p:sp>
       <p:sp>
         <p:nvSpPr>
-          <p:cNvPr id="12" name="TextBox 11"/>
-          <p:cNvSpPr txBox="1"/>
-          <p:nvPr/>
-        </p:nvSpPr>
-        <p:spPr>
-          <a:xfrm>
-            <a:off x="777240" y="3502152"/>
-            <a:ext cx="731520" cy="640080"/>
+          <p:cNvPr id="14" name="TextBox 13"/>
+          <p:cNvSpPr txBox="1"/>
+          <p:nvPr/>
+        </p:nvSpPr>
+        <p:spPr>
+          <a:xfrm>
+            <a:off x="3611880" y="2468880"/>
+            <a:ext cx="914400" cy="640080"/>
           </a:xfrm>
           <a:prstGeom prst="rect">
             <a:avLst/>
@@ -14220,27 +15592,27 @@
               </a:lnSpc>
             </a:pPr>
             <a:r>
-              <a:rPr sz="2600" b="0" i="0">
+              <a:rPr sz="3000" b="0" i="0">
                 <a:solidFill>
                   <a:srgbClr val="2563EB"/>
                 </a:solidFill>
                 <a:latin typeface="Calibri"/>
               </a:rPr>
-              <a:t>🚨</a:t>
-            </a:r>
-          </a:p>
-        </p:txBody>
-      </p:sp>
-      <p:sp>
-        <p:nvSpPr>
-          <p:cNvPr id="13" name="TextBox 12"/>
-          <p:cNvSpPr txBox="1"/>
-          <p:nvPr/>
-        </p:nvSpPr>
-        <p:spPr>
-          <a:xfrm>
-            <a:off x="1554480" y="3483864"/>
-            <a:ext cx="3657600" cy="411480"/>
+              <a:t>💣</a:t>
+            </a:r>
+          </a:p>
+        </p:txBody>
+      </p:sp>
+      <p:sp>
+        <p:nvSpPr>
+          <p:cNvPr id="15" name="TextBox 14"/>
+          <p:cNvSpPr txBox="1"/>
+          <p:nvPr/>
+        </p:nvSpPr>
+        <p:spPr>
+          <a:xfrm>
+            <a:off x="3611880" y="3154680"/>
+            <a:ext cx="2423160" cy="457200"/>
           </a:xfrm>
           <a:prstGeom prst="rect">
             <a:avLst/>
@@ -14259,27 +15631,27 @@
               </a:lnSpc>
             </a:pPr>
             <a:r>
-              <a:rPr sz="1600" b="1" i="0">
+              <a:rPr sz="1700" b="1" i="0">
                 <a:solidFill>
                   <a:srgbClr val="1F2937"/>
                 </a:solidFill>
                 <a:latin typeface="Cambria"/>
               </a:rPr>
-              <a:t>危険度ランキング</a:t>
-            </a:r>
-          </a:p>
-        </p:txBody>
-      </p:sp>
-      <p:sp>
-        <p:nvSpPr>
-          <p:cNvPr id="14" name="TextBox 13"/>
-          <p:cNvSpPr txBox="1"/>
-          <p:nvPr/>
-        </p:nvSpPr>
-        <p:spPr>
-          <a:xfrm>
-            <a:off x="1554480" y="3904487"/>
-            <a:ext cx="3703320" cy="731520"/>
+              <a:t>復元データの削除</a:t>
+            </a:r>
+          </a:p>
+        </p:txBody>
+      </p:sp>
+      <p:sp>
+        <p:nvSpPr>
+          <p:cNvPr id="16" name="TextBox 15"/>
+          <p:cNvSpPr txBox="1"/>
+          <p:nvPr/>
+        </p:nvSpPr>
+        <p:spPr>
+          <a:xfrm>
+            <a:off x="3611880" y="3657600"/>
+            <a:ext cx="2331720" cy="868680"/>
           </a:xfrm>
           <a:prstGeom prst="rect">
             <a:avLst/>
@@ -14294,32 +15666,71 @@
           <a:p>
             <a:pPr algn="l">
               <a:lnSpc>
-                <a:spcPct val="135000"/>
+                <a:spcPct val="140000"/>
               </a:lnSpc>
             </a:pPr>
             <a:r>
               <a:rPr sz="1100" b="0" i="0">
                 <a:solidFill>
+                  <a:srgbClr val="1F2937"/>
+                </a:solidFill>
+                <a:latin typeface="Calibri"/>
+              </a:rPr>
+              <a:t>バックアップを消す行為
+(ランサムウェアの前兆)</a:t>
+            </a:r>
+          </a:p>
+        </p:txBody>
+      </p:sp>
+      <p:sp>
+        <p:nvSpPr>
+          <p:cNvPr id="17" name="TextBox 16"/>
+          <p:cNvSpPr txBox="1"/>
+          <p:nvPr/>
+        </p:nvSpPr>
+        <p:spPr>
+          <a:xfrm>
+            <a:off x="3611880" y="4617720"/>
+            <a:ext cx="2331720" cy="365760"/>
+          </a:xfrm>
+          <a:prstGeom prst="rect">
+            <a:avLst/>
+          </a:prstGeom>
+          <a:noFill/>
+        </p:spPr>
+        <p:txBody>
+          <a:bodyPr wrap="square" lIns="0" rIns="0" tIns="0" bIns="0" anchor="t">
+            <a:spAutoFit/>
+          </a:bodyPr>
+          <a:lstStyle/>
+          <a:p>
+            <a:pPr algn="l">
+              <a:lnSpc>
+                <a:spcPct val="130000"/>
+              </a:lnSpc>
+            </a:pPr>
+            <a:r>
+              <a:rPr sz="1000" b="0" i="1">
+                <a:solidFill>
                   <a:srgbClr val="5B6472"/>
                 </a:solidFill>
                 <a:latin typeface="Calibri"/>
               </a:rPr>
-              <a:t>どの PC から調べるべきかを
-自動採点して並べ替え</a:t>
-            </a:r>
-          </a:p>
-        </p:txBody>
-      </p:sp>
-      <p:sp>
-        <p:nvSpPr>
-          <p:cNvPr id="15" name="Rounded Rectangle 14"/>
+              <a:t>(シャドウコピー削除)</a:t>
+            </a:r>
+          </a:p>
+        </p:txBody>
+      </p:sp>
+      <p:sp>
+        <p:nvSpPr>
+          <p:cNvPr id="18" name="Rounded Rectangle 17"/>
           <p:cNvSpPr/>
           <p:nvPr/>
         </p:nvSpPr>
         <p:spPr>
           <a:xfrm>
-            <a:off x="548640" y="4892040"/>
-            <a:ext cx="4846320" cy="1371600"/>
+            <a:off x="6309360" y="2286000"/>
+            <a:ext cx="2697480" cy="2926080"/>
           </a:xfrm>
           <a:prstGeom prst="roundRect">
             <a:avLst/>
@@ -14358,14 +15769,14 @@
       </p:sp>
       <p:sp>
         <p:nvSpPr>
-          <p:cNvPr id="16" name="Rectangle 15"/>
+          <p:cNvPr id="19" name="Rectangle 18"/>
           <p:cNvSpPr/>
           <p:nvPr/>
         </p:nvSpPr>
         <p:spPr>
           <a:xfrm>
-            <a:off x="548640" y="4892040"/>
-            <a:ext cx="73152" cy="1371600"/>
+            <a:off x="6309360" y="2286000"/>
+            <a:ext cx="73152" cy="2926080"/>
           </a:xfrm>
           <a:prstGeom prst="rect">
             <a:avLst/>
@@ -14402,14 +15813,14 @@
       </p:sp>
       <p:sp>
         <p:nvSpPr>
-          <p:cNvPr id="17" name="TextBox 16"/>
-          <p:cNvSpPr txBox="1"/>
-          <p:nvPr/>
-        </p:nvSpPr>
-        <p:spPr>
-          <a:xfrm>
-            <a:off x="777240" y="5056631"/>
-            <a:ext cx="731520" cy="640080"/>
+          <p:cNvPr id="20" name="TextBox 19"/>
+          <p:cNvSpPr txBox="1"/>
+          <p:nvPr/>
+        </p:nvSpPr>
+        <p:spPr>
+          <a:xfrm>
+            <a:off x="6492240" y="2468880"/>
+            <a:ext cx="914400" cy="640080"/>
           </a:xfrm>
           <a:prstGeom prst="rect">
             <a:avLst/>
@@ -14428,27 +15839,27 @@
               </a:lnSpc>
             </a:pPr>
             <a:r>
-              <a:rPr sz="2600" b="0" i="0">
+              <a:rPr sz="3000" b="0" i="0">
                 <a:solidFill>
                   <a:srgbClr val="2563EB"/>
                 </a:solidFill>
                 <a:latin typeface="Calibri"/>
               </a:rPr>
-              <a:t>📊</a:t>
-            </a:r>
-          </a:p>
-        </p:txBody>
-      </p:sp>
-      <p:sp>
-        <p:nvSpPr>
-          <p:cNvPr id="18" name="TextBox 17"/>
-          <p:cNvSpPr txBox="1"/>
-          <p:nvPr/>
-        </p:nvSpPr>
-        <p:spPr>
-          <a:xfrm>
-            <a:off x="1554480" y="5038344"/>
-            <a:ext cx="3657600" cy="411480"/>
+              <a:t>🙈</a:t>
+            </a:r>
+          </a:p>
+        </p:txBody>
+      </p:sp>
+      <p:sp>
+        <p:nvSpPr>
+          <p:cNvPr id="21" name="TextBox 20"/>
+          <p:cNvSpPr txBox="1"/>
+          <p:nvPr/>
+        </p:nvSpPr>
+        <p:spPr>
+          <a:xfrm>
+            <a:off x="6492240" y="3154680"/>
+            <a:ext cx="2423160" cy="457200"/>
           </a:xfrm>
           <a:prstGeom prst="rect">
             <a:avLst/>
@@ -14467,27 +15878,27 @@
               </a:lnSpc>
             </a:pPr>
             <a:r>
-              <a:rPr sz="1600" b="1" i="0">
+              <a:rPr sz="1700" b="1" i="0">
                 <a:solidFill>
                   <a:srgbClr val="1F2937"/>
                 </a:solidFill>
                 <a:latin typeface="Cambria"/>
               </a:rPr>
-              <a:t>全体が一目で</a:t>
-            </a:r>
-          </a:p>
-        </p:txBody>
-      </p:sp>
-      <p:sp>
-        <p:nvSpPr>
-          <p:cNvPr id="19" name="TextBox 18"/>
-          <p:cNvSpPr txBox="1"/>
-          <p:nvPr/>
-        </p:nvSpPr>
-        <p:spPr>
-          <a:xfrm>
-            <a:off x="1554480" y="5458968"/>
-            <a:ext cx="3703320" cy="731520"/>
+              <a:t>監視の無効化</a:t>
+            </a:r>
+          </a:p>
+        </p:txBody>
+      </p:sp>
+      <p:sp>
+        <p:nvSpPr>
+          <p:cNvPr id="22" name="TextBox 21"/>
+          <p:cNvSpPr txBox="1"/>
+          <p:nvPr/>
+        </p:nvSpPr>
+        <p:spPr>
+          <a:xfrm>
+            <a:off x="6492240" y="3657600"/>
+            <a:ext cx="2331720" cy="868680"/>
           </a:xfrm>
           <a:prstGeom prst="rect">
             <a:avLst/>
@@ -14502,94 +15913,396 @@
           <a:p>
             <a:pPr algn="l">
               <a:lnSpc>
-                <a:spcPct val="135000"/>
+                <a:spcPct val="140000"/>
               </a:lnSpc>
             </a:pPr>
             <a:r>
               <a:rPr sz="1100" b="0" i="0">
                 <a:solidFill>
+                  <a:srgbClr val="1F2937"/>
+                </a:solidFill>
+                <a:latin typeface="Calibri"/>
+              </a:rPr>
+              <a:t>ログを記録する機能や
+監査そのものを止める行為</a:t>
+            </a:r>
+          </a:p>
+        </p:txBody>
+      </p:sp>
+      <p:sp>
+        <p:nvSpPr>
+          <p:cNvPr id="23" name="TextBox 22"/>
+          <p:cNvSpPr txBox="1"/>
+          <p:nvPr/>
+        </p:nvSpPr>
+        <p:spPr>
+          <a:xfrm>
+            <a:off x="6492240" y="4617720"/>
+            <a:ext cx="2331720" cy="365760"/>
+          </a:xfrm>
+          <a:prstGeom prst="rect">
+            <a:avLst/>
+          </a:prstGeom>
+          <a:noFill/>
+        </p:spPr>
+        <p:txBody>
+          <a:bodyPr wrap="square" lIns="0" rIns="0" tIns="0" bIns="0" anchor="t">
+            <a:spAutoFit/>
+          </a:bodyPr>
+          <a:lstStyle/>
+          <a:p>
+            <a:pPr algn="l">
+              <a:lnSpc>
+                <a:spcPct val="130000"/>
+              </a:lnSpc>
+            </a:pPr>
+            <a:r>
+              <a:rPr sz="1000" b="0" i="1">
+                <a:solidFill>
                   <a:srgbClr val="5B6472"/>
                 </a:solidFill>
                 <a:latin typeface="Calibri"/>
               </a:rPr>
-              <a:t>重大度・時間の流れ・多い攻撃を
-グラフで俯瞰</a:t>
-            </a:r>
-          </a:p>
-        </p:txBody>
-      </p:sp>
-      <p:pic>
-        <p:nvPicPr>
-          <p:cNvPr id="20" name="Picture 19" descr="dashboard.png"/>
-          <p:cNvPicPr>
-            <a:picLocks noChangeAspect="1"/>
-          </p:cNvPicPr>
-          <p:nvPr/>
-        </p:nvPicPr>
-        <p:blipFill>
-          <a:blip r:embed="rId2"/>
-          <a:stretch>
-            <a:fillRect/>
-          </a:stretch>
-        </p:blipFill>
-        <p:spPr>
-          <a:xfrm>
-            <a:off x="6484620" y="1691640"/>
-            <a:ext cx="4450080" cy="4572000"/>
-          </a:xfrm>
-          <a:prstGeom prst="rect">
-            <a:avLst/>
-          </a:prstGeom>
-          <a:ln w="12700">
+              <a:t>(監査ポリシー改変)</a:t>
+            </a:r>
+          </a:p>
+        </p:txBody>
+      </p:sp>
+      <p:sp>
+        <p:nvSpPr>
+          <p:cNvPr id="24" name="Rounded Rectangle 23"/>
+          <p:cNvSpPr/>
+          <p:nvPr/>
+        </p:nvSpPr>
+        <p:spPr>
+          <a:xfrm>
+            <a:off x="9189720" y="2286000"/>
+            <a:ext cx="2697480" cy="2926080"/>
+          </a:xfrm>
+          <a:prstGeom prst="roundRect">
+            <a:avLst/>
+          </a:prstGeom>
+          <a:solidFill>
+            <a:srgbClr val="FFFFFF"/>
+          </a:solidFill>
+          <a:ln w="9525">
             <a:solidFill>
               <a:srgbClr val="DDE3EE"/>
             </a:solidFill>
           </a:ln>
           <a:effectLst/>
         </p:spPr>
-      </p:pic>
-      <p:sp>
-        <p:nvSpPr>
-          <p:cNvPr id="21" name="TextBox 20"/>
-          <p:cNvSpPr txBox="1"/>
-          <p:nvPr/>
-        </p:nvSpPr>
-        <p:spPr>
-          <a:xfrm>
-            <a:off x="5760720" y="6309360"/>
-            <a:ext cx="5897880" cy="320040"/>
-          </a:xfrm>
-          <a:prstGeom prst="rect">
-            <a:avLst/>
-          </a:prstGeom>
-          <a:noFill/>
-        </p:spPr>
-        <p:txBody>
-          <a:bodyPr wrap="square" lIns="0" rIns="0" tIns="0" bIns="0" anchor="t">
-            <a:spAutoFit/>
-          </a:bodyPr>
-          <a:lstStyle/>
-          <a:p>
-            <a:pPr algn="ctr">
-              <a:lnSpc>
-                <a:spcPct val="130000"/>
+        <p:style>
+          <a:lnRef idx="1">
+            <a:schemeClr val="accent1"/>
+          </a:lnRef>
+          <a:fillRef idx="3">
+            <a:schemeClr val="accent1"/>
+          </a:fillRef>
+          <a:effectRef idx="2">
+            <a:schemeClr val="accent1"/>
+          </a:effectRef>
+          <a:fontRef idx="minor">
+            <a:schemeClr val="lt1"/>
+          </a:fontRef>
+        </p:style>
+        <p:txBody>
+          <a:bodyPr rtlCol="0" anchor="ctr"/>
+          <a:lstStyle/>
+          <a:p>
+            <a:pPr algn="ctr"/>
+          </a:p>
+        </p:txBody>
+      </p:sp>
+      <p:sp>
+        <p:nvSpPr>
+          <p:cNvPr id="25" name="Rectangle 24"/>
+          <p:cNvSpPr/>
+          <p:nvPr/>
+        </p:nvSpPr>
+        <p:spPr>
+          <a:xfrm>
+            <a:off x="9189720" y="2286000"/>
+            <a:ext cx="73152" cy="2926080"/>
+          </a:xfrm>
+          <a:prstGeom prst="rect">
+            <a:avLst/>
+          </a:prstGeom>
+          <a:solidFill>
+            <a:srgbClr val="2563EB"/>
+          </a:solidFill>
+          <a:ln>
+            <a:noFill/>
+          </a:ln>
+          <a:effectLst/>
+        </p:spPr>
+        <p:style>
+          <a:lnRef idx="1">
+            <a:schemeClr val="accent1"/>
+          </a:lnRef>
+          <a:fillRef idx="3">
+            <a:schemeClr val="accent1"/>
+          </a:fillRef>
+          <a:effectRef idx="2">
+            <a:schemeClr val="accent1"/>
+          </a:effectRef>
+          <a:fontRef idx="minor">
+            <a:schemeClr val="lt1"/>
+          </a:fontRef>
+        </p:style>
+        <p:txBody>
+          <a:bodyPr rtlCol="0" anchor="ctr"/>
+          <a:lstStyle/>
+          <a:p>
+            <a:pPr algn="ctr"/>
+          </a:p>
+        </p:txBody>
+      </p:sp>
+      <p:sp>
+        <p:nvSpPr>
+          <p:cNvPr id="26" name="TextBox 25"/>
+          <p:cNvSpPr txBox="1"/>
+          <p:nvPr/>
+        </p:nvSpPr>
+        <p:spPr>
+          <a:xfrm>
+            <a:off x="9372600" y="2468880"/>
+            <a:ext cx="914400" cy="640080"/>
+          </a:xfrm>
+          <a:prstGeom prst="rect">
+            <a:avLst/>
+          </a:prstGeom>
+          <a:noFill/>
+        </p:spPr>
+        <p:txBody>
+          <a:bodyPr wrap="square" lIns="0" rIns="0" tIns="0" bIns="0" anchor="t">
+            <a:spAutoFit/>
+          </a:bodyPr>
+          <a:lstStyle/>
+          <a:p>
+            <a:pPr algn="l">
+              <a:lnSpc>
+                <a:spcPct val="130000"/>
+              </a:lnSpc>
+            </a:pPr>
+            <a:r>
+              <a:rPr sz="3000" b="0" i="0">
+                <a:solidFill>
+                  <a:srgbClr val="2563EB"/>
+                </a:solidFill>
+                <a:latin typeface="Calibri"/>
+              </a:rPr>
+              <a:t>🔑</a:t>
+            </a:r>
+          </a:p>
+        </p:txBody>
+      </p:sp>
+      <p:sp>
+        <p:nvSpPr>
+          <p:cNvPr id="27" name="TextBox 26"/>
+          <p:cNvSpPr txBox="1"/>
+          <p:nvPr/>
+        </p:nvSpPr>
+        <p:spPr>
+          <a:xfrm>
+            <a:off x="9372600" y="3154680"/>
+            <a:ext cx="2423160" cy="457200"/>
+          </a:xfrm>
+          <a:prstGeom prst="rect">
+            <a:avLst/>
+          </a:prstGeom>
+          <a:noFill/>
+        </p:spPr>
+        <p:txBody>
+          <a:bodyPr wrap="square" lIns="0" rIns="0" tIns="0" bIns="0" anchor="t">
+            <a:spAutoFit/>
+          </a:bodyPr>
+          <a:lstStyle/>
+          <a:p>
+            <a:pPr algn="l">
+              <a:lnSpc>
+                <a:spcPct val="130000"/>
+              </a:lnSpc>
+            </a:pPr>
+            <a:r>
+              <a:rPr sz="1700" b="1" i="0">
+                <a:solidFill>
+                  <a:srgbClr val="1F2937"/>
+                </a:solidFill>
+                <a:latin typeface="Cambria"/>
+              </a:rPr>
+              <a:t>パスワード抜き取り</a:t>
+            </a:r>
+          </a:p>
+        </p:txBody>
+      </p:sp>
+      <p:sp>
+        <p:nvSpPr>
+          <p:cNvPr id="28" name="TextBox 27"/>
+          <p:cNvSpPr txBox="1"/>
+          <p:nvPr/>
+        </p:nvSpPr>
+        <p:spPr>
+          <a:xfrm>
+            <a:off x="9372600" y="3657600"/>
+            <a:ext cx="2331720" cy="868680"/>
+          </a:xfrm>
+          <a:prstGeom prst="rect">
+            <a:avLst/>
+          </a:prstGeom>
+          <a:noFill/>
+        </p:spPr>
+        <p:txBody>
+          <a:bodyPr wrap="square" lIns="0" rIns="0" tIns="0" bIns="0" anchor="t">
+            <a:spAutoFit/>
+          </a:bodyPr>
+          <a:lstStyle/>
+          <a:p>
+            <a:pPr algn="l">
+              <a:lnSpc>
+                <a:spcPct val="140000"/>
               </a:lnSpc>
             </a:pPr>
             <a:r>
               <a:rPr sz="1100" b="0" i="0">
                 <a:solidFill>
+                  <a:srgbClr val="1F2937"/>
+                </a:solidFill>
+                <a:latin typeface="Calibri"/>
+              </a:rPr>
+              <a:t>Windows が記憶している
+認証情報への不正アクセス</a:t>
+            </a:r>
+          </a:p>
+        </p:txBody>
+      </p:sp>
+      <p:sp>
+        <p:nvSpPr>
+          <p:cNvPr id="29" name="TextBox 28"/>
+          <p:cNvSpPr txBox="1"/>
+          <p:nvPr/>
+        </p:nvSpPr>
+        <p:spPr>
+          <a:xfrm>
+            <a:off x="9372600" y="4617720"/>
+            <a:ext cx="2331720" cy="365760"/>
+          </a:xfrm>
+          <a:prstGeom prst="rect">
+            <a:avLst/>
+          </a:prstGeom>
+          <a:noFill/>
+        </p:spPr>
+        <p:txBody>
+          <a:bodyPr wrap="square" lIns="0" rIns="0" tIns="0" bIns="0" anchor="t">
+            <a:spAutoFit/>
+          </a:bodyPr>
+          <a:lstStyle/>
+          <a:p>
+            <a:pPr algn="l">
+              <a:lnSpc>
+                <a:spcPct val="130000"/>
+              </a:lnSpc>
+            </a:pPr>
+            <a:r>
+              <a:rPr sz="1000" b="0" i="1">
+                <a:solidFill>
                   <a:srgbClr val="5B6472"/>
                 </a:solidFill>
                 <a:latin typeface="Calibri"/>
               </a:rPr>
-              <a:t>▲ 実際の画面 (ブラウザで動作・データは外部に送らない)</a:t>
-            </a:r>
-          </a:p>
-        </p:txBody>
-      </p:sp>
-      <p:sp>
-        <p:nvSpPr>
-          <p:cNvPr id="22" name="TextBox 21"/>
+              <a:t>(LSASS ダンプ)</a:t>
+            </a:r>
+          </a:p>
+        </p:txBody>
+      </p:sp>
+      <p:sp>
+        <p:nvSpPr>
+          <p:cNvPr id="30" name="Rounded Rectangle 29"/>
+          <p:cNvSpPr/>
+          <p:nvPr/>
+        </p:nvSpPr>
+        <p:spPr>
+          <a:xfrm>
+            <a:off x="548640" y="5486400"/>
+            <a:ext cx="11064240" cy="868680"/>
+          </a:xfrm>
+          <a:prstGeom prst="roundRect">
+            <a:avLst/>
+          </a:prstGeom>
+          <a:solidFill>
+            <a:srgbClr val="E8F0FE"/>
+          </a:solidFill>
+          <a:ln w="9525">
+            <a:solidFill>
+              <a:srgbClr val="E8F0FE"/>
+            </a:solidFill>
+          </a:ln>
+          <a:effectLst/>
+        </p:spPr>
+        <p:style>
+          <a:lnRef idx="1">
+            <a:schemeClr val="accent1"/>
+          </a:lnRef>
+          <a:fillRef idx="3">
+            <a:schemeClr val="accent1"/>
+          </a:fillRef>
+          <a:effectRef idx="2">
+            <a:schemeClr val="accent1"/>
+          </a:effectRef>
+          <a:fontRef idx="minor">
+            <a:schemeClr val="lt1"/>
+          </a:fontRef>
+        </p:style>
+        <p:txBody>
+          <a:bodyPr rtlCol="0" anchor="ctr"/>
+          <a:lstStyle/>
+          <a:p>
+            <a:pPr algn="ctr"/>
+          </a:p>
+        </p:txBody>
+      </p:sp>
+      <p:sp>
+        <p:nvSpPr>
+          <p:cNvPr id="31" name="TextBox 30"/>
+          <p:cNvSpPr txBox="1"/>
+          <p:nvPr/>
+        </p:nvSpPr>
+        <p:spPr>
+          <a:xfrm>
+            <a:off x="868680" y="5486400"/>
+            <a:ext cx="10515600" cy="868680"/>
+          </a:xfrm>
+          <a:prstGeom prst="rect">
+            <a:avLst/>
+          </a:prstGeom>
+          <a:noFill/>
+        </p:spPr>
+        <p:txBody>
+          <a:bodyPr wrap="square" lIns="0" rIns="0" tIns="0" bIns="0" anchor="ctr">
+            <a:spAutoFit/>
+          </a:bodyPr>
+          <a:lstStyle/>
+          <a:p>
+            <a:pPr algn="l">
+              <a:lnSpc>
+                <a:spcPct val="130000"/>
+              </a:lnSpc>
+            </a:pPr>
+            <a:r>
+              <a:rPr sz="1350" b="0" i="0">
+                <a:solidFill>
+                  <a:srgbClr val="1F2937"/>
+                </a:solidFill>
+                <a:latin typeface="Calibri"/>
+              </a:rPr>
+              <a:t>誤検知を減らす工夫:  1 つの特徴では鳴らさず、複数の特徴が同時に揃ったときだけ警告する設計に。</a:t>
+            </a:r>
+          </a:p>
+        </p:txBody>
+      </p:sp>
+      <p:sp>
+        <p:nvSpPr>
+          <p:cNvPr id="32" name="TextBox 31"/>
           <p:cNvSpPr txBox="1"/>
           <p:nvPr/>
         </p:nvSpPr>
@@ -14621,7 +16334,7 @@
                 </a:solidFill>
                 <a:latin typeface="Calibri"/>
               </a:rPr>
-              <a:t>9 / 13</a:t>
+              <a:t>9 / 14</a:t>
             </a:r>
           </a:p>
         </p:txBody>

--- a/docs/presentation/pptx/hayabusa-plus.pptx
+++ b/docs/presentation/pptx/hayabusa-plus.pptx
@@ -19,6 +19,7 @@
     <p:sldId id="267" r:id="rId18"/>
     <p:sldId id="268" r:id="rId19"/>
     <p:sldId id="269" r:id="rId20"/>
+    <p:sldId id="270" r:id="rId21"/>
   </p:sldIdLst>
   <p:sldSz cx="12191695" cy="6858000" type="screen4x3"/>
   <p:notesSz cx="6858000" cy="9144000"/>
@@ -3560,7 +3561,7 @@
                 </a:solidFill>
                 <a:latin typeface="Calibri"/>
               </a:rPr>
-              <a:t>開発内容 3 / 3   (Python + JavaScript 約 8,000 行)</a:t>
+              <a:t>開発内容② の中身   (検知のしくみ)</a:t>
             </a:r>
           </a:p>
         </p:txBody>
@@ -3599,21 +3600,216 @@
                 </a:solidFill>
                 <a:latin typeface="Cambria"/>
               </a:rPr>
-              <a:t>③  結果を「読める」にする GUI をゼロから開発</a:t>
-            </a:r>
-          </a:p>
-        </p:txBody>
-      </p:sp>
-      <p:sp>
-        <p:nvSpPr>
-          <p:cNvPr id="5" name="Rounded Rectangle 4"/>
+              <a:t>ルールが実際に「見ている」もの</a:t>
+            </a:r>
+          </a:p>
+        </p:txBody>
+      </p:sp>
+      <p:sp>
+        <p:nvSpPr>
+          <p:cNvPr id="5" name="TextBox 4"/>
+          <p:cNvSpPr txBox="1"/>
+          <p:nvPr/>
+        </p:nvSpPr>
+        <p:spPr>
+          <a:xfrm>
+            <a:off x="548640" y="1591056"/>
+            <a:ext cx="11064240" cy="365760"/>
+          </a:xfrm>
+          <a:prstGeom prst="rect">
+            <a:avLst/>
+          </a:prstGeom>
+          <a:noFill/>
+        </p:spPr>
+        <p:txBody>
+          <a:bodyPr wrap="square" lIns="0" rIns="0" tIns="0" bIns="0" anchor="t">
+            <a:spAutoFit/>
+          </a:bodyPr>
+          <a:lstStyle/>
+          <a:p>
+            <a:pPr algn="l">
+              <a:lnSpc>
+                <a:spcPct val="130000"/>
+              </a:lnSpc>
+            </a:pPr>
+            <a:r>
+              <a:rPr sz="1400" b="0" i="1">
+                <a:solidFill>
+                  <a:srgbClr val="5B6472"/>
+                </a:solidFill>
+                <a:latin typeface="Calibri"/>
+              </a:rPr>
+              <a:t>攻撃者が必ず行う「証拠隠し・準備」を、ログのどの項目で捕まえているか。</a:t>
+            </a:r>
+          </a:p>
+        </p:txBody>
+      </p:sp>
+      <p:sp>
+        <p:nvSpPr>
+          <p:cNvPr id="6" name="TextBox 5"/>
+          <p:cNvSpPr txBox="1"/>
+          <p:nvPr/>
+        </p:nvSpPr>
+        <p:spPr>
+          <a:xfrm>
+            <a:off x="713232" y="1938528"/>
+            <a:ext cx="2194560" cy="274320"/>
+          </a:xfrm>
+          <a:prstGeom prst="rect">
+            <a:avLst/>
+          </a:prstGeom>
+          <a:noFill/>
+        </p:spPr>
+        <p:txBody>
+          <a:bodyPr wrap="square" lIns="0" rIns="0" tIns="0" bIns="0" anchor="t">
+            <a:spAutoFit/>
+          </a:bodyPr>
+          <a:lstStyle/>
+          <a:p>
+            <a:pPr algn="l">
+              <a:lnSpc>
+                <a:spcPct val="130000"/>
+              </a:lnSpc>
+            </a:pPr>
+            <a:r>
+              <a:rPr sz="1050" b="1" i="0">
+                <a:solidFill>
+                  <a:srgbClr val="1D4ED8"/>
+                </a:solidFill>
+                <a:latin typeface="Calibri"/>
+              </a:rPr>
+              <a:t>検知する行為</a:t>
+            </a:r>
+          </a:p>
+        </p:txBody>
+      </p:sp>
+      <p:sp>
+        <p:nvSpPr>
+          <p:cNvPr id="7" name="TextBox 6"/>
+          <p:cNvSpPr txBox="1"/>
+          <p:nvPr/>
+        </p:nvSpPr>
+        <p:spPr>
+          <a:xfrm>
+            <a:off x="2926080" y="1938528"/>
+            <a:ext cx="2286000" cy="274320"/>
+          </a:xfrm>
+          <a:prstGeom prst="rect">
+            <a:avLst/>
+          </a:prstGeom>
+          <a:noFill/>
+        </p:spPr>
+        <p:txBody>
+          <a:bodyPr wrap="square" lIns="0" rIns="0" tIns="0" bIns="0" anchor="t">
+            <a:spAutoFit/>
+          </a:bodyPr>
+          <a:lstStyle/>
+          <a:p>
+            <a:pPr algn="l">
+              <a:lnSpc>
+                <a:spcPct val="130000"/>
+              </a:lnSpc>
+            </a:pPr>
+            <a:r>
+              <a:rPr sz="1050" b="1" i="0">
+                <a:solidFill>
+                  <a:srgbClr val="1D4ED8"/>
+                </a:solidFill>
+                <a:latin typeface="Calibri"/>
+              </a:rPr>
+              <a:t>見るログ (種類)</a:t>
+            </a:r>
+          </a:p>
+        </p:txBody>
+      </p:sp>
+      <p:sp>
+        <p:nvSpPr>
+          <p:cNvPr id="8" name="TextBox 7"/>
+          <p:cNvSpPr txBox="1"/>
+          <p:nvPr/>
+        </p:nvSpPr>
+        <p:spPr>
+          <a:xfrm>
+            <a:off x="5349240" y="1938528"/>
+            <a:ext cx="3931920" cy="274320"/>
+          </a:xfrm>
+          <a:prstGeom prst="rect">
+            <a:avLst/>
+          </a:prstGeom>
+          <a:noFill/>
+        </p:spPr>
+        <p:txBody>
+          <a:bodyPr wrap="square" lIns="0" rIns="0" tIns="0" bIns="0" anchor="t">
+            <a:spAutoFit/>
+          </a:bodyPr>
+          <a:lstStyle/>
+          <a:p>
+            <a:pPr algn="l">
+              <a:lnSpc>
+                <a:spcPct val="130000"/>
+              </a:lnSpc>
+            </a:pPr>
+            <a:r>
+              <a:rPr sz="1050" b="1" i="0">
+                <a:solidFill>
+                  <a:srgbClr val="1D4ED8"/>
+                </a:solidFill>
+                <a:latin typeface="Calibri"/>
+              </a:rPr>
+              <a:t>注目する手がかり (ログの項目)</a:t>
+            </a:r>
+          </a:p>
+        </p:txBody>
+      </p:sp>
+      <p:sp>
+        <p:nvSpPr>
+          <p:cNvPr id="9" name="TextBox 8"/>
+          <p:cNvSpPr txBox="1"/>
+          <p:nvPr/>
+        </p:nvSpPr>
+        <p:spPr>
+          <a:xfrm>
+            <a:off x="9464040" y="1938528"/>
+            <a:ext cx="2103120" cy="274320"/>
+          </a:xfrm>
+          <a:prstGeom prst="rect">
+            <a:avLst/>
+          </a:prstGeom>
+          <a:noFill/>
+        </p:spPr>
+        <p:txBody>
+          <a:bodyPr wrap="square" lIns="0" rIns="0" tIns="0" bIns="0" anchor="t">
+            <a:spAutoFit/>
+          </a:bodyPr>
+          <a:lstStyle/>
+          <a:p>
+            <a:pPr algn="l">
+              <a:lnSpc>
+                <a:spcPct val="130000"/>
+              </a:lnSpc>
+            </a:pPr>
+            <a:r>
+              <a:rPr sz="1050" b="1" i="0">
+                <a:solidFill>
+                  <a:srgbClr val="1D4ED8"/>
+                </a:solidFill>
+                <a:latin typeface="Calibri"/>
+              </a:rPr>
+              <a:t>ひとこと</a:t>
+            </a:r>
+          </a:p>
+        </p:txBody>
+      </p:sp>
+      <p:sp>
+        <p:nvSpPr>
+          <p:cNvPr id="10" name="Rounded Rectangle 9"/>
           <p:cNvSpPr/>
           <p:nvPr/>
         </p:nvSpPr>
         <p:spPr>
           <a:xfrm>
-            <a:off x="548640" y="1783080"/>
-            <a:ext cx="4846320" cy="1371600"/>
+            <a:off x="548640" y="2286000"/>
+            <a:ext cx="11064240" cy="841248"/>
           </a:xfrm>
           <a:prstGeom prst="roundRect">
             <a:avLst/>
@@ -3652,20 +3848,20 @@
       </p:sp>
       <p:sp>
         <p:nvSpPr>
-          <p:cNvPr id="6" name="Rectangle 5"/>
+          <p:cNvPr id="11" name="Rectangle 10"/>
           <p:cNvSpPr/>
           <p:nvPr/>
         </p:nvSpPr>
         <p:spPr>
           <a:xfrm>
-            <a:off x="548640" y="1783080"/>
-            <a:ext cx="73152" cy="1371600"/>
+            <a:off x="548640" y="2286000"/>
+            <a:ext cx="73152" cy="841248"/>
           </a:xfrm>
           <a:prstGeom prst="rect">
             <a:avLst/>
           </a:prstGeom>
           <a:solidFill>
-            <a:srgbClr val="2563EB"/>
+            <a:srgbClr val="EA580C"/>
           </a:solidFill>
           <a:ln>
             <a:noFill/>
@@ -3696,132 +3892,251 @@
       </p:sp>
       <p:sp>
         <p:nvSpPr>
-          <p:cNvPr id="7" name="TextBox 6"/>
-          <p:cNvSpPr txBox="1"/>
-          <p:nvPr/>
-        </p:nvSpPr>
-        <p:spPr>
-          <a:xfrm>
-            <a:off x="777240" y="1947672"/>
-            <a:ext cx="731520" cy="640080"/>
-          </a:xfrm>
-          <a:prstGeom prst="rect">
-            <a:avLst/>
-          </a:prstGeom>
-          <a:noFill/>
-        </p:spPr>
-        <p:txBody>
-          <a:bodyPr wrap="square" lIns="0" rIns="0" tIns="0" bIns="0" anchor="t">
-            <a:spAutoFit/>
-          </a:bodyPr>
-          <a:lstStyle/>
-          <a:p>
-            <a:pPr algn="l">
-              <a:lnSpc>
-                <a:spcPct val="130000"/>
-              </a:lnSpc>
-            </a:pPr>
-            <a:r>
-              <a:rPr sz="2600" b="0" i="0">
-                <a:solidFill>
-                  <a:srgbClr val="2563EB"/>
+          <p:cNvPr id="12" name="TextBox 11"/>
+          <p:cNvSpPr txBox="1"/>
+          <p:nvPr/>
+        </p:nvSpPr>
+        <p:spPr>
+          <a:xfrm>
+            <a:off x="676656" y="2286000"/>
+            <a:ext cx="502920" cy="841248"/>
+          </a:xfrm>
+          <a:prstGeom prst="rect">
+            <a:avLst/>
+          </a:prstGeom>
+          <a:noFill/>
+        </p:spPr>
+        <p:txBody>
+          <a:bodyPr wrap="square" lIns="0" rIns="0" tIns="0" bIns="0" anchor="ctr">
+            <a:spAutoFit/>
+          </a:bodyPr>
+          <a:lstStyle/>
+          <a:p>
+            <a:pPr algn="l">
+              <a:lnSpc>
+                <a:spcPct val="130000"/>
+              </a:lnSpc>
+            </a:pPr>
+            <a:r>
+              <a:rPr sz="2000" b="0" i="0">
+                <a:solidFill>
+                  <a:srgbClr val="EA580C"/>
                 </a:solidFill>
                 <a:latin typeface="Calibri"/>
               </a:rPr>
-              <a:t>🇯🇵</a:t>
-            </a:r>
-          </a:p>
-        </p:txBody>
-      </p:sp>
-      <p:sp>
-        <p:nvSpPr>
-          <p:cNvPr id="8" name="TextBox 7"/>
-          <p:cNvSpPr txBox="1"/>
-          <p:nvPr/>
-        </p:nvSpPr>
-        <p:spPr>
-          <a:xfrm>
-            <a:off x="1554480" y="1929384"/>
-            <a:ext cx="3657600" cy="411480"/>
-          </a:xfrm>
-          <a:prstGeom prst="rect">
-            <a:avLst/>
-          </a:prstGeom>
-          <a:noFill/>
-        </p:spPr>
-        <p:txBody>
-          <a:bodyPr wrap="square" lIns="0" rIns="0" tIns="0" bIns="0" anchor="t">
-            <a:spAutoFit/>
-          </a:bodyPr>
-          <a:lstStyle/>
-          <a:p>
-            <a:pPr algn="l">
-              <a:lnSpc>
-                <a:spcPct val="130000"/>
-              </a:lnSpc>
-            </a:pPr>
-            <a:r>
-              <a:rPr sz="1600" b="1" i="0">
+              <a:t>🧹</a:t>
+            </a:r>
+          </a:p>
+        </p:txBody>
+      </p:sp>
+      <p:sp>
+        <p:nvSpPr>
+          <p:cNvPr id="13" name="TextBox 12"/>
+          <p:cNvSpPr txBox="1"/>
+          <p:nvPr/>
+        </p:nvSpPr>
+        <p:spPr>
+          <a:xfrm>
+            <a:off x="1188720" y="2441448"/>
+            <a:ext cx="1737360" cy="365760"/>
+          </a:xfrm>
+          <a:prstGeom prst="rect">
+            <a:avLst/>
+          </a:prstGeom>
+          <a:noFill/>
+        </p:spPr>
+        <p:txBody>
+          <a:bodyPr wrap="square" lIns="0" rIns="0" tIns="0" bIns="0" anchor="t">
+            <a:spAutoFit/>
+          </a:bodyPr>
+          <a:lstStyle/>
+          <a:p>
+            <a:pPr algn="l">
+              <a:lnSpc>
+                <a:spcPct val="130000"/>
+              </a:lnSpc>
+            </a:pPr>
+            <a:r>
+              <a:rPr sz="1150" b="1" i="0">
                 <a:solidFill>
                   <a:srgbClr val="1F2937"/>
                 </a:solidFill>
                 <a:latin typeface="Cambria"/>
               </a:rPr>
-              <a:t>日本語の解説付き</a:t>
-            </a:r>
-          </a:p>
-        </p:txBody>
-      </p:sp>
-      <p:sp>
-        <p:nvSpPr>
-          <p:cNvPr id="9" name="TextBox 8"/>
-          <p:cNvSpPr txBox="1"/>
-          <p:nvPr/>
-        </p:nvSpPr>
-        <p:spPr>
-          <a:xfrm>
-            <a:off x="1554480" y="2350008"/>
-            <a:ext cx="3703320" cy="731520"/>
-          </a:xfrm>
-          <a:prstGeom prst="rect">
-            <a:avLst/>
-          </a:prstGeom>
-          <a:noFill/>
-        </p:spPr>
-        <p:txBody>
-          <a:bodyPr wrap="square" lIns="0" rIns="0" tIns="0" bIns="0" anchor="t">
-            <a:spAutoFit/>
-          </a:bodyPr>
-          <a:lstStyle/>
-          <a:p>
-            <a:pPr algn="l">
-              <a:lnSpc>
-                <a:spcPct val="135000"/>
-              </a:lnSpc>
-            </a:pPr>
-            <a:r>
-              <a:rPr sz="1100" b="0" i="0">
+              <a:t>ログの消去</a:t>
+            </a:r>
+          </a:p>
+        </p:txBody>
+      </p:sp>
+      <p:sp>
+        <p:nvSpPr>
+          <p:cNvPr id="14" name="TextBox 13"/>
+          <p:cNvSpPr txBox="1"/>
+          <p:nvPr/>
+        </p:nvSpPr>
+        <p:spPr>
+          <a:xfrm>
+            <a:off x="1188720" y="2798064"/>
+            <a:ext cx="1737360" cy="274320"/>
+          </a:xfrm>
+          <a:prstGeom prst="rect">
+            <a:avLst/>
+          </a:prstGeom>
+          <a:noFill/>
+        </p:spPr>
+        <p:txBody>
+          <a:bodyPr wrap="square" lIns="0" rIns="0" tIns="0" bIns="0" anchor="t">
+            <a:spAutoFit/>
+          </a:bodyPr>
+          <a:lstStyle/>
+          <a:p>
+            <a:pPr algn="l">
+              <a:lnSpc>
+                <a:spcPct val="130000"/>
+              </a:lnSpc>
+            </a:pPr>
+            <a:r>
+              <a:rPr sz="900" b="1" i="0">
+                <a:solidFill>
+                  <a:srgbClr val="EA580C"/>
+                </a:solidFill>
+                <a:latin typeface="Consolas"/>
+              </a:rPr>
+              <a:t>high</a:t>
+            </a:r>
+          </a:p>
+        </p:txBody>
+      </p:sp>
+      <p:sp>
+        <p:nvSpPr>
+          <p:cNvPr id="15" name="TextBox 14"/>
+          <p:cNvSpPr txBox="1"/>
+          <p:nvPr/>
+        </p:nvSpPr>
+        <p:spPr>
+          <a:xfrm>
+            <a:off x="2926080" y="2286000"/>
+            <a:ext cx="2286000" cy="841248"/>
+          </a:xfrm>
+          <a:prstGeom prst="rect">
+            <a:avLst/>
+          </a:prstGeom>
+          <a:noFill/>
+        </p:spPr>
+        <p:txBody>
+          <a:bodyPr wrap="square" lIns="0" rIns="0" tIns="0" bIns="0" anchor="ctr">
+            <a:spAutoFit/>
+          </a:bodyPr>
+          <a:lstStyle/>
+          <a:p>
+            <a:pPr algn="l">
+              <a:lnSpc>
+                <a:spcPct val="122000"/>
+              </a:lnSpc>
+            </a:pPr>
+            <a:r>
+              <a:rPr sz="1050" b="0" i="0">
+                <a:solidFill>
+                  <a:srgbClr val="1F2937"/>
+                </a:solidFill>
+                <a:latin typeface="Calibri"/>
+              </a:rPr>
+              <a:t>プロセス起動
+Sysmon EID 1 / Security 4688</a:t>
+            </a:r>
+          </a:p>
+        </p:txBody>
+      </p:sp>
+      <p:sp>
+        <p:nvSpPr>
+          <p:cNvPr id="16" name="TextBox 15"/>
+          <p:cNvSpPr txBox="1"/>
+          <p:nvPr/>
+        </p:nvSpPr>
+        <p:spPr>
+          <a:xfrm>
+            <a:off x="5349240" y="2286000"/>
+            <a:ext cx="3931920" cy="841248"/>
+          </a:xfrm>
+          <a:prstGeom prst="rect">
+            <a:avLst/>
+          </a:prstGeom>
+          <a:noFill/>
+        </p:spPr>
+        <p:txBody>
+          <a:bodyPr wrap="square" lIns="0" rIns="0" tIns="0" bIns="0" anchor="ctr">
+            <a:spAutoFit/>
+          </a:bodyPr>
+          <a:lstStyle/>
+          <a:p>
+            <a:pPr algn="l">
+              <a:lnSpc>
+                <a:spcPct val="122000"/>
+              </a:lnSpc>
+            </a:pPr>
+            <a:r>
+              <a:rPr sz="1000" b="0" i="0">
+                <a:solidFill>
+                  <a:srgbClr val="1D4ED8"/>
+                </a:solidFill>
+                <a:latin typeface="Consolas"/>
+              </a:rPr>
+              <a:t>Image:  …\wevtutil.exe
+CommandLine:  " cl " (=消去)</a:t>
+            </a:r>
+          </a:p>
+        </p:txBody>
+      </p:sp>
+      <p:sp>
+        <p:nvSpPr>
+          <p:cNvPr id="17" name="TextBox 16"/>
+          <p:cNvSpPr txBox="1"/>
+          <p:nvPr/>
+        </p:nvSpPr>
+        <p:spPr>
+          <a:xfrm>
+            <a:off x="9464040" y="2286000"/>
+            <a:ext cx="2103120" cy="841248"/>
+          </a:xfrm>
+          <a:prstGeom prst="rect">
+            <a:avLst/>
+          </a:prstGeom>
+          <a:noFill/>
+        </p:spPr>
+        <p:txBody>
+          <a:bodyPr wrap="square" lIns="0" rIns="0" tIns="0" bIns="0" anchor="ctr">
+            <a:spAutoFit/>
+          </a:bodyPr>
+          <a:lstStyle/>
+          <a:p>
+            <a:pPr algn="l">
+              <a:lnSpc>
+                <a:spcPct val="120000"/>
+              </a:lnSpc>
+            </a:pPr>
+            <a:r>
+              <a:rPr sz="1050" b="0" i="0">
                 <a:solidFill>
                   <a:srgbClr val="5B6472"/>
                 </a:solidFill>
                 <a:latin typeface="Calibri"/>
               </a:rPr>
-              <a:t>検知をクリックすると「何が起きた?
-次にどうする?」を日本語で表示</a:t>
-            </a:r>
-          </a:p>
-        </p:txBody>
-      </p:sp>
-      <p:sp>
-        <p:nvSpPr>
-          <p:cNvPr id="10" name="Rounded Rectangle 9"/>
+              <a:t>消すコマンド
+自体がログに残る</a:t>
+            </a:r>
+          </a:p>
+        </p:txBody>
+      </p:sp>
+      <p:sp>
+        <p:nvSpPr>
+          <p:cNvPr id="18" name="Rounded Rectangle 17"/>
           <p:cNvSpPr/>
           <p:nvPr/>
         </p:nvSpPr>
         <p:spPr>
           <a:xfrm>
-            <a:off x="548640" y="3337560"/>
-            <a:ext cx="4846320" cy="1371600"/>
+            <a:off x="548640" y="3172968"/>
+            <a:ext cx="11064240" cy="841248"/>
           </a:xfrm>
           <a:prstGeom prst="roundRect">
             <a:avLst/>
@@ -3860,20 +4175,20 @@
       </p:sp>
       <p:sp>
         <p:nvSpPr>
-          <p:cNvPr id="11" name="Rectangle 10"/>
+          <p:cNvPr id="19" name="Rectangle 18"/>
           <p:cNvSpPr/>
           <p:nvPr/>
         </p:nvSpPr>
         <p:spPr>
           <a:xfrm>
-            <a:off x="548640" y="3337560"/>
-            <a:ext cx="73152" cy="1371600"/>
+            <a:off x="548640" y="3172968"/>
+            <a:ext cx="73152" cy="841248"/>
           </a:xfrm>
           <a:prstGeom prst="rect">
             <a:avLst/>
           </a:prstGeom>
           <a:solidFill>
-            <a:srgbClr val="2563EB"/>
+            <a:srgbClr val="DC2626"/>
           </a:solidFill>
           <a:ln>
             <a:noFill/>
@@ -3904,132 +4219,251 @@
       </p:sp>
       <p:sp>
         <p:nvSpPr>
-          <p:cNvPr id="12" name="TextBox 11"/>
-          <p:cNvSpPr txBox="1"/>
-          <p:nvPr/>
-        </p:nvSpPr>
-        <p:spPr>
-          <a:xfrm>
-            <a:off x="777240" y="3502152"/>
-            <a:ext cx="731520" cy="640080"/>
-          </a:xfrm>
-          <a:prstGeom prst="rect">
-            <a:avLst/>
-          </a:prstGeom>
-          <a:noFill/>
-        </p:spPr>
-        <p:txBody>
-          <a:bodyPr wrap="square" lIns="0" rIns="0" tIns="0" bIns="0" anchor="t">
-            <a:spAutoFit/>
-          </a:bodyPr>
-          <a:lstStyle/>
-          <a:p>
-            <a:pPr algn="l">
-              <a:lnSpc>
-                <a:spcPct val="130000"/>
-              </a:lnSpc>
-            </a:pPr>
-            <a:r>
-              <a:rPr sz="2600" b="0" i="0">
-                <a:solidFill>
-                  <a:srgbClr val="2563EB"/>
+          <p:cNvPr id="20" name="TextBox 19"/>
+          <p:cNvSpPr txBox="1"/>
+          <p:nvPr/>
+        </p:nvSpPr>
+        <p:spPr>
+          <a:xfrm>
+            <a:off x="676656" y="3172968"/>
+            <a:ext cx="502920" cy="841248"/>
+          </a:xfrm>
+          <a:prstGeom prst="rect">
+            <a:avLst/>
+          </a:prstGeom>
+          <a:noFill/>
+        </p:spPr>
+        <p:txBody>
+          <a:bodyPr wrap="square" lIns="0" rIns="0" tIns="0" bIns="0" anchor="ctr">
+            <a:spAutoFit/>
+          </a:bodyPr>
+          <a:lstStyle/>
+          <a:p>
+            <a:pPr algn="l">
+              <a:lnSpc>
+                <a:spcPct val="130000"/>
+              </a:lnSpc>
+            </a:pPr>
+            <a:r>
+              <a:rPr sz="2000" b="0" i="0">
+                <a:solidFill>
+                  <a:srgbClr val="DC2626"/>
                 </a:solidFill>
                 <a:latin typeface="Calibri"/>
               </a:rPr>
-              <a:t>🚨</a:t>
-            </a:r>
-          </a:p>
-        </p:txBody>
-      </p:sp>
-      <p:sp>
-        <p:nvSpPr>
-          <p:cNvPr id="13" name="TextBox 12"/>
-          <p:cNvSpPr txBox="1"/>
-          <p:nvPr/>
-        </p:nvSpPr>
-        <p:spPr>
-          <a:xfrm>
-            <a:off x="1554480" y="3483864"/>
-            <a:ext cx="3657600" cy="411480"/>
-          </a:xfrm>
-          <a:prstGeom prst="rect">
-            <a:avLst/>
-          </a:prstGeom>
-          <a:noFill/>
-        </p:spPr>
-        <p:txBody>
-          <a:bodyPr wrap="square" lIns="0" rIns="0" tIns="0" bIns="0" anchor="t">
-            <a:spAutoFit/>
-          </a:bodyPr>
-          <a:lstStyle/>
-          <a:p>
-            <a:pPr algn="l">
-              <a:lnSpc>
-                <a:spcPct val="130000"/>
-              </a:lnSpc>
-            </a:pPr>
-            <a:r>
-              <a:rPr sz="1600" b="1" i="0">
+              <a:t>💣</a:t>
+            </a:r>
+          </a:p>
+        </p:txBody>
+      </p:sp>
+      <p:sp>
+        <p:nvSpPr>
+          <p:cNvPr id="21" name="TextBox 20"/>
+          <p:cNvSpPr txBox="1"/>
+          <p:nvPr/>
+        </p:nvSpPr>
+        <p:spPr>
+          <a:xfrm>
+            <a:off x="1188720" y="3328416"/>
+            <a:ext cx="1737360" cy="365760"/>
+          </a:xfrm>
+          <a:prstGeom prst="rect">
+            <a:avLst/>
+          </a:prstGeom>
+          <a:noFill/>
+        </p:spPr>
+        <p:txBody>
+          <a:bodyPr wrap="square" lIns="0" rIns="0" tIns="0" bIns="0" anchor="t">
+            <a:spAutoFit/>
+          </a:bodyPr>
+          <a:lstStyle/>
+          <a:p>
+            <a:pPr algn="l">
+              <a:lnSpc>
+                <a:spcPct val="130000"/>
+              </a:lnSpc>
+            </a:pPr>
+            <a:r>
+              <a:rPr sz="1150" b="1" i="0">
                 <a:solidFill>
                   <a:srgbClr val="1F2937"/>
                 </a:solidFill>
                 <a:latin typeface="Cambria"/>
               </a:rPr>
-              <a:t>危険度ランキング</a:t>
-            </a:r>
-          </a:p>
-        </p:txBody>
-      </p:sp>
-      <p:sp>
-        <p:nvSpPr>
-          <p:cNvPr id="14" name="TextBox 13"/>
-          <p:cNvSpPr txBox="1"/>
-          <p:nvPr/>
-        </p:nvSpPr>
-        <p:spPr>
-          <a:xfrm>
-            <a:off x="1554480" y="3904487"/>
-            <a:ext cx="3703320" cy="731520"/>
-          </a:xfrm>
-          <a:prstGeom prst="rect">
-            <a:avLst/>
-          </a:prstGeom>
-          <a:noFill/>
-        </p:spPr>
-        <p:txBody>
-          <a:bodyPr wrap="square" lIns="0" rIns="0" tIns="0" bIns="0" anchor="t">
-            <a:spAutoFit/>
-          </a:bodyPr>
-          <a:lstStyle/>
-          <a:p>
-            <a:pPr algn="l">
-              <a:lnSpc>
-                <a:spcPct val="135000"/>
-              </a:lnSpc>
-            </a:pPr>
-            <a:r>
-              <a:rPr sz="1100" b="0" i="0">
+              <a:t>復元データの削除</a:t>
+            </a:r>
+          </a:p>
+        </p:txBody>
+      </p:sp>
+      <p:sp>
+        <p:nvSpPr>
+          <p:cNvPr id="22" name="TextBox 21"/>
+          <p:cNvSpPr txBox="1"/>
+          <p:nvPr/>
+        </p:nvSpPr>
+        <p:spPr>
+          <a:xfrm>
+            <a:off x="1188720" y="3685032"/>
+            <a:ext cx="1737360" cy="274320"/>
+          </a:xfrm>
+          <a:prstGeom prst="rect">
+            <a:avLst/>
+          </a:prstGeom>
+          <a:noFill/>
+        </p:spPr>
+        <p:txBody>
+          <a:bodyPr wrap="square" lIns="0" rIns="0" tIns="0" bIns="0" anchor="t">
+            <a:spAutoFit/>
+          </a:bodyPr>
+          <a:lstStyle/>
+          <a:p>
+            <a:pPr algn="l">
+              <a:lnSpc>
+                <a:spcPct val="130000"/>
+              </a:lnSpc>
+            </a:pPr>
+            <a:r>
+              <a:rPr sz="900" b="1" i="0">
+                <a:solidFill>
+                  <a:srgbClr val="DC2626"/>
+                </a:solidFill>
+                <a:latin typeface="Consolas"/>
+              </a:rPr>
+              <a:t>critical</a:t>
+            </a:r>
+          </a:p>
+        </p:txBody>
+      </p:sp>
+      <p:sp>
+        <p:nvSpPr>
+          <p:cNvPr id="23" name="TextBox 22"/>
+          <p:cNvSpPr txBox="1"/>
+          <p:nvPr/>
+        </p:nvSpPr>
+        <p:spPr>
+          <a:xfrm>
+            <a:off x="2926080" y="3172968"/>
+            <a:ext cx="2286000" cy="841248"/>
+          </a:xfrm>
+          <a:prstGeom prst="rect">
+            <a:avLst/>
+          </a:prstGeom>
+          <a:noFill/>
+        </p:spPr>
+        <p:txBody>
+          <a:bodyPr wrap="square" lIns="0" rIns="0" tIns="0" bIns="0" anchor="ctr">
+            <a:spAutoFit/>
+          </a:bodyPr>
+          <a:lstStyle/>
+          <a:p>
+            <a:pPr algn="l">
+              <a:lnSpc>
+                <a:spcPct val="122000"/>
+              </a:lnSpc>
+            </a:pPr>
+            <a:r>
+              <a:rPr sz="1050" b="0" i="0">
+                <a:solidFill>
+                  <a:srgbClr val="1F2937"/>
+                </a:solidFill>
+                <a:latin typeface="Calibri"/>
+              </a:rPr>
+              <a:t>プロセス起動
+Sysmon EID 1</a:t>
+            </a:r>
+          </a:p>
+        </p:txBody>
+      </p:sp>
+      <p:sp>
+        <p:nvSpPr>
+          <p:cNvPr id="24" name="TextBox 23"/>
+          <p:cNvSpPr txBox="1"/>
+          <p:nvPr/>
+        </p:nvSpPr>
+        <p:spPr>
+          <a:xfrm>
+            <a:off x="5349240" y="3172968"/>
+            <a:ext cx="3931920" cy="841248"/>
+          </a:xfrm>
+          <a:prstGeom prst="rect">
+            <a:avLst/>
+          </a:prstGeom>
+          <a:noFill/>
+        </p:spPr>
+        <p:txBody>
+          <a:bodyPr wrap="square" lIns="0" rIns="0" tIns="0" bIns="0" anchor="ctr">
+            <a:spAutoFit/>
+          </a:bodyPr>
+          <a:lstStyle/>
+          <a:p>
+            <a:pPr algn="l">
+              <a:lnSpc>
+                <a:spcPct val="122000"/>
+              </a:lnSpc>
+            </a:pPr>
+            <a:r>
+              <a:rPr sz="1000" b="0" i="0">
+                <a:solidFill>
+                  <a:srgbClr val="1D4ED8"/>
+                </a:solidFill>
+                <a:latin typeface="Consolas"/>
+              </a:rPr>
+              <a:t>Image:  …\vssadmin.exe 等
+CommandLine:  delete + shadows</a:t>
+            </a:r>
+          </a:p>
+        </p:txBody>
+      </p:sp>
+      <p:sp>
+        <p:nvSpPr>
+          <p:cNvPr id="25" name="TextBox 24"/>
+          <p:cNvSpPr txBox="1"/>
+          <p:nvPr/>
+        </p:nvSpPr>
+        <p:spPr>
+          <a:xfrm>
+            <a:off x="9464040" y="3172968"/>
+            <a:ext cx="2103120" cy="841248"/>
+          </a:xfrm>
+          <a:prstGeom prst="rect">
+            <a:avLst/>
+          </a:prstGeom>
+          <a:noFill/>
+        </p:spPr>
+        <p:txBody>
+          <a:bodyPr wrap="square" lIns="0" rIns="0" tIns="0" bIns="0" anchor="ctr">
+            <a:spAutoFit/>
+          </a:bodyPr>
+          <a:lstStyle/>
+          <a:p>
+            <a:pPr algn="l">
+              <a:lnSpc>
+                <a:spcPct val="120000"/>
+              </a:lnSpc>
+            </a:pPr>
+            <a:r>
+              <a:rPr sz="1050" b="0" i="0">
                 <a:solidFill>
                   <a:srgbClr val="5B6472"/>
                 </a:solidFill>
                 <a:latin typeface="Calibri"/>
               </a:rPr>
-              <a:t>どの PC から調べるべきかを
-自動採点して並べ替え</a:t>
-            </a:r>
-          </a:p>
-        </p:txBody>
-      </p:sp>
-      <p:sp>
-        <p:nvSpPr>
-          <p:cNvPr id="15" name="Rounded Rectangle 14"/>
+              <a:t>ランサムウェア
+の前兆</a:t>
+            </a:r>
+          </a:p>
+        </p:txBody>
+      </p:sp>
+      <p:sp>
+        <p:nvSpPr>
+          <p:cNvPr id="26" name="Rounded Rectangle 25"/>
           <p:cNvSpPr/>
           <p:nvPr/>
         </p:nvSpPr>
         <p:spPr>
           <a:xfrm>
-            <a:off x="548640" y="4892040"/>
-            <a:ext cx="4846320" cy="1371600"/>
+            <a:off x="548640" y="4059936"/>
+            <a:ext cx="11064240" cy="841248"/>
           </a:xfrm>
           <a:prstGeom prst="roundRect">
             <a:avLst/>
@@ -4068,20 +4502,20 @@
       </p:sp>
       <p:sp>
         <p:nvSpPr>
-          <p:cNvPr id="16" name="Rectangle 15"/>
+          <p:cNvPr id="27" name="Rectangle 26"/>
           <p:cNvSpPr/>
           <p:nvPr/>
         </p:nvSpPr>
         <p:spPr>
           <a:xfrm>
-            <a:off x="548640" y="4892040"/>
-            <a:ext cx="73152" cy="1371600"/>
+            <a:off x="548640" y="4059936"/>
+            <a:ext cx="73152" cy="841248"/>
           </a:xfrm>
           <a:prstGeom prst="rect">
             <a:avLst/>
           </a:prstGeom>
           <a:solidFill>
-            <a:srgbClr val="2563EB"/>
+            <a:srgbClr val="EA580C"/>
           </a:solidFill>
           <a:ln>
             <a:noFill/>
@@ -4112,194 +4546,657 @@
       </p:sp>
       <p:sp>
         <p:nvSpPr>
-          <p:cNvPr id="17" name="TextBox 16"/>
-          <p:cNvSpPr txBox="1"/>
-          <p:nvPr/>
-        </p:nvSpPr>
-        <p:spPr>
-          <a:xfrm>
-            <a:off x="777240" y="5056631"/>
-            <a:ext cx="731520" cy="640080"/>
-          </a:xfrm>
-          <a:prstGeom prst="rect">
-            <a:avLst/>
-          </a:prstGeom>
-          <a:noFill/>
-        </p:spPr>
-        <p:txBody>
-          <a:bodyPr wrap="square" lIns="0" rIns="0" tIns="0" bIns="0" anchor="t">
-            <a:spAutoFit/>
-          </a:bodyPr>
-          <a:lstStyle/>
-          <a:p>
-            <a:pPr algn="l">
-              <a:lnSpc>
-                <a:spcPct val="130000"/>
-              </a:lnSpc>
-            </a:pPr>
-            <a:r>
-              <a:rPr sz="2600" b="0" i="0">
-                <a:solidFill>
-                  <a:srgbClr val="2563EB"/>
+          <p:cNvPr id="28" name="TextBox 27"/>
+          <p:cNvSpPr txBox="1"/>
+          <p:nvPr/>
+        </p:nvSpPr>
+        <p:spPr>
+          <a:xfrm>
+            <a:off x="676656" y="4059936"/>
+            <a:ext cx="502920" cy="841248"/>
+          </a:xfrm>
+          <a:prstGeom prst="rect">
+            <a:avLst/>
+          </a:prstGeom>
+          <a:noFill/>
+        </p:spPr>
+        <p:txBody>
+          <a:bodyPr wrap="square" lIns="0" rIns="0" tIns="0" bIns="0" anchor="ctr">
+            <a:spAutoFit/>
+          </a:bodyPr>
+          <a:lstStyle/>
+          <a:p>
+            <a:pPr algn="l">
+              <a:lnSpc>
+                <a:spcPct val="130000"/>
+              </a:lnSpc>
+            </a:pPr>
+            <a:r>
+              <a:rPr sz="2000" b="0" i="0">
+                <a:solidFill>
+                  <a:srgbClr val="EA580C"/>
                 </a:solidFill>
                 <a:latin typeface="Calibri"/>
               </a:rPr>
-              <a:t>📊</a:t>
-            </a:r>
-          </a:p>
-        </p:txBody>
-      </p:sp>
-      <p:sp>
-        <p:nvSpPr>
-          <p:cNvPr id="18" name="TextBox 17"/>
-          <p:cNvSpPr txBox="1"/>
-          <p:nvPr/>
-        </p:nvSpPr>
-        <p:spPr>
-          <a:xfrm>
-            <a:off x="1554480" y="5038344"/>
-            <a:ext cx="3657600" cy="411480"/>
-          </a:xfrm>
-          <a:prstGeom prst="rect">
-            <a:avLst/>
-          </a:prstGeom>
-          <a:noFill/>
-        </p:spPr>
-        <p:txBody>
-          <a:bodyPr wrap="square" lIns="0" rIns="0" tIns="0" bIns="0" anchor="t">
-            <a:spAutoFit/>
-          </a:bodyPr>
-          <a:lstStyle/>
-          <a:p>
-            <a:pPr algn="l">
-              <a:lnSpc>
-                <a:spcPct val="130000"/>
-              </a:lnSpc>
-            </a:pPr>
-            <a:r>
-              <a:rPr sz="1600" b="1" i="0">
+              <a:t>🙈</a:t>
+            </a:r>
+          </a:p>
+        </p:txBody>
+      </p:sp>
+      <p:sp>
+        <p:nvSpPr>
+          <p:cNvPr id="29" name="TextBox 28"/>
+          <p:cNvSpPr txBox="1"/>
+          <p:nvPr/>
+        </p:nvSpPr>
+        <p:spPr>
+          <a:xfrm>
+            <a:off x="1188720" y="4215384"/>
+            <a:ext cx="1737360" cy="365760"/>
+          </a:xfrm>
+          <a:prstGeom prst="rect">
+            <a:avLst/>
+          </a:prstGeom>
+          <a:noFill/>
+        </p:spPr>
+        <p:txBody>
+          <a:bodyPr wrap="square" lIns="0" rIns="0" tIns="0" bIns="0" anchor="t">
+            <a:spAutoFit/>
+          </a:bodyPr>
+          <a:lstStyle/>
+          <a:p>
+            <a:pPr algn="l">
+              <a:lnSpc>
+                <a:spcPct val="130000"/>
+              </a:lnSpc>
+            </a:pPr>
+            <a:r>
+              <a:rPr sz="1150" b="1" i="0">
                 <a:solidFill>
                   <a:srgbClr val="1F2937"/>
                 </a:solidFill>
                 <a:latin typeface="Cambria"/>
               </a:rPr>
-              <a:t>全体が一目で</a:t>
-            </a:r>
-          </a:p>
-        </p:txBody>
-      </p:sp>
-      <p:sp>
-        <p:nvSpPr>
-          <p:cNvPr id="19" name="TextBox 18"/>
-          <p:cNvSpPr txBox="1"/>
-          <p:nvPr/>
-        </p:nvSpPr>
-        <p:spPr>
-          <a:xfrm>
-            <a:off x="1554480" y="5458968"/>
-            <a:ext cx="3703320" cy="731520"/>
-          </a:xfrm>
-          <a:prstGeom prst="rect">
-            <a:avLst/>
-          </a:prstGeom>
-          <a:noFill/>
-        </p:spPr>
-        <p:txBody>
-          <a:bodyPr wrap="square" lIns="0" rIns="0" tIns="0" bIns="0" anchor="t">
-            <a:spAutoFit/>
-          </a:bodyPr>
-          <a:lstStyle/>
-          <a:p>
-            <a:pPr algn="l">
-              <a:lnSpc>
-                <a:spcPct val="135000"/>
-              </a:lnSpc>
-            </a:pPr>
-            <a:r>
-              <a:rPr sz="1100" b="0" i="0">
+              <a:t>監視の無効化</a:t>
+            </a:r>
+          </a:p>
+        </p:txBody>
+      </p:sp>
+      <p:sp>
+        <p:nvSpPr>
+          <p:cNvPr id="30" name="TextBox 29"/>
+          <p:cNvSpPr txBox="1"/>
+          <p:nvPr/>
+        </p:nvSpPr>
+        <p:spPr>
+          <a:xfrm>
+            <a:off x="1188720" y="4572000"/>
+            <a:ext cx="1737360" cy="274320"/>
+          </a:xfrm>
+          <a:prstGeom prst="rect">
+            <a:avLst/>
+          </a:prstGeom>
+          <a:noFill/>
+        </p:spPr>
+        <p:txBody>
+          <a:bodyPr wrap="square" lIns="0" rIns="0" tIns="0" bIns="0" anchor="t">
+            <a:spAutoFit/>
+          </a:bodyPr>
+          <a:lstStyle/>
+          <a:p>
+            <a:pPr algn="l">
+              <a:lnSpc>
+                <a:spcPct val="130000"/>
+              </a:lnSpc>
+            </a:pPr>
+            <a:r>
+              <a:rPr sz="900" b="1" i="0">
+                <a:solidFill>
+                  <a:srgbClr val="EA580C"/>
+                </a:solidFill>
+                <a:latin typeface="Consolas"/>
+              </a:rPr>
+              <a:t>high</a:t>
+            </a:r>
+          </a:p>
+        </p:txBody>
+      </p:sp>
+      <p:sp>
+        <p:nvSpPr>
+          <p:cNvPr id="31" name="TextBox 30"/>
+          <p:cNvSpPr txBox="1"/>
+          <p:nvPr/>
+        </p:nvSpPr>
+        <p:spPr>
+          <a:xfrm>
+            <a:off x="2926080" y="4059936"/>
+            <a:ext cx="2286000" cy="841248"/>
+          </a:xfrm>
+          <a:prstGeom prst="rect">
+            <a:avLst/>
+          </a:prstGeom>
+          <a:noFill/>
+        </p:spPr>
+        <p:txBody>
+          <a:bodyPr wrap="square" lIns="0" rIns="0" tIns="0" bIns="0" anchor="ctr">
+            <a:spAutoFit/>
+          </a:bodyPr>
+          <a:lstStyle/>
+          <a:p>
+            <a:pPr algn="l">
+              <a:lnSpc>
+                <a:spcPct val="122000"/>
+              </a:lnSpc>
+            </a:pPr>
+            <a:r>
+              <a:rPr sz="1050" b="0" i="0">
+                <a:solidFill>
+                  <a:srgbClr val="1F2937"/>
+                </a:solidFill>
+                <a:latin typeface="Calibri"/>
+              </a:rPr>
+              <a:t>監査ポリシー変更
+Security EID 4719</a:t>
+            </a:r>
+          </a:p>
+        </p:txBody>
+      </p:sp>
+      <p:sp>
+        <p:nvSpPr>
+          <p:cNvPr id="32" name="TextBox 31"/>
+          <p:cNvSpPr txBox="1"/>
+          <p:nvPr/>
+        </p:nvSpPr>
+        <p:spPr>
+          <a:xfrm>
+            <a:off x="5349240" y="4059936"/>
+            <a:ext cx="3931920" cy="841248"/>
+          </a:xfrm>
+          <a:prstGeom prst="rect">
+            <a:avLst/>
+          </a:prstGeom>
+          <a:noFill/>
+        </p:spPr>
+        <p:txBody>
+          <a:bodyPr wrap="square" lIns="0" rIns="0" tIns="0" bIns="0" anchor="ctr">
+            <a:spAutoFit/>
+          </a:bodyPr>
+          <a:lstStyle/>
+          <a:p>
+            <a:pPr algn="l">
+              <a:lnSpc>
+                <a:spcPct val="122000"/>
+              </a:lnSpc>
+            </a:pPr>
+            <a:r>
+              <a:rPr sz="1000" b="0" i="0">
+                <a:solidFill>
+                  <a:srgbClr val="1D4ED8"/>
+                </a:solidFill>
+                <a:latin typeface="Consolas"/>
+              </a:rPr>
+              <a:t>AuditPolicyChanges:
+Success/Failure removed
+(かつ人間のアカウント)</a:t>
+            </a:r>
+          </a:p>
+        </p:txBody>
+      </p:sp>
+      <p:sp>
+        <p:nvSpPr>
+          <p:cNvPr id="33" name="TextBox 32"/>
+          <p:cNvSpPr txBox="1"/>
+          <p:nvPr/>
+        </p:nvSpPr>
+        <p:spPr>
+          <a:xfrm>
+            <a:off x="9464040" y="4059936"/>
+            <a:ext cx="2103120" cy="841248"/>
+          </a:xfrm>
+          <a:prstGeom prst="rect">
+            <a:avLst/>
+          </a:prstGeom>
+          <a:noFill/>
+        </p:spPr>
+        <p:txBody>
+          <a:bodyPr wrap="square" lIns="0" rIns="0" tIns="0" bIns="0" anchor="ctr">
+            <a:spAutoFit/>
+          </a:bodyPr>
+          <a:lstStyle/>
+          <a:p>
+            <a:pPr algn="l">
+              <a:lnSpc>
+                <a:spcPct val="120000"/>
+              </a:lnSpc>
+            </a:pPr>
+            <a:r>
+              <a:rPr sz="1050" b="0" i="0">
                 <a:solidFill>
                   <a:srgbClr val="5B6472"/>
                 </a:solidFill>
                 <a:latin typeface="Calibri"/>
               </a:rPr>
-              <a:t>重大度・時間の流れ・多い攻撃を
-グラフで俯瞰</a:t>
-            </a:r>
-          </a:p>
-        </p:txBody>
-      </p:sp>
-      <p:pic>
-        <p:nvPicPr>
-          <p:cNvPr id="20" name="Picture 19" descr="dashboard.png"/>
-          <p:cNvPicPr>
-            <a:picLocks noChangeAspect="1"/>
-          </p:cNvPicPr>
-          <p:nvPr/>
-        </p:nvPicPr>
-        <p:blipFill>
-          <a:blip r:embed="rId2"/>
-          <a:stretch>
-            <a:fillRect/>
-          </a:stretch>
-        </p:blipFill>
-        <p:spPr>
-          <a:xfrm>
-            <a:off x="6484620" y="1691640"/>
-            <a:ext cx="4450080" cy="4572000"/>
-          </a:xfrm>
-          <a:prstGeom prst="rect">
-            <a:avLst/>
-          </a:prstGeom>
-          <a:ln w="12700">
+              <a:t>記録を止めた
+瞬間の 1 件</a:t>
+            </a:r>
+          </a:p>
+        </p:txBody>
+      </p:sp>
+      <p:sp>
+        <p:nvSpPr>
+          <p:cNvPr id="34" name="Rounded Rectangle 33"/>
+          <p:cNvSpPr/>
+          <p:nvPr/>
+        </p:nvSpPr>
+        <p:spPr>
+          <a:xfrm>
+            <a:off x="548640" y="4946904"/>
+            <a:ext cx="11064240" cy="841248"/>
+          </a:xfrm>
+          <a:prstGeom prst="roundRect">
+            <a:avLst/>
+          </a:prstGeom>
+          <a:solidFill>
+            <a:srgbClr val="FFFFFF"/>
+          </a:solidFill>
+          <a:ln w="9525">
             <a:solidFill>
               <a:srgbClr val="DDE3EE"/>
             </a:solidFill>
           </a:ln>
           <a:effectLst/>
         </p:spPr>
-      </p:pic>
-      <p:sp>
-        <p:nvSpPr>
-          <p:cNvPr id="21" name="TextBox 20"/>
-          <p:cNvSpPr txBox="1"/>
-          <p:nvPr/>
-        </p:nvSpPr>
-        <p:spPr>
-          <a:xfrm>
-            <a:off x="5760720" y="6309360"/>
-            <a:ext cx="5897880" cy="320040"/>
-          </a:xfrm>
-          <a:prstGeom prst="rect">
-            <a:avLst/>
-          </a:prstGeom>
-          <a:noFill/>
-        </p:spPr>
-        <p:txBody>
-          <a:bodyPr wrap="square" lIns="0" rIns="0" tIns="0" bIns="0" anchor="t">
-            <a:spAutoFit/>
-          </a:bodyPr>
-          <a:lstStyle/>
-          <a:p>
-            <a:pPr algn="ctr">
-              <a:lnSpc>
-                <a:spcPct val="130000"/>
-              </a:lnSpc>
-            </a:pPr>
-            <a:r>
-              <a:rPr sz="1100" b="0" i="0">
+        <p:style>
+          <a:lnRef idx="1">
+            <a:schemeClr val="accent1"/>
+          </a:lnRef>
+          <a:fillRef idx="3">
+            <a:schemeClr val="accent1"/>
+          </a:fillRef>
+          <a:effectRef idx="2">
+            <a:schemeClr val="accent1"/>
+          </a:effectRef>
+          <a:fontRef idx="minor">
+            <a:schemeClr val="lt1"/>
+          </a:fontRef>
+        </p:style>
+        <p:txBody>
+          <a:bodyPr rtlCol="0" anchor="ctr"/>
+          <a:lstStyle/>
+          <a:p>
+            <a:pPr algn="ctr"/>
+          </a:p>
+        </p:txBody>
+      </p:sp>
+      <p:sp>
+        <p:nvSpPr>
+          <p:cNvPr id="35" name="Rectangle 34"/>
+          <p:cNvSpPr/>
+          <p:nvPr/>
+        </p:nvSpPr>
+        <p:spPr>
+          <a:xfrm>
+            <a:off x="548640" y="4946904"/>
+            <a:ext cx="73152" cy="841248"/>
+          </a:xfrm>
+          <a:prstGeom prst="rect">
+            <a:avLst/>
+          </a:prstGeom>
+          <a:solidFill>
+            <a:srgbClr val="DC2626"/>
+          </a:solidFill>
+          <a:ln>
+            <a:noFill/>
+          </a:ln>
+          <a:effectLst/>
+        </p:spPr>
+        <p:style>
+          <a:lnRef idx="1">
+            <a:schemeClr val="accent1"/>
+          </a:lnRef>
+          <a:fillRef idx="3">
+            <a:schemeClr val="accent1"/>
+          </a:fillRef>
+          <a:effectRef idx="2">
+            <a:schemeClr val="accent1"/>
+          </a:effectRef>
+          <a:fontRef idx="minor">
+            <a:schemeClr val="lt1"/>
+          </a:fontRef>
+        </p:style>
+        <p:txBody>
+          <a:bodyPr rtlCol="0" anchor="ctr"/>
+          <a:lstStyle/>
+          <a:p>
+            <a:pPr algn="ctr"/>
+          </a:p>
+        </p:txBody>
+      </p:sp>
+      <p:sp>
+        <p:nvSpPr>
+          <p:cNvPr id="36" name="TextBox 35"/>
+          <p:cNvSpPr txBox="1"/>
+          <p:nvPr/>
+        </p:nvSpPr>
+        <p:spPr>
+          <a:xfrm>
+            <a:off x="676656" y="4946904"/>
+            <a:ext cx="502920" cy="841248"/>
+          </a:xfrm>
+          <a:prstGeom prst="rect">
+            <a:avLst/>
+          </a:prstGeom>
+          <a:noFill/>
+        </p:spPr>
+        <p:txBody>
+          <a:bodyPr wrap="square" lIns="0" rIns="0" tIns="0" bIns="0" anchor="ctr">
+            <a:spAutoFit/>
+          </a:bodyPr>
+          <a:lstStyle/>
+          <a:p>
+            <a:pPr algn="l">
+              <a:lnSpc>
+                <a:spcPct val="130000"/>
+              </a:lnSpc>
+            </a:pPr>
+            <a:r>
+              <a:rPr sz="2000" b="0" i="0">
+                <a:solidFill>
+                  <a:srgbClr val="DC2626"/>
+                </a:solidFill>
+                <a:latin typeface="Calibri"/>
+              </a:rPr>
+              <a:t>🔑</a:t>
+            </a:r>
+          </a:p>
+        </p:txBody>
+      </p:sp>
+      <p:sp>
+        <p:nvSpPr>
+          <p:cNvPr id="37" name="TextBox 36"/>
+          <p:cNvSpPr txBox="1"/>
+          <p:nvPr/>
+        </p:nvSpPr>
+        <p:spPr>
+          <a:xfrm>
+            <a:off x="1188720" y="5102352"/>
+            <a:ext cx="1737360" cy="365760"/>
+          </a:xfrm>
+          <a:prstGeom prst="rect">
+            <a:avLst/>
+          </a:prstGeom>
+          <a:noFill/>
+        </p:spPr>
+        <p:txBody>
+          <a:bodyPr wrap="square" lIns="0" rIns="0" tIns="0" bIns="0" anchor="t">
+            <a:spAutoFit/>
+          </a:bodyPr>
+          <a:lstStyle/>
+          <a:p>
+            <a:pPr algn="l">
+              <a:lnSpc>
+                <a:spcPct val="130000"/>
+              </a:lnSpc>
+            </a:pPr>
+            <a:r>
+              <a:rPr sz="1150" b="1" i="0">
+                <a:solidFill>
+                  <a:srgbClr val="1F2937"/>
+                </a:solidFill>
+                <a:latin typeface="Cambria"/>
+              </a:rPr>
+              <a:t>パスワード抜き取り</a:t>
+            </a:r>
+          </a:p>
+        </p:txBody>
+      </p:sp>
+      <p:sp>
+        <p:nvSpPr>
+          <p:cNvPr id="38" name="TextBox 37"/>
+          <p:cNvSpPr txBox="1"/>
+          <p:nvPr/>
+        </p:nvSpPr>
+        <p:spPr>
+          <a:xfrm>
+            <a:off x="1188720" y="5458968"/>
+            <a:ext cx="1737360" cy="274320"/>
+          </a:xfrm>
+          <a:prstGeom prst="rect">
+            <a:avLst/>
+          </a:prstGeom>
+          <a:noFill/>
+        </p:spPr>
+        <p:txBody>
+          <a:bodyPr wrap="square" lIns="0" rIns="0" tIns="0" bIns="0" anchor="t">
+            <a:spAutoFit/>
+          </a:bodyPr>
+          <a:lstStyle/>
+          <a:p>
+            <a:pPr algn="l">
+              <a:lnSpc>
+                <a:spcPct val="130000"/>
+              </a:lnSpc>
+            </a:pPr>
+            <a:r>
+              <a:rPr sz="900" b="1" i="0">
+                <a:solidFill>
+                  <a:srgbClr val="DC2626"/>
+                </a:solidFill>
+                <a:latin typeface="Consolas"/>
+              </a:rPr>
+              <a:t>critical</a:t>
+            </a:r>
+          </a:p>
+        </p:txBody>
+      </p:sp>
+      <p:sp>
+        <p:nvSpPr>
+          <p:cNvPr id="39" name="TextBox 38"/>
+          <p:cNvSpPr txBox="1"/>
+          <p:nvPr/>
+        </p:nvSpPr>
+        <p:spPr>
+          <a:xfrm>
+            <a:off x="2926080" y="4946904"/>
+            <a:ext cx="2286000" cy="841248"/>
+          </a:xfrm>
+          <a:prstGeom prst="rect">
+            <a:avLst/>
+          </a:prstGeom>
+          <a:noFill/>
+        </p:spPr>
+        <p:txBody>
+          <a:bodyPr wrap="square" lIns="0" rIns="0" tIns="0" bIns="0" anchor="ctr">
+            <a:spAutoFit/>
+          </a:bodyPr>
+          <a:lstStyle/>
+          <a:p>
+            <a:pPr algn="l">
+              <a:lnSpc>
+                <a:spcPct val="122000"/>
+              </a:lnSpc>
+            </a:pPr>
+            <a:r>
+              <a:rPr sz="1050" b="0" i="0">
+                <a:solidFill>
+                  <a:srgbClr val="1F2937"/>
+                </a:solidFill>
+                <a:latin typeface="Calibri"/>
+              </a:rPr>
+              <a:t>プロセス起動
+Sysmon EID 1</a:t>
+            </a:r>
+          </a:p>
+        </p:txBody>
+      </p:sp>
+      <p:sp>
+        <p:nvSpPr>
+          <p:cNvPr id="40" name="TextBox 39"/>
+          <p:cNvSpPr txBox="1"/>
+          <p:nvPr/>
+        </p:nvSpPr>
+        <p:spPr>
+          <a:xfrm>
+            <a:off x="5349240" y="4946904"/>
+            <a:ext cx="3931920" cy="841248"/>
+          </a:xfrm>
+          <a:prstGeom prst="rect">
+            <a:avLst/>
+          </a:prstGeom>
+          <a:noFill/>
+        </p:spPr>
+        <p:txBody>
+          <a:bodyPr wrap="square" lIns="0" rIns="0" tIns="0" bIns="0" anchor="ctr">
+            <a:spAutoFit/>
+          </a:bodyPr>
+          <a:lstStyle/>
+          <a:p>
+            <a:pPr algn="l">
+              <a:lnSpc>
+                <a:spcPct val="122000"/>
+              </a:lnSpc>
+            </a:pPr>
+            <a:r>
+              <a:rPr sz="1000" b="0" i="0">
+                <a:solidFill>
+                  <a:srgbClr val="1D4ED8"/>
+                </a:solidFill>
+                <a:latin typeface="Consolas"/>
+              </a:rPr>
+              <a:t>Image:  …\rundll32.exe
+CommandLine:  comsvcs + MiniDump</a:t>
+            </a:r>
+          </a:p>
+        </p:txBody>
+      </p:sp>
+      <p:sp>
+        <p:nvSpPr>
+          <p:cNvPr id="41" name="TextBox 40"/>
+          <p:cNvSpPr txBox="1"/>
+          <p:nvPr/>
+        </p:nvSpPr>
+        <p:spPr>
+          <a:xfrm>
+            <a:off x="9464040" y="4946904"/>
+            <a:ext cx="2103120" cy="841248"/>
+          </a:xfrm>
+          <a:prstGeom prst="rect">
+            <a:avLst/>
+          </a:prstGeom>
+          <a:noFill/>
+        </p:spPr>
+        <p:txBody>
+          <a:bodyPr wrap="square" lIns="0" rIns="0" tIns="0" bIns="0" anchor="ctr">
+            <a:spAutoFit/>
+          </a:bodyPr>
+          <a:lstStyle/>
+          <a:p>
+            <a:pPr algn="l">
+              <a:lnSpc>
+                <a:spcPct val="120000"/>
+              </a:lnSpc>
+            </a:pPr>
+            <a:r>
+              <a:rPr sz="1050" b="0" i="0">
                 <a:solidFill>
                   <a:srgbClr val="5B6472"/>
                 </a:solidFill>
                 <a:latin typeface="Calibri"/>
               </a:rPr>
-              <a:t>▲ 実際の画面 (ブラウザで動作・データは外部に送らない)</a:t>
-            </a:r>
-          </a:p>
-        </p:txBody>
-      </p:sp>
-      <p:sp>
-        <p:nvSpPr>
-          <p:cNvPr id="22" name="TextBox 21"/>
+              <a:t>正規ツールの
+悪用を見抜く</a:t>
+            </a:r>
+          </a:p>
+        </p:txBody>
+      </p:sp>
+      <p:sp>
+        <p:nvSpPr>
+          <p:cNvPr id="42" name="Rounded Rectangle 41"/>
+          <p:cNvSpPr/>
+          <p:nvPr/>
+        </p:nvSpPr>
+        <p:spPr>
+          <a:xfrm>
+            <a:off x="548640" y="5861304"/>
+            <a:ext cx="11064240" cy="502920"/>
+          </a:xfrm>
+          <a:prstGeom prst="roundRect">
+            <a:avLst/>
+          </a:prstGeom>
+          <a:solidFill>
+            <a:srgbClr val="E8F0FE"/>
+          </a:solidFill>
+          <a:ln w="9525">
+            <a:solidFill>
+              <a:srgbClr val="E8F0FE"/>
+            </a:solidFill>
+          </a:ln>
+          <a:effectLst/>
+        </p:spPr>
+        <p:style>
+          <a:lnRef idx="1">
+            <a:schemeClr val="accent1"/>
+          </a:lnRef>
+          <a:fillRef idx="3">
+            <a:schemeClr val="accent1"/>
+          </a:fillRef>
+          <a:effectRef idx="2">
+            <a:schemeClr val="accent1"/>
+          </a:effectRef>
+          <a:fontRef idx="minor">
+            <a:schemeClr val="lt1"/>
+          </a:fontRef>
+        </p:style>
+        <p:txBody>
+          <a:bodyPr rtlCol="0" anchor="ctr"/>
+          <a:lstStyle/>
+          <a:p>
+            <a:pPr algn="ctr"/>
+          </a:p>
+        </p:txBody>
+      </p:sp>
+      <p:sp>
+        <p:nvSpPr>
+          <p:cNvPr id="43" name="TextBox 42"/>
+          <p:cNvSpPr txBox="1"/>
+          <p:nvPr/>
+        </p:nvSpPr>
+        <p:spPr>
+          <a:xfrm>
+            <a:off x="868680" y="5861304"/>
+            <a:ext cx="10515600" cy="502920"/>
+          </a:xfrm>
+          <a:prstGeom prst="rect">
+            <a:avLst/>
+          </a:prstGeom>
+          <a:noFill/>
+        </p:spPr>
+        <p:txBody>
+          <a:bodyPr wrap="square" lIns="0" rIns="0" tIns="0" bIns="0" anchor="ctr">
+            <a:spAutoFit/>
+          </a:bodyPr>
+          <a:lstStyle/>
+          <a:p>
+            <a:pPr algn="l">
+              <a:lnSpc>
+                <a:spcPct val="120000"/>
+              </a:lnSpc>
+            </a:pPr>
+            <a:r>
+              <a:rPr sz="1150" b="0" i="0">
+                <a:solidFill>
+                  <a:srgbClr val="1F2937"/>
+                </a:solidFill>
+                <a:latin typeface="Calibri"/>
+              </a:rPr>
+              <a:t>共通の発想:  マルウェア本体は姿を変えられても、「ログ消去・復元点削除・監視停止・認証情報の窃取」は目的に直結し変えにくい。だから “行為そのもの” を見る。</a:t>
+            </a:r>
+          </a:p>
+        </p:txBody>
+      </p:sp>
+      <p:sp>
+        <p:nvSpPr>
+          <p:cNvPr id="44" name="TextBox 43"/>
           <p:cNvSpPr txBox="1"/>
           <p:nvPr/>
         </p:nvSpPr>
@@ -4331,7 +5228,7 @@
                 </a:solidFill>
                 <a:latin typeface="Calibri"/>
               </a:rPr>
-              <a:t>10 / 14</a:t>
+              <a:t>10 / 15</a:t>
             </a:r>
           </a:p>
         </p:txBody>
@@ -4432,7 +5329,7 @@
                 </a:solidFill>
                 <a:latin typeface="Calibri"/>
               </a:rPr>
-              <a:t>開発内容 +α   (自作の統計分析)</a:t>
+              <a:t>開発内容 3 / 3   (Python + JavaScript 約 8,000 行)</a:t>
             </a:r>
           </a:p>
         </p:txBody>
@@ -4471,60 +5368,21 @@
                 </a:solidFill>
                 <a:latin typeface="Cambria"/>
               </a:rPr>
-              <a:t>さらに: ルールでは書けない「いつもと違う」も検出</a:t>
-            </a:r>
-          </a:p>
-        </p:txBody>
-      </p:sp>
-      <p:sp>
-        <p:nvSpPr>
-          <p:cNvPr id="5" name="TextBox 4"/>
-          <p:cNvSpPr txBox="1"/>
-          <p:nvPr/>
-        </p:nvSpPr>
-        <p:spPr>
-          <a:xfrm>
-            <a:off x="548640" y="1600200"/>
-            <a:ext cx="10972800" cy="457200"/>
-          </a:xfrm>
-          <a:prstGeom prst="rect">
-            <a:avLst/>
-          </a:prstGeom>
-          <a:noFill/>
-        </p:spPr>
-        <p:txBody>
-          <a:bodyPr wrap="square" lIns="0" rIns="0" tIns="0" bIns="0" anchor="t">
-            <a:spAutoFit/>
-          </a:bodyPr>
-          <a:lstStyle/>
-          <a:p>
-            <a:pPr algn="l">
-              <a:lnSpc>
-                <a:spcPct val="130000"/>
-              </a:lnSpc>
-            </a:pPr>
-            <a:r>
-              <a:rPr sz="1500" b="0" i="1">
-                <a:solidFill>
-                  <a:srgbClr val="5B6472"/>
-                </a:solidFill>
-                <a:latin typeface="Calibri"/>
-              </a:rPr>
-              <a:t>ルールは 1 件ずつしか判定できない。そこで「全体の傾向」を統計で見る分析を自作しました。</a:t>
-            </a:r>
-          </a:p>
-        </p:txBody>
-      </p:sp>
-      <p:sp>
-        <p:nvSpPr>
-          <p:cNvPr id="6" name="Rounded Rectangle 5"/>
+              <a:t>③  結果を「読める」にする GUI をゼロから開発</a:t>
+            </a:r>
+          </a:p>
+        </p:txBody>
+      </p:sp>
+      <p:sp>
+        <p:nvSpPr>
+          <p:cNvPr id="5" name="Rounded Rectangle 4"/>
           <p:cNvSpPr/>
           <p:nvPr/>
         </p:nvSpPr>
         <p:spPr>
           <a:xfrm>
-            <a:off x="548640" y="2240280"/>
-            <a:ext cx="2697480" cy="2606040"/>
+            <a:off x="548640" y="1783080"/>
+            <a:ext cx="4846320" cy="1371600"/>
           </a:xfrm>
           <a:prstGeom prst="roundRect">
             <a:avLst/>
@@ -4563,14 +5421,14 @@
       </p:sp>
       <p:sp>
         <p:nvSpPr>
-          <p:cNvPr id="7" name="Rectangle 6"/>
+          <p:cNvPr id="6" name="Rectangle 5"/>
           <p:cNvSpPr/>
           <p:nvPr/>
         </p:nvSpPr>
         <p:spPr>
           <a:xfrm>
-            <a:off x="548640" y="2240280"/>
-            <a:ext cx="73152" cy="2606040"/>
+            <a:off x="548640" y="1783080"/>
+            <a:ext cx="73152" cy="1371600"/>
           </a:xfrm>
           <a:prstGeom prst="rect">
             <a:avLst/>
@@ -4607,171 +5465,132 @@
       </p:sp>
       <p:sp>
         <p:nvSpPr>
+          <p:cNvPr id="7" name="TextBox 6"/>
+          <p:cNvSpPr txBox="1"/>
+          <p:nvPr/>
+        </p:nvSpPr>
+        <p:spPr>
+          <a:xfrm>
+            <a:off x="777240" y="1947672"/>
+            <a:ext cx="731520" cy="640080"/>
+          </a:xfrm>
+          <a:prstGeom prst="rect">
+            <a:avLst/>
+          </a:prstGeom>
+          <a:noFill/>
+        </p:spPr>
+        <p:txBody>
+          <a:bodyPr wrap="square" lIns="0" rIns="0" tIns="0" bIns="0" anchor="t">
+            <a:spAutoFit/>
+          </a:bodyPr>
+          <a:lstStyle/>
+          <a:p>
+            <a:pPr algn="l">
+              <a:lnSpc>
+                <a:spcPct val="130000"/>
+              </a:lnSpc>
+            </a:pPr>
+            <a:r>
+              <a:rPr sz="2600" b="0" i="0">
+                <a:solidFill>
+                  <a:srgbClr val="2563EB"/>
+                </a:solidFill>
+                <a:latin typeface="Calibri"/>
+              </a:rPr>
+              <a:t>🇯🇵</a:t>
+            </a:r>
+          </a:p>
+        </p:txBody>
+      </p:sp>
+      <p:sp>
+        <p:nvSpPr>
           <p:cNvPr id="8" name="TextBox 7"/>
           <p:cNvSpPr txBox="1"/>
           <p:nvPr/>
         </p:nvSpPr>
         <p:spPr>
           <a:xfrm>
-            <a:off x="731520" y="2386584"/>
-            <a:ext cx="914400" cy="566928"/>
-          </a:xfrm>
-          <a:prstGeom prst="rect">
-            <a:avLst/>
-          </a:prstGeom>
-          <a:noFill/>
-        </p:spPr>
-        <p:txBody>
-          <a:bodyPr wrap="square" lIns="0" rIns="0" tIns="0" bIns="0" anchor="t">
-            <a:spAutoFit/>
-          </a:bodyPr>
-          <a:lstStyle/>
-          <a:p>
-            <a:pPr algn="l">
-              <a:lnSpc>
-                <a:spcPct val="130000"/>
-              </a:lnSpc>
-            </a:pPr>
-            <a:r>
-              <a:rPr sz="2600" b="0" i="0">
-                <a:solidFill>
-                  <a:srgbClr val="2563EB"/>
+            <a:off x="1554480" y="1929384"/>
+            <a:ext cx="3657600" cy="411480"/>
+          </a:xfrm>
+          <a:prstGeom prst="rect">
+            <a:avLst/>
+          </a:prstGeom>
+          <a:noFill/>
+        </p:spPr>
+        <p:txBody>
+          <a:bodyPr wrap="square" lIns="0" rIns="0" tIns="0" bIns="0" anchor="t">
+            <a:spAutoFit/>
+          </a:bodyPr>
+          <a:lstStyle/>
+          <a:p>
+            <a:pPr algn="l">
+              <a:lnSpc>
+                <a:spcPct val="130000"/>
+              </a:lnSpc>
+            </a:pPr>
+            <a:r>
+              <a:rPr sz="1600" b="1" i="0">
+                <a:solidFill>
+                  <a:srgbClr val="1F2937"/>
+                </a:solidFill>
+                <a:latin typeface="Cambria"/>
+              </a:rPr>
+              <a:t>日本語の解説付き</a:t>
+            </a:r>
+          </a:p>
+        </p:txBody>
+      </p:sp>
+      <p:sp>
+        <p:nvSpPr>
+          <p:cNvPr id="9" name="TextBox 8"/>
+          <p:cNvSpPr txBox="1"/>
+          <p:nvPr/>
+        </p:nvSpPr>
+        <p:spPr>
+          <a:xfrm>
+            <a:off x="1554480" y="2350008"/>
+            <a:ext cx="3703320" cy="731520"/>
+          </a:xfrm>
+          <a:prstGeom prst="rect">
+            <a:avLst/>
+          </a:prstGeom>
+          <a:noFill/>
+        </p:spPr>
+        <p:txBody>
+          <a:bodyPr wrap="square" lIns="0" rIns="0" tIns="0" bIns="0" anchor="t">
+            <a:spAutoFit/>
+          </a:bodyPr>
+          <a:lstStyle/>
+          <a:p>
+            <a:pPr algn="l">
+              <a:lnSpc>
+                <a:spcPct val="135000"/>
+              </a:lnSpc>
+            </a:pPr>
+            <a:r>
+              <a:rPr sz="1100" b="0" i="0">
+                <a:solidFill>
+                  <a:srgbClr val="5B6472"/>
                 </a:solidFill>
                 <a:latin typeface="Calibri"/>
               </a:rPr>
-              <a:t>🔥</a:t>
-            </a:r>
-          </a:p>
-        </p:txBody>
-      </p:sp>
-      <p:sp>
-        <p:nvSpPr>
-          <p:cNvPr id="9" name="TextBox 8"/>
-          <p:cNvSpPr txBox="1"/>
-          <p:nvPr/>
-        </p:nvSpPr>
-        <p:spPr>
-          <a:xfrm>
-            <a:off x="731520" y="2971800"/>
-            <a:ext cx="2423160" cy="457200"/>
-          </a:xfrm>
-          <a:prstGeom prst="rect">
-            <a:avLst/>
-          </a:prstGeom>
-          <a:noFill/>
-        </p:spPr>
-        <p:txBody>
-          <a:bodyPr wrap="square" lIns="0" rIns="0" tIns="0" bIns="0" anchor="t">
-            <a:spAutoFit/>
-          </a:bodyPr>
-          <a:lstStyle/>
-          <a:p>
-            <a:pPr algn="l">
-              <a:lnSpc>
-                <a:spcPct val="130000"/>
-              </a:lnSpc>
-            </a:pPr>
-            <a:r>
-              <a:rPr sz="1700" b="1" i="0">
-                <a:solidFill>
-                  <a:srgbClr val="1F2937"/>
-                </a:solidFill>
-                <a:latin typeface="Cambria"/>
-              </a:rPr>
-              <a:t>急増している</a:t>
-            </a:r>
-          </a:p>
-        </p:txBody>
-      </p:sp>
-      <p:sp>
-        <p:nvSpPr>
-          <p:cNvPr id="10" name="TextBox 9"/>
-          <p:cNvSpPr txBox="1"/>
-          <p:nvPr/>
-        </p:nvSpPr>
-        <p:spPr>
-          <a:xfrm>
-            <a:off x="731520" y="3456432"/>
-            <a:ext cx="2331720" cy="822960"/>
-          </a:xfrm>
-          <a:prstGeom prst="rect">
-            <a:avLst/>
-          </a:prstGeom>
-          <a:noFill/>
-        </p:spPr>
-        <p:txBody>
-          <a:bodyPr wrap="square" lIns="0" rIns="0" tIns="0" bIns="0" anchor="t">
-            <a:spAutoFit/>
-          </a:bodyPr>
-          <a:lstStyle/>
-          <a:p>
-            <a:pPr algn="l">
-              <a:lnSpc>
-                <a:spcPct val="140000"/>
-              </a:lnSpc>
-            </a:pPr>
-            <a:r>
-              <a:rPr sz="1100" b="0" i="0">
-                <a:solidFill>
-                  <a:srgbClr val="1F2937"/>
-                </a:solidFill>
-                <a:latin typeface="Calibri"/>
-              </a:rPr>
-              <a:t>平常の数十〜数千倍の
-動きが急に発生</a:t>
-            </a:r>
-          </a:p>
-        </p:txBody>
-      </p:sp>
-      <p:sp>
-        <p:nvSpPr>
-          <p:cNvPr id="11" name="TextBox 10"/>
-          <p:cNvSpPr txBox="1"/>
-          <p:nvPr/>
-        </p:nvSpPr>
-        <p:spPr>
-          <a:xfrm>
-            <a:off x="731520" y="4325112"/>
-            <a:ext cx="2331720" cy="457200"/>
-          </a:xfrm>
-          <a:prstGeom prst="rect">
-            <a:avLst/>
-          </a:prstGeom>
-          <a:noFill/>
-        </p:spPr>
-        <p:txBody>
-          <a:bodyPr wrap="square" lIns="0" rIns="0" tIns="0" bIns="0" anchor="t">
-            <a:spAutoFit/>
-          </a:bodyPr>
-          <a:lstStyle/>
-          <a:p>
-            <a:pPr algn="l">
-              <a:lnSpc>
-                <a:spcPct val="130000"/>
-              </a:lnSpc>
-            </a:pPr>
-            <a:r>
-              <a:rPr sz="1000" b="0" i="1">
-                <a:solidFill>
-                  <a:srgbClr val="5B6472"/>
-                </a:solidFill>
-                <a:latin typeface="Calibri"/>
-              </a:rPr>
-              <a:t>例: 大量のパスワード試行</a:t>
-            </a:r>
-          </a:p>
-        </p:txBody>
-      </p:sp>
-      <p:sp>
-        <p:nvSpPr>
-          <p:cNvPr id="12" name="Rounded Rectangle 11"/>
+              <a:t>検知をクリックすると「何が起きた?
+次にどうする?」を日本語で表示</a:t>
+            </a:r>
+          </a:p>
+        </p:txBody>
+      </p:sp>
+      <p:sp>
+        <p:nvSpPr>
+          <p:cNvPr id="10" name="Rounded Rectangle 9"/>
           <p:cNvSpPr/>
           <p:nvPr/>
         </p:nvSpPr>
         <p:spPr>
           <a:xfrm>
-            <a:off x="3429000" y="2240280"/>
-            <a:ext cx="2697480" cy="2606040"/>
+            <a:off x="548640" y="3337560"/>
+            <a:ext cx="4846320" cy="1371600"/>
           </a:xfrm>
           <a:prstGeom prst="roundRect">
             <a:avLst/>
@@ -4810,14 +5629,14 @@
       </p:sp>
       <p:sp>
         <p:nvSpPr>
-          <p:cNvPr id="13" name="Rectangle 12"/>
+          <p:cNvPr id="11" name="Rectangle 10"/>
           <p:cNvSpPr/>
           <p:nvPr/>
         </p:nvSpPr>
         <p:spPr>
           <a:xfrm>
-            <a:off x="3429000" y="2240280"/>
-            <a:ext cx="73152" cy="2606040"/>
+            <a:off x="548640" y="3337560"/>
+            <a:ext cx="73152" cy="1371600"/>
           </a:xfrm>
           <a:prstGeom prst="rect">
             <a:avLst/>
@@ -4854,171 +5673,132 @@
       </p:sp>
       <p:sp>
         <p:nvSpPr>
+          <p:cNvPr id="12" name="TextBox 11"/>
+          <p:cNvSpPr txBox="1"/>
+          <p:nvPr/>
+        </p:nvSpPr>
+        <p:spPr>
+          <a:xfrm>
+            <a:off x="777240" y="3502152"/>
+            <a:ext cx="731520" cy="640080"/>
+          </a:xfrm>
+          <a:prstGeom prst="rect">
+            <a:avLst/>
+          </a:prstGeom>
+          <a:noFill/>
+        </p:spPr>
+        <p:txBody>
+          <a:bodyPr wrap="square" lIns="0" rIns="0" tIns="0" bIns="0" anchor="t">
+            <a:spAutoFit/>
+          </a:bodyPr>
+          <a:lstStyle/>
+          <a:p>
+            <a:pPr algn="l">
+              <a:lnSpc>
+                <a:spcPct val="130000"/>
+              </a:lnSpc>
+            </a:pPr>
+            <a:r>
+              <a:rPr sz="2600" b="0" i="0">
+                <a:solidFill>
+                  <a:srgbClr val="2563EB"/>
+                </a:solidFill>
+                <a:latin typeface="Calibri"/>
+              </a:rPr>
+              <a:t>🚨</a:t>
+            </a:r>
+          </a:p>
+        </p:txBody>
+      </p:sp>
+      <p:sp>
+        <p:nvSpPr>
+          <p:cNvPr id="13" name="TextBox 12"/>
+          <p:cNvSpPr txBox="1"/>
+          <p:nvPr/>
+        </p:nvSpPr>
+        <p:spPr>
+          <a:xfrm>
+            <a:off x="1554480" y="3483864"/>
+            <a:ext cx="3657600" cy="411480"/>
+          </a:xfrm>
+          <a:prstGeom prst="rect">
+            <a:avLst/>
+          </a:prstGeom>
+          <a:noFill/>
+        </p:spPr>
+        <p:txBody>
+          <a:bodyPr wrap="square" lIns="0" rIns="0" tIns="0" bIns="0" anchor="t">
+            <a:spAutoFit/>
+          </a:bodyPr>
+          <a:lstStyle/>
+          <a:p>
+            <a:pPr algn="l">
+              <a:lnSpc>
+                <a:spcPct val="130000"/>
+              </a:lnSpc>
+            </a:pPr>
+            <a:r>
+              <a:rPr sz="1600" b="1" i="0">
+                <a:solidFill>
+                  <a:srgbClr val="1F2937"/>
+                </a:solidFill>
+                <a:latin typeface="Cambria"/>
+              </a:rPr>
+              <a:t>危険度ランキング</a:t>
+            </a:r>
+          </a:p>
+        </p:txBody>
+      </p:sp>
+      <p:sp>
+        <p:nvSpPr>
           <p:cNvPr id="14" name="TextBox 13"/>
           <p:cNvSpPr txBox="1"/>
           <p:nvPr/>
         </p:nvSpPr>
         <p:spPr>
           <a:xfrm>
-            <a:off x="3611880" y="2386584"/>
-            <a:ext cx="914400" cy="566928"/>
-          </a:xfrm>
-          <a:prstGeom prst="rect">
-            <a:avLst/>
-          </a:prstGeom>
-          <a:noFill/>
-        </p:spPr>
-        <p:txBody>
-          <a:bodyPr wrap="square" lIns="0" rIns="0" tIns="0" bIns="0" anchor="t">
-            <a:spAutoFit/>
-          </a:bodyPr>
-          <a:lstStyle/>
-          <a:p>
-            <a:pPr algn="l">
-              <a:lnSpc>
-                <a:spcPct val="130000"/>
-              </a:lnSpc>
-            </a:pPr>
-            <a:r>
-              <a:rPr sz="2600" b="0" i="0">
-                <a:solidFill>
-                  <a:srgbClr val="2563EB"/>
+            <a:off x="1554480" y="3904487"/>
+            <a:ext cx="3703320" cy="731520"/>
+          </a:xfrm>
+          <a:prstGeom prst="rect">
+            <a:avLst/>
+          </a:prstGeom>
+          <a:noFill/>
+        </p:spPr>
+        <p:txBody>
+          <a:bodyPr wrap="square" lIns="0" rIns="0" tIns="0" bIns="0" anchor="t">
+            <a:spAutoFit/>
+          </a:bodyPr>
+          <a:lstStyle/>
+          <a:p>
+            <a:pPr algn="l">
+              <a:lnSpc>
+                <a:spcPct val="135000"/>
+              </a:lnSpc>
+            </a:pPr>
+            <a:r>
+              <a:rPr sz="1100" b="0" i="0">
+                <a:solidFill>
+                  <a:srgbClr val="5B6472"/>
                 </a:solidFill>
                 <a:latin typeface="Calibri"/>
               </a:rPr>
-              <a:t>🌐</a:t>
-            </a:r>
-          </a:p>
-        </p:txBody>
-      </p:sp>
-      <p:sp>
-        <p:nvSpPr>
-          <p:cNvPr id="15" name="TextBox 14"/>
-          <p:cNvSpPr txBox="1"/>
-          <p:nvPr/>
-        </p:nvSpPr>
-        <p:spPr>
-          <a:xfrm>
-            <a:off x="3611880" y="2971800"/>
-            <a:ext cx="2423160" cy="457200"/>
-          </a:xfrm>
-          <a:prstGeom prst="rect">
-            <a:avLst/>
-          </a:prstGeom>
-          <a:noFill/>
-        </p:spPr>
-        <p:txBody>
-          <a:bodyPr wrap="square" lIns="0" rIns="0" tIns="0" bIns="0" anchor="t">
-            <a:spAutoFit/>
-          </a:bodyPr>
-          <a:lstStyle/>
-          <a:p>
-            <a:pPr algn="l">
-              <a:lnSpc>
-                <a:spcPct val="130000"/>
-              </a:lnSpc>
-            </a:pPr>
-            <a:r>
-              <a:rPr sz="1700" b="1" i="0">
-                <a:solidFill>
-                  <a:srgbClr val="1F2937"/>
-                </a:solidFill>
-                <a:latin typeface="Cambria"/>
-              </a:rPr>
-              <a:t>広がっている</a:t>
-            </a:r>
-          </a:p>
-        </p:txBody>
-      </p:sp>
-      <p:sp>
-        <p:nvSpPr>
-          <p:cNvPr id="16" name="TextBox 15"/>
-          <p:cNvSpPr txBox="1"/>
-          <p:nvPr/>
-        </p:nvSpPr>
-        <p:spPr>
-          <a:xfrm>
-            <a:off x="3611880" y="3456432"/>
-            <a:ext cx="2331720" cy="822960"/>
-          </a:xfrm>
-          <a:prstGeom prst="rect">
-            <a:avLst/>
-          </a:prstGeom>
-          <a:noFill/>
-        </p:spPr>
-        <p:txBody>
-          <a:bodyPr wrap="square" lIns="0" rIns="0" tIns="0" bIns="0" anchor="t">
-            <a:spAutoFit/>
-          </a:bodyPr>
-          <a:lstStyle/>
-          <a:p>
-            <a:pPr algn="l">
-              <a:lnSpc>
-                <a:spcPct val="140000"/>
-              </a:lnSpc>
-            </a:pPr>
-            <a:r>
-              <a:rPr sz="1100" b="0" i="0">
-                <a:solidFill>
-                  <a:srgbClr val="1F2937"/>
-                </a:solidFill>
-                <a:latin typeface="Calibri"/>
-              </a:rPr>
-              <a:t>同じ動きが
-複数の PC で同時発生</a:t>
-            </a:r>
-          </a:p>
-        </p:txBody>
-      </p:sp>
-      <p:sp>
-        <p:nvSpPr>
-          <p:cNvPr id="17" name="TextBox 16"/>
-          <p:cNvSpPr txBox="1"/>
-          <p:nvPr/>
-        </p:nvSpPr>
-        <p:spPr>
-          <a:xfrm>
-            <a:off x="3611880" y="4325112"/>
-            <a:ext cx="2331720" cy="457200"/>
-          </a:xfrm>
-          <a:prstGeom prst="rect">
-            <a:avLst/>
-          </a:prstGeom>
-          <a:noFill/>
-        </p:spPr>
-        <p:txBody>
-          <a:bodyPr wrap="square" lIns="0" rIns="0" tIns="0" bIns="0" anchor="t">
-            <a:spAutoFit/>
-          </a:bodyPr>
-          <a:lstStyle/>
-          <a:p>
-            <a:pPr algn="l">
-              <a:lnSpc>
-                <a:spcPct val="130000"/>
-              </a:lnSpc>
-            </a:pPr>
-            <a:r>
-              <a:rPr sz="1000" b="0" i="1">
-                <a:solidFill>
-                  <a:srgbClr val="5B6472"/>
-                </a:solidFill>
-                <a:latin typeface="Calibri"/>
-              </a:rPr>
-              <a:t>例: ウイルスが社内に拡大</a:t>
-            </a:r>
-          </a:p>
-        </p:txBody>
-      </p:sp>
-      <p:sp>
-        <p:nvSpPr>
-          <p:cNvPr id="18" name="Rounded Rectangle 17"/>
+              <a:t>どの PC から調べるべきかを
+自動採点して並べ替え</a:t>
+            </a:r>
+          </a:p>
+        </p:txBody>
+      </p:sp>
+      <p:sp>
+        <p:nvSpPr>
+          <p:cNvPr id="15" name="Rounded Rectangle 14"/>
           <p:cNvSpPr/>
           <p:nvPr/>
         </p:nvSpPr>
         <p:spPr>
           <a:xfrm>
-            <a:off x="6309360" y="2240280"/>
-            <a:ext cx="2697480" cy="2606040"/>
+            <a:off x="548640" y="4892040"/>
+            <a:ext cx="4846320" cy="1371600"/>
           </a:xfrm>
           <a:prstGeom prst="roundRect">
             <a:avLst/>
@@ -5057,14 +5837,14 @@
       </p:sp>
       <p:sp>
         <p:nvSpPr>
-          <p:cNvPr id="19" name="Rectangle 18"/>
+          <p:cNvPr id="16" name="Rectangle 15"/>
           <p:cNvSpPr/>
           <p:nvPr/>
         </p:nvSpPr>
         <p:spPr>
           <a:xfrm>
-            <a:off x="6309360" y="2240280"/>
-            <a:ext cx="73152" cy="2606040"/>
+            <a:off x="548640" y="4892040"/>
+            <a:ext cx="73152" cy="1371600"/>
           </a:xfrm>
           <a:prstGeom prst="rect">
             <a:avLst/>
@@ -5101,14 +5881,14 @@
       </p:sp>
       <p:sp>
         <p:nvSpPr>
-          <p:cNvPr id="20" name="TextBox 19"/>
-          <p:cNvSpPr txBox="1"/>
-          <p:nvPr/>
-        </p:nvSpPr>
-        <p:spPr>
-          <a:xfrm>
-            <a:off x="6492240" y="2386584"/>
-            <a:ext cx="914400" cy="566928"/>
+          <p:cNvPr id="17" name="TextBox 16"/>
+          <p:cNvSpPr txBox="1"/>
+          <p:nvPr/>
+        </p:nvSpPr>
+        <p:spPr>
+          <a:xfrm>
+            <a:off x="777240" y="5056631"/>
+            <a:ext cx="731520" cy="640080"/>
           </a:xfrm>
           <a:prstGeom prst="rect">
             <a:avLst/>
@@ -5133,627 +5913,162 @@
                 </a:solidFill>
                 <a:latin typeface="Calibri"/>
               </a:rPr>
-              <a:t>🤫</a:t>
-            </a:r>
-          </a:p>
-        </p:txBody>
-      </p:sp>
-      <p:sp>
-        <p:nvSpPr>
-          <p:cNvPr id="21" name="TextBox 20"/>
-          <p:cNvSpPr txBox="1"/>
-          <p:nvPr/>
-        </p:nvSpPr>
-        <p:spPr>
-          <a:xfrm>
-            <a:off x="6492240" y="2971800"/>
-            <a:ext cx="2423160" cy="457200"/>
-          </a:xfrm>
-          <a:prstGeom prst="rect">
-            <a:avLst/>
-          </a:prstGeom>
-          <a:noFill/>
-        </p:spPr>
-        <p:txBody>
-          <a:bodyPr wrap="square" lIns="0" rIns="0" tIns="0" bIns="0" anchor="t">
-            <a:spAutoFit/>
-          </a:bodyPr>
-          <a:lstStyle/>
-          <a:p>
-            <a:pPr algn="l">
-              <a:lnSpc>
-                <a:spcPct val="130000"/>
-              </a:lnSpc>
-            </a:pPr>
-            <a:r>
-              <a:rPr sz="1700" b="1" i="0">
+              <a:t>📊</a:t>
+            </a:r>
+          </a:p>
+        </p:txBody>
+      </p:sp>
+      <p:sp>
+        <p:nvSpPr>
+          <p:cNvPr id="18" name="TextBox 17"/>
+          <p:cNvSpPr txBox="1"/>
+          <p:nvPr/>
+        </p:nvSpPr>
+        <p:spPr>
+          <a:xfrm>
+            <a:off x="1554480" y="5038344"/>
+            <a:ext cx="3657600" cy="411480"/>
+          </a:xfrm>
+          <a:prstGeom prst="rect">
+            <a:avLst/>
+          </a:prstGeom>
+          <a:noFill/>
+        </p:spPr>
+        <p:txBody>
+          <a:bodyPr wrap="square" lIns="0" rIns="0" tIns="0" bIns="0" anchor="t">
+            <a:spAutoFit/>
+          </a:bodyPr>
+          <a:lstStyle/>
+          <a:p>
+            <a:pPr algn="l">
+              <a:lnSpc>
+                <a:spcPct val="130000"/>
+              </a:lnSpc>
+            </a:pPr>
+            <a:r>
+              <a:rPr sz="1600" b="1" i="0">
                 <a:solidFill>
                   <a:srgbClr val="1F2937"/>
                 </a:solidFill>
                 <a:latin typeface="Cambria"/>
               </a:rPr>
-              <a:t>急に静かに</a:t>
-            </a:r>
-          </a:p>
-        </p:txBody>
-      </p:sp>
-      <p:sp>
-        <p:nvSpPr>
-          <p:cNvPr id="22" name="TextBox 21"/>
-          <p:cNvSpPr txBox="1"/>
-          <p:nvPr/>
-        </p:nvSpPr>
-        <p:spPr>
-          <a:xfrm>
-            <a:off x="6492240" y="3456432"/>
-            <a:ext cx="2331720" cy="822960"/>
-          </a:xfrm>
-          <a:prstGeom prst="rect">
-            <a:avLst/>
-          </a:prstGeom>
-          <a:noFill/>
-        </p:spPr>
-        <p:txBody>
-          <a:bodyPr wrap="square" lIns="0" rIns="0" tIns="0" bIns="0" anchor="t">
-            <a:spAutoFit/>
-          </a:bodyPr>
-          <a:lstStyle/>
-          <a:p>
-            <a:pPr algn="l">
-              <a:lnSpc>
-                <a:spcPct val="140000"/>
+              <a:t>全体が一目で</a:t>
+            </a:r>
+          </a:p>
+        </p:txBody>
+      </p:sp>
+      <p:sp>
+        <p:nvSpPr>
+          <p:cNvPr id="19" name="TextBox 18"/>
+          <p:cNvSpPr txBox="1"/>
+          <p:nvPr/>
+        </p:nvSpPr>
+        <p:spPr>
+          <a:xfrm>
+            <a:off x="1554480" y="5458968"/>
+            <a:ext cx="3703320" cy="731520"/>
+          </a:xfrm>
+          <a:prstGeom prst="rect">
+            <a:avLst/>
+          </a:prstGeom>
+          <a:noFill/>
+        </p:spPr>
+        <p:txBody>
+          <a:bodyPr wrap="square" lIns="0" rIns="0" tIns="0" bIns="0" anchor="t">
+            <a:spAutoFit/>
+          </a:bodyPr>
+          <a:lstStyle/>
+          <a:p>
+            <a:pPr algn="l">
+              <a:lnSpc>
+                <a:spcPct val="135000"/>
               </a:lnSpc>
             </a:pPr>
             <a:r>
               <a:rPr sz="1100" b="0" i="0">
                 <a:solidFill>
-                  <a:srgbClr val="1F2937"/>
+                  <a:srgbClr val="5B6472"/>
                 </a:solidFill>
                 <a:latin typeface="Calibri"/>
               </a:rPr>
-              <a:t>普段活動している PC が
-急にログを残さなくなる</a:t>
-            </a:r>
-          </a:p>
-        </p:txBody>
-      </p:sp>
-      <p:sp>
-        <p:nvSpPr>
-          <p:cNvPr id="23" name="TextBox 22"/>
-          <p:cNvSpPr txBox="1"/>
-          <p:nvPr/>
-        </p:nvSpPr>
-        <p:spPr>
-          <a:xfrm>
-            <a:off x="6492240" y="4325112"/>
-            <a:ext cx="2331720" cy="457200"/>
-          </a:xfrm>
-          <a:prstGeom prst="rect">
-            <a:avLst/>
-          </a:prstGeom>
-          <a:noFill/>
-        </p:spPr>
-        <p:txBody>
-          <a:bodyPr wrap="square" lIns="0" rIns="0" tIns="0" bIns="0" anchor="t">
-            <a:spAutoFit/>
-          </a:bodyPr>
-          <a:lstStyle/>
-          <a:p>
-            <a:pPr algn="l">
-              <a:lnSpc>
-                <a:spcPct val="130000"/>
-              </a:lnSpc>
-            </a:pPr>
-            <a:r>
-              <a:rPr sz="1000" b="0" i="1">
-                <a:solidFill>
-                  <a:srgbClr val="5B6472"/>
-                </a:solidFill>
-                <a:latin typeface="Calibri"/>
-              </a:rPr>
-              <a:t>例: 攻撃者がログを消した</a:t>
-            </a:r>
-          </a:p>
-        </p:txBody>
-      </p:sp>
-      <p:sp>
-        <p:nvSpPr>
-          <p:cNvPr id="24" name="Rounded Rectangle 23"/>
-          <p:cNvSpPr/>
-          <p:nvPr/>
-        </p:nvSpPr>
-        <p:spPr>
-          <a:xfrm>
-            <a:off x="9189720" y="2240280"/>
-            <a:ext cx="2697480" cy="2606040"/>
-          </a:xfrm>
-          <a:prstGeom prst="roundRect">
-            <a:avLst/>
-          </a:prstGeom>
-          <a:solidFill>
-            <a:srgbClr val="FFFFFF"/>
-          </a:solidFill>
-          <a:ln w="9525">
+              <a:t>重大度・時間の流れ・多い攻撃を
+グラフで俯瞰</a:t>
+            </a:r>
+          </a:p>
+        </p:txBody>
+      </p:sp>
+      <p:pic>
+        <p:nvPicPr>
+          <p:cNvPr id="20" name="Picture 19" descr="dashboard.png"/>
+          <p:cNvPicPr>
+            <a:picLocks noChangeAspect="1"/>
+          </p:cNvPicPr>
+          <p:nvPr/>
+        </p:nvPicPr>
+        <p:blipFill>
+          <a:blip r:embed="rId2"/>
+          <a:stretch>
+            <a:fillRect/>
+          </a:stretch>
+        </p:blipFill>
+        <p:spPr>
+          <a:xfrm>
+            <a:off x="6484620" y="1691640"/>
+            <a:ext cx="4450080" cy="4572000"/>
+          </a:xfrm>
+          <a:prstGeom prst="rect">
+            <a:avLst/>
+          </a:prstGeom>
+          <a:ln w="12700">
             <a:solidFill>
               <a:srgbClr val="DDE3EE"/>
             </a:solidFill>
           </a:ln>
           <a:effectLst/>
         </p:spPr>
-        <p:style>
-          <a:lnRef idx="1">
-            <a:schemeClr val="accent1"/>
-          </a:lnRef>
-          <a:fillRef idx="3">
-            <a:schemeClr val="accent1"/>
-          </a:fillRef>
-          <a:effectRef idx="2">
-            <a:schemeClr val="accent1"/>
-          </a:effectRef>
-          <a:fontRef idx="minor">
-            <a:schemeClr val="lt1"/>
-          </a:fontRef>
-        </p:style>
-        <p:txBody>
-          <a:bodyPr rtlCol="0" anchor="ctr"/>
-          <a:lstStyle/>
-          <a:p>
-            <a:pPr algn="ctr"/>
-          </a:p>
-        </p:txBody>
-      </p:sp>
-      <p:sp>
-        <p:nvSpPr>
-          <p:cNvPr id="25" name="Rectangle 24"/>
-          <p:cNvSpPr/>
-          <p:nvPr/>
-        </p:nvSpPr>
-        <p:spPr>
-          <a:xfrm>
-            <a:off x="9189720" y="2240280"/>
-            <a:ext cx="73152" cy="2606040"/>
-          </a:xfrm>
-          <a:prstGeom prst="rect">
-            <a:avLst/>
-          </a:prstGeom>
-          <a:solidFill>
-            <a:srgbClr val="2563EB"/>
-          </a:solidFill>
-          <a:ln>
-            <a:noFill/>
-          </a:ln>
-          <a:effectLst/>
-        </p:spPr>
-        <p:style>
-          <a:lnRef idx="1">
-            <a:schemeClr val="accent1"/>
-          </a:lnRef>
-          <a:fillRef idx="3">
-            <a:schemeClr val="accent1"/>
-          </a:fillRef>
-          <a:effectRef idx="2">
-            <a:schemeClr val="accent1"/>
-          </a:effectRef>
-          <a:fontRef idx="minor">
-            <a:schemeClr val="lt1"/>
-          </a:fontRef>
-        </p:style>
-        <p:txBody>
-          <a:bodyPr rtlCol="0" anchor="ctr"/>
-          <a:lstStyle/>
-          <a:p>
-            <a:pPr algn="ctr"/>
-          </a:p>
-        </p:txBody>
-      </p:sp>
-      <p:sp>
-        <p:nvSpPr>
-          <p:cNvPr id="26" name="TextBox 25"/>
-          <p:cNvSpPr txBox="1"/>
-          <p:nvPr/>
-        </p:nvSpPr>
-        <p:spPr>
-          <a:xfrm>
-            <a:off x="9372600" y="2386584"/>
-            <a:ext cx="914400" cy="566928"/>
-          </a:xfrm>
-          <a:prstGeom prst="rect">
-            <a:avLst/>
-          </a:prstGeom>
-          <a:noFill/>
-        </p:spPr>
-        <p:txBody>
-          <a:bodyPr wrap="square" lIns="0" rIns="0" tIns="0" bIns="0" anchor="t">
-            <a:spAutoFit/>
-          </a:bodyPr>
-          <a:lstStyle/>
-          <a:p>
-            <a:pPr algn="l">
-              <a:lnSpc>
-                <a:spcPct val="130000"/>
-              </a:lnSpc>
-            </a:pPr>
-            <a:r>
-              <a:rPr sz="2600" b="0" i="0">
-                <a:solidFill>
-                  <a:srgbClr val="2563EB"/>
+      </p:pic>
+      <p:sp>
+        <p:nvSpPr>
+          <p:cNvPr id="21" name="TextBox 20"/>
+          <p:cNvSpPr txBox="1"/>
+          <p:nvPr/>
+        </p:nvSpPr>
+        <p:spPr>
+          <a:xfrm>
+            <a:off x="5760720" y="6309360"/>
+            <a:ext cx="5897880" cy="320040"/>
+          </a:xfrm>
+          <a:prstGeom prst="rect">
+            <a:avLst/>
+          </a:prstGeom>
+          <a:noFill/>
+        </p:spPr>
+        <p:txBody>
+          <a:bodyPr wrap="square" lIns="0" rIns="0" tIns="0" bIns="0" anchor="t">
+            <a:spAutoFit/>
+          </a:bodyPr>
+          <a:lstStyle/>
+          <a:p>
+            <a:pPr algn="ctr">
+              <a:lnSpc>
+                <a:spcPct val="130000"/>
+              </a:lnSpc>
+            </a:pPr>
+            <a:r>
+              <a:rPr sz="1100" b="0" i="0">
+                <a:solidFill>
+                  <a:srgbClr val="5B6472"/>
                 </a:solidFill>
                 <a:latin typeface="Calibri"/>
               </a:rPr>
-              <a:t>🌙</a:t>
-            </a:r>
-          </a:p>
-        </p:txBody>
-      </p:sp>
-      <p:sp>
-        <p:nvSpPr>
-          <p:cNvPr id="27" name="TextBox 26"/>
-          <p:cNvSpPr txBox="1"/>
-          <p:nvPr/>
-        </p:nvSpPr>
-        <p:spPr>
-          <a:xfrm>
-            <a:off x="9372600" y="2971800"/>
-            <a:ext cx="2423160" cy="457200"/>
-          </a:xfrm>
-          <a:prstGeom prst="rect">
-            <a:avLst/>
-          </a:prstGeom>
-          <a:noFill/>
-        </p:spPr>
-        <p:txBody>
-          <a:bodyPr wrap="square" lIns="0" rIns="0" tIns="0" bIns="0" anchor="t">
-            <a:spAutoFit/>
-          </a:bodyPr>
-          <a:lstStyle/>
-          <a:p>
-            <a:pPr algn="l">
-              <a:lnSpc>
-                <a:spcPct val="130000"/>
-              </a:lnSpc>
-            </a:pPr>
-            <a:r>
-              <a:rPr sz="1700" b="1" i="0">
-                <a:solidFill>
-                  <a:srgbClr val="1F2937"/>
-                </a:solidFill>
-                <a:latin typeface="Cambria"/>
-              </a:rPr>
-              <a:t>時間外の活動</a:t>
-            </a:r>
-          </a:p>
-        </p:txBody>
-      </p:sp>
-      <p:sp>
-        <p:nvSpPr>
-          <p:cNvPr id="28" name="TextBox 27"/>
-          <p:cNvSpPr txBox="1"/>
-          <p:nvPr/>
-        </p:nvSpPr>
-        <p:spPr>
-          <a:xfrm>
-            <a:off x="9372600" y="3456432"/>
-            <a:ext cx="2331720" cy="822960"/>
-          </a:xfrm>
-          <a:prstGeom prst="rect">
-            <a:avLst/>
-          </a:prstGeom>
-          <a:noFill/>
-        </p:spPr>
-        <p:txBody>
-          <a:bodyPr wrap="square" lIns="0" rIns="0" tIns="0" bIns="0" anchor="t">
-            <a:spAutoFit/>
-          </a:bodyPr>
-          <a:lstStyle/>
-          <a:p>
-            <a:pPr algn="l">
-              <a:lnSpc>
-                <a:spcPct val="140000"/>
-              </a:lnSpc>
-            </a:pPr>
-            <a:r>
-              <a:rPr sz="1100" b="0" i="0">
-                <a:solidFill>
-                  <a:srgbClr val="1F2937"/>
-                </a:solidFill>
-                <a:latin typeface="Calibri"/>
-              </a:rPr>
-              <a:t>深夜などの業務時間外に
-重要な動きが発生</a:t>
-            </a:r>
-          </a:p>
-        </p:txBody>
-      </p:sp>
-      <p:sp>
-        <p:nvSpPr>
-          <p:cNvPr id="29" name="TextBox 28"/>
-          <p:cNvSpPr txBox="1"/>
-          <p:nvPr/>
-        </p:nvSpPr>
-        <p:spPr>
-          <a:xfrm>
-            <a:off x="9372600" y="4325112"/>
-            <a:ext cx="2331720" cy="457200"/>
-          </a:xfrm>
-          <a:prstGeom prst="rect">
-            <a:avLst/>
-          </a:prstGeom>
-          <a:noFill/>
-        </p:spPr>
-        <p:txBody>
-          <a:bodyPr wrap="square" lIns="0" rIns="0" tIns="0" bIns="0" anchor="t">
-            <a:spAutoFit/>
-          </a:bodyPr>
-          <a:lstStyle/>
-          <a:p>
-            <a:pPr algn="l">
-              <a:lnSpc>
-                <a:spcPct val="130000"/>
-              </a:lnSpc>
-            </a:pPr>
-            <a:r>
-              <a:rPr sz="1000" b="0" i="1">
-                <a:solidFill>
-                  <a:srgbClr val="5B6472"/>
-                </a:solidFill>
-                <a:latin typeface="Calibri"/>
-              </a:rPr>
-              <a:t>例: 業務外を狙った侵入</a:t>
-            </a:r>
-          </a:p>
-        </p:txBody>
-      </p:sp>
-      <p:sp>
-        <p:nvSpPr>
-          <p:cNvPr id="30" name="Rounded Rectangle 29"/>
-          <p:cNvSpPr/>
-          <p:nvPr/>
-        </p:nvSpPr>
-        <p:spPr>
-          <a:xfrm>
-            <a:off x="548640" y="5029200"/>
-            <a:ext cx="11064240" cy="1371600"/>
-          </a:xfrm>
-          <a:prstGeom prst="roundRect">
-            <a:avLst/>
-          </a:prstGeom>
-          <a:solidFill>
-            <a:srgbClr val="E8F0FE"/>
-          </a:solidFill>
-          <a:ln w="9525">
-            <a:solidFill>
-              <a:srgbClr val="E8F0FE"/>
-            </a:solidFill>
-          </a:ln>
-          <a:effectLst/>
-        </p:spPr>
-        <p:style>
-          <a:lnRef idx="1">
-            <a:schemeClr val="accent1"/>
-          </a:lnRef>
-          <a:fillRef idx="3">
-            <a:schemeClr val="accent1"/>
-          </a:fillRef>
-          <a:effectRef idx="2">
-            <a:schemeClr val="accent1"/>
-          </a:effectRef>
-          <a:fontRef idx="minor">
-            <a:schemeClr val="lt1"/>
-          </a:fontRef>
-        </p:style>
-        <p:txBody>
-          <a:bodyPr rtlCol="0" anchor="ctr"/>
-          <a:lstStyle/>
-          <a:p>
-            <a:pPr algn="ctr"/>
-          </a:p>
-        </p:txBody>
-      </p:sp>
-      <p:sp>
-        <p:nvSpPr>
-          <p:cNvPr id="31" name="TextBox 30"/>
-          <p:cNvSpPr txBox="1"/>
-          <p:nvPr/>
-        </p:nvSpPr>
-        <p:spPr>
-          <a:xfrm>
-            <a:off x="914400" y="5230368"/>
-            <a:ext cx="4937760" cy="365760"/>
-          </a:xfrm>
-          <a:prstGeom prst="rect">
-            <a:avLst/>
-          </a:prstGeom>
-          <a:noFill/>
-        </p:spPr>
-        <p:txBody>
-          <a:bodyPr wrap="square" lIns="0" rIns="0" tIns="0" bIns="0" anchor="t">
-            <a:spAutoFit/>
-          </a:bodyPr>
-          <a:lstStyle/>
-          <a:p>
-            <a:pPr algn="l">
-              <a:lnSpc>
-                <a:spcPct val="130000"/>
-              </a:lnSpc>
-            </a:pPr>
-            <a:r>
-              <a:rPr sz="1350" b="1" i="0">
-                <a:solidFill>
-                  <a:srgbClr val="1F2937"/>
-                </a:solidFill>
-                <a:latin typeface="Calibri"/>
-              </a:rPr>
-              <a:t>📏 ルールによる検知 (既存の方法)</a:t>
-            </a:r>
-          </a:p>
-        </p:txBody>
-      </p:sp>
-      <p:sp>
-        <p:nvSpPr>
-          <p:cNvPr id="32" name="TextBox 31"/>
-          <p:cNvSpPr txBox="1"/>
-          <p:nvPr/>
-        </p:nvSpPr>
-        <p:spPr>
-          <a:xfrm>
-            <a:off x="914400" y="5614416"/>
-            <a:ext cx="4937760" cy="685800"/>
-          </a:xfrm>
-          <a:prstGeom prst="rect">
-            <a:avLst/>
-          </a:prstGeom>
-          <a:noFill/>
-        </p:spPr>
-        <p:txBody>
-          <a:bodyPr wrap="square" lIns="0" rIns="0" tIns="0" bIns="0" anchor="t">
-            <a:spAutoFit/>
-          </a:bodyPr>
-          <a:lstStyle/>
-          <a:p>
-            <a:pPr algn="l">
-              <a:lnSpc>
-                <a:spcPct val="140000"/>
-              </a:lnSpc>
-            </a:pPr>
-            <a:r>
-              <a:rPr sz="1150" b="0" i="0">
-                <a:solidFill>
-                  <a:srgbClr val="5B6472"/>
-                </a:solidFill>
-                <a:latin typeface="Calibri"/>
-              </a:rPr>
-              <a:t>事前に知っている「悪い特徴」と一致したら警告。
-既に知られている手口には確実で強い。</a:t>
-            </a:r>
-          </a:p>
-        </p:txBody>
-      </p:sp>
-      <p:sp>
-        <p:nvSpPr>
-          <p:cNvPr id="33" name="Rectangle 32"/>
-          <p:cNvSpPr/>
-          <p:nvPr/>
-        </p:nvSpPr>
-        <p:spPr>
-          <a:xfrm>
-            <a:off x="6053328" y="5257800"/>
-            <a:ext cx="16459" cy="914400"/>
-          </a:xfrm>
-          <a:prstGeom prst="rect">
-            <a:avLst/>
-          </a:prstGeom>
-          <a:solidFill>
-            <a:srgbClr val="DDE3EE"/>
-          </a:solidFill>
-          <a:ln>
-            <a:noFill/>
-          </a:ln>
-          <a:effectLst/>
-        </p:spPr>
-        <p:style>
-          <a:lnRef idx="1">
-            <a:schemeClr val="accent1"/>
-          </a:lnRef>
-          <a:fillRef idx="3">
-            <a:schemeClr val="accent1"/>
-          </a:fillRef>
-          <a:effectRef idx="2">
-            <a:schemeClr val="accent1"/>
-          </a:effectRef>
-          <a:fontRef idx="minor">
-            <a:schemeClr val="lt1"/>
-          </a:fontRef>
-        </p:style>
-        <p:txBody>
-          <a:bodyPr rtlCol="0" anchor="ctr"/>
-          <a:lstStyle/>
-          <a:p>
-            <a:pPr algn="ctr"/>
-          </a:p>
-        </p:txBody>
-      </p:sp>
-      <p:sp>
-        <p:nvSpPr>
-          <p:cNvPr id="34" name="TextBox 33"/>
-          <p:cNvSpPr txBox="1"/>
-          <p:nvPr/>
-        </p:nvSpPr>
-        <p:spPr>
-          <a:xfrm>
-            <a:off x="6400800" y="5230368"/>
-            <a:ext cx="4937760" cy="365760"/>
-          </a:xfrm>
-          <a:prstGeom prst="rect">
-            <a:avLst/>
-          </a:prstGeom>
-          <a:noFill/>
-        </p:spPr>
-        <p:txBody>
-          <a:bodyPr wrap="square" lIns="0" rIns="0" tIns="0" bIns="0" anchor="t">
-            <a:spAutoFit/>
-          </a:bodyPr>
-          <a:lstStyle/>
-          <a:p>
-            <a:pPr algn="l">
-              <a:lnSpc>
-                <a:spcPct val="130000"/>
-              </a:lnSpc>
-            </a:pPr>
-            <a:r>
-              <a:rPr sz="1350" b="1" i="0">
-                <a:solidFill>
-                  <a:srgbClr val="1D4ED8"/>
-                </a:solidFill>
-                <a:latin typeface="Calibri"/>
-              </a:rPr>
-              <a:t>📈 振舞いによる検知 (今回自作した分析)</a:t>
-            </a:r>
-          </a:p>
-        </p:txBody>
-      </p:sp>
-      <p:sp>
-        <p:nvSpPr>
-          <p:cNvPr id="35" name="TextBox 34"/>
-          <p:cNvSpPr txBox="1"/>
-          <p:nvPr/>
-        </p:nvSpPr>
-        <p:spPr>
-          <a:xfrm>
-            <a:off x="6400800" y="5614416"/>
-            <a:ext cx="4937760" cy="685800"/>
-          </a:xfrm>
-          <a:prstGeom prst="rect">
-            <a:avLst/>
-          </a:prstGeom>
-          <a:noFill/>
-        </p:spPr>
-        <p:txBody>
-          <a:bodyPr wrap="square" lIns="0" rIns="0" tIns="0" bIns="0" anchor="t">
-            <a:spAutoFit/>
-          </a:bodyPr>
-          <a:lstStyle/>
-          <a:p>
-            <a:pPr algn="l">
-              <a:lnSpc>
-                <a:spcPct val="140000"/>
-              </a:lnSpc>
-            </a:pPr>
-            <a:r>
-              <a:rPr sz="1150" b="0" i="0">
-                <a:solidFill>
-                  <a:srgbClr val="5B6472"/>
-                </a:solidFill>
-                <a:latin typeface="Calibri"/>
-              </a:rPr>
-              <a:t>「普段との違い」に反応して知らせる。
-ルールがまだ無い未知の手口への「気づき」になる。</a:t>
-            </a:r>
-          </a:p>
-        </p:txBody>
-      </p:sp>
-      <p:sp>
-        <p:nvSpPr>
-          <p:cNvPr id="36" name="TextBox 35"/>
+              <a:t>▲ 実際の画面 (ブラウザで動作・データは外部に送らない)</a:t>
+            </a:r>
+          </a:p>
+        </p:txBody>
+      </p:sp>
+      <p:sp>
+        <p:nvSpPr>
+          <p:cNvPr id="22" name="TextBox 21"/>
           <p:cNvSpPr txBox="1"/>
           <p:nvPr/>
         </p:nvSpPr>
@@ -5785,7 +6100,7 @@
                 </a:solidFill>
                 <a:latin typeface="Calibri"/>
               </a:rPr>
-              <a:t>11 / 14</a:t>
+              <a:t>11 / 15</a:t>
             </a:r>
           </a:p>
         </p:txBody>
@@ -5823,7 +6138,7 @@
             <a:avLst/>
           </a:prstGeom>
           <a:solidFill>
-            <a:srgbClr val="1B254F"/>
+            <a:srgbClr val="F4F6FA"/>
           </a:solidFill>
           <a:ln>
             <a:noFill/>
@@ -5860,118 +6175,1354 @@
         </p:nvSpPr>
         <p:spPr>
           <a:xfrm>
-            <a:off x="548640" y="1737360"/>
-            <a:ext cx="10972800" cy="1463040"/>
-          </a:xfrm>
-          <a:prstGeom prst="rect">
-            <a:avLst/>
-          </a:prstGeom>
-          <a:noFill/>
-        </p:spPr>
-        <p:txBody>
-          <a:bodyPr wrap="square" lIns="0" rIns="0" tIns="0" bIns="0" anchor="t">
-            <a:spAutoFit/>
-          </a:bodyPr>
-          <a:lstStyle/>
-          <a:p>
-            <a:pPr algn="ctr">
-              <a:lnSpc>
-                <a:spcPct val="130000"/>
-              </a:lnSpc>
-            </a:pPr>
-            <a:r>
-              <a:rPr sz="11000" b="1" i="0">
-                <a:solidFill>
-                  <a:srgbClr val="FFFFFF"/>
+            <a:off x="548640" y="347472"/>
+            <a:ext cx="10972800" cy="274320"/>
+          </a:xfrm>
+          <a:prstGeom prst="rect">
+            <a:avLst/>
+          </a:prstGeom>
+          <a:noFill/>
+        </p:spPr>
+        <p:txBody>
+          <a:bodyPr wrap="square" lIns="0" rIns="0" tIns="0" bIns="0" anchor="t">
+            <a:spAutoFit/>
+          </a:bodyPr>
+          <a:lstStyle/>
+          <a:p>
+            <a:pPr algn="l">
+              <a:lnSpc>
+                <a:spcPct val="130000"/>
+              </a:lnSpc>
+            </a:pPr>
+            <a:r>
+              <a:rPr sz="1100" b="1" i="0">
+                <a:solidFill>
+                  <a:srgbClr val="2563EB"/>
+                </a:solidFill>
+                <a:latin typeface="Calibri"/>
+              </a:rPr>
+              <a:t>開発内容 +α   (自作の統計分析)</a:t>
+            </a:r>
+          </a:p>
+        </p:txBody>
+      </p:sp>
+      <p:sp>
+        <p:nvSpPr>
+          <p:cNvPr id="4" name="TextBox 3"/>
+          <p:cNvSpPr txBox="1"/>
+          <p:nvPr/>
+        </p:nvSpPr>
+        <p:spPr>
+          <a:xfrm>
+            <a:off x="548640" y="621792"/>
+            <a:ext cx="11155680" cy="640080"/>
+          </a:xfrm>
+          <a:prstGeom prst="rect">
+            <a:avLst/>
+          </a:prstGeom>
+          <a:noFill/>
+        </p:spPr>
+        <p:txBody>
+          <a:bodyPr wrap="square" lIns="0" rIns="0" tIns="0" bIns="0" anchor="t">
+            <a:spAutoFit/>
+          </a:bodyPr>
+          <a:lstStyle/>
+          <a:p>
+            <a:pPr algn="l">
+              <a:lnSpc>
+                <a:spcPct val="130000"/>
+              </a:lnSpc>
+            </a:pPr>
+            <a:r>
+              <a:rPr sz="2800" b="1" i="0">
+                <a:solidFill>
+                  <a:srgbClr val="1F2937"/>
                 </a:solidFill>
                 <a:latin typeface="Cambria"/>
               </a:rPr>
-              <a:t>DEMO</a:t>
-            </a:r>
-          </a:p>
-        </p:txBody>
-      </p:sp>
-      <p:sp>
-        <p:nvSpPr>
-          <p:cNvPr id="4" name="TextBox 3"/>
-          <p:cNvSpPr txBox="1"/>
-          <p:nvPr/>
-        </p:nvSpPr>
-        <p:spPr>
-          <a:xfrm>
-            <a:off x="548640" y="3977639"/>
-            <a:ext cx="10972800" cy="548640"/>
-          </a:xfrm>
-          <a:prstGeom prst="rect">
-            <a:avLst/>
-          </a:prstGeom>
-          <a:noFill/>
-        </p:spPr>
-        <p:txBody>
-          <a:bodyPr wrap="square" lIns="0" rIns="0" tIns="0" bIns="0" anchor="t">
-            <a:spAutoFit/>
-          </a:bodyPr>
-          <a:lstStyle/>
-          <a:p>
-            <a:pPr algn="ctr">
-              <a:lnSpc>
-                <a:spcPct val="130000"/>
-              </a:lnSpc>
-            </a:pPr>
-            <a:r>
-              <a:rPr sz="2400" b="0" i="1">
-                <a:solidFill>
-                  <a:srgbClr val="CADCFC"/>
+              <a:t>さらに: ルールでは書けない「いつもと違う」も検出</a:t>
+            </a:r>
+          </a:p>
+        </p:txBody>
+      </p:sp>
+      <p:sp>
+        <p:nvSpPr>
+          <p:cNvPr id="5" name="TextBox 4"/>
+          <p:cNvSpPr txBox="1"/>
+          <p:nvPr/>
+        </p:nvSpPr>
+        <p:spPr>
+          <a:xfrm>
+            <a:off x="548640" y="1600200"/>
+            <a:ext cx="10972800" cy="457200"/>
+          </a:xfrm>
+          <a:prstGeom prst="rect">
+            <a:avLst/>
+          </a:prstGeom>
+          <a:noFill/>
+        </p:spPr>
+        <p:txBody>
+          <a:bodyPr wrap="square" lIns="0" rIns="0" tIns="0" bIns="0" anchor="t">
+            <a:spAutoFit/>
+          </a:bodyPr>
+          <a:lstStyle/>
+          <a:p>
+            <a:pPr algn="l">
+              <a:lnSpc>
+                <a:spcPct val="130000"/>
+              </a:lnSpc>
+            </a:pPr>
+            <a:r>
+              <a:rPr sz="1500" b="0" i="1">
+                <a:solidFill>
+                  <a:srgbClr val="5B6472"/>
                 </a:solidFill>
                 <a:latin typeface="Calibri"/>
               </a:rPr>
-              <a:t>実際の画面で動かしてみます</a:t>
-            </a:r>
-          </a:p>
-        </p:txBody>
-      </p:sp>
-      <p:sp>
-        <p:nvSpPr>
-          <p:cNvPr id="5" name="TextBox 4"/>
-          <p:cNvSpPr txBox="1"/>
-          <p:nvPr/>
-        </p:nvSpPr>
-        <p:spPr>
-          <a:xfrm>
-            <a:off x="548640" y="4709160"/>
-            <a:ext cx="10972800" cy="457200"/>
-          </a:xfrm>
-          <a:prstGeom prst="rect">
-            <a:avLst/>
-          </a:prstGeom>
-          <a:noFill/>
-        </p:spPr>
-        <p:txBody>
-          <a:bodyPr wrap="square" lIns="0" rIns="0" tIns="0" bIns="0" anchor="t">
-            <a:spAutoFit/>
-          </a:bodyPr>
-          <a:lstStyle/>
-          <a:p>
-            <a:pPr algn="ctr">
-              <a:lnSpc>
-                <a:spcPct val="130000"/>
-              </a:lnSpc>
-            </a:pPr>
-            <a:r>
-              <a:rPr sz="1500" b="0" i="0">
-                <a:solidFill>
-                  <a:srgbClr val="CADCFC"/>
+              <a:t>ルールは 1 件ずつしか判定できない。そこで「全体の傾向」を統計で見る分析を自作しました。</a:t>
+            </a:r>
+          </a:p>
+        </p:txBody>
+      </p:sp>
+      <p:sp>
+        <p:nvSpPr>
+          <p:cNvPr id="6" name="Rounded Rectangle 5"/>
+          <p:cNvSpPr/>
+          <p:nvPr/>
+        </p:nvSpPr>
+        <p:spPr>
+          <a:xfrm>
+            <a:off x="548640" y="2240280"/>
+            <a:ext cx="2697480" cy="2606040"/>
+          </a:xfrm>
+          <a:prstGeom prst="roundRect">
+            <a:avLst/>
+          </a:prstGeom>
+          <a:solidFill>
+            <a:srgbClr val="FFFFFF"/>
+          </a:solidFill>
+          <a:ln w="9525">
+            <a:solidFill>
+              <a:srgbClr val="DDE3EE"/>
+            </a:solidFill>
+          </a:ln>
+          <a:effectLst/>
+        </p:spPr>
+        <p:style>
+          <a:lnRef idx="1">
+            <a:schemeClr val="accent1"/>
+          </a:lnRef>
+          <a:fillRef idx="3">
+            <a:schemeClr val="accent1"/>
+          </a:fillRef>
+          <a:effectRef idx="2">
+            <a:schemeClr val="accent1"/>
+          </a:effectRef>
+          <a:fontRef idx="minor">
+            <a:schemeClr val="lt1"/>
+          </a:fontRef>
+        </p:style>
+        <p:txBody>
+          <a:bodyPr rtlCol="0" anchor="ctr"/>
+          <a:lstStyle/>
+          <a:p>
+            <a:pPr algn="ctr"/>
+          </a:p>
+        </p:txBody>
+      </p:sp>
+      <p:sp>
+        <p:nvSpPr>
+          <p:cNvPr id="7" name="Rectangle 6"/>
+          <p:cNvSpPr/>
+          <p:nvPr/>
+        </p:nvSpPr>
+        <p:spPr>
+          <a:xfrm>
+            <a:off x="548640" y="2240280"/>
+            <a:ext cx="73152" cy="2606040"/>
+          </a:xfrm>
+          <a:prstGeom prst="rect">
+            <a:avLst/>
+          </a:prstGeom>
+          <a:solidFill>
+            <a:srgbClr val="2563EB"/>
+          </a:solidFill>
+          <a:ln>
+            <a:noFill/>
+          </a:ln>
+          <a:effectLst/>
+        </p:spPr>
+        <p:style>
+          <a:lnRef idx="1">
+            <a:schemeClr val="accent1"/>
+          </a:lnRef>
+          <a:fillRef idx="3">
+            <a:schemeClr val="accent1"/>
+          </a:fillRef>
+          <a:effectRef idx="2">
+            <a:schemeClr val="accent1"/>
+          </a:effectRef>
+          <a:fontRef idx="minor">
+            <a:schemeClr val="lt1"/>
+          </a:fontRef>
+        </p:style>
+        <p:txBody>
+          <a:bodyPr rtlCol="0" anchor="ctr"/>
+          <a:lstStyle/>
+          <a:p>
+            <a:pPr algn="ctr"/>
+          </a:p>
+        </p:txBody>
+      </p:sp>
+      <p:sp>
+        <p:nvSpPr>
+          <p:cNvPr id="8" name="TextBox 7"/>
+          <p:cNvSpPr txBox="1"/>
+          <p:nvPr/>
+        </p:nvSpPr>
+        <p:spPr>
+          <a:xfrm>
+            <a:off x="731520" y="2386584"/>
+            <a:ext cx="914400" cy="566928"/>
+          </a:xfrm>
+          <a:prstGeom prst="rect">
+            <a:avLst/>
+          </a:prstGeom>
+          <a:noFill/>
+        </p:spPr>
+        <p:txBody>
+          <a:bodyPr wrap="square" lIns="0" rIns="0" tIns="0" bIns="0" anchor="t">
+            <a:spAutoFit/>
+          </a:bodyPr>
+          <a:lstStyle/>
+          <a:p>
+            <a:pPr algn="l">
+              <a:lnSpc>
+                <a:spcPct val="130000"/>
+              </a:lnSpc>
+            </a:pPr>
+            <a:r>
+              <a:rPr sz="2600" b="0" i="0">
+                <a:solidFill>
+                  <a:srgbClr val="2563EB"/>
                 </a:solidFill>
                 <a:latin typeface="Calibri"/>
               </a:rPr>
-              <a:t>サンプルログを読み込み、調査の流れを見ていただきます。</a:t>
-            </a:r>
-          </a:p>
-        </p:txBody>
-      </p:sp>
-      <p:sp>
-        <p:nvSpPr>
-          <p:cNvPr id="6" name="TextBox 5"/>
+              <a:t>🔥</a:t>
+            </a:r>
+          </a:p>
+        </p:txBody>
+      </p:sp>
+      <p:sp>
+        <p:nvSpPr>
+          <p:cNvPr id="9" name="TextBox 8"/>
+          <p:cNvSpPr txBox="1"/>
+          <p:nvPr/>
+        </p:nvSpPr>
+        <p:spPr>
+          <a:xfrm>
+            <a:off x="731520" y="2971800"/>
+            <a:ext cx="2423160" cy="457200"/>
+          </a:xfrm>
+          <a:prstGeom prst="rect">
+            <a:avLst/>
+          </a:prstGeom>
+          <a:noFill/>
+        </p:spPr>
+        <p:txBody>
+          <a:bodyPr wrap="square" lIns="0" rIns="0" tIns="0" bIns="0" anchor="t">
+            <a:spAutoFit/>
+          </a:bodyPr>
+          <a:lstStyle/>
+          <a:p>
+            <a:pPr algn="l">
+              <a:lnSpc>
+                <a:spcPct val="130000"/>
+              </a:lnSpc>
+            </a:pPr>
+            <a:r>
+              <a:rPr sz="1700" b="1" i="0">
+                <a:solidFill>
+                  <a:srgbClr val="1F2937"/>
+                </a:solidFill>
+                <a:latin typeface="Cambria"/>
+              </a:rPr>
+              <a:t>急増している</a:t>
+            </a:r>
+          </a:p>
+        </p:txBody>
+      </p:sp>
+      <p:sp>
+        <p:nvSpPr>
+          <p:cNvPr id="10" name="TextBox 9"/>
+          <p:cNvSpPr txBox="1"/>
+          <p:nvPr/>
+        </p:nvSpPr>
+        <p:spPr>
+          <a:xfrm>
+            <a:off x="731520" y="3456432"/>
+            <a:ext cx="2331720" cy="822960"/>
+          </a:xfrm>
+          <a:prstGeom prst="rect">
+            <a:avLst/>
+          </a:prstGeom>
+          <a:noFill/>
+        </p:spPr>
+        <p:txBody>
+          <a:bodyPr wrap="square" lIns="0" rIns="0" tIns="0" bIns="0" anchor="t">
+            <a:spAutoFit/>
+          </a:bodyPr>
+          <a:lstStyle/>
+          <a:p>
+            <a:pPr algn="l">
+              <a:lnSpc>
+                <a:spcPct val="140000"/>
+              </a:lnSpc>
+            </a:pPr>
+            <a:r>
+              <a:rPr sz="1100" b="0" i="0">
+                <a:solidFill>
+                  <a:srgbClr val="1F2937"/>
+                </a:solidFill>
+                <a:latin typeface="Calibri"/>
+              </a:rPr>
+              <a:t>平常の数十〜数千倍の
+動きが急に発生</a:t>
+            </a:r>
+          </a:p>
+        </p:txBody>
+      </p:sp>
+      <p:sp>
+        <p:nvSpPr>
+          <p:cNvPr id="11" name="TextBox 10"/>
+          <p:cNvSpPr txBox="1"/>
+          <p:nvPr/>
+        </p:nvSpPr>
+        <p:spPr>
+          <a:xfrm>
+            <a:off x="731520" y="4325112"/>
+            <a:ext cx="2331720" cy="457200"/>
+          </a:xfrm>
+          <a:prstGeom prst="rect">
+            <a:avLst/>
+          </a:prstGeom>
+          <a:noFill/>
+        </p:spPr>
+        <p:txBody>
+          <a:bodyPr wrap="square" lIns="0" rIns="0" tIns="0" bIns="0" anchor="t">
+            <a:spAutoFit/>
+          </a:bodyPr>
+          <a:lstStyle/>
+          <a:p>
+            <a:pPr algn="l">
+              <a:lnSpc>
+                <a:spcPct val="130000"/>
+              </a:lnSpc>
+            </a:pPr>
+            <a:r>
+              <a:rPr sz="1000" b="0" i="1">
+                <a:solidFill>
+                  <a:srgbClr val="5B6472"/>
+                </a:solidFill>
+                <a:latin typeface="Calibri"/>
+              </a:rPr>
+              <a:t>例: 大量のパスワード試行</a:t>
+            </a:r>
+          </a:p>
+        </p:txBody>
+      </p:sp>
+      <p:sp>
+        <p:nvSpPr>
+          <p:cNvPr id="12" name="Rounded Rectangle 11"/>
+          <p:cNvSpPr/>
+          <p:nvPr/>
+        </p:nvSpPr>
+        <p:spPr>
+          <a:xfrm>
+            <a:off x="3429000" y="2240280"/>
+            <a:ext cx="2697480" cy="2606040"/>
+          </a:xfrm>
+          <a:prstGeom prst="roundRect">
+            <a:avLst/>
+          </a:prstGeom>
+          <a:solidFill>
+            <a:srgbClr val="FFFFFF"/>
+          </a:solidFill>
+          <a:ln w="9525">
+            <a:solidFill>
+              <a:srgbClr val="DDE3EE"/>
+            </a:solidFill>
+          </a:ln>
+          <a:effectLst/>
+        </p:spPr>
+        <p:style>
+          <a:lnRef idx="1">
+            <a:schemeClr val="accent1"/>
+          </a:lnRef>
+          <a:fillRef idx="3">
+            <a:schemeClr val="accent1"/>
+          </a:fillRef>
+          <a:effectRef idx="2">
+            <a:schemeClr val="accent1"/>
+          </a:effectRef>
+          <a:fontRef idx="minor">
+            <a:schemeClr val="lt1"/>
+          </a:fontRef>
+        </p:style>
+        <p:txBody>
+          <a:bodyPr rtlCol="0" anchor="ctr"/>
+          <a:lstStyle/>
+          <a:p>
+            <a:pPr algn="ctr"/>
+          </a:p>
+        </p:txBody>
+      </p:sp>
+      <p:sp>
+        <p:nvSpPr>
+          <p:cNvPr id="13" name="Rectangle 12"/>
+          <p:cNvSpPr/>
+          <p:nvPr/>
+        </p:nvSpPr>
+        <p:spPr>
+          <a:xfrm>
+            <a:off x="3429000" y="2240280"/>
+            <a:ext cx="73152" cy="2606040"/>
+          </a:xfrm>
+          <a:prstGeom prst="rect">
+            <a:avLst/>
+          </a:prstGeom>
+          <a:solidFill>
+            <a:srgbClr val="2563EB"/>
+          </a:solidFill>
+          <a:ln>
+            <a:noFill/>
+          </a:ln>
+          <a:effectLst/>
+        </p:spPr>
+        <p:style>
+          <a:lnRef idx="1">
+            <a:schemeClr val="accent1"/>
+          </a:lnRef>
+          <a:fillRef idx="3">
+            <a:schemeClr val="accent1"/>
+          </a:fillRef>
+          <a:effectRef idx="2">
+            <a:schemeClr val="accent1"/>
+          </a:effectRef>
+          <a:fontRef idx="minor">
+            <a:schemeClr val="lt1"/>
+          </a:fontRef>
+        </p:style>
+        <p:txBody>
+          <a:bodyPr rtlCol="0" anchor="ctr"/>
+          <a:lstStyle/>
+          <a:p>
+            <a:pPr algn="ctr"/>
+          </a:p>
+        </p:txBody>
+      </p:sp>
+      <p:sp>
+        <p:nvSpPr>
+          <p:cNvPr id="14" name="TextBox 13"/>
+          <p:cNvSpPr txBox="1"/>
+          <p:nvPr/>
+        </p:nvSpPr>
+        <p:spPr>
+          <a:xfrm>
+            <a:off x="3611880" y="2386584"/>
+            <a:ext cx="914400" cy="566928"/>
+          </a:xfrm>
+          <a:prstGeom prst="rect">
+            <a:avLst/>
+          </a:prstGeom>
+          <a:noFill/>
+        </p:spPr>
+        <p:txBody>
+          <a:bodyPr wrap="square" lIns="0" rIns="0" tIns="0" bIns="0" anchor="t">
+            <a:spAutoFit/>
+          </a:bodyPr>
+          <a:lstStyle/>
+          <a:p>
+            <a:pPr algn="l">
+              <a:lnSpc>
+                <a:spcPct val="130000"/>
+              </a:lnSpc>
+            </a:pPr>
+            <a:r>
+              <a:rPr sz="2600" b="0" i="0">
+                <a:solidFill>
+                  <a:srgbClr val="2563EB"/>
+                </a:solidFill>
+                <a:latin typeface="Calibri"/>
+              </a:rPr>
+              <a:t>🌐</a:t>
+            </a:r>
+          </a:p>
+        </p:txBody>
+      </p:sp>
+      <p:sp>
+        <p:nvSpPr>
+          <p:cNvPr id="15" name="TextBox 14"/>
+          <p:cNvSpPr txBox="1"/>
+          <p:nvPr/>
+        </p:nvSpPr>
+        <p:spPr>
+          <a:xfrm>
+            <a:off x="3611880" y="2971800"/>
+            <a:ext cx="2423160" cy="457200"/>
+          </a:xfrm>
+          <a:prstGeom prst="rect">
+            <a:avLst/>
+          </a:prstGeom>
+          <a:noFill/>
+        </p:spPr>
+        <p:txBody>
+          <a:bodyPr wrap="square" lIns="0" rIns="0" tIns="0" bIns="0" anchor="t">
+            <a:spAutoFit/>
+          </a:bodyPr>
+          <a:lstStyle/>
+          <a:p>
+            <a:pPr algn="l">
+              <a:lnSpc>
+                <a:spcPct val="130000"/>
+              </a:lnSpc>
+            </a:pPr>
+            <a:r>
+              <a:rPr sz="1700" b="1" i="0">
+                <a:solidFill>
+                  <a:srgbClr val="1F2937"/>
+                </a:solidFill>
+                <a:latin typeface="Cambria"/>
+              </a:rPr>
+              <a:t>広がっている</a:t>
+            </a:r>
+          </a:p>
+        </p:txBody>
+      </p:sp>
+      <p:sp>
+        <p:nvSpPr>
+          <p:cNvPr id="16" name="TextBox 15"/>
+          <p:cNvSpPr txBox="1"/>
+          <p:nvPr/>
+        </p:nvSpPr>
+        <p:spPr>
+          <a:xfrm>
+            <a:off x="3611880" y="3456432"/>
+            <a:ext cx="2331720" cy="822960"/>
+          </a:xfrm>
+          <a:prstGeom prst="rect">
+            <a:avLst/>
+          </a:prstGeom>
+          <a:noFill/>
+        </p:spPr>
+        <p:txBody>
+          <a:bodyPr wrap="square" lIns="0" rIns="0" tIns="0" bIns="0" anchor="t">
+            <a:spAutoFit/>
+          </a:bodyPr>
+          <a:lstStyle/>
+          <a:p>
+            <a:pPr algn="l">
+              <a:lnSpc>
+                <a:spcPct val="140000"/>
+              </a:lnSpc>
+            </a:pPr>
+            <a:r>
+              <a:rPr sz="1100" b="0" i="0">
+                <a:solidFill>
+                  <a:srgbClr val="1F2937"/>
+                </a:solidFill>
+                <a:latin typeface="Calibri"/>
+              </a:rPr>
+              <a:t>同じ動きが
+複数の PC で同時発生</a:t>
+            </a:r>
+          </a:p>
+        </p:txBody>
+      </p:sp>
+      <p:sp>
+        <p:nvSpPr>
+          <p:cNvPr id="17" name="TextBox 16"/>
+          <p:cNvSpPr txBox="1"/>
+          <p:nvPr/>
+        </p:nvSpPr>
+        <p:spPr>
+          <a:xfrm>
+            <a:off x="3611880" y="4325112"/>
+            <a:ext cx="2331720" cy="457200"/>
+          </a:xfrm>
+          <a:prstGeom prst="rect">
+            <a:avLst/>
+          </a:prstGeom>
+          <a:noFill/>
+        </p:spPr>
+        <p:txBody>
+          <a:bodyPr wrap="square" lIns="0" rIns="0" tIns="0" bIns="0" anchor="t">
+            <a:spAutoFit/>
+          </a:bodyPr>
+          <a:lstStyle/>
+          <a:p>
+            <a:pPr algn="l">
+              <a:lnSpc>
+                <a:spcPct val="130000"/>
+              </a:lnSpc>
+            </a:pPr>
+            <a:r>
+              <a:rPr sz="1000" b="0" i="1">
+                <a:solidFill>
+                  <a:srgbClr val="5B6472"/>
+                </a:solidFill>
+                <a:latin typeface="Calibri"/>
+              </a:rPr>
+              <a:t>例: ウイルスが社内に拡大</a:t>
+            </a:r>
+          </a:p>
+        </p:txBody>
+      </p:sp>
+      <p:sp>
+        <p:nvSpPr>
+          <p:cNvPr id="18" name="Rounded Rectangle 17"/>
+          <p:cNvSpPr/>
+          <p:nvPr/>
+        </p:nvSpPr>
+        <p:spPr>
+          <a:xfrm>
+            <a:off x="6309360" y="2240280"/>
+            <a:ext cx="2697480" cy="2606040"/>
+          </a:xfrm>
+          <a:prstGeom prst="roundRect">
+            <a:avLst/>
+          </a:prstGeom>
+          <a:solidFill>
+            <a:srgbClr val="FFFFFF"/>
+          </a:solidFill>
+          <a:ln w="9525">
+            <a:solidFill>
+              <a:srgbClr val="DDE3EE"/>
+            </a:solidFill>
+          </a:ln>
+          <a:effectLst/>
+        </p:spPr>
+        <p:style>
+          <a:lnRef idx="1">
+            <a:schemeClr val="accent1"/>
+          </a:lnRef>
+          <a:fillRef idx="3">
+            <a:schemeClr val="accent1"/>
+          </a:fillRef>
+          <a:effectRef idx="2">
+            <a:schemeClr val="accent1"/>
+          </a:effectRef>
+          <a:fontRef idx="minor">
+            <a:schemeClr val="lt1"/>
+          </a:fontRef>
+        </p:style>
+        <p:txBody>
+          <a:bodyPr rtlCol="0" anchor="ctr"/>
+          <a:lstStyle/>
+          <a:p>
+            <a:pPr algn="ctr"/>
+          </a:p>
+        </p:txBody>
+      </p:sp>
+      <p:sp>
+        <p:nvSpPr>
+          <p:cNvPr id="19" name="Rectangle 18"/>
+          <p:cNvSpPr/>
+          <p:nvPr/>
+        </p:nvSpPr>
+        <p:spPr>
+          <a:xfrm>
+            <a:off x="6309360" y="2240280"/>
+            <a:ext cx="73152" cy="2606040"/>
+          </a:xfrm>
+          <a:prstGeom prst="rect">
+            <a:avLst/>
+          </a:prstGeom>
+          <a:solidFill>
+            <a:srgbClr val="2563EB"/>
+          </a:solidFill>
+          <a:ln>
+            <a:noFill/>
+          </a:ln>
+          <a:effectLst/>
+        </p:spPr>
+        <p:style>
+          <a:lnRef idx="1">
+            <a:schemeClr val="accent1"/>
+          </a:lnRef>
+          <a:fillRef idx="3">
+            <a:schemeClr val="accent1"/>
+          </a:fillRef>
+          <a:effectRef idx="2">
+            <a:schemeClr val="accent1"/>
+          </a:effectRef>
+          <a:fontRef idx="minor">
+            <a:schemeClr val="lt1"/>
+          </a:fontRef>
+        </p:style>
+        <p:txBody>
+          <a:bodyPr rtlCol="0" anchor="ctr"/>
+          <a:lstStyle/>
+          <a:p>
+            <a:pPr algn="ctr"/>
+          </a:p>
+        </p:txBody>
+      </p:sp>
+      <p:sp>
+        <p:nvSpPr>
+          <p:cNvPr id="20" name="TextBox 19"/>
+          <p:cNvSpPr txBox="1"/>
+          <p:nvPr/>
+        </p:nvSpPr>
+        <p:spPr>
+          <a:xfrm>
+            <a:off x="6492240" y="2386584"/>
+            <a:ext cx="914400" cy="566928"/>
+          </a:xfrm>
+          <a:prstGeom prst="rect">
+            <a:avLst/>
+          </a:prstGeom>
+          <a:noFill/>
+        </p:spPr>
+        <p:txBody>
+          <a:bodyPr wrap="square" lIns="0" rIns="0" tIns="0" bIns="0" anchor="t">
+            <a:spAutoFit/>
+          </a:bodyPr>
+          <a:lstStyle/>
+          <a:p>
+            <a:pPr algn="l">
+              <a:lnSpc>
+                <a:spcPct val="130000"/>
+              </a:lnSpc>
+            </a:pPr>
+            <a:r>
+              <a:rPr sz="2600" b="0" i="0">
+                <a:solidFill>
+                  <a:srgbClr val="2563EB"/>
+                </a:solidFill>
+                <a:latin typeface="Calibri"/>
+              </a:rPr>
+              <a:t>🤫</a:t>
+            </a:r>
+          </a:p>
+        </p:txBody>
+      </p:sp>
+      <p:sp>
+        <p:nvSpPr>
+          <p:cNvPr id="21" name="TextBox 20"/>
+          <p:cNvSpPr txBox="1"/>
+          <p:nvPr/>
+        </p:nvSpPr>
+        <p:spPr>
+          <a:xfrm>
+            <a:off x="6492240" y="2971800"/>
+            <a:ext cx="2423160" cy="457200"/>
+          </a:xfrm>
+          <a:prstGeom prst="rect">
+            <a:avLst/>
+          </a:prstGeom>
+          <a:noFill/>
+        </p:spPr>
+        <p:txBody>
+          <a:bodyPr wrap="square" lIns="0" rIns="0" tIns="0" bIns="0" anchor="t">
+            <a:spAutoFit/>
+          </a:bodyPr>
+          <a:lstStyle/>
+          <a:p>
+            <a:pPr algn="l">
+              <a:lnSpc>
+                <a:spcPct val="130000"/>
+              </a:lnSpc>
+            </a:pPr>
+            <a:r>
+              <a:rPr sz="1700" b="1" i="0">
+                <a:solidFill>
+                  <a:srgbClr val="1F2937"/>
+                </a:solidFill>
+                <a:latin typeface="Cambria"/>
+              </a:rPr>
+              <a:t>急に静かに</a:t>
+            </a:r>
+          </a:p>
+        </p:txBody>
+      </p:sp>
+      <p:sp>
+        <p:nvSpPr>
+          <p:cNvPr id="22" name="TextBox 21"/>
+          <p:cNvSpPr txBox="1"/>
+          <p:nvPr/>
+        </p:nvSpPr>
+        <p:spPr>
+          <a:xfrm>
+            <a:off x="6492240" y="3456432"/>
+            <a:ext cx="2331720" cy="822960"/>
+          </a:xfrm>
+          <a:prstGeom prst="rect">
+            <a:avLst/>
+          </a:prstGeom>
+          <a:noFill/>
+        </p:spPr>
+        <p:txBody>
+          <a:bodyPr wrap="square" lIns="0" rIns="0" tIns="0" bIns="0" anchor="t">
+            <a:spAutoFit/>
+          </a:bodyPr>
+          <a:lstStyle/>
+          <a:p>
+            <a:pPr algn="l">
+              <a:lnSpc>
+                <a:spcPct val="140000"/>
+              </a:lnSpc>
+            </a:pPr>
+            <a:r>
+              <a:rPr sz="1100" b="0" i="0">
+                <a:solidFill>
+                  <a:srgbClr val="1F2937"/>
+                </a:solidFill>
+                <a:latin typeface="Calibri"/>
+              </a:rPr>
+              <a:t>普段活動している PC が
+急にログを残さなくなる</a:t>
+            </a:r>
+          </a:p>
+        </p:txBody>
+      </p:sp>
+      <p:sp>
+        <p:nvSpPr>
+          <p:cNvPr id="23" name="TextBox 22"/>
+          <p:cNvSpPr txBox="1"/>
+          <p:nvPr/>
+        </p:nvSpPr>
+        <p:spPr>
+          <a:xfrm>
+            <a:off x="6492240" y="4325112"/>
+            <a:ext cx="2331720" cy="457200"/>
+          </a:xfrm>
+          <a:prstGeom prst="rect">
+            <a:avLst/>
+          </a:prstGeom>
+          <a:noFill/>
+        </p:spPr>
+        <p:txBody>
+          <a:bodyPr wrap="square" lIns="0" rIns="0" tIns="0" bIns="0" anchor="t">
+            <a:spAutoFit/>
+          </a:bodyPr>
+          <a:lstStyle/>
+          <a:p>
+            <a:pPr algn="l">
+              <a:lnSpc>
+                <a:spcPct val="130000"/>
+              </a:lnSpc>
+            </a:pPr>
+            <a:r>
+              <a:rPr sz="1000" b="0" i="1">
+                <a:solidFill>
+                  <a:srgbClr val="5B6472"/>
+                </a:solidFill>
+                <a:latin typeface="Calibri"/>
+              </a:rPr>
+              <a:t>例: 攻撃者がログを消した</a:t>
+            </a:r>
+          </a:p>
+        </p:txBody>
+      </p:sp>
+      <p:sp>
+        <p:nvSpPr>
+          <p:cNvPr id="24" name="Rounded Rectangle 23"/>
+          <p:cNvSpPr/>
+          <p:nvPr/>
+        </p:nvSpPr>
+        <p:spPr>
+          <a:xfrm>
+            <a:off x="9189720" y="2240280"/>
+            <a:ext cx="2697480" cy="2606040"/>
+          </a:xfrm>
+          <a:prstGeom prst="roundRect">
+            <a:avLst/>
+          </a:prstGeom>
+          <a:solidFill>
+            <a:srgbClr val="FFFFFF"/>
+          </a:solidFill>
+          <a:ln w="9525">
+            <a:solidFill>
+              <a:srgbClr val="DDE3EE"/>
+            </a:solidFill>
+          </a:ln>
+          <a:effectLst/>
+        </p:spPr>
+        <p:style>
+          <a:lnRef idx="1">
+            <a:schemeClr val="accent1"/>
+          </a:lnRef>
+          <a:fillRef idx="3">
+            <a:schemeClr val="accent1"/>
+          </a:fillRef>
+          <a:effectRef idx="2">
+            <a:schemeClr val="accent1"/>
+          </a:effectRef>
+          <a:fontRef idx="minor">
+            <a:schemeClr val="lt1"/>
+          </a:fontRef>
+        </p:style>
+        <p:txBody>
+          <a:bodyPr rtlCol="0" anchor="ctr"/>
+          <a:lstStyle/>
+          <a:p>
+            <a:pPr algn="ctr"/>
+          </a:p>
+        </p:txBody>
+      </p:sp>
+      <p:sp>
+        <p:nvSpPr>
+          <p:cNvPr id="25" name="Rectangle 24"/>
+          <p:cNvSpPr/>
+          <p:nvPr/>
+        </p:nvSpPr>
+        <p:spPr>
+          <a:xfrm>
+            <a:off x="9189720" y="2240280"/>
+            <a:ext cx="73152" cy="2606040"/>
+          </a:xfrm>
+          <a:prstGeom prst="rect">
+            <a:avLst/>
+          </a:prstGeom>
+          <a:solidFill>
+            <a:srgbClr val="2563EB"/>
+          </a:solidFill>
+          <a:ln>
+            <a:noFill/>
+          </a:ln>
+          <a:effectLst/>
+        </p:spPr>
+        <p:style>
+          <a:lnRef idx="1">
+            <a:schemeClr val="accent1"/>
+          </a:lnRef>
+          <a:fillRef idx="3">
+            <a:schemeClr val="accent1"/>
+          </a:fillRef>
+          <a:effectRef idx="2">
+            <a:schemeClr val="accent1"/>
+          </a:effectRef>
+          <a:fontRef idx="minor">
+            <a:schemeClr val="lt1"/>
+          </a:fontRef>
+        </p:style>
+        <p:txBody>
+          <a:bodyPr rtlCol="0" anchor="ctr"/>
+          <a:lstStyle/>
+          <a:p>
+            <a:pPr algn="ctr"/>
+          </a:p>
+        </p:txBody>
+      </p:sp>
+      <p:sp>
+        <p:nvSpPr>
+          <p:cNvPr id="26" name="TextBox 25"/>
+          <p:cNvSpPr txBox="1"/>
+          <p:nvPr/>
+        </p:nvSpPr>
+        <p:spPr>
+          <a:xfrm>
+            <a:off x="9372600" y="2386584"/>
+            <a:ext cx="914400" cy="566928"/>
+          </a:xfrm>
+          <a:prstGeom prst="rect">
+            <a:avLst/>
+          </a:prstGeom>
+          <a:noFill/>
+        </p:spPr>
+        <p:txBody>
+          <a:bodyPr wrap="square" lIns="0" rIns="0" tIns="0" bIns="0" anchor="t">
+            <a:spAutoFit/>
+          </a:bodyPr>
+          <a:lstStyle/>
+          <a:p>
+            <a:pPr algn="l">
+              <a:lnSpc>
+                <a:spcPct val="130000"/>
+              </a:lnSpc>
+            </a:pPr>
+            <a:r>
+              <a:rPr sz="2600" b="0" i="0">
+                <a:solidFill>
+                  <a:srgbClr val="2563EB"/>
+                </a:solidFill>
+                <a:latin typeface="Calibri"/>
+              </a:rPr>
+              <a:t>🌙</a:t>
+            </a:r>
+          </a:p>
+        </p:txBody>
+      </p:sp>
+      <p:sp>
+        <p:nvSpPr>
+          <p:cNvPr id="27" name="TextBox 26"/>
+          <p:cNvSpPr txBox="1"/>
+          <p:nvPr/>
+        </p:nvSpPr>
+        <p:spPr>
+          <a:xfrm>
+            <a:off x="9372600" y="2971800"/>
+            <a:ext cx="2423160" cy="457200"/>
+          </a:xfrm>
+          <a:prstGeom prst="rect">
+            <a:avLst/>
+          </a:prstGeom>
+          <a:noFill/>
+        </p:spPr>
+        <p:txBody>
+          <a:bodyPr wrap="square" lIns="0" rIns="0" tIns="0" bIns="0" anchor="t">
+            <a:spAutoFit/>
+          </a:bodyPr>
+          <a:lstStyle/>
+          <a:p>
+            <a:pPr algn="l">
+              <a:lnSpc>
+                <a:spcPct val="130000"/>
+              </a:lnSpc>
+            </a:pPr>
+            <a:r>
+              <a:rPr sz="1700" b="1" i="0">
+                <a:solidFill>
+                  <a:srgbClr val="1F2937"/>
+                </a:solidFill>
+                <a:latin typeface="Cambria"/>
+              </a:rPr>
+              <a:t>時間外の活動</a:t>
+            </a:r>
+          </a:p>
+        </p:txBody>
+      </p:sp>
+      <p:sp>
+        <p:nvSpPr>
+          <p:cNvPr id="28" name="TextBox 27"/>
+          <p:cNvSpPr txBox="1"/>
+          <p:nvPr/>
+        </p:nvSpPr>
+        <p:spPr>
+          <a:xfrm>
+            <a:off x="9372600" y="3456432"/>
+            <a:ext cx="2331720" cy="822960"/>
+          </a:xfrm>
+          <a:prstGeom prst="rect">
+            <a:avLst/>
+          </a:prstGeom>
+          <a:noFill/>
+        </p:spPr>
+        <p:txBody>
+          <a:bodyPr wrap="square" lIns="0" rIns="0" tIns="0" bIns="0" anchor="t">
+            <a:spAutoFit/>
+          </a:bodyPr>
+          <a:lstStyle/>
+          <a:p>
+            <a:pPr algn="l">
+              <a:lnSpc>
+                <a:spcPct val="140000"/>
+              </a:lnSpc>
+            </a:pPr>
+            <a:r>
+              <a:rPr sz="1100" b="0" i="0">
+                <a:solidFill>
+                  <a:srgbClr val="1F2937"/>
+                </a:solidFill>
+                <a:latin typeface="Calibri"/>
+              </a:rPr>
+              <a:t>深夜などの業務時間外に
+重要な動きが発生</a:t>
+            </a:r>
+          </a:p>
+        </p:txBody>
+      </p:sp>
+      <p:sp>
+        <p:nvSpPr>
+          <p:cNvPr id="29" name="TextBox 28"/>
+          <p:cNvSpPr txBox="1"/>
+          <p:nvPr/>
+        </p:nvSpPr>
+        <p:spPr>
+          <a:xfrm>
+            <a:off x="9372600" y="4325112"/>
+            <a:ext cx="2331720" cy="457200"/>
+          </a:xfrm>
+          <a:prstGeom prst="rect">
+            <a:avLst/>
+          </a:prstGeom>
+          <a:noFill/>
+        </p:spPr>
+        <p:txBody>
+          <a:bodyPr wrap="square" lIns="0" rIns="0" tIns="0" bIns="0" anchor="t">
+            <a:spAutoFit/>
+          </a:bodyPr>
+          <a:lstStyle/>
+          <a:p>
+            <a:pPr algn="l">
+              <a:lnSpc>
+                <a:spcPct val="130000"/>
+              </a:lnSpc>
+            </a:pPr>
+            <a:r>
+              <a:rPr sz="1000" b="0" i="1">
+                <a:solidFill>
+                  <a:srgbClr val="5B6472"/>
+                </a:solidFill>
+                <a:latin typeface="Calibri"/>
+              </a:rPr>
+              <a:t>例: 業務外を狙った侵入</a:t>
+            </a:r>
+          </a:p>
+        </p:txBody>
+      </p:sp>
+      <p:sp>
+        <p:nvSpPr>
+          <p:cNvPr id="30" name="Rounded Rectangle 29"/>
+          <p:cNvSpPr/>
+          <p:nvPr/>
+        </p:nvSpPr>
+        <p:spPr>
+          <a:xfrm>
+            <a:off x="548640" y="5029200"/>
+            <a:ext cx="11064240" cy="1371600"/>
+          </a:xfrm>
+          <a:prstGeom prst="roundRect">
+            <a:avLst/>
+          </a:prstGeom>
+          <a:solidFill>
+            <a:srgbClr val="E8F0FE"/>
+          </a:solidFill>
+          <a:ln w="9525">
+            <a:solidFill>
+              <a:srgbClr val="E8F0FE"/>
+            </a:solidFill>
+          </a:ln>
+          <a:effectLst/>
+        </p:spPr>
+        <p:style>
+          <a:lnRef idx="1">
+            <a:schemeClr val="accent1"/>
+          </a:lnRef>
+          <a:fillRef idx="3">
+            <a:schemeClr val="accent1"/>
+          </a:fillRef>
+          <a:effectRef idx="2">
+            <a:schemeClr val="accent1"/>
+          </a:effectRef>
+          <a:fontRef idx="minor">
+            <a:schemeClr val="lt1"/>
+          </a:fontRef>
+        </p:style>
+        <p:txBody>
+          <a:bodyPr rtlCol="0" anchor="ctr"/>
+          <a:lstStyle/>
+          <a:p>
+            <a:pPr algn="ctr"/>
+          </a:p>
+        </p:txBody>
+      </p:sp>
+      <p:sp>
+        <p:nvSpPr>
+          <p:cNvPr id="31" name="TextBox 30"/>
+          <p:cNvSpPr txBox="1"/>
+          <p:nvPr/>
+        </p:nvSpPr>
+        <p:spPr>
+          <a:xfrm>
+            <a:off x="914400" y="5230368"/>
+            <a:ext cx="4937760" cy="365760"/>
+          </a:xfrm>
+          <a:prstGeom prst="rect">
+            <a:avLst/>
+          </a:prstGeom>
+          <a:noFill/>
+        </p:spPr>
+        <p:txBody>
+          <a:bodyPr wrap="square" lIns="0" rIns="0" tIns="0" bIns="0" anchor="t">
+            <a:spAutoFit/>
+          </a:bodyPr>
+          <a:lstStyle/>
+          <a:p>
+            <a:pPr algn="l">
+              <a:lnSpc>
+                <a:spcPct val="130000"/>
+              </a:lnSpc>
+            </a:pPr>
+            <a:r>
+              <a:rPr sz="1350" b="1" i="0">
+                <a:solidFill>
+                  <a:srgbClr val="1F2937"/>
+                </a:solidFill>
+                <a:latin typeface="Calibri"/>
+              </a:rPr>
+              <a:t>📏 ルールによる検知 (既存の方法)</a:t>
+            </a:r>
+          </a:p>
+        </p:txBody>
+      </p:sp>
+      <p:sp>
+        <p:nvSpPr>
+          <p:cNvPr id="32" name="TextBox 31"/>
+          <p:cNvSpPr txBox="1"/>
+          <p:nvPr/>
+        </p:nvSpPr>
+        <p:spPr>
+          <a:xfrm>
+            <a:off x="914400" y="5614416"/>
+            <a:ext cx="4937760" cy="685800"/>
+          </a:xfrm>
+          <a:prstGeom prst="rect">
+            <a:avLst/>
+          </a:prstGeom>
+          <a:noFill/>
+        </p:spPr>
+        <p:txBody>
+          <a:bodyPr wrap="square" lIns="0" rIns="0" tIns="0" bIns="0" anchor="t">
+            <a:spAutoFit/>
+          </a:bodyPr>
+          <a:lstStyle/>
+          <a:p>
+            <a:pPr algn="l">
+              <a:lnSpc>
+                <a:spcPct val="140000"/>
+              </a:lnSpc>
+            </a:pPr>
+            <a:r>
+              <a:rPr sz="1150" b="0" i="0">
+                <a:solidFill>
+                  <a:srgbClr val="5B6472"/>
+                </a:solidFill>
+                <a:latin typeface="Calibri"/>
+              </a:rPr>
+              <a:t>事前に知っている「悪い特徴」と一致したら警告。
+既に知られている手口には確実で強い。</a:t>
+            </a:r>
+          </a:p>
+        </p:txBody>
+      </p:sp>
+      <p:sp>
+        <p:nvSpPr>
+          <p:cNvPr id="33" name="Rectangle 32"/>
+          <p:cNvSpPr/>
+          <p:nvPr/>
+        </p:nvSpPr>
+        <p:spPr>
+          <a:xfrm>
+            <a:off x="6053328" y="5257800"/>
+            <a:ext cx="16459" cy="914400"/>
+          </a:xfrm>
+          <a:prstGeom prst="rect">
+            <a:avLst/>
+          </a:prstGeom>
+          <a:solidFill>
+            <a:srgbClr val="DDE3EE"/>
+          </a:solidFill>
+          <a:ln>
+            <a:noFill/>
+          </a:ln>
+          <a:effectLst/>
+        </p:spPr>
+        <p:style>
+          <a:lnRef idx="1">
+            <a:schemeClr val="accent1"/>
+          </a:lnRef>
+          <a:fillRef idx="3">
+            <a:schemeClr val="accent1"/>
+          </a:fillRef>
+          <a:effectRef idx="2">
+            <a:schemeClr val="accent1"/>
+          </a:effectRef>
+          <a:fontRef idx="minor">
+            <a:schemeClr val="lt1"/>
+          </a:fontRef>
+        </p:style>
+        <p:txBody>
+          <a:bodyPr rtlCol="0" anchor="ctr"/>
+          <a:lstStyle/>
+          <a:p>
+            <a:pPr algn="ctr"/>
+          </a:p>
+        </p:txBody>
+      </p:sp>
+      <p:sp>
+        <p:nvSpPr>
+          <p:cNvPr id="34" name="TextBox 33"/>
+          <p:cNvSpPr txBox="1"/>
+          <p:nvPr/>
+        </p:nvSpPr>
+        <p:spPr>
+          <a:xfrm>
+            <a:off x="6400800" y="5230368"/>
+            <a:ext cx="4937760" cy="365760"/>
+          </a:xfrm>
+          <a:prstGeom prst="rect">
+            <a:avLst/>
+          </a:prstGeom>
+          <a:noFill/>
+        </p:spPr>
+        <p:txBody>
+          <a:bodyPr wrap="square" lIns="0" rIns="0" tIns="0" bIns="0" anchor="t">
+            <a:spAutoFit/>
+          </a:bodyPr>
+          <a:lstStyle/>
+          <a:p>
+            <a:pPr algn="l">
+              <a:lnSpc>
+                <a:spcPct val="130000"/>
+              </a:lnSpc>
+            </a:pPr>
+            <a:r>
+              <a:rPr sz="1350" b="1" i="0">
+                <a:solidFill>
+                  <a:srgbClr val="1D4ED8"/>
+                </a:solidFill>
+                <a:latin typeface="Calibri"/>
+              </a:rPr>
+              <a:t>📈 振舞いによる検知 (今回自作した分析)</a:t>
+            </a:r>
+          </a:p>
+        </p:txBody>
+      </p:sp>
+      <p:sp>
+        <p:nvSpPr>
+          <p:cNvPr id="35" name="TextBox 34"/>
+          <p:cNvSpPr txBox="1"/>
+          <p:nvPr/>
+        </p:nvSpPr>
+        <p:spPr>
+          <a:xfrm>
+            <a:off x="6400800" y="5614416"/>
+            <a:ext cx="4937760" cy="685800"/>
+          </a:xfrm>
+          <a:prstGeom prst="rect">
+            <a:avLst/>
+          </a:prstGeom>
+          <a:noFill/>
+        </p:spPr>
+        <p:txBody>
+          <a:bodyPr wrap="square" lIns="0" rIns="0" tIns="0" bIns="0" anchor="t">
+            <a:spAutoFit/>
+          </a:bodyPr>
+          <a:lstStyle/>
+          <a:p>
+            <a:pPr algn="l">
+              <a:lnSpc>
+                <a:spcPct val="140000"/>
+              </a:lnSpc>
+            </a:pPr>
+            <a:r>
+              <a:rPr sz="1150" b="0" i="0">
+                <a:solidFill>
+                  <a:srgbClr val="5B6472"/>
+                </a:solidFill>
+                <a:latin typeface="Calibri"/>
+              </a:rPr>
+              <a:t>「普段との違い」に反応して知らせる。
+ルールがまだ無い未知の手口への「気づき」になる。</a:t>
+            </a:r>
+          </a:p>
+        </p:txBody>
+      </p:sp>
+      <p:sp>
+        <p:nvSpPr>
+          <p:cNvPr id="36" name="TextBox 35"/>
           <p:cNvSpPr txBox="1"/>
           <p:nvPr/>
         </p:nvSpPr>
@@ -5999,11 +7550,11 @@
             <a:r>
               <a:rPr sz="900" b="0" i="0">
                 <a:solidFill>
-                  <a:srgbClr val="CADCFC"/>
+                  <a:srgbClr val="5B6472"/>
                 </a:solidFill>
                 <a:latin typeface="Calibri"/>
               </a:rPr>
-              <a:t>12 / 14</a:t>
+              <a:t>12 / 15</a:t>
             </a:r>
           </a:p>
         </p:txBody>
@@ -6041,7 +7592,7 @@
             <a:avLst/>
           </a:prstGeom>
           <a:solidFill>
-            <a:srgbClr val="F4F6FA"/>
+            <a:srgbClr val="1B254F"/>
           </a:solidFill>
           <a:ln>
             <a:noFill/>
@@ -6078,176 +7629,86 @@
         </p:nvSpPr>
         <p:spPr>
           <a:xfrm>
-            <a:off x="548640" y="347472"/>
-            <a:ext cx="10972800" cy="274320"/>
-          </a:xfrm>
-          <a:prstGeom prst="rect">
-            <a:avLst/>
-          </a:prstGeom>
-          <a:noFill/>
-        </p:spPr>
-        <p:txBody>
-          <a:bodyPr wrap="square" lIns="0" rIns="0" tIns="0" bIns="0" anchor="t">
-            <a:spAutoFit/>
-          </a:bodyPr>
-          <a:lstStyle/>
-          <a:p>
-            <a:pPr algn="l">
-              <a:lnSpc>
-                <a:spcPct val="130000"/>
-              </a:lnSpc>
-            </a:pPr>
-            <a:r>
-              <a:rPr sz="1100" b="1" i="0">
-                <a:solidFill>
-                  <a:srgbClr val="2563EB"/>
+            <a:off x="548640" y="1737360"/>
+            <a:ext cx="10972800" cy="1463040"/>
+          </a:xfrm>
+          <a:prstGeom prst="rect">
+            <a:avLst/>
+          </a:prstGeom>
+          <a:noFill/>
+        </p:spPr>
+        <p:txBody>
+          <a:bodyPr wrap="square" lIns="0" rIns="0" tIns="0" bIns="0" anchor="t">
+            <a:spAutoFit/>
+          </a:bodyPr>
+          <a:lstStyle/>
+          <a:p>
+            <a:pPr algn="ctr">
+              <a:lnSpc>
+                <a:spcPct val="130000"/>
+              </a:lnSpc>
+            </a:pPr>
+            <a:r>
+              <a:rPr sz="11000" b="1" i="0">
+                <a:solidFill>
+                  <a:srgbClr val="FFFFFF"/>
+                </a:solidFill>
+                <a:latin typeface="Cambria"/>
+              </a:rPr>
+              <a:t>DEMO</a:t>
+            </a:r>
+          </a:p>
+        </p:txBody>
+      </p:sp>
+      <p:sp>
+        <p:nvSpPr>
+          <p:cNvPr id="4" name="TextBox 3"/>
+          <p:cNvSpPr txBox="1"/>
+          <p:nvPr/>
+        </p:nvSpPr>
+        <p:spPr>
+          <a:xfrm>
+            <a:off x="548640" y="3977639"/>
+            <a:ext cx="10972800" cy="548640"/>
+          </a:xfrm>
+          <a:prstGeom prst="rect">
+            <a:avLst/>
+          </a:prstGeom>
+          <a:noFill/>
+        </p:spPr>
+        <p:txBody>
+          <a:bodyPr wrap="square" lIns="0" rIns="0" tIns="0" bIns="0" anchor="t">
+            <a:spAutoFit/>
+          </a:bodyPr>
+          <a:lstStyle/>
+          <a:p>
+            <a:pPr algn="ctr">
+              <a:lnSpc>
+                <a:spcPct val="130000"/>
+              </a:lnSpc>
+            </a:pPr>
+            <a:r>
+              <a:rPr sz="2400" b="0" i="1">
+                <a:solidFill>
+                  <a:srgbClr val="CADCFC"/>
                 </a:solidFill>
                 <a:latin typeface="Calibri"/>
               </a:rPr>
-              <a:t>成果</a:t>
-            </a:r>
-          </a:p>
-        </p:txBody>
-      </p:sp>
-      <p:sp>
-        <p:nvSpPr>
-          <p:cNvPr id="4" name="TextBox 3"/>
-          <p:cNvSpPr txBox="1"/>
-          <p:nvPr/>
-        </p:nvSpPr>
-        <p:spPr>
-          <a:xfrm>
-            <a:off x="548640" y="621792"/>
-            <a:ext cx="11155680" cy="640080"/>
-          </a:xfrm>
-          <a:prstGeom prst="rect">
-            <a:avLst/>
-          </a:prstGeom>
-          <a:noFill/>
-        </p:spPr>
-        <p:txBody>
-          <a:bodyPr wrap="square" lIns="0" rIns="0" tIns="0" bIns="0" anchor="t">
-            <a:spAutoFit/>
-          </a:bodyPr>
-          <a:lstStyle/>
-          <a:p>
-            <a:pPr algn="l">
-              <a:lnSpc>
-                <a:spcPct val="130000"/>
-              </a:lnSpc>
-            </a:pPr>
-            <a:r>
-              <a:rPr sz="2800" b="1" i="0">
-                <a:solidFill>
-                  <a:srgbClr val="1F2937"/>
-                </a:solidFill>
-                <a:latin typeface="Cambria"/>
-              </a:rPr>
-              <a:t>まとめ — 開発したもの</a:t>
-            </a:r>
-          </a:p>
-        </p:txBody>
-      </p:sp>
-      <p:sp>
-        <p:nvSpPr>
-          <p:cNvPr id="5" name="Rounded Rectangle 4"/>
-          <p:cNvSpPr/>
-          <p:nvPr/>
-        </p:nvSpPr>
-        <p:spPr>
-          <a:xfrm>
-            <a:off x="548640" y="1783080"/>
-            <a:ext cx="2697480" cy="3291840"/>
-          </a:xfrm>
-          <a:prstGeom prst="roundRect">
-            <a:avLst/>
-          </a:prstGeom>
-          <a:solidFill>
-            <a:srgbClr val="FFFFFF"/>
-          </a:solidFill>
-          <a:ln w="9525">
-            <a:solidFill>
-              <a:srgbClr val="DDE3EE"/>
-            </a:solidFill>
-          </a:ln>
-          <a:effectLst/>
-        </p:spPr>
-        <p:style>
-          <a:lnRef idx="1">
-            <a:schemeClr val="accent1"/>
-          </a:lnRef>
-          <a:fillRef idx="3">
-            <a:schemeClr val="accent1"/>
-          </a:fillRef>
-          <a:effectRef idx="2">
-            <a:schemeClr val="accent1"/>
-          </a:effectRef>
-          <a:fontRef idx="minor">
-            <a:schemeClr val="lt1"/>
-          </a:fontRef>
-        </p:style>
-        <p:txBody>
-          <a:bodyPr rtlCol="0" anchor="ctr"/>
-          <a:lstStyle/>
-          <a:p>
-            <a:pPr algn="ctr"/>
-          </a:p>
-        </p:txBody>
-      </p:sp>
-      <p:sp>
-        <p:nvSpPr>
-          <p:cNvPr id="6" name="Rectangle 5"/>
-          <p:cNvSpPr/>
-          <p:nvPr/>
-        </p:nvSpPr>
-        <p:spPr>
-          <a:xfrm>
-            <a:off x="548640" y="1783080"/>
-            <a:ext cx="73152" cy="3291840"/>
-          </a:xfrm>
-          <a:prstGeom prst="rect">
-            <a:avLst/>
-          </a:prstGeom>
-          <a:solidFill>
-            <a:srgbClr val="1D4ED8"/>
-          </a:solidFill>
-          <a:ln>
-            <a:noFill/>
-          </a:ln>
-          <a:effectLst/>
-        </p:spPr>
-        <p:style>
-          <a:lnRef idx="1">
-            <a:schemeClr val="accent1"/>
-          </a:lnRef>
-          <a:fillRef idx="3">
-            <a:schemeClr val="accent1"/>
-          </a:fillRef>
-          <a:effectRef idx="2">
-            <a:schemeClr val="accent1"/>
-          </a:effectRef>
-          <a:fontRef idx="minor">
-            <a:schemeClr val="lt1"/>
-          </a:fontRef>
-        </p:style>
-        <p:txBody>
-          <a:bodyPr rtlCol="0" anchor="ctr"/>
-          <a:lstStyle/>
-          <a:p>
-            <a:pPr algn="ctr"/>
-          </a:p>
-        </p:txBody>
-      </p:sp>
-      <p:sp>
-        <p:nvSpPr>
-          <p:cNvPr id="7" name="TextBox 6"/>
-          <p:cNvSpPr txBox="1"/>
-          <p:nvPr/>
-        </p:nvSpPr>
-        <p:spPr>
-          <a:xfrm>
-            <a:off x="713232" y="2194560"/>
-            <a:ext cx="2368296" cy="1005840"/>
+              <a:t>実際の画面で動かしてみます</a:t>
+            </a:r>
+          </a:p>
+        </p:txBody>
+      </p:sp>
+      <p:sp>
+        <p:nvSpPr>
+          <p:cNvPr id="5" name="TextBox 4"/>
+          <p:cNvSpPr txBox="1"/>
+          <p:nvPr/>
+        </p:nvSpPr>
+        <p:spPr>
+          <a:xfrm>
+            <a:off x="548640" y="4709160"/>
+            <a:ext cx="10972800" cy="457200"/>
           </a:xfrm>
           <a:prstGeom prst="rect">
             <a:avLst/>
@@ -6266,808 +7727,20 @@
               </a:lnSpc>
             </a:pPr>
             <a:r>
-              <a:rPr sz="4000" b="1" i="0">
-                <a:solidFill>
-                  <a:srgbClr val="1D4ED8"/>
-                </a:solidFill>
-                <a:latin typeface="Cambria"/>
-              </a:rPr>
-              <a:t>新文法</a:t>
-            </a:r>
-          </a:p>
-        </p:txBody>
-      </p:sp>
-      <p:sp>
-        <p:nvSpPr>
-          <p:cNvPr id="8" name="TextBox 7"/>
-          <p:cNvSpPr txBox="1"/>
-          <p:nvPr/>
-        </p:nvSpPr>
-        <p:spPr>
-          <a:xfrm>
-            <a:off x="548640" y="3200400"/>
-            <a:ext cx="2697480" cy="457200"/>
-          </a:xfrm>
-          <a:prstGeom prst="rect">
-            <a:avLst/>
-          </a:prstGeom>
-          <a:noFill/>
-        </p:spPr>
-        <p:txBody>
-          <a:bodyPr wrap="square" lIns="0" rIns="0" tIns="0" bIns="0" anchor="t">
-            <a:spAutoFit/>
-          </a:bodyPr>
-          <a:lstStyle/>
-          <a:p>
-            <a:pPr algn="ctr">
-              <a:lnSpc>
-                <a:spcPct val="130000"/>
-              </a:lnSpc>
-            </a:pPr>
-            <a:r>
-              <a:rPr sz="2000" b="0" i="0">
-                <a:solidFill>
-                  <a:srgbClr val="1F2937"/>
-                </a:solidFill>
-                <a:latin typeface="Cambria"/>
-              </a:rPr>
-              <a:t>lookup:</a:t>
-            </a:r>
-          </a:p>
-        </p:txBody>
-      </p:sp>
-      <p:sp>
-        <p:nvSpPr>
-          <p:cNvPr id="9" name="TextBox 8"/>
-          <p:cNvSpPr txBox="1"/>
-          <p:nvPr/>
-        </p:nvSpPr>
-        <p:spPr>
-          <a:xfrm>
-            <a:off x="731520" y="3840480"/>
-            <a:ext cx="2331720" cy="1005840"/>
-          </a:xfrm>
-          <a:prstGeom prst="rect">
-            <a:avLst/>
-          </a:prstGeom>
-          <a:noFill/>
-        </p:spPr>
-        <p:txBody>
-          <a:bodyPr wrap="square" lIns="0" rIns="0" tIns="0" bIns="0" anchor="t">
-            <a:spAutoFit/>
-          </a:bodyPr>
-          <a:lstStyle/>
-          <a:p>
-            <a:pPr algn="ctr">
-              <a:lnSpc>
-                <a:spcPct val="140000"/>
-              </a:lnSpc>
-            </a:pPr>
-            <a:r>
-              <a:rPr sz="1200" b="0" i="0">
-                <a:solidFill>
-                  <a:srgbClr val="5B6472"/>
+              <a:rPr sz="1500" b="0" i="0">
+                <a:solidFill>
+                  <a:srgbClr val="CADCFC"/>
                 </a:solidFill>
                 <a:latin typeface="Calibri"/>
               </a:rPr>
-              <a:t>エンジン本体 (Rust) を改造し
-リスト照合機能を追加</a:t>
-            </a:r>
-          </a:p>
-        </p:txBody>
-      </p:sp>
-      <p:sp>
-        <p:nvSpPr>
-          <p:cNvPr id="10" name="Rounded Rectangle 9"/>
-          <p:cNvSpPr/>
-          <p:nvPr/>
-        </p:nvSpPr>
-        <p:spPr>
-          <a:xfrm>
-            <a:off x="3429000" y="1783080"/>
-            <a:ext cx="2697480" cy="3291840"/>
-          </a:xfrm>
-          <a:prstGeom prst="roundRect">
-            <a:avLst/>
-          </a:prstGeom>
-          <a:solidFill>
-            <a:srgbClr val="FFFFFF"/>
-          </a:solidFill>
-          <a:ln w="9525">
-            <a:solidFill>
-              <a:srgbClr val="DDE3EE"/>
-            </a:solidFill>
-          </a:ln>
-          <a:effectLst/>
-        </p:spPr>
-        <p:style>
-          <a:lnRef idx="1">
-            <a:schemeClr val="accent1"/>
-          </a:lnRef>
-          <a:fillRef idx="3">
-            <a:schemeClr val="accent1"/>
-          </a:fillRef>
-          <a:effectRef idx="2">
-            <a:schemeClr val="accent1"/>
-          </a:effectRef>
-          <a:fontRef idx="minor">
-            <a:schemeClr val="lt1"/>
-          </a:fontRef>
-        </p:style>
-        <p:txBody>
-          <a:bodyPr rtlCol="0" anchor="ctr"/>
-          <a:lstStyle/>
-          <a:p>
-            <a:pPr algn="ctr"/>
-          </a:p>
-        </p:txBody>
-      </p:sp>
-      <p:sp>
-        <p:nvSpPr>
-          <p:cNvPr id="11" name="Rectangle 10"/>
-          <p:cNvSpPr/>
-          <p:nvPr/>
-        </p:nvSpPr>
-        <p:spPr>
-          <a:xfrm>
-            <a:off x="3429000" y="1783080"/>
-            <a:ext cx="73152" cy="3291840"/>
-          </a:xfrm>
-          <a:prstGeom prst="rect">
-            <a:avLst/>
-          </a:prstGeom>
-          <a:solidFill>
-            <a:srgbClr val="EA580C"/>
-          </a:solidFill>
-          <a:ln>
-            <a:noFill/>
-          </a:ln>
-          <a:effectLst/>
-        </p:spPr>
-        <p:style>
-          <a:lnRef idx="1">
-            <a:schemeClr val="accent1"/>
-          </a:lnRef>
-          <a:fillRef idx="3">
-            <a:schemeClr val="accent1"/>
-          </a:fillRef>
-          <a:effectRef idx="2">
-            <a:schemeClr val="accent1"/>
-          </a:effectRef>
-          <a:fontRef idx="minor">
-            <a:schemeClr val="lt1"/>
-          </a:fontRef>
-        </p:style>
-        <p:txBody>
-          <a:bodyPr rtlCol="0" anchor="ctr"/>
-          <a:lstStyle/>
-          <a:p>
-            <a:pPr algn="ctr"/>
-          </a:p>
-        </p:txBody>
-      </p:sp>
-      <p:sp>
-        <p:nvSpPr>
-          <p:cNvPr id="12" name="TextBox 11"/>
-          <p:cNvSpPr txBox="1"/>
-          <p:nvPr/>
-        </p:nvSpPr>
-        <p:spPr>
-          <a:xfrm>
-            <a:off x="3593592" y="2194560"/>
-            <a:ext cx="2368296" cy="1005840"/>
-          </a:xfrm>
-          <a:prstGeom prst="rect">
-            <a:avLst/>
-          </a:prstGeom>
-          <a:noFill/>
-        </p:spPr>
-        <p:txBody>
-          <a:bodyPr wrap="square" lIns="0" rIns="0" tIns="0" bIns="0" anchor="t">
-            <a:spAutoFit/>
-          </a:bodyPr>
-          <a:lstStyle/>
-          <a:p>
-            <a:pPr algn="ctr">
-              <a:lnSpc>
-                <a:spcPct val="130000"/>
-              </a:lnSpc>
-            </a:pPr>
-            <a:r>
-              <a:rPr sz="4000" b="1" i="0">
-                <a:solidFill>
-                  <a:srgbClr val="EA580C"/>
-                </a:solidFill>
-                <a:latin typeface="Cambria"/>
-              </a:rPr>
-              <a:t>13</a:t>
-            </a:r>
-          </a:p>
-        </p:txBody>
-      </p:sp>
-      <p:sp>
-        <p:nvSpPr>
-          <p:cNvPr id="13" name="TextBox 12"/>
-          <p:cNvSpPr txBox="1"/>
-          <p:nvPr/>
-        </p:nvSpPr>
-        <p:spPr>
-          <a:xfrm>
-            <a:off x="3429000" y="3200400"/>
-            <a:ext cx="2697480" cy="457200"/>
-          </a:xfrm>
-          <a:prstGeom prst="rect">
-            <a:avLst/>
-          </a:prstGeom>
-          <a:noFill/>
-        </p:spPr>
-        <p:txBody>
-          <a:bodyPr wrap="square" lIns="0" rIns="0" tIns="0" bIns="0" anchor="t">
-            <a:spAutoFit/>
-          </a:bodyPr>
-          <a:lstStyle/>
-          <a:p>
-            <a:pPr algn="ctr">
-              <a:lnSpc>
-                <a:spcPct val="130000"/>
-              </a:lnSpc>
-            </a:pPr>
-            <a:r>
-              <a:rPr sz="2000" b="0" i="0">
-                <a:solidFill>
-                  <a:srgbClr val="1F2937"/>
-                </a:solidFill>
-                <a:latin typeface="Cambria"/>
-              </a:rPr>
-              <a:t>本</a:t>
-            </a:r>
-          </a:p>
-        </p:txBody>
-      </p:sp>
-      <p:sp>
-        <p:nvSpPr>
-          <p:cNvPr id="14" name="TextBox 13"/>
-          <p:cNvSpPr txBox="1"/>
-          <p:nvPr/>
-        </p:nvSpPr>
-        <p:spPr>
-          <a:xfrm>
-            <a:off x="3611880" y="3840480"/>
-            <a:ext cx="2331720" cy="1005840"/>
-          </a:xfrm>
-          <a:prstGeom prst="rect">
-            <a:avLst/>
-          </a:prstGeom>
-          <a:noFill/>
-        </p:spPr>
-        <p:txBody>
-          <a:bodyPr wrap="square" lIns="0" rIns="0" tIns="0" bIns="0" anchor="t">
-            <a:spAutoFit/>
-          </a:bodyPr>
-          <a:lstStyle/>
-          <a:p>
-            <a:pPr algn="ctr">
-              <a:lnSpc>
-                <a:spcPct val="140000"/>
-              </a:lnSpc>
-            </a:pPr>
-            <a:r>
-              <a:rPr sz="1200" b="0" i="0">
-                <a:solidFill>
-                  <a:srgbClr val="5B6472"/>
-                </a:solidFill>
-                <a:latin typeface="Calibri"/>
-              </a:rPr>
-              <a:t>攻撃を見抜く検知ルールを
-自作 (痕跡隠蔽の検知など)</a:t>
-            </a:r>
-          </a:p>
-        </p:txBody>
-      </p:sp>
-      <p:sp>
-        <p:nvSpPr>
-          <p:cNvPr id="15" name="Rounded Rectangle 14"/>
-          <p:cNvSpPr/>
-          <p:nvPr/>
-        </p:nvSpPr>
-        <p:spPr>
-          <a:xfrm>
-            <a:off x="6309360" y="1783080"/>
-            <a:ext cx="2697480" cy="3291840"/>
-          </a:xfrm>
-          <a:prstGeom prst="roundRect">
-            <a:avLst/>
-          </a:prstGeom>
-          <a:solidFill>
-            <a:srgbClr val="FFFFFF"/>
-          </a:solidFill>
-          <a:ln w="9525">
-            <a:solidFill>
-              <a:srgbClr val="DDE3EE"/>
-            </a:solidFill>
-          </a:ln>
-          <a:effectLst/>
-        </p:spPr>
-        <p:style>
-          <a:lnRef idx="1">
-            <a:schemeClr val="accent1"/>
-          </a:lnRef>
-          <a:fillRef idx="3">
-            <a:schemeClr val="accent1"/>
-          </a:fillRef>
-          <a:effectRef idx="2">
-            <a:schemeClr val="accent1"/>
-          </a:effectRef>
-          <a:fontRef idx="minor">
-            <a:schemeClr val="lt1"/>
-          </a:fontRef>
-        </p:style>
-        <p:txBody>
-          <a:bodyPr rtlCol="0" anchor="ctr"/>
-          <a:lstStyle/>
-          <a:p>
-            <a:pPr algn="ctr"/>
-          </a:p>
-        </p:txBody>
-      </p:sp>
-      <p:sp>
-        <p:nvSpPr>
-          <p:cNvPr id="16" name="Rectangle 15"/>
-          <p:cNvSpPr/>
-          <p:nvPr/>
-        </p:nvSpPr>
-        <p:spPr>
-          <a:xfrm>
-            <a:off x="6309360" y="1783080"/>
-            <a:ext cx="73152" cy="3291840"/>
-          </a:xfrm>
-          <a:prstGeom prst="rect">
-            <a:avLst/>
-          </a:prstGeom>
-          <a:solidFill>
-            <a:srgbClr val="CA8A04"/>
-          </a:solidFill>
-          <a:ln>
-            <a:noFill/>
-          </a:ln>
-          <a:effectLst/>
-        </p:spPr>
-        <p:style>
-          <a:lnRef idx="1">
-            <a:schemeClr val="accent1"/>
-          </a:lnRef>
-          <a:fillRef idx="3">
-            <a:schemeClr val="accent1"/>
-          </a:fillRef>
-          <a:effectRef idx="2">
-            <a:schemeClr val="accent1"/>
-          </a:effectRef>
-          <a:fontRef idx="minor">
-            <a:schemeClr val="lt1"/>
-          </a:fontRef>
-        </p:style>
-        <p:txBody>
-          <a:bodyPr rtlCol="0" anchor="ctr"/>
-          <a:lstStyle/>
-          <a:p>
-            <a:pPr algn="ctr"/>
-          </a:p>
-        </p:txBody>
-      </p:sp>
-      <p:sp>
-        <p:nvSpPr>
-          <p:cNvPr id="17" name="TextBox 16"/>
-          <p:cNvSpPr txBox="1"/>
-          <p:nvPr/>
-        </p:nvSpPr>
-        <p:spPr>
-          <a:xfrm>
-            <a:off x="6473952" y="2194560"/>
-            <a:ext cx="2368296" cy="1005840"/>
-          </a:xfrm>
-          <a:prstGeom prst="rect">
-            <a:avLst/>
-          </a:prstGeom>
-          <a:noFill/>
-        </p:spPr>
-        <p:txBody>
-          <a:bodyPr wrap="square" lIns="0" rIns="0" tIns="0" bIns="0" anchor="t">
-            <a:spAutoFit/>
-          </a:bodyPr>
-          <a:lstStyle/>
-          <a:p>
-            <a:pPr algn="ctr">
-              <a:lnSpc>
-                <a:spcPct val="130000"/>
-              </a:lnSpc>
-            </a:pPr>
-            <a:r>
-              <a:rPr sz="4000" b="1" i="0">
-                <a:solidFill>
-                  <a:srgbClr val="CA8A04"/>
-                </a:solidFill>
-                <a:latin typeface="Cambria"/>
-              </a:rPr>
-              <a:t>約8,000</a:t>
-            </a:r>
-          </a:p>
-        </p:txBody>
-      </p:sp>
-      <p:sp>
-        <p:nvSpPr>
-          <p:cNvPr id="18" name="TextBox 17"/>
-          <p:cNvSpPr txBox="1"/>
-          <p:nvPr/>
-        </p:nvSpPr>
-        <p:spPr>
-          <a:xfrm>
-            <a:off x="6309360" y="3200400"/>
-            <a:ext cx="2697480" cy="457200"/>
-          </a:xfrm>
-          <a:prstGeom prst="rect">
-            <a:avLst/>
-          </a:prstGeom>
-          <a:noFill/>
-        </p:spPr>
-        <p:txBody>
-          <a:bodyPr wrap="square" lIns="0" rIns="0" tIns="0" bIns="0" anchor="t">
-            <a:spAutoFit/>
-          </a:bodyPr>
-          <a:lstStyle/>
-          <a:p>
-            <a:pPr algn="ctr">
-              <a:lnSpc>
-                <a:spcPct val="130000"/>
-              </a:lnSpc>
-            </a:pPr>
-            <a:r>
-              <a:rPr sz="2000" b="0" i="0">
-                <a:solidFill>
-                  <a:srgbClr val="1F2937"/>
-                </a:solidFill>
-                <a:latin typeface="Cambria"/>
-              </a:rPr>
-              <a:t>行</a:t>
-            </a:r>
-          </a:p>
-        </p:txBody>
-      </p:sp>
-      <p:sp>
-        <p:nvSpPr>
-          <p:cNvPr id="19" name="TextBox 18"/>
-          <p:cNvSpPr txBox="1"/>
-          <p:nvPr/>
-        </p:nvSpPr>
-        <p:spPr>
-          <a:xfrm>
-            <a:off x="6492240" y="3840480"/>
-            <a:ext cx="2331720" cy="1005840"/>
-          </a:xfrm>
-          <a:prstGeom prst="rect">
-            <a:avLst/>
-          </a:prstGeom>
-          <a:noFill/>
-        </p:spPr>
-        <p:txBody>
-          <a:bodyPr wrap="square" lIns="0" rIns="0" tIns="0" bIns="0" anchor="t">
-            <a:spAutoFit/>
-          </a:bodyPr>
-          <a:lstStyle/>
-          <a:p>
-            <a:pPr algn="ctr">
-              <a:lnSpc>
-                <a:spcPct val="140000"/>
-              </a:lnSpc>
-            </a:pPr>
-            <a:r>
-              <a:rPr sz="1200" b="0" i="0">
-                <a:solidFill>
-                  <a:srgbClr val="5B6472"/>
-                </a:solidFill>
-                <a:latin typeface="Calibri"/>
-              </a:rPr>
-              <a:t>結果を読み解く GUI を
-ゼロから開発</a:t>
-            </a:r>
-          </a:p>
-        </p:txBody>
-      </p:sp>
-      <p:sp>
-        <p:nvSpPr>
-          <p:cNvPr id="20" name="Rounded Rectangle 19"/>
-          <p:cNvSpPr/>
-          <p:nvPr/>
-        </p:nvSpPr>
-        <p:spPr>
-          <a:xfrm>
-            <a:off x="9189720" y="1783080"/>
-            <a:ext cx="2697480" cy="3291840"/>
-          </a:xfrm>
-          <a:prstGeom prst="roundRect">
-            <a:avLst/>
-          </a:prstGeom>
-          <a:solidFill>
-            <a:srgbClr val="FFFFFF"/>
-          </a:solidFill>
-          <a:ln w="9525">
-            <a:solidFill>
-              <a:srgbClr val="DDE3EE"/>
-            </a:solidFill>
-          </a:ln>
-          <a:effectLst/>
-        </p:spPr>
-        <p:style>
-          <a:lnRef idx="1">
-            <a:schemeClr val="accent1"/>
-          </a:lnRef>
-          <a:fillRef idx="3">
-            <a:schemeClr val="accent1"/>
-          </a:fillRef>
-          <a:effectRef idx="2">
-            <a:schemeClr val="accent1"/>
-          </a:effectRef>
-          <a:fontRef idx="minor">
-            <a:schemeClr val="lt1"/>
-          </a:fontRef>
-        </p:style>
-        <p:txBody>
-          <a:bodyPr rtlCol="0" anchor="ctr"/>
-          <a:lstStyle/>
-          <a:p>
-            <a:pPr algn="ctr"/>
-          </a:p>
-        </p:txBody>
-      </p:sp>
-      <p:sp>
-        <p:nvSpPr>
-          <p:cNvPr id="21" name="Rectangle 20"/>
-          <p:cNvSpPr/>
-          <p:nvPr/>
-        </p:nvSpPr>
-        <p:spPr>
-          <a:xfrm>
-            <a:off x="9189720" y="1783080"/>
-            <a:ext cx="73152" cy="3291840"/>
-          </a:xfrm>
-          <a:prstGeom prst="rect">
-            <a:avLst/>
-          </a:prstGeom>
-          <a:solidFill>
-            <a:srgbClr val="16A34A"/>
-          </a:solidFill>
-          <a:ln>
-            <a:noFill/>
-          </a:ln>
-          <a:effectLst/>
-        </p:spPr>
-        <p:style>
-          <a:lnRef idx="1">
-            <a:schemeClr val="accent1"/>
-          </a:lnRef>
-          <a:fillRef idx="3">
-            <a:schemeClr val="accent1"/>
-          </a:fillRef>
-          <a:effectRef idx="2">
-            <a:schemeClr val="accent1"/>
-          </a:effectRef>
-          <a:fontRef idx="minor">
-            <a:schemeClr val="lt1"/>
-          </a:fontRef>
-        </p:style>
-        <p:txBody>
-          <a:bodyPr rtlCol="0" anchor="ctr"/>
-          <a:lstStyle/>
-          <a:p>
-            <a:pPr algn="ctr"/>
-          </a:p>
-        </p:txBody>
-      </p:sp>
-      <p:sp>
-        <p:nvSpPr>
-          <p:cNvPr id="22" name="TextBox 21"/>
-          <p:cNvSpPr txBox="1"/>
-          <p:nvPr/>
-        </p:nvSpPr>
-        <p:spPr>
-          <a:xfrm>
-            <a:off x="9354312" y="2194560"/>
-            <a:ext cx="2368296" cy="1005840"/>
-          </a:xfrm>
-          <a:prstGeom prst="rect">
-            <a:avLst/>
-          </a:prstGeom>
-          <a:noFill/>
-        </p:spPr>
-        <p:txBody>
-          <a:bodyPr wrap="square" lIns="0" rIns="0" tIns="0" bIns="0" anchor="t">
-            <a:spAutoFit/>
-          </a:bodyPr>
-          <a:lstStyle/>
-          <a:p>
-            <a:pPr algn="ctr">
-              <a:lnSpc>
-                <a:spcPct val="130000"/>
-              </a:lnSpc>
-            </a:pPr>
-            <a:r>
-              <a:rPr sz="4000" b="1" i="0">
-                <a:solidFill>
-                  <a:srgbClr val="16A34A"/>
-                </a:solidFill>
-                <a:latin typeface="Cambria"/>
-              </a:rPr>
-              <a:t>約8万</a:t>
-            </a:r>
-          </a:p>
-        </p:txBody>
-      </p:sp>
-      <p:sp>
-        <p:nvSpPr>
-          <p:cNvPr id="23" name="TextBox 22"/>
-          <p:cNvSpPr txBox="1"/>
-          <p:nvPr/>
-        </p:nvSpPr>
-        <p:spPr>
-          <a:xfrm>
-            <a:off x="9189720" y="3200400"/>
-            <a:ext cx="2697480" cy="457200"/>
-          </a:xfrm>
-          <a:prstGeom prst="rect">
-            <a:avLst/>
-          </a:prstGeom>
-          <a:noFill/>
-        </p:spPr>
-        <p:txBody>
-          <a:bodyPr wrap="square" lIns="0" rIns="0" tIns="0" bIns="0" anchor="t">
-            <a:spAutoFit/>
-          </a:bodyPr>
-          <a:lstStyle/>
-          <a:p>
-            <a:pPr algn="ctr">
-              <a:lnSpc>
-                <a:spcPct val="130000"/>
-              </a:lnSpc>
-            </a:pPr>
-            <a:r>
-              <a:rPr sz="2000" b="0" i="0">
-                <a:solidFill>
-                  <a:srgbClr val="1F2937"/>
-                </a:solidFill>
-                <a:latin typeface="Cambria"/>
-              </a:rPr>
-              <a:t>件</a:t>
-            </a:r>
-          </a:p>
-        </p:txBody>
-      </p:sp>
-      <p:sp>
-        <p:nvSpPr>
-          <p:cNvPr id="24" name="TextBox 23"/>
-          <p:cNvSpPr txBox="1"/>
-          <p:nvPr/>
-        </p:nvSpPr>
-        <p:spPr>
-          <a:xfrm>
-            <a:off x="9372600" y="3840480"/>
-            <a:ext cx="2331720" cy="1005840"/>
-          </a:xfrm>
-          <a:prstGeom prst="rect">
-            <a:avLst/>
-          </a:prstGeom>
-          <a:noFill/>
-        </p:spPr>
-        <p:txBody>
-          <a:bodyPr wrap="square" lIns="0" rIns="0" tIns="0" bIns="0" anchor="t">
-            <a:spAutoFit/>
-          </a:bodyPr>
-          <a:lstStyle/>
-          <a:p>
-            <a:pPr algn="ctr">
-              <a:lnSpc>
-                <a:spcPct val="140000"/>
-              </a:lnSpc>
-            </a:pPr>
-            <a:r>
-              <a:rPr sz="1200" b="0" i="0">
-                <a:solidFill>
-                  <a:srgbClr val="5B6472"/>
-                </a:solidFill>
-                <a:latin typeface="Calibri"/>
-              </a:rPr>
-              <a:t>「悪いものリスト」を
-自動で取り込んで照合</a:t>
-            </a:r>
-          </a:p>
-        </p:txBody>
-      </p:sp>
-      <p:sp>
-        <p:nvSpPr>
-          <p:cNvPr id="25" name="Rounded Rectangle 24"/>
-          <p:cNvSpPr/>
-          <p:nvPr/>
-        </p:nvSpPr>
-        <p:spPr>
-          <a:xfrm>
-            <a:off x="548640" y="5440680"/>
-            <a:ext cx="11064240" cy="1005840"/>
-          </a:xfrm>
-          <a:prstGeom prst="roundRect">
-            <a:avLst/>
-          </a:prstGeom>
-          <a:solidFill>
-            <a:srgbClr val="E8F0FE"/>
-          </a:solidFill>
-          <a:ln w="9525">
-            <a:solidFill>
-              <a:srgbClr val="E8F0FE"/>
-            </a:solidFill>
-          </a:ln>
-          <a:effectLst/>
-        </p:spPr>
-        <p:style>
-          <a:lnRef idx="1">
-            <a:schemeClr val="accent1"/>
-          </a:lnRef>
-          <a:fillRef idx="3">
-            <a:schemeClr val="accent1"/>
-          </a:fillRef>
-          <a:effectRef idx="2">
-            <a:schemeClr val="accent1"/>
-          </a:effectRef>
-          <a:fontRef idx="minor">
-            <a:schemeClr val="lt1"/>
-          </a:fontRef>
-        </p:style>
-        <p:txBody>
-          <a:bodyPr rtlCol="0" anchor="ctr"/>
-          <a:lstStyle/>
-          <a:p>
-            <a:pPr algn="ctr"/>
-          </a:p>
-        </p:txBody>
-      </p:sp>
-      <p:sp>
-        <p:nvSpPr>
-          <p:cNvPr id="26" name="TextBox 25"/>
-          <p:cNvSpPr txBox="1"/>
-          <p:nvPr/>
-        </p:nvSpPr>
-        <p:spPr>
-          <a:xfrm>
-            <a:off x="868680" y="5440680"/>
-            <a:ext cx="10515600" cy="1005840"/>
-          </a:xfrm>
-          <a:prstGeom prst="rect">
-            <a:avLst/>
-          </a:prstGeom>
-          <a:noFill/>
-        </p:spPr>
-        <p:txBody>
-          <a:bodyPr wrap="square" lIns="0" rIns="0" tIns="0" bIns="0" anchor="ctr">
-            <a:spAutoFit/>
-          </a:bodyPr>
-          <a:lstStyle/>
-          <a:p>
-            <a:pPr algn="l">
-              <a:lnSpc>
-                <a:spcPct val="130000"/>
-              </a:lnSpc>
-            </a:pPr>
-            <a:r>
-              <a:rPr sz="1400" b="0" i="0">
-                <a:solidFill>
-                  <a:srgbClr val="1F2937"/>
-                </a:solidFill>
-                <a:latin typeface="Calibri"/>
-              </a:rPr>
-              <a:t>🚀 今後:  時間の流れを追った相関分析 (「A の後に B が起きたら怪しい」) や、AI による検知ルールの自動生成へ。</a:t>
-            </a:r>
-          </a:p>
-        </p:txBody>
-      </p:sp>
-      <p:sp>
-        <p:nvSpPr>
-          <p:cNvPr id="27" name="TextBox 26"/>
+              <a:t>サンプルログを読み込み、調査の流れを見ていただきます。</a:t>
+            </a:r>
+          </a:p>
+        </p:txBody>
+      </p:sp>
+      <p:sp>
+        <p:nvSpPr>
+          <p:cNvPr id="6" name="TextBox 5"/>
           <p:cNvSpPr txBox="1"/>
           <p:nvPr/>
         </p:nvSpPr>
@@ -7095,11 +7768,11 @@
             <a:r>
               <a:rPr sz="900" b="0" i="0">
                 <a:solidFill>
-                  <a:srgbClr val="5B6472"/>
+                  <a:srgbClr val="CADCFC"/>
                 </a:solidFill>
                 <a:latin typeface="Calibri"/>
               </a:rPr>
-              <a:t>13 / 14</a:t>
+              <a:t>13 / 15</a:t>
             </a:r>
           </a:p>
         </p:txBody>
@@ -7137,6 +7810,1102 @@
             <a:avLst/>
           </a:prstGeom>
           <a:solidFill>
+            <a:srgbClr val="F4F6FA"/>
+          </a:solidFill>
+          <a:ln>
+            <a:noFill/>
+          </a:ln>
+          <a:effectLst/>
+        </p:spPr>
+        <p:style>
+          <a:lnRef idx="1">
+            <a:schemeClr val="accent1"/>
+          </a:lnRef>
+          <a:fillRef idx="3">
+            <a:schemeClr val="accent1"/>
+          </a:fillRef>
+          <a:effectRef idx="2">
+            <a:schemeClr val="accent1"/>
+          </a:effectRef>
+          <a:fontRef idx="minor">
+            <a:schemeClr val="lt1"/>
+          </a:fontRef>
+        </p:style>
+        <p:txBody>
+          <a:bodyPr rtlCol="0" anchor="ctr"/>
+          <a:lstStyle/>
+          <a:p>
+            <a:pPr algn="ctr"/>
+          </a:p>
+        </p:txBody>
+      </p:sp>
+      <p:sp>
+        <p:nvSpPr>
+          <p:cNvPr id="3" name="TextBox 2"/>
+          <p:cNvSpPr txBox="1"/>
+          <p:nvPr/>
+        </p:nvSpPr>
+        <p:spPr>
+          <a:xfrm>
+            <a:off x="548640" y="347472"/>
+            <a:ext cx="10972800" cy="274320"/>
+          </a:xfrm>
+          <a:prstGeom prst="rect">
+            <a:avLst/>
+          </a:prstGeom>
+          <a:noFill/>
+        </p:spPr>
+        <p:txBody>
+          <a:bodyPr wrap="square" lIns="0" rIns="0" tIns="0" bIns="0" anchor="t">
+            <a:spAutoFit/>
+          </a:bodyPr>
+          <a:lstStyle/>
+          <a:p>
+            <a:pPr algn="l">
+              <a:lnSpc>
+                <a:spcPct val="130000"/>
+              </a:lnSpc>
+            </a:pPr>
+            <a:r>
+              <a:rPr sz="1100" b="1" i="0">
+                <a:solidFill>
+                  <a:srgbClr val="2563EB"/>
+                </a:solidFill>
+                <a:latin typeface="Calibri"/>
+              </a:rPr>
+              <a:t>成果</a:t>
+            </a:r>
+          </a:p>
+        </p:txBody>
+      </p:sp>
+      <p:sp>
+        <p:nvSpPr>
+          <p:cNvPr id="4" name="TextBox 3"/>
+          <p:cNvSpPr txBox="1"/>
+          <p:nvPr/>
+        </p:nvSpPr>
+        <p:spPr>
+          <a:xfrm>
+            <a:off x="548640" y="621792"/>
+            <a:ext cx="11155680" cy="640080"/>
+          </a:xfrm>
+          <a:prstGeom prst="rect">
+            <a:avLst/>
+          </a:prstGeom>
+          <a:noFill/>
+        </p:spPr>
+        <p:txBody>
+          <a:bodyPr wrap="square" lIns="0" rIns="0" tIns="0" bIns="0" anchor="t">
+            <a:spAutoFit/>
+          </a:bodyPr>
+          <a:lstStyle/>
+          <a:p>
+            <a:pPr algn="l">
+              <a:lnSpc>
+                <a:spcPct val="130000"/>
+              </a:lnSpc>
+            </a:pPr>
+            <a:r>
+              <a:rPr sz="2800" b="1" i="0">
+                <a:solidFill>
+                  <a:srgbClr val="1F2937"/>
+                </a:solidFill>
+                <a:latin typeface="Cambria"/>
+              </a:rPr>
+              <a:t>まとめ — 開発したもの</a:t>
+            </a:r>
+          </a:p>
+        </p:txBody>
+      </p:sp>
+      <p:sp>
+        <p:nvSpPr>
+          <p:cNvPr id="5" name="Rounded Rectangle 4"/>
+          <p:cNvSpPr/>
+          <p:nvPr/>
+        </p:nvSpPr>
+        <p:spPr>
+          <a:xfrm>
+            <a:off x="548640" y="1783080"/>
+            <a:ext cx="2697480" cy="3291840"/>
+          </a:xfrm>
+          <a:prstGeom prst="roundRect">
+            <a:avLst/>
+          </a:prstGeom>
+          <a:solidFill>
+            <a:srgbClr val="FFFFFF"/>
+          </a:solidFill>
+          <a:ln w="9525">
+            <a:solidFill>
+              <a:srgbClr val="DDE3EE"/>
+            </a:solidFill>
+          </a:ln>
+          <a:effectLst/>
+        </p:spPr>
+        <p:style>
+          <a:lnRef idx="1">
+            <a:schemeClr val="accent1"/>
+          </a:lnRef>
+          <a:fillRef idx="3">
+            <a:schemeClr val="accent1"/>
+          </a:fillRef>
+          <a:effectRef idx="2">
+            <a:schemeClr val="accent1"/>
+          </a:effectRef>
+          <a:fontRef idx="minor">
+            <a:schemeClr val="lt1"/>
+          </a:fontRef>
+        </p:style>
+        <p:txBody>
+          <a:bodyPr rtlCol="0" anchor="ctr"/>
+          <a:lstStyle/>
+          <a:p>
+            <a:pPr algn="ctr"/>
+          </a:p>
+        </p:txBody>
+      </p:sp>
+      <p:sp>
+        <p:nvSpPr>
+          <p:cNvPr id="6" name="Rectangle 5"/>
+          <p:cNvSpPr/>
+          <p:nvPr/>
+        </p:nvSpPr>
+        <p:spPr>
+          <a:xfrm>
+            <a:off x="548640" y="1783080"/>
+            <a:ext cx="73152" cy="3291840"/>
+          </a:xfrm>
+          <a:prstGeom prst="rect">
+            <a:avLst/>
+          </a:prstGeom>
+          <a:solidFill>
+            <a:srgbClr val="1D4ED8"/>
+          </a:solidFill>
+          <a:ln>
+            <a:noFill/>
+          </a:ln>
+          <a:effectLst/>
+        </p:spPr>
+        <p:style>
+          <a:lnRef idx="1">
+            <a:schemeClr val="accent1"/>
+          </a:lnRef>
+          <a:fillRef idx="3">
+            <a:schemeClr val="accent1"/>
+          </a:fillRef>
+          <a:effectRef idx="2">
+            <a:schemeClr val="accent1"/>
+          </a:effectRef>
+          <a:fontRef idx="minor">
+            <a:schemeClr val="lt1"/>
+          </a:fontRef>
+        </p:style>
+        <p:txBody>
+          <a:bodyPr rtlCol="0" anchor="ctr"/>
+          <a:lstStyle/>
+          <a:p>
+            <a:pPr algn="ctr"/>
+          </a:p>
+        </p:txBody>
+      </p:sp>
+      <p:sp>
+        <p:nvSpPr>
+          <p:cNvPr id="7" name="TextBox 6"/>
+          <p:cNvSpPr txBox="1"/>
+          <p:nvPr/>
+        </p:nvSpPr>
+        <p:spPr>
+          <a:xfrm>
+            <a:off x="713232" y="2194560"/>
+            <a:ext cx="2368296" cy="1005840"/>
+          </a:xfrm>
+          <a:prstGeom prst="rect">
+            <a:avLst/>
+          </a:prstGeom>
+          <a:noFill/>
+        </p:spPr>
+        <p:txBody>
+          <a:bodyPr wrap="square" lIns="0" rIns="0" tIns="0" bIns="0" anchor="t">
+            <a:spAutoFit/>
+          </a:bodyPr>
+          <a:lstStyle/>
+          <a:p>
+            <a:pPr algn="ctr">
+              <a:lnSpc>
+                <a:spcPct val="130000"/>
+              </a:lnSpc>
+            </a:pPr>
+            <a:r>
+              <a:rPr sz="4000" b="1" i="0">
+                <a:solidFill>
+                  <a:srgbClr val="1D4ED8"/>
+                </a:solidFill>
+                <a:latin typeface="Cambria"/>
+              </a:rPr>
+              <a:t>新文法</a:t>
+            </a:r>
+          </a:p>
+        </p:txBody>
+      </p:sp>
+      <p:sp>
+        <p:nvSpPr>
+          <p:cNvPr id="8" name="TextBox 7"/>
+          <p:cNvSpPr txBox="1"/>
+          <p:nvPr/>
+        </p:nvSpPr>
+        <p:spPr>
+          <a:xfrm>
+            <a:off x="548640" y="3200400"/>
+            <a:ext cx="2697480" cy="457200"/>
+          </a:xfrm>
+          <a:prstGeom prst="rect">
+            <a:avLst/>
+          </a:prstGeom>
+          <a:noFill/>
+        </p:spPr>
+        <p:txBody>
+          <a:bodyPr wrap="square" lIns="0" rIns="0" tIns="0" bIns="0" anchor="t">
+            <a:spAutoFit/>
+          </a:bodyPr>
+          <a:lstStyle/>
+          <a:p>
+            <a:pPr algn="ctr">
+              <a:lnSpc>
+                <a:spcPct val="130000"/>
+              </a:lnSpc>
+            </a:pPr>
+            <a:r>
+              <a:rPr sz="2000" b="0" i="0">
+                <a:solidFill>
+                  <a:srgbClr val="1F2937"/>
+                </a:solidFill>
+                <a:latin typeface="Cambria"/>
+              </a:rPr>
+              <a:t>lookup:</a:t>
+            </a:r>
+          </a:p>
+        </p:txBody>
+      </p:sp>
+      <p:sp>
+        <p:nvSpPr>
+          <p:cNvPr id="9" name="TextBox 8"/>
+          <p:cNvSpPr txBox="1"/>
+          <p:nvPr/>
+        </p:nvSpPr>
+        <p:spPr>
+          <a:xfrm>
+            <a:off x="731520" y="3840480"/>
+            <a:ext cx="2331720" cy="1005840"/>
+          </a:xfrm>
+          <a:prstGeom prst="rect">
+            <a:avLst/>
+          </a:prstGeom>
+          <a:noFill/>
+        </p:spPr>
+        <p:txBody>
+          <a:bodyPr wrap="square" lIns="0" rIns="0" tIns="0" bIns="0" anchor="t">
+            <a:spAutoFit/>
+          </a:bodyPr>
+          <a:lstStyle/>
+          <a:p>
+            <a:pPr algn="ctr">
+              <a:lnSpc>
+                <a:spcPct val="140000"/>
+              </a:lnSpc>
+            </a:pPr>
+            <a:r>
+              <a:rPr sz="1200" b="0" i="0">
+                <a:solidFill>
+                  <a:srgbClr val="5B6472"/>
+                </a:solidFill>
+                <a:latin typeface="Calibri"/>
+              </a:rPr>
+              <a:t>エンジン本体 (Rust) を改造し
+リスト照合機能を追加</a:t>
+            </a:r>
+          </a:p>
+        </p:txBody>
+      </p:sp>
+      <p:sp>
+        <p:nvSpPr>
+          <p:cNvPr id="10" name="Rounded Rectangle 9"/>
+          <p:cNvSpPr/>
+          <p:nvPr/>
+        </p:nvSpPr>
+        <p:spPr>
+          <a:xfrm>
+            <a:off x="3429000" y="1783080"/>
+            <a:ext cx="2697480" cy="3291840"/>
+          </a:xfrm>
+          <a:prstGeom prst="roundRect">
+            <a:avLst/>
+          </a:prstGeom>
+          <a:solidFill>
+            <a:srgbClr val="FFFFFF"/>
+          </a:solidFill>
+          <a:ln w="9525">
+            <a:solidFill>
+              <a:srgbClr val="DDE3EE"/>
+            </a:solidFill>
+          </a:ln>
+          <a:effectLst/>
+        </p:spPr>
+        <p:style>
+          <a:lnRef idx="1">
+            <a:schemeClr val="accent1"/>
+          </a:lnRef>
+          <a:fillRef idx="3">
+            <a:schemeClr val="accent1"/>
+          </a:fillRef>
+          <a:effectRef idx="2">
+            <a:schemeClr val="accent1"/>
+          </a:effectRef>
+          <a:fontRef idx="minor">
+            <a:schemeClr val="lt1"/>
+          </a:fontRef>
+        </p:style>
+        <p:txBody>
+          <a:bodyPr rtlCol="0" anchor="ctr"/>
+          <a:lstStyle/>
+          <a:p>
+            <a:pPr algn="ctr"/>
+          </a:p>
+        </p:txBody>
+      </p:sp>
+      <p:sp>
+        <p:nvSpPr>
+          <p:cNvPr id="11" name="Rectangle 10"/>
+          <p:cNvSpPr/>
+          <p:nvPr/>
+        </p:nvSpPr>
+        <p:spPr>
+          <a:xfrm>
+            <a:off x="3429000" y="1783080"/>
+            <a:ext cx="73152" cy="3291840"/>
+          </a:xfrm>
+          <a:prstGeom prst="rect">
+            <a:avLst/>
+          </a:prstGeom>
+          <a:solidFill>
+            <a:srgbClr val="EA580C"/>
+          </a:solidFill>
+          <a:ln>
+            <a:noFill/>
+          </a:ln>
+          <a:effectLst/>
+        </p:spPr>
+        <p:style>
+          <a:lnRef idx="1">
+            <a:schemeClr val="accent1"/>
+          </a:lnRef>
+          <a:fillRef idx="3">
+            <a:schemeClr val="accent1"/>
+          </a:fillRef>
+          <a:effectRef idx="2">
+            <a:schemeClr val="accent1"/>
+          </a:effectRef>
+          <a:fontRef idx="minor">
+            <a:schemeClr val="lt1"/>
+          </a:fontRef>
+        </p:style>
+        <p:txBody>
+          <a:bodyPr rtlCol="0" anchor="ctr"/>
+          <a:lstStyle/>
+          <a:p>
+            <a:pPr algn="ctr"/>
+          </a:p>
+        </p:txBody>
+      </p:sp>
+      <p:sp>
+        <p:nvSpPr>
+          <p:cNvPr id="12" name="TextBox 11"/>
+          <p:cNvSpPr txBox="1"/>
+          <p:nvPr/>
+        </p:nvSpPr>
+        <p:spPr>
+          <a:xfrm>
+            <a:off x="3593592" y="2194560"/>
+            <a:ext cx="2368296" cy="1005840"/>
+          </a:xfrm>
+          <a:prstGeom prst="rect">
+            <a:avLst/>
+          </a:prstGeom>
+          <a:noFill/>
+        </p:spPr>
+        <p:txBody>
+          <a:bodyPr wrap="square" lIns="0" rIns="0" tIns="0" bIns="0" anchor="t">
+            <a:spAutoFit/>
+          </a:bodyPr>
+          <a:lstStyle/>
+          <a:p>
+            <a:pPr algn="ctr">
+              <a:lnSpc>
+                <a:spcPct val="130000"/>
+              </a:lnSpc>
+            </a:pPr>
+            <a:r>
+              <a:rPr sz="4000" b="1" i="0">
+                <a:solidFill>
+                  <a:srgbClr val="EA580C"/>
+                </a:solidFill>
+                <a:latin typeface="Cambria"/>
+              </a:rPr>
+              <a:t>13</a:t>
+            </a:r>
+          </a:p>
+        </p:txBody>
+      </p:sp>
+      <p:sp>
+        <p:nvSpPr>
+          <p:cNvPr id="13" name="TextBox 12"/>
+          <p:cNvSpPr txBox="1"/>
+          <p:nvPr/>
+        </p:nvSpPr>
+        <p:spPr>
+          <a:xfrm>
+            <a:off x="3429000" y="3200400"/>
+            <a:ext cx="2697480" cy="457200"/>
+          </a:xfrm>
+          <a:prstGeom prst="rect">
+            <a:avLst/>
+          </a:prstGeom>
+          <a:noFill/>
+        </p:spPr>
+        <p:txBody>
+          <a:bodyPr wrap="square" lIns="0" rIns="0" tIns="0" bIns="0" anchor="t">
+            <a:spAutoFit/>
+          </a:bodyPr>
+          <a:lstStyle/>
+          <a:p>
+            <a:pPr algn="ctr">
+              <a:lnSpc>
+                <a:spcPct val="130000"/>
+              </a:lnSpc>
+            </a:pPr>
+            <a:r>
+              <a:rPr sz="2000" b="0" i="0">
+                <a:solidFill>
+                  <a:srgbClr val="1F2937"/>
+                </a:solidFill>
+                <a:latin typeface="Cambria"/>
+              </a:rPr>
+              <a:t>本</a:t>
+            </a:r>
+          </a:p>
+        </p:txBody>
+      </p:sp>
+      <p:sp>
+        <p:nvSpPr>
+          <p:cNvPr id="14" name="TextBox 13"/>
+          <p:cNvSpPr txBox="1"/>
+          <p:nvPr/>
+        </p:nvSpPr>
+        <p:spPr>
+          <a:xfrm>
+            <a:off x="3611880" y="3840480"/>
+            <a:ext cx="2331720" cy="1005840"/>
+          </a:xfrm>
+          <a:prstGeom prst="rect">
+            <a:avLst/>
+          </a:prstGeom>
+          <a:noFill/>
+        </p:spPr>
+        <p:txBody>
+          <a:bodyPr wrap="square" lIns="0" rIns="0" tIns="0" bIns="0" anchor="t">
+            <a:spAutoFit/>
+          </a:bodyPr>
+          <a:lstStyle/>
+          <a:p>
+            <a:pPr algn="ctr">
+              <a:lnSpc>
+                <a:spcPct val="140000"/>
+              </a:lnSpc>
+            </a:pPr>
+            <a:r>
+              <a:rPr sz="1200" b="0" i="0">
+                <a:solidFill>
+                  <a:srgbClr val="5B6472"/>
+                </a:solidFill>
+                <a:latin typeface="Calibri"/>
+              </a:rPr>
+              <a:t>攻撃を見抜く検知ルールを
+自作 (痕跡隠蔽の検知など)</a:t>
+            </a:r>
+          </a:p>
+        </p:txBody>
+      </p:sp>
+      <p:sp>
+        <p:nvSpPr>
+          <p:cNvPr id="15" name="Rounded Rectangle 14"/>
+          <p:cNvSpPr/>
+          <p:nvPr/>
+        </p:nvSpPr>
+        <p:spPr>
+          <a:xfrm>
+            <a:off x="6309360" y="1783080"/>
+            <a:ext cx="2697480" cy="3291840"/>
+          </a:xfrm>
+          <a:prstGeom prst="roundRect">
+            <a:avLst/>
+          </a:prstGeom>
+          <a:solidFill>
+            <a:srgbClr val="FFFFFF"/>
+          </a:solidFill>
+          <a:ln w="9525">
+            <a:solidFill>
+              <a:srgbClr val="DDE3EE"/>
+            </a:solidFill>
+          </a:ln>
+          <a:effectLst/>
+        </p:spPr>
+        <p:style>
+          <a:lnRef idx="1">
+            <a:schemeClr val="accent1"/>
+          </a:lnRef>
+          <a:fillRef idx="3">
+            <a:schemeClr val="accent1"/>
+          </a:fillRef>
+          <a:effectRef idx="2">
+            <a:schemeClr val="accent1"/>
+          </a:effectRef>
+          <a:fontRef idx="minor">
+            <a:schemeClr val="lt1"/>
+          </a:fontRef>
+        </p:style>
+        <p:txBody>
+          <a:bodyPr rtlCol="0" anchor="ctr"/>
+          <a:lstStyle/>
+          <a:p>
+            <a:pPr algn="ctr"/>
+          </a:p>
+        </p:txBody>
+      </p:sp>
+      <p:sp>
+        <p:nvSpPr>
+          <p:cNvPr id="16" name="Rectangle 15"/>
+          <p:cNvSpPr/>
+          <p:nvPr/>
+        </p:nvSpPr>
+        <p:spPr>
+          <a:xfrm>
+            <a:off x="6309360" y="1783080"/>
+            <a:ext cx="73152" cy="3291840"/>
+          </a:xfrm>
+          <a:prstGeom prst="rect">
+            <a:avLst/>
+          </a:prstGeom>
+          <a:solidFill>
+            <a:srgbClr val="CA8A04"/>
+          </a:solidFill>
+          <a:ln>
+            <a:noFill/>
+          </a:ln>
+          <a:effectLst/>
+        </p:spPr>
+        <p:style>
+          <a:lnRef idx="1">
+            <a:schemeClr val="accent1"/>
+          </a:lnRef>
+          <a:fillRef idx="3">
+            <a:schemeClr val="accent1"/>
+          </a:fillRef>
+          <a:effectRef idx="2">
+            <a:schemeClr val="accent1"/>
+          </a:effectRef>
+          <a:fontRef idx="minor">
+            <a:schemeClr val="lt1"/>
+          </a:fontRef>
+        </p:style>
+        <p:txBody>
+          <a:bodyPr rtlCol="0" anchor="ctr"/>
+          <a:lstStyle/>
+          <a:p>
+            <a:pPr algn="ctr"/>
+          </a:p>
+        </p:txBody>
+      </p:sp>
+      <p:sp>
+        <p:nvSpPr>
+          <p:cNvPr id="17" name="TextBox 16"/>
+          <p:cNvSpPr txBox="1"/>
+          <p:nvPr/>
+        </p:nvSpPr>
+        <p:spPr>
+          <a:xfrm>
+            <a:off x="6473952" y="2194560"/>
+            <a:ext cx="2368296" cy="1005840"/>
+          </a:xfrm>
+          <a:prstGeom prst="rect">
+            <a:avLst/>
+          </a:prstGeom>
+          <a:noFill/>
+        </p:spPr>
+        <p:txBody>
+          <a:bodyPr wrap="square" lIns="0" rIns="0" tIns="0" bIns="0" anchor="t">
+            <a:spAutoFit/>
+          </a:bodyPr>
+          <a:lstStyle/>
+          <a:p>
+            <a:pPr algn="ctr">
+              <a:lnSpc>
+                <a:spcPct val="130000"/>
+              </a:lnSpc>
+            </a:pPr>
+            <a:r>
+              <a:rPr sz="4000" b="1" i="0">
+                <a:solidFill>
+                  <a:srgbClr val="CA8A04"/>
+                </a:solidFill>
+                <a:latin typeface="Cambria"/>
+              </a:rPr>
+              <a:t>約8,000</a:t>
+            </a:r>
+          </a:p>
+        </p:txBody>
+      </p:sp>
+      <p:sp>
+        <p:nvSpPr>
+          <p:cNvPr id="18" name="TextBox 17"/>
+          <p:cNvSpPr txBox="1"/>
+          <p:nvPr/>
+        </p:nvSpPr>
+        <p:spPr>
+          <a:xfrm>
+            <a:off x="6309360" y="3200400"/>
+            <a:ext cx="2697480" cy="457200"/>
+          </a:xfrm>
+          <a:prstGeom prst="rect">
+            <a:avLst/>
+          </a:prstGeom>
+          <a:noFill/>
+        </p:spPr>
+        <p:txBody>
+          <a:bodyPr wrap="square" lIns="0" rIns="0" tIns="0" bIns="0" anchor="t">
+            <a:spAutoFit/>
+          </a:bodyPr>
+          <a:lstStyle/>
+          <a:p>
+            <a:pPr algn="ctr">
+              <a:lnSpc>
+                <a:spcPct val="130000"/>
+              </a:lnSpc>
+            </a:pPr>
+            <a:r>
+              <a:rPr sz="2000" b="0" i="0">
+                <a:solidFill>
+                  <a:srgbClr val="1F2937"/>
+                </a:solidFill>
+                <a:latin typeface="Cambria"/>
+              </a:rPr>
+              <a:t>行</a:t>
+            </a:r>
+          </a:p>
+        </p:txBody>
+      </p:sp>
+      <p:sp>
+        <p:nvSpPr>
+          <p:cNvPr id="19" name="TextBox 18"/>
+          <p:cNvSpPr txBox="1"/>
+          <p:nvPr/>
+        </p:nvSpPr>
+        <p:spPr>
+          <a:xfrm>
+            <a:off x="6492240" y="3840480"/>
+            <a:ext cx="2331720" cy="1005840"/>
+          </a:xfrm>
+          <a:prstGeom prst="rect">
+            <a:avLst/>
+          </a:prstGeom>
+          <a:noFill/>
+        </p:spPr>
+        <p:txBody>
+          <a:bodyPr wrap="square" lIns="0" rIns="0" tIns="0" bIns="0" anchor="t">
+            <a:spAutoFit/>
+          </a:bodyPr>
+          <a:lstStyle/>
+          <a:p>
+            <a:pPr algn="ctr">
+              <a:lnSpc>
+                <a:spcPct val="140000"/>
+              </a:lnSpc>
+            </a:pPr>
+            <a:r>
+              <a:rPr sz="1200" b="0" i="0">
+                <a:solidFill>
+                  <a:srgbClr val="5B6472"/>
+                </a:solidFill>
+                <a:latin typeface="Calibri"/>
+              </a:rPr>
+              <a:t>結果を読み解く GUI を
+ゼロから開発</a:t>
+            </a:r>
+          </a:p>
+        </p:txBody>
+      </p:sp>
+      <p:sp>
+        <p:nvSpPr>
+          <p:cNvPr id="20" name="Rounded Rectangle 19"/>
+          <p:cNvSpPr/>
+          <p:nvPr/>
+        </p:nvSpPr>
+        <p:spPr>
+          <a:xfrm>
+            <a:off x="9189720" y="1783080"/>
+            <a:ext cx="2697480" cy="3291840"/>
+          </a:xfrm>
+          <a:prstGeom prst="roundRect">
+            <a:avLst/>
+          </a:prstGeom>
+          <a:solidFill>
+            <a:srgbClr val="FFFFFF"/>
+          </a:solidFill>
+          <a:ln w="9525">
+            <a:solidFill>
+              <a:srgbClr val="DDE3EE"/>
+            </a:solidFill>
+          </a:ln>
+          <a:effectLst/>
+        </p:spPr>
+        <p:style>
+          <a:lnRef idx="1">
+            <a:schemeClr val="accent1"/>
+          </a:lnRef>
+          <a:fillRef idx="3">
+            <a:schemeClr val="accent1"/>
+          </a:fillRef>
+          <a:effectRef idx="2">
+            <a:schemeClr val="accent1"/>
+          </a:effectRef>
+          <a:fontRef idx="minor">
+            <a:schemeClr val="lt1"/>
+          </a:fontRef>
+        </p:style>
+        <p:txBody>
+          <a:bodyPr rtlCol="0" anchor="ctr"/>
+          <a:lstStyle/>
+          <a:p>
+            <a:pPr algn="ctr"/>
+          </a:p>
+        </p:txBody>
+      </p:sp>
+      <p:sp>
+        <p:nvSpPr>
+          <p:cNvPr id="21" name="Rectangle 20"/>
+          <p:cNvSpPr/>
+          <p:nvPr/>
+        </p:nvSpPr>
+        <p:spPr>
+          <a:xfrm>
+            <a:off x="9189720" y="1783080"/>
+            <a:ext cx="73152" cy="3291840"/>
+          </a:xfrm>
+          <a:prstGeom prst="rect">
+            <a:avLst/>
+          </a:prstGeom>
+          <a:solidFill>
+            <a:srgbClr val="16A34A"/>
+          </a:solidFill>
+          <a:ln>
+            <a:noFill/>
+          </a:ln>
+          <a:effectLst/>
+        </p:spPr>
+        <p:style>
+          <a:lnRef idx="1">
+            <a:schemeClr val="accent1"/>
+          </a:lnRef>
+          <a:fillRef idx="3">
+            <a:schemeClr val="accent1"/>
+          </a:fillRef>
+          <a:effectRef idx="2">
+            <a:schemeClr val="accent1"/>
+          </a:effectRef>
+          <a:fontRef idx="minor">
+            <a:schemeClr val="lt1"/>
+          </a:fontRef>
+        </p:style>
+        <p:txBody>
+          <a:bodyPr rtlCol="0" anchor="ctr"/>
+          <a:lstStyle/>
+          <a:p>
+            <a:pPr algn="ctr"/>
+          </a:p>
+        </p:txBody>
+      </p:sp>
+      <p:sp>
+        <p:nvSpPr>
+          <p:cNvPr id="22" name="TextBox 21"/>
+          <p:cNvSpPr txBox="1"/>
+          <p:nvPr/>
+        </p:nvSpPr>
+        <p:spPr>
+          <a:xfrm>
+            <a:off x="9354312" y="2194560"/>
+            <a:ext cx="2368296" cy="1005840"/>
+          </a:xfrm>
+          <a:prstGeom prst="rect">
+            <a:avLst/>
+          </a:prstGeom>
+          <a:noFill/>
+        </p:spPr>
+        <p:txBody>
+          <a:bodyPr wrap="square" lIns="0" rIns="0" tIns="0" bIns="0" anchor="t">
+            <a:spAutoFit/>
+          </a:bodyPr>
+          <a:lstStyle/>
+          <a:p>
+            <a:pPr algn="ctr">
+              <a:lnSpc>
+                <a:spcPct val="130000"/>
+              </a:lnSpc>
+            </a:pPr>
+            <a:r>
+              <a:rPr sz="4000" b="1" i="0">
+                <a:solidFill>
+                  <a:srgbClr val="16A34A"/>
+                </a:solidFill>
+                <a:latin typeface="Cambria"/>
+              </a:rPr>
+              <a:t>約8万</a:t>
+            </a:r>
+          </a:p>
+        </p:txBody>
+      </p:sp>
+      <p:sp>
+        <p:nvSpPr>
+          <p:cNvPr id="23" name="TextBox 22"/>
+          <p:cNvSpPr txBox="1"/>
+          <p:nvPr/>
+        </p:nvSpPr>
+        <p:spPr>
+          <a:xfrm>
+            <a:off x="9189720" y="3200400"/>
+            <a:ext cx="2697480" cy="457200"/>
+          </a:xfrm>
+          <a:prstGeom prst="rect">
+            <a:avLst/>
+          </a:prstGeom>
+          <a:noFill/>
+        </p:spPr>
+        <p:txBody>
+          <a:bodyPr wrap="square" lIns="0" rIns="0" tIns="0" bIns="0" anchor="t">
+            <a:spAutoFit/>
+          </a:bodyPr>
+          <a:lstStyle/>
+          <a:p>
+            <a:pPr algn="ctr">
+              <a:lnSpc>
+                <a:spcPct val="130000"/>
+              </a:lnSpc>
+            </a:pPr>
+            <a:r>
+              <a:rPr sz="2000" b="0" i="0">
+                <a:solidFill>
+                  <a:srgbClr val="1F2937"/>
+                </a:solidFill>
+                <a:latin typeface="Cambria"/>
+              </a:rPr>
+              <a:t>件</a:t>
+            </a:r>
+          </a:p>
+        </p:txBody>
+      </p:sp>
+      <p:sp>
+        <p:nvSpPr>
+          <p:cNvPr id="24" name="TextBox 23"/>
+          <p:cNvSpPr txBox="1"/>
+          <p:nvPr/>
+        </p:nvSpPr>
+        <p:spPr>
+          <a:xfrm>
+            <a:off x="9372600" y="3840480"/>
+            <a:ext cx="2331720" cy="1005840"/>
+          </a:xfrm>
+          <a:prstGeom prst="rect">
+            <a:avLst/>
+          </a:prstGeom>
+          <a:noFill/>
+        </p:spPr>
+        <p:txBody>
+          <a:bodyPr wrap="square" lIns="0" rIns="0" tIns="0" bIns="0" anchor="t">
+            <a:spAutoFit/>
+          </a:bodyPr>
+          <a:lstStyle/>
+          <a:p>
+            <a:pPr algn="ctr">
+              <a:lnSpc>
+                <a:spcPct val="140000"/>
+              </a:lnSpc>
+            </a:pPr>
+            <a:r>
+              <a:rPr sz="1200" b="0" i="0">
+                <a:solidFill>
+                  <a:srgbClr val="5B6472"/>
+                </a:solidFill>
+                <a:latin typeface="Calibri"/>
+              </a:rPr>
+              <a:t>「悪いものリスト」を
+自動で取り込んで照合</a:t>
+            </a:r>
+          </a:p>
+        </p:txBody>
+      </p:sp>
+      <p:sp>
+        <p:nvSpPr>
+          <p:cNvPr id="25" name="Rounded Rectangle 24"/>
+          <p:cNvSpPr/>
+          <p:nvPr/>
+        </p:nvSpPr>
+        <p:spPr>
+          <a:xfrm>
+            <a:off x="548640" y="5440680"/>
+            <a:ext cx="11064240" cy="1005840"/>
+          </a:xfrm>
+          <a:prstGeom prst="roundRect">
+            <a:avLst/>
+          </a:prstGeom>
+          <a:solidFill>
+            <a:srgbClr val="E8F0FE"/>
+          </a:solidFill>
+          <a:ln w="9525">
+            <a:solidFill>
+              <a:srgbClr val="E8F0FE"/>
+            </a:solidFill>
+          </a:ln>
+          <a:effectLst/>
+        </p:spPr>
+        <p:style>
+          <a:lnRef idx="1">
+            <a:schemeClr val="accent1"/>
+          </a:lnRef>
+          <a:fillRef idx="3">
+            <a:schemeClr val="accent1"/>
+          </a:fillRef>
+          <a:effectRef idx="2">
+            <a:schemeClr val="accent1"/>
+          </a:effectRef>
+          <a:fontRef idx="minor">
+            <a:schemeClr val="lt1"/>
+          </a:fontRef>
+        </p:style>
+        <p:txBody>
+          <a:bodyPr rtlCol="0" anchor="ctr"/>
+          <a:lstStyle/>
+          <a:p>
+            <a:pPr algn="ctr"/>
+          </a:p>
+        </p:txBody>
+      </p:sp>
+      <p:sp>
+        <p:nvSpPr>
+          <p:cNvPr id="26" name="TextBox 25"/>
+          <p:cNvSpPr txBox="1"/>
+          <p:nvPr/>
+        </p:nvSpPr>
+        <p:spPr>
+          <a:xfrm>
+            <a:off x="868680" y="5440680"/>
+            <a:ext cx="10515600" cy="1005840"/>
+          </a:xfrm>
+          <a:prstGeom prst="rect">
+            <a:avLst/>
+          </a:prstGeom>
+          <a:noFill/>
+        </p:spPr>
+        <p:txBody>
+          <a:bodyPr wrap="square" lIns="0" rIns="0" tIns="0" bIns="0" anchor="ctr">
+            <a:spAutoFit/>
+          </a:bodyPr>
+          <a:lstStyle/>
+          <a:p>
+            <a:pPr algn="l">
+              <a:lnSpc>
+                <a:spcPct val="130000"/>
+              </a:lnSpc>
+            </a:pPr>
+            <a:r>
+              <a:rPr sz="1400" b="0" i="0">
+                <a:solidFill>
+                  <a:srgbClr val="1F2937"/>
+                </a:solidFill>
+                <a:latin typeface="Calibri"/>
+              </a:rPr>
+              <a:t>🚀 今後:  時間の流れを追った相関分析 (「A の後に B が起きたら怪しい」) や、AI による検知ルールの自動生成へ。</a:t>
+            </a:r>
+          </a:p>
+        </p:txBody>
+      </p:sp>
+      <p:sp>
+        <p:nvSpPr>
+          <p:cNvPr id="27" name="TextBox 26"/>
+          <p:cNvSpPr txBox="1"/>
+          <p:nvPr/>
+        </p:nvSpPr>
+        <p:spPr>
+          <a:xfrm>
+            <a:off x="10972800" y="6446520"/>
+            <a:ext cx="914400" cy="274320"/>
+          </a:xfrm>
+          <a:prstGeom prst="rect">
+            <a:avLst/>
+          </a:prstGeom>
+          <a:noFill/>
+        </p:spPr>
+        <p:txBody>
+          <a:bodyPr wrap="square" lIns="0" rIns="0" tIns="0" bIns="0" anchor="t">
+            <a:spAutoFit/>
+          </a:bodyPr>
+          <a:lstStyle/>
+          <a:p>
+            <a:pPr algn="r">
+              <a:lnSpc>
+                <a:spcPct val="130000"/>
+              </a:lnSpc>
+            </a:pPr>
+            <a:r>
+              <a:rPr sz="900" b="0" i="0">
+                <a:solidFill>
+                  <a:srgbClr val="5B6472"/>
+                </a:solidFill>
+                <a:latin typeface="Calibri"/>
+              </a:rPr>
+              <a:t>14 / 15</a:t>
+            </a:r>
+          </a:p>
+        </p:txBody>
+      </p:sp>
+    </p:spTree>
+  </p:cSld>
+  <p:clrMapOvr>
+    <a:masterClrMapping/>
+  </p:clrMapOvr>
+</p:sld>
+</file>
+
+<file path=ppt/slides/slide15.xml><?xml version="1.0" encoding="utf-8"?>
+<p:sld xmlns:a="http://schemas.openxmlformats.org/drawingml/2006/main" xmlns:p="http://schemas.openxmlformats.org/presentationml/2006/main" xmlns:r="http://schemas.openxmlformats.org/officeDocument/2006/relationships">
+  <p:cSld>
+    <p:spTree>
+      <p:nvGrpSpPr>
+        <p:cNvPr id="1" name=""/>
+        <p:cNvGrpSpPr/>
+        <p:nvPr/>
+      </p:nvGrpSpPr>
+      <p:grpSpPr/>
+      <p:sp>
+        <p:nvSpPr>
+          <p:cNvPr id="2" name="Rectangle 1"/>
+          <p:cNvSpPr/>
+          <p:nvPr/>
+        </p:nvSpPr>
+        <p:spPr>
+          <a:xfrm>
+            <a:off x="0" y="0"/>
+            <a:ext cx="12191695" cy="6858000"/>
+          </a:xfrm>
+          <a:prstGeom prst="rect">
+            <a:avLst/>
+          </a:prstGeom>
+          <a:solidFill>
             <a:srgbClr val="1B254F"/>
           </a:solidFill>
           <a:ln>
@@ -8148,7 +9917,7 @@
                 </a:solidFill>
                 <a:latin typeface="Calibri"/>
               </a:rPr>
-              <a:t>2 / 14</a:t>
+              <a:t>2 / 15</a:t>
             </a:r>
           </a:p>
         </p:txBody>
@@ -9126,7 +10895,7 @@
                 </a:solidFill>
                 <a:latin typeface="Calibri"/>
               </a:rPr>
-              <a:t>3 / 14</a:t>
+              <a:t>3 / 15</a:t>
             </a:r>
           </a:p>
         </p:txBody>
@@ -9992,7 +11761,7 @@
                 </a:solidFill>
                 <a:latin typeface="Calibri"/>
               </a:rPr>
-              <a:t>4 / 14</a:t>
+              <a:t>4 / 15</a:t>
             </a:r>
           </a:p>
         </p:txBody>
@@ -10876,7 +12645,7 @@
                 </a:solidFill>
                 <a:latin typeface="Calibri"/>
               </a:rPr>
-              <a:t>5 / 14</a:t>
+              <a:t>5 / 15</a:t>
             </a:r>
           </a:p>
         </p:txBody>
@@ -12306,7 +14075,7 @@
                 </a:solidFill>
                 <a:latin typeface="Calibri"/>
               </a:rPr>
-              <a:t>6 / 14</a:t>
+              <a:t>6 / 15</a:t>
             </a:r>
           </a:p>
         </p:txBody>
@@ -13409,7 +15178,7 @@
                 </a:solidFill>
                 <a:latin typeface="Calibri"/>
               </a:rPr>
-              <a:t>7 / 14</a:t>
+              <a:t>7 / 15</a:t>
             </a:r>
           </a:p>
         </p:txBody>
@@ -15043,7 +16812,7 @@
                 </a:solidFill>
                 <a:latin typeface="Calibri"/>
               </a:rPr>
-              <a:t>8 / 14</a:t>
+              <a:t>8 / 15</a:t>
             </a:r>
           </a:p>
         </p:txBody>
@@ -16334,7 +18103,7 @@
                 </a:solidFill>
                 <a:latin typeface="Calibri"/>
               </a:rPr>
-              <a:t>9 / 14</a:t>
+              <a:t>9 / 15</a:t>
             </a:r>
           </a:p>
         </p:txBody>

--- a/docs/presentation/pptx/hayabusa-plus.pptx
+++ b/docs/presentation/pptx/hayabusa-plus.pptx
@@ -119,6 +119,1541 @@
     </a:lvl9pPr>
   </p:defaultTextStyle>
 </p:presentation>
+</file>
+
+<file path=ppt/notesMasters/notesMaster1.xml><?xml version="1.0" encoding="utf-8"?>
+<p:notesMaster xmlns:a="http://schemas.openxmlformats.org/drawingml/2006/main" xmlns:p="http://schemas.openxmlformats.org/presentationml/2006/main" xmlns:r="http://schemas.openxmlformats.org/officeDocument/2006/relationships">
+  <p:cSld>
+    <p:bg>
+      <p:bgRef idx="1001">
+        <a:schemeClr val="bg1"/>
+      </p:bgRef>
+    </p:bg>
+    <p:spTree>
+      <p:nvGrpSpPr>
+        <p:cNvPr id="1" name=""/>
+        <p:cNvGrpSpPr/>
+        <p:nvPr/>
+      </p:nvGrpSpPr>
+      <p:grpSpPr>
+        <a:xfrm>
+          <a:off x="0" y="0"/>
+          <a:ext cx="0" cy="0"/>
+          <a:chOff x="0" y="0"/>
+          <a:chExt cx="0" cy="0"/>
+        </a:xfrm>
+      </p:grpSpPr>
+      <p:sp>
+        <p:nvSpPr>
+          <p:cNvPr id="2" name="Header Placeholder 1"/>
+          <p:cNvSpPr>
+            <a:spLocks noGrp="1"/>
+          </p:cNvSpPr>
+          <p:nvPr>
+            <p:ph type="hdr" sz="quarter"/>
+          </p:nvPr>
+        </p:nvSpPr>
+        <p:spPr>
+          <a:xfrm>
+            <a:off x="0" y="0"/>
+            <a:ext cx="2971800" cy="457200"/>
+          </a:xfrm>
+          <a:prstGeom prst="rect">
+            <a:avLst/>
+          </a:prstGeom>
+        </p:spPr>
+        <p:txBody>
+          <a:bodyPr vert="horz" lIns="91440" tIns="45720" rIns="91440" bIns="45720" rtlCol="0"/>
+          <a:lstStyle>
+            <a:lvl1pPr algn="l">
+              <a:defRPr sz="1200"/>
+            </a:lvl1pPr>
+          </a:lstStyle>
+          <a:p>
+            <a:endParaRPr lang="en-US"/>
+          </a:p>
+        </p:txBody>
+      </p:sp>
+      <p:sp>
+        <p:nvSpPr>
+          <p:cNvPr id="3" name="Date Placeholder 2"/>
+          <p:cNvSpPr>
+            <a:spLocks noGrp="1"/>
+          </p:cNvSpPr>
+          <p:nvPr>
+            <p:ph type="dt" idx="1"/>
+          </p:nvPr>
+        </p:nvSpPr>
+        <p:spPr>
+          <a:xfrm>
+            <a:off x="3884613" y="0"/>
+            <a:ext cx="2971800" cy="457200"/>
+          </a:xfrm>
+          <a:prstGeom prst="rect">
+            <a:avLst/>
+          </a:prstGeom>
+        </p:spPr>
+        <p:txBody>
+          <a:bodyPr vert="horz" lIns="91440" tIns="45720" rIns="91440" bIns="45720" rtlCol="0"/>
+          <a:lstStyle>
+            <a:lvl1pPr algn="r">
+              <a:defRPr sz="1200"/>
+            </a:lvl1pPr>
+          </a:lstStyle>
+          <a:p>
+            <a:fld id="{0F89C1C7-3DCD-1040-A9CF-14679D8B5DDD}" type="datetimeFigureOut">
+              <a:rPr lang="en-US" smtClean="0"/>
+              <a:t>10/17/16</a:t>
+            </a:fld>
+            <a:endParaRPr lang="en-US"/>
+          </a:p>
+        </p:txBody>
+      </p:sp>
+      <p:sp>
+        <p:nvSpPr>
+          <p:cNvPr id="4" name="Slide Image Placeholder 3"/>
+          <p:cNvSpPr>
+            <a:spLocks noGrp="1" noRot="1" noChangeAspect="1"/>
+          </p:cNvSpPr>
+          <p:nvPr>
+            <p:ph type="sldImg" idx="2"/>
+          </p:nvPr>
+        </p:nvSpPr>
+        <p:spPr>
+          <a:xfrm>
+            <a:off x="1143000" y="685800"/>
+            <a:ext cx="4572000" cy="3429000"/>
+          </a:xfrm>
+          <a:prstGeom prst="rect">
+            <a:avLst/>
+          </a:prstGeom>
+          <a:noFill/>
+          <a:ln w="12700">
+            <a:solidFill>
+              <a:prstClr val="black"/>
+            </a:solidFill>
+          </a:ln>
+        </p:spPr>
+        <p:txBody>
+          <a:bodyPr vert="horz" lIns="91440" tIns="45720" rIns="91440" bIns="45720" rtlCol="0" anchor="ctr"/>
+          <a:lstStyle/>
+          <a:p>
+            <a:endParaRPr lang="en-US"/>
+          </a:p>
+        </p:txBody>
+      </p:sp>
+      <p:sp>
+        <p:nvSpPr>
+          <p:cNvPr id="5" name="Notes Placeholder 4"/>
+          <p:cNvSpPr>
+            <a:spLocks noGrp="1"/>
+          </p:cNvSpPr>
+          <p:nvPr>
+            <p:ph type="body" sz="quarter" idx="3"/>
+          </p:nvPr>
+        </p:nvSpPr>
+        <p:spPr>
+          <a:xfrm>
+            <a:off x="685800" y="4343400"/>
+            <a:ext cx="5486400" cy="4114800"/>
+          </a:xfrm>
+          <a:prstGeom prst="rect">
+            <a:avLst/>
+          </a:prstGeom>
+        </p:spPr>
+        <p:txBody>
+          <a:bodyPr vert="horz" lIns="91440" tIns="45720" rIns="91440" bIns="45720" rtlCol="0"/>
+          <a:lstStyle/>
+          <a:p>
+            <a:pPr lvl="0"/>
+            <a:r>
+              <a:rPr lang="en-US" smtClean="0"/>
+              <a:t>Click to edit Master text styles</a:t>
+            </a:r>
+          </a:p>
+          <a:p>
+            <a:pPr lvl="1"/>
+            <a:r>
+              <a:rPr lang="en-US" smtClean="0"/>
+              <a:t>Second level</a:t>
+            </a:r>
+          </a:p>
+          <a:p>
+            <a:pPr lvl="2"/>
+            <a:r>
+              <a:rPr lang="en-US" smtClean="0"/>
+              <a:t>Third level</a:t>
+            </a:r>
+          </a:p>
+          <a:p>
+            <a:pPr lvl="3"/>
+            <a:r>
+              <a:rPr lang="en-US" smtClean="0"/>
+              <a:t>Fourth level</a:t>
+            </a:r>
+          </a:p>
+          <a:p>
+            <a:pPr lvl="4"/>
+            <a:r>
+              <a:rPr lang="en-US" smtClean="0"/>
+              <a:t>Fifth level</a:t>
+            </a:r>
+            <a:endParaRPr lang="en-US"/>
+          </a:p>
+        </p:txBody>
+      </p:sp>
+      <p:sp>
+        <p:nvSpPr>
+          <p:cNvPr id="6" name="Footer Placeholder 5"/>
+          <p:cNvSpPr>
+            <a:spLocks noGrp="1"/>
+          </p:cNvSpPr>
+          <p:nvPr>
+            <p:ph type="ftr" sz="quarter" idx="4"/>
+          </p:nvPr>
+        </p:nvSpPr>
+        <p:spPr>
+          <a:xfrm>
+            <a:off x="0" y="8685213"/>
+            <a:ext cx="2971800" cy="457200"/>
+          </a:xfrm>
+          <a:prstGeom prst="rect">
+            <a:avLst/>
+          </a:prstGeom>
+        </p:spPr>
+        <p:txBody>
+          <a:bodyPr vert="horz" lIns="91440" tIns="45720" rIns="91440" bIns="45720" rtlCol="0" anchor="b"/>
+          <a:lstStyle>
+            <a:lvl1pPr algn="l">
+              <a:defRPr sz="1200"/>
+            </a:lvl1pPr>
+          </a:lstStyle>
+          <a:p>
+            <a:endParaRPr lang="en-US"/>
+          </a:p>
+        </p:txBody>
+      </p:sp>
+      <p:sp>
+        <p:nvSpPr>
+          <p:cNvPr id="7" name="Slide Number Placeholder 6"/>
+          <p:cNvSpPr>
+            <a:spLocks noGrp="1"/>
+          </p:cNvSpPr>
+          <p:nvPr>
+            <p:ph type="sldNum" sz="quarter" idx="5"/>
+          </p:nvPr>
+        </p:nvSpPr>
+        <p:spPr>
+          <a:xfrm>
+            <a:off x="3884613" y="8685213"/>
+            <a:ext cx="2971800" cy="457200"/>
+          </a:xfrm>
+          <a:prstGeom prst="rect">
+            <a:avLst/>
+          </a:prstGeom>
+        </p:spPr>
+        <p:txBody>
+          <a:bodyPr vert="horz" lIns="91440" tIns="45720" rIns="91440" bIns="45720" rtlCol="0" anchor="b"/>
+          <a:lstStyle>
+            <a:lvl1pPr algn="r">
+              <a:defRPr sz="1200"/>
+            </a:lvl1pPr>
+          </a:lstStyle>
+          <a:p>
+            <a:fld id="{BB5E49A5-4136-284D-997B-48E1D791AD67}" type="slidenum">
+              <a:rPr lang="en-US" smtClean="0"/>
+              <a:t>‹#›</a:t>
+            </a:fld>
+            <a:endParaRPr lang="en-US"/>
+          </a:p>
+        </p:txBody>
+      </p:sp>
+    </p:spTree>
+    <p:extLst>
+      <p:ext uri="{BB962C8B-B14F-4D97-AF65-F5344CB8AC3E}">
+        <p14:creationId xmlns:p14="http://schemas.microsoft.com/office/powerpoint/2010/main" val="2623252185"/>
+      </p:ext>
+    </p:extLst>
+  </p:cSld>
+  <p:clrMap bg1="lt1" tx1="dk1" bg2="lt2" tx2="dk2" accent1="accent1" accent2="accent2" accent3="accent3" accent4="accent4" accent5="accent5" accent6="accent6" hlink="hlink" folHlink="folHlink"/>
+  <p:notesStyle>
+    <a:lvl1pPr marL="0" algn="l" defTabSz="457200" rtl="0" eaLnBrk="1" latinLnBrk="0" hangingPunct="1">
+      <a:defRPr sz="1200" kern="1200">
+        <a:solidFill>
+          <a:schemeClr val="tx1"/>
+        </a:solidFill>
+        <a:latin typeface="+mn-lt"/>
+        <a:ea typeface="+mn-ea"/>
+        <a:cs typeface="+mn-cs"/>
+      </a:defRPr>
+    </a:lvl1pPr>
+    <a:lvl2pPr marL="457200" algn="l" defTabSz="457200" rtl="0" eaLnBrk="1" latinLnBrk="0" hangingPunct="1">
+      <a:defRPr sz="1200" kern="1200">
+        <a:solidFill>
+          <a:schemeClr val="tx1"/>
+        </a:solidFill>
+        <a:latin typeface="+mn-lt"/>
+        <a:ea typeface="+mn-ea"/>
+        <a:cs typeface="+mn-cs"/>
+      </a:defRPr>
+    </a:lvl2pPr>
+    <a:lvl3pPr marL="914400" algn="l" defTabSz="457200" rtl="0" eaLnBrk="1" latinLnBrk="0" hangingPunct="1">
+      <a:defRPr sz="1200" kern="1200">
+        <a:solidFill>
+          <a:schemeClr val="tx1"/>
+        </a:solidFill>
+        <a:latin typeface="+mn-lt"/>
+        <a:ea typeface="+mn-ea"/>
+        <a:cs typeface="+mn-cs"/>
+      </a:defRPr>
+    </a:lvl3pPr>
+    <a:lvl4pPr marL="1371600" algn="l" defTabSz="457200" rtl="0" eaLnBrk="1" latinLnBrk="0" hangingPunct="1">
+      <a:defRPr sz="1200" kern="1200">
+        <a:solidFill>
+          <a:schemeClr val="tx1"/>
+        </a:solidFill>
+        <a:latin typeface="+mn-lt"/>
+        <a:ea typeface="+mn-ea"/>
+        <a:cs typeface="+mn-cs"/>
+      </a:defRPr>
+    </a:lvl4pPr>
+    <a:lvl5pPr marL="1828800" algn="l" defTabSz="457200" rtl="0" eaLnBrk="1" latinLnBrk="0" hangingPunct="1">
+      <a:defRPr sz="1200" kern="1200">
+        <a:solidFill>
+          <a:schemeClr val="tx1"/>
+        </a:solidFill>
+        <a:latin typeface="+mn-lt"/>
+        <a:ea typeface="+mn-ea"/>
+        <a:cs typeface="+mn-cs"/>
+      </a:defRPr>
+    </a:lvl5pPr>
+    <a:lvl6pPr marL="2286000" algn="l" defTabSz="457200" rtl="0" eaLnBrk="1" latinLnBrk="0" hangingPunct="1">
+      <a:defRPr sz="1200" kern="1200">
+        <a:solidFill>
+          <a:schemeClr val="tx1"/>
+        </a:solidFill>
+        <a:latin typeface="+mn-lt"/>
+        <a:ea typeface="+mn-ea"/>
+        <a:cs typeface="+mn-cs"/>
+      </a:defRPr>
+    </a:lvl6pPr>
+    <a:lvl7pPr marL="2743200" algn="l" defTabSz="457200" rtl="0" eaLnBrk="1" latinLnBrk="0" hangingPunct="1">
+      <a:defRPr sz="1200" kern="1200">
+        <a:solidFill>
+          <a:schemeClr val="tx1"/>
+        </a:solidFill>
+        <a:latin typeface="+mn-lt"/>
+        <a:ea typeface="+mn-ea"/>
+        <a:cs typeface="+mn-cs"/>
+      </a:defRPr>
+    </a:lvl7pPr>
+    <a:lvl8pPr marL="3200400" algn="l" defTabSz="457200" rtl="0" eaLnBrk="1" latinLnBrk="0" hangingPunct="1">
+      <a:defRPr sz="1200" kern="1200">
+        <a:solidFill>
+          <a:schemeClr val="tx1"/>
+        </a:solidFill>
+        <a:latin typeface="+mn-lt"/>
+        <a:ea typeface="+mn-ea"/>
+        <a:cs typeface="+mn-cs"/>
+      </a:defRPr>
+    </a:lvl8pPr>
+    <a:lvl9pPr marL="3657600" algn="l" defTabSz="457200" rtl="0" eaLnBrk="1" latinLnBrk="0" hangingPunct="1">
+      <a:defRPr sz="1200" kern="1200">
+        <a:solidFill>
+          <a:schemeClr val="tx1"/>
+        </a:solidFill>
+        <a:latin typeface="+mn-lt"/>
+        <a:ea typeface="+mn-ea"/>
+        <a:cs typeface="+mn-cs"/>
+      </a:defRPr>
+    </a:lvl9pPr>
+  </p:notesStyle>
+</p:notesMaster>
+</file>
+
+<file path=ppt/notesSlides/notesSlide1.xml><?xml version="1.0" encoding="utf-8"?>
+<p:notes xmlns:a="http://schemas.openxmlformats.org/drawingml/2006/main" xmlns:p="http://schemas.openxmlformats.org/presentationml/2006/main" xmlns:r="http://schemas.openxmlformats.org/officeDocument/2006/relationships">
+  <p:cSld>
+    <p:spTree>
+      <p:nvGrpSpPr>
+        <p:cNvPr id="1" name=""/>
+        <p:cNvGrpSpPr/>
+        <p:nvPr/>
+      </p:nvGrpSpPr>
+      <p:grpSpPr>
+        <a:xfrm>
+          <a:off x="0" y="0"/>
+          <a:ext cx="0" cy="0"/>
+          <a:chOff x="0" y="0"/>
+          <a:chExt cx="0" cy="0"/>
+        </a:xfrm>
+      </p:grpSpPr>
+      <p:sp>
+        <p:nvSpPr>
+          <p:cNvPr id="2" name="Slide Image Placeholder 1"/>
+          <p:cNvSpPr>
+            <a:spLocks noGrp="1"/>
+          </p:cNvSpPr>
+          <p:nvPr>
+            <p:ph type="sldImg" idx="2"/>
+          </p:nvPr>
+        </p:nvSpPr>
+        <p:spPr/>
+      </p:sp>
+      <p:sp>
+        <p:nvSpPr>
+          <p:cNvPr id="3" name="Notes Placeholder 2"/>
+          <p:cNvSpPr>
+            <a:spLocks noGrp="1"/>
+          </p:cNvSpPr>
+          <p:nvPr>
+            <p:ph type="body" idx="3" sz="quarter"/>
+          </p:nvPr>
+        </p:nvSpPr>
+        <p:spPr/>
+        <p:txBody>
+          <a:bodyPr/>
+          <a:lstStyle/>
+          <a:p>
+            <a:r>
+              <a:t>本日は「OSS 解析エンジン Hayabusa の拡張による、誰でも使えるサイバー攻撃調査ツールの開発」というテーマで発表します。</a:t>
+            </a:r>
+          </a:p>
+          <a:p>
+            <a:r>
+              <a:t>一言でいうと、プロの道具を“誰でも使える形”に作り変えた研究です。</a:t>
+            </a:r>
+          </a:p>
+          <a:p>
+            <a:r>
+              <a:t>やったことは大きく 3 つ。①エンジン本体 (Rust) への新しい検知機能の追加、②攻撃を見抜く検知ルールの自作、③結果を読み解ける GUI の開発です。</a:t>
+            </a:r>
+          </a:p>
+          <a:p>
+            <a:r>
+              <a:t>成果物はすべて GitHub で公開しています。</a:t>
+            </a:r>
+          </a:p>
+        </p:txBody>
+      </p:sp>
+      <p:sp>
+        <p:nvSpPr>
+          <p:cNvPr id="4" name="Slide Number Placeholder 3"/>
+          <p:cNvSpPr>
+            <a:spLocks noGrp="1"/>
+          </p:cNvSpPr>
+          <p:nvPr>
+            <p:ph type="sldNum" idx="5" sz="quarter"/>
+          </p:nvPr>
+        </p:nvSpPr>
+        <p:spPr/>
+      </p:sp>
+    </p:spTree>
+  </p:cSld>
+  <p:clrMapOvr>
+    <a:masterClrMapping/>
+  </p:clrMapOvr>
+</p:notes>
+</file>
+
+<file path=ppt/notesSlides/notesSlide10.xml><?xml version="1.0" encoding="utf-8"?>
+<p:notes xmlns:a="http://schemas.openxmlformats.org/drawingml/2006/main" xmlns:p="http://schemas.openxmlformats.org/presentationml/2006/main" xmlns:r="http://schemas.openxmlformats.org/officeDocument/2006/relationships">
+  <p:cSld>
+    <p:spTree>
+      <p:nvGrpSpPr>
+        <p:cNvPr id="1" name=""/>
+        <p:cNvGrpSpPr/>
+        <p:nvPr/>
+      </p:nvGrpSpPr>
+      <p:grpSpPr>
+        <a:xfrm>
+          <a:off x="0" y="0"/>
+          <a:ext cx="0" cy="0"/>
+          <a:chOff x="0" y="0"/>
+          <a:chExt cx="0" cy="0"/>
+        </a:xfrm>
+      </p:grpSpPr>
+      <p:sp>
+        <p:nvSpPr>
+          <p:cNvPr id="2" name="Slide Image Placeholder 1"/>
+          <p:cNvSpPr>
+            <a:spLocks noGrp="1"/>
+          </p:cNvSpPr>
+          <p:nvPr>
+            <p:ph type="sldImg" idx="2"/>
+          </p:nvPr>
+        </p:nvSpPr>
+        <p:spPr/>
+      </p:sp>
+      <p:sp>
+        <p:nvSpPr>
+          <p:cNvPr id="3" name="Notes Placeholder 2"/>
+          <p:cNvSpPr>
+            <a:spLocks noGrp="1"/>
+          </p:cNvSpPr>
+          <p:nvPr>
+            <p:ph type="body" idx="3" sz="quarter"/>
+          </p:nvPr>
+        </p:nvSpPr>
+        <p:spPr/>
+        <p:txBody>
+          <a:bodyPr/>
+          <a:lstStyle/>
+          <a:p>
+            <a:r>
+              <a:t>では、これらが実際にログの“どこ”を見ているか。</a:t>
+            </a:r>
+          </a:p>
+          <a:p>
+            <a:r>
+              <a:t>例えばログの消去なら、プロセス起動ログで wevtutil.exe が cl (クリア) 付きで実行されたかを見ます。復元データ削除なら vssadmin の delete shadows ── これはランサムウェアの前兆です。監視の無効化は監査ポリシー変更のイベント 4719、パスワード抜き取りは rundll32 が comsvcs と MiniDump を使ったか。</a:t>
+            </a:r>
+          </a:p>
+          <a:p>
+            <a:r>
+              <a:t>共通しているのは、マルウェア本体は姿を変えられても、これらの“目的に直結した行為”は変えにくい、という点。だからそこを見るんです。</a:t>
+            </a:r>
+          </a:p>
+        </p:txBody>
+      </p:sp>
+      <p:sp>
+        <p:nvSpPr>
+          <p:cNvPr id="4" name="Slide Number Placeholder 3"/>
+          <p:cNvSpPr>
+            <a:spLocks noGrp="1"/>
+          </p:cNvSpPr>
+          <p:nvPr>
+            <p:ph type="sldNum" idx="5" sz="quarter"/>
+          </p:nvPr>
+        </p:nvSpPr>
+        <p:spPr/>
+      </p:sp>
+    </p:spTree>
+  </p:cSld>
+  <p:clrMapOvr>
+    <a:masterClrMapping/>
+  </p:clrMapOvr>
+</p:notes>
+</file>
+
+<file path=ppt/notesSlides/notesSlide11.xml><?xml version="1.0" encoding="utf-8"?>
+<p:notes xmlns:a="http://schemas.openxmlformats.org/drawingml/2006/main" xmlns:p="http://schemas.openxmlformats.org/presentationml/2006/main" xmlns:r="http://schemas.openxmlformats.org/officeDocument/2006/relationships">
+  <p:cSld>
+    <p:spTree>
+      <p:nvGrpSpPr>
+        <p:cNvPr id="1" name=""/>
+        <p:cNvGrpSpPr/>
+        <p:nvPr/>
+      </p:nvGrpSpPr>
+      <p:grpSpPr>
+        <a:xfrm>
+          <a:off x="0" y="0"/>
+          <a:ext cx="0" cy="0"/>
+          <a:chOff x="0" y="0"/>
+          <a:chExt cx="0" cy="0"/>
+        </a:xfrm>
+      </p:grpSpPr>
+      <p:sp>
+        <p:nvSpPr>
+          <p:cNvPr id="2" name="Slide Image Placeholder 1"/>
+          <p:cNvSpPr>
+            <a:spLocks noGrp="1"/>
+          </p:cNvSpPr>
+          <p:nvPr>
+            <p:ph type="sldImg" idx="2"/>
+          </p:nvPr>
+        </p:nvSpPr>
+        <p:spPr/>
+      </p:sp>
+      <p:sp>
+        <p:nvSpPr>
+          <p:cNvPr id="3" name="Notes Placeholder 2"/>
+          <p:cNvSpPr>
+            <a:spLocks noGrp="1"/>
+          </p:cNvSpPr>
+          <p:nvPr>
+            <p:ph type="body" idx="3" sz="quarter"/>
+          </p:nvPr>
+        </p:nvSpPr>
+        <p:spPr/>
+        <p:txBody>
+          <a:bodyPr/>
+          <a:lstStyle/>
+          <a:p>
+            <a:r>
+              <a:t>3 つ目、結果を読めるようにする GUI をゼロから開発しました。</a:t>
+            </a:r>
+          </a:p>
+          <a:p>
+            <a:r>
+              <a:t>検知をクリックすると「何が起きて、次にどうするか」を日本語で表示。どの PC から調べるべきかを自動採点して並べ替え、全体像はグラフで俯瞰できます。</a:t>
+            </a:r>
+          </a:p>
+          <a:p>
+            <a:r>
+              <a:t>右が実際の画面です。すべてブラウザで動き、データは外部に送りません。</a:t>
+            </a:r>
+          </a:p>
+        </p:txBody>
+      </p:sp>
+      <p:sp>
+        <p:nvSpPr>
+          <p:cNvPr id="4" name="Slide Number Placeholder 3"/>
+          <p:cNvSpPr>
+            <a:spLocks noGrp="1"/>
+          </p:cNvSpPr>
+          <p:nvPr>
+            <p:ph type="sldNum" idx="5" sz="quarter"/>
+          </p:nvPr>
+        </p:nvSpPr>
+        <p:spPr/>
+      </p:sp>
+    </p:spTree>
+  </p:cSld>
+  <p:clrMapOvr>
+    <a:masterClrMapping/>
+  </p:clrMapOvr>
+</p:notes>
+</file>
+
+<file path=ppt/notesSlides/notesSlide12.xml><?xml version="1.0" encoding="utf-8"?>
+<p:notes xmlns:a="http://schemas.openxmlformats.org/drawingml/2006/main" xmlns:p="http://schemas.openxmlformats.org/presentationml/2006/main" xmlns:r="http://schemas.openxmlformats.org/officeDocument/2006/relationships">
+  <p:cSld>
+    <p:spTree>
+      <p:nvGrpSpPr>
+        <p:cNvPr id="1" name=""/>
+        <p:cNvGrpSpPr/>
+        <p:nvPr/>
+      </p:nvGrpSpPr>
+      <p:grpSpPr>
+        <a:xfrm>
+          <a:off x="0" y="0"/>
+          <a:ext cx="0" cy="0"/>
+          <a:chOff x="0" y="0"/>
+          <a:chExt cx="0" cy="0"/>
+        </a:xfrm>
+      </p:grpSpPr>
+      <p:sp>
+        <p:nvSpPr>
+          <p:cNvPr id="2" name="Slide Image Placeholder 1"/>
+          <p:cNvSpPr>
+            <a:spLocks noGrp="1"/>
+          </p:cNvSpPr>
+          <p:nvPr>
+            <p:ph type="sldImg" idx="2"/>
+          </p:nvPr>
+        </p:nvSpPr>
+        <p:spPr/>
+      </p:sp>
+      <p:sp>
+        <p:nvSpPr>
+          <p:cNvPr id="3" name="Notes Placeholder 2"/>
+          <p:cNvSpPr>
+            <a:spLocks noGrp="1"/>
+          </p:cNvSpPr>
+          <p:nvPr>
+            <p:ph type="body" idx="3" sz="quarter"/>
+          </p:nvPr>
+        </p:nvSpPr>
+        <p:spPr/>
+        <p:txBody>
+          <a:bodyPr/>
+          <a:lstStyle/>
+          <a:p>
+            <a:r>
+              <a:t>さらに、ルールでは書けない「いつもと違う」も検出できるよう、統計分析を自作しました。</a:t>
+            </a:r>
+          </a:p>
+          <a:p>
+            <a:r>
+              <a:t>急増、複数 PC への拡散、急に静かになる、時間外の活動、の 4 種類です。</a:t>
+            </a:r>
+          </a:p>
+          <a:p>
+            <a:r>
+              <a:t>ルールは既知の手口に強い一方、振る舞い分析は“未知の手口への気づき”になる。両者を組み合わせるのが狙いです。</a:t>
+            </a:r>
+          </a:p>
+        </p:txBody>
+      </p:sp>
+      <p:sp>
+        <p:nvSpPr>
+          <p:cNvPr id="4" name="Slide Number Placeholder 3"/>
+          <p:cNvSpPr>
+            <a:spLocks noGrp="1"/>
+          </p:cNvSpPr>
+          <p:nvPr>
+            <p:ph type="sldNum" idx="5" sz="quarter"/>
+          </p:nvPr>
+        </p:nvSpPr>
+        <p:spPr/>
+      </p:sp>
+    </p:spTree>
+  </p:cSld>
+  <p:clrMapOvr>
+    <a:masterClrMapping/>
+  </p:clrMapOvr>
+</p:notes>
+</file>
+
+<file path=ppt/notesSlides/notesSlide13.xml><?xml version="1.0" encoding="utf-8"?>
+<p:notes xmlns:a="http://schemas.openxmlformats.org/drawingml/2006/main" xmlns:p="http://schemas.openxmlformats.org/presentationml/2006/main" xmlns:r="http://schemas.openxmlformats.org/officeDocument/2006/relationships">
+  <p:cSld>
+    <p:spTree>
+      <p:nvGrpSpPr>
+        <p:cNvPr id="1" name=""/>
+        <p:cNvGrpSpPr/>
+        <p:nvPr/>
+      </p:nvGrpSpPr>
+      <p:grpSpPr>
+        <a:xfrm>
+          <a:off x="0" y="0"/>
+          <a:ext cx="0" cy="0"/>
+          <a:chOff x="0" y="0"/>
+          <a:chExt cx="0" cy="0"/>
+        </a:xfrm>
+      </p:grpSpPr>
+      <p:sp>
+        <p:nvSpPr>
+          <p:cNvPr id="2" name="Slide Image Placeholder 1"/>
+          <p:cNvSpPr>
+            <a:spLocks noGrp="1"/>
+          </p:cNvSpPr>
+          <p:nvPr>
+            <p:ph type="sldImg" idx="2"/>
+          </p:nvPr>
+        </p:nvSpPr>
+        <p:spPr/>
+      </p:sp>
+      <p:sp>
+        <p:nvSpPr>
+          <p:cNvPr id="3" name="Notes Placeholder 2"/>
+          <p:cNvSpPr>
+            <a:spLocks noGrp="1"/>
+          </p:cNvSpPr>
+          <p:nvPr>
+            <p:ph type="body" idx="3" sz="quarter"/>
+          </p:nvPr>
+        </p:nvSpPr>
+        <p:spPr/>
+        <p:txBody>
+          <a:bodyPr/>
+          <a:lstStyle/>
+          <a:p>
+            <a:r>
+              <a:t>ここから実際の画面でお見せします。サンプルログを読み込んで、調査の流れを見ていただきます。</a:t>
+            </a:r>
+          </a:p>
+          <a:p>
+            <a:r>
+              <a:t>(デモ: スキャン実行 → ダッシュボードで全体把握 → 検知の日本語解説 → ホスト別の危険度ランキング、の順に見せる)</a:t>
+            </a:r>
+          </a:p>
+        </p:txBody>
+      </p:sp>
+      <p:sp>
+        <p:nvSpPr>
+          <p:cNvPr id="4" name="Slide Number Placeholder 3"/>
+          <p:cNvSpPr>
+            <a:spLocks noGrp="1"/>
+          </p:cNvSpPr>
+          <p:nvPr>
+            <p:ph type="sldNum" idx="5" sz="quarter"/>
+          </p:nvPr>
+        </p:nvSpPr>
+        <p:spPr/>
+      </p:sp>
+    </p:spTree>
+  </p:cSld>
+  <p:clrMapOvr>
+    <a:masterClrMapping/>
+  </p:clrMapOvr>
+</p:notes>
+</file>
+
+<file path=ppt/notesSlides/notesSlide14.xml><?xml version="1.0" encoding="utf-8"?>
+<p:notes xmlns:a="http://schemas.openxmlformats.org/drawingml/2006/main" xmlns:p="http://schemas.openxmlformats.org/presentationml/2006/main" xmlns:r="http://schemas.openxmlformats.org/officeDocument/2006/relationships">
+  <p:cSld>
+    <p:spTree>
+      <p:nvGrpSpPr>
+        <p:cNvPr id="1" name=""/>
+        <p:cNvGrpSpPr/>
+        <p:nvPr/>
+      </p:nvGrpSpPr>
+      <p:grpSpPr>
+        <a:xfrm>
+          <a:off x="0" y="0"/>
+          <a:ext cx="0" cy="0"/>
+          <a:chOff x="0" y="0"/>
+          <a:chExt cx="0" cy="0"/>
+        </a:xfrm>
+      </p:grpSpPr>
+      <p:sp>
+        <p:nvSpPr>
+          <p:cNvPr id="2" name="Slide Image Placeholder 1"/>
+          <p:cNvSpPr>
+            <a:spLocks noGrp="1"/>
+          </p:cNvSpPr>
+          <p:nvPr>
+            <p:ph type="sldImg" idx="2"/>
+          </p:nvPr>
+        </p:nvSpPr>
+        <p:spPr/>
+      </p:sp>
+      <p:sp>
+        <p:nvSpPr>
+          <p:cNvPr id="3" name="Notes Placeholder 2"/>
+          <p:cNvSpPr>
+            <a:spLocks noGrp="1"/>
+          </p:cNvSpPr>
+          <p:nvPr>
+            <p:ph type="body" idx="3" sz="quarter"/>
+          </p:nvPr>
+        </p:nvSpPr>
+        <p:spPr/>
+        <p:txBody>
+          <a:bodyPr/>
+          <a:lstStyle/>
+          <a:p>
+            <a:r>
+              <a:t>まとめます。エンジンに lookup という新しい文法を追加し、検知ルールを 13 本自作、結果を読み解く GUI を約 8,000 行で開発し、悪いものリスト約 8 万件を自動で取り込んで照合できるようにしました。</a:t>
+            </a:r>
+          </a:p>
+          <a:p>
+            <a:r>
+              <a:t>今後は、時間の流れを追った相関分析 (「A の後に B が起きたら怪しい」) や、AI による検知ルールの自動生成に進めたいと考えています。</a:t>
+            </a:r>
+          </a:p>
+        </p:txBody>
+      </p:sp>
+      <p:sp>
+        <p:nvSpPr>
+          <p:cNvPr id="4" name="Slide Number Placeholder 3"/>
+          <p:cNvSpPr>
+            <a:spLocks noGrp="1"/>
+          </p:cNvSpPr>
+          <p:nvPr>
+            <p:ph type="sldNum" idx="5" sz="quarter"/>
+          </p:nvPr>
+        </p:nvSpPr>
+        <p:spPr/>
+      </p:sp>
+    </p:spTree>
+  </p:cSld>
+  <p:clrMapOvr>
+    <a:masterClrMapping/>
+  </p:clrMapOvr>
+</p:notes>
+</file>
+
+<file path=ppt/notesSlides/notesSlide15.xml><?xml version="1.0" encoding="utf-8"?>
+<p:notes xmlns:a="http://schemas.openxmlformats.org/drawingml/2006/main" xmlns:p="http://schemas.openxmlformats.org/presentationml/2006/main" xmlns:r="http://schemas.openxmlformats.org/officeDocument/2006/relationships">
+  <p:cSld>
+    <p:spTree>
+      <p:nvGrpSpPr>
+        <p:cNvPr id="1" name=""/>
+        <p:cNvGrpSpPr/>
+        <p:nvPr/>
+      </p:nvGrpSpPr>
+      <p:grpSpPr>
+        <a:xfrm>
+          <a:off x="0" y="0"/>
+          <a:ext cx="0" cy="0"/>
+          <a:chOff x="0" y="0"/>
+          <a:chExt cx="0" cy="0"/>
+        </a:xfrm>
+      </p:grpSpPr>
+      <p:sp>
+        <p:nvSpPr>
+          <p:cNvPr id="2" name="Slide Image Placeholder 1"/>
+          <p:cNvSpPr>
+            <a:spLocks noGrp="1"/>
+          </p:cNvSpPr>
+          <p:nvPr>
+            <p:ph type="sldImg" idx="2"/>
+          </p:nvPr>
+        </p:nvSpPr>
+        <p:spPr/>
+      </p:sp>
+      <p:sp>
+        <p:nvSpPr>
+          <p:cNvPr id="3" name="Notes Placeholder 2"/>
+          <p:cNvSpPr>
+            <a:spLocks noGrp="1"/>
+          </p:cNvSpPr>
+          <p:nvPr>
+            <p:ph type="body" idx="3" sz="quarter"/>
+          </p:nvPr>
+        </p:nvSpPr>
+        <p:spPr/>
+        <p:txBody>
+          <a:bodyPr/>
+          <a:lstStyle/>
+          <a:p>
+            <a:r>
+              <a:t>以上です。ありがとうございました。</a:t>
+            </a:r>
+          </a:p>
+          <a:p>
+            <a:r>
+              <a:t>成果物はすべて GitHub で公開しているので、お手元の Windows PC のログでぜひ一度試してみてください。ご質問・フィードバックをお願いします。</a:t>
+            </a:r>
+          </a:p>
+        </p:txBody>
+      </p:sp>
+      <p:sp>
+        <p:nvSpPr>
+          <p:cNvPr id="4" name="Slide Number Placeholder 3"/>
+          <p:cNvSpPr>
+            <a:spLocks noGrp="1"/>
+          </p:cNvSpPr>
+          <p:nvPr>
+            <p:ph type="sldNum" idx="5" sz="quarter"/>
+          </p:nvPr>
+        </p:nvSpPr>
+        <p:spPr/>
+      </p:sp>
+    </p:spTree>
+  </p:cSld>
+  <p:clrMapOvr>
+    <a:masterClrMapping/>
+  </p:clrMapOvr>
+</p:notes>
+</file>
+
+<file path=ppt/notesSlides/notesSlide2.xml><?xml version="1.0" encoding="utf-8"?>
+<p:notes xmlns:a="http://schemas.openxmlformats.org/drawingml/2006/main" xmlns:p="http://schemas.openxmlformats.org/presentationml/2006/main" xmlns:r="http://schemas.openxmlformats.org/officeDocument/2006/relationships">
+  <p:cSld>
+    <p:spTree>
+      <p:nvGrpSpPr>
+        <p:cNvPr id="1" name=""/>
+        <p:cNvGrpSpPr/>
+        <p:nvPr/>
+      </p:nvGrpSpPr>
+      <p:grpSpPr>
+        <a:xfrm>
+          <a:off x="0" y="0"/>
+          <a:ext cx="0" cy="0"/>
+          <a:chOff x="0" y="0"/>
+          <a:chExt cx="0" cy="0"/>
+        </a:xfrm>
+      </p:grpSpPr>
+      <p:sp>
+        <p:nvSpPr>
+          <p:cNvPr id="2" name="Slide Image Placeholder 1"/>
+          <p:cNvSpPr>
+            <a:spLocks noGrp="1"/>
+          </p:cNvSpPr>
+          <p:nvPr>
+            <p:ph type="sldImg" idx="2"/>
+          </p:nvPr>
+        </p:nvSpPr>
+        <p:spPr/>
+      </p:sp>
+      <p:sp>
+        <p:nvSpPr>
+          <p:cNvPr id="3" name="Notes Placeholder 2"/>
+          <p:cNvSpPr>
+            <a:spLocks noGrp="1"/>
+          </p:cNvSpPr>
+          <p:nvPr>
+            <p:ph type="body" idx="3" sz="quarter"/>
+          </p:nvPr>
+        </p:nvSpPr>
+        <p:spPr/>
+        <p:txBody>
+          <a:bodyPr/>
+          <a:lstStyle/>
+          <a:p>
+            <a:r>
+              <a:t>まず背景から。もし皆さんの会社がサイバー攻撃を受けたら、どうしますか。</a:t>
+            </a:r>
+          </a:p>
+          <a:p>
+            <a:r>
+              <a:t>知りたいのは「どこから侵入されたか」「誰に何をされたか」「被害はどこまで広がったか」。しかもこれを“素早く”知る必要があります。対応が遅れるほど被害は広がるからです。</a:t>
+            </a:r>
+          </a:p>
+        </p:txBody>
+      </p:sp>
+      <p:sp>
+        <p:nvSpPr>
+          <p:cNvPr id="4" name="Slide Number Placeholder 3"/>
+          <p:cNvSpPr>
+            <a:spLocks noGrp="1"/>
+          </p:cNvSpPr>
+          <p:nvPr>
+            <p:ph type="sldNum" idx="5" sz="quarter"/>
+          </p:nvPr>
+        </p:nvSpPr>
+        <p:spPr/>
+      </p:sp>
+    </p:spTree>
+  </p:cSld>
+  <p:clrMapOvr>
+    <a:masterClrMapping/>
+  </p:clrMapOvr>
+</p:notes>
+</file>
+
+<file path=ppt/notesSlides/notesSlide3.xml><?xml version="1.0" encoding="utf-8"?>
+<p:notes xmlns:a="http://schemas.openxmlformats.org/drawingml/2006/main" xmlns:p="http://schemas.openxmlformats.org/presentationml/2006/main" xmlns:r="http://schemas.openxmlformats.org/officeDocument/2006/relationships">
+  <p:cSld>
+    <p:spTree>
+      <p:nvGrpSpPr>
+        <p:cNvPr id="1" name=""/>
+        <p:cNvGrpSpPr/>
+        <p:nvPr/>
+      </p:nvGrpSpPr>
+      <p:grpSpPr>
+        <a:xfrm>
+          <a:off x="0" y="0"/>
+          <a:ext cx="0" cy="0"/>
+          <a:chOff x="0" y="0"/>
+          <a:chExt cx="0" cy="0"/>
+        </a:xfrm>
+      </p:grpSpPr>
+      <p:sp>
+        <p:nvSpPr>
+          <p:cNvPr id="2" name="Slide Image Placeholder 1"/>
+          <p:cNvSpPr>
+            <a:spLocks noGrp="1"/>
+          </p:cNvSpPr>
+          <p:nvPr>
+            <p:ph type="sldImg" idx="2"/>
+          </p:nvPr>
+        </p:nvSpPr>
+        <p:spPr/>
+      </p:sp>
+      <p:sp>
+        <p:nvSpPr>
+          <p:cNvPr id="3" name="Notes Placeholder 2"/>
+          <p:cNvSpPr>
+            <a:spLocks noGrp="1"/>
+          </p:cNvSpPr>
+          <p:nvPr>
+            <p:ph type="body" idx="3" sz="quarter"/>
+          </p:nvPr>
+        </p:nvSpPr>
+        <p:spPr/>
+        <p:txBody>
+          <a:bodyPr/>
+          <a:lstStyle/>
+          <a:p>
+            <a:r>
+              <a:t>その答えは、実は Windows が残しているログの中にあります。ログオン、プロセス起動、通信 ── 攻撃の痕跡はすべて記録されている。</a:t>
+            </a:r>
+          </a:p>
+          <a:p>
+            <a:r>
+              <a:t>ただ問題は“量”です。たった 1 台の PC でも数万件。これを人間が 1 件ずつ読むのは現実的に不可能で、専門家が時間をかけても見落とします。</a:t>
+            </a:r>
+          </a:p>
+        </p:txBody>
+      </p:sp>
+      <p:sp>
+        <p:nvSpPr>
+          <p:cNvPr id="4" name="Slide Number Placeholder 3"/>
+          <p:cNvSpPr>
+            <a:spLocks noGrp="1"/>
+          </p:cNvSpPr>
+          <p:nvPr>
+            <p:ph type="sldNum" idx="5" sz="quarter"/>
+          </p:nvPr>
+        </p:nvSpPr>
+        <p:spPr/>
+      </p:sp>
+    </p:spTree>
+  </p:cSld>
+  <p:clrMapOvr>
+    <a:masterClrMapping/>
+  </p:clrMapOvr>
+</p:notes>
+</file>
+
+<file path=ppt/notesSlides/notesSlide4.xml><?xml version="1.0" encoding="utf-8"?>
+<p:notes xmlns:a="http://schemas.openxmlformats.org/drawingml/2006/main" xmlns:p="http://schemas.openxmlformats.org/presentationml/2006/main" xmlns:r="http://schemas.openxmlformats.org/officeDocument/2006/relationships">
+  <p:cSld>
+    <p:spTree>
+      <p:nvGrpSpPr>
+        <p:cNvPr id="1" name=""/>
+        <p:cNvGrpSpPr/>
+        <p:nvPr/>
+      </p:nvGrpSpPr>
+      <p:grpSpPr>
+        <a:xfrm>
+          <a:off x="0" y="0"/>
+          <a:ext cx="0" cy="0"/>
+          <a:chOff x="0" y="0"/>
+          <a:chExt cx="0" cy="0"/>
+        </a:xfrm>
+      </p:grpSpPr>
+      <p:sp>
+        <p:nvSpPr>
+          <p:cNvPr id="2" name="Slide Image Placeholder 1"/>
+          <p:cNvSpPr>
+            <a:spLocks noGrp="1"/>
+          </p:cNvSpPr>
+          <p:nvPr>
+            <p:ph type="sldImg" idx="2"/>
+          </p:nvPr>
+        </p:nvSpPr>
+        <p:spPr/>
+      </p:sp>
+      <p:sp>
+        <p:nvSpPr>
+          <p:cNvPr id="3" name="Notes Placeholder 2"/>
+          <p:cNvSpPr>
+            <a:spLocks noGrp="1"/>
+          </p:cNvSpPr>
+          <p:nvPr>
+            <p:ph type="body" idx="3" sz="quarter"/>
+          </p:nvPr>
+        </p:nvSpPr>
+        <p:spPr/>
+        <p:txBody>
+          <a:bodyPr/>
+          <a:lstStyle/>
+          <a:p>
+            <a:r>
+              <a:t>そこで土台にしたのが、日本の Yamato Security が公開している無料ツール Hayabusa です。世界中の研究者が作った約 5,000 本の攻撃パターンと、数万件のログを数十秒で照合できる、実績あるツールです。</a:t>
+            </a:r>
+          </a:p>
+          <a:p>
+            <a:r>
+              <a:t>ただ弱点があって、黒い画面でコマンドを打つ必要があり、結果は CSV 数万行、しかも英語と専門用語。「で、次どうすれば?」は教えてくれない。</a:t>
+            </a:r>
+          </a:p>
+          <a:p>
+            <a:r>
+              <a:t>つまり“強力だが専門家にしか使えない”。ここを出発点にしました。</a:t>
+            </a:r>
+          </a:p>
+        </p:txBody>
+      </p:sp>
+      <p:sp>
+        <p:nvSpPr>
+          <p:cNvPr id="4" name="Slide Number Placeholder 3"/>
+          <p:cNvSpPr>
+            <a:spLocks noGrp="1"/>
+          </p:cNvSpPr>
+          <p:nvPr>
+            <p:ph type="sldNum" idx="5" sz="quarter"/>
+          </p:nvPr>
+        </p:nvSpPr>
+        <p:spPr/>
+      </p:sp>
+    </p:spTree>
+  </p:cSld>
+  <p:clrMapOvr>
+    <a:masterClrMapping/>
+  </p:clrMapOvr>
+</p:notes>
+</file>
+
+<file path=ppt/notesSlides/notesSlide5.xml><?xml version="1.0" encoding="utf-8"?>
+<p:notes xmlns:a="http://schemas.openxmlformats.org/drawingml/2006/main" xmlns:p="http://schemas.openxmlformats.org/presentationml/2006/main" xmlns:r="http://schemas.openxmlformats.org/officeDocument/2006/relationships">
+  <p:cSld>
+    <p:spTree>
+      <p:nvGrpSpPr>
+        <p:cNvPr id="1" name=""/>
+        <p:cNvGrpSpPr/>
+        <p:nvPr/>
+      </p:nvGrpSpPr>
+      <p:grpSpPr>
+        <a:xfrm>
+          <a:off x="0" y="0"/>
+          <a:ext cx="0" cy="0"/>
+          <a:chOff x="0" y="0"/>
+          <a:chExt cx="0" cy="0"/>
+        </a:xfrm>
+      </p:grpSpPr>
+      <p:sp>
+        <p:nvSpPr>
+          <p:cNvPr id="2" name="Slide Image Placeholder 1"/>
+          <p:cNvSpPr>
+            <a:spLocks noGrp="1"/>
+          </p:cNvSpPr>
+          <p:nvPr>
+            <p:ph type="sldImg" idx="2"/>
+          </p:nvPr>
+        </p:nvSpPr>
+        <p:spPr/>
+      </p:sp>
+      <p:sp>
+        <p:nvSpPr>
+          <p:cNvPr id="3" name="Notes Placeholder 2"/>
+          <p:cNvSpPr>
+            <a:spLocks noGrp="1"/>
+          </p:cNvSpPr>
+          <p:nvPr>
+            <p:ph type="body" idx="3" sz="quarter"/>
+          </p:nvPr>
+        </p:nvSpPr>
+        <p:spPr/>
+        <p:txBody>
+          <a:bodyPr/>
+          <a:lstStyle/>
+          <a:p>
+            <a:r>
+              <a:t>目的は明確で、この「専門家の道具」を「誰でも使える調査プラットフォーム」にすることです。</a:t>
+            </a:r>
+          </a:p>
+          <a:p>
+            <a:r>
+              <a:t>方針は 3 つ。①見つける力を強くする (エンジン改造とルール自作)、②結果を読めるようにする (GUI)、③手元だけで完結させる (データを外に出さない・追加ソフト不要)。</a:t>
+            </a:r>
+          </a:p>
+          <a:p>
+            <a:r>
+              <a:t>この 3 つが、この後の発表の章立てになります。</a:t>
+            </a:r>
+          </a:p>
+        </p:txBody>
+      </p:sp>
+      <p:sp>
+        <p:nvSpPr>
+          <p:cNvPr id="4" name="Slide Number Placeholder 3"/>
+          <p:cNvSpPr>
+            <a:spLocks noGrp="1"/>
+          </p:cNvSpPr>
+          <p:nvPr>
+            <p:ph type="sldNum" idx="5" sz="quarter"/>
+          </p:nvPr>
+        </p:nvSpPr>
+        <p:spPr/>
+      </p:sp>
+    </p:spTree>
+  </p:cSld>
+  <p:clrMapOvr>
+    <a:masterClrMapping/>
+  </p:clrMapOvr>
+</p:notes>
+</file>
+
+<file path=ppt/notesSlides/notesSlide6.xml><?xml version="1.0" encoding="utf-8"?>
+<p:notes xmlns:a="http://schemas.openxmlformats.org/drawingml/2006/main" xmlns:p="http://schemas.openxmlformats.org/presentationml/2006/main" xmlns:r="http://schemas.openxmlformats.org/officeDocument/2006/relationships">
+  <p:cSld>
+    <p:spTree>
+      <p:nvGrpSpPr>
+        <p:cNvPr id="1" name=""/>
+        <p:cNvGrpSpPr/>
+        <p:nvPr/>
+      </p:nvGrpSpPr>
+      <p:grpSpPr>
+        <a:xfrm>
+          <a:off x="0" y="0"/>
+          <a:ext cx="0" cy="0"/>
+          <a:chOff x="0" y="0"/>
+          <a:chExt cx="0" cy="0"/>
+        </a:xfrm>
+      </p:grpSpPr>
+      <p:sp>
+        <p:nvSpPr>
+          <p:cNvPr id="2" name="Slide Image Placeholder 1"/>
+          <p:cNvSpPr>
+            <a:spLocks noGrp="1"/>
+          </p:cNvSpPr>
+          <p:nvPr>
+            <p:ph type="sldImg" idx="2"/>
+          </p:nvPr>
+        </p:nvSpPr>
+        <p:spPr/>
+      </p:sp>
+      <p:sp>
+        <p:nvSpPr>
+          <p:cNvPr id="3" name="Notes Placeholder 2"/>
+          <p:cNvSpPr>
+            <a:spLocks noGrp="1"/>
+          </p:cNvSpPr>
+          <p:nvPr>
+            <p:ph type="body" idx="3" sz="quarter"/>
+          </p:nvPr>
+        </p:nvSpPr>
+        <p:spPr/>
+        <p:txBody>
+          <a:bodyPr/>
+          <a:lstStyle/>
+          <a:p>
+            <a:r>
+              <a:t>全体像です。グレーが既存の Hayabusa、青が私が開発した部分です。</a:t>
+            </a:r>
+          </a:p>
+          <a:p>
+            <a:r>
+              <a:t>ログがエンジンで解析され、GUI を通して人が読む、という流れ。エンジンには中身を改造して新機能を追加し、下から「自作の検知ルール 13 本」と「悪いものリスト約 8 万件」を注ぎ込んでいます。GUI はゼロから約 8,000 行で作りました。</a:t>
+            </a:r>
+          </a:p>
+          <a:p>
+            <a:r>
+              <a:t>では順に説明します。</a:t>
+            </a:r>
+          </a:p>
+        </p:txBody>
+      </p:sp>
+      <p:sp>
+        <p:nvSpPr>
+          <p:cNvPr id="4" name="Slide Number Placeholder 3"/>
+          <p:cNvSpPr>
+            <a:spLocks noGrp="1"/>
+          </p:cNvSpPr>
+          <p:nvPr>
+            <p:ph type="sldNum" idx="5" sz="quarter"/>
+          </p:nvPr>
+        </p:nvSpPr>
+        <p:spPr/>
+      </p:sp>
+    </p:spTree>
+  </p:cSld>
+  <p:clrMapOvr>
+    <a:masterClrMapping/>
+  </p:clrMapOvr>
+</p:notes>
+</file>
+
+<file path=ppt/notesSlides/notesSlide7.xml><?xml version="1.0" encoding="utf-8"?>
+<p:notes xmlns:a="http://schemas.openxmlformats.org/drawingml/2006/main" xmlns:p="http://schemas.openxmlformats.org/presentationml/2006/main" xmlns:r="http://schemas.openxmlformats.org/officeDocument/2006/relationships">
+  <p:cSld>
+    <p:spTree>
+      <p:nvGrpSpPr>
+        <p:cNvPr id="1" name=""/>
+        <p:cNvGrpSpPr/>
+        <p:nvPr/>
+      </p:nvGrpSpPr>
+      <p:grpSpPr>
+        <a:xfrm>
+          <a:off x="0" y="0"/>
+          <a:ext cx="0" cy="0"/>
+          <a:chOff x="0" y="0"/>
+          <a:chExt cx="0" cy="0"/>
+        </a:xfrm>
+      </p:grpSpPr>
+      <p:sp>
+        <p:nvSpPr>
+          <p:cNvPr id="2" name="Slide Image Placeholder 1"/>
+          <p:cNvSpPr>
+            <a:spLocks noGrp="1"/>
+          </p:cNvSpPr>
+          <p:nvPr>
+            <p:ph type="sldImg" idx="2"/>
+          </p:nvPr>
+        </p:nvSpPr>
+        <p:spPr/>
+      </p:sp>
+      <p:sp>
+        <p:nvSpPr>
+          <p:cNvPr id="3" name="Notes Placeholder 2"/>
+          <p:cNvSpPr>
+            <a:spLocks noGrp="1"/>
+          </p:cNvSpPr>
+          <p:nvPr>
+            <p:ph type="body" idx="3" sz="quarter"/>
+          </p:nvPr>
+        </p:nvSpPr>
+        <p:spPr/>
+        <p:txBody>
+          <a:bodyPr/>
+          <a:lstStyle/>
+          <a:p>
+            <a:r>
+              <a:t>1 つ目、エンジン本体の改造です。Hayabusa の「ルールの書き方」自体を拡張しました。</a:t>
+            </a:r>
+          </a:p>
+          <a:p>
+            <a:r>
+              <a:t>具体的には、ルールに 1 行「このリストに載っていたら警告して」と書ける lookup という機能を、Rust のソースコードに追加しました。</a:t>
+            </a:r>
+          </a:p>
+          <a:p>
+            <a:r>
+              <a:t>これで世界中で共有されている悪性ハッシュや URL のリスト約 8 万件を、ルールを書き換えずにそのまま検知に使えます。このリストの出どころと処理の流れを、次のページで説明します。</a:t>
+            </a:r>
+          </a:p>
+        </p:txBody>
+      </p:sp>
+      <p:sp>
+        <p:nvSpPr>
+          <p:cNvPr id="4" name="Slide Number Placeholder 3"/>
+          <p:cNvSpPr>
+            <a:spLocks noGrp="1"/>
+          </p:cNvSpPr>
+          <p:nvPr>
+            <p:ph type="sldNum" idx="5" sz="quarter"/>
+          </p:nvPr>
+        </p:nvSpPr>
+        <p:spPr/>
+      </p:sp>
+    </p:spTree>
+  </p:cSld>
+  <p:clrMapOvr>
+    <a:masterClrMapping/>
+  </p:clrMapOvr>
+</p:notes>
+</file>
+
+<file path=ppt/notesSlides/notesSlide8.xml><?xml version="1.0" encoding="utf-8"?>
+<p:notes xmlns:a="http://schemas.openxmlformats.org/drawingml/2006/main" xmlns:p="http://schemas.openxmlformats.org/presentationml/2006/main" xmlns:r="http://schemas.openxmlformats.org/officeDocument/2006/relationships">
+  <p:cSld>
+    <p:spTree>
+      <p:nvGrpSpPr>
+        <p:cNvPr id="1" name=""/>
+        <p:cNvGrpSpPr/>
+        <p:nvPr/>
+      </p:nvGrpSpPr>
+      <p:grpSpPr>
+        <a:xfrm>
+          <a:off x="0" y="0"/>
+          <a:ext cx="0" cy="0"/>
+          <a:chOff x="0" y="0"/>
+          <a:chExt cx="0" cy="0"/>
+        </a:xfrm>
+      </p:grpSpPr>
+      <p:sp>
+        <p:nvSpPr>
+          <p:cNvPr id="2" name="Slide Image Placeholder 1"/>
+          <p:cNvSpPr>
+            <a:spLocks noGrp="1"/>
+          </p:cNvSpPr>
+          <p:nvPr>
+            <p:ph type="sldImg" idx="2"/>
+          </p:nvPr>
+        </p:nvSpPr>
+        <p:spPr/>
+      </p:sp>
+      <p:sp>
+        <p:nvSpPr>
+          <p:cNvPr id="3" name="Notes Placeholder 2"/>
+          <p:cNvSpPr>
+            <a:spLocks noGrp="1"/>
+          </p:cNvSpPr>
+          <p:nvPr>
+            <p:ph type="body" idx="3" sz="quarter"/>
+          </p:nvPr>
+        </p:nvSpPr>
+        <p:spPr/>
+        <p:txBody>
+          <a:bodyPr/>
+          <a:lstStyle/>
+          <a:p>
+            <a:r>
+              <a:t>これが lookup の内部フローです。例として、悪用される脆弱ドライバの検知 (BYOVD) を追います。</a:t>
+            </a:r>
+          </a:p>
+          <a:p>
+            <a:r>
+              <a:t>まず出どころは loldrivers.io。世界中の研究者が集めた“悪用されるドライバ”のハッシュ一覧です。これを取得してテキストに整形し、1,929 件のリストとして保存します。</a:t>
+            </a:r>
+          </a:p>
+          <a:p>
+            <a:r>
+              <a:t>エンジンは起動時に一度だけこれをメモリに読み込み、あとはログ 1 件ごとに、ドライバ読込イベントのハッシュをこの表と照合。一致すれば攻撃の痕跡として critical で通知します。</a:t>
+            </a:r>
+          </a:p>
+          <a:p>
+            <a:r>
+              <a:t>ポイントは、リストが増えても照合速度は一定で、リストを更新するだけで最新の脅威に追従できることです。</a:t>
+            </a:r>
+          </a:p>
+        </p:txBody>
+      </p:sp>
+      <p:sp>
+        <p:nvSpPr>
+          <p:cNvPr id="4" name="Slide Number Placeholder 3"/>
+          <p:cNvSpPr>
+            <a:spLocks noGrp="1"/>
+          </p:cNvSpPr>
+          <p:nvPr>
+            <p:ph type="sldNum" idx="5" sz="quarter"/>
+          </p:nvPr>
+        </p:nvSpPr>
+        <p:spPr/>
+      </p:sp>
+    </p:spTree>
+  </p:cSld>
+  <p:clrMapOvr>
+    <a:masterClrMapping/>
+  </p:clrMapOvr>
+</p:notes>
+</file>
+
+<file path=ppt/notesSlides/notesSlide9.xml><?xml version="1.0" encoding="utf-8"?>
+<p:notes xmlns:a="http://schemas.openxmlformats.org/drawingml/2006/main" xmlns:p="http://schemas.openxmlformats.org/presentationml/2006/main" xmlns:r="http://schemas.openxmlformats.org/officeDocument/2006/relationships">
+  <p:cSld>
+    <p:spTree>
+      <p:nvGrpSpPr>
+        <p:cNvPr id="1" name=""/>
+        <p:cNvGrpSpPr/>
+        <p:nvPr/>
+      </p:nvGrpSpPr>
+      <p:grpSpPr>
+        <a:xfrm>
+          <a:off x="0" y="0"/>
+          <a:ext cx="0" cy="0"/>
+          <a:chOff x="0" y="0"/>
+          <a:chExt cx="0" cy="0"/>
+        </a:xfrm>
+      </p:grpSpPr>
+      <p:sp>
+        <p:nvSpPr>
+          <p:cNvPr id="2" name="Slide Image Placeholder 1"/>
+          <p:cNvSpPr>
+            <a:spLocks noGrp="1"/>
+          </p:cNvSpPr>
+          <p:nvPr>
+            <p:ph type="sldImg" idx="2"/>
+          </p:nvPr>
+        </p:nvSpPr>
+        <p:spPr/>
+      </p:sp>
+      <p:sp>
+        <p:nvSpPr>
+          <p:cNvPr id="3" name="Notes Placeholder 2"/>
+          <p:cNvSpPr>
+            <a:spLocks noGrp="1"/>
+          </p:cNvSpPr>
+          <p:nvPr>
+            <p:ph type="body" idx="3" sz="quarter"/>
+          </p:nvPr>
+        </p:nvSpPr>
+        <p:spPr/>
+        <p:txBody>
+          <a:bodyPr/>
+          <a:lstStyle/>
+          <a:p>
+            <a:r>
+              <a:t>2 つ目、検知ルールを 13 本自作しました。</a:t>
+            </a:r>
+          </a:p>
+          <a:p>
+            <a:r>
+              <a:t>着眼点は「攻撃者は必ず証拠隠しをする。なら、消す行為そのものを検知すればいい」。代表的な 4 つが、ログの消去、復元データの削除、監視の無効化、パスワードの抜き取りです。</a:t>
+            </a:r>
+          </a:p>
+          <a:p>
+            <a:r>
+              <a:t>誤検知を減らすため、1 つの特徴では鳴らさず、複数の特徴が同時に揃ったときだけ警告する設計にしています。</a:t>
+            </a:r>
+          </a:p>
+        </p:txBody>
+      </p:sp>
+      <p:sp>
+        <p:nvSpPr>
+          <p:cNvPr id="4" name="Slide Number Placeholder 3"/>
+          <p:cNvSpPr>
+            <a:spLocks noGrp="1"/>
+          </p:cNvSpPr>
+          <p:nvPr>
+            <p:ph type="sldNum" idx="5" sz="quarter"/>
+          </p:nvPr>
+        </p:nvSpPr>
+        <p:spPr/>
+      </p:sp>
+    </p:spTree>
+  </p:cSld>
+  <p:clrMapOvr>
+    <a:masterClrMapping/>
+  </p:clrMapOvr>
+</p:notes>
 </file>
 
 <file path=ppt/slideLayouts/slideLayout1.xml><?xml version="1.0" encoding="utf-8"?>
@@ -18434,4 +19969,324 @@
   </a:objectDefaults>
   <a:extraClrSchemeLst/>
 </a:theme>
+</file>
+
+<file path=ppt/theme/theme2.xml><?xml version="1.0" encoding="utf-8"?>
+<a:theme xmlns:a="http://schemas.openxmlformats.org/drawingml/2006/main" name="Office Theme">
+  <a:themeElements>
+    <a:clrScheme name="Office">
+      <a:dk1>
+        <a:sysClr val="windowText" lastClr="000000"/>
+      </a:dk1>
+      <a:lt1>
+        <a:sysClr val="window" lastClr="FFFFFF"/>
+      </a:lt1>
+      <a:dk2>
+        <a:srgbClr val="1F497D"/>
+      </a:dk2>
+      <a:lt2>
+        <a:srgbClr val="EEECE1"/>
+      </a:lt2>
+      <a:accent1>
+        <a:srgbClr val="4F81BD"/>
+      </a:accent1>
+      <a:accent2>
+        <a:srgbClr val="C0504D"/>
+      </a:accent2>
+      <a:accent3>
+        <a:srgbClr val="9BBB59"/>
+      </a:accent3>
+      <a:accent4>
+        <a:srgbClr val="8064A2"/>
+      </a:accent4>
+      <a:accent5>
+        <a:srgbClr val="4BACC6"/>
+      </a:accent5>
+      <a:accent6>
+        <a:srgbClr val="F79646"/>
+      </a:accent6>
+      <a:hlink>
+        <a:srgbClr val="0000FF"/>
+      </a:hlink>
+      <a:folHlink>
+        <a:srgbClr val="800080"/>
+      </a:folHlink>
+    </a:clrScheme>
+    <a:fontScheme name="Office">
+      <a:majorFont>
+        <a:latin typeface="Calibri"/>
+        <a:ea typeface=""/>
+        <a:cs typeface=""/>
+        <a:font script="Jpan" typeface="ＭＳ Ｐゴシック"/>
+        <a:font script="Hang" typeface="맑은 고딕"/>
+        <a:font script="Hans" typeface="宋体"/>
+        <a:font script="Hant" typeface="新細明體"/>
+        <a:font script="Arab" typeface="Times New Roman"/>
+        <a:font script="Hebr" typeface="Times New Roman"/>
+        <a:font script="Thai" typeface="Angsana New"/>
+        <a:font script="Ethi" typeface="Nyala"/>
+        <a:font script="Beng" typeface="Vrinda"/>
+        <a:font script="Gujr" typeface="Shruti"/>
+        <a:font script="Khmr" typeface="MoolBoran"/>
+        <a:font script="Knda" typeface="Tunga"/>
+        <a:font script="Guru" typeface="Raavi"/>
+        <a:font script="Cans" typeface="Euphemia"/>
+        <a:font script="Cher" typeface="Plantagenet Cherokee"/>
+        <a:font script="Yiii" typeface="Microsoft Yi Baiti"/>
+        <a:font script="Tibt" typeface="Microsoft Himalaya"/>
+        <a:font script="Thaa" typeface="MV Boli"/>
+        <a:font script="Deva" typeface="Mangal"/>
+        <a:font script="Telu" typeface="Gautami"/>
+        <a:font script="Taml" typeface="Latha"/>
+        <a:font script="Syrc" typeface="Estrangelo Edessa"/>
+        <a:font script="Orya" typeface="Kalinga"/>
+        <a:font script="Mlym" typeface="Kartika"/>
+        <a:font script="Laoo" typeface="DokChampa"/>
+        <a:font script="Sinh" typeface="Iskoola Pota"/>
+        <a:font script="Mong" typeface="Mongolian Baiti"/>
+        <a:font script="Viet" typeface="Times New Roman"/>
+        <a:font script="Uigh" typeface="Microsoft Uighur"/>
+        <a:font script="Geor" typeface="Sylfaen"/>
+      </a:majorFont>
+      <a:minorFont>
+        <a:latin typeface="Calibri"/>
+        <a:ea typeface=""/>
+        <a:cs typeface=""/>
+        <a:font script="Jpan" typeface="ＭＳ Ｐゴシック"/>
+        <a:font script="Hang" typeface="맑은 고딕"/>
+        <a:font script="Hans" typeface="宋体"/>
+        <a:font script="Hant" typeface="新細明體"/>
+        <a:font script="Arab" typeface="Arial"/>
+        <a:font script="Hebr" typeface="Arial"/>
+        <a:font script="Thai" typeface="Cordia New"/>
+        <a:font script="Ethi" typeface="Nyala"/>
+        <a:font script="Beng" typeface="Vrinda"/>
+        <a:font script="Gujr" typeface="Shruti"/>
+        <a:font script="Khmr" typeface="DaunPenh"/>
+        <a:font script="Knda" typeface="Tunga"/>
+        <a:font script="Guru" typeface="Raavi"/>
+        <a:font script="Cans" typeface="Euphemia"/>
+        <a:font script="Cher" typeface="Plantagenet Cherokee"/>
+        <a:font script="Yiii" typeface="Microsoft Yi Baiti"/>
+        <a:font script="Tibt" typeface="Microsoft Himalaya"/>
+        <a:font script="Thaa" typeface="MV Boli"/>
+        <a:font script="Deva" typeface="Mangal"/>
+        <a:font script="Telu" typeface="Gautami"/>
+        <a:font script="Taml" typeface="Latha"/>
+        <a:font script="Syrc" typeface="Estrangelo Edessa"/>
+        <a:font script="Orya" typeface="Kalinga"/>
+        <a:font script="Mlym" typeface="Kartika"/>
+        <a:font script="Laoo" typeface="DokChampa"/>
+        <a:font script="Sinh" typeface="Iskoola Pota"/>
+        <a:font script="Mong" typeface="Mongolian Baiti"/>
+        <a:font script="Viet" typeface="Arial"/>
+        <a:font script="Uigh" typeface="Microsoft Uighur"/>
+        <a:font script="Geor" typeface="Sylfaen"/>
+      </a:minorFont>
+    </a:fontScheme>
+    <a:fmtScheme name="Office">
+      <a:fillStyleLst>
+        <a:solidFill>
+          <a:schemeClr val="phClr"/>
+        </a:solidFill>
+        <a:gradFill rotWithShape="1">
+          <a:gsLst>
+            <a:gs pos="0">
+              <a:schemeClr val="phClr">
+                <a:tint val="50000"/>
+                <a:satMod val="300000"/>
+              </a:schemeClr>
+            </a:gs>
+            <a:gs pos="35000">
+              <a:schemeClr val="phClr">
+                <a:tint val="37000"/>
+                <a:satMod val="300000"/>
+              </a:schemeClr>
+            </a:gs>
+            <a:gs pos="100000">
+              <a:schemeClr val="phClr">
+                <a:tint val="15000"/>
+                <a:satMod val="350000"/>
+              </a:schemeClr>
+            </a:gs>
+          </a:gsLst>
+          <a:lin ang="16200000" scaled="1"/>
+        </a:gradFill>
+        <a:gradFill rotWithShape="1">
+          <a:gsLst>
+            <a:gs pos="0">
+              <a:schemeClr val="phClr">
+                <a:tint val="100000"/>
+                <a:shade val="100000"/>
+                <a:satMod val="130000"/>
+              </a:schemeClr>
+            </a:gs>
+            <a:gs pos="100000">
+              <a:schemeClr val="phClr">
+                <a:tint val="50000"/>
+                <a:shade val="100000"/>
+                <a:satMod val="350000"/>
+              </a:schemeClr>
+            </a:gs>
+          </a:gsLst>
+          <a:lin ang="16200000" scaled="0"/>
+        </a:gradFill>
+      </a:fillStyleLst>
+      <a:lnStyleLst>
+        <a:ln w="9525" cap="flat" cmpd="sng" algn="ctr">
+          <a:solidFill>
+            <a:schemeClr val="phClr">
+              <a:shade val="95000"/>
+              <a:satMod val="105000"/>
+            </a:schemeClr>
+          </a:solidFill>
+          <a:prstDash val="solid"/>
+        </a:ln>
+        <a:ln w="25400" cap="flat" cmpd="sng" algn="ctr">
+          <a:solidFill>
+            <a:schemeClr val="phClr"/>
+          </a:solidFill>
+          <a:prstDash val="solid"/>
+        </a:ln>
+        <a:ln w="38100" cap="flat" cmpd="sng" algn="ctr">
+          <a:solidFill>
+            <a:schemeClr val="phClr"/>
+          </a:solidFill>
+          <a:prstDash val="solid"/>
+        </a:ln>
+      </a:lnStyleLst>
+      <a:effectStyleLst>
+        <a:effectStyle>
+          <a:effectLst>
+            <a:outerShdw blurRad="40000" dist="20000" dir="5400000" rotWithShape="0">
+              <a:srgbClr val="000000">
+                <a:alpha val="38000"/>
+              </a:srgbClr>
+            </a:outerShdw>
+          </a:effectLst>
+        </a:effectStyle>
+        <a:effectStyle>
+          <a:effectLst>
+            <a:outerShdw blurRad="40000" dist="23000" dir="5400000" rotWithShape="0">
+              <a:srgbClr val="000000">
+                <a:alpha val="35000"/>
+              </a:srgbClr>
+            </a:outerShdw>
+          </a:effectLst>
+        </a:effectStyle>
+        <a:effectStyle>
+          <a:effectLst>
+            <a:outerShdw blurRad="40000" dist="23000" dir="5400000" rotWithShape="0">
+              <a:srgbClr val="000000">
+                <a:alpha val="35000"/>
+              </a:srgbClr>
+            </a:outerShdw>
+          </a:effectLst>
+          <a:scene3d>
+            <a:camera prst="orthographicFront">
+              <a:rot lat="0" lon="0" rev="0"/>
+            </a:camera>
+            <a:lightRig rig="threePt" dir="t">
+              <a:rot lat="0" lon="0" rev="1200000"/>
+            </a:lightRig>
+          </a:scene3d>
+          <a:sp3d>
+            <a:bevelT w="63500" h="25400"/>
+          </a:sp3d>
+        </a:effectStyle>
+      </a:effectStyleLst>
+      <a:bgFillStyleLst>
+        <a:solidFill>
+          <a:schemeClr val="phClr"/>
+        </a:solidFill>
+        <a:gradFill rotWithShape="1">
+          <a:gsLst>
+            <a:gs pos="0">
+              <a:schemeClr val="phClr">
+                <a:tint val="40000"/>
+                <a:satMod val="350000"/>
+              </a:schemeClr>
+            </a:gs>
+            <a:gs pos="40000">
+              <a:schemeClr val="phClr">
+                <a:tint val="45000"/>
+                <a:shade val="99000"/>
+                <a:satMod val="350000"/>
+              </a:schemeClr>
+            </a:gs>
+            <a:gs pos="100000">
+              <a:schemeClr val="phClr">
+                <a:shade val="20000"/>
+                <a:satMod val="255000"/>
+              </a:schemeClr>
+            </a:gs>
+          </a:gsLst>
+          <a:path path="circle">
+            <a:fillToRect l="50000" t="-80000" r="50000" b="180000"/>
+          </a:path>
+        </a:gradFill>
+        <a:gradFill rotWithShape="1">
+          <a:gsLst>
+            <a:gs pos="0">
+              <a:schemeClr val="phClr">
+                <a:tint val="80000"/>
+                <a:satMod val="300000"/>
+              </a:schemeClr>
+            </a:gs>
+            <a:gs pos="100000">
+              <a:schemeClr val="phClr">
+                <a:shade val="30000"/>
+                <a:satMod val="200000"/>
+              </a:schemeClr>
+            </a:gs>
+          </a:gsLst>
+          <a:path path="circle">
+            <a:fillToRect l="50000" t="50000" r="50000" b="50000"/>
+          </a:path>
+        </a:gradFill>
+      </a:bgFillStyleLst>
+    </a:fmtScheme>
+  </a:themeElements>
+  <a:objectDefaults>
+    <a:spDef>
+      <a:spPr/>
+      <a:bodyPr/>
+      <a:lstStyle/>
+      <a:style>
+        <a:lnRef idx="1">
+          <a:schemeClr val="accent1"/>
+        </a:lnRef>
+        <a:fillRef idx="3">
+          <a:schemeClr val="accent1"/>
+        </a:fillRef>
+        <a:effectRef idx="2">
+          <a:schemeClr val="accent1"/>
+        </a:effectRef>
+        <a:fontRef idx="minor">
+          <a:schemeClr val="lt1"/>
+        </a:fontRef>
+      </a:style>
+    </a:spDef>
+    <a:lnDef>
+      <a:spPr/>
+      <a:bodyPr/>
+      <a:lstStyle/>
+      <a:style>
+        <a:lnRef idx="2">
+          <a:schemeClr val="accent1"/>
+        </a:lnRef>
+        <a:fillRef idx="0">
+          <a:schemeClr val="accent1"/>
+        </a:fillRef>
+        <a:effectRef idx="1">
+          <a:schemeClr val="accent1"/>
+        </a:effectRef>
+        <a:fontRef idx="minor">
+          <a:schemeClr val="tx1"/>
+        </a:fontRef>
+      </a:style>
+    </a:lnDef>
+  </a:objectDefaults>
+  <a:extraClrSchemeLst/>
+</a:theme>
 </file>
--- a/docs/presentation/pptx/hayabusa-plus.pptx
+++ b/docs/presentation/pptx/hayabusa-plus.pptx
@@ -20,6 +20,7 @@
     <p:sldId id="268" r:id="rId19"/>
     <p:sldId id="269" r:id="rId20"/>
     <p:sldId id="270" r:id="rId21"/>
+    <p:sldId id="271" r:id="rId22"/>
   </p:sldIdLst>
   <p:sldSz cx="12191695" cy="6858000" type="screen4x3"/>
   <p:notesSz cx="6858000" cy="9144000"/>
@@ -997,6 +998,86 @@
           <a:p>
             <a:r>
               <a:t>成果物はすべて GitHub で公開しているので、お手元の Windows PC のログでぜひ一度試してみてください。ご質問・フィードバックをお願いします。</a:t>
+            </a:r>
+          </a:p>
+        </p:txBody>
+      </p:sp>
+      <p:sp>
+        <p:nvSpPr>
+          <p:cNvPr id="4" name="Slide Number Placeholder 3"/>
+          <p:cNvSpPr>
+            <a:spLocks noGrp="1"/>
+          </p:cNvSpPr>
+          <p:nvPr>
+            <p:ph type="sldNum" idx="5" sz="quarter"/>
+          </p:nvPr>
+        </p:nvSpPr>
+        <p:spPr/>
+      </p:sp>
+    </p:spTree>
+  </p:cSld>
+  <p:clrMapOvr>
+    <a:masterClrMapping/>
+  </p:clrMapOvr>
+</p:notes>
+</file>
+
+<file path=ppt/notesSlides/notesSlide16.xml><?xml version="1.0" encoding="utf-8"?>
+<p:notes xmlns:a="http://schemas.openxmlformats.org/drawingml/2006/main" xmlns:p="http://schemas.openxmlformats.org/presentationml/2006/main" xmlns:r="http://schemas.openxmlformats.org/officeDocument/2006/relationships">
+  <p:cSld>
+    <p:spTree>
+      <p:nvGrpSpPr>
+        <p:cNvPr id="1" name=""/>
+        <p:cNvGrpSpPr/>
+        <p:nvPr/>
+      </p:nvGrpSpPr>
+      <p:grpSpPr>
+        <a:xfrm>
+          <a:off x="0" y="0"/>
+          <a:ext cx="0" cy="0"/>
+          <a:chOff x="0" y="0"/>
+          <a:chExt cx="0" cy="0"/>
+        </a:xfrm>
+      </p:grpSpPr>
+      <p:sp>
+        <p:nvSpPr>
+          <p:cNvPr id="2" name="Slide Image Placeholder 1"/>
+          <p:cNvSpPr>
+            <a:spLocks noGrp="1"/>
+          </p:cNvSpPr>
+          <p:nvPr>
+            <p:ph type="sldImg" idx="2"/>
+          </p:nvPr>
+        </p:nvSpPr>
+        <p:spPr/>
+      </p:sp>
+      <p:sp>
+        <p:nvSpPr>
+          <p:cNvPr id="3" name="Notes Placeholder 2"/>
+          <p:cNvSpPr>
+            <a:spLocks noGrp="1"/>
+          </p:cNvSpPr>
+          <p:nvPr>
+            <p:ph type="body" idx="3" sz="quarter"/>
+          </p:nvPr>
+        </p:nvSpPr>
+        <p:spPr/>
+        <p:txBody>
+          <a:bodyPr/>
+          <a:lstStyle/>
+          <a:p>
+            <a:r>
+              <a:t>(付録・Q&amp;A 用) 「13 本って具体的には?」と聞かれたら、このスライドを出してください。</a:t>
+            </a:r>
+          </a:p>
+          <a:p>
+            <a:r>
+              <a:t>本編では代表的な 4 種類を紹介しましたが、実際は攻撃の流れに沿って 13 本を用意しています。「①外から入って動く → ②盗んで住み着く → ③監視を無力化 → ④証拠を消す」という順番で、それぞれの段階で出る特徴を捕まえます。</a:t>
+            </a:r>
+          </a:p>
+          <a:p>
+            <a:r>
+              <a:t>赤が critical、橙が high です。気になるルールがあれば個別に説明できます。</a:t>
             </a:r>
           </a:p>
         </p:txBody>
@@ -10785,6 +10866,1946 @@
                 <a:latin typeface="Calibri"/>
               </a:rPr>
               <a:t>お手元の Windows PC のログで、ぜひ一度。</a:t>
+            </a:r>
+          </a:p>
+        </p:txBody>
+      </p:sp>
+    </p:spTree>
+  </p:cSld>
+  <p:clrMapOvr>
+    <a:masterClrMapping/>
+  </p:clrMapOvr>
+</p:sld>
+</file>
+
+<file path=ppt/slides/slide16.xml><?xml version="1.0" encoding="utf-8"?>
+<p:sld xmlns:a="http://schemas.openxmlformats.org/drawingml/2006/main" xmlns:p="http://schemas.openxmlformats.org/presentationml/2006/main" xmlns:r="http://schemas.openxmlformats.org/officeDocument/2006/relationships">
+  <p:cSld>
+    <p:spTree>
+      <p:nvGrpSpPr>
+        <p:cNvPr id="1" name=""/>
+        <p:cNvGrpSpPr/>
+        <p:nvPr/>
+      </p:nvGrpSpPr>
+      <p:grpSpPr/>
+      <p:sp>
+        <p:nvSpPr>
+          <p:cNvPr id="2" name="Rectangle 1"/>
+          <p:cNvSpPr/>
+          <p:nvPr/>
+        </p:nvSpPr>
+        <p:spPr>
+          <a:xfrm>
+            <a:off x="0" y="0"/>
+            <a:ext cx="12191695" cy="6858000"/>
+          </a:xfrm>
+          <a:prstGeom prst="rect">
+            <a:avLst/>
+          </a:prstGeom>
+          <a:solidFill>
+            <a:srgbClr val="F4F6FA"/>
+          </a:solidFill>
+          <a:ln>
+            <a:noFill/>
+          </a:ln>
+          <a:effectLst/>
+        </p:spPr>
+        <p:style>
+          <a:lnRef idx="1">
+            <a:schemeClr val="accent1"/>
+          </a:lnRef>
+          <a:fillRef idx="3">
+            <a:schemeClr val="accent1"/>
+          </a:fillRef>
+          <a:effectRef idx="2">
+            <a:schemeClr val="accent1"/>
+          </a:effectRef>
+          <a:fontRef idx="minor">
+            <a:schemeClr val="lt1"/>
+          </a:fontRef>
+        </p:style>
+        <p:txBody>
+          <a:bodyPr rtlCol="0" anchor="ctr"/>
+          <a:lstStyle/>
+          <a:p>
+            <a:pPr algn="ctr"/>
+          </a:p>
+        </p:txBody>
+      </p:sp>
+      <p:sp>
+        <p:nvSpPr>
+          <p:cNvPr id="3" name="TextBox 2"/>
+          <p:cNvSpPr txBox="1"/>
+          <p:nvPr/>
+        </p:nvSpPr>
+        <p:spPr>
+          <a:xfrm>
+            <a:off x="548640" y="347472"/>
+            <a:ext cx="10972800" cy="274320"/>
+          </a:xfrm>
+          <a:prstGeom prst="rect">
+            <a:avLst/>
+          </a:prstGeom>
+          <a:noFill/>
+        </p:spPr>
+        <p:txBody>
+          <a:bodyPr wrap="square" lIns="0" rIns="0" tIns="0" bIns="0" anchor="t">
+            <a:spAutoFit/>
+          </a:bodyPr>
+          <a:lstStyle/>
+          <a:p>
+            <a:pPr algn="l">
+              <a:lnSpc>
+                <a:spcPct val="130000"/>
+              </a:lnSpc>
+            </a:pPr>
+            <a:r>
+              <a:rPr sz="1100" b="1" i="0">
+                <a:solidFill>
+                  <a:srgbClr val="2563EB"/>
+                </a:solidFill>
+                <a:latin typeface="Calibri"/>
+              </a:rPr>
+              <a:t>Q&amp;A 用   — 攻撃の流れに沿って整理</a:t>
+            </a:r>
+          </a:p>
+        </p:txBody>
+      </p:sp>
+      <p:sp>
+        <p:nvSpPr>
+          <p:cNvPr id="4" name="TextBox 3"/>
+          <p:cNvSpPr txBox="1"/>
+          <p:nvPr/>
+        </p:nvSpPr>
+        <p:spPr>
+          <a:xfrm>
+            <a:off x="548640" y="621792"/>
+            <a:ext cx="11155680" cy="640080"/>
+          </a:xfrm>
+          <a:prstGeom prst="rect">
+            <a:avLst/>
+          </a:prstGeom>
+          <a:noFill/>
+        </p:spPr>
+        <p:txBody>
+          <a:bodyPr wrap="square" lIns="0" rIns="0" tIns="0" bIns="0" anchor="t">
+            <a:spAutoFit/>
+          </a:bodyPr>
+          <a:lstStyle/>
+          <a:p>
+            <a:pPr algn="l">
+              <a:lnSpc>
+                <a:spcPct val="130000"/>
+              </a:lnSpc>
+            </a:pPr>
+            <a:r>
+              <a:rPr sz="2800" b="1" i="0">
+                <a:solidFill>
+                  <a:srgbClr val="1F2937"/>
+                </a:solidFill>
+                <a:latin typeface="Cambria"/>
+              </a:rPr>
+              <a:t>付録: 同梱している検知ルール 13 本</a:t>
+            </a:r>
+          </a:p>
+        </p:txBody>
+      </p:sp>
+      <p:sp>
+        <p:nvSpPr>
+          <p:cNvPr id="5" name="Oval 4"/>
+          <p:cNvSpPr/>
+          <p:nvPr/>
+        </p:nvSpPr>
+        <p:spPr>
+          <a:xfrm>
+            <a:off x="8275320" y="502920"/>
+            <a:ext cx="146304" cy="146304"/>
+          </a:xfrm>
+          <a:prstGeom prst="ellipse">
+            <a:avLst/>
+          </a:prstGeom>
+          <a:solidFill>
+            <a:srgbClr val="DC2626"/>
+          </a:solidFill>
+          <a:ln>
+            <a:noFill/>
+          </a:ln>
+          <a:effectLst/>
+        </p:spPr>
+        <p:style>
+          <a:lnRef idx="1">
+            <a:schemeClr val="accent1"/>
+          </a:lnRef>
+          <a:fillRef idx="3">
+            <a:schemeClr val="accent1"/>
+          </a:fillRef>
+          <a:effectRef idx="2">
+            <a:schemeClr val="accent1"/>
+          </a:effectRef>
+          <a:fontRef idx="minor">
+            <a:schemeClr val="lt1"/>
+          </a:fontRef>
+        </p:style>
+        <p:txBody>
+          <a:bodyPr rtlCol="0" anchor="ctr"/>
+          <a:lstStyle/>
+          <a:p>
+            <a:pPr algn="ctr"/>
+          </a:p>
+        </p:txBody>
+      </p:sp>
+      <p:sp>
+        <p:nvSpPr>
+          <p:cNvPr id="6" name="TextBox 5"/>
+          <p:cNvSpPr txBox="1"/>
+          <p:nvPr/>
+        </p:nvSpPr>
+        <p:spPr>
+          <a:xfrm>
+            <a:off x="8485632" y="457200"/>
+            <a:ext cx="1554480" cy="274320"/>
+          </a:xfrm>
+          <a:prstGeom prst="rect">
+            <a:avLst/>
+          </a:prstGeom>
+          <a:noFill/>
+        </p:spPr>
+        <p:txBody>
+          <a:bodyPr wrap="square" lIns="0" rIns="0" tIns="0" bIns="0" anchor="ctr">
+            <a:spAutoFit/>
+          </a:bodyPr>
+          <a:lstStyle/>
+          <a:p>
+            <a:pPr algn="l">
+              <a:lnSpc>
+                <a:spcPct val="130000"/>
+              </a:lnSpc>
+            </a:pPr>
+            <a:r>
+              <a:rPr sz="1000" b="0" i="0">
+                <a:solidFill>
+                  <a:srgbClr val="5B6472"/>
+                </a:solidFill>
+                <a:latin typeface="Calibri"/>
+              </a:rPr>
+              <a:t>critical (最重要)</a:t>
+            </a:r>
+          </a:p>
+        </p:txBody>
+      </p:sp>
+      <p:sp>
+        <p:nvSpPr>
+          <p:cNvPr id="7" name="Oval 6"/>
+          <p:cNvSpPr/>
+          <p:nvPr/>
+        </p:nvSpPr>
+        <p:spPr>
+          <a:xfrm>
+            <a:off x="10149840" y="502920"/>
+            <a:ext cx="146304" cy="146304"/>
+          </a:xfrm>
+          <a:prstGeom prst="ellipse">
+            <a:avLst/>
+          </a:prstGeom>
+          <a:solidFill>
+            <a:srgbClr val="EA580C"/>
+          </a:solidFill>
+          <a:ln>
+            <a:noFill/>
+          </a:ln>
+          <a:effectLst/>
+        </p:spPr>
+        <p:style>
+          <a:lnRef idx="1">
+            <a:schemeClr val="accent1"/>
+          </a:lnRef>
+          <a:fillRef idx="3">
+            <a:schemeClr val="accent1"/>
+          </a:fillRef>
+          <a:effectRef idx="2">
+            <a:schemeClr val="accent1"/>
+          </a:effectRef>
+          <a:fontRef idx="minor">
+            <a:schemeClr val="lt1"/>
+          </a:fontRef>
+        </p:style>
+        <p:txBody>
+          <a:bodyPr rtlCol="0" anchor="ctr"/>
+          <a:lstStyle/>
+          <a:p>
+            <a:pPr algn="ctr"/>
+          </a:p>
+        </p:txBody>
+      </p:sp>
+      <p:sp>
+        <p:nvSpPr>
+          <p:cNvPr id="8" name="TextBox 7"/>
+          <p:cNvSpPr txBox="1"/>
+          <p:nvPr/>
+        </p:nvSpPr>
+        <p:spPr>
+          <a:xfrm>
+            <a:off x="10360152" y="457200"/>
+            <a:ext cx="1280160" cy="274320"/>
+          </a:xfrm>
+          <a:prstGeom prst="rect">
+            <a:avLst/>
+          </a:prstGeom>
+          <a:noFill/>
+        </p:spPr>
+        <p:txBody>
+          <a:bodyPr wrap="square" lIns="0" rIns="0" tIns="0" bIns="0" anchor="ctr">
+            <a:spAutoFit/>
+          </a:bodyPr>
+          <a:lstStyle/>
+          <a:p>
+            <a:pPr algn="l">
+              <a:lnSpc>
+                <a:spcPct val="130000"/>
+              </a:lnSpc>
+            </a:pPr>
+            <a:r>
+              <a:rPr sz="1000" b="0" i="0">
+                <a:solidFill>
+                  <a:srgbClr val="5B6472"/>
+                </a:solidFill>
+                <a:latin typeface="Calibri"/>
+              </a:rPr>
+              <a:t>high (重要)</a:t>
+            </a:r>
+          </a:p>
+        </p:txBody>
+      </p:sp>
+      <p:sp>
+        <p:nvSpPr>
+          <p:cNvPr id="9" name="Rounded Rectangle 8"/>
+          <p:cNvSpPr/>
+          <p:nvPr/>
+        </p:nvSpPr>
+        <p:spPr>
+          <a:xfrm>
+            <a:off x="548640" y="1783080"/>
+            <a:ext cx="5349240" cy="2240280"/>
+          </a:xfrm>
+          <a:prstGeom prst="roundRect">
+            <a:avLst/>
+          </a:prstGeom>
+          <a:solidFill>
+            <a:srgbClr val="FFFFFF"/>
+          </a:solidFill>
+          <a:ln w="9525">
+            <a:solidFill>
+              <a:srgbClr val="DDE3EE"/>
+            </a:solidFill>
+          </a:ln>
+          <a:effectLst/>
+        </p:spPr>
+        <p:style>
+          <a:lnRef idx="1">
+            <a:schemeClr val="accent1"/>
+          </a:lnRef>
+          <a:fillRef idx="3">
+            <a:schemeClr val="accent1"/>
+          </a:fillRef>
+          <a:effectRef idx="2">
+            <a:schemeClr val="accent1"/>
+          </a:effectRef>
+          <a:fontRef idx="minor">
+            <a:schemeClr val="lt1"/>
+          </a:fontRef>
+        </p:style>
+        <p:txBody>
+          <a:bodyPr rtlCol="0" anchor="ctr"/>
+          <a:lstStyle/>
+          <a:p>
+            <a:pPr algn="ctr"/>
+          </a:p>
+        </p:txBody>
+      </p:sp>
+      <p:sp>
+        <p:nvSpPr>
+          <p:cNvPr id="10" name="Rectangle 9"/>
+          <p:cNvSpPr/>
+          <p:nvPr/>
+        </p:nvSpPr>
+        <p:spPr>
+          <a:xfrm>
+            <a:off x="548640" y="1783080"/>
+            <a:ext cx="73152" cy="2240280"/>
+          </a:xfrm>
+          <a:prstGeom prst="rect">
+            <a:avLst/>
+          </a:prstGeom>
+          <a:solidFill>
+            <a:srgbClr val="2563EB"/>
+          </a:solidFill>
+          <a:ln>
+            <a:noFill/>
+          </a:ln>
+          <a:effectLst/>
+        </p:spPr>
+        <p:style>
+          <a:lnRef idx="1">
+            <a:schemeClr val="accent1"/>
+          </a:lnRef>
+          <a:fillRef idx="3">
+            <a:schemeClr val="accent1"/>
+          </a:fillRef>
+          <a:effectRef idx="2">
+            <a:schemeClr val="accent1"/>
+          </a:effectRef>
+          <a:fontRef idx="minor">
+            <a:schemeClr val="lt1"/>
+          </a:fontRef>
+        </p:style>
+        <p:txBody>
+          <a:bodyPr rtlCol="0" anchor="ctr"/>
+          <a:lstStyle/>
+          <a:p>
+            <a:pPr algn="ctr"/>
+          </a:p>
+        </p:txBody>
+      </p:sp>
+      <p:sp>
+        <p:nvSpPr>
+          <p:cNvPr id="11" name="TextBox 10"/>
+          <p:cNvSpPr txBox="1"/>
+          <p:nvPr/>
+        </p:nvSpPr>
+        <p:spPr>
+          <a:xfrm>
+            <a:off x="804672" y="1929384"/>
+            <a:ext cx="4937759" cy="411480"/>
+          </a:xfrm>
+          <a:prstGeom prst="rect">
+            <a:avLst/>
+          </a:prstGeom>
+          <a:noFill/>
+        </p:spPr>
+        <p:txBody>
+          <a:bodyPr wrap="square" lIns="0" rIns="0" tIns="0" bIns="0" anchor="t">
+            <a:spAutoFit/>
+          </a:bodyPr>
+          <a:lstStyle/>
+          <a:p>
+            <a:pPr algn="l">
+              <a:lnSpc>
+                <a:spcPct val="130000"/>
+              </a:lnSpc>
+            </a:pPr>
+            <a:r>
+              <a:rPr sz="1400" b="1" i="0">
+                <a:solidFill>
+                  <a:srgbClr val="1D4ED8"/>
+                </a:solidFill>
+                <a:latin typeface="Cambria"/>
+              </a:rPr>
+              <a:t>① 外から入る・動く・つながる</a:t>
+            </a:r>
+          </a:p>
+        </p:txBody>
+      </p:sp>
+      <p:sp>
+        <p:nvSpPr>
+          <p:cNvPr id="12" name="Oval 11"/>
+          <p:cNvSpPr/>
+          <p:nvPr/>
+        </p:nvSpPr>
+        <p:spPr>
+          <a:xfrm>
+            <a:off x="822959" y="2505456"/>
+            <a:ext cx="109728" cy="109728"/>
+          </a:xfrm>
+          <a:prstGeom prst="ellipse">
+            <a:avLst/>
+          </a:prstGeom>
+          <a:solidFill>
+            <a:srgbClr val="DC2626"/>
+          </a:solidFill>
+          <a:ln>
+            <a:noFill/>
+          </a:ln>
+          <a:effectLst/>
+        </p:spPr>
+        <p:style>
+          <a:lnRef idx="1">
+            <a:schemeClr val="accent1"/>
+          </a:lnRef>
+          <a:fillRef idx="3">
+            <a:schemeClr val="accent1"/>
+          </a:fillRef>
+          <a:effectRef idx="2">
+            <a:schemeClr val="accent1"/>
+          </a:effectRef>
+          <a:fontRef idx="minor">
+            <a:schemeClr val="lt1"/>
+          </a:fontRef>
+        </p:style>
+        <p:txBody>
+          <a:bodyPr rtlCol="0" anchor="ctr"/>
+          <a:lstStyle/>
+          <a:p>
+            <a:pPr algn="ctr"/>
+          </a:p>
+        </p:txBody>
+      </p:sp>
+      <p:sp>
+        <p:nvSpPr>
+          <p:cNvPr id="13" name="TextBox 12"/>
+          <p:cNvSpPr txBox="1"/>
+          <p:nvPr/>
+        </p:nvSpPr>
+        <p:spPr>
+          <a:xfrm>
+            <a:off x="1042416" y="2441448"/>
+            <a:ext cx="4636007" cy="365760"/>
+          </a:xfrm>
+          <a:prstGeom prst="rect">
+            <a:avLst/>
+          </a:prstGeom>
+          <a:noFill/>
+        </p:spPr>
+        <p:txBody>
+          <a:bodyPr wrap="square" lIns="0" rIns="0" tIns="0" bIns="0" anchor="t">
+            <a:spAutoFit/>
+          </a:bodyPr>
+          <a:lstStyle/>
+          <a:p>
+            <a:pPr algn="l">
+              <a:lnSpc>
+                <a:spcPct val="110000"/>
+              </a:lnSpc>
+            </a:pPr>
+            <a:r>
+              <a:rPr sz="1050" b="0" i="0">
+                <a:solidFill>
+                  <a:srgbClr val="1F2937"/>
+                </a:solidFill>
+                <a:latin typeface="Calibri"/>
+              </a:rPr>
+              <a:t>既知のマルウェアそのものが実行された (MalwareBazaar 照合)</a:t>
+            </a:r>
+          </a:p>
+        </p:txBody>
+      </p:sp>
+      <p:sp>
+        <p:nvSpPr>
+          <p:cNvPr id="14" name="Oval 13"/>
+          <p:cNvSpPr/>
+          <p:nvPr/>
+        </p:nvSpPr>
+        <p:spPr>
+          <a:xfrm>
+            <a:off x="822959" y="2889503"/>
+            <a:ext cx="109728" cy="109728"/>
+          </a:xfrm>
+          <a:prstGeom prst="ellipse">
+            <a:avLst/>
+          </a:prstGeom>
+          <a:solidFill>
+            <a:srgbClr val="DC2626"/>
+          </a:solidFill>
+          <a:ln>
+            <a:noFill/>
+          </a:ln>
+          <a:effectLst/>
+        </p:spPr>
+        <p:style>
+          <a:lnRef idx="1">
+            <a:schemeClr val="accent1"/>
+          </a:lnRef>
+          <a:fillRef idx="3">
+            <a:schemeClr val="accent1"/>
+          </a:fillRef>
+          <a:effectRef idx="2">
+            <a:schemeClr val="accent1"/>
+          </a:effectRef>
+          <a:fontRef idx="minor">
+            <a:schemeClr val="lt1"/>
+          </a:fontRef>
+        </p:style>
+        <p:txBody>
+          <a:bodyPr rtlCol="0" anchor="ctr"/>
+          <a:lstStyle/>
+          <a:p>
+            <a:pPr algn="ctr"/>
+          </a:p>
+        </p:txBody>
+      </p:sp>
+      <p:sp>
+        <p:nvSpPr>
+          <p:cNvPr id="15" name="TextBox 14"/>
+          <p:cNvSpPr txBox="1"/>
+          <p:nvPr/>
+        </p:nvSpPr>
+        <p:spPr>
+          <a:xfrm>
+            <a:off x="1042416" y="2825496"/>
+            <a:ext cx="4636007" cy="365760"/>
+          </a:xfrm>
+          <a:prstGeom prst="rect">
+            <a:avLst/>
+          </a:prstGeom>
+          <a:noFill/>
+        </p:spPr>
+        <p:txBody>
+          <a:bodyPr wrap="square" lIns="0" rIns="0" tIns="0" bIns="0" anchor="t">
+            <a:spAutoFit/>
+          </a:bodyPr>
+          <a:lstStyle/>
+          <a:p>
+            <a:pPr algn="l">
+              <a:lnSpc>
+                <a:spcPct val="110000"/>
+              </a:lnSpc>
+            </a:pPr>
+            <a:r>
+              <a:rPr sz="1050" b="0" i="0">
+                <a:solidFill>
+                  <a:srgbClr val="1F2937"/>
+                </a:solidFill>
+                <a:latin typeface="Calibri"/>
+              </a:rPr>
+              <a:t>指令サーバ (C2) として知られる場所への通信 (URLhaus 照合)</a:t>
+            </a:r>
+          </a:p>
+        </p:txBody>
+      </p:sp>
+      <p:sp>
+        <p:nvSpPr>
+          <p:cNvPr id="16" name="Oval 15"/>
+          <p:cNvSpPr/>
+          <p:nvPr/>
+        </p:nvSpPr>
+        <p:spPr>
+          <a:xfrm>
+            <a:off x="822959" y="3273551"/>
+            <a:ext cx="109728" cy="109728"/>
+          </a:xfrm>
+          <a:prstGeom prst="ellipse">
+            <a:avLst/>
+          </a:prstGeom>
+          <a:solidFill>
+            <a:srgbClr val="DC2626"/>
+          </a:solidFill>
+          <a:ln>
+            <a:noFill/>
+          </a:ln>
+          <a:effectLst/>
+        </p:spPr>
+        <p:style>
+          <a:lnRef idx="1">
+            <a:schemeClr val="accent1"/>
+          </a:lnRef>
+          <a:fillRef idx="3">
+            <a:schemeClr val="accent1"/>
+          </a:fillRef>
+          <a:effectRef idx="2">
+            <a:schemeClr val="accent1"/>
+          </a:effectRef>
+          <a:fontRef idx="minor">
+            <a:schemeClr val="lt1"/>
+          </a:fontRef>
+        </p:style>
+        <p:txBody>
+          <a:bodyPr rtlCol="0" anchor="ctr"/>
+          <a:lstStyle/>
+          <a:p>
+            <a:pPr algn="ctr"/>
+          </a:p>
+        </p:txBody>
+      </p:sp>
+      <p:sp>
+        <p:nvSpPr>
+          <p:cNvPr id="17" name="TextBox 16"/>
+          <p:cNvSpPr txBox="1"/>
+          <p:nvPr/>
+        </p:nvSpPr>
+        <p:spPr>
+          <a:xfrm>
+            <a:off x="1042416" y="3209544"/>
+            <a:ext cx="4636007" cy="365760"/>
+          </a:xfrm>
+          <a:prstGeom prst="rect">
+            <a:avLst/>
+          </a:prstGeom>
+          <a:noFill/>
+        </p:spPr>
+        <p:txBody>
+          <a:bodyPr wrap="square" lIns="0" rIns="0" tIns="0" bIns="0" anchor="t">
+            <a:spAutoFit/>
+          </a:bodyPr>
+          <a:lstStyle/>
+          <a:p>
+            <a:pPr algn="l">
+              <a:lnSpc>
+                <a:spcPct val="110000"/>
+              </a:lnSpc>
+            </a:pPr>
+            <a:r>
+              <a:rPr sz="1050" b="0" i="0">
+                <a:solidFill>
+                  <a:srgbClr val="1F2937"/>
+                </a:solidFill>
+                <a:latin typeface="Calibri"/>
+              </a:rPr>
+              <a:t>正規ツール certutil を悪用して外部からファイルを取得</a:t>
+            </a:r>
+          </a:p>
+        </p:txBody>
+      </p:sp>
+      <p:sp>
+        <p:nvSpPr>
+          <p:cNvPr id="18" name="Oval 17"/>
+          <p:cNvSpPr/>
+          <p:nvPr/>
+        </p:nvSpPr>
+        <p:spPr>
+          <a:xfrm>
+            <a:off x="822959" y="3657599"/>
+            <a:ext cx="109728" cy="109728"/>
+          </a:xfrm>
+          <a:prstGeom prst="ellipse">
+            <a:avLst/>
+          </a:prstGeom>
+          <a:solidFill>
+            <a:srgbClr val="DC2626"/>
+          </a:solidFill>
+          <a:ln>
+            <a:noFill/>
+          </a:ln>
+          <a:effectLst/>
+        </p:spPr>
+        <p:style>
+          <a:lnRef idx="1">
+            <a:schemeClr val="accent1"/>
+          </a:lnRef>
+          <a:fillRef idx="3">
+            <a:schemeClr val="accent1"/>
+          </a:fillRef>
+          <a:effectRef idx="2">
+            <a:schemeClr val="accent1"/>
+          </a:effectRef>
+          <a:fontRef idx="minor">
+            <a:schemeClr val="lt1"/>
+          </a:fontRef>
+        </p:style>
+        <p:txBody>
+          <a:bodyPr rtlCol="0" anchor="ctr"/>
+          <a:lstStyle/>
+          <a:p>
+            <a:pPr algn="ctr"/>
+          </a:p>
+        </p:txBody>
+      </p:sp>
+      <p:sp>
+        <p:nvSpPr>
+          <p:cNvPr id="19" name="TextBox 18"/>
+          <p:cNvSpPr txBox="1"/>
+          <p:nvPr/>
+        </p:nvSpPr>
+        <p:spPr>
+          <a:xfrm>
+            <a:off x="1042416" y="3593591"/>
+            <a:ext cx="4636007" cy="365760"/>
+          </a:xfrm>
+          <a:prstGeom prst="rect">
+            <a:avLst/>
+          </a:prstGeom>
+          <a:noFill/>
+        </p:spPr>
+        <p:txBody>
+          <a:bodyPr wrap="square" lIns="0" rIns="0" tIns="0" bIns="0" anchor="t">
+            <a:spAutoFit/>
+          </a:bodyPr>
+          <a:lstStyle/>
+          <a:p>
+            <a:pPr algn="l">
+              <a:lnSpc>
+                <a:spcPct val="110000"/>
+              </a:lnSpc>
+            </a:pPr>
+            <a:r>
+              <a:rPr sz="1050" b="0" i="0">
+                <a:solidFill>
+                  <a:srgbClr val="1F2937"/>
+                </a:solidFill>
+                <a:latin typeface="Calibri"/>
+              </a:rPr>
+              <a:t>悪用が知られた脆弱ドライバの読み込み (LOLDrivers 照合)</a:t>
+            </a:r>
+          </a:p>
+        </p:txBody>
+      </p:sp>
+      <p:sp>
+        <p:nvSpPr>
+          <p:cNvPr id="20" name="Rounded Rectangle 19"/>
+          <p:cNvSpPr/>
+          <p:nvPr/>
+        </p:nvSpPr>
+        <p:spPr>
+          <a:xfrm>
+            <a:off x="6291072" y="1783080"/>
+            <a:ext cx="5349240" cy="2240280"/>
+          </a:xfrm>
+          <a:prstGeom prst="roundRect">
+            <a:avLst/>
+          </a:prstGeom>
+          <a:solidFill>
+            <a:srgbClr val="FFFFFF"/>
+          </a:solidFill>
+          <a:ln w="9525">
+            <a:solidFill>
+              <a:srgbClr val="DDE3EE"/>
+            </a:solidFill>
+          </a:ln>
+          <a:effectLst/>
+        </p:spPr>
+        <p:style>
+          <a:lnRef idx="1">
+            <a:schemeClr val="accent1"/>
+          </a:lnRef>
+          <a:fillRef idx="3">
+            <a:schemeClr val="accent1"/>
+          </a:fillRef>
+          <a:effectRef idx="2">
+            <a:schemeClr val="accent1"/>
+          </a:effectRef>
+          <a:fontRef idx="minor">
+            <a:schemeClr val="lt1"/>
+          </a:fontRef>
+        </p:style>
+        <p:txBody>
+          <a:bodyPr rtlCol="0" anchor="ctr"/>
+          <a:lstStyle/>
+          <a:p>
+            <a:pPr algn="ctr"/>
+          </a:p>
+        </p:txBody>
+      </p:sp>
+      <p:sp>
+        <p:nvSpPr>
+          <p:cNvPr id="21" name="Rectangle 20"/>
+          <p:cNvSpPr/>
+          <p:nvPr/>
+        </p:nvSpPr>
+        <p:spPr>
+          <a:xfrm>
+            <a:off x="6291072" y="1783080"/>
+            <a:ext cx="73152" cy="2240280"/>
+          </a:xfrm>
+          <a:prstGeom prst="rect">
+            <a:avLst/>
+          </a:prstGeom>
+          <a:solidFill>
+            <a:srgbClr val="2563EB"/>
+          </a:solidFill>
+          <a:ln>
+            <a:noFill/>
+          </a:ln>
+          <a:effectLst/>
+        </p:spPr>
+        <p:style>
+          <a:lnRef idx="1">
+            <a:schemeClr val="accent1"/>
+          </a:lnRef>
+          <a:fillRef idx="3">
+            <a:schemeClr val="accent1"/>
+          </a:fillRef>
+          <a:effectRef idx="2">
+            <a:schemeClr val="accent1"/>
+          </a:effectRef>
+          <a:fontRef idx="minor">
+            <a:schemeClr val="lt1"/>
+          </a:fontRef>
+        </p:style>
+        <p:txBody>
+          <a:bodyPr rtlCol="0" anchor="ctr"/>
+          <a:lstStyle/>
+          <a:p>
+            <a:pPr algn="ctr"/>
+          </a:p>
+        </p:txBody>
+      </p:sp>
+      <p:sp>
+        <p:nvSpPr>
+          <p:cNvPr id="22" name="TextBox 21"/>
+          <p:cNvSpPr txBox="1"/>
+          <p:nvPr/>
+        </p:nvSpPr>
+        <p:spPr>
+          <a:xfrm>
+            <a:off x="6547104" y="1929384"/>
+            <a:ext cx="4937759" cy="411480"/>
+          </a:xfrm>
+          <a:prstGeom prst="rect">
+            <a:avLst/>
+          </a:prstGeom>
+          <a:noFill/>
+        </p:spPr>
+        <p:txBody>
+          <a:bodyPr wrap="square" lIns="0" rIns="0" tIns="0" bIns="0" anchor="t">
+            <a:spAutoFit/>
+          </a:bodyPr>
+          <a:lstStyle/>
+          <a:p>
+            <a:pPr algn="l">
+              <a:lnSpc>
+                <a:spcPct val="130000"/>
+              </a:lnSpc>
+            </a:pPr>
+            <a:r>
+              <a:rPr sz="1400" b="1" i="0">
+                <a:solidFill>
+                  <a:srgbClr val="1D4ED8"/>
+                </a:solidFill>
+                <a:latin typeface="Cambria"/>
+              </a:rPr>
+              <a:t>② 盗む・住み着く</a:t>
+            </a:r>
+          </a:p>
+        </p:txBody>
+      </p:sp>
+      <p:sp>
+        <p:nvSpPr>
+          <p:cNvPr id="23" name="Oval 22"/>
+          <p:cNvSpPr/>
+          <p:nvPr/>
+        </p:nvSpPr>
+        <p:spPr>
+          <a:xfrm>
+            <a:off x="6565392" y="2505456"/>
+            <a:ext cx="109728" cy="109728"/>
+          </a:xfrm>
+          <a:prstGeom prst="ellipse">
+            <a:avLst/>
+          </a:prstGeom>
+          <a:solidFill>
+            <a:srgbClr val="DC2626"/>
+          </a:solidFill>
+          <a:ln>
+            <a:noFill/>
+          </a:ln>
+          <a:effectLst/>
+        </p:spPr>
+        <p:style>
+          <a:lnRef idx="1">
+            <a:schemeClr val="accent1"/>
+          </a:lnRef>
+          <a:fillRef idx="3">
+            <a:schemeClr val="accent1"/>
+          </a:fillRef>
+          <a:effectRef idx="2">
+            <a:schemeClr val="accent1"/>
+          </a:effectRef>
+          <a:fontRef idx="minor">
+            <a:schemeClr val="lt1"/>
+          </a:fontRef>
+        </p:style>
+        <p:txBody>
+          <a:bodyPr rtlCol="0" anchor="ctr"/>
+          <a:lstStyle/>
+          <a:p>
+            <a:pPr algn="ctr"/>
+          </a:p>
+        </p:txBody>
+      </p:sp>
+      <p:sp>
+        <p:nvSpPr>
+          <p:cNvPr id="24" name="TextBox 23"/>
+          <p:cNvSpPr txBox="1"/>
+          <p:nvPr/>
+        </p:nvSpPr>
+        <p:spPr>
+          <a:xfrm>
+            <a:off x="6784848" y="2441448"/>
+            <a:ext cx="4636007" cy="365760"/>
+          </a:xfrm>
+          <a:prstGeom prst="rect">
+            <a:avLst/>
+          </a:prstGeom>
+          <a:noFill/>
+        </p:spPr>
+        <p:txBody>
+          <a:bodyPr wrap="square" lIns="0" rIns="0" tIns="0" bIns="0" anchor="t">
+            <a:spAutoFit/>
+          </a:bodyPr>
+          <a:lstStyle/>
+          <a:p>
+            <a:pPr algn="l">
+              <a:lnSpc>
+                <a:spcPct val="110000"/>
+              </a:lnSpc>
+            </a:pPr>
+            <a:r>
+              <a:rPr sz="1050" b="0" i="0">
+                <a:solidFill>
+                  <a:srgbClr val="1F2937"/>
+                </a:solidFill>
+                <a:latin typeface="Calibri"/>
+              </a:rPr>
+              <a:t>ログイン情報の抜き取り (LSASS のメモリダンプ)</a:t>
+            </a:r>
+          </a:p>
+        </p:txBody>
+      </p:sp>
+      <p:sp>
+        <p:nvSpPr>
+          <p:cNvPr id="25" name="Oval 24"/>
+          <p:cNvSpPr/>
+          <p:nvPr/>
+        </p:nvSpPr>
+        <p:spPr>
+          <a:xfrm>
+            <a:off x="6565392" y="2889503"/>
+            <a:ext cx="109728" cy="109728"/>
+          </a:xfrm>
+          <a:prstGeom prst="ellipse">
+            <a:avLst/>
+          </a:prstGeom>
+          <a:solidFill>
+            <a:srgbClr val="EA580C"/>
+          </a:solidFill>
+          <a:ln>
+            <a:noFill/>
+          </a:ln>
+          <a:effectLst/>
+        </p:spPr>
+        <p:style>
+          <a:lnRef idx="1">
+            <a:schemeClr val="accent1"/>
+          </a:lnRef>
+          <a:fillRef idx="3">
+            <a:schemeClr val="accent1"/>
+          </a:fillRef>
+          <a:effectRef idx="2">
+            <a:schemeClr val="accent1"/>
+          </a:effectRef>
+          <a:fontRef idx="minor">
+            <a:schemeClr val="lt1"/>
+          </a:fontRef>
+        </p:style>
+        <p:txBody>
+          <a:bodyPr rtlCol="0" anchor="ctr"/>
+          <a:lstStyle/>
+          <a:p>
+            <a:pPr algn="ctr"/>
+          </a:p>
+        </p:txBody>
+      </p:sp>
+      <p:sp>
+        <p:nvSpPr>
+          <p:cNvPr id="26" name="TextBox 25"/>
+          <p:cNvSpPr txBox="1"/>
+          <p:nvPr/>
+        </p:nvSpPr>
+        <p:spPr>
+          <a:xfrm>
+            <a:off x="6784848" y="2825496"/>
+            <a:ext cx="4636007" cy="365760"/>
+          </a:xfrm>
+          <a:prstGeom prst="rect">
+            <a:avLst/>
+          </a:prstGeom>
+          <a:noFill/>
+        </p:spPr>
+        <p:txBody>
+          <a:bodyPr wrap="square" lIns="0" rIns="0" tIns="0" bIns="0" anchor="t">
+            <a:spAutoFit/>
+          </a:bodyPr>
+          <a:lstStyle/>
+          <a:p>
+            <a:pPr algn="l">
+              <a:lnSpc>
+                <a:spcPct val="110000"/>
+              </a:lnSpc>
+            </a:pPr>
+            <a:r>
+              <a:rPr sz="1050" b="0" i="0">
+                <a:solidFill>
+                  <a:srgbClr val="1F2937"/>
+                </a:solidFill>
+                <a:latin typeface="Calibri"/>
+              </a:rPr>
+              <a:t>書き換え可能な場所のプログラムをサービス登録して常駐</a:t>
+            </a:r>
+          </a:p>
+        </p:txBody>
+      </p:sp>
+      <p:sp>
+        <p:nvSpPr>
+          <p:cNvPr id="27" name="Oval 26"/>
+          <p:cNvSpPr/>
+          <p:nvPr/>
+        </p:nvSpPr>
+        <p:spPr>
+          <a:xfrm>
+            <a:off x="6565392" y="3273551"/>
+            <a:ext cx="109728" cy="109728"/>
+          </a:xfrm>
+          <a:prstGeom prst="ellipse">
+            <a:avLst/>
+          </a:prstGeom>
+          <a:solidFill>
+            <a:srgbClr val="EA580C"/>
+          </a:solidFill>
+          <a:ln>
+            <a:noFill/>
+          </a:ln>
+          <a:effectLst/>
+        </p:spPr>
+        <p:style>
+          <a:lnRef idx="1">
+            <a:schemeClr val="accent1"/>
+          </a:lnRef>
+          <a:fillRef idx="3">
+            <a:schemeClr val="accent1"/>
+          </a:fillRef>
+          <a:effectRef idx="2">
+            <a:schemeClr val="accent1"/>
+          </a:effectRef>
+          <a:fontRef idx="minor">
+            <a:schemeClr val="lt1"/>
+          </a:fontRef>
+        </p:style>
+        <p:txBody>
+          <a:bodyPr rtlCol="0" anchor="ctr"/>
+          <a:lstStyle/>
+          <a:p>
+            <a:pPr algn="ctr"/>
+          </a:p>
+        </p:txBody>
+      </p:sp>
+      <p:sp>
+        <p:nvSpPr>
+          <p:cNvPr id="28" name="TextBox 27"/>
+          <p:cNvSpPr txBox="1"/>
+          <p:nvPr/>
+        </p:nvSpPr>
+        <p:spPr>
+          <a:xfrm>
+            <a:off x="6784848" y="3209544"/>
+            <a:ext cx="4636007" cy="365760"/>
+          </a:xfrm>
+          <a:prstGeom prst="rect">
+            <a:avLst/>
+          </a:prstGeom>
+          <a:noFill/>
+        </p:spPr>
+        <p:txBody>
+          <a:bodyPr wrap="square" lIns="0" rIns="0" tIns="0" bIns="0" anchor="t">
+            <a:spAutoFit/>
+          </a:bodyPr>
+          <a:lstStyle/>
+          <a:p>
+            <a:pPr algn="l">
+              <a:lnSpc>
+                <a:spcPct val="110000"/>
+              </a:lnSpc>
+            </a:pPr>
+            <a:r>
+              <a:rPr sz="1050" b="0" i="0">
+                <a:solidFill>
+                  <a:srgbClr val="1F2937"/>
+                </a:solidFill>
+                <a:latin typeface="Calibri"/>
+              </a:rPr>
+              <a:t>WMI で「出来事をきっかけに自動起動」を仕込む</a:t>
+            </a:r>
+          </a:p>
+        </p:txBody>
+      </p:sp>
+      <p:sp>
+        <p:nvSpPr>
+          <p:cNvPr id="29" name="Rounded Rectangle 28"/>
+          <p:cNvSpPr/>
+          <p:nvPr/>
+        </p:nvSpPr>
+        <p:spPr>
+          <a:xfrm>
+            <a:off x="548640" y="4114800"/>
+            <a:ext cx="5349240" cy="2240280"/>
+          </a:xfrm>
+          <a:prstGeom prst="roundRect">
+            <a:avLst/>
+          </a:prstGeom>
+          <a:solidFill>
+            <a:srgbClr val="FFFFFF"/>
+          </a:solidFill>
+          <a:ln w="9525">
+            <a:solidFill>
+              <a:srgbClr val="DDE3EE"/>
+            </a:solidFill>
+          </a:ln>
+          <a:effectLst/>
+        </p:spPr>
+        <p:style>
+          <a:lnRef idx="1">
+            <a:schemeClr val="accent1"/>
+          </a:lnRef>
+          <a:fillRef idx="3">
+            <a:schemeClr val="accent1"/>
+          </a:fillRef>
+          <a:effectRef idx="2">
+            <a:schemeClr val="accent1"/>
+          </a:effectRef>
+          <a:fontRef idx="minor">
+            <a:schemeClr val="lt1"/>
+          </a:fontRef>
+        </p:style>
+        <p:txBody>
+          <a:bodyPr rtlCol="0" anchor="ctr"/>
+          <a:lstStyle/>
+          <a:p>
+            <a:pPr algn="ctr"/>
+          </a:p>
+        </p:txBody>
+      </p:sp>
+      <p:sp>
+        <p:nvSpPr>
+          <p:cNvPr id="30" name="Rectangle 29"/>
+          <p:cNvSpPr/>
+          <p:nvPr/>
+        </p:nvSpPr>
+        <p:spPr>
+          <a:xfrm>
+            <a:off x="548640" y="4114800"/>
+            <a:ext cx="73152" cy="2240280"/>
+          </a:xfrm>
+          <a:prstGeom prst="rect">
+            <a:avLst/>
+          </a:prstGeom>
+          <a:solidFill>
+            <a:srgbClr val="2563EB"/>
+          </a:solidFill>
+          <a:ln>
+            <a:noFill/>
+          </a:ln>
+          <a:effectLst/>
+        </p:spPr>
+        <p:style>
+          <a:lnRef idx="1">
+            <a:schemeClr val="accent1"/>
+          </a:lnRef>
+          <a:fillRef idx="3">
+            <a:schemeClr val="accent1"/>
+          </a:fillRef>
+          <a:effectRef idx="2">
+            <a:schemeClr val="accent1"/>
+          </a:effectRef>
+          <a:fontRef idx="minor">
+            <a:schemeClr val="lt1"/>
+          </a:fontRef>
+        </p:style>
+        <p:txBody>
+          <a:bodyPr rtlCol="0" anchor="ctr"/>
+          <a:lstStyle/>
+          <a:p>
+            <a:pPr algn="ctr"/>
+          </a:p>
+        </p:txBody>
+      </p:sp>
+      <p:sp>
+        <p:nvSpPr>
+          <p:cNvPr id="31" name="TextBox 30"/>
+          <p:cNvSpPr txBox="1"/>
+          <p:nvPr/>
+        </p:nvSpPr>
+        <p:spPr>
+          <a:xfrm>
+            <a:off x="804672" y="4261104"/>
+            <a:ext cx="4937759" cy="411480"/>
+          </a:xfrm>
+          <a:prstGeom prst="rect">
+            <a:avLst/>
+          </a:prstGeom>
+          <a:noFill/>
+        </p:spPr>
+        <p:txBody>
+          <a:bodyPr wrap="square" lIns="0" rIns="0" tIns="0" bIns="0" anchor="t">
+            <a:spAutoFit/>
+          </a:bodyPr>
+          <a:lstStyle/>
+          <a:p>
+            <a:pPr algn="l">
+              <a:lnSpc>
+                <a:spcPct val="130000"/>
+              </a:lnSpc>
+            </a:pPr>
+            <a:r>
+              <a:rPr sz="1400" b="1" i="0">
+                <a:solidFill>
+                  <a:srgbClr val="1D4ED8"/>
+                </a:solidFill>
+                <a:latin typeface="Cambria"/>
+              </a:rPr>
+              <a:t>③ 監視を無力化する</a:t>
+            </a:r>
+          </a:p>
+        </p:txBody>
+      </p:sp>
+      <p:sp>
+        <p:nvSpPr>
+          <p:cNvPr id="32" name="Oval 31"/>
+          <p:cNvSpPr/>
+          <p:nvPr/>
+        </p:nvSpPr>
+        <p:spPr>
+          <a:xfrm>
+            <a:off x="822959" y="4837176"/>
+            <a:ext cx="109728" cy="109728"/>
+          </a:xfrm>
+          <a:prstGeom prst="ellipse">
+            <a:avLst/>
+          </a:prstGeom>
+          <a:solidFill>
+            <a:srgbClr val="EA580C"/>
+          </a:solidFill>
+          <a:ln>
+            <a:noFill/>
+          </a:ln>
+          <a:effectLst/>
+        </p:spPr>
+        <p:style>
+          <a:lnRef idx="1">
+            <a:schemeClr val="accent1"/>
+          </a:lnRef>
+          <a:fillRef idx="3">
+            <a:schemeClr val="accent1"/>
+          </a:fillRef>
+          <a:effectRef idx="2">
+            <a:schemeClr val="accent1"/>
+          </a:effectRef>
+          <a:fontRef idx="minor">
+            <a:schemeClr val="lt1"/>
+          </a:fontRef>
+        </p:style>
+        <p:txBody>
+          <a:bodyPr rtlCol="0" anchor="ctr"/>
+          <a:lstStyle/>
+          <a:p>
+            <a:pPr algn="ctr"/>
+          </a:p>
+        </p:txBody>
+      </p:sp>
+      <p:sp>
+        <p:nvSpPr>
+          <p:cNvPr id="33" name="TextBox 32"/>
+          <p:cNvSpPr txBox="1"/>
+          <p:nvPr/>
+        </p:nvSpPr>
+        <p:spPr>
+          <a:xfrm>
+            <a:off x="1042416" y="4773168"/>
+            <a:ext cx="4636007" cy="365760"/>
+          </a:xfrm>
+          <a:prstGeom prst="rect">
+            <a:avLst/>
+          </a:prstGeom>
+          <a:noFill/>
+        </p:spPr>
+        <p:txBody>
+          <a:bodyPr wrap="square" lIns="0" rIns="0" tIns="0" bIns="0" anchor="t">
+            <a:spAutoFit/>
+          </a:bodyPr>
+          <a:lstStyle/>
+          <a:p>
+            <a:pPr algn="l">
+              <a:lnSpc>
+                <a:spcPct val="110000"/>
+              </a:lnSpc>
+            </a:pPr>
+            <a:r>
+              <a:rPr sz="1050" b="0" i="0">
+                <a:solidFill>
+                  <a:srgbClr val="1F2937"/>
+                </a:solidFill>
+                <a:latin typeface="Calibri"/>
+              </a:rPr>
+              <a:t>PowerShell のウイルス検査 (AMSI) を無力化</a:t>
+            </a:r>
+          </a:p>
+        </p:txBody>
+      </p:sp>
+      <p:sp>
+        <p:nvSpPr>
+          <p:cNvPr id="34" name="Oval 33"/>
+          <p:cNvSpPr/>
+          <p:nvPr/>
+        </p:nvSpPr>
+        <p:spPr>
+          <a:xfrm>
+            <a:off x="822959" y="5221224"/>
+            <a:ext cx="109728" cy="109728"/>
+          </a:xfrm>
+          <a:prstGeom prst="ellipse">
+            <a:avLst/>
+          </a:prstGeom>
+          <a:solidFill>
+            <a:srgbClr val="DC2626"/>
+          </a:solidFill>
+          <a:ln>
+            <a:noFill/>
+          </a:ln>
+          <a:effectLst/>
+        </p:spPr>
+        <p:style>
+          <a:lnRef idx="1">
+            <a:schemeClr val="accent1"/>
+          </a:lnRef>
+          <a:fillRef idx="3">
+            <a:schemeClr val="accent1"/>
+          </a:fillRef>
+          <a:effectRef idx="2">
+            <a:schemeClr val="accent1"/>
+          </a:effectRef>
+          <a:fontRef idx="minor">
+            <a:schemeClr val="lt1"/>
+          </a:fontRef>
+        </p:style>
+        <p:txBody>
+          <a:bodyPr rtlCol="0" anchor="ctr"/>
+          <a:lstStyle/>
+          <a:p>
+            <a:pPr algn="ctr"/>
+          </a:p>
+        </p:txBody>
+      </p:sp>
+      <p:sp>
+        <p:nvSpPr>
+          <p:cNvPr id="35" name="TextBox 34"/>
+          <p:cNvSpPr txBox="1"/>
+          <p:nvPr/>
+        </p:nvSpPr>
+        <p:spPr>
+          <a:xfrm>
+            <a:off x="1042416" y="5157216"/>
+            <a:ext cx="4636007" cy="365760"/>
+          </a:xfrm>
+          <a:prstGeom prst="rect">
+            <a:avLst/>
+          </a:prstGeom>
+          <a:noFill/>
+        </p:spPr>
+        <p:txBody>
+          <a:bodyPr wrap="square" lIns="0" rIns="0" tIns="0" bIns="0" anchor="t">
+            <a:spAutoFit/>
+          </a:bodyPr>
+          <a:lstStyle/>
+          <a:p>
+            <a:pPr algn="l">
+              <a:lnSpc>
+                <a:spcPct val="110000"/>
+              </a:lnSpc>
+            </a:pPr>
+            <a:r>
+              <a:rPr sz="1050" b="0" i="0">
+                <a:solidFill>
+                  <a:srgbClr val="1F2937"/>
+                </a:solidFill>
+                <a:latin typeface="Calibri"/>
+              </a:rPr>
+              <a:t>ログ記録サービスそのものを停止・無効化</a:t>
+            </a:r>
+          </a:p>
+        </p:txBody>
+      </p:sp>
+      <p:sp>
+        <p:nvSpPr>
+          <p:cNvPr id="36" name="Oval 35"/>
+          <p:cNvSpPr/>
+          <p:nvPr/>
+        </p:nvSpPr>
+        <p:spPr>
+          <a:xfrm>
+            <a:off x="822959" y="5605272"/>
+            <a:ext cx="109728" cy="109728"/>
+          </a:xfrm>
+          <a:prstGeom prst="ellipse">
+            <a:avLst/>
+          </a:prstGeom>
+          <a:solidFill>
+            <a:srgbClr val="EA580C"/>
+          </a:solidFill>
+          <a:ln>
+            <a:noFill/>
+          </a:ln>
+          <a:effectLst/>
+        </p:spPr>
+        <p:style>
+          <a:lnRef idx="1">
+            <a:schemeClr val="accent1"/>
+          </a:lnRef>
+          <a:fillRef idx="3">
+            <a:schemeClr val="accent1"/>
+          </a:fillRef>
+          <a:effectRef idx="2">
+            <a:schemeClr val="accent1"/>
+          </a:effectRef>
+          <a:fontRef idx="minor">
+            <a:schemeClr val="lt1"/>
+          </a:fontRef>
+        </p:style>
+        <p:txBody>
+          <a:bodyPr rtlCol="0" anchor="ctr"/>
+          <a:lstStyle/>
+          <a:p>
+            <a:pPr algn="ctr"/>
+          </a:p>
+        </p:txBody>
+      </p:sp>
+      <p:sp>
+        <p:nvSpPr>
+          <p:cNvPr id="37" name="TextBox 36"/>
+          <p:cNvSpPr txBox="1"/>
+          <p:nvPr/>
+        </p:nvSpPr>
+        <p:spPr>
+          <a:xfrm>
+            <a:off x="1042416" y="5541264"/>
+            <a:ext cx="4636007" cy="365760"/>
+          </a:xfrm>
+          <a:prstGeom prst="rect">
+            <a:avLst/>
+          </a:prstGeom>
+          <a:noFill/>
+        </p:spPr>
+        <p:txBody>
+          <a:bodyPr wrap="square" lIns="0" rIns="0" tIns="0" bIns="0" anchor="t">
+            <a:spAutoFit/>
+          </a:bodyPr>
+          <a:lstStyle/>
+          <a:p>
+            <a:pPr algn="l">
+              <a:lnSpc>
+                <a:spcPct val="110000"/>
+              </a:lnSpc>
+            </a:pPr>
+            <a:r>
+              <a:rPr sz="1050" b="0" i="0">
+                <a:solidFill>
+                  <a:srgbClr val="1F2937"/>
+                </a:solidFill>
+                <a:latin typeface="Calibri"/>
+              </a:rPr>
+              <a:t>監査設定から記録項目を外して “見えなく” する</a:t>
+            </a:r>
+          </a:p>
+        </p:txBody>
+      </p:sp>
+      <p:sp>
+        <p:nvSpPr>
+          <p:cNvPr id="38" name="Rounded Rectangle 37"/>
+          <p:cNvSpPr/>
+          <p:nvPr/>
+        </p:nvSpPr>
+        <p:spPr>
+          <a:xfrm>
+            <a:off x="6291072" y="4114800"/>
+            <a:ext cx="5349240" cy="2240280"/>
+          </a:xfrm>
+          <a:prstGeom prst="roundRect">
+            <a:avLst/>
+          </a:prstGeom>
+          <a:solidFill>
+            <a:srgbClr val="FFFFFF"/>
+          </a:solidFill>
+          <a:ln w="9525">
+            <a:solidFill>
+              <a:srgbClr val="DDE3EE"/>
+            </a:solidFill>
+          </a:ln>
+          <a:effectLst/>
+        </p:spPr>
+        <p:style>
+          <a:lnRef idx="1">
+            <a:schemeClr val="accent1"/>
+          </a:lnRef>
+          <a:fillRef idx="3">
+            <a:schemeClr val="accent1"/>
+          </a:fillRef>
+          <a:effectRef idx="2">
+            <a:schemeClr val="accent1"/>
+          </a:effectRef>
+          <a:fontRef idx="minor">
+            <a:schemeClr val="lt1"/>
+          </a:fontRef>
+        </p:style>
+        <p:txBody>
+          <a:bodyPr rtlCol="0" anchor="ctr"/>
+          <a:lstStyle/>
+          <a:p>
+            <a:pPr algn="ctr"/>
+          </a:p>
+        </p:txBody>
+      </p:sp>
+      <p:sp>
+        <p:nvSpPr>
+          <p:cNvPr id="39" name="Rectangle 38"/>
+          <p:cNvSpPr/>
+          <p:nvPr/>
+        </p:nvSpPr>
+        <p:spPr>
+          <a:xfrm>
+            <a:off x="6291072" y="4114800"/>
+            <a:ext cx="73152" cy="2240280"/>
+          </a:xfrm>
+          <a:prstGeom prst="rect">
+            <a:avLst/>
+          </a:prstGeom>
+          <a:solidFill>
+            <a:srgbClr val="2563EB"/>
+          </a:solidFill>
+          <a:ln>
+            <a:noFill/>
+          </a:ln>
+          <a:effectLst/>
+        </p:spPr>
+        <p:style>
+          <a:lnRef idx="1">
+            <a:schemeClr val="accent1"/>
+          </a:lnRef>
+          <a:fillRef idx="3">
+            <a:schemeClr val="accent1"/>
+          </a:fillRef>
+          <a:effectRef idx="2">
+            <a:schemeClr val="accent1"/>
+          </a:effectRef>
+          <a:fontRef idx="minor">
+            <a:schemeClr val="lt1"/>
+          </a:fontRef>
+        </p:style>
+        <p:txBody>
+          <a:bodyPr rtlCol="0" anchor="ctr"/>
+          <a:lstStyle/>
+          <a:p>
+            <a:pPr algn="ctr"/>
+          </a:p>
+        </p:txBody>
+      </p:sp>
+      <p:sp>
+        <p:nvSpPr>
+          <p:cNvPr id="40" name="TextBox 39"/>
+          <p:cNvSpPr txBox="1"/>
+          <p:nvPr/>
+        </p:nvSpPr>
+        <p:spPr>
+          <a:xfrm>
+            <a:off x="6547104" y="4261104"/>
+            <a:ext cx="4937759" cy="411480"/>
+          </a:xfrm>
+          <a:prstGeom prst="rect">
+            <a:avLst/>
+          </a:prstGeom>
+          <a:noFill/>
+        </p:spPr>
+        <p:txBody>
+          <a:bodyPr wrap="square" lIns="0" rIns="0" tIns="0" bIns="0" anchor="t">
+            <a:spAutoFit/>
+          </a:bodyPr>
+          <a:lstStyle/>
+          <a:p>
+            <a:pPr algn="l">
+              <a:lnSpc>
+                <a:spcPct val="130000"/>
+              </a:lnSpc>
+            </a:pPr>
+            <a:r>
+              <a:rPr sz="1400" b="1" i="0">
+                <a:solidFill>
+                  <a:srgbClr val="1D4ED8"/>
+                </a:solidFill>
+                <a:latin typeface="Cambria"/>
+              </a:rPr>
+              <a:t>④ 証拠を消す</a:t>
+            </a:r>
+          </a:p>
+        </p:txBody>
+      </p:sp>
+      <p:sp>
+        <p:nvSpPr>
+          <p:cNvPr id="41" name="Oval 40"/>
+          <p:cNvSpPr/>
+          <p:nvPr/>
+        </p:nvSpPr>
+        <p:spPr>
+          <a:xfrm>
+            <a:off x="6565392" y="4837176"/>
+            <a:ext cx="109728" cy="109728"/>
+          </a:xfrm>
+          <a:prstGeom prst="ellipse">
+            <a:avLst/>
+          </a:prstGeom>
+          <a:solidFill>
+            <a:srgbClr val="EA580C"/>
+          </a:solidFill>
+          <a:ln>
+            <a:noFill/>
+          </a:ln>
+          <a:effectLst/>
+        </p:spPr>
+        <p:style>
+          <a:lnRef idx="1">
+            <a:schemeClr val="accent1"/>
+          </a:lnRef>
+          <a:fillRef idx="3">
+            <a:schemeClr val="accent1"/>
+          </a:fillRef>
+          <a:effectRef idx="2">
+            <a:schemeClr val="accent1"/>
+          </a:effectRef>
+          <a:fontRef idx="minor">
+            <a:schemeClr val="lt1"/>
+          </a:fontRef>
+        </p:style>
+        <p:txBody>
+          <a:bodyPr rtlCol="0" anchor="ctr"/>
+          <a:lstStyle/>
+          <a:p>
+            <a:pPr algn="ctr"/>
+          </a:p>
+        </p:txBody>
+      </p:sp>
+      <p:sp>
+        <p:nvSpPr>
+          <p:cNvPr id="42" name="TextBox 41"/>
+          <p:cNvSpPr txBox="1"/>
+          <p:nvPr/>
+        </p:nvSpPr>
+        <p:spPr>
+          <a:xfrm>
+            <a:off x="6784848" y="4773168"/>
+            <a:ext cx="4636007" cy="365760"/>
+          </a:xfrm>
+          <a:prstGeom prst="rect">
+            <a:avLst/>
+          </a:prstGeom>
+          <a:noFill/>
+        </p:spPr>
+        <p:txBody>
+          <a:bodyPr wrap="square" lIns="0" rIns="0" tIns="0" bIns="0" anchor="t">
+            <a:spAutoFit/>
+          </a:bodyPr>
+          <a:lstStyle/>
+          <a:p>
+            <a:pPr algn="l">
+              <a:lnSpc>
+                <a:spcPct val="110000"/>
+              </a:lnSpc>
+            </a:pPr>
+            <a:r>
+              <a:rPr sz="1050" b="0" i="0">
+                <a:solidFill>
+                  <a:srgbClr val="1F2937"/>
+                </a:solidFill>
+                <a:latin typeface="Calibri"/>
+              </a:rPr>
+              <a:t>wevtutil などでイベントログをまるごと消去</a:t>
+            </a:r>
+          </a:p>
+        </p:txBody>
+      </p:sp>
+      <p:sp>
+        <p:nvSpPr>
+          <p:cNvPr id="43" name="Oval 42"/>
+          <p:cNvSpPr/>
+          <p:nvPr/>
+        </p:nvSpPr>
+        <p:spPr>
+          <a:xfrm>
+            <a:off x="6565392" y="5221224"/>
+            <a:ext cx="109728" cy="109728"/>
+          </a:xfrm>
+          <a:prstGeom prst="ellipse">
+            <a:avLst/>
+          </a:prstGeom>
+          <a:solidFill>
+            <a:srgbClr val="DC2626"/>
+          </a:solidFill>
+          <a:ln>
+            <a:noFill/>
+          </a:ln>
+          <a:effectLst/>
+        </p:spPr>
+        <p:style>
+          <a:lnRef idx="1">
+            <a:schemeClr val="accent1"/>
+          </a:lnRef>
+          <a:fillRef idx="3">
+            <a:schemeClr val="accent1"/>
+          </a:fillRef>
+          <a:effectRef idx="2">
+            <a:schemeClr val="accent1"/>
+          </a:effectRef>
+          <a:fontRef idx="minor">
+            <a:schemeClr val="lt1"/>
+          </a:fontRef>
+        </p:style>
+        <p:txBody>
+          <a:bodyPr rtlCol="0" anchor="ctr"/>
+          <a:lstStyle/>
+          <a:p>
+            <a:pPr algn="ctr"/>
+          </a:p>
+        </p:txBody>
+      </p:sp>
+      <p:sp>
+        <p:nvSpPr>
+          <p:cNvPr id="44" name="TextBox 43"/>
+          <p:cNvSpPr txBox="1"/>
+          <p:nvPr/>
+        </p:nvSpPr>
+        <p:spPr>
+          <a:xfrm>
+            <a:off x="6784848" y="5157216"/>
+            <a:ext cx="4636007" cy="365760"/>
+          </a:xfrm>
+          <a:prstGeom prst="rect">
+            <a:avLst/>
+          </a:prstGeom>
+          <a:noFill/>
+        </p:spPr>
+        <p:txBody>
+          <a:bodyPr wrap="square" lIns="0" rIns="0" tIns="0" bIns="0" anchor="t">
+            <a:spAutoFit/>
+          </a:bodyPr>
+          <a:lstStyle/>
+          <a:p>
+            <a:pPr algn="l">
+              <a:lnSpc>
+                <a:spcPct val="110000"/>
+              </a:lnSpc>
+            </a:pPr>
+            <a:r>
+              <a:rPr sz="1050" b="0" i="0">
+                <a:solidFill>
+                  <a:srgbClr val="1F2937"/>
+                </a:solidFill>
+                <a:latin typeface="Calibri"/>
+              </a:rPr>
+              <a:t>監査を変えた直後にログ消去、という “合わせ技”</a:t>
+            </a:r>
+          </a:p>
+        </p:txBody>
+      </p:sp>
+      <p:sp>
+        <p:nvSpPr>
+          <p:cNvPr id="45" name="Oval 44"/>
+          <p:cNvSpPr/>
+          <p:nvPr/>
+        </p:nvSpPr>
+        <p:spPr>
+          <a:xfrm>
+            <a:off x="6565392" y="5605272"/>
+            <a:ext cx="109728" cy="109728"/>
+          </a:xfrm>
+          <a:prstGeom prst="ellipse">
+            <a:avLst/>
+          </a:prstGeom>
+          <a:solidFill>
+            <a:srgbClr val="DC2626"/>
+          </a:solidFill>
+          <a:ln>
+            <a:noFill/>
+          </a:ln>
+          <a:effectLst/>
+        </p:spPr>
+        <p:style>
+          <a:lnRef idx="1">
+            <a:schemeClr val="accent1"/>
+          </a:lnRef>
+          <a:fillRef idx="3">
+            <a:schemeClr val="accent1"/>
+          </a:fillRef>
+          <a:effectRef idx="2">
+            <a:schemeClr val="accent1"/>
+          </a:effectRef>
+          <a:fontRef idx="minor">
+            <a:schemeClr val="lt1"/>
+          </a:fontRef>
+        </p:style>
+        <p:txBody>
+          <a:bodyPr rtlCol="0" anchor="ctr"/>
+          <a:lstStyle/>
+          <a:p>
+            <a:pPr algn="ctr"/>
+          </a:p>
+        </p:txBody>
+      </p:sp>
+      <p:sp>
+        <p:nvSpPr>
+          <p:cNvPr id="46" name="TextBox 45"/>
+          <p:cNvSpPr txBox="1"/>
+          <p:nvPr/>
+        </p:nvSpPr>
+        <p:spPr>
+          <a:xfrm>
+            <a:off x="6784848" y="5541264"/>
+            <a:ext cx="4636007" cy="365760"/>
+          </a:xfrm>
+          <a:prstGeom prst="rect">
+            <a:avLst/>
+          </a:prstGeom>
+          <a:noFill/>
+        </p:spPr>
+        <p:txBody>
+          <a:bodyPr wrap="square" lIns="0" rIns="0" tIns="0" bIns="0" anchor="t">
+            <a:spAutoFit/>
+          </a:bodyPr>
+          <a:lstStyle/>
+          <a:p>
+            <a:pPr algn="l">
+              <a:lnSpc>
+                <a:spcPct val="110000"/>
+              </a:lnSpc>
+            </a:pPr>
+            <a:r>
+              <a:rPr sz="1050" b="0" i="0">
+                <a:solidFill>
+                  <a:srgbClr val="1F2937"/>
+                </a:solidFill>
+                <a:latin typeface="Calibri"/>
+              </a:rPr>
+              <a:t>復元用スナップショットの削除 (ランサムの前兆)</a:t>
+            </a:r>
+          </a:p>
+        </p:txBody>
+      </p:sp>
+      <p:sp>
+        <p:nvSpPr>
+          <p:cNvPr id="47" name="TextBox 46"/>
+          <p:cNvSpPr txBox="1"/>
+          <p:nvPr/>
+        </p:nvSpPr>
+        <p:spPr>
+          <a:xfrm>
+            <a:off x="10972800" y="6446520"/>
+            <a:ext cx="914400" cy="274320"/>
+          </a:xfrm>
+          <a:prstGeom prst="rect">
+            <a:avLst/>
+          </a:prstGeom>
+          <a:noFill/>
+        </p:spPr>
+        <p:txBody>
+          <a:bodyPr wrap="square" lIns="0" rIns="0" tIns="0" bIns="0" anchor="t">
+            <a:spAutoFit/>
+          </a:bodyPr>
+          <a:lstStyle/>
+          <a:p>
+            <a:pPr algn="r">
+              <a:lnSpc>
+                <a:spcPct val="130000"/>
+              </a:lnSpc>
+            </a:pPr>
+            <a:r>
+              <a:rPr sz="900" b="0" i="0">
+                <a:solidFill>
+                  <a:srgbClr val="5B6472"/>
+                </a:solidFill>
+                <a:latin typeface="Calibri"/>
+              </a:rPr>
+              <a:t>付録</a:t>
             </a:r>
           </a:p>
         </p:txBody>

--- a/docs/presentation/pptx/hayabusa-plus.pptx
+++ b/docs/presentation/pptx/hayabusa-plus.pptx
@@ -848,6 +848,11 @@
           <a:p>
             <a:r>
               <a:t>(デモ: スキャン実行 → ダッシュボードで全体把握 → 検知の日本語解説 → ホスト別の危険度ランキング、の順に見せる)</a:t>
+            </a:r>
+          </a:p>
+          <a:p>
+            <a:r>
+              <a:t>※ ライブが不調なときは、スライド中央の動画をクリックすれば同じ流れの録画 (約 38 秒・字幕つき) が再生されます。</a:t>
             </a:r>
           </a:p>
         </p:txBody>
@@ -9245,8 +9250,8 @@
         </p:nvSpPr>
         <p:spPr>
           <a:xfrm>
-            <a:off x="548640" y="1737360"/>
-            <a:ext cx="10972800" cy="1463040"/>
+            <a:off x="548640" y="502920"/>
+            <a:ext cx="10972800" cy="822960"/>
           </a:xfrm>
           <a:prstGeom prst="rect">
             <a:avLst/>
@@ -9265,7 +9270,7 @@
               </a:lnSpc>
             </a:pPr>
             <a:r>
-              <a:rPr sz="11000" b="1" i="0">
+              <a:rPr sz="4400" b="1" i="0">
                 <a:solidFill>
                   <a:srgbClr val="FFFFFF"/>
                 </a:solidFill>
@@ -9276,16 +9281,54 @@
           </a:p>
         </p:txBody>
       </p:sp>
-      <p:sp>
-        <p:nvSpPr>
-          <p:cNvPr id="4" name="TextBox 3"/>
-          <p:cNvSpPr txBox="1"/>
-          <p:nvPr/>
-        </p:nvSpPr>
-        <p:spPr>
-          <a:xfrm>
-            <a:off x="548640" y="3977639"/>
-            <a:ext cx="10972800" cy="548640"/>
+      <p:pic>
+        <p:nvPicPr>
+          <p:cNvPr id="4" name="hayabusa-plus-demo.mp4">
+            <a:hlinkClick r:id="" action="ppaction://media"/>
+          </p:cNvPr>
+          <p:cNvPicPr>
+            <a:picLocks noChangeAspect="1"/>
+          </p:cNvPicPr>
+          <p:nvPr>
+            <a:videoFile r:link="rId3"/>
+            <p:extLst>
+              <p:ext uri="{DAA4B4D4-6D71-4841-9C94-3DE7FCFB9230}">
+                <p14:media xmlns:p14="http://schemas.microsoft.com/office/powerpoint/2010/main" r:embed="rId2"/>
+              </p:ext>
+            </p:extLst>
+          </p:nvPr>
+        </p:nvPicPr>
+        <p:blipFill>
+          <a:blip r:embed="rId4"/>
+          <a:stretch>
+            <a:fillRect/>
+          </a:stretch>
+        </p:blipFill>
+        <p:spPr>
+          <a:xfrm>
+            <a:off x="2255367" y="1417320"/>
+            <a:ext cx="7680960" cy="4320540"/>
+          </a:xfrm>
+          <a:prstGeom prst="rect">
+            <a:avLst/>
+          </a:prstGeom>
+          <a:ln w="12700">
+            <a:solidFill>
+              <a:srgbClr val="CADCFC"/>
+            </a:solidFill>
+          </a:ln>
+        </p:spPr>
+      </p:pic>
+      <p:sp>
+        <p:nvSpPr>
+          <p:cNvPr id="5" name="TextBox 4"/>
+          <p:cNvSpPr txBox="1"/>
+          <p:nvPr/>
+        </p:nvSpPr>
+        <p:spPr>
+          <a:xfrm>
+            <a:off x="548640" y="5943600"/>
+            <a:ext cx="10972800" cy="457200"/>
           </a:xfrm>
           <a:prstGeom prst="rect">
             <a:avLst/>
@@ -9304,52 +9347,13 @@
               </a:lnSpc>
             </a:pPr>
             <a:r>
-              <a:rPr sz="2400" b="0" i="1">
+              <a:rPr sz="1500" b="0" i="1">
                 <a:solidFill>
                   <a:srgbClr val="CADCFC"/>
                 </a:solidFill>
                 <a:latin typeface="Calibri"/>
               </a:rPr>
-              <a:t>実際の画面で動かしてみます</a:t>
-            </a:r>
-          </a:p>
-        </p:txBody>
-      </p:sp>
-      <p:sp>
-        <p:nvSpPr>
-          <p:cNvPr id="5" name="TextBox 4"/>
-          <p:cNvSpPr txBox="1"/>
-          <p:nvPr/>
-        </p:nvSpPr>
-        <p:spPr>
-          <a:xfrm>
-            <a:off x="548640" y="4709160"/>
-            <a:ext cx="10972800" cy="457200"/>
-          </a:xfrm>
-          <a:prstGeom prst="rect">
-            <a:avLst/>
-          </a:prstGeom>
-          <a:noFill/>
-        </p:spPr>
-        <p:txBody>
-          <a:bodyPr wrap="square" lIns="0" rIns="0" tIns="0" bIns="0" anchor="t">
-            <a:spAutoFit/>
-          </a:bodyPr>
-          <a:lstStyle/>
-          <a:p>
-            <a:pPr algn="ctr">
-              <a:lnSpc>
-                <a:spcPct val="130000"/>
-              </a:lnSpc>
-            </a:pPr>
-            <a:r>
-              <a:rPr sz="1500" b="0" i="0">
-                <a:solidFill>
-                  <a:srgbClr val="CADCFC"/>
-                </a:solidFill>
-                <a:latin typeface="Calibri"/>
-              </a:rPr>
-              <a:t>サンプルログを読み込み、調査の流れを見ていただきます。</a:t>
+              <a:t>▶ クリックで再生 — 実際の画面の録画 (約 38 秒・字幕つき)</a:t>
             </a:r>
           </a:p>
         </p:txBody>
@@ -9398,6 +9402,28 @@
   <p:clrMapOvr>
     <a:masterClrMapping/>
   </p:clrMapOvr>
+  <p:timing>
+    <p:tnLst>
+      <p:par>
+        <p:cTn id="1" dur="indefinite" restart="never" nodeType="tmRoot">
+          <p:childTnLst>
+            <p:video>
+              <p:cMediaNode vol="80000">
+                <p:cTn id="2" fill="hold" display="0">
+                  <p:stCondLst>
+                    <p:cond delay="indefinite"/>
+                  </p:stCondLst>
+                </p:cTn>
+                <p:tgtEl>
+                  <p:spTgt spid="4"/>
+                </p:tgtEl>
+              </p:cMediaNode>
+            </p:video>
+          </p:childTnLst>
+        </p:cTn>
+      </p:par>
+    </p:tnLst>
+  </p:timing>
 </p:sld>
 </file>
 

--- a/docs/presentation/pptx/hayabusa-plus.pptx
+++ b/docs/presentation/pptx/hayabusa-plus.pptx
@@ -21,6 +21,9 @@
     <p:sldId id="269" r:id="rId20"/>
     <p:sldId id="270" r:id="rId21"/>
     <p:sldId id="271" r:id="rId22"/>
+    <p:sldId id="272" r:id="rId23"/>
+    <p:sldId id="273" r:id="rId24"/>
+    <p:sldId id="274" r:id="rId25"/>
   </p:sldIdLst>
   <p:sldSz cx="12191695" cy="6858000" type="screen4x3"/>
   <p:notesSz cx="6858000" cy="9144000"/>
@@ -922,7 +925,7 @@
           <a:lstStyle/>
           <a:p>
             <a:r>
-              <a:t>まとめます。エンジンに lookup という新しい文法を追加し、検知ルールを 13 本自作、結果を読み解く GUI を約 8,000 行で開発し、悪いものリスト約 8 万件を自動で取り込んで照合できるようにしました。</a:t>
+              <a:t>まとめます。エンジンに lookup という新しい文法を追加し、検知ルールを 13 本自作、結果を読み解く GUI を新たに開発し、悪いものリスト約 8 万件を自動で取り込んで照合できるようにしました。</a:t>
             </a:r>
           </a:p>
           <a:p>
@@ -1467,7 +1470,7 @@
           </a:p>
           <a:p>
             <a:r>
-              <a:t>ログがエンジンで解析され、GUI を通して人が読む、という流れ。エンジンには中身を改造して新機能を追加し、下から「自作の検知ルール 13 本」と「悪いものリスト約 8 万件」を注ぎ込んでいます。GUI はゼロから約 8,000 行で作りました。</a:t>
+              <a:t>ログがエンジンで解析され、GUI を通して人が読む、という流れ。エンジンには中身を改造して新機能を追加し、下から「自作の検知ルール 13 本」と「悪いものリスト約 8 万件」を注ぎ込んでいます。GUI はゼロから自作しました。</a:t>
             </a:r>
           </a:p>
           <a:p>
@@ -5042,7 +5045,7 @@
                 </a:solidFill>
                 <a:latin typeface="Calibri"/>
               </a:rPr>
-              <a:t>🖥️ 結果を読み解ける GUI をゼロから開発 (約 8,000 行)</a:t>
+              <a:t>🖥️ 結果を読み解ける GUI をゼロから開発</a:t>
             </a:r>
           </a:p>
         </p:txBody>
@@ -6950,7 +6953,7 @@
                 </a:solidFill>
                 <a:latin typeface="Calibri"/>
               </a:rPr>
-              <a:t>開発内容 3 / 3   (Python + JavaScript 約 8,000 行)</a:t>
+              <a:t>開発内容 3 / 3   (Python + JavaScript)</a:t>
             </a:r>
           </a:p>
         </p:txBody>
@@ -10099,7 +10102,7 @@
                 </a:solidFill>
                 <a:latin typeface="Cambria"/>
               </a:rPr>
-              <a:t>約8,000</a:t>
+              <a:t>GUI</a:t>
             </a:r>
           </a:p>
         </p:txBody>
@@ -10138,7 +10141,7 @@
                 </a:solidFill>
                 <a:latin typeface="Cambria"/>
               </a:rPr>
-              <a:t>行</a:t>
+              <a:t>ゼロから開発</a:t>
             </a:r>
           </a:p>
         </p:txBody>
@@ -10177,8 +10180,8 @@
                 </a:solidFill>
                 <a:latin typeface="Calibri"/>
               </a:rPr>
-              <a:t>結果を読み解く GUI を
-ゼロから開発</a:t>
+              <a:t>結果を日本語で読み解く
+調査画面を自作</a:t>
             </a:r>
           </a:p>
         </p:txBody>
@@ -12844,6 +12847,2055 @@
 </p:sld>
 </file>
 
+<file path=ppt/slides/slide17.xml><?xml version="1.0" encoding="utf-8"?>
+<p:sld xmlns:a="http://schemas.openxmlformats.org/drawingml/2006/main" xmlns:p="http://schemas.openxmlformats.org/presentationml/2006/main" xmlns:r="http://schemas.openxmlformats.org/officeDocument/2006/relationships">
+  <p:cSld>
+    <p:spTree>
+      <p:nvGrpSpPr>
+        <p:cNvPr id="1" name=""/>
+        <p:cNvGrpSpPr/>
+        <p:nvPr/>
+      </p:nvGrpSpPr>
+      <p:grpSpPr/>
+      <p:sp>
+        <p:nvSpPr>
+          <p:cNvPr id="2" name="Rectangle 1"/>
+          <p:cNvSpPr/>
+          <p:nvPr/>
+        </p:nvSpPr>
+        <p:spPr>
+          <a:xfrm>
+            <a:off x="0" y="0"/>
+            <a:ext cx="12191695" cy="6858000"/>
+          </a:xfrm>
+          <a:prstGeom prst="rect">
+            <a:avLst/>
+          </a:prstGeom>
+          <a:solidFill>
+            <a:srgbClr val="F4F6FA"/>
+          </a:solidFill>
+          <a:ln>
+            <a:noFill/>
+          </a:ln>
+          <a:effectLst/>
+        </p:spPr>
+        <p:style>
+          <a:lnRef idx="1">
+            <a:schemeClr val="accent1"/>
+          </a:lnRef>
+          <a:fillRef idx="3">
+            <a:schemeClr val="accent1"/>
+          </a:fillRef>
+          <a:effectRef idx="2">
+            <a:schemeClr val="accent1"/>
+          </a:effectRef>
+          <a:fontRef idx="minor">
+            <a:schemeClr val="lt1"/>
+          </a:fontRef>
+        </p:style>
+        <p:txBody>
+          <a:bodyPr rtlCol="0" anchor="ctr"/>
+          <a:lstStyle/>
+          <a:p>
+            <a:pPr algn="ctr"/>
+          </a:p>
+        </p:txBody>
+      </p:sp>
+      <p:sp>
+        <p:nvSpPr>
+          <p:cNvPr id="3" name="TextBox 2"/>
+          <p:cNvSpPr txBox="1"/>
+          <p:nvPr/>
+        </p:nvSpPr>
+        <p:spPr>
+          <a:xfrm>
+            <a:off x="548640" y="347472"/>
+            <a:ext cx="10972800" cy="274320"/>
+          </a:xfrm>
+          <a:prstGeom prst="rect">
+            <a:avLst/>
+          </a:prstGeom>
+          <a:noFill/>
+        </p:spPr>
+        <p:txBody>
+          <a:bodyPr wrap="square" lIns="0" rIns="0" tIns="0" bIns="0" anchor="t">
+            <a:spAutoFit/>
+          </a:bodyPr>
+          <a:lstStyle/>
+          <a:p>
+            <a:pPr algn="l">
+              <a:lnSpc>
+                <a:spcPct val="130000"/>
+              </a:lnSpc>
+            </a:pPr>
+            <a:r>
+              <a:rPr sz="1100" b="1" i="0">
+                <a:solidFill>
+                  <a:srgbClr val="2563EB"/>
+                </a:solidFill>
+                <a:latin typeface="Calibri"/>
+              </a:rPr>
+              <a:t>付録 — 想定問答 (Q&amp;A)</a:t>
+            </a:r>
+          </a:p>
+        </p:txBody>
+      </p:sp>
+      <p:sp>
+        <p:nvSpPr>
+          <p:cNvPr id="4" name="TextBox 3"/>
+          <p:cNvSpPr txBox="1"/>
+          <p:nvPr/>
+        </p:nvSpPr>
+        <p:spPr>
+          <a:xfrm>
+            <a:off x="548640" y="621792"/>
+            <a:ext cx="11155680" cy="640080"/>
+          </a:xfrm>
+          <a:prstGeom prst="rect">
+            <a:avLst/>
+          </a:prstGeom>
+          <a:noFill/>
+        </p:spPr>
+        <p:txBody>
+          <a:bodyPr wrap="square" lIns="0" rIns="0" tIns="0" bIns="0" anchor="t">
+            <a:spAutoFit/>
+          </a:bodyPr>
+          <a:lstStyle/>
+          <a:p>
+            <a:pPr algn="l">
+              <a:lnSpc>
+                <a:spcPct val="130000"/>
+              </a:lnSpc>
+            </a:pPr>
+            <a:r>
+              <a:rPr sz="2800" b="1" i="0">
+                <a:solidFill>
+                  <a:srgbClr val="1F2937"/>
+                </a:solidFill>
+                <a:latin typeface="Cambria"/>
+              </a:rPr>
+              <a:t>よくある質問 ①  立ち位置・差分</a:t>
+            </a:r>
+          </a:p>
+        </p:txBody>
+      </p:sp>
+      <p:sp>
+        <p:nvSpPr>
+          <p:cNvPr id="5" name="Rounded Rectangle 4"/>
+          <p:cNvSpPr/>
+          <p:nvPr/>
+        </p:nvSpPr>
+        <p:spPr>
+          <a:xfrm>
+            <a:off x="548640" y="1783080"/>
+            <a:ext cx="11091672" cy="1386840"/>
+          </a:xfrm>
+          <a:prstGeom prst="roundRect">
+            <a:avLst/>
+          </a:prstGeom>
+          <a:solidFill>
+            <a:srgbClr val="FFFFFF"/>
+          </a:solidFill>
+          <a:ln w="9525">
+            <a:solidFill>
+              <a:srgbClr val="DDE3EE"/>
+            </a:solidFill>
+          </a:ln>
+          <a:effectLst/>
+        </p:spPr>
+        <p:style>
+          <a:lnRef idx="1">
+            <a:schemeClr val="accent1"/>
+          </a:lnRef>
+          <a:fillRef idx="3">
+            <a:schemeClr val="accent1"/>
+          </a:fillRef>
+          <a:effectRef idx="2">
+            <a:schemeClr val="accent1"/>
+          </a:effectRef>
+          <a:fontRef idx="minor">
+            <a:schemeClr val="lt1"/>
+          </a:fontRef>
+        </p:style>
+        <p:txBody>
+          <a:bodyPr rtlCol="0" anchor="ctr"/>
+          <a:lstStyle/>
+          <a:p>
+            <a:pPr algn="ctr"/>
+          </a:p>
+        </p:txBody>
+      </p:sp>
+      <p:sp>
+        <p:nvSpPr>
+          <p:cNvPr id="6" name="Rectangle 5"/>
+          <p:cNvSpPr/>
+          <p:nvPr/>
+        </p:nvSpPr>
+        <p:spPr>
+          <a:xfrm>
+            <a:off x="548640" y="1783080"/>
+            <a:ext cx="73152" cy="1386840"/>
+          </a:xfrm>
+          <a:prstGeom prst="rect">
+            <a:avLst/>
+          </a:prstGeom>
+          <a:solidFill>
+            <a:srgbClr val="2563EB"/>
+          </a:solidFill>
+          <a:ln>
+            <a:noFill/>
+          </a:ln>
+          <a:effectLst/>
+        </p:spPr>
+        <p:style>
+          <a:lnRef idx="1">
+            <a:schemeClr val="accent1"/>
+          </a:lnRef>
+          <a:fillRef idx="3">
+            <a:schemeClr val="accent1"/>
+          </a:fillRef>
+          <a:effectRef idx="2">
+            <a:schemeClr val="accent1"/>
+          </a:effectRef>
+          <a:fontRef idx="minor">
+            <a:schemeClr val="lt1"/>
+          </a:fontRef>
+        </p:style>
+        <p:txBody>
+          <a:bodyPr rtlCol="0" anchor="ctr"/>
+          <a:lstStyle/>
+          <a:p>
+            <a:pPr algn="ctr"/>
+          </a:p>
+        </p:txBody>
+      </p:sp>
+      <p:sp>
+        <p:nvSpPr>
+          <p:cNvPr id="7" name="TextBox 6"/>
+          <p:cNvSpPr txBox="1"/>
+          <p:nvPr/>
+        </p:nvSpPr>
+        <p:spPr>
+          <a:xfrm>
+            <a:off x="868680" y="1929384"/>
+            <a:ext cx="10515600" cy="457200"/>
+          </a:xfrm>
+          <a:prstGeom prst="rect">
+            <a:avLst/>
+          </a:prstGeom>
+          <a:noFill/>
+        </p:spPr>
+        <p:txBody>
+          <a:bodyPr wrap="square" lIns="0" rIns="0" tIns="0" bIns="0" anchor="t">
+            <a:spAutoFit/>
+          </a:bodyPr>
+          <a:lstStyle/>
+          <a:p>
+            <a:pPr algn="l">
+              <a:lnSpc>
+                <a:spcPct val="130000"/>
+              </a:lnSpc>
+            </a:pPr>
+            <a:r>
+              <a:rPr sz="1500" b="1" i="0">
+                <a:solidFill>
+                  <a:srgbClr val="1F2937"/>
+                </a:solidFill>
+                <a:latin typeface="Cambria"/>
+              </a:rPr>
+              <a:t>Q.  既存の Hayabusa と何が違うの?</a:t>
+            </a:r>
+          </a:p>
+        </p:txBody>
+      </p:sp>
+      <p:sp>
+        <p:nvSpPr>
+          <p:cNvPr id="8" name="TextBox 7"/>
+          <p:cNvSpPr txBox="1"/>
+          <p:nvPr/>
+        </p:nvSpPr>
+        <p:spPr>
+          <a:xfrm>
+            <a:off x="868680" y="2386584"/>
+            <a:ext cx="10469880" cy="673608"/>
+          </a:xfrm>
+          <a:prstGeom prst="rect">
+            <a:avLst/>
+          </a:prstGeom>
+          <a:noFill/>
+        </p:spPr>
+        <p:txBody>
+          <a:bodyPr wrap="square" lIns="0" rIns="0" tIns="0" bIns="0" anchor="t">
+            <a:spAutoFit/>
+          </a:bodyPr>
+          <a:lstStyle/>
+          <a:p>
+            <a:pPr algn="l">
+              <a:lnSpc>
+                <a:spcPct val="132000"/>
+              </a:lnSpc>
+            </a:pPr>
+            <a:r>
+              <a:rPr sz="1250" b="0" i="0">
+                <a:solidFill>
+                  <a:srgbClr val="5B6472"/>
+                </a:solidFill>
+                <a:latin typeface="Calibri"/>
+              </a:rPr>
+              <a:t>A.  検知エンジンに lookup 文法を追加し、攻撃を見抜くルールを 13 本自作。さらに結果を日本語で読み解く GUI、振る舞い分析、IoC の自動取り込みを足した。土台の検知力は活かしつつ「専門家でなくても使える形」にしたのが差分。</a:t>
+            </a:r>
+          </a:p>
+        </p:txBody>
+      </p:sp>
+      <p:sp>
+        <p:nvSpPr>
+          <p:cNvPr id="9" name="Rounded Rectangle 8"/>
+          <p:cNvSpPr/>
+          <p:nvPr/>
+        </p:nvSpPr>
+        <p:spPr>
+          <a:xfrm>
+            <a:off x="548640" y="3316224"/>
+            <a:ext cx="11091672" cy="1386840"/>
+          </a:xfrm>
+          <a:prstGeom prst="roundRect">
+            <a:avLst/>
+          </a:prstGeom>
+          <a:solidFill>
+            <a:srgbClr val="FFFFFF"/>
+          </a:solidFill>
+          <a:ln w="9525">
+            <a:solidFill>
+              <a:srgbClr val="DDE3EE"/>
+            </a:solidFill>
+          </a:ln>
+          <a:effectLst/>
+        </p:spPr>
+        <p:style>
+          <a:lnRef idx="1">
+            <a:schemeClr val="accent1"/>
+          </a:lnRef>
+          <a:fillRef idx="3">
+            <a:schemeClr val="accent1"/>
+          </a:fillRef>
+          <a:effectRef idx="2">
+            <a:schemeClr val="accent1"/>
+          </a:effectRef>
+          <a:fontRef idx="minor">
+            <a:schemeClr val="lt1"/>
+          </a:fontRef>
+        </p:style>
+        <p:txBody>
+          <a:bodyPr rtlCol="0" anchor="ctr"/>
+          <a:lstStyle/>
+          <a:p>
+            <a:pPr algn="ctr"/>
+          </a:p>
+        </p:txBody>
+      </p:sp>
+      <p:sp>
+        <p:nvSpPr>
+          <p:cNvPr id="10" name="Rectangle 9"/>
+          <p:cNvSpPr/>
+          <p:nvPr/>
+        </p:nvSpPr>
+        <p:spPr>
+          <a:xfrm>
+            <a:off x="548640" y="3316224"/>
+            <a:ext cx="73152" cy="1386840"/>
+          </a:xfrm>
+          <a:prstGeom prst="rect">
+            <a:avLst/>
+          </a:prstGeom>
+          <a:solidFill>
+            <a:srgbClr val="2563EB"/>
+          </a:solidFill>
+          <a:ln>
+            <a:noFill/>
+          </a:ln>
+          <a:effectLst/>
+        </p:spPr>
+        <p:style>
+          <a:lnRef idx="1">
+            <a:schemeClr val="accent1"/>
+          </a:lnRef>
+          <a:fillRef idx="3">
+            <a:schemeClr val="accent1"/>
+          </a:fillRef>
+          <a:effectRef idx="2">
+            <a:schemeClr val="accent1"/>
+          </a:effectRef>
+          <a:fontRef idx="minor">
+            <a:schemeClr val="lt1"/>
+          </a:fontRef>
+        </p:style>
+        <p:txBody>
+          <a:bodyPr rtlCol="0" anchor="ctr"/>
+          <a:lstStyle/>
+          <a:p>
+            <a:pPr algn="ctr"/>
+          </a:p>
+        </p:txBody>
+      </p:sp>
+      <p:sp>
+        <p:nvSpPr>
+          <p:cNvPr id="11" name="TextBox 10"/>
+          <p:cNvSpPr txBox="1"/>
+          <p:nvPr/>
+        </p:nvSpPr>
+        <p:spPr>
+          <a:xfrm>
+            <a:off x="868680" y="3462528"/>
+            <a:ext cx="10515600" cy="457200"/>
+          </a:xfrm>
+          <a:prstGeom prst="rect">
+            <a:avLst/>
+          </a:prstGeom>
+          <a:noFill/>
+        </p:spPr>
+        <p:txBody>
+          <a:bodyPr wrap="square" lIns="0" rIns="0" tIns="0" bIns="0" anchor="t">
+            <a:spAutoFit/>
+          </a:bodyPr>
+          <a:lstStyle/>
+          <a:p>
+            <a:pPr algn="l">
+              <a:lnSpc>
+                <a:spcPct val="130000"/>
+              </a:lnSpc>
+            </a:pPr>
+            <a:r>
+              <a:rPr sz="1500" b="1" i="0">
+                <a:solidFill>
+                  <a:srgbClr val="1F2937"/>
+                </a:solidFill>
+                <a:latin typeface="Cambria"/>
+              </a:rPr>
+              <a:t>Q.  SIEM や商用 EDR と何が違うの?</a:t>
+            </a:r>
+          </a:p>
+        </p:txBody>
+      </p:sp>
+      <p:sp>
+        <p:nvSpPr>
+          <p:cNvPr id="12" name="TextBox 11"/>
+          <p:cNvSpPr txBox="1"/>
+          <p:nvPr/>
+        </p:nvSpPr>
+        <p:spPr>
+          <a:xfrm>
+            <a:off x="868680" y="3919728"/>
+            <a:ext cx="10469880" cy="673608"/>
+          </a:xfrm>
+          <a:prstGeom prst="rect">
+            <a:avLst/>
+          </a:prstGeom>
+          <a:noFill/>
+        </p:spPr>
+        <p:txBody>
+          <a:bodyPr wrap="square" lIns="0" rIns="0" tIns="0" bIns="0" anchor="t">
+            <a:spAutoFit/>
+          </a:bodyPr>
+          <a:lstStyle/>
+          <a:p>
+            <a:pPr algn="l">
+              <a:lnSpc>
+                <a:spcPct val="132000"/>
+              </a:lnSpc>
+            </a:pPr>
+            <a:r>
+              <a:rPr sz="1250" b="0" i="0">
+                <a:solidFill>
+                  <a:srgbClr val="5B6472"/>
+                </a:solidFill>
+                <a:latin typeface="Calibri"/>
+              </a:rPr>
+              <a:t>A.  導入ゼロ・オフライン・無料で、PC 1 台に展開すればすぐ動く。大規模な常時監視ではなく「インシデント時に手元で素早く調べる」用途に振り切っている。</a:t>
+            </a:r>
+          </a:p>
+        </p:txBody>
+      </p:sp>
+      <p:sp>
+        <p:nvSpPr>
+          <p:cNvPr id="13" name="Rounded Rectangle 12"/>
+          <p:cNvSpPr/>
+          <p:nvPr/>
+        </p:nvSpPr>
+        <p:spPr>
+          <a:xfrm>
+            <a:off x="548640" y="4849368"/>
+            <a:ext cx="11091672" cy="1386840"/>
+          </a:xfrm>
+          <a:prstGeom prst="roundRect">
+            <a:avLst/>
+          </a:prstGeom>
+          <a:solidFill>
+            <a:srgbClr val="FFFFFF"/>
+          </a:solidFill>
+          <a:ln w="9525">
+            <a:solidFill>
+              <a:srgbClr val="DDE3EE"/>
+            </a:solidFill>
+          </a:ln>
+          <a:effectLst/>
+        </p:spPr>
+        <p:style>
+          <a:lnRef idx="1">
+            <a:schemeClr val="accent1"/>
+          </a:lnRef>
+          <a:fillRef idx="3">
+            <a:schemeClr val="accent1"/>
+          </a:fillRef>
+          <a:effectRef idx="2">
+            <a:schemeClr val="accent1"/>
+          </a:effectRef>
+          <a:fontRef idx="minor">
+            <a:schemeClr val="lt1"/>
+          </a:fontRef>
+        </p:style>
+        <p:txBody>
+          <a:bodyPr rtlCol="0" anchor="ctr"/>
+          <a:lstStyle/>
+          <a:p>
+            <a:pPr algn="ctr"/>
+          </a:p>
+        </p:txBody>
+      </p:sp>
+      <p:sp>
+        <p:nvSpPr>
+          <p:cNvPr id="14" name="Rectangle 13"/>
+          <p:cNvSpPr/>
+          <p:nvPr/>
+        </p:nvSpPr>
+        <p:spPr>
+          <a:xfrm>
+            <a:off x="548640" y="4849368"/>
+            <a:ext cx="73152" cy="1386840"/>
+          </a:xfrm>
+          <a:prstGeom prst="rect">
+            <a:avLst/>
+          </a:prstGeom>
+          <a:solidFill>
+            <a:srgbClr val="2563EB"/>
+          </a:solidFill>
+          <a:ln>
+            <a:noFill/>
+          </a:ln>
+          <a:effectLst/>
+        </p:spPr>
+        <p:style>
+          <a:lnRef idx="1">
+            <a:schemeClr val="accent1"/>
+          </a:lnRef>
+          <a:fillRef idx="3">
+            <a:schemeClr val="accent1"/>
+          </a:fillRef>
+          <a:effectRef idx="2">
+            <a:schemeClr val="accent1"/>
+          </a:effectRef>
+          <a:fontRef idx="minor">
+            <a:schemeClr val="lt1"/>
+          </a:fontRef>
+        </p:style>
+        <p:txBody>
+          <a:bodyPr rtlCol="0" anchor="ctr"/>
+          <a:lstStyle/>
+          <a:p>
+            <a:pPr algn="ctr"/>
+          </a:p>
+        </p:txBody>
+      </p:sp>
+      <p:sp>
+        <p:nvSpPr>
+          <p:cNvPr id="15" name="TextBox 14"/>
+          <p:cNvSpPr txBox="1"/>
+          <p:nvPr/>
+        </p:nvSpPr>
+        <p:spPr>
+          <a:xfrm>
+            <a:off x="868680" y="4995672"/>
+            <a:ext cx="10515600" cy="457200"/>
+          </a:xfrm>
+          <a:prstGeom prst="rect">
+            <a:avLst/>
+          </a:prstGeom>
+          <a:noFill/>
+        </p:spPr>
+        <p:txBody>
+          <a:bodyPr wrap="square" lIns="0" rIns="0" tIns="0" bIns="0" anchor="t">
+            <a:spAutoFit/>
+          </a:bodyPr>
+          <a:lstStyle/>
+          <a:p>
+            <a:pPr algn="l">
+              <a:lnSpc>
+                <a:spcPct val="130000"/>
+              </a:lnSpc>
+            </a:pPr>
+            <a:r>
+              <a:rPr sz="1500" b="1" i="0">
+                <a:solidFill>
+                  <a:srgbClr val="1F2937"/>
+                </a:solidFill>
+                <a:latin typeface="Cambria"/>
+              </a:rPr>
+              <a:t>Q.  Sigma ルールはそのまま使える? 独自拡張で互換は壊れない?</a:t>
+            </a:r>
+          </a:p>
+        </p:txBody>
+      </p:sp>
+      <p:sp>
+        <p:nvSpPr>
+          <p:cNvPr id="16" name="TextBox 15"/>
+          <p:cNvSpPr txBox="1"/>
+          <p:nvPr/>
+        </p:nvSpPr>
+        <p:spPr>
+          <a:xfrm>
+            <a:off x="868680" y="5452872"/>
+            <a:ext cx="10469880" cy="673608"/>
+          </a:xfrm>
+          <a:prstGeom prst="rect">
+            <a:avLst/>
+          </a:prstGeom>
+          <a:noFill/>
+        </p:spPr>
+        <p:txBody>
+          <a:bodyPr wrap="square" lIns="0" rIns="0" tIns="0" bIns="0" anchor="t">
+            <a:spAutoFit/>
+          </a:bodyPr>
+          <a:lstStyle/>
+          <a:p>
+            <a:pPr algn="l">
+              <a:lnSpc>
+                <a:spcPct val="132000"/>
+              </a:lnSpc>
+            </a:pPr>
+            <a:r>
+              <a:rPr sz="1250" b="0" i="0">
+                <a:solidFill>
+                  <a:srgbClr val="5B6472"/>
+                </a:solidFill>
+                <a:latin typeface="Calibri"/>
+              </a:rPr>
+              <a:t>A.  世界共通の Sigma 約 5,000 本に加え、自作 13 本が使える。lookup は独自拡張だが、上流の Hayabusa は知らない記法を無視するだけなので互換は壊れない。</a:t>
+            </a:r>
+          </a:p>
+        </p:txBody>
+      </p:sp>
+      <p:sp>
+        <p:nvSpPr>
+          <p:cNvPr id="17" name="TextBox 16"/>
+          <p:cNvSpPr txBox="1"/>
+          <p:nvPr/>
+        </p:nvSpPr>
+        <p:spPr>
+          <a:xfrm>
+            <a:off x="10972800" y="6446520"/>
+            <a:ext cx="914400" cy="274320"/>
+          </a:xfrm>
+          <a:prstGeom prst="rect">
+            <a:avLst/>
+          </a:prstGeom>
+          <a:noFill/>
+        </p:spPr>
+        <p:txBody>
+          <a:bodyPr wrap="square" lIns="0" rIns="0" tIns="0" bIns="0" anchor="t">
+            <a:spAutoFit/>
+          </a:bodyPr>
+          <a:lstStyle/>
+          <a:p>
+            <a:pPr algn="r">
+              <a:lnSpc>
+                <a:spcPct val="130000"/>
+              </a:lnSpc>
+            </a:pPr>
+            <a:r>
+              <a:rPr sz="900" b="0" i="0">
+                <a:solidFill>
+                  <a:srgbClr val="5B6472"/>
+                </a:solidFill>
+                <a:latin typeface="Calibri"/>
+              </a:rPr>
+              <a:t>付録</a:t>
+            </a:r>
+          </a:p>
+        </p:txBody>
+      </p:sp>
+    </p:spTree>
+  </p:cSld>
+  <p:clrMapOvr>
+    <a:masterClrMapping/>
+  </p:clrMapOvr>
+</p:sld>
+</file>
+
+<file path=ppt/slides/slide18.xml><?xml version="1.0" encoding="utf-8"?>
+<p:sld xmlns:a="http://schemas.openxmlformats.org/drawingml/2006/main" xmlns:p="http://schemas.openxmlformats.org/presentationml/2006/main" xmlns:r="http://schemas.openxmlformats.org/officeDocument/2006/relationships">
+  <p:cSld>
+    <p:spTree>
+      <p:nvGrpSpPr>
+        <p:cNvPr id="1" name=""/>
+        <p:cNvGrpSpPr/>
+        <p:nvPr/>
+      </p:nvGrpSpPr>
+      <p:grpSpPr/>
+      <p:sp>
+        <p:nvSpPr>
+          <p:cNvPr id="2" name="Rectangle 1"/>
+          <p:cNvSpPr/>
+          <p:nvPr/>
+        </p:nvSpPr>
+        <p:spPr>
+          <a:xfrm>
+            <a:off x="0" y="0"/>
+            <a:ext cx="12191695" cy="6858000"/>
+          </a:xfrm>
+          <a:prstGeom prst="rect">
+            <a:avLst/>
+          </a:prstGeom>
+          <a:solidFill>
+            <a:srgbClr val="F4F6FA"/>
+          </a:solidFill>
+          <a:ln>
+            <a:noFill/>
+          </a:ln>
+          <a:effectLst/>
+        </p:spPr>
+        <p:style>
+          <a:lnRef idx="1">
+            <a:schemeClr val="accent1"/>
+          </a:lnRef>
+          <a:fillRef idx="3">
+            <a:schemeClr val="accent1"/>
+          </a:fillRef>
+          <a:effectRef idx="2">
+            <a:schemeClr val="accent1"/>
+          </a:effectRef>
+          <a:fontRef idx="minor">
+            <a:schemeClr val="lt1"/>
+          </a:fontRef>
+        </p:style>
+        <p:txBody>
+          <a:bodyPr rtlCol="0" anchor="ctr"/>
+          <a:lstStyle/>
+          <a:p>
+            <a:pPr algn="ctr"/>
+          </a:p>
+        </p:txBody>
+      </p:sp>
+      <p:sp>
+        <p:nvSpPr>
+          <p:cNvPr id="3" name="TextBox 2"/>
+          <p:cNvSpPr txBox="1"/>
+          <p:nvPr/>
+        </p:nvSpPr>
+        <p:spPr>
+          <a:xfrm>
+            <a:off x="548640" y="347472"/>
+            <a:ext cx="10972800" cy="274320"/>
+          </a:xfrm>
+          <a:prstGeom prst="rect">
+            <a:avLst/>
+          </a:prstGeom>
+          <a:noFill/>
+        </p:spPr>
+        <p:txBody>
+          <a:bodyPr wrap="square" lIns="0" rIns="0" tIns="0" bIns="0" anchor="t">
+            <a:spAutoFit/>
+          </a:bodyPr>
+          <a:lstStyle/>
+          <a:p>
+            <a:pPr algn="l">
+              <a:lnSpc>
+                <a:spcPct val="130000"/>
+              </a:lnSpc>
+            </a:pPr>
+            <a:r>
+              <a:rPr sz="1100" b="1" i="0">
+                <a:solidFill>
+                  <a:srgbClr val="2563EB"/>
+                </a:solidFill>
+                <a:latin typeface="Calibri"/>
+              </a:rPr>
+              <a:t>付録 — 想定問答 (Q&amp;A)</a:t>
+            </a:r>
+          </a:p>
+        </p:txBody>
+      </p:sp>
+      <p:sp>
+        <p:nvSpPr>
+          <p:cNvPr id="4" name="TextBox 3"/>
+          <p:cNvSpPr txBox="1"/>
+          <p:nvPr/>
+        </p:nvSpPr>
+        <p:spPr>
+          <a:xfrm>
+            <a:off x="548640" y="621792"/>
+            <a:ext cx="11155680" cy="640080"/>
+          </a:xfrm>
+          <a:prstGeom prst="rect">
+            <a:avLst/>
+          </a:prstGeom>
+          <a:noFill/>
+        </p:spPr>
+        <p:txBody>
+          <a:bodyPr wrap="square" lIns="0" rIns="0" tIns="0" bIns="0" anchor="t">
+            <a:spAutoFit/>
+          </a:bodyPr>
+          <a:lstStyle/>
+          <a:p>
+            <a:pPr algn="l">
+              <a:lnSpc>
+                <a:spcPct val="130000"/>
+              </a:lnSpc>
+            </a:pPr>
+            <a:r>
+              <a:rPr sz="2800" b="1" i="0">
+                <a:solidFill>
+                  <a:srgbClr val="1F2937"/>
+                </a:solidFill>
+                <a:latin typeface="Cambria"/>
+              </a:rPr>
+              <a:t>よくある質問 ②  精度・性能・運用</a:t>
+            </a:r>
+          </a:p>
+        </p:txBody>
+      </p:sp>
+      <p:sp>
+        <p:nvSpPr>
+          <p:cNvPr id="5" name="Rounded Rectangle 4"/>
+          <p:cNvSpPr/>
+          <p:nvPr/>
+        </p:nvSpPr>
+        <p:spPr>
+          <a:xfrm>
+            <a:off x="548640" y="1783080"/>
+            <a:ext cx="11091672" cy="1386840"/>
+          </a:xfrm>
+          <a:prstGeom prst="roundRect">
+            <a:avLst/>
+          </a:prstGeom>
+          <a:solidFill>
+            <a:srgbClr val="FFFFFF"/>
+          </a:solidFill>
+          <a:ln w="9525">
+            <a:solidFill>
+              <a:srgbClr val="DDE3EE"/>
+            </a:solidFill>
+          </a:ln>
+          <a:effectLst/>
+        </p:spPr>
+        <p:style>
+          <a:lnRef idx="1">
+            <a:schemeClr val="accent1"/>
+          </a:lnRef>
+          <a:fillRef idx="3">
+            <a:schemeClr val="accent1"/>
+          </a:fillRef>
+          <a:effectRef idx="2">
+            <a:schemeClr val="accent1"/>
+          </a:effectRef>
+          <a:fontRef idx="minor">
+            <a:schemeClr val="lt1"/>
+          </a:fontRef>
+        </p:style>
+        <p:txBody>
+          <a:bodyPr rtlCol="0" anchor="ctr"/>
+          <a:lstStyle/>
+          <a:p>
+            <a:pPr algn="ctr"/>
+          </a:p>
+        </p:txBody>
+      </p:sp>
+      <p:sp>
+        <p:nvSpPr>
+          <p:cNvPr id="6" name="Rectangle 5"/>
+          <p:cNvSpPr/>
+          <p:nvPr/>
+        </p:nvSpPr>
+        <p:spPr>
+          <a:xfrm>
+            <a:off x="548640" y="1783080"/>
+            <a:ext cx="73152" cy="1386840"/>
+          </a:xfrm>
+          <a:prstGeom prst="rect">
+            <a:avLst/>
+          </a:prstGeom>
+          <a:solidFill>
+            <a:srgbClr val="2563EB"/>
+          </a:solidFill>
+          <a:ln>
+            <a:noFill/>
+          </a:ln>
+          <a:effectLst/>
+        </p:spPr>
+        <p:style>
+          <a:lnRef idx="1">
+            <a:schemeClr val="accent1"/>
+          </a:lnRef>
+          <a:fillRef idx="3">
+            <a:schemeClr val="accent1"/>
+          </a:fillRef>
+          <a:effectRef idx="2">
+            <a:schemeClr val="accent1"/>
+          </a:effectRef>
+          <a:fontRef idx="minor">
+            <a:schemeClr val="lt1"/>
+          </a:fontRef>
+        </p:style>
+        <p:txBody>
+          <a:bodyPr rtlCol="0" anchor="ctr"/>
+          <a:lstStyle/>
+          <a:p>
+            <a:pPr algn="ctr"/>
+          </a:p>
+        </p:txBody>
+      </p:sp>
+      <p:sp>
+        <p:nvSpPr>
+          <p:cNvPr id="7" name="TextBox 6"/>
+          <p:cNvSpPr txBox="1"/>
+          <p:nvPr/>
+        </p:nvSpPr>
+        <p:spPr>
+          <a:xfrm>
+            <a:off x="868680" y="1929384"/>
+            <a:ext cx="10515600" cy="457200"/>
+          </a:xfrm>
+          <a:prstGeom prst="rect">
+            <a:avLst/>
+          </a:prstGeom>
+          <a:noFill/>
+        </p:spPr>
+        <p:txBody>
+          <a:bodyPr wrap="square" lIns="0" rIns="0" tIns="0" bIns="0" anchor="t">
+            <a:spAutoFit/>
+          </a:bodyPr>
+          <a:lstStyle/>
+          <a:p>
+            <a:pPr algn="l">
+              <a:lnSpc>
+                <a:spcPct val="130000"/>
+              </a:lnSpc>
+            </a:pPr>
+            <a:r>
+              <a:rPr sz="1500" b="1" i="0">
+                <a:solidFill>
+                  <a:srgbClr val="1F2937"/>
+                </a:solidFill>
+                <a:latin typeface="Cambria"/>
+              </a:rPr>
+              <a:t>Q.  誤検知は多くならないの?</a:t>
+            </a:r>
+          </a:p>
+        </p:txBody>
+      </p:sp>
+      <p:sp>
+        <p:nvSpPr>
+          <p:cNvPr id="8" name="TextBox 7"/>
+          <p:cNvSpPr txBox="1"/>
+          <p:nvPr/>
+        </p:nvSpPr>
+        <p:spPr>
+          <a:xfrm>
+            <a:off x="868680" y="2386584"/>
+            <a:ext cx="10469880" cy="673608"/>
+          </a:xfrm>
+          <a:prstGeom prst="rect">
+            <a:avLst/>
+          </a:prstGeom>
+          <a:noFill/>
+        </p:spPr>
+        <p:txBody>
+          <a:bodyPr wrap="square" lIns="0" rIns="0" tIns="0" bIns="0" anchor="t">
+            <a:spAutoFit/>
+          </a:bodyPr>
+          <a:lstStyle/>
+          <a:p>
+            <a:pPr algn="l">
+              <a:lnSpc>
+                <a:spcPct val="132000"/>
+              </a:lnSpc>
+            </a:pPr>
+            <a:r>
+              <a:rPr sz="1250" b="0" i="0">
+                <a:solidFill>
+                  <a:srgbClr val="5B6472"/>
+                </a:solidFill>
+                <a:latin typeface="Calibri"/>
+              </a:rPr>
+              <a:t>A.  単一の特徴では鳴らさず複数条件の AND で判定。各ルールに誤検知例を明記し、ゴールデンイメージの許可リストや、GUI 上での TP/FP 判定・抑制で運用しながら絞り込める。</a:t>
+            </a:r>
+          </a:p>
+        </p:txBody>
+      </p:sp>
+      <p:sp>
+        <p:nvSpPr>
+          <p:cNvPr id="9" name="Rounded Rectangle 8"/>
+          <p:cNvSpPr/>
+          <p:nvPr/>
+        </p:nvSpPr>
+        <p:spPr>
+          <a:xfrm>
+            <a:off x="548640" y="3316224"/>
+            <a:ext cx="11091672" cy="1386840"/>
+          </a:xfrm>
+          <a:prstGeom prst="roundRect">
+            <a:avLst/>
+          </a:prstGeom>
+          <a:solidFill>
+            <a:srgbClr val="FFFFFF"/>
+          </a:solidFill>
+          <a:ln w="9525">
+            <a:solidFill>
+              <a:srgbClr val="DDE3EE"/>
+            </a:solidFill>
+          </a:ln>
+          <a:effectLst/>
+        </p:spPr>
+        <p:style>
+          <a:lnRef idx="1">
+            <a:schemeClr val="accent1"/>
+          </a:lnRef>
+          <a:fillRef idx="3">
+            <a:schemeClr val="accent1"/>
+          </a:fillRef>
+          <a:effectRef idx="2">
+            <a:schemeClr val="accent1"/>
+          </a:effectRef>
+          <a:fontRef idx="minor">
+            <a:schemeClr val="lt1"/>
+          </a:fontRef>
+        </p:style>
+        <p:txBody>
+          <a:bodyPr rtlCol="0" anchor="ctr"/>
+          <a:lstStyle/>
+          <a:p>
+            <a:pPr algn="ctr"/>
+          </a:p>
+        </p:txBody>
+      </p:sp>
+      <p:sp>
+        <p:nvSpPr>
+          <p:cNvPr id="10" name="Rectangle 9"/>
+          <p:cNvSpPr/>
+          <p:nvPr/>
+        </p:nvSpPr>
+        <p:spPr>
+          <a:xfrm>
+            <a:off x="548640" y="3316224"/>
+            <a:ext cx="73152" cy="1386840"/>
+          </a:xfrm>
+          <a:prstGeom prst="rect">
+            <a:avLst/>
+          </a:prstGeom>
+          <a:solidFill>
+            <a:srgbClr val="2563EB"/>
+          </a:solidFill>
+          <a:ln>
+            <a:noFill/>
+          </a:ln>
+          <a:effectLst/>
+        </p:spPr>
+        <p:style>
+          <a:lnRef idx="1">
+            <a:schemeClr val="accent1"/>
+          </a:lnRef>
+          <a:fillRef idx="3">
+            <a:schemeClr val="accent1"/>
+          </a:fillRef>
+          <a:effectRef idx="2">
+            <a:schemeClr val="accent1"/>
+          </a:effectRef>
+          <a:fontRef idx="minor">
+            <a:schemeClr val="lt1"/>
+          </a:fontRef>
+        </p:style>
+        <p:txBody>
+          <a:bodyPr rtlCol="0" anchor="ctr"/>
+          <a:lstStyle/>
+          <a:p>
+            <a:pPr algn="ctr"/>
+          </a:p>
+        </p:txBody>
+      </p:sp>
+      <p:sp>
+        <p:nvSpPr>
+          <p:cNvPr id="11" name="TextBox 10"/>
+          <p:cNvSpPr txBox="1"/>
+          <p:nvPr/>
+        </p:nvSpPr>
+        <p:spPr>
+          <a:xfrm>
+            <a:off x="868680" y="3462528"/>
+            <a:ext cx="10515600" cy="457200"/>
+          </a:xfrm>
+          <a:prstGeom prst="rect">
+            <a:avLst/>
+          </a:prstGeom>
+          <a:noFill/>
+        </p:spPr>
+        <p:txBody>
+          <a:bodyPr wrap="square" lIns="0" rIns="0" tIns="0" bIns="0" anchor="t">
+            <a:spAutoFit/>
+          </a:bodyPr>
+          <a:lstStyle/>
+          <a:p>
+            <a:pPr algn="l">
+              <a:lnSpc>
+                <a:spcPct val="130000"/>
+              </a:lnSpc>
+            </a:pPr>
+            <a:r>
+              <a:rPr sz="1500" b="1" i="0">
+                <a:solidFill>
+                  <a:srgbClr val="1F2937"/>
+                </a:solidFill>
+                <a:latin typeface="Cambria"/>
+              </a:rPr>
+              <a:t>Q.  速度や扱える規模は?</a:t>
+            </a:r>
+          </a:p>
+        </p:txBody>
+      </p:sp>
+      <p:sp>
+        <p:nvSpPr>
+          <p:cNvPr id="12" name="TextBox 11"/>
+          <p:cNvSpPr txBox="1"/>
+          <p:nvPr/>
+        </p:nvSpPr>
+        <p:spPr>
+          <a:xfrm>
+            <a:off x="868680" y="3919728"/>
+            <a:ext cx="10469880" cy="673608"/>
+          </a:xfrm>
+          <a:prstGeom prst="rect">
+            <a:avLst/>
+          </a:prstGeom>
+          <a:noFill/>
+        </p:spPr>
+        <p:txBody>
+          <a:bodyPr wrap="square" lIns="0" rIns="0" tIns="0" bIns="0" anchor="t">
+            <a:spAutoFit/>
+          </a:bodyPr>
+          <a:lstStyle/>
+          <a:p>
+            <a:pPr algn="l">
+              <a:lnSpc>
+                <a:spcPct val="132000"/>
+              </a:lnSpc>
+            </a:pPr>
+            <a:r>
+              <a:rPr sz="1250" b="0" i="0">
+                <a:solidFill>
+                  <a:srgbClr val="5B6472"/>
+                </a:solidFill>
+                <a:latin typeface="Calibri"/>
+              </a:rPr>
+              <a:t>A.  Rust 製で数万件を数十秒。lookup は起動時に 1 回だけリストを読み込み O(1) で照合するため、リストが増えても速度はほぼ一定（本デモでも 1.2 万件超を処理）。</a:t>
+            </a:r>
+          </a:p>
+        </p:txBody>
+      </p:sp>
+      <p:sp>
+        <p:nvSpPr>
+          <p:cNvPr id="13" name="Rounded Rectangle 12"/>
+          <p:cNvSpPr/>
+          <p:nvPr/>
+        </p:nvSpPr>
+        <p:spPr>
+          <a:xfrm>
+            <a:off x="548640" y="4849368"/>
+            <a:ext cx="11091672" cy="1386840"/>
+          </a:xfrm>
+          <a:prstGeom prst="roundRect">
+            <a:avLst/>
+          </a:prstGeom>
+          <a:solidFill>
+            <a:srgbClr val="FFFFFF"/>
+          </a:solidFill>
+          <a:ln w="9525">
+            <a:solidFill>
+              <a:srgbClr val="DDE3EE"/>
+            </a:solidFill>
+          </a:ln>
+          <a:effectLst/>
+        </p:spPr>
+        <p:style>
+          <a:lnRef idx="1">
+            <a:schemeClr val="accent1"/>
+          </a:lnRef>
+          <a:fillRef idx="3">
+            <a:schemeClr val="accent1"/>
+          </a:fillRef>
+          <a:effectRef idx="2">
+            <a:schemeClr val="accent1"/>
+          </a:effectRef>
+          <a:fontRef idx="minor">
+            <a:schemeClr val="lt1"/>
+          </a:fontRef>
+        </p:style>
+        <p:txBody>
+          <a:bodyPr rtlCol="0" anchor="ctr"/>
+          <a:lstStyle/>
+          <a:p>
+            <a:pPr algn="ctr"/>
+          </a:p>
+        </p:txBody>
+      </p:sp>
+      <p:sp>
+        <p:nvSpPr>
+          <p:cNvPr id="14" name="Rectangle 13"/>
+          <p:cNvSpPr/>
+          <p:nvPr/>
+        </p:nvSpPr>
+        <p:spPr>
+          <a:xfrm>
+            <a:off x="548640" y="4849368"/>
+            <a:ext cx="73152" cy="1386840"/>
+          </a:xfrm>
+          <a:prstGeom prst="rect">
+            <a:avLst/>
+          </a:prstGeom>
+          <a:solidFill>
+            <a:srgbClr val="2563EB"/>
+          </a:solidFill>
+          <a:ln>
+            <a:noFill/>
+          </a:ln>
+          <a:effectLst/>
+        </p:spPr>
+        <p:style>
+          <a:lnRef idx="1">
+            <a:schemeClr val="accent1"/>
+          </a:lnRef>
+          <a:fillRef idx="3">
+            <a:schemeClr val="accent1"/>
+          </a:fillRef>
+          <a:effectRef idx="2">
+            <a:schemeClr val="accent1"/>
+          </a:effectRef>
+          <a:fontRef idx="minor">
+            <a:schemeClr val="lt1"/>
+          </a:fontRef>
+        </p:style>
+        <p:txBody>
+          <a:bodyPr rtlCol="0" anchor="ctr"/>
+          <a:lstStyle/>
+          <a:p>
+            <a:pPr algn="ctr"/>
+          </a:p>
+        </p:txBody>
+      </p:sp>
+      <p:sp>
+        <p:nvSpPr>
+          <p:cNvPr id="15" name="TextBox 14"/>
+          <p:cNvSpPr txBox="1"/>
+          <p:nvPr/>
+        </p:nvSpPr>
+        <p:spPr>
+          <a:xfrm>
+            <a:off x="868680" y="4995672"/>
+            <a:ext cx="10515600" cy="457200"/>
+          </a:xfrm>
+          <a:prstGeom prst="rect">
+            <a:avLst/>
+          </a:prstGeom>
+          <a:noFill/>
+        </p:spPr>
+        <p:txBody>
+          <a:bodyPr wrap="square" lIns="0" rIns="0" tIns="0" bIns="0" anchor="t">
+            <a:spAutoFit/>
+          </a:bodyPr>
+          <a:lstStyle/>
+          <a:p>
+            <a:pPr algn="l">
+              <a:lnSpc>
+                <a:spcPct val="130000"/>
+              </a:lnSpc>
+            </a:pPr>
+            <a:r>
+              <a:rPr sz="1500" b="1" i="0">
+                <a:solidFill>
+                  <a:srgbClr val="1F2937"/>
+                </a:solidFill>
+                <a:latin typeface="Cambria"/>
+              </a:rPr>
+              <a:t>Q.  IoC リストはどうやって最新に保つ?</a:t>
+            </a:r>
+          </a:p>
+        </p:txBody>
+      </p:sp>
+      <p:sp>
+        <p:nvSpPr>
+          <p:cNvPr id="16" name="TextBox 15"/>
+          <p:cNvSpPr txBox="1"/>
+          <p:nvPr/>
+        </p:nvSpPr>
+        <p:spPr>
+          <a:xfrm>
+            <a:off x="868680" y="5452872"/>
+            <a:ext cx="10469880" cy="673608"/>
+          </a:xfrm>
+          <a:prstGeom prst="rect">
+            <a:avLst/>
+          </a:prstGeom>
+          <a:noFill/>
+        </p:spPr>
+        <p:txBody>
+          <a:bodyPr wrap="square" lIns="0" rIns="0" tIns="0" bIns="0" anchor="t">
+            <a:spAutoFit/>
+          </a:bodyPr>
+          <a:lstStyle/>
+          <a:p>
+            <a:pPr algn="l">
+              <a:lnSpc>
+                <a:spcPct val="132000"/>
+              </a:lnSpc>
+            </a:pPr>
+            <a:r>
+              <a:rPr sz="1250" b="0" i="0">
+                <a:solidFill>
+                  <a:srgbClr val="5B6472"/>
+                </a:solidFill>
+                <a:latin typeface="Calibri"/>
+              </a:rPr>
+              <a:t>A.  feeds.yml に宣言し、ボタン 1 つで取得・正規化 (loldrivers / MalwareBazaar / URLhaus / Feodo)。取得失敗時は前回分を保持し、カバレッジを空にしない設計。</a:t>
+            </a:r>
+          </a:p>
+        </p:txBody>
+      </p:sp>
+      <p:sp>
+        <p:nvSpPr>
+          <p:cNvPr id="17" name="TextBox 16"/>
+          <p:cNvSpPr txBox="1"/>
+          <p:nvPr/>
+        </p:nvSpPr>
+        <p:spPr>
+          <a:xfrm>
+            <a:off x="10972800" y="6446520"/>
+            <a:ext cx="914400" cy="274320"/>
+          </a:xfrm>
+          <a:prstGeom prst="rect">
+            <a:avLst/>
+          </a:prstGeom>
+          <a:noFill/>
+        </p:spPr>
+        <p:txBody>
+          <a:bodyPr wrap="square" lIns="0" rIns="0" tIns="0" bIns="0" anchor="t">
+            <a:spAutoFit/>
+          </a:bodyPr>
+          <a:lstStyle/>
+          <a:p>
+            <a:pPr algn="r">
+              <a:lnSpc>
+                <a:spcPct val="130000"/>
+              </a:lnSpc>
+            </a:pPr>
+            <a:r>
+              <a:rPr sz="900" b="0" i="0">
+                <a:solidFill>
+                  <a:srgbClr val="5B6472"/>
+                </a:solidFill>
+                <a:latin typeface="Calibri"/>
+              </a:rPr>
+              <a:t>付録</a:t>
+            </a:r>
+          </a:p>
+        </p:txBody>
+      </p:sp>
+    </p:spTree>
+  </p:cSld>
+  <p:clrMapOvr>
+    <a:masterClrMapping/>
+  </p:clrMapOvr>
+</p:sld>
+</file>
+
+<file path=ppt/slides/slide19.xml><?xml version="1.0" encoding="utf-8"?>
+<p:sld xmlns:a="http://schemas.openxmlformats.org/drawingml/2006/main" xmlns:p="http://schemas.openxmlformats.org/presentationml/2006/main" xmlns:r="http://schemas.openxmlformats.org/officeDocument/2006/relationships">
+  <p:cSld>
+    <p:spTree>
+      <p:nvGrpSpPr>
+        <p:cNvPr id="1" name=""/>
+        <p:cNvGrpSpPr/>
+        <p:nvPr/>
+      </p:nvGrpSpPr>
+      <p:grpSpPr/>
+      <p:sp>
+        <p:nvSpPr>
+          <p:cNvPr id="2" name="Rectangle 1"/>
+          <p:cNvSpPr/>
+          <p:nvPr/>
+        </p:nvSpPr>
+        <p:spPr>
+          <a:xfrm>
+            <a:off x="0" y="0"/>
+            <a:ext cx="12191695" cy="6858000"/>
+          </a:xfrm>
+          <a:prstGeom prst="rect">
+            <a:avLst/>
+          </a:prstGeom>
+          <a:solidFill>
+            <a:srgbClr val="F4F6FA"/>
+          </a:solidFill>
+          <a:ln>
+            <a:noFill/>
+          </a:ln>
+          <a:effectLst/>
+        </p:spPr>
+        <p:style>
+          <a:lnRef idx="1">
+            <a:schemeClr val="accent1"/>
+          </a:lnRef>
+          <a:fillRef idx="3">
+            <a:schemeClr val="accent1"/>
+          </a:fillRef>
+          <a:effectRef idx="2">
+            <a:schemeClr val="accent1"/>
+          </a:effectRef>
+          <a:fontRef idx="minor">
+            <a:schemeClr val="lt1"/>
+          </a:fontRef>
+        </p:style>
+        <p:txBody>
+          <a:bodyPr rtlCol="0" anchor="ctr"/>
+          <a:lstStyle/>
+          <a:p>
+            <a:pPr algn="ctr"/>
+          </a:p>
+        </p:txBody>
+      </p:sp>
+      <p:sp>
+        <p:nvSpPr>
+          <p:cNvPr id="3" name="TextBox 2"/>
+          <p:cNvSpPr txBox="1"/>
+          <p:nvPr/>
+        </p:nvSpPr>
+        <p:spPr>
+          <a:xfrm>
+            <a:off x="548640" y="347472"/>
+            <a:ext cx="10972800" cy="274320"/>
+          </a:xfrm>
+          <a:prstGeom prst="rect">
+            <a:avLst/>
+          </a:prstGeom>
+          <a:noFill/>
+        </p:spPr>
+        <p:txBody>
+          <a:bodyPr wrap="square" lIns="0" rIns="0" tIns="0" bIns="0" anchor="t">
+            <a:spAutoFit/>
+          </a:bodyPr>
+          <a:lstStyle/>
+          <a:p>
+            <a:pPr algn="l">
+              <a:lnSpc>
+                <a:spcPct val="130000"/>
+              </a:lnSpc>
+            </a:pPr>
+            <a:r>
+              <a:rPr sz="1100" b="1" i="0">
+                <a:solidFill>
+                  <a:srgbClr val="2563EB"/>
+                </a:solidFill>
+                <a:latin typeface="Calibri"/>
+              </a:rPr>
+              <a:t>付録 — 想定問答 (Q&amp;A)</a:t>
+            </a:r>
+          </a:p>
+        </p:txBody>
+      </p:sp>
+      <p:sp>
+        <p:nvSpPr>
+          <p:cNvPr id="4" name="TextBox 3"/>
+          <p:cNvSpPr txBox="1"/>
+          <p:nvPr/>
+        </p:nvSpPr>
+        <p:spPr>
+          <a:xfrm>
+            <a:off x="548640" y="621792"/>
+            <a:ext cx="11155680" cy="640080"/>
+          </a:xfrm>
+          <a:prstGeom prst="rect">
+            <a:avLst/>
+          </a:prstGeom>
+          <a:noFill/>
+        </p:spPr>
+        <p:txBody>
+          <a:bodyPr wrap="square" lIns="0" rIns="0" tIns="0" bIns="0" anchor="t">
+            <a:spAutoFit/>
+          </a:bodyPr>
+          <a:lstStyle/>
+          <a:p>
+            <a:pPr algn="l">
+              <a:lnSpc>
+                <a:spcPct val="130000"/>
+              </a:lnSpc>
+            </a:pPr>
+            <a:r>
+              <a:rPr sz="2800" b="1" i="0">
+                <a:solidFill>
+                  <a:srgbClr val="1F2937"/>
+                </a:solidFill>
+                <a:latin typeface="Cambria"/>
+              </a:rPr>
+              <a:t>よくある質問 ③  安全性・未知の攻撃・今後</a:t>
+            </a:r>
+          </a:p>
+        </p:txBody>
+      </p:sp>
+      <p:sp>
+        <p:nvSpPr>
+          <p:cNvPr id="5" name="Rounded Rectangle 4"/>
+          <p:cNvSpPr/>
+          <p:nvPr/>
+        </p:nvSpPr>
+        <p:spPr>
+          <a:xfrm>
+            <a:off x="548640" y="1783080"/>
+            <a:ext cx="11091672" cy="1386840"/>
+          </a:xfrm>
+          <a:prstGeom prst="roundRect">
+            <a:avLst/>
+          </a:prstGeom>
+          <a:solidFill>
+            <a:srgbClr val="FFFFFF"/>
+          </a:solidFill>
+          <a:ln w="9525">
+            <a:solidFill>
+              <a:srgbClr val="DDE3EE"/>
+            </a:solidFill>
+          </a:ln>
+          <a:effectLst/>
+        </p:spPr>
+        <p:style>
+          <a:lnRef idx="1">
+            <a:schemeClr val="accent1"/>
+          </a:lnRef>
+          <a:fillRef idx="3">
+            <a:schemeClr val="accent1"/>
+          </a:fillRef>
+          <a:effectRef idx="2">
+            <a:schemeClr val="accent1"/>
+          </a:effectRef>
+          <a:fontRef idx="minor">
+            <a:schemeClr val="lt1"/>
+          </a:fontRef>
+        </p:style>
+        <p:txBody>
+          <a:bodyPr rtlCol="0" anchor="ctr"/>
+          <a:lstStyle/>
+          <a:p>
+            <a:pPr algn="ctr"/>
+          </a:p>
+        </p:txBody>
+      </p:sp>
+      <p:sp>
+        <p:nvSpPr>
+          <p:cNvPr id="6" name="Rectangle 5"/>
+          <p:cNvSpPr/>
+          <p:nvPr/>
+        </p:nvSpPr>
+        <p:spPr>
+          <a:xfrm>
+            <a:off x="548640" y="1783080"/>
+            <a:ext cx="73152" cy="1386840"/>
+          </a:xfrm>
+          <a:prstGeom prst="rect">
+            <a:avLst/>
+          </a:prstGeom>
+          <a:solidFill>
+            <a:srgbClr val="2563EB"/>
+          </a:solidFill>
+          <a:ln>
+            <a:noFill/>
+          </a:ln>
+          <a:effectLst/>
+        </p:spPr>
+        <p:style>
+          <a:lnRef idx="1">
+            <a:schemeClr val="accent1"/>
+          </a:lnRef>
+          <a:fillRef idx="3">
+            <a:schemeClr val="accent1"/>
+          </a:fillRef>
+          <a:effectRef idx="2">
+            <a:schemeClr val="accent1"/>
+          </a:effectRef>
+          <a:fontRef idx="minor">
+            <a:schemeClr val="lt1"/>
+          </a:fontRef>
+        </p:style>
+        <p:txBody>
+          <a:bodyPr rtlCol="0" anchor="ctr"/>
+          <a:lstStyle/>
+          <a:p>
+            <a:pPr algn="ctr"/>
+          </a:p>
+        </p:txBody>
+      </p:sp>
+      <p:sp>
+        <p:nvSpPr>
+          <p:cNvPr id="7" name="TextBox 6"/>
+          <p:cNvSpPr txBox="1"/>
+          <p:nvPr/>
+        </p:nvSpPr>
+        <p:spPr>
+          <a:xfrm>
+            <a:off x="868680" y="1929384"/>
+            <a:ext cx="10515600" cy="457200"/>
+          </a:xfrm>
+          <a:prstGeom prst="rect">
+            <a:avLst/>
+          </a:prstGeom>
+          <a:noFill/>
+        </p:spPr>
+        <p:txBody>
+          <a:bodyPr wrap="square" lIns="0" rIns="0" tIns="0" bIns="0" anchor="t">
+            <a:spAutoFit/>
+          </a:bodyPr>
+          <a:lstStyle/>
+          <a:p>
+            <a:pPr algn="l">
+              <a:lnSpc>
+                <a:spcPct val="130000"/>
+              </a:lnSpc>
+            </a:pPr>
+            <a:r>
+              <a:rPr sz="1500" b="1" i="0">
+                <a:solidFill>
+                  <a:srgbClr val="1F2937"/>
+                </a:solidFill>
+                <a:latin typeface="Cambria"/>
+              </a:rPr>
+              <a:t>Q.  データは外部に送られない? 安全?</a:t>
+            </a:r>
+          </a:p>
+        </p:txBody>
+      </p:sp>
+      <p:sp>
+        <p:nvSpPr>
+          <p:cNvPr id="8" name="TextBox 7"/>
+          <p:cNvSpPr txBox="1"/>
+          <p:nvPr/>
+        </p:nvSpPr>
+        <p:spPr>
+          <a:xfrm>
+            <a:off x="868680" y="2386584"/>
+            <a:ext cx="10469880" cy="673608"/>
+          </a:xfrm>
+          <a:prstGeom prst="rect">
+            <a:avLst/>
+          </a:prstGeom>
+          <a:noFill/>
+        </p:spPr>
+        <p:txBody>
+          <a:bodyPr wrap="square" lIns="0" rIns="0" tIns="0" bIns="0" anchor="t">
+            <a:spAutoFit/>
+          </a:bodyPr>
+          <a:lstStyle/>
+          <a:p>
+            <a:pPr algn="l">
+              <a:lnSpc>
+                <a:spcPct val="132000"/>
+              </a:lnSpc>
+            </a:pPr>
+            <a:r>
+              <a:rPr sz="1250" b="0" i="0">
+                <a:solidFill>
+                  <a:srgbClr val="5B6472"/>
+                </a:solidFill>
+                <a:latin typeface="Calibri"/>
+              </a:rPr>
+              <a:t>A.  localhost 限定バインドで外部送信なし、追加ソフトも不要。自 PC のライブ解析は管理者権限＋明示チェック時のみ。DNS リバインドや CSRF への対策も実装済み。</a:t>
+            </a:r>
+          </a:p>
+        </p:txBody>
+      </p:sp>
+      <p:sp>
+        <p:nvSpPr>
+          <p:cNvPr id="9" name="Rounded Rectangle 8"/>
+          <p:cNvSpPr/>
+          <p:nvPr/>
+        </p:nvSpPr>
+        <p:spPr>
+          <a:xfrm>
+            <a:off x="548640" y="3316224"/>
+            <a:ext cx="11091672" cy="1386840"/>
+          </a:xfrm>
+          <a:prstGeom prst="roundRect">
+            <a:avLst/>
+          </a:prstGeom>
+          <a:solidFill>
+            <a:srgbClr val="FFFFFF"/>
+          </a:solidFill>
+          <a:ln w="9525">
+            <a:solidFill>
+              <a:srgbClr val="DDE3EE"/>
+            </a:solidFill>
+          </a:ln>
+          <a:effectLst/>
+        </p:spPr>
+        <p:style>
+          <a:lnRef idx="1">
+            <a:schemeClr val="accent1"/>
+          </a:lnRef>
+          <a:fillRef idx="3">
+            <a:schemeClr val="accent1"/>
+          </a:fillRef>
+          <a:effectRef idx="2">
+            <a:schemeClr val="accent1"/>
+          </a:effectRef>
+          <a:fontRef idx="minor">
+            <a:schemeClr val="lt1"/>
+          </a:fontRef>
+        </p:style>
+        <p:txBody>
+          <a:bodyPr rtlCol="0" anchor="ctr"/>
+          <a:lstStyle/>
+          <a:p>
+            <a:pPr algn="ctr"/>
+          </a:p>
+        </p:txBody>
+      </p:sp>
+      <p:sp>
+        <p:nvSpPr>
+          <p:cNvPr id="10" name="Rectangle 9"/>
+          <p:cNvSpPr/>
+          <p:nvPr/>
+        </p:nvSpPr>
+        <p:spPr>
+          <a:xfrm>
+            <a:off x="548640" y="3316224"/>
+            <a:ext cx="73152" cy="1386840"/>
+          </a:xfrm>
+          <a:prstGeom prst="rect">
+            <a:avLst/>
+          </a:prstGeom>
+          <a:solidFill>
+            <a:srgbClr val="2563EB"/>
+          </a:solidFill>
+          <a:ln>
+            <a:noFill/>
+          </a:ln>
+          <a:effectLst/>
+        </p:spPr>
+        <p:style>
+          <a:lnRef idx="1">
+            <a:schemeClr val="accent1"/>
+          </a:lnRef>
+          <a:fillRef idx="3">
+            <a:schemeClr val="accent1"/>
+          </a:fillRef>
+          <a:effectRef idx="2">
+            <a:schemeClr val="accent1"/>
+          </a:effectRef>
+          <a:fontRef idx="minor">
+            <a:schemeClr val="lt1"/>
+          </a:fontRef>
+        </p:style>
+        <p:txBody>
+          <a:bodyPr rtlCol="0" anchor="ctr"/>
+          <a:lstStyle/>
+          <a:p>
+            <a:pPr algn="ctr"/>
+          </a:p>
+        </p:txBody>
+      </p:sp>
+      <p:sp>
+        <p:nvSpPr>
+          <p:cNvPr id="11" name="TextBox 10"/>
+          <p:cNvSpPr txBox="1"/>
+          <p:nvPr/>
+        </p:nvSpPr>
+        <p:spPr>
+          <a:xfrm>
+            <a:off x="868680" y="3462528"/>
+            <a:ext cx="10515600" cy="457200"/>
+          </a:xfrm>
+          <a:prstGeom prst="rect">
+            <a:avLst/>
+          </a:prstGeom>
+          <a:noFill/>
+        </p:spPr>
+        <p:txBody>
+          <a:bodyPr wrap="square" lIns="0" rIns="0" tIns="0" bIns="0" anchor="t">
+            <a:spAutoFit/>
+          </a:bodyPr>
+          <a:lstStyle/>
+          <a:p>
+            <a:pPr algn="l">
+              <a:lnSpc>
+                <a:spcPct val="130000"/>
+              </a:lnSpc>
+            </a:pPr>
+            <a:r>
+              <a:rPr sz="1500" b="1" i="0">
+                <a:solidFill>
+                  <a:srgbClr val="1F2937"/>
+                </a:solidFill>
+                <a:latin typeface="Cambria"/>
+              </a:rPr>
+              <a:t>Q.  未知の攻撃 (ゼロデイ) は検知できる?</a:t>
+            </a:r>
+          </a:p>
+        </p:txBody>
+      </p:sp>
+      <p:sp>
+        <p:nvSpPr>
+          <p:cNvPr id="12" name="TextBox 11"/>
+          <p:cNvSpPr txBox="1"/>
+          <p:nvPr/>
+        </p:nvSpPr>
+        <p:spPr>
+          <a:xfrm>
+            <a:off x="868680" y="3919728"/>
+            <a:ext cx="10469880" cy="673608"/>
+          </a:xfrm>
+          <a:prstGeom prst="rect">
+            <a:avLst/>
+          </a:prstGeom>
+          <a:noFill/>
+        </p:spPr>
+        <p:txBody>
+          <a:bodyPr wrap="square" lIns="0" rIns="0" tIns="0" bIns="0" anchor="t">
+            <a:spAutoFit/>
+          </a:bodyPr>
+          <a:lstStyle/>
+          <a:p>
+            <a:pPr algn="l">
+              <a:lnSpc>
+                <a:spcPct val="132000"/>
+              </a:lnSpc>
+            </a:pPr>
+            <a:r>
+              <a:rPr sz="1250" b="0" i="0">
+                <a:solidFill>
+                  <a:srgbClr val="5B6472"/>
+                </a:solidFill>
+                <a:latin typeface="Calibri"/>
+              </a:rPr>
+              <a:t>A.  ルールは既知の手口に強い。未知は振る舞い分析（急増・拡散・沈黙・時間外）で「いつもと違う」を拾う、という二段構えでカバーする。</a:t>
+            </a:r>
+          </a:p>
+        </p:txBody>
+      </p:sp>
+      <p:sp>
+        <p:nvSpPr>
+          <p:cNvPr id="13" name="Rounded Rectangle 12"/>
+          <p:cNvSpPr/>
+          <p:nvPr/>
+        </p:nvSpPr>
+        <p:spPr>
+          <a:xfrm>
+            <a:off x="548640" y="4849368"/>
+            <a:ext cx="11091672" cy="1386840"/>
+          </a:xfrm>
+          <a:prstGeom prst="roundRect">
+            <a:avLst/>
+          </a:prstGeom>
+          <a:solidFill>
+            <a:srgbClr val="FFFFFF"/>
+          </a:solidFill>
+          <a:ln w="9525">
+            <a:solidFill>
+              <a:srgbClr val="DDE3EE"/>
+            </a:solidFill>
+          </a:ln>
+          <a:effectLst/>
+        </p:spPr>
+        <p:style>
+          <a:lnRef idx="1">
+            <a:schemeClr val="accent1"/>
+          </a:lnRef>
+          <a:fillRef idx="3">
+            <a:schemeClr val="accent1"/>
+          </a:fillRef>
+          <a:effectRef idx="2">
+            <a:schemeClr val="accent1"/>
+          </a:effectRef>
+          <a:fontRef idx="minor">
+            <a:schemeClr val="lt1"/>
+          </a:fontRef>
+        </p:style>
+        <p:txBody>
+          <a:bodyPr rtlCol="0" anchor="ctr"/>
+          <a:lstStyle/>
+          <a:p>
+            <a:pPr algn="ctr"/>
+          </a:p>
+        </p:txBody>
+      </p:sp>
+      <p:sp>
+        <p:nvSpPr>
+          <p:cNvPr id="14" name="Rectangle 13"/>
+          <p:cNvSpPr/>
+          <p:nvPr/>
+        </p:nvSpPr>
+        <p:spPr>
+          <a:xfrm>
+            <a:off x="548640" y="4849368"/>
+            <a:ext cx="73152" cy="1386840"/>
+          </a:xfrm>
+          <a:prstGeom prst="rect">
+            <a:avLst/>
+          </a:prstGeom>
+          <a:solidFill>
+            <a:srgbClr val="2563EB"/>
+          </a:solidFill>
+          <a:ln>
+            <a:noFill/>
+          </a:ln>
+          <a:effectLst/>
+        </p:spPr>
+        <p:style>
+          <a:lnRef idx="1">
+            <a:schemeClr val="accent1"/>
+          </a:lnRef>
+          <a:fillRef idx="3">
+            <a:schemeClr val="accent1"/>
+          </a:fillRef>
+          <a:effectRef idx="2">
+            <a:schemeClr val="accent1"/>
+          </a:effectRef>
+          <a:fontRef idx="minor">
+            <a:schemeClr val="lt1"/>
+          </a:fontRef>
+        </p:style>
+        <p:txBody>
+          <a:bodyPr rtlCol="0" anchor="ctr"/>
+          <a:lstStyle/>
+          <a:p>
+            <a:pPr algn="ctr"/>
+          </a:p>
+        </p:txBody>
+      </p:sp>
+      <p:sp>
+        <p:nvSpPr>
+          <p:cNvPr id="15" name="TextBox 14"/>
+          <p:cNvSpPr txBox="1"/>
+          <p:nvPr/>
+        </p:nvSpPr>
+        <p:spPr>
+          <a:xfrm>
+            <a:off x="868680" y="4995672"/>
+            <a:ext cx="10515600" cy="457200"/>
+          </a:xfrm>
+          <a:prstGeom prst="rect">
+            <a:avLst/>
+          </a:prstGeom>
+          <a:noFill/>
+        </p:spPr>
+        <p:txBody>
+          <a:bodyPr wrap="square" lIns="0" rIns="0" tIns="0" bIns="0" anchor="t">
+            <a:spAutoFit/>
+          </a:bodyPr>
+          <a:lstStyle/>
+          <a:p>
+            <a:pPr algn="l">
+              <a:lnSpc>
+                <a:spcPct val="130000"/>
+              </a:lnSpc>
+            </a:pPr>
+            <a:r>
+              <a:rPr sz="1500" b="1" i="0">
+                <a:solidFill>
+                  <a:srgbClr val="1F2937"/>
+                </a:solidFill>
+                <a:latin typeface="Cambria"/>
+              </a:rPr>
+              <a:t>Q.  今後の発展は?</a:t>
+            </a:r>
+          </a:p>
+        </p:txBody>
+      </p:sp>
+      <p:sp>
+        <p:nvSpPr>
+          <p:cNvPr id="16" name="TextBox 15"/>
+          <p:cNvSpPr txBox="1"/>
+          <p:nvPr/>
+        </p:nvSpPr>
+        <p:spPr>
+          <a:xfrm>
+            <a:off x="868680" y="5452872"/>
+            <a:ext cx="10469880" cy="673608"/>
+          </a:xfrm>
+          <a:prstGeom prst="rect">
+            <a:avLst/>
+          </a:prstGeom>
+          <a:noFill/>
+        </p:spPr>
+        <p:txBody>
+          <a:bodyPr wrap="square" lIns="0" rIns="0" tIns="0" bIns="0" anchor="t">
+            <a:spAutoFit/>
+          </a:bodyPr>
+          <a:lstStyle/>
+          <a:p>
+            <a:pPr algn="l">
+              <a:lnSpc>
+                <a:spcPct val="132000"/>
+              </a:lnSpc>
+            </a:pPr>
+            <a:r>
+              <a:rPr sz="1250" b="0" i="0">
+                <a:solidFill>
+                  <a:srgbClr val="5B6472"/>
+                </a:solidFill>
+                <a:latin typeface="Calibri"/>
+              </a:rPr>
+              <a:t>A.  時間の流れを追った相関分析（「A の後に B が起きたら怪しい」）や、AI による検知ルールの自動生成へ。</a:t>
+            </a:r>
+          </a:p>
+        </p:txBody>
+      </p:sp>
+      <p:sp>
+        <p:nvSpPr>
+          <p:cNvPr id="17" name="TextBox 16"/>
+          <p:cNvSpPr txBox="1"/>
+          <p:nvPr/>
+        </p:nvSpPr>
+        <p:spPr>
+          <a:xfrm>
+            <a:off x="10972800" y="6446520"/>
+            <a:ext cx="914400" cy="274320"/>
+          </a:xfrm>
+          <a:prstGeom prst="rect">
+            <a:avLst/>
+          </a:prstGeom>
+          <a:noFill/>
+        </p:spPr>
+        <p:txBody>
+          <a:bodyPr wrap="square" lIns="0" rIns="0" tIns="0" bIns="0" anchor="t">
+            <a:spAutoFit/>
+          </a:bodyPr>
+          <a:lstStyle/>
+          <a:p>
+            <a:pPr algn="r">
+              <a:lnSpc>
+                <a:spcPct val="130000"/>
+              </a:lnSpc>
+            </a:pPr>
+            <a:r>
+              <a:rPr sz="900" b="0" i="0">
+                <a:solidFill>
+                  <a:srgbClr val="5B6472"/>
+                </a:solidFill>
+                <a:latin typeface="Calibri"/>
+              </a:rPr>
+              <a:t>付録</a:t>
+            </a:r>
+          </a:p>
+        </p:txBody>
+      </p:sp>
+    </p:spTree>
+  </p:cSld>
+  <p:clrMapOvr>
+    <a:masterClrMapping/>
+  </p:clrMapOvr>
+</p:sld>
+</file>
+
 <file path=ppt/slides/slide2.xml><?xml version="1.0" encoding="utf-8"?>
 <p:sld xmlns:a="http://schemas.openxmlformats.org/drawingml/2006/main" xmlns:p="http://schemas.openxmlformats.org/presentationml/2006/main" xmlns:r="http://schemas.openxmlformats.org/officeDocument/2006/relationships">
   <p:cSld>
@@ -17160,7 +19212,7 @@
                 </a:solidFill>
                 <a:latin typeface="Calibri"/>
               </a:rPr>
-              <a:t>ゼロから開発 (約 8,000 行)</a:t>
+              <a:t>ゼロから開発</a:t>
             </a:r>
           </a:p>
         </p:txBody>

--- a/docs/presentation/pptx/hayabusa-plus.pptx
+++ b/docs/presentation/pptx/hayabusa-plus.pptx
@@ -24,6 +24,7 @@
     <p:sldId id="272" r:id="rId23"/>
     <p:sldId id="273" r:id="rId24"/>
     <p:sldId id="274" r:id="rId25"/>
+    <p:sldId id="275" r:id="rId26"/>
   </p:sldIdLst>
   <p:sldSz cx="12191695" cy="6858000" type="screen4x3"/>
   <p:notesSz cx="6858000" cy="9144000"/>
@@ -925,12 +926,17 @@
           <a:lstStyle/>
           <a:p>
             <a:r>
-              <a:t>まとめます。エンジンに lookup という新しい文法を追加し、検知ルールを 13 本自作、結果を読み解く GUI を新たに開発し、悪いものリスト約 8 万件を自動で取り込んで照合できるようにしました。</a:t>
-            </a:r>
-          </a:p>
-          <a:p>
-            <a:r>
-              <a:t>今後は、時間の流れを追った相関分析 (「A の後に B が起きたら怪しい」) や、AI による検知ルールの自動生成に進めたいと考えています。</a:t>
+              <a:t>研究として「で、効果は?」に答えるスライドです。</a:t>
+            </a:r>
+          </a:p>
+          <a:p>
+            <a:r>
+              <a:t>核心の自作 lookup 拡張は、既知の悪用ドライバのハッシュを仕込んだ検証用ログで critical 検知を確認できました ── ルール本文を変えずに外部リスト側だけで検知できる、という仕組みの実証です。</a:t>
+            </a:r>
+          </a:p>
+          <a:p>
+            <a:r>
+              <a:t>さらに公開されている攻撃サンプル 6 種を読み込ませると 5 種で脅威を検知。なおここでの発火は上流ルールと自作分の合算で、自作 13 ルールは対応する痕跡を含むログで鳴る設計、という点も正直に添えてあります。</a:t>
             </a:r>
           </a:p>
         </p:txBody>
@@ -1000,12 +1006,12 @@
           <a:lstStyle/>
           <a:p>
             <a:r>
-              <a:t>以上です。ありがとうございました。</a:t>
-            </a:r>
-          </a:p>
-          <a:p>
-            <a:r>
-              <a:t>成果物はすべて GitHub で公開しているので、お手元の Windows PC のログでぜひ一度試してみてください。ご質問・フィードバックをお願いします。</a:t>
+              <a:t>まとめます。エンジンに lookup という新しい文法を追加し、検知ルールを 13 本自作、結果を読み解く GUI を新たに開発し、悪いものリスト約 8 万件を自動で取り込んで照合できるようにしました。</a:t>
+            </a:r>
+          </a:p>
+          <a:p>
+            <a:r>
+              <a:t>今後は、時間の流れを追った相関分析 (「A の後に B が起きたら怪しい」) や、AI による検知ルールの自動生成に進めたいと考えています。</a:t>
             </a:r>
           </a:p>
         </p:txBody>
@@ -1031,6 +1037,81 @@
 </file>
 
 <file path=ppt/notesSlides/notesSlide16.xml><?xml version="1.0" encoding="utf-8"?>
+<p:notes xmlns:a="http://schemas.openxmlformats.org/drawingml/2006/main" xmlns:p="http://schemas.openxmlformats.org/presentationml/2006/main" xmlns:r="http://schemas.openxmlformats.org/officeDocument/2006/relationships">
+  <p:cSld>
+    <p:spTree>
+      <p:nvGrpSpPr>
+        <p:cNvPr id="1" name=""/>
+        <p:cNvGrpSpPr/>
+        <p:nvPr/>
+      </p:nvGrpSpPr>
+      <p:grpSpPr>
+        <a:xfrm>
+          <a:off x="0" y="0"/>
+          <a:ext cx="0" cy="0"/>
+          <a:chOff x="0" y="0"/>
+          <a:chExt cx="0" cy="0"/>
+        </a:xfrm>
+      </p:grpSpPr>
+      <p:sp>
+        <p:nvSpPr>
+          <p:cNvPr id="2" name="Slide Image Placeholder 1"/>
+          <p:cNvSpPr>
+            <a:spLocks noGrp="1"/>
+          </p:cNvSpPr>
+          <p:nvPr>
+            <p:ph type="sldImg" idx="2"/>
+          </p:nvPr>
+        </p:nvSpPr>
+        <p:spPr/>
+      </p:sp>
+      <p:sp>
+        <p:nvSpPr>
+          <p:cNvPr id="3" name="Notes Placeholder 2"/>
+          <p:cNvSpPr>
+            <a:spLocks noGrp="1"/>
+          </p:cNvSpPr>
+          <p:nvPr>
+            <p:ph type="body" idx="3" sz="quarter"/>
+          </p:nvPr>
+        </p:nvSpPr>
+        <p:spPr/>
+        <p:txBody>
+          <a:bodyPr/>
+          <a:lstStyle/>
+          <a:p>
+            <a:r>
+              <a:t>以上です。ありがとうございました。</a:t>
+            </a:r>
+          </a:p>
+          <a:p>
+            <a:r>
+              <a:t>成果物はすべて GitHub で公開しているので、お手元の Windows PC のログでぜひ一度試してみてください。ご質問・フィードバックをお願いします。</a:t>
+            </a:r>
+          </a:p>
+        </p:txBody>
+      </p:sp>
+      <p:sp>
+        <p:nvSpPr>
+          <p:cNvPr id="4" name="Slide Number Placeholder 3"/>
+          <p:cNvSpPr>
+            <a:spLocks noGrp="1"/>
+          </p:cNvSpPr>
+          <p:nvPr>
+            <p:ph type="sldNum" idx="5" sz="quarter"/>
+          </p:nvPr>
+        </p:nvSpPr>
+        <p:spPr/>
+      </p:sp>
+    </p:spTree>
+  </p:cSld>
+  <p:clrMapOvr>
+    <a:masterClrMapping/>
+  </p:clrMapOvr>
+</p:notes>
+</file>
+
+<file path=ppt/notesSlides/notesSlide17.xml><?xml version="1.0" encoding="utf-8"?>
 <p:notes xmlns:a="http://schemas.openxmlformats.org/drawingml/2006/main" xmlns:p="http://schemas.openxmlformats.org/presentationml/2006/main" xmlns:r="http://schemas.openxmlformats.org/officeDocument/2006/relationships">
   <p:cSld>
     <p:spTree>
@@ -5058,7 +5139,7 @@
         </p:nvSpPr>
         <p:spPr>
           <a:xfrm>
-            <a:off x="548640" y="6217920"/>
+            <a:off x="548640" y="5943600"/>
             <a:ext cx="10972800" cy="365760"/>
           </a:xfrm>
           <a:prstGeom prst="rect">
@@ -5078,7 +5159,46 @@
               </a:lnSpc>
             </a:pPr>
             <a:r>
-              <a:rPr sz="1300" b="0" i="0">
+              <a:rPr sz="1500" b="0" i="0">
+                <a:solidFill>
+                  <a:srgbClr val="FFFFFF"/>
+                </a:solidFill>
+                <a:latin typeface="Calibri"/>
+              </a:rPr>
+              <a:t>発表者: （氏名）   ・   所属: （学科 / 研究室）   ・   2026-06-18</a:t>
+            </a:r>
+          </a:p>
+        </p:txBody>
+      </p:sp>
+      <p:sp>
+        <p:nvSpPr>
+          <p:cNvPr id="11" name="TextBox 10"/>
+          <p:cNvSpPr txBox="1"/>
+          <p:nvPr/>
+        </p:nvSpPr>
+        <p:spPr>
+          <a:xfrm>
+            <a:off x="548640" y="6355080"/>
+            <a:ext cx="10972800" cy="320040"/>
+          </a:xfrm>
+          <a:prstGeom prst="rect">
+            <a:avLst/>
+          </a:prstGeom>
+          <a:noFill/>
+        </p:spPr>
+        <p:txBody>
+          <a:bodyPr wrap="square" lIns="0" rIns="0" tIns="0" bIns="0" anchor="t">
+            <a:spAutoFit/>
+          </a:bodyPr>
+          <a:lstStyle/>
+          <a:p>
+            <a:pPr algn="ctr">
+              <a:lnSpc>
+                <a:spcPct val="130000"/>
+              </a:lnSpc>
+            </a:pPr>
+            <a:r>
+              <a:rPr sz="1200" b="0" i="0">
                 <a:solidFill>
                   <a:srgbClr val="CADCFC"/>
                 </a:solidFill>
@@ -6852,7 +6972,7 @@
                 </a:solidFill>
                 <a:latin typeface="Calibri"/>
               </a:rPr>
-              <a:t>10 / 15</a:t>
+              <a:t>10 / 16</a:t>
             </a:r>
           </a:p>
         </p:txBody>
@@ -7724,7 +7844,7 @@
                 </a:solidFill>
                 <a:latin typeface="Calibri"/>
               </a:rPr>
-              <a:t>11 / 15</a:t>
+              <a:t>11 / 16</a:t>
             </a:r>
           </a:p>
         </p:txBody>
@@ -9178,7 +9298,7 @@
                 </a:solidFill>
                 <a:latin typeface="Calibri"/>
               </a:rPr>
-              <a:t>12 / 15</a:t>
+              <a:t>12 / 16</a:t>
             </a:r>
           </a:p>
         </p:txBody>
@@ -9192,6 +9312,1452 @@
 </file>
 
 <file path=ppt/slides/slide13.xml><?xml version="1.0" encoding="utf-8"?>
+<p:sld xmlns:a="http://schemas.openxmlformats.org/drawingml/2006/main" xmlns:p="http://schemas.openxmlformats.org/presentationml/2006/main" xmlns:r="http://schemas.openxmlformats.org/officeDocument/2006/relationships">
+  <p:cSld>
+    <p:spTree>
+      <p:nvGrpSpPr>
+        <p:cNvPr id="1" name=""/>
+        <p:cNvGrpSpPr/>
+        <p:nvPr/>
+      </p:nvGrpSpPr>
+      <p:grpSpPr/>
+      <p:sp>
+        <p:nvSpPr>
+          <p:cNvPr id="2" name="Rectangle 1"/>
+          <p:cNvSpPr/>
+          <p:nvPr/>
+        </p:nvSpPr>
+        <p:spPr>
+          <a:xfrm>
+            <a:off x="0" y="0"/>
+            <a:ext cx="12191695" cy="6858000"/>
+          </a:xfrm>
+          <a:prstGeom prst="rect">
+            <a:avLst/>
+          </a:prstGeom>
+          <a:solidFill>
+            <a:srgbClr val="F4F6FA"/>
+          </a:solidFill>
+          <a:ln>
+            <a:noFill/>
+          </a:ln>
+          <a:effectLst/>
+        </p:spPr>
+        <p:style>
+          <a:lnRef idx="1">
+            <a:schemeClr val="accent1"/>
+          </a:lnRef>
+          <a:fillRef idx="3">
+            <a:schemeClr val="accent1"/>
+          </a:fillRef>
+          <a:effectRef idx="2">
+            <a:schemeClr val="accent1"/>
+          </a:effectRef>
+          <a:fontRef idx="minor">
+            <a:schemeClr val="lt1"/>
+          </a:fontRef>
+        </p:style>
+        <p:txBody>
+          <a:bodyPr rtlCol="0" anchor="ctr"/>
+          <a:lstStyle/>
+          <a:p>
+            <a:pPr algn="ctr"/>
+          </a:p>
+        </p:txBody>
+      </p:sp>
+      <p:sp>
+        <p:nvSpPr>
+          <p:cNvPr id="3" name="TextBox 2"/>
+          <p:cNvSpPr txBox="1"/>
+          <p:nvPr/>
+        </p:nvSpPr>
+        <p:spPr>
+          <a:xfrm>
+            <a:off x="548640" y="347472"/>
+            <a:ext cx="10972800" cy="274320"/>
+          </a:xfrm>
+          <a:prstGeom prst="rect">
+            <a:avLst/>
+          </a:prstGeom>
+          <a:noFill/>
+        </p:spPr>
+        <p:txBody>
+          <a:bodyPr wrap="square" lIns="0" rIns="0" tIns="0" bIns="0" anchor="t">
+            <a:spAutoFit/>
+          </a:bodyPr>
+          <a:lstStyle/>
+          <a:p>
+            <a:pPr algn="l">
+              <a:lnSpc>
+                <a:spcPct val="130000"/>
+              </a:lnSpc>
+            </a:pPr>
+            <a:r>
+              <a:rPr sz="1100" b="1" i="0">
+                <a:solidFill>
+                  <a:srgbClr val="2563EB"/>
+                </a:solidFill>
+                <a:latin typeface="Calibri"/>
+              </a:rPr>
+              <a:t>評価 (実測)</a:t>
+            </a:r>
+          </a:p>
+        </p:txBody>
+      </p:sp>
+      <p:sp>
+        <p:nvSpPr>
+          <p:cNvPr id="4" name="TextBox 3"/>
+          <p:cNvSpPr txBox="1"/>
+          <p:nvPr/>
+        </p:nvSpPr>
+        <p:spPr>
+          <a:xfrm>
+            <a:off x="548640" y="621792"/>
+            <a:ext cx="11155680" cy="640080"/>
+          </a:xfrm>
+          <a:prstGeom prst="rect">
+            <a:avLst/>
+          </a:prstGeom>
+          <a:noFill/>
+        </p:spPr>
+        <p:txBody>
+          <a:bodyPr wrap="square" lIns="0" rIns="0" tIns="0" bIns="0" anchor="t">
+            <a:spAutoFit/>
+          </a:bodyPr>
+          <a:lstStyle/>
+          <a:p>
+            <a:pPr algn="l">
+              <a:lnSpc>
+                <a:spcPct val="130000"/>
+              </a:lnSpc>
+            </a:pPr>
+            <a:r>
+              <a:rPr sz="2800" b="1" i="0">
+                <a:solidFill>
+                  <a:srgbClr val="1F2937"/>
+                </a:solidFill>
+                <a:latin typeface="Cambria"/>
+              </a:rPr>
+              <a:t>検証 — 実際に検知できるか</a:t>
+            </a:r>
+          </a:p>
+        </p:txBody>
+      </p:sp>
+      <p:sp>
+        <p:nvSpPr>
+          <p:cNvPr id="5" name="Rounded Rectangle 4"/>
+          <p:cNvSpPr/>
+          <p:nvPr/>
+        </p:nvSpPr>
+        <p:spPr>
+          <a:xfrm>
+            <a:off x="548640" y="1691640"/>
+            <a:ext cx="5486400" cy="4160520"/>
+          </a:xfrm>
+          <a:prstGeom prst="roundRect">
+            <a:avLst/>
+          </a:prstGeom>
+          <a:solidFill>
+            <a:srgbClr val="FFFFFF"/>
+          </a:solidFill>
+          <a:ln w="9525">
+            <a:solidFill>
+              <a:srgbClr val="DDE3EE"/>
+            </a:solidFill>
+          </a:ln>
+          <a:effectLst/>
+        </p:spPr>
+        <p:style>
+          <a:lnRef idx="1">
+            <a:schemeClr val="accent1"/>
+          </a:lnRef>
+          <a:fillRef idx="3">
+            <a:schemeClr val="accent1"/>
+          </a:fillRef>
+          <a:effectRef idx="2">
+            <a:schemeClr val="accent1"/>
+          </a:effectRef>
+          <a:fontRef idx="minor">
+            <a:schemeClr val="lt1"/>
+          </a:fontRef>
+        </p:style>
+        <p:txBody>
+          <a:bodyPr rtlCol="0" anchor="ctr"/>
+          <a:lstStyle/>
+          <a:p>
+            <a:pPr algn="ctr"/>
+          </a:p>
+        </p:txBody>
+      </p:sp>
+      <p:sp>
+        <p:nvSpPr>
+          <p:cNvPr id="6" name="Rectangle 5"/>
+          <p:cNvSpPr/>
+          <p:nvPr/>
+        </p:nvSpPr>
+        <p:spPr>
+          <a:xfrm>
+            <a:off x="548640" y="1691640"/>
+            <a:ext cx="73152" cy="4160520"/>
+          </a:xfrm>
+          <a:prstGeom prst="rect">
+            <a:avLst/>
+          </a:prstGeom>
+          <a:solidFill>
+            <a:srgbClr val="2563EB"/>
+          </a:solidFill>
+          <a:ln>
+            <a:noFill/>
+          </a:ln>
+          <a:effectLst/>
+        </p:spPr>
+        <p:style>
+          <a:lnRef idx="1">
+            <a:schemeClr val="accent1"/>
+          </a:lnRef>
+          <a:fillRef idx="3">
+            <a:schemeClr val="accent1"/>
+          </a:fillRef>
+          <a:effectRef idx="2">
+            <a:schemeClr val="accent1"/>
+          </a:effectRef>
+          <a:fontRef idx="minor">
+            <a:schemeClr val="lt1"/>
+          </a:fontRef>
+        </p:style>
+        <p:txBody>
+          <a:bodyPr rtlCol="0" anchor="ctr"/>
+          <a:lstStyle/>
+          <a:p>
+            <a:pPr algn="ctr"/>
+          </a:p>
+        </p:txBody>
+      </p:sp>
+      <p:sp>
+        <p:nvSpPr>
+          <p:cNvPr id="7" name="TextBox 6"/>
+          <p:cNvSpPr txBox="1"/>
+          <p:nvPr/>
+        </p:nvSpPr>
+        <p:spPr>
+          <a:xfrm>
+            <a:off x="822960" y="1874519"/>
+            <a:ext cx="5029200" cy="457200"/>
+          </a:xfrm>
+          <a:prstGeom prst="rect">
+            <a:avLst/>
+          </a:prstGeom>
+          <a:noFill/>
+        </p:spPr>
+        <p:txBody>
+          <a:bodyPr wrap="square" lIns="0" rIns="0" tIns="0" bIns="0" anchor="t">
+            <a:spAutoFit/>
+          </a:bodyPr>
+          <a:lstStyle/>
+          <a:p>
+            <a:pPr algn="l">
+              <a:lnSpc>
+                <a:spcPct val="130000"/>
+              </a:lnSpc>
+            </a:pPr>
+            <a:r>
+              <a:rPr sz="1600" b="1" i="0">
+                <a:solidFill>
+                  <a:srgbClr val="1D4ED8"/>
+                </a:solidFill>
+                <a:latin typeface="Cambria"/>
+              </a:rPr>
+              <a:t>① 自作エンジン拡張 (lookup) の検証</a:t>
+            </a:r>
+          </a:p>
+        </p:txBody>
+      </p:sp>
+      <p:sp>
+        <p:nvSpPr>
+          <p:cNvPr id="8" name="TextBox 7"/>
+          <p:cNvSpPr txBox="1"/>
+          <p:nvPr/>
+        </p:nvSpPr>
+        <p:spPr>
+          <a:xfrm>
+            <a:off x="868680" y="2423160"/>
+            <a:ext cx="4937760" cy="731520"/>
+          </a:xfrm>
+          <a:prstGeom prst="rect">
+            <a:avLst/>
+          </a:prstGeom>
+          <a:noFill/>
+        </p:spPr>
+        <p:txBody>
+          <a:bodyPr wrap="square" lIns="0" rIns="0" tIns="0" bIns="0" anchor="t">
+            <a:spAutoFit/>
+          </a:bodyPr>
+          <a:lstStyle/>
+          <a:p>
+            <a:pPr algn="l">
+              <a:lnSpc>
+                <a:spcPct val="135000"/>
+              </a:lnSpc>
+            </a:pPr>
+            <a:r>
+              <a:rPr sz="1250" b="0" i="0">
+                <a:solidFill>
+                  <a:srgbClr val="1F2937"/>
+                </a:solidFill>
+                <a:latin typeface="Calibri"/>
+              </a:rPr>
+              <a:t>• 既知の「悪用ドライバ」ハッシュを仕込んだ
+検証用ログ (Sysmon EID 6) を解析</a:t>
+            </a:r>
+          </a:p>
+        </p:txBody>
+      </p:sp>
+      <p:sp>
+        <p:nvSpPr>
+          <p:cNvPr id="9" name="TextBox 8"/>
+          <p:cNvSpPr txBox="1"/>
+          <p:nvPr/>
+        </p:nvSpPr>
+        <p:spPr>
+          <a:xfrm>
+            <a:off x="868680" y="3291839"/>
+            <a:ext cx="4937760" cy="731520"/>
+          </a:xfrm>
+          <a:prstGeom prst="rect">
+            <a:avLst/>
+          </a:prstGeom>
+          <a:noFill/>
+        </p:spPr>
+        <p:txBody>
+          <a:bodyPr wrap="square" lIns="0" rIns="0" tIns="0" bIns="0" anchor="t">
+            <a:spAutoFit/>
+          </a:bodyPr>
+          <a:lstStyle/>
+          <a:p>
+            <a:pPr algn="l">
+              <a:lnSpc>
+                <a:spcPct val="135000"/>
+              </a:lnSpc>
+            </a:pPr>
+            <a:r>
+              <a:rPr sz="1250" b="0" i="0">
+                <a:solidFill>
+                  <a:srgbClr val="1F2937"/>
+                </a:solidFill>
+                <a:latin typeface="Calibri"/>
+              </a:rPr>
+              <a:t>• → ルール本文は 1 行も変えず、外部 IoC
+   リスト側だけで照合</a:t>
+            </a:r>
+          </a:p>
+        </p:txBody>
+      </p:sp>
+      <p:sp>
+        <p:nvSpPr>
+          <p:cNvPr id="10" name="Rounded Rectangle 9"/>
+          <p:cNvSpPr/>
+          <p:nvPr/>
+        </p:nvSpPr>
+        <p:spPr>
+          <a:xfrm>
+            <a:off x="868680" y="4160520"/>
+            <a:ext cx="4846320" cy="960120"/>
+          </a:xfrm>
+          <a:prstGeom prst="roundRect">
+            <a:avLst/>
+          </a:prstGeom>
+          <a:solidFill>
+            <a:srgbClr val="0F172A"/>
+          </a:solidFill>
+          <a:ln w="9525">
+            <a:solidFill>
+              <a:srgbClr val="0F172A"/>
+            </a:solidFill>
+          </a:ln>
+          <a:effectLst/>
+        </p:spPr>
+        <p:style>
+          <a:lnRef idx="1">
+            <a:schemeClr val="accent1"/>
+          </a:lnRef>
+          <a:fillRef idx="3">
+            <a:schemeClr val="accent1"/>
+          </a:fillRef>
+          <a:effectRef idx="2">
+            <a:schemeClr val="accent1"/>
+          </a:effectRef>
+          <a:fontRef idx="minor">
+            <a:schemeClr val="lt1"/>
+          </a:fontRef>
+        </p:style>
+        <p:txBody>
+          <a:bodyPr rtlCol="0" anchor="ctr"/>
+          <a:lstStyle/>
+          <a:p>
+            <a:pPr algn="ctr"/>
+          </a:p>
+        </p:txBody>
+      </p:sp>
+      <p:sp>
+        <p:nvSpPr>
+          <p:cNvPr id="11" name="TextBox 10"/>
+          <p:cNvSpPr txBox="1"/>
+          <p:nvPr/>
+        </p:nvSpPr>
+        <p:spPr>
+          <a:xfrm>
+            <a:off x="1051560" y="4279392"/>
+            <a:ext cx="4480560" cy="274320"/>
+          </a:xfrm>
+          <a:prstGeom prst="rect">
+            <a:avLst/>
+          </a:prstGeom>
+          <a:noFill/>
+        </p:spPr>
+        <p:txBody>
+          <a:bodyPr wrap="square" lIns="0" rIns="0" tIns="0" bIns="0" anchor="t">
+            <a:spAutoFit/>
+          </a:bodyPr>
+          <a:lstStyle/>
+          <a:p>
+            <a:pPr algn="l">
+              <a:lnSpc>
+                <a:spcPct val="130000"/>
+              </a:lnSpc>
+            </a:pPr>
+            <a:r>
+              <a:rPr sz="1000" b="0" i="0">
+                <a:solidFill>
+                  <a:srgbClr val="94A3B8"/>
+                </a:solidFill>
+                <a:latin typeface="Consolas"/>
+              </a:rPr>
+              <a:t>実測結果</a:t>
+            </a:r>
+          </a:p>
+        </p:txBody>
+      </p:sp>
+      <p:sp>
+        <p:nvSpPr>
+          <p:cNvPr id="12" name="TextBox 11"/>
+          <p:cNvSpPr txBox="1"/>
+          <p:nvPr/>
+        </p:nvSpPr>
+        <p:spPr>
+          <a:xfrm>
+            <a:off x="1051560" y="4553712"/>
+            <a:ext cx="4480560" cy="292608"/>
+          </a:xfrm>
+          <a:prstGeom prst="rect">
+            <a:avLst/>
+          </a:prstGeom>
+          <a:noFill/>
+        </p:spPr>
+        <p:txBody>
+          <a:bodyPr wrap="square" lIns="0" rIns="0" tIns="0" bIns="0" anchor="t">
+            <a:spAutoFit/>
+          </a:bodyPr>
+          <a:lstStyle/>
+          <a:p>
+            <a:pPr algn="l">
+              <a:lnSpc>
+                <a:spcPct val="130000"/>
+              </a:lnSpc>
+            </a:pPr>
+            <a:r>
+              <a:rPr sz="1300" b="0" i="0">
+                <a:solidFill>
+                  <a:srgbClr val="7DD3FC"/>
+                </a:solidFill>
+                <a:latin typeface="Consolas"/>
+              </a:rPr>
+              <a:t>level = critical</a:t>
+            </a:r>
+          </a:p>
+        </p:txBody>
+      </p:sp>
+      <p:sp>
+        <p:nvSpPr>
+          <p:cNvPr id="13" name="TextBox 12"/>
+          <p:cNvSpPr txBox="1"/>
+          <p:nvPr/>
+        </p:nvSpPr>
+        <p:spPr>
+          <a:xfrm>
+            <a:off x="1051560" y="4846320"/>
+            <a:ext cx="4480560" cy="292608"/>
+          </a:xfrm>
+          <a:prstGeom prst="rect">
+            <a:avLst/>
+          </a:prstGeom>
+          <a:noFill/>
+        </p:spPr>
+        <p:txBody>
+          <a:bodyPr wrap="square" lIns="0" rIns="0" tIns="0" bIns="0" anchor="t">
+            <a:spAutoFit/>
+          </a:bodyPr>
+          <a:lstStyle/>
+          <a:p>
+            <a:pPr algn="l">
+              <a:lnSpc>
+                <a:spcPct val="130000"/>
+              </a:lnSpc>
+            </a:pPr>
+            <a:r>
+              <a:rPr sz="1300" b="0" i="0">
+                <a:solidFill>
+                  <a:srgbClr val="CBD5E1"/>
+                </a:solidFill>
+                <a:latin typeface="Consolas"/>
+              </a:rPr>
+              <a:t>rule  = LOLDrivers hash match</a:t>
+            </a:r>
+          </a:p>
+        </p:txBody>
+      </p:sp>
+      <p:sp>
+        <p:nvSpPr>
+          <p:cNvPr id="14" name="TextBox 13"/>
+          <p:cNvSpPr txBox="1"/>
+          <p:nvPr/>
+        </p:nvSpPr>
+        <p:spPr>
+          <a:xfrm>
+            <a:off x="868680" y="5303520"/>
+            <a:ext cx="4937760" cy="457200"/>
+          </a:xfrm>
+          <a:prstGeom prst="rect">
+            <a:avLst/>
+          </a:prstGeom>
+          <a:noFill/>
+        </p:spPr>
+        <p:txBody>
+          <a:bodyPr wrap="square" lIns="0" rIns="0" tIns="0" bIns="0" anchor="t">
+            <a:spAutoFit/>
+          </a:bodyPr>
+          <a:lstStyle/>
+          <a:p>
+            <a:pPr algn="l">
+              <a:lnSpc>
+                <a:spcPct val="130000"/>
+              </a:lnSpc>
+            </a:pPr>
+            <a:r>
+              <a:rPr sz="1250" b="1" i="0">
+                <a:solidFill>
+                  <a:srgbClr val="16A34A"/>
+                </a:solidFill>
+                <a:latin typeface="Calibri"/>
+              </a:rPr>
+              <a:t>→ IoC リストを取り込んで検知できることを実証 ✓</a:t>
+            </a:r>
+          </a:p>
+        </p:txBody>
+      </p:sp>
+      <p:sp>
+        <p:nvSpPr>
+          <p:cNvPr id="15" name="Rounded Rectangle 14"/>
+          <p:cNvSpPr/>
+          <p:nvPr/>
+        </p:nvSpPr>
+        <p:spPr>
+          <a:xfrm>
+            <a:off x="6263640" y="1691640"/>
+            <a:ext cx="5376672" cy="4160520"/>
+          </a:xfrm>
+          <a:prstGeom prst="roundRect">
+            <a:avLst/>
+          </a:prstGeom>
+          <a:solidFill>
+            <a:srgbClr val="FFFFFF"/>
+          </a:solidFill>
+          <a:ln w="9525">
+            <a:solidFill>
+              <a:srgbClr val="DDE3EE"/>
+            </a:solidFill>
+          </a:ln>
+          <a:effectLst/>
+        </p:spPr>
+        <p:style>
+          <a:lnRef idx="1">
+            <a:schemeClr val="accent1"/>
+          </a:lnRef>
+          <a:fillRef idx="3">
+            <a:schemeClr val="accent1"/>
+          </a:fillRef>
+          <a:effectRef idx="2">
+            <a:schemeClr val="accent1"/>
+          </a:effectRef>
+          <a:fontRef idx="minor">
+            <a:schemeClr val="lt1"/>
+          </a:fontRef>
+        </p:style>
+        <p:txBody>
+          <a:bodyPr rtlCol="0" anchor="ctr"/>
+          <a:lstStyle/>
+          <a:p>
+            <a:pPr algn="ctr"/>
+          </a:p>
+        </p:txBody>
+      </p:sp>
+      <p:sp>
+        <p:nvSpPr>
+          <p:cNvPr id="16" name="Rectangle 15"/>
+          <p:cNvSpPr/>
+          <p:nvPr/>
+        </p:nvSpPr>
+        <p:spPr>
+          <a:xfrm>
+            <a:off x="6263640" y="1691640"/>
+            <a:ext cx="73152" cy="4160520"/>
+          </a:xfrm>
+          <a:prstGeom prst="rect">
+            <a:avLst/>
+          </a:prstGeom>
+          <a:solidFill>
+            <a:srgbClr val="16A34A"/>
+          </a:solidFill>
+          <a:ln>
+            <a:noFill/>
+          </a:ln>
+          <a:effectLst/>
+        </p:spPr>
+        <p:style>
+          <a:lnRef idx="1">
+            <a:schemeClr val="accent1"/>
+          </a:lnRef>
+          <a:fillRef idx="3">
+            <a:schemeClr val="accent1"/>
+          </a:fillRef>
+          <a:effectRef idx="2">
+            <a:schemeClr val="accent1"/>
+          </a:effectRef>
+          <a:fontRef idx="minor">
+            <a:schemeClr val="lt1"/>
+          </a:fontRef>
+        </p:style>
+        <p:txBody>
+          <a:bodyPr rtlCol="0" anchor="ctr"/>
+          <a:lstStyle/>
+          <a:p>
+            <a:pPr algn="ctr"/>
+          </a:p>
+        </p:txBody>
+      </p:sp>
+      <p:sp>
+        <p:nvSpPr>
+          <p:cNvPr id="17" name="TextBox 16"/>
+          <p:cNvSpPr txBox="1"/>
+          <p:nvPr/>
+        </p:nvSpPr>
+        <p:spPr>
+          <a:xfrm>
+            <a:off x="6537960" y="1874519"/>
+            <a:ext cx="4937760" cy="457200"/>
+          </a:xfrm>
+          <a:prstGeom prst="rect">
+            <a:avLst/>
+          </a:prstGeom>
+          <a:noFill/>
+        </p:spPr>
+        <p:txBody>
+          <a:bodyPr wrap="square" lIns="0" rIns="0" tIns="0" bIns="0" anchor="t">
+            <a:spAutoFit/>
+          </a:bodyPr>
+          <a:lstStyle/>
+          <a:p>
+            <a:pPr algn="l">
+              <a:lnSpc>
+                <a:spcPct val="130000"/>
+              </a:lnSpc>
+            </a:pPr>
+            <a:r>
+              <a:rPr sz="1600" b="1" i="0">
+                <a:solidFill>
+                  <a:srgbClr val="1F2937"/>
+                </a:solidFill>
+                <a:latin typeface="Cambria"/>
+              </a:rPr>
+              <a:t>② 公開攻撃サンプルでの検知</a:t>
+            </a:r>
+          </a:p>
+        </p:txBody>
+      </p:sp>
+      <p:sp>
+        <p:nvSpPr>
+          <p:cNvPr id="18" name="TextBox 17"/>
+          <p:cNvSpPr txBox="1"/>
+          <p:nvPr/>
+        </p:nvSpPr>
+        <p:spPr>
+          <a:xfrm>
+            <a:off x="6537960" y="2395728"/>
+            <a:ext cx="4023360" cy="365760"/>
+          </a:xfrm>
+          <a:prstGeom prst="rect">
+            <a:avLst/>
+          </a:prstGeom>
+          <a:noFill/>
+        </p:spPr>
+        <p:txBody>
+          <a:bodyPr wrap="square" lIns="0" rIns="0" tIns="0" bIns="0" anchor="ctr">
+            <a:spAutoFit/>
+          </a:bodyPr>
+          <a:lstStyle/>
+          <a:p>
+            <a:pPr algn="l">
+              <a:lnSpc>
+                <a:spcPct val="130000"/>
+              </a:lnSpc>
+            </a:pPr>
+            <a:r>
+              <a:rPr sz="1200" b="0" i="0">
+                <a:solidFill>
+                  <a:srgbClr val="1F2937"/>
+                </a:solidFill>
+                <a:latin typeface="Calibri"/>
+              </a:rPr>
+              <a:t>ログ消去 (Security 1102)</a:t>
+            </a:r>
+          </a:p>
+        </p:txBody>
+      </p:sp>
+      <p:sp>
+        <p:nvSpPr>
+          <p:cNvPr id="19" name="Rounded Rectangle 18"/>
+          <p:cNvSpPr/>
+          <p:nvPr/>
+        </p:nvSpPr>
+        <p:spPr>
+          <a:xfrm>
+            <a:off x="10652760" y="2414016"/>
+            <a:ext cx="868680" cy="310896"/>
+          </a:xfrm>
+          <a:prstGeom prst="roundRect">
+            <a:avLst/>
+          </a:prstGeom>
+          <a:solidFill>
+            <a:srgbClr val="EA580C"/>
+          </a:solidFill>
+          <a:ln>
+            <a:noFill/>
+          </a:ln>
+          <a:effectLst/>
+        </p:spPr>
+        <p:style>
+          <a:lnRef idx="1">
+            <a:schemeClr val="accent1"/>
+          </a:lnRef>
+          <a:fillRef idx="3">
+            <a:schemeClr val="accent1"/>
+          </a:fillRef>
+          <a:effectRef idx="2">
+            <a:schemeClr val="accent1"/>
+          </a:effectRef>
+          <a:fontRef idx="minor">
+            <a:schemeClr val="lt1"/>
+          </a:fontRef>
+        </p:style>
+        <p:txBody>
+          <a:bodyPr rtlCol="0" anchor="ctr"/>
+          <a:lstStyle/>
+          <a:p>
+            <a:pPr algn="ctr"/>
+          </a:p>
+        </p:txBody>
+      </p:sp>
+      <p:sp>
+        <p:nvSpPr>
+          <p:cNvPr id="20" name="TextBox 19"/>
+          <p:cNvSpPr txBox="1"/>
+          <p:nvPr/>
+        </p:nvSpPr>
+        <p:spPr>
+          <a:xfrm>
+            <a:off x="10652760" y="2414016"/>
+            <a:ext cx="868680" cy="310896"/>
+          </a:xfrm>
+          <a:prstGeom prst="rect">
+            <a:avLst/>
+          </a:prstGeom>
+          <a:noFill/>
+        </p:spPr>
+        <p:txBody>
+          <a:bodyPr wrap="square" lIns="0" rIns="0" tIns="0" bIns="0" anchor="ctr">
+            <a:spAutoFit/>
+          </a:bodyPr>
+          <a:lstStyle/>
+          <a:p>
+            <a:pPr algn="ctr">
+              <a:lnSpc>
+                <a:spcPct val="130000"/>
+              </a:lnSpc>
+            </a:pPr>
+            <a:r>
+              <a:rPr sz="1050" b="1" i="0">
+                <a:solidFill>
+                  <a:srgbClr val="FFFFFF"/>
+                </a:solidFill>
+                <a:latin typeface="Calibri"/>
+              </a:rPr>
+              <a:t>high</a:t>
+            </a:r>
+          </a:p>
+        </p:txBody>
+      </p:sp>
+      <p:sp>
+        <p:nvSpPr>
+          <p:cNvPr id="21" name="TextBox 20"/>
+          <p:cNvSpPr txBox="1"/>
+          <p:nvPr/>
+        </p:nvSpPr>
+        <p:spPr>
+          <a:xfrm>
+            <a:off x="6537960" y="2852928"/>
+            <a:ext cx="4023360" cy="365760"/>
+          </a:xfrm>
+          <a:prstGeom prst="rect">
+            <a:avLst/>
+          </a:prstGeom>
+          <a:noFill/>
+        </p:spPr>
+        <p:txBody>
+          <a:bodyPr wrap="square" lIns="0" rIns="0" tIns="0" bIns="0" anchor="ctr">
+            <a:spAutoFit/>
+          </a:bodyPr>
+          <a:lstStyle/>
+          <a:p>
+            <a:pPr algn="l">
+              <a:lnSpc>
+                <a:spcPct val="130000"/>
+              </a:lnSpc>
+            </a:pPr>
+            <a:r>
+              <a:rPr sz="1200" b="0" i="0">
+                <a:solidFill>
+                  <a:srgbClr val="1F2937"/>
+                </a:solidFill>
+                <a:latin typeface="Calibri"/>
+              </a:rPr>
+              <a:t>ポートフォワード (netsh/RDP)</a:t>
+            </a:r>
+          </a:p>
+        </p:txBody>
+      </p:sp>
+      <p:sp>
+        <p:nvSpPr>
+          <p:cNvPr id="22" name="Rounded Rectangle 21"/>
+          <p:cNvSpPr/>
+          <p:nvPr/>
+        </p:nvSpPr>
+        <p:spPr>
+          <a:xfrm>
+            <a:off x="10652760" y="2871216"/>
+            <a:ext cx="868680" cy="310896"/>
+          </a:xfrm>
+          <a:prstGeom prst="roundRect">
+            <a:avLst/>
+          </a:prstGeom>
+          <a:solidFill>
+            <a:srgbClr val="EA580C"/>
+          </a:solidFill>
+          <a:ln>
+            <a:noFill/>
+          </a:ln>
+          <a:effectLst/>
+        </p:spPr>
+        <p:style>
+          <a:lnRef idx="1">
+            <a:schemeClr val="accent1"/>
+          </a:lnRef>
+          <a:fillRef idx="3">
+            <a:schemeClr val="accent1"/>
+          </a:fillRef>
+          <a:effectRef idx="2">
+            <a:schemeClr val="accent1"/>
+          </a:effectRef>
+          <a:fontRef idx="minor">
+            <a:schemeClr val="lt1"/>
+          </a:fontRef>
+        </p:style>
+        <p:txBody>
+          <a:bodyPr rtlCol="0" anchor="ctr"/>
+          <a:lstStyle/>
+          <a:p>
+            <a:pPr algn="ctr"/>
+          </a:p>
+        </p:txBody>
+      </p:sp>
+      <p:sp>
+        <p:nvSpPr>
+          <p:cNvPr id="23" name="TextBox 22"/>
+          <p:cNvSpPr txBox="1"/>
+          <p:nvPr/>
+        </p:nvSpPr>
+        <p:spPr>
+          <a:xfrm>
+            <a:off x="10652760" y="2871216"/>
+            <a:ext cx="868680" cy="310896"/>
+          </a:xfrm>
+          <a:prstGeom prst="rect">
+            <a:avLst/>
+          </a:prstGeom>
+          <a:noFill/>
+        </p:spPr>
+        <p:txBody>
+          <a:bodyPr wrap="square" lIns="0" rIns="0" tIns="0" bIns="0" anchor="ctr">
+            <a:spAutoFit/>
+          </a:bodyPr>
+          <a:lstStyle/>
+          <a:p>
+            <a:pPr algn="ctr">
+              <a:lnSpc>
+                <a:spcPct val="130000"/>
+              </a:lnSpc>
+            </a:pPr>
+            <a:r>
+              <a:rPr sz="1050" b="1" i="0">
+                <a:solidFill>
+                  <a:srgbClr val="FFFFFF"/>
+                </a:solidFill>
+                <a:latin typeface="Calibri"/>
+              </a:rPr>
+              <a:t>high</a:t>
+            </a:r>
+          </a:p>
+        </p:txBody>
+      </p:sp>
+      <p:sp>
+        <p:nvSpPr>
+          <p:cNvPr id="24" name="TextBox 23"/>
+          <p:cNvSpPr txBox="1"/>
+          <p:nvPr/>
+        </p:nvSpPr>
+        <p:spPr>
+          <a:xfrm>
+            <a:off x="6537960" y="3310128"/>
+            <a:ext cx="4023360" cy="365760"/>
+          </a:xfrm>
+          <a:prstGeom prst="rect">
+            <a:avLst/>
+          </a:prstGeom>
+          <a:noFill/>
+        </p:spPr>
+        <p:txBody>
+          <a:bodyPr wrap="square" lIns="0" rIns="0" tIns="0" bIns="0" anchor="ctr">
+            <a:spAutoFit/>
+          </a:bodyPr>
+          <a:lstStyle/>
+          <a:p>
+            <a:pPr algn="l">
+              <a:lnSpc>
+                <a:spcPct val="130000"/>
+              </a:lnSpc>
+            </a:pPr>
+            <a:r>
+              <a:rPr sz="1200" b="0" i="0">
+                <a:solidFill>
+                  <a:srgbClr val="1F2937"/>
+                </a:solidFill>
+                <a:latin typeface="Calibri"/>
+              </a:rPr>
+              <a:t>バインドシェル / DLL ハイジャック</a:t>
+            </a:r>
+          </a:p>
+        </p:txBody>
+      </p:sp>
+      <p:sp>
+        <p:nvSpPr>
+          <p:cNvPr id="25" name="Rounded Rectangle 24"/>
+          <p:cNvSpPr/>
+          <p:nvPr/>
+        </p:nvSpPr>
+        <p:spPr>
+          <a:xfrm>
+            <a:off x="10652760" y="3328416"/>
+            <a:ext cx="868680" cy="310896"/>
+          </a:xfrm>
+          <a:prstGeom prst="roundRect">
+            <a:avLst/>
+          </a:prstGeom>
+          <a:solidFill>
+            <a:srgbClr val="EA580C"/>
+          </a:solidFill>
+          <a:ln>
+            <a:noFill/>
+          </a:ln>
+          <a:effectLst/>
+        </p:spPr>
+        <p:style>
+          <a:lnRef idx="1">
+            <a:schemeClr val="accent1"/>
+          </a:lnRef>
+          <a:fillRef idx="3">
+            <a:schemeClr val="accent1"/>
+          </a:fillRef>
+          <a:effectRef idx="2">
+            <a:schemeClr val="accent1"/>
+          </a:effectRef>
+          <a:fontRef idx="minor">
+            <a:schemeClr val="lt1"/>
+          </a:fontRef>
+        </p:style>
+        <p:txBody>
+          <a:bodyPr rtlCol="0" anchor="ctr"/>
+          <a:lstStyle/>
+          <a:p>
+            <a:pPr algn="ctr"/>
+          </a:p>
+        </p:txBody>
+      </p:sp>
+      <p:sp>
+        <p:nvSpPr>
+          <p:cNvPr id="26" name="TextBox 25"/>
+          <p:cNvSpPr txBox="1"/>
+          <p:nvPr/>
+        </p:nvSpPr>
+        <p:spPr>
+          <a:xfrm>
+            <a:off x="10652760" y="3328416"/>
+            <a:ext cx="868680" cy="310896"/>
+          </a:xfrm>
+          <a:prstGeom prst="rect">
+            <a:avLst/>
+          </a:prstGeom>
+          <a:noFill/>
+        </p:spPr>
+        <p:txBody>
+          <a:bodyPr wrap="square" lIns="0" rIns="0" tIns="0" bIns="0" anchor="ctr">
+            <a:spAutoFit/>
+          </a:bodyPr>
+          <a:lstStyle/>
+          <a:p>
+            <a:pPr algn="ctr">
+              <a:lnSpc>
+                <a:spcPct val="130000"/>
+              </a:lnSpc>
+            </a:pPr>
+            <a:r>
+              <a:rPr sz="1050" b="1" i="0">
+                <a:solidFill>
+                  <a:srgbClr val="FFFFFF"/>
+                </a:solidFill>
+                <a:latin typeface="Calibri"/>
+              </a:rPr>
+              <a:t>high</a:t>
+            </a:r>
+          </a:p>
+        </p:txBody>
+      </p:sp>
+      <p:sp>
+        <p:nvSpPr>
+          <p:cNvPr id="27" name="TextBox 26"/>
+          <p:cNvSpPr txBox="1"/>
+          <p:nvPr/>
+        </p:nvSpPr>
+        <p:spPr>
+          <a:xfrm>
+            <a:off x="6537960" y="3767328"/>
+            <a:ext cx="4023360" cy="365760"/>
+          </a:xfrm>
+          <a:prstGeom prst="rect">
+            <a:avLst/>
+          </a:prstGeom>
+          <a:noFill/>
+        </p:spPr>
+        <p:txBody>
+          <a:bodyPr wrap="square" lIns="0" rIns="0" tIns="0" bIns="0" anchor="ctr">
+            <a:spAutoFit/>
+          </a:bodyPr>
+          <a:lstStyle/>
+          <a:p>
+            <a:pPr algn="l">
+              <a:lnSpc>
+                <a:spcPct val="130000"/>
+              </a:lnSpc>
+            </a:pPr>
+            <a:r>
+              <a:rPr sz="1200" b="0" i="0">
+                <a:solidFill>
+                  <a:srgbClr val="1F2937"/>
+                </a:solidFill>
+                <a:latin typeface="Calibri"/>
+              </a:rPr>
+              <a:t>プロセス注入 (Meterpreter)</a:t>
+            </a:r>
+          </a:p>
+        </p:txBody>
+      </p:sp>
+      <p:sp>
+        <p:nvSpPr>
+          <p:cNvPr id="28" name="Rounded Rectangle 27"/>
+          <p:cNvSpPr/>
+          <p:nvPr/>
+        </p:nvSpPr>
+        <p:spPr>
+          <a:xfrm>
+            <a:off x="10652760" y="3785615"/>
+            <a:ext cx="868680" cy="310896"/>
+          </a:xfrm>
+          <a:prstGeom prst="roundRect">
+            <a:avLst/>
+          </a:prstGeom>
+          <a:solidFill>
+            <a:srgbClr val="CA8A04"/>
+          </a:solidFill>
+          <a:ln>
+            <a:noFill/>
+          </a:ln>
+          <a:effectLst/>
+        </p:spPr>
+        <p:style>
+          <a:lnRef idx="1">
+            <a:schemeClr val="accent1"/>
+          </a:lnRef>
+          <a:fillRef idx="3">
+            <a:schemeClr val="accent1"/>
+          </a:fillRef>
+          <a:effectRef idx="2">
+            <a:schemeClr val="accent1"/>
+          </a:effectRef>
+          <a:fontRef idx="minor">
+            <a:schemeClr val="lt1"/>
+          </a:fontRef>
+        </p:style>
+        <p:txBody>
+          <a:bodyPr rtlCol="0" anchor="ctr"/>
+          <a:lstStyle/>
+          <a:p>
+            <a:pPr algn="ctr"/>
+          </a:p>
+        </p:txBody>
+      </p:sp>
+      <p:sp>
+        <p:nvSpPr>
+          <p:cNvPr id="29" name="TextBox 28"/>
+          <p:cNvSpPr txBox="1"/>
+          <p:nvPr/>
+        </p:nvSpPr>
+        <p:spPr>
+          <a:xfrm>
+            <a:off x="10652760" y="3785615"/>
+            <a:ext cx="868680" cy="310896"/>
+          </a:xfrm>
+          <a:prstGeom prst="rect">
+            <a:avLst/>
+          </a:prstGeom>
+          <a:noFill/>
+        </p:spPr>
+        <p:txBody>
+          <a:bodyPr wrap="square" lIns="0" rIns="0" tIns="0" bIns="0" anchor="ctr">
+            <a:spAutoFit/>
+          </a:bodyPr>
+          <a:lstStyle/>
+          <a:p>
+            <a:pPr algn="ctr">
+              <a:lnSpc>
+                <a:spcPct val="130000"/>
+              </a:lnSpc>
+            </a:pPr>
+            <a:r>
+              <a:rPr sz="1050" b="1" i="0">
+                <a:solidFill>
+                  <a:srgbClr val="FFFFFF"/>
+                </a:solidFill>
+                <a:latin typeface="Calibri"/>
+              </a:rPr>
+              <a:t>medium</a:t>
+            </a:r>
+          </a:p>
+        </p:txBody>
+      </p:sp>
+      <p:sp>
+        <p:nvSpPr>
+          <p:cNvPr id="30" name="TextBox 29"/>
+          <p:cNvSpPr txBox="1"/>
+          <p:nvPr/>
+        </p:nvSpPr>
+        <p:spPr>
+          <a:xfrm>
+            <a:off x="6537960" y="4224528"/>
+            <a:ext cx="4023360" cy="365760"/>
+          </a:xfrm>
+          <a:prstGeom prst="rect">
+            <a:avLst/>
+          </a:prstGeom>
+          <a:noFill/>
+        </p:spPr>
+        <p:txBody>
+          <a:bodyPr wrap="square" lIns="0" rIns="0" tIns="0" bIns="0" anchor="ctr">
+            <a:spAutoFit/>
+          </a:bodyPr>
+          <a:lstStyle/>
+          <a:p>
+            <a:pPr algn="l">
+              <a:lnSpc>
+                <a:spcPct val="130000"/>
+              </a:lnSpc>
+            </a:pPr>
+            <a:r>
+              <a:rPr sz="1200" b="0" i="0">
+                <a:solidFill>
+                  <a:srgbClr val="1F2937"/>
+                </a:solidFill>
+                <a:latin typeface="Calibri"/>
+              </a:rPr>
+              <a:t>DLL サイドローディング</a:t>
+            </a:r>
+          </a:p>
+        </p:txBody>
+      </p:sp>
+      <p:sp>
+        <p:nvSpPr>
+          <p:cNvPr id="31" name="Rounded Rectangle 30"/>
+          <p:cNvSpPr/>
+          <p:nvPr/>
+        </p:nvSpPr>
+        <p:spPr>
+          <a:xfrm>
+            <a:off x="10652760" y="4242816"/>
+            <a:ext cx="868680" cy="310896"/>
+          </a:xfrm>
+          <a:prstGeom prst="roundRect">
+            <a:avLst/>
+          </a:prstGeom>
+          <a:solidFill>
+            <a:srgbClr val="CA8A04"/>
+          </a:solidFill>
+          <a:ln>
+            <a:noFill/>
+          </a:ln>
+          <a:effectLst/>
+        </p:spPr>
+        <p:style>
+          <a:lnRef idx="1">
+            <a:schemeClr val="accent1"/>
+          </a:lnRef>
+          <a:fillRef idx="3">
+            <a:schemeClr val="accent1"/>
+          </a:fillRef>
+          <a:effectRef idx="2">
+            <a:schemeClr val="accent1"/>
+          </a:effectRef>
+          <a:fontRef idx="minor">
+            <a:schemeClr val="lt1"/>
+          </a:fontRef>
+        </p:style>
+        <p:txBody>
+          <a:bodyPr rtlCol="0" anchor="ctr"/>
+          <a:lstStyle/>
+          <a:p>
+            <a:pPr algn="ctr"/>
+          </a:p>
+        </p:txBody>
+      </p:sp>
+      <p:sp>
+        <p:nvSpPr>
+          <p:cNvPr id="32" name="TextBox 31"/>
+          <p:cNvSpPr txBox="1"/>
+          <p:nvPr/>
+        </p:nvSpPr>
+        <p:spPr>
+          <a:xfrm>
+            <a:off x="10652760" y="4242816"/>
+            <a:ext cx="868680" cy="310896"/>
+          </a:xfrm>
+          <a:prstGeom prst="rect">
+            <a:avLst/>
+          </a:prstGeom>
+          <a:noFill/>
+        </p:spPr>
+        <p:txBody>
+          <a:bodyPr wrap="square" lIns="0" rIns="0" tIns="0" bIns="0" anchor="ctr">
+            <a:spAutoFit/>
+          </a:bodyPr>
+          <a:lstStyle/>
+          <a:p>
+            <a:pPr algn="ctr">
+              <a:lnSpc>
+                <a:spcPct val="130000"/>
+              </a:lnSpc>
+            </a:pPr>
+            <a:r>
+              <a:rPr sz="1050" b="1" i="0">
+                <a:solidFill>
+                  <a:srgbClr val="FFFFFF"/>
+                </a:solidFill>
+                <a:latin typeface="Calibri"/>
+              </a:rPr>
+              <a:t>medium</a:t>
+            </a:r>
+          </a:p>
+        </p:txBody>
+      </p:sp>
+      <p:sp>
+        <p:nvSpPr>
+          <p:cNvPr id="33" name="TextBox 32"/>
+          <p:cNvSpPr txBox="1"/>
+          <p:nvPr/>
+        </p:nvSpPr>
+        <p:spPr>
+          <a:xfrm>
+            <a:off x="6537960" y="4754880"/>
+            <a:ext cx="4937760" cy="365760"/>
+          </a:xfrm>
+          <a:prstGeom prst="rect">
+            <a:avLst/>
+          </a:prstGeom>
+          <a:noFill/>
+        </p:spPr>
+        <p:txBody>
+          <a:bodyPr wrap="square" lIns="0" rIns="0" tIns="0" bIns="0" anchor="t">
+            <a:spAutoFit/>
+          </a:bodyPr>
+          <a:lstStyle/>
+          <a:p>
+            <a:pPr algn="l">
+              <a:lnSpc>
+                <a:spcPct val="130000"/>
+              </a:lnSpc>
+            </a:pPr>
+            <a:r>
+              <a:rPr sz="1250" b="1" i="0">
+                <a:solidFill>
+                  <a:srgbClr val="1F2937"/>
+                </a:solidFill>
+                <a:latin typeface="Calibri"/>
+              </a:rPr>
+              <a:t>検証した 6 サンプル中 5 種で脅威を検知（最大 high）。</a:t>
+            </a:r>
+          </a:p>
+        </p:txBody>
+      </p:sp>
+      <p:sp>
+        <p:nvSpPr>
+          <p:cNvPr id="34" name="TextBox 33"/>
+          <p:cNvSpPr txBox="1"/>
+          <p:nvPr/>
+        </p:nvSpPr>
+        <p:spPr>
+          <a:xfrm>
+            <a:off x="6537960" y="5138928"/>
+            <a:ext cx="4983480" cy="685800"/>
+          </a:xfrm>
+          <a:prstGeom prst="rect">
+            <a:avLst/>
+          </a:prstGeom>
+          <a:noFill/>
+        </p:spPr>
+        <p:txBody>
+          <a:bodyPr wrap="square" lIns="0" rIns="0" tIns="0" bIns="0" anchor="t">
+            <a:spAutoFit/>
+          </a:bodyPr>
+          <a:lstStyle/>
+          <a:p>
+            <a:pPr algn="l">
+              <a:lnSpc>
+                <a:spcPct val="130000"/>
+              </a:lnSpc>
+            </a:pPr>
+            <a:r>
+              <a:rPr sz="1000" b="0" i="0">
+                <a:solidFill>
+                  <a:srgbClr val="5B6472"/>
+                </a:solidFill>
+                <a:latin typeface="Calibri"/>
+              </a:rPr>
+              <a:t>※ ここでの発火は上流 Sigma ルールと自作分の合算。自作の 13 ルールは対応する痕跡（Sysmon EID 1 の wevtutil 等）を含むログで発火する設計。</a:t>
+            </a:r>
+          </a:p>
+        </p:txBody>
+      </p:sp>
+      <p:sp>
+        <p:nvSpPr>
+          <p:cNvPr id="35" name="TextBox 34"/>
+          <p:cNvSpPr txBox="1"/>
+          <p:nvPr/>
+        </p:nvSpPr>
+        <p:spPr>
+          <a:xfrm>
+            <a:off x="548640" y="5989320"/>
+            <a:ext cx="11064240" cy="365760"/>
+          </a:xfrm>
+          <a:prstGeom prst="rect">
+            <a:avLst/>
+          </a:prstGeom>
+          <a:noFill/>
+        </p:spPr>
+        <p:txBody>
+          <a:bodyPr wrap="square" lIns="0" rIns="0" tIns="0" bIns="0" anchor="t">
+            <a:spAutoFit/>
+          </a:bodyPr>
+          <a:lstStyle/>
+          <a:p>
+            <a:pPr algn="ctr">
+              <a:lnSpc>
+                <a:spcPct val="130000"/>
+              </a:lnSpc>
+            </a:pPr>
+            <a:r>
+              <a:rPr sz="1250" b="1" i="0">
+                <a:solidFill>
+                  <a:srgbClr val="1D4ED8"/>
+                </a:solidFill>
+                <a:latin typeface="Calibri"/>
+              </a:rPr>
+              <a:t>実際のログを読み込ませ、平文ではなく検知として浮かび上がることを確認。</a:t>
+            </a:r>
+          </a:p>
+        </p:txBody>
+      </p:sp>
+      <p:sp>
+        <p:nvSpPr>
+          <p:cNvPr id="36" name="TextBox 35"/>
+          <p:cNvSpPr txBox="1"/>
+          <p:nvPr/>
+        </p:nvSpPr>
+        <p:spPr>
+          <a:xfrm>
+            <a:off x="10972800" y="6446520"/>
+            <a:ext cx="914400" cy="274320"/>
+          </a:xfrm>
+          <a:prstGeom prst="rect">
+            <a:avLst/>
+          </a:prstGeom>
+          <a:noFill/>
+        </p:spPr>
+        <p:txBody>
+          <a:bodyPr wrap="square" lIns="0" rIns="0" tIns="0" bIns="0" anchor="t">
+            <a:spAutoFit/>
+          </a:bodyPr>
+          <a:lstStyle/>
+          <a:p>
+            <a:pPr algn="r">
+              <a:lnSpc>
+                <a:spcPct val="130000"/>
+              </a:lnSpc>
+            </a:pPr>
+            <a:r>
+              <a:rPr sz="900" b="0" i="0">
+                <a:solidFill>
+                  <a:srgbClr val="5B6472"/>
+                </a:solidFill>
+                <a:latin typeface="Calibri"/>
+              </a:rPr>
+              <a:t>13 / 16</a:t>
+            </a:r>
+          </a:p>
+        </p:txBody>
+      </p:sp>
+    </p:spTree>
+  </p:cSld>
+  <p:clrMapOvr>
+    <a:masterClrMapping/>
+  </p:clrMapOvr>
+</p:sld>
+</file>
+
+<file path=ppt/slides/slide14.xml><?xml version="1.0" encoding="utf-8"?>
 <p:sld xmlns:a="http://schemas.openxmlformats.org/drawingml/2006/main" xmlns:p="http://schemas.openxmlformats.org/presentationml/2006/main" xmlns:r="http://schemas.openxmlformats.org/officeDocument/2006/relationships">
   <p:cSld>
     <p:spTree>
@@ -9395,7 +10961,7 @@
                 </a:solidFill>
                 <a:latin typeface="Calibri"/>
               </a:rPr>
-              <a:t>13 / 15</a:t>
+              <a:t>14 / 16</a:t>
             </a:r>
           </a:p>
         </p:txBody>
@@ -9430,1102 +10996,6 @@
 </p:sld>
 </file>
 
-<file path=ppt/slides/slide14.xml><?xml version="1.0" encoding="utf-8"?>
-<p:sld xmlns:a="http://schemas.openxmlformats.org/drawingml/2006/main" xmlns:p="http://schemas.openxmlformats.org/presentationml/2006/main" xmlns:r="http://schemas.openxmlformats.org/officeDocument/2006/relationships">
-  <p:cSld>
-    <p:spTree>
-      <p:nvGrpSpPr>
-        <p:cNvPr id="1" name=""/>
-        <p:cNvGrpSpPr/>
-        <p:nvPr/>
-      </p:nvGrpSpPr>
-      <p:grpSpPr/>
-      <p:sp>
-        <p:nvSpPr>
-          <p:cNvPr id="2" name="Rectangle 1"/>
-          <p:cNvSpPr/>
-          <p:nvPr/>
-        </p:nvSpPr>
-        <p:spPr>
-          <a:xfrm>
-            <a:off x="0" y="0"/>
-            <a:ext cx="12191695" cy="6858000"/>
-          </a:xfrm>
-          <a:prstGeom prst="rect">
-            <a:avLst/>
-          </a:prstGeom>
-          <a:solidFill>
-            <a:srgbClr val="F4F6FA"/>
-          </a:solidFill>
-          <a:ln>
-            <a:noFill/>
-          </a:ln>
-          <a:effectLst/>
-        </p:spPr>
-        <p:style>
-          <a:lnRef idx="1">
-            <a:schemeClr val="accent1"/>
-          </a:lnRef>
-          <a:fillRef idx="3">
-            <a:schemeClr val="accent1"/>
-          </a:fillRef>
-          <a:effectRef idx="2">
-            <a:schemeClr val="accent1"/>
-          </a:effectRef>
-          <a:fontRef idx="minor">
-            <a:schemeClr val="lt1"/>
-          </a:fontRef>
-        </p:style>
-        <p:txBody>
-          <a:bodyPr rtlCol="0" anchor="ctr"/>
-          <a:lstStyle/>
-          <a:p>
-            <a:pPr algn="ctr"/>
-          </a:p>
-        </p:txBody>
-      </p:sp>
-      <p:sp>
-        <p:nvSpPr>
-          <p:cNvPr id="3" name="TextBox 2"/>
-          <p:cNvSpPr txBox="1"/>
-          <p:nvPr/>
-        </p:nvSpPr>
-        <p:spPr>
-          <a:xfrm>
-            <a:off x="548640" y="347472"/>
-            <a:ext cx="10972800" cy="274320"/>
-          </a:xfrm>
-          <a:prstGeom prst="rect">
-            <a:avLst/>
-          </a:prstGeom>
-          <a:noFill/>
-        </p:spPr>
-        <p:txBody>
-          <a:bodyPr wrap="square" lIns="0" rIns="0" tIns="0" bIns="0" anchor="t">
-            <a:spAutoFit/>
-          </a:bodyPr>
-          <a:lstStyle/>
-          <a:p>
-            <a:pPr algn="l">
-              <a:lnSpc>
-                <a:spcPct val="130000"/>
-              </a:lnSpc>
-            </a:pPr>
-            <a:r>
-              <a:rPr sz="1100" b="1" i="0">
-                <a:solidFill>
-                  <a:srgbClr val="2563EB"/>
-                </a:solidFill>
-                <a:latin typeface="Calibri"/>
-              </a:rPr>
-              <a:t>成果</a:t>
-            </a:r>
-          </a:p>
-        </p:txBody>
-      </p:sp>
-      <p:sp>
-        <p:nvSpPr>
-          <p:cNvPr id="4" name="TextBox 3"/>
-          <p:cNvSpPr txBox="1"/>
-          <p:nvPr/>
-        </p:nvSpPr>
-        <p:spPr>
-          <a:xfrm>
-            <a:off x="548640" y="621792"/>
-            <a:ext cx="11155680" cy="640080"/>
-          </a:xfrm>
-          <a:prstGeom prst="rect">
-            <a:avLst/>
-          </a:prstGeom>
-          <a:noFill/>
-        </p:spPr>
-        <p:txBody>
-          <a:bodyPr wrap="square" lIns="0" rIns="0" tIns="0" bIns="0" anchor="t">
-            <a:spAutoFit/>
-          </a:bodyPr>
-          <a:lstStyle/>
-          <a:p>
-            <a:pPr algn="l">
-              <a:lnSpc>
-                <a:spcPct val="130000"/>
-              </a:lnSpc>
-            </a:pPr>
-            <a:r>
-              <a:rPr sz="2800" b="1" i="0">
-                <a:solidFill>
-                  <a:srgbClr val="1F2937"/>
-                </a:solidFill>
-                <a:latin typeface="Cambria"/>
-              </a:rPr>
-              <a:t>まとめ — 開発したもの</a:t>
-            </a:r>
-          </a:p>
-        </p:txBody>
-      </p:sp>
-      <p:sp>
-        <p:nvSpPr>
-          <p:cNvPr id="5" name="Rounded Rectangle 4"/>
-          <p:cNvSpPr/>
-          <p:nvPr/>
-        </p:nvSpPr>
-        <p:spPr>
-          <a:xfrm>
-            <a:off x="548640" y="1783080"/>
-            <a:ext cx="2697480" cy="3291840"/>
-          </a:xfrm>
-          <a:prstGeom prst="roundRect">
-            <a:avLst/>
-          </a:prstGeom>
-          <a:solidFill>
-            <a:srgbClr val="FFFFFF"/>
-          </a:solidFill>
-          <a:ln w="9525">
-            <a:solidFill>
-              <a:srgbClr val="DDE3EE"/>
-            </a:solidFill>
-          </a:ln>
-          <a:effectLst/>
-        </p:spPr>
-        <p:style>
-          <a:lnRef idx="1">
-            <a:schemeClr val="accent1"/>
-          </a:lnRef>
-          <a:fillRef idx="3">
-            <a:schemeClr val="accent1"/>
-          </a:fillRef>
-          <a:effectRef idx="2">
-            <a:schemeClr val="accent1"/>
-          </a:effectRef>
-          <a:fontRef idx="minor">
-            <a:schemeClr val="lt1"/>
-          </a:fontRef>
-        </p:style>
-        <p:txBody>
-          <a:bodyPr rtlCol="0" anchor="ctr"/>
-          <a:lstStyle/>
-          <a:p>
-            <a:pPr algn="ctr"/>
-          </a:p>
-        </p:txBody>
-      </p:sp>
-      <p:sp>
-        <p:nvSpPr>
-          <p:cNvPr id="6" name="Rectangle 5"/>
-          <p:cNvSpPr/>
-          <p:nvPr/>
-        </p:nvSpPr>
-        <p:spPr>
-          <a:xfrm>
-            <a:off x="548640" y="1783080"/>
-            <a:ext cx="73152" cy="3291840"/>
-          </a:xfrm>
-          <a:prstGeom prst="rect">
-            <a:avLst/>
-          </a:prstGeom>
-          <a:solidFill>
-            <a:srgbClr val="1D4ED8"/>
-          </a:solidFill>
-          <a:ln>
-            <a:noFill/>
-          </a:ln>
-          <a:effectLst/>
-        </p:spPr>
-        <p:style>
-          <a:lnRef idx="1">
-            <a:schemeClr val="accent1"/>
-          </a:lnRef>
-          <a:fillRef idx="3">
-            <a:schemeClr val="accent1"/>
-          </a:fillRef>
-          <a:effectRef idx="2">
-            <a:schemeClr val="accent1"/>
-          </a:effectRef>
-          <a:fontRef idx="minor">
-            <a:schemeClr val="lt1"/>
-          </a:fontRef>
-        </p:style>
-        <p:txBody>
-          <a:bodyPr rtlCol="0" anchor="ctr"/>
-          <a:lstStyle/>
-          <a:p>
-            <a:pPr algn="ctr"/>
-          </a:p>
-        </p:txBody>
-      </p:sp>
-      <p:sp>
-        <p:nvSpPr>
-          <p:cNvPr id="7" name="TextBox 6"/>
-          <p:cNvSpPr txBox="1"/>
-          <p:nvPr/>
-        </p:nvSpPr>
-        <p:spPr>
-          <a:xfrm>
-            <a:off x="713232" y="2194560"/>
-            <a:ext cx="2368296" cy="1005840"/>
-          </a:xfrm>
-          <a:prstGeom prst="rect">
-            <a:avLst/>
-          </a:prstGeom>
-          <a:noFill/>
-        </p:spPr>
-        <p:txBody>
-          <a:bodyPr wrap="square" lIns="0" rIns="0" tIns="0" bIns="0" anchor="t">
-            <a:spAutoFit/>
-          </a:bodyPr>
-          <a:lstStyle/>
-          <a:p>
-            <a:pPr algn="ctr">
-              <a:lnSpc>
-                <a:spcPct val="130000"/>
-              </a:lnSpc>
-            </a:pPr>
-            <a:r>
-              <a:rPr sz="4000" b="1" i="0">
-                <a:solidFill>
-                  <a:srgbClr val="1D4ED8"/>
-                </a:solidFill>
-                <a:latin typeface="Cambria"/>
-              </a:rPr>
-              <a:t>新文法</a:t>
-            </a:r>
-          </a:p>
-        </p:txBody>
-      </p:sp>
-      <p:sp>
-        <p:nvSpPr>
-          <p:cNvPr id="8" name="TextBox 7"/>
-          <p:cNvSpPr txBox="1"/>
-          <p:nvPr/>
-        </p:nvSpPr>
-        <p:spPr>
-          <a:xfrm>
-            <a:off x="548640" y="3200400"/>
-            <a:ext cx="2697480" cy="457200"/>
-          </a:xfrm>
-          <a:prstGeom prst="rect">
-            <a:avLst/>
-          </a:prstGeom>
-          <a:noFill/>
-        </p:spPr>
-        <p:txBody>
-          <a:bodyPr wrap="square" lIns="0" rIns="0" tIns="0" bIns="0" anchor="t">
-            <a:spAutoFit/>
-          </a:bodyPr>
-          <a:lstStyle/>
-          <a:p>
-            <a:pPr algn="ctr">
-              <a:lnSpc>
-                <a:spcPct val="130000"/>
-              </a:lnSpc>
-            </a:pPr>
-            <a:r>
-              <a:rPr sz="2000" b="0" i="0">
-                <a:solidFill>
-                  <a:srgbClr val="1F2937"/>
-                </a:solidFill>
-                <a:latin typeface="Cambria"/>
-              </a:rPr>
-              <a:t>lookup:</a:t>
-            </a:r>
-          </a:p>
-        </p:txBody>
-      </p:sp>
-      <p:sp>
-        <p:nvSpPr>
-          <p:cNvPr id="9" name="TextBox 8"/>
-          <p:cNvSpPr txBox="1"/>
-          <p:nvPr/>
-        </p:nvSpPr>
-        <p:spPr>
-          <a:xfrm>
-            <a:off x="731520" y="3840480"/>
-            <a:ext cx="2331720" cy="1005840"/>
-          </a:xfrm>
-          <a:prstGeom prst="rect">
-            <a:avLst/>
-          </a:prstGeom>
-          <a:noFill/>
-        </p:spPr>
-        <p:txBody>
-          <a:bodyPr wrap="square" lIns="0" rIns="0" tIns="0" bIns="0" anchor="t">
-            <a:spAutoFit/>
-          </a:bodyPr>
-          <a:lstStyle/>
-          <a:p>
-            <a:pPr algn="ctr">
-              <a:lnSpc>
-                <a:spcPct val="140000"/>
-              </a:lnSpc>
-            </a:pPr>
-            <a:r>
-              <a:rPr sz="1200" b="0" i="0">
-                <a:solidFill>
-                  <a:srgbClr val="5B6472"/>
-                </a:solidFill>
-                <a:latin typeface="Calibri"/>
-              </a:rPr>
-              <a:t>エンジン本体 (Rust) を改造し
-リスト照合機能を追加</a:t>
-            </a:r>
-          </a:p>
-        </p:txBody>
-      </p:sp>
-      <p:sp>
-        <p:nvSpPr>
-          <p:cNvPr id="10" name="Rounded Rectangle 9"/>
-          <p:cNvSpPr/>
-          <p:nvPr/>
-        </p:nvSpPr>
-        <p:spPr>
-          <a:xfrm>
-            <a:off x="3429000" y="1783080"/>
-            <a:ext cx="2697480" cy="3291840"/>
-          </a:xfrm>
-          <a:prstGeom prst="roundRect">
-            <a:avLst/>
-          </a:prstGeom>
-          <a:solidFill>
-            <a:srgbClr val="FFFFFF"/>
-          </a:solidFill>
-          <a:ln w="9525">
-            <a:solidFill>
-              <a:srgbClr val="DDE3EE"/>
-            </a:solidFill>
-          </a:ln>
-          <a:effectLst/>
-        </p:spPr>
-        <p:style>
-          <a:lnRef idx="1">
-            <a:schemeClr val="accent1"/>
-          </a:lnRef>
-          <a:fillRef idx="3">
-            <a:schemeClr val="accent1"/>
-          </a:fillRef>
-          <a:effectRef idx="2">
-            <a:schemeClr val="accent1"/>
-          </a:effectRef>
-          <a:fontRef idx="minor">
-            <a:schemeClr val="lt1"/>
-          </a:fontRef>
-        </p:style>
-        <p:txBody>
-          <a:bodyPr rtlCol="0" anchor="ctr"/>
-          <a:lstStyle/>
-          <a:p>
-            <a:pPr algn="ctr"/>
-          </a:p>
-        </p:txBody>
-      </p:sp>
-      <p:sp>
-        <p:nvSpPr>
-          <p:cNvPr id="11" name="Rectangle 10"/>
-          <p:cNvSpPr/>
-          <p:nvPr/>
-        </p:nvSpPr>
-        <p:spPr>
-          <a:xfrm>
-            <a:off x="3429000" y="1783080"/>
-            <a:ext cx="73152" cy="3291840"/>
-          </a:xfrm>
-          <a:prstGeom prst="rect">
-            <a:avLst/>
-          </a:prstGeom>
-          <a:solidFill>
-            <a:srgbClr val="EA580C"/>
-          </a:solidFill>
-          <a:ln>
-            <a:noFill/>
-          </a:ln>
-          <a:effectLst/>
-        </p:spPr>
-        <p:style>
-          <a:lnRef idx="1">
-            <a:schemeClr val="accent1"/>
-          </a:lnRef>
-          <a:fillRef idx="3">
-            <a:schemeClr val="accent1"/>
-          </a:fillRef>
-          <a:effectRef idx="2">
-            <a:schemeClr val="accent1"/>
-          </a:effectRef>
-          <a:fontRef idx="minor">
-            <a:schemeClr val="lt1"/>
-          </a:fontRef>
-        </p:style>
-        <p:txBody>
-          <a:bodyPr rtlCol="0" anchor="ctr"/>
-          <a:lstStyle/>
-          <a:p>
-            <a:pPr algn="ctr"/>
-          </a:p>
-        </p:txBody>
-      </p:sp>
-      <p:sp>
-        <p:nvSpPr>
-          <p:cNvPr id="12" name="TextBox 11"/>
-          <p:cNvSpPr txBox="1"/>
-          <p:nvPr/>
-        </p:nvSpPr>
-        <p:spPr>
-          <a:xfrm>
-            <a:off x="3593592" y="2194560"/>
-            <a:ext cx="2368296" cy="1005840"/>
-          </a:xfrm>
-          <a:prstGeom prst="rect">
-            <a:avLst/>
-          </a:prstGeom>
-          <a:noFill/>
-        </p:spPr>
-        <p:txBody>
-          <a:bodyPr wrap="square" lIns="0" rIns="0" tIns="0" bIns="0" anchor="t">
-            <a:spAutoFit/>
-          </a:bodyPr>
-          <a:lstStyle/>
-          <a:p>
-            <a:pPr algn="ctr">
-              <a:lnSpc>
-                <a:spcPct val="130000"/>
-              </a:lnSpc>
-            </a:pPr>
-            <a:r>
-              <a:rPr sz="4000" b="1" i="0">
-                <a:solidFill>
-                  <a:srgbClr val="EA580C"/>
-                </a:solidFill>
-                <a:latin typeface="Cambria"/>
-              </a:rPr>
-              <a:t>13</a:t>
-            </a:r>
-          </a:p>
-        </p:txBody>
-      </p:sp>
-      <p:sp>
-        <p:nvSpPr>
-          <p:cNvPr id="13" name="TextBox 12"/>
-          <p:cNvSpPr txBox="1"/>
-          <p:nvPr/>
-        </p:nvSpPr>
-        <p:spPr>
-          <a:xfrm>
-            <a:off x="3429000" y="3200400"/>
-            <a:ext cx="2697480" cy="457200"/>
-          </a:xfrm>
-          <a:prstGeom prst="rect">
-            <a:avLst/>
-          </a:prstGeom>
-          <a:noFill/>
-        </p:spPr>
-        <p:txBody>
-          <a:bodyPr wrap="square" lIns="0" rIns="0" tIns="0" bIns="0" anchor="t">
-            <a:spAutoFit/>
-          </a:bodyPr>
-          <a:lstStyle/>
-          <a:p>
-            <a:pPr algn="ctr">
-              <a:lnSpc>
-                <a:spcPct val="130000"/>
-              </a:lnSpc>
-            </a:pPr>
-            <a:r>
-              <a:rPr sz="2000" b="0" i="0">
-                <a:solidFill>
-                  <a:srgbClr val="1F2937"/>
-                </a:solidFill>
-                <a:latin typeface="Cambria"/>
-              </a:rPr>
-              <a:t>本</a:t>
-            </a:r>
-          </a:p>
-        </p:txBody>
-      </p:sp>
-      <p:sp>
-        <p:nvSpPr>
-          <p:cNvPr id="14" name="TextBox 13"/>
-          <p:cNvSpPr txBox="1"/>
-          <p:nvPr/>
-        </p:nvSpPr>
-        <p:spPr>
-          <a:xfrm>
-            <a:off x="3611880" y="3840480"/>
-            <a:ext cx="2331720" cy="1005840"/>
-          </a:xfrm>
-          <a:prstGeom prst="rect">
-            <a:avLst/>
-          </a:prstGeom>
-          <a:noFill/>
-        </p:spPr>
-        <p:txBody>
-          <a:bodyPr wrap="square" lIns="0" rIns="0" tIns="0" bIns="0" anchor="t">
-            <a:spAutoFit/>
-          </a:bodyPr>
-          <a:lstStyle/>
-          <a:p>
-            <a:pPr algn="ctr">
-              <a:lnSpc>
-                <a:spcPct val="140000"/>
-              </a:lnSpc>
-            </a:pPr>
-            <a:r>
-              <a:rPr sz="1200" b="0" i="0">
-                <a:solidFill>
-                  <a:srgbClr val="5B6472"/>
-                </a:solidFill>
-                <a:latin typeface="Calibri"/>
-              </a:rPr>
-              <a:t>攻撃を見抜く検知ルールを
-自作 (痕跡隠蔽の検知など)</a:t>
-            </a:r>
-          </a:p>
-        </p:txBody>
-      </p:sp>
-      <p:sp>
-        <p:nvSpPr>
-          <p:cNvPr id="15" name="Rounded Rectangle 14"/>
-          <p:cNvSpPr/>
-          <p:nvPr/>
-        </p:nvSpPr>
-        <p:spPr>
-          <a:xfrm>
-            <a:off x="6309360" y="1783080"/>
-            <a:ext cx="2697480" cy="3291840"/>
-          </a:xfrm>
-          <a:prstGeom prst="roundRect">
-            <a:avLst/>
-          </a:prstGeom>
-          <a:solidFill>
-            <a:srgbClr val="FFFFFF"/>
-          </a:solidFill>
-          <a:ln w="9525">
-            <a:solidFill>
-              <a:srgbClr val="DDE3EE"/>
-            </a:solidFill>
-          </a:ln>
-          <a:effectLst/>
-        </p:spPr>
-        <p:style>
-          <a:lnRef idx="1">
-            <a:schemeClr val="accent1"/>
-          </a:lnRef>
-          <a:fillRef idx="3">
-            <a:schemeClr val="accent1"/>
-          </a:fillRef>
-          <a:effectRef idx="2">
-            <a:schemeClr val="accent1"/>
-          </a:effectRef>
-          <a:fontRef idx="minor">
-            <a:schemeClr val="lt1"/>
-          </a:fontRef>
-        </p:style>
-        <p:txBody>
-          <a:bodyPr rtlCol="0" anchor="ctr"/>
-          <a:lstStyle/>
-          <a:p>
-            <a:pPr algn="ctr"/>
-          </a:p>
-        </p:txBody>
-      </p:sp>
-      <p:sp>
-        <p:nvSpPr>
-          <p:cNvPr id="16" name="Rectangle 15"/>
-          <p:cNvSpPr/>
-          <p:nvPr/>
-        </p:nvSpPr>
-        <p:spPr>
-          <a:xfrm>
-            <a:off x="6309360" y="1783080"/>
-            <a:ext cx="73152" cy="3291840"/>
-          </a:xfrm>
-          <a:prstGeom prst="rect">
-            <a:avLst/>
-          </a:prstGeom>
-          <a:solidFill>
-            <a:srgbClr val="CA8A04"/>
-          </a:solidFill>
-          <a:ln>
-            <a:noFill/>
-          </a:ln>
-          <a:effectLst/>
-        </p:spPr>
-        <p:style>
-          <a:lnRef idx="1">
-            <a:schemeClr val="accent1"/>
-          </a:lnRef>
-          <a:fillRef idx="3">
-            <a:schemeClr val="accent1"/>
-          </a:fillRef>
-          <a:effectRef idx="2">
-            <a:schemeClr val="accent1"/>
-          </a:effectRef>
-          <a:fontRef idx="minor">
-            <a:schemeClr val="lt1"/>
-          </a:fontRef>
-        </p:style>
-        <p:txBody>
-          <a:bodyPr rtlCol="0" anchor="ctr"/>
-          <a:lstStyle/>
-          <a:p>
-            <a:pPr algn="ctr"/>
-          </a:p>
-        </p:txBody>
-      </p:sp>
-      <p:sp>
-        <p:nvSpPr>
-          <p:cNvPr id="17" name="TextBox 16"/>
-          <p:cNvSpPr txBox="1"/>
-          <p:nvPr/>
-        </p:nvSpPr>
-        <p:spPr>
-          <a:xfrm>
-            <a:off x="6473952" y="2194560"/>
-            <a:ext cx="2368296" cy="1005840"/>
-          </a:xfrm>
-          <a:prstGeom prst="rect">
-            <a:avLst/>
-          </a:prstGeom>
-          <a:noFill/>
-        </p:spPr>
-        <p:txBody>
-          <a:bodyPr wrap="square" lIns="0" rIns="0" tIns="0" bIns="0" anchor="t">
-            <a:spAutoFit/>
-          </a:bodyPr>
-          <a:lstStyle/>
-          <a:p>
-            <a:pPr algn="ctr">
-              <a:lnSpc>
-                <a:spcPct val="130000"/>
-              </a:lnSpc>
-            </a:pPr>
-            <a:r>
-              <a:rPr sz="4000" b="1" i="0">
-                <a:solidFill>
-                  <a:srgbClr val="CA8A04"/>
-                </a:solidFill>
-                <a:latin typeface="Cambria"/>
-              </a:rPr>
-              <a:t>GUI</a:t>
-            </a:r>
-          </a:p>
-        </p:txBody>
-      </p:sp>
-      <p:sp>
-        <p:nvSpPr>
-          <p:cNvPr id="18" name="TextBox 17"/>
-          <p:cNvSpPr txBox="1"/>
-          <p:nvPr/>
-        </p:nvSpPr>
-        <p:spPr>
-          <a:xfrm>
-            <a:off x="6309360" y="3200400"/>
-            <a:ext cx="2697480" cy="457200"/>
-          </a:xfrm>
-          <a:prstGeom prst="rect">
-            <a:avLst/>
-          </a:prstGeom>
-          <a:noFill/>
-        </p:spPr>
-        <p:txBody>
-          <a:bodyPr wrap="square" lIns="0" rIns="0" tIns="0" bIns="0" anchor="t">
-            <a:spAutoFit/>
-          </a:bodyPr>
-          <a:lstStyle/>
-          <a:p>
-            <a:pPr algn="ctr">
-              <a:lnSpc>
-                <a:spcPct val="130000"/>
-              </a:lnSpc>
-            </a:pPr>
-            <a:r>
-              <a:rPr sz="2000" b="0" i="0">
-                <a:solidFill>
-                  <a:srgbClr val="1F2937"/>
-                </a:solidFill>
-                <a:latin typeface="Cambria"/>
-              </a:rPr>
-              <a:t>ゼロから開発</a:t>
-            </a:r>
-          </a:p>
-        </p:txBody>
-      </p:sp>
-      <p:sp>
-        <p:nvSpPr>
-          <p:cNvPr id="19" name="TextBox 18"/>
-          <p:cNvSpPr txBox="1"/>
-          <p:nvPr/>
-        </p:nvSpPr>
-        <p:spPr>
-          <a:xfrm>
-            <a:off x="6492240" y="3840480"/>
-            <a:ext cx="2331720" cy="1005840"/>
-          </a:xfrm>
-          <a:prstGeom prst="rect">
-            <a:avLst/>
-          </a:prstGeom>
-          <a:noFill/>
-        </p:spPr>
-        <p:txBody>
-          <a:bodyPr wrap="square" lIns="0" rIns="0" tIns="0" bIns="0" anchor="t">
-            <a:spAutoFit/>
-          </a:bodyPr>
-          <a:lstStyle/>
-          <a:p>
-            <a:pPr algn="ctr">
-              <a:lnSpc>
-                <a:spcPct val="140000"/>
-              </a:lnSpc>
-            </a:pPr>
-            <a:r>
-              <a:rPr sz="1200" b="0" i="0">
-                <a:solidFill>
-                  <a:srgbClr val="5B6472"/>
-                </a:solidFill>
-                <a:latin typeface="Calibri"/>
-              </a:rPr>
-              <a:t>結果を日本語で読み解く
-調査画面を自作</a:t>
-            </a:r>
-          </a:p>
-        </p:txBody>
-      </p:sp>
-      <p:sp>
-        <p:nvSpPr>
-          <p:cNvPr id="20" name="Rounded Rectangle 19"/>
-          <p:cNvSpPr/>
-          <p:nvPr/>
-        </p:nvSpPr>
-        <p:spPr>
-          <a:xfrm>
-            <a:off x="9189720" y="1783080"/>
-            <a:ext cx="2697480" cy="3291840"/>
-          </a:xfrm>
-          <a:prstGeom prst="roundRect">
-            <a:avLst/>
-          </a:prstGeom>
-          <a:solidFill>
-            <a:srgbClr val="FFFFFF"/>
-          </a:solidFill>
-          <a:ln w="9525">
-            <a:solidFill>
-              <a:srgbClr val="DDE3EE"/>
-            </a:solidFill>
-          </a:ln>
-          <a:effectLst/>
-        </p:spPr>
-        <p:style>
-          <a:lnRef idx="1">
-            <a:schemeClr val="accent1"/>
-          </a:lnRef>
-          <a:fillRef idx="3">
-            <a:schemeClr val="accent1"/>
-          </a:fillRef>
-          <a:effectRef idx="2">
-            <a:schemeClr val="accent1"/>
-          </a:effectRef>
-          <a:fontRef idx="minor">
-            <a:schemeClr val="lt1"/>
-          </a:fontRef>
-        </p:style>
-        <p:txBody>
-          <a:bodyPr rtlCol="0" anchor="ctr"/>
-          <a:lstStyle/>
-          <a:p>
-            <a:pPr algn="ctr"/>
-          </a:p>
-        </p:txBody>
-      </p:sp>
-      <p:sp>
-        <p:nvSpPr>
-          <p:cNvPr id="21" name="Rectangle 20"/>
-          <p:cNvSpPr/>
-          <p:nvPr/>
-        </p:nvSpPr>
-        <p:spPr>
-          <a:xfrm>
-            <a:off x="9189720" y="1783080"/>
-            <a:ext cx="73152" cy="3291840"/>
-          </a:xfrm>
-          <a:prstGeom prst="rect">
-            <a:avLst/>
-          </a:prstGeom>
-          <a:solidFill>
-            <a:srgbClr val="16A34A"/>
-          </a:solidFill>
-          <a:ln>
-            <a:noFill/>
-          </a:ln>
-          <a:effectLst/>
-        </p:spPr>
-        <p:style>
-          <a:lnRef idx="1">
-            <a:schemeClr val="accent1"/>
-          </a:lnRef>
-          <a:fillRef idx="3">
-            <a:schemeClr val="accent1"/>
-          </a:fillRef>
-          <a:effectRef idx="2">
-            <a:schemeClr val="accent1"/>
-          </a:effectRef>
-          <a:fontRef idx="minor">
-            <a:schemeClr val="lt1"/>
-          </a:fontRef>
-        </p:style>
-        <p:txBody>
-          <a:bodyPr rtlCol="0" anchor="ctr"/>
-          <a:lstStyle/>
-          <a:p>
-            <a:pPr algn="ctr"/>
-          </a:p>
-        </p:txBody>
-      </p:sp>
-      <p:sp>
-        <p:nvSpPr>
-          <p:cNvPr id="22" name="TextBox 21"/>
-          <p:cNvSpPr txBox="1"/>
-          <p:nvPr/>
-        </p:nvSpPr>
-        <p:spPr>
-          <a:xfrm>
-            <a:off x="9354312" y="2194560"/>
-            <a:ext cx="2368296" cy="1005840"/>
-          </a:xfrm>
-          <a:prstGeom prst="rect">
-            <a:avLst/>
-          </a:prstGeom>
-          <a:noFill/>
-        </p:spPr>
-        <p:txBody>
-          <a:bodyPr wrap="square" lIns="0" rIns="0" tIns="0" bIns="0" anchor="t">
-            <a:spAutoFit/>
-          </a:bodyPr>
-          <a:lstStyle/>
-          <a:p>
-            <a:pPr algn="ctr">
-              <a:lnSpc>
-                <a:spcPct val="130000"/>
-              </a:lnSpc>
-            </a:pPr>
-            <a:r>
-              <a:rPr sz="4000" b="1" i="0">
-                <a:solidFill>
-                  <a:srgbClr val="16A34A"/>
-                </a:solidFill>
-                <a:latin typeface="Cambria"/>
-              </a:rPr>
-              <a:t>約8万</a:t>
-            </a:r>
-          </a:p>
-        </p:txBody>
-      </p:sp>
-      <p:sp>
-        <p:nvSpPr>
-          <p:cNvPr id="23" name="TextBox 22"/>
-          <p:cNvSpPr txBox="1"/>
-          <p:nvPr/>
-        </p:nvSpPr>
-        <p:spPr>
-          <a:xfrm>
-            <a:off x="9189720" y="3200400"/>
-            <a:ext cx="2697480" cy="457200"/>
-          </a:xfrm>
-          <a:prstGeom prst="rect">
-            <a:avLst/>
-          </a:prstGeom>
-          <a:noFill/>
-        </p:spPr>
-        <p:txBody>
-          <a:bodyPr wrap="square" lIns="0" rIns="0" tIns="0" bIns="0" anchor="t">
-            <a:spAutoFit/>
-          </a:bodyPr>
-          <a:lstStyle/>
-          <a:p>
-            <a:pPr algn="ctr">
-              <a:lnSpc>
-                <a:spcPct val="130000"/>
-              </a:lnSpc>
-            </a:pPr>
-            <a:r>
-              <a:rPr sz="2000" b="0" i="0">
-                <a:solidFill>
-                  <a:srgbClr val="1F2937"/>
-                </a:solidFill>
-                <a:latin typeface="Cambria"/>
-              </a:rPr>
-              <a:t>件</a:t>
-            </a:r>
-          </a:p>
-        </p:txBody>
-      </p:sp>
-      <p:sp>
-        <p:nvSpPr>
-          <p:cNvPr id="24" name="TextBox 23"/>
-          <p:cNvSpPr txBox="1"/>
-          <p:nvPr/>
-        </p:nvSpPr>
-        <p:spPr>
-          <a:xfrm>
-            <a:off x="9372600" y="3840480"/>
-            <a:ext cx="2331720" cy="1005840"/>
-          </a:xfrm>
-          <a:prstGeom prst="rect">
-            <a:avLst/>
-          </a:prstGeom>
-          <a:noFill/>
-        </p:spPr>
-        <p:txBody>
-          <a:bodyPr wrap="square" lIns="0" rIns="0" tIns="0" bIns="0" anchor="t">
-            <a:spAutoFit/>
-          </a:bodyPr>
-          <a:lstStyle/>
-          <a:p>
-            <a:pPr algn="ctr">
-              <a:lnSpc>
-                <a:spcPct val="140000"/>
-              </a:lnSpc>
-            </a:pPr>
-            <a:r>
-              <a:rPr sz="1200" b="0" i="0">
-                <a:solidFill>
-                  <a:srgbClr val="5B6472"/>
-                </a:solidFill>
-                <a:latin typeface="Calibri"/>
-              </a:rPr>
-              <a:t>「悪いものリスト」を
-自動で取り込んで照合</a:t>
-            </a:r>
-          </a:p>
-        </p:txBody>
-      </p:sp>
-      <p:sp>
-        <p:nvSpPr>
-          <p:cNvPr id="25" name="Rounded Rectangle 24"/>
-          <p:cNvSpPr/>
-          <p:nvPr/>
-        </p:nvSpPr>
-        <p:spPr>
-          <a:xfrm>
-            <a:off x="548640" y="5440680"/>
-            <a:ext cx="11064240" cy="1005840"/>
-          </a:xfrm>
-          <a:prstGeom prst="roundRect">
-            <a:avLst/>
-          </a:prstGeom>
-          <a:solidFill>
-            <a:srgbClr val="E8F0FE"/>
-          </a:solidFill>
-          <a:ln w="9525">
-            <a:solidFill>
-              <a:srgbClr val="E8F0FE"/>
-            </a:solidFill>
-          </a:ln>
-          <a:effectLst/>
-        </p:spPr>
-        <p:style>
-          <a:lnRef idx="1">
-            <a:schemeClr val="accent1"/>
-          </a:lnRef>
-          <a:fillRef idx="3">
-            <a:schemeClr val="accent1"/>
-          </a:fillRef>
-          <a:effectRef idx="2">
-            <a:schemeClr val="accent1"/>
-          </a:effectRef>
-          <a:fontRef idx="minor">
-            <a:schemeClr val="lt1"/>
-          </a:fontRef>
-        </p:style>
-        <p:txBody>
-          <a:bodyPr rtlCol="0" anchor="ctr"/>
-          <a:lstStyle/>
-          <a:p>
-            <a:pPr algn="ctr"/>
-          </a:p>
-        </p:txBody>
-      </p:sp>
-      <p:sp>
-        <p:nvSpPr>
-          <p:cNvPr id="26" name="TextBox 25"/>
-          <p:cNvSpPr txBox="1"/>
-          <p:nvPr/>
-        </p:nvSpPr>
-        <p:spPr>
-          <a:xfrm>
-            <a:off x="868680" y="5440680"/>
-            <a:ext cx="10515600" cy="1005840"/>
-          </a:xfrm>
-          <a:prstGeom prst="rect">
-            <a:avLst/>
-          </a:prstGeom>
-          <a:noFill/>
-        </p:spPr>
-        <p:txBody>
-          <a:bodyPr wrap="square" lIns="0" rIns="0" tIns="0" bIns="0" anchor="ctr">
-            <a:spAutoFit/>
-          </a:bodyPr>
-          <a:lstStyle/>
-          <a:p>
-            <a:pPr algn="l">
-              <a:lnSpc>
-                <a:spcPct val="130000"/>
-              </a:lnSpc>
-            </a:pPr>
-            <a:r>
-              <a:rPr sz="1400" b="0" i="0">
-                <a:solidFill>
-                  <a:srgbClr val="1F2937"/>
-                </a:solidFill>
-                <a:latin typeface="Calibri"/>
-              </a:rPr>
-              <a:t>🚀 今後:  時間の流れを追った相関分析 (「A の後に B が起きたら怪しい」) や、AI による検知ルールの自動生成へ。</a:t>
-            </a:r>
-          </a:p>
-        </p:txBody>
-      </p:sp>
-      <p:sp>
-        <p:nvSpPr>
-          <p:cNvPr id="27" name="TextBox 26"/>
-          <p:cNvSpPr txBox="1"/>
-          <p:nvPr/>
-        </p:nvSpPr>
-        <p:spPr>
-          <a:xfrm>
-            <a:off x="10972800" y="6446520"/>
-            <a:ext cx="914400" cy="274320"/>
-          </a:xfrm>
-          <a:prstGeom prst="rect">
-            <a:avLst/>
-          </a:prstGeom>
-          <a:noFill/>
-        </p:spPr>
-        <p:txBody>
-          <a:bodyPr wrap="square" lIns="0" rIns="0" tIns="0" bIns="0" anchor="t">
-            <a:spAutoFit/>
-          </a:bodyPr>
-          <a:lstStyle/>
-          <a:p>
-            <a:pPr algn="r">
-              <a:lnSpc>
-                <a:spcPct val="130000"/>
-              </a:lnSpc>
-            </a:pPr>
-            <a:r>
-              <a:rPr sz="900" b="0" i="0">
-                <a:solidFill>
-                  <a:srgbClr val="5B6472"/>
-                </a:solidFill>
-                <a:latin typeface="Calibri"/>
-              </a:rPr>
-              <a:t>14 / 15</a:t>
-            </a:r>
-          </a:p>
-        </p:txBody>
-      </p:sp>
-    </p:spTree>
-  </p:cSld>
-  <p:clrMapOvr>
-    <a:masterClrMapping/>
-  </p:clrMapOvr>
-</p:sld>
-</file>
-
 <file path=ppt/slides/slide15.xml><?xml version="1.0" encoding="utf-8"?>
 <p:sld xmlns:a="http://schemas.openxmlformats.org/drawingml/2006/main" xmlns:p="http://schemas.openxmlformats.org/presentationml/2006/main" xmlns:r="http://schemas.openxmlformats.org/officeDocument/2006/relationships">
   <p:cSld>
@@ -10551,7 +11021,7 @@
             <a:avLst/>
           </a:prstGeom>
           <a:solidFill>
-            <a:srgbClr val="1B254F"/>
+            <a:srgbClr val="F4F6FA"/>
           </a:solidFill>
           <a:ln>
             <a:noFill/>
@@ -10588,72 +11058,72 @@
         </p:nvSpPr>
         <p:spPr>
           <a:xfrm>
-            <a:off x="548640" y="1371600"/>
-            <a:ext cx="10972800" cy="1097280"/>
-          </a:xfrm>
-          <a:prstGeom prst="rect">
-            <a:avLst/>
-          </a:prstGeom>
-          <a:noFill/>
-        </p:spPr>
-        <p:txBody>
-          <a:bodyPr wrap="square" lIns="0" rIns="0" tIns="0" bIns="0" anchor="t">
-            <a:spAutoFit/>
-          </a:bodyPr>
-          <a:lstStyle/>
-          <a:p>
-            <a:pPr algn="ctr">
-              <a:lnSpc>
-                <a:spcPct val="130000"/>
-              </a:lnSpc>
-            </a:pPr>
-            <a:r>
-              <a:rPr sz="5600" b="1" i="0">
-                <a:solidFill>
-                  <a:srgbClr val="FFFFFF"/>
+            <a:off x="548640" y="347472"/>
+            <a:ext cx="10972800" cy="274320"/>
+          </a:xfrm>
+          <a:prstGeom prst="rect">
+            <a:avLst/>
+          </a:prstGeom>
+          <a:noFill/>
+        </p:spPr>
+        <p:txBody>
+          <a:bodyPr wrap="square" lIns="0" rIns="0" tIns="0" bIns="0" anchor="t">
+            <a:spAutoFit/>
+          </a:bodyPr>
+          <a:lstStyle/>
+          <a:p>
+            <a:pPr algn="l">
+              <a:lnSpc>
+                <a:spcPct val="130000"/>
+              </a:lnSpc>
+            </a:pPr>
+            <a:r>
+              <a:rPr sz="1100" b="1" i="0">
+                <a:solidFill>
+                  <a:srgbClr val="2563EB"/>
+                </a:solidFill>
+                <a:latin typeface="Calibri"/>
+              </a:rPr>
+              <a:t>成果</a:t>
+            </a:r>
+          </a:p>
+        </p:txBody>
+      </p:sp>
+      <p:sp>
+        <p:nvSpPr>
+          <p:cNvPr id="4" name="TextBox 3"/>
+          <p:cNvSpPr txBox="1"/>
+          <p:nvPr/>
+        </p:nvSpPr>
+        <p:spPr>
+          <a:xfrm>
+            <a:off x="548640" y="621792"/>
+            <a:ext cx="11155680" cy="640080"/>
+          </a:xfrm>
+          <a:prstGeom prst="rect">
+            <a:avLst/>
+          </a:prstGeom>
+          <a:noFill/>
+        </p:spPr>
+        <p:txBody>
+          <a:bodyPr wrap="square" lIns="0" rIns="0" tIns="0" bIns="0" anchor="t">
+            <a:spAutoFit/>
+          </a:bodyPr>
+          <a:lstStyle/>
+          <a:p>
+            <a:pPr algn="l">
+              <a:lnSpc>
+                <a:spcPct val="130000"/>
+              </a:lnSpc>
+            </a:pPr>
+            <a:r>
+              <a:rPr sz="2800" b="1" i="0">
+                <a:solidFill>
+                  <a:srgbClr val="1F2937"/>
                 </a:solidFill>
                 <a:latin typeface="Cambria"/>
               </a:rPr>
-              <a:t>ありがとうございました</a:t>
-            </a:r>
-          </a:p>
-        </p:txBody>
-      </p:sp>
-      <p:sp>
-        <p:nvSpPr>
-          <p:cNvPr id="4" name="TextBox 3"/>
-          <p:cNvSpPr txBox="1"/>
-          <p:nvPr/>
-        </p:nvSpPr>
-        <p:spPr>
-          <a:xfrm>
-            <a:off x="548640" y="2468880"/>
-            <a:ext cx="10972800" cy="548640"/>
-          </a:xfrm>
-          <a:prstGeom prst="rect">
-            <a:avLst/>
-          </a:prstGeom>
-          <a:noFill/>
-        </p:spPr>
-        <p:txBody>
-          <a:bodyPr wrap="square" lIns="0" rIns="0" tIns="0" bIns="0" anchor="t">
-            <a:spAutoFit/>
-          </a:bodyPr>
-          <a:lstStyle/>
-          <a:p>
-            <a:pPr algn="ctr">
-              <a:lnSpc>
-                <a:spcPct val="130000"/>
-              </a:lnSpc>
-            </a:pPr>
-            <a:r>
-              <a:rPr sz="2200" b="0" i="1">
-                <a:solidFill>
-                  <a:srgbClr val="CADCFC"/>
-                </a:solidFill>
-                <a:latin typeface="Calibri"/>
-              </a:rPr>
-              <a:t>ご質問・フィードバックをお願いします</a:t>
+              <a:t>まとめ — 開発したもの</a:t>
             </a:r>
           </a:p>
         </p:txBody>
@@ -10666,18 +11136,18 @@
         </p:nvSpPr>
         <p:spPr>
           <a:xfrm>
-            <a:off x="2560320" y="3566160"/>
-            <a:ext cx="7040880" cy="2011680"/>
+            <a:off x="548640" y="1783080"/>
+            <a:ext cx="2697480" cy="3291840"/>
           </a:xfrm>
           <a:prstGeom prst="roundRect">
             <a:avLst/>
           </a:prstGeom>
           <a:solidFill>
-            <a:srgbClr val="273366"/>
+            <a:srgbClr val="FFFFFF"/>
           </a:solidFill>
           <a:ln w="9525">
             <a:solidFill>
-              <a:srgbClr val="273366"/>
+              <a:srgbClr val="DDE3EE"/>
             </a:solidFill>
           </a:ln>
           <a:effectLst/>
@@ -10706,22 +11176,854 @@
       </p:sp>
       <p:sp>
         <p:nvSpPr>
-          <p:cNvPr id="6" name="TextBox 5"/>
-          <p:cNvSpPr txBox="1"/>
-          <p:nvPr/>
-        </p:nvSpPr>
-        <p:spPr>
-          <a:xfrm>
-            <a:off x="2834640" y="3749039"/>
-            <a:ext cx="6492240" cy="365760"/>
-          </a:xfrm>
-          <a:prstGeom prst="rect">
-            <a:avLst/>
-          </a:prstGeom>
-          <a:noFill/>
-        </p:spPr>
-        <p:txBody>
-          <a:bodyPr wrap="square" lIns="0" rIns="0" tIns="0" bIns="0" anchor="t">
+          <p:cNvPr id="6" name="Rectangle 5"/>
+          <p:cNvSpPr/>
+          <p:nvPr/>
+        </p:nvSpPr>
+        <p:spPr>
+          <a:xfrm>
+            <a:off x="548640" y="1783080"/>
+            <a:ext cx="73152" cy="3291840"/>
+          </a:xfrm>
+          <a:prstGeom prst="rect">
+            <a:avLst/>
+          </a:prstGeom>
+          <a:solidFill>
+            <a:srgbClr val="1D4ED8"/>
+          </a:solidFill>
+          <a:ln>
+            <a:noFill/>
+          </a:ln>
+          <a:effectLst/>
+        </p:spPr>
+        <p:style>
+          <a:lnRef idx="1">
+            <a:schemeClr val="accent1"/>
+          </a:lnRef>
+          <a:fillRef idx="3">
+            <a:schemeClr val="accent1"/>
+          </a:fillRef>
+          <a:effectRef idx="2">
+            <a:schemeClr val="accent1"/>
+          </a:effectRef>
+          <a:fontRef idx="minor">
+            <a:schemeClr val="lt1"/>
+          </a:fontRef>
+        </p:style>
+        <p:txBody>
+          <a:bodyPr rtlCol="0" anchor="ctr"/>
+          <a:lstStyle/>
+          <a:p>
+            <a:pPr algn="ctr"/>
+          </a:p>
+        </p:txBody>
+      </p:sp>
+      <p:sp>
+        <p:nvSpPr>
+          <p:cNvPr id="7" name="TextBox 6"/>
+          <p:cNvSpPr txBox="1"/>
+          <p:nvPr/>
+        </p:nvSpPr>
+        <p:spPr>
+          <a:xfrm>
+            <a:off x="713232" y="2194560"/>
+            <a:ext cx="2368296" cy="1005840"/>
+          </a:xfrm>
+          <a:prstGeom prst="rect">
+            <a:avLst/>
+          </a:prstGeom>
+          <a:noFill/>
+        </p:spPr>
+        <p:txBody>
+          <a:bodyPr wrap="square" lIns="0" rIns="0" tIns="0" bIns="0" anchor="t">
+            <a:spAutoFit/>
+          </a:bodyPr>
+          <a:lstStyle/>
+          <a:p>
+            <a:pPr algn="ctr">
+              <a:lnSpc>
+                <a:spcPct val="130000"/>
+              </a:lnSpc>
+            </a:pPr>
+            <a:r>
+              <a:rPr sz="4000" b="1" i="0">
+                <a:solidFill>
+                  <a:srgbClr val="1D4ED8"/>
+                </a:solidFill>
+                <a:latin typeface="Cambria"/>
+              </a:rPr>
+              <a:t>新文法</a:t>
+            </a:r>
+          </a:p>
+        </p:txBody>
+      </p:sp>
+      <p:sp>
+        <p:nvSpPr>
+          <p:cNvPr id="8" name="TextBox 7"/>
+          <p:cNvSpPr txBox="1"/>
+          <p:nvPr/>
+        </p:nvSpPr>
+        <p:spPr>
+          <a:xfrm>
+            <a:off x="548640" y="3200400"/>
+            <a:ext cx="2697480" cy="457200"/>
+          </a:xfrm>
+          <a:prstGeom prst="rect">
+            <a:avLst/>
+          </a:prstGeom>
+          <a:noFill/>
+        </p:spPr>
+        <p:txBody>
+          <a:bodyPr wrap="square" lIns="0" rIns="0" tIns="0" bIns="0" anchor="t">
+            <a:spAutoFit/>
+          </a:bodyPr>
+          <a:lstStyle/>
+          <a:p>
+            <a:pPr algn="ctr">
+              <a:lnSpc>
+                <a:spcPct val="130000"/>
+              </a:lnSpc>
+            </a:pPr>
+            <a:r>
+              <a:rPr sz="2000" b="0" i="0">
+                <a:solidFill>
+                  <a:srgbClr val="1F2937"/>
+                </a:solidFill>
+                <a:latin typeface="Cambria"/>
+              </a:rPr>
+              <a:t>lookup:</a:t>
+            </a:r>
+          </a:p>
+        </p:txBody>
+      </p:sp>
+      <p:sp>
+        <p:nvSpPr>
+          <p:cNvPr id="9" name="TextBox 8"/>
+          <p:cNvSpPr txBox="1"/>
+          <p:nvPr/>
+        </p:nvSpPr>
+        <p:spPr>
+          <a:xfrm>
+            <a:off x="731520" y="3840480"/>
+            <a:ext cx="2331720" cy="1005840"/>
+          </a:xfrm>
+          <a:prstGeom prst="rect">
+            <a:avLst/>
+          </a:prstGeom>
+          <a:noFill/>
+        </p:spPr>
+        <p:txBody>
+          <a:bodyPr wrap="square" lIns="0" rIns="0" tIns="0" bIns="0" anchor="t">
+            <a:spAutoFit/>
+          </a:bodyPr>
+          <a:lstStyle/>
+          <a:p>
+            <a:pPr algn="ctr">
+              <a:lnSpc>
+                <a:spcPct val="140000"/>
+              </a:lnSpc>
+            </a:pPr>
+            <a:r>
+              <a:rPr sz="1200" b="0" i="0">
+                <a:solidFill>
+                  <a:srgbClr val="5B6472"/>
+                </a:solidFill>
+                <a:latin typeface="Calibri"/>
+              </a:rPr>
+              <a:t>エンジン本体 (Rust) を改造し
+リスト照合機能を追加</a:t>
+            </a:r>
+          </a:p>
+        </p:txBody>
+      </p:sp>
+      <p:sp>
+        <p:nvSpPr>
+          <p:cNvPr id="10" name="Rounded Rectangle 9"/>
+          <p:cNvSpPr/>
+          <p:nvPr/>
+        </p:nvSpPr>
+        <p:spPr>
+          <a:xfrm>
+            <a:off x="3429000" y="1783080"/>
+            <a:ext cx="2697480" cy="3291840"/>
+          </a:xfrm>
+          <a:prstGeom prst="roundRect">
+            <a:avLst/>
+          </a:prstGeom>
+          <a:solidFill>
+            <a:srgbClr val="FFFFFF"/>
+          </a:solidFill>
+          <a:ln w="9525">
+            <a:solidFill>
+              <a:srgbClr val="DDE3EE"/>
+            </a:solidFill>
+          </a:ln>
+          <a:effectLst/>
+        </p:spPr>
+        <p:style>
+          <a:lnRef idx="1">
+            <a:schemeClr val="accent1"/>
+          </a:lnRef>
+          <a:fillRef idx="3">
+            <a:schemeClr val="accent1"/>
+          </a:fillRef>
+          <a:effectRef idx="2">
+            <a:schemeClr val="accent1"/>
+          </a:effectRef>
+          <a:fontRef idx="minor">
+            <a:schemeClr val="lt1"/>
+          </a:fontRef>
+        </p:style>
+        <p:txBody>
+          <a:bodyPr rtlCol="0" anchor="ctr"/>
+          <a:lstStyle/>
+          <a:p>
+            <a:pPr algn="ctr"/>
+          </a:p>
+        </p:txBody>
+      </p:sp>
+      <p:sp>
+        <p:nvSpPr>
+          <p:cNvPr id="11" name="Rectangle 10"/>
+          <p:cNvSpPr/>
+          <p:nvPr/>
+        </p:nvSpPr>
+        <p:spPr>
+          <a:xfrm>
+            <a:off x="3429000" y="1783080"/>
+            <a:ext cx="73152" cy="3291840"/>
+          </a:xfrm>
+          <a:prstGeom prst="rect">
+            <a:avLst/>
+          </a:prstGeom>
+          <a:solidFill>
+            <a:srgbClr val="EA580C"/>
+          </a:solidFill>
+          <a:ln>
+            <a:noFill/>
+          </a:ln>
+          <a:effectLst/>
+        </p:spPr>
+        <p:style>
+          <a:lnRef idx="1">
+            <a:schemeClr val="accent1"/>
+          </a:lnRef>
+          <a:fillRef idx="3">
+            <a:schemeClr val="accent1"/>
+          </a:fillRef>
+          <a:effectRef idx="2">
+            <a:schemeClr val="accent1"/>
+          </a:effectRef>
+          <a:fontRef idx="minor">
+            <a:schemeClr val="lt1"/>
+          </a:fontRef>
+        </p:style>
+        <p:txBody>
+          <a:bodyPr rtlCol="0" anchor="ctr"/>
+          <a:lstStyle/>
+          <a:p>
+            <a:pPr algn="ctr"/>
+          </a:p>
+        </p:txBody>
+      </p:sp>
+      <p:sp>
+        <p:nvSpPr>
+          <p:cNvPr id="12" name="TextBox 11"/>
+          <p:cNvSpPr txBox="1"/>
+          <p:nvPr/>
+        </p:nvSpPr>
+        <p:spPr>
+          <a:xfrm>
+            <a:off x="3593592" y="2194560"/>
+            <a:ext cx="2368296" cy="1005840"/>
+          </a:xfrm>
+          <a:prstGeom prst="rect">
+            <a:avLst/>
+          </a:prstGeom>
+          <a:noFill/>
+        </p:spPr>
+        <p:txBody>
+          <a:bodyPr wrap="square" lIns="0" rIns="0" tIns="0" bIns="0" anchor="t">
+            <a:spAutoFit/>
+          </a:bodyPr>
+          <a:lstStyle/>
+          <a:p>
+            <a:pPr algn="ctr">
+              <a:lnSpc>
+                <a:spcPct val="130000"/>
+              </a:lnSpc>
+            </a:pPr>
+            <a:r>
+              <a:rPr sz="4000" b="1" i="0">
+                <a:solidFill>
+                  <a:srgbClr val="EA580C"/>
+                </a:solidFill>
+                <a:latin typeface="Cambria"/>
+              </a:rPr>
+              <a:t>13</a:t>
+            </a:r>
+          </a:p>
+        </p:txBody>
+      </p:sp>
+      <p:sp>
+        <p:nvSpPr>
+          <p:cNvPr id="13" name="TextBox 12"/>
+          <p:cNvSpPr txBox="1"/>
+          <p:nvPr/>
+        </p:nvSpPr>
+        <p:spPr>
+          <a:xfrm>
+            <a:off x="3429000" y="3200400"/>
+            <a:ext cx="2697480" cy="457200"/>
+          </a:xfrm>
+          <a:prstGeom prst="rect">
+            <a:avLst/>
+          </a:prstGeom>
+          <a:noFill/>
+        </p:spPr>
+        <p:txBody>
+          <a:bodyPr wrap="square" lIns="0" rIns="0" tIns="0" bIns="0" anchor="t">
+            <a:spAutoFit/>
+          </a:bodyPr>
+          <a:lstStyle/>
+          <a:p>
+            <a:pPr algn="ctr">
+              <a:lnSpc>
+                <a:spcPct val="130000"/>
+              </a:lnSpc>
+            </a:pPr>
+            <a:r>
+              <a:rPr sz="2000" b="0" i="0">
+                <a:solidFill>
+                  <a:srgbClr val="1F2937"/>
+                </a:solidFill>
+                <a:latin typeface="Cambria"/>
+              </a:rPr>
+              <a:t>本</a:t>
+            </a:r>
+          </a:p>
+        </p:txBody>
+      </p:sp>
+      <p:sp>
+        <p:nvSpPr>
+          <p:cNvPr id="14" name="TextBox 13"/>
+          <p:cNvSpPr txBox="1"/>
+          <p:nvPr/>
+        </p:nvSpPr>
+        <p:spPr>
+          <a:xfrm>
+            <a:off x="3611880" y="3840480"/>
+            <a:ext cx="2331720" cy="1005840"/>
+          </a:xfrm>
+          <a:prstGeom prst="rect">
+            <a:avLst/>
+          </a:prstGeom>
+          <a:noFill/>
+        </p:spPr>
+        <p:txBody>
+          <a:bodyPr wrap="square" lIns="0" rIns="0" tIns="0" bIns="0" anchor="t">
+            <a:spAutoFit/>
+          </a:bodyPr>
+          <a:lstStyle/>
+          <a:p>
+            <a:pPr algn="ctr">
+              <a:lnSpc>
+                <a:spcPct val="140000"/>
+              </a:lnSpc>
+            </a:pPr>
+            <a:r>
+              <a:rPr sz="1200" b="0" i="0">
+                <a:solidFill>
+                  <a:srgbClr val="5B6472"/>
+                </a:solidFill>
+                <a:latin typeface="Calibri"/>
+              </a:rPr>
+              <a:t>攻撃を見抜く検知ルールを
+自作 (痕跡隠蔽の検知など)</a:t>
+            </a:r>
+          </a:p>
+        </p:txBody>
+      </p:sp>
+      <p:sp>
+        <p:nvSpPr>
+          <p:cNvPr id="15" name="Rounded Rectangle 14"/>
+          <p:cNvSpPr/>
+          <p:nvPr/>
+        </p:nvSpPr>
+        <p:spPr>
+          <a:xfrm>
+            <a:off x="6309360" y="1783080"/>
+            <a:ext cx="2697480" cy="3291840"/>
+          </a:xfrm>
+          <a:prstGeom prst="roundRect">
+            <a:avLst/>
+          </a:prstGeom>
+          <a:solidFill>
+            <a:srgbClr val="FFFFFF"/>
+          </a:solidFill>
+          <a:ln w="9525">
+            <a:solidFill>
+              <a:srgbClr val="DDE3EE"/>
+            </a:solidFill>
+          </a:ln>
+          <a:effectLst/>
+        </p:spPr>
+        <p:style>
+          <a:lnRef idx="1">
+            <a:schemeClr val="accent1"/>
+          </a:lnRef>
+          <a:fillRef idx="3">
+            <a:schemeClr val="accent1"/>
+          </a:fillRef>
+          <a:effectRef idx="2">
+            <a:schemeClr val="accent1"/>
+          </a:effectRef>
+          <a:fontRef idx="minor">
+            <a:schemeClr val="lt1"/>
+          </a:fontRef>
+        </p:style>
+        <p:txBody>
+          <a:bodyPr rtlCol="0" anchor="ctr"/>
+          <a:lstStyle/>
+          <a:p>
+            <a:pPr algn="ctr"/>
+          </a:p>
+        </p:txBody>
+      </p:sp>
+      <p:sp>
+        <p:nvSpPr>
+          <p:cNvPr id="16" name="Rectangle 15"/>
+          <p:cNvSpPr/>
+          <p:nvPr/>
+        </p:nvSpPr>
+        <p:spPr>
+          <a:xfrm>
+            <a:off x="6309360" y="1783080"/>
+            <a:ext cx="73152" cy="3291840"/>
+          </a:xfrm>
+          <a:prstGeom prst="rect">
+            <a:avLst/>
+          </a:prstGeom>
+          <a:solidFill>
+            <a:srgbClr val="CA8A04"/>
+          </a:solidFill>
+          <a:ln>
+            <a:noFill/>
+          </a:ln>
+          <a:effectLst/>
+        </p:spPr>
+        <p:style>
+          <a:lnRef idx="1">
+            <a:schemeClr val="accent1"/>
+          </a:lnRef>
+          <a:fillRef idx="3">
+            <a:schemeClr val="accent1"/>
+          </a:fillRef>
+          <a:effectRef idx="2">
+            <a:schemeClr val="accent1"/>
+          </a:effectRef>
+          <a:fontRef idx="minor">
+            <a:schemeClr val="lt1"/>
+          </a:fontRef>
+        </p:style>
+        <p:txBody>
+          <a:bodyPr rtlCol="0" anchor="ctr"/>
+          <a:lstStyle/>
+          <a:p>
+            <a:pPr algn="ctr"/>
+          </a:p>
+        </p:txBody>
+      </p:sp>
+      <p:sp>
+        <p:nvSpPr>
+          <p:cNvPr id="17" name="TextBox 16"/>
+          <p:cNvSpPr txBox="1"/>
+          <p:nvPr/>
+        </p:nvSpPr>
+        <p:spPr>
+          <a:xfrm>
+            <a:off x="6473952" y="2194560"/>
+            <a:ext cx="2368296" cy="1005840"/>
+          </a:xfrm>
+          <a:prstGeom prst="rect">
+            <a:avLst/>
+          </a:prstGeom>
+          <a:noFill/>
+        </p:spPr>
+        <p:txBody>
+          <a:bodyPr wrap="square" lIns="0" rIns="0" tIns="0" bIns="0" anchor="t">
+            <a:spAutoFit/>
+          </a:bodyPr>
+          <a:lstStyle/>
+          <a:p>
+            <a:pPr algn="ctr">
+              <a:lnSpc>
+                <a:spcPct val="130000"/>
+              </a:lnSpc>
+            </a:pPr>
+            <a:r>
+              <a:rPr sz="4000" b="1" i="0">
+                <a:solidFill>
+                  <a:srgbClr val="CA8A04"/>
+                </a:solidFill>
+                <a:latin typeface="Cambria"/>
+              </a:rPr>
+              <a:t>GUI</a:t>
+            </a:r>
+          </a:p>
+        </p:txBody>
+      </p:sp>
+      <p:sp>
+        <p:nvSpPr>
+          <p:cNvPr id="18" name="TextBox 17"/>
+          <p:cNvSpPr txBox="1"/>
+          <p:nvPr/>
+        </p:nvSpPr>
+        <p:spPr>
+          <a:xfrm>
+            <a:off x="6309360" y="3200400"/>
+            <a:ext cx="2697480" cy="457200"/>
+          </a:xfrm>
+          <a:prstGeom prst="rect">
+            <a:avLst/>
+          </a:prstGeom>
+          <a:noFill/>
+        </p:spPr>
+        <p:txBody>
+          <a:bodyPr wrap="square" lIns="0" rIns="0" tIns="0" bIns="0" anchor="t">
+            <a:spAutoFit/>
+          </a:bodyPr>
+          <a:lstStyle/>
+          <a:p>
+            <a:pPr algn="ctr">
+              <a:lnSpc>
+                <a:spcPct val="130000"/>
+              </a:lnSpc>
+            </a:pPr>
+            <a:r>
+              <a:rPr sz="2000" b="0" i="0">
+                <a:solidFill>
+                  <a:srgbClr val="1F2937"/>
+                </a:solidFill>
+                <a:latin typeface="Cambria"/>
+              </a:rPr>
+              <a:t>ゼロから開発</a:t>
+            </a:r>
+          </a:p>
+        </p:txBody>
+      </p:sp>
+      <p:sp>
+        <p:nvSpPr>
+          <p:cNvPr id="19" name="TextBox 18"/>
+          <p:cNvSpPr txBox="1"/>
+          <p:nvPr/>
+        </p:nvSpPr>
+        <p:spPr>
+          <a:xfrm>
+            <a:off x="6492240" y="3840480"/>
+            <a:ext cx="2331720" cy="1005840"/>
+          </a:xfrm>
+          <a:prstGeom prst="rect">
+            <a:avLst/>
+          </a:prstGeom>
+          <a:noFill/>
+        </p:spPr>
+        <p:txBody>
+          <a:bodyPr wrap="square" lIns="0" rIns="0" tIns="0" bIns="0" anchor="t">
+            <a:spAutoFit/>
+          </a:bodyPr>
+          <a:lstStyle/>
+          <a:p>
+            <a:pPr algn="ctr">
+              <a:lnSpc>
+                <a:spcPct val="140000"/>
+              </a:lnSpc>
+            </a:pPr>
+            <a:r>
+              <a:rPr sz="1200" b="0" i="0">
+                <a:solidFill>
+                  <a:srgbClr val="5B6472"/>
+                </a:solidFill>
+                <a:latin typeface="Calibri"/>
+              </a:rPr>
+              <a:t>結果を日本語で読み解く
+調査画面を自作</a:t>
+            </a:r>
+          </a:p>
+        </p:txBody>
+      </p:sp>
+      <p:sp>
+        <p:nvSpPr>
+          <p:cNvPr id="20" name="Rounded Rectangle 19"/>
+          <p:cNvSpPr/>
+          <p:nvPr/>
+        </p:nvSpPr>
+        <p:spPr>
+          <a:xfrm>
+            <a:off x="9189720" y="1783080"/>
+            <a:ext cx="2697480" cy="3291840"/>
+          </a:xfrm>
+          <a:prstGeom prst="roundRect">
+            <a:avLst/>
+          </a:prstGeom>
+          <a:solidFill>
+            <a:srgbClr val="FFFFFF"/>
+          </a:solidFill>
+          <a:ln w="9525">
+            <a:solidFill>
+              <a:srgbClr val="DDE3EE"/>
+            </a:solidFill>
+          </a:ln>
+          <a:effectLst/>
+        </p:spPr>
+        <p:style>
+          <a:lnRef idx="1">
+            <a:schemeClr val="accent1"/>
+          </a:lnRef>
+          <a:fillRef idx="3">
+            <a:schemeClr val="accent1"/>
+          </a:fillRef>
+          <a:effectRef idx="2">
+            <a:schemeClr val="accent1"/>
+          </a:effectRef>
+          <a:fontRef idx="minor">
+            <a:schemeClr val="lt1"/>
+          </a:fontRef>
+        </p:style>
+        <p:txBody>
+          <a:bodyPr rtlCol="0" anchor="ctr"/>
+          <a:lstStyle/>
+          <a:p>
+            <a:pPr algn="ctr"/>
+          </a:p>
+        </p:txBody>
+      </p:sp>
+      <p:sp>
+        <p:nvSpPr>
+          <p:cNvPr id="21" name="Rectangle 20"/>
+          <p:cNvSpPr/>
+          <p:nvPr/>
+        </p:nvSpPr>
+        <p:spPr>
+          <a:xfrm>
+            <a:off x="9189720" y="1783080"/>
+            <a:ext cx="73152" cy="3291840"/>
+          </a:xfrm>
+          <a:prstGeom prst="rect">
+            <a:avLst/>
+          </a:prstGeom>
+          <a:solidFill>
+            <a:srgbClr val="16A34A"/>
+          </a:solidFill>
+          <a:ln>
+            <a:noFill/>
+          </a:ln>
+          <a:effectLst/>
+        </p:spPr>
+        <p:style>
+          <a:lnRef idx="1">
+            <a:schemeClr val="accent1"/>
+          </a:lnRef>
+          <a:fillRef idx="3">
+            <a:schemeClr val="accent1"/>
+          </a:fillRef>
+          <a:effectRef idx="2">
+            <a:schemeClr val="accent1"/>
+          </a:effectRef>
+          <a:fontRef idx="minor">
+            <a:schemeClr val="lt1"/>
+          </a:fontRef>
+        </p:style>
+        <p:txBody>
+          <a:bodyPr rtlCol="0" anchor="ctr"/>
+          <a:lstStyle/>
+          <a:p>
+            <a:pPr algn="ctr"/>
+          </a:p>
+        </p:txBody>
+      </p:sp>
+      <p:sp>
+        <p:nvSpPr>
+          <p:cNvPr id="22" name="TextBox 21"/>
+          <p:cNvSpPr txBox="1"/>
+          <p:nvPr/>
+        </p:nvSpPr>
+        <p:spPr>
+          <a:xfrm>
+            <a:off x="9354312" y="2194560"/>
+            <a:ext cx="2368296" cy="1005840"/>
+          </a:xfrm>
+          <a:prstGeom prst="rect">
+            <a:avLst/>
+          </a:prstGeom>
+          <a:noFill/>
+        </p:spPr>
+        <p:txBody>
+          <a:bodyPr wrap="square" lIns="0" rIns="0" tIns="0" bIns="0" anchor="t">
+            <a:spAutoFit/>
+          </a:bodyPr>
+          <a:lstStyle/>
+          <a:p>
+            <a:pPr algn="ctr">
+              <a:lnSpc>
+                <a:spcPct val="130000"/>
+              </a:lnSpc>
+            </a:pPr>
+            <a:r>
+              <a:rPr sz="4000" b="1" i="0">
+                <a:solidFill>
+                  <a:srgbClr val="16A34A"/>
+                </a:solidFill>
+                <a:latin typeface="Cambria"/>
+              </a:rPr>
+              <a:t>約8万</a:t>
+            </a:r>
+          </a:p>
+        </p:txBody>
+      </p:sp>
+      <p:sp>
+        <p:nvSpPr>
+          <p:cNvPr id="23" name="TextBox 22"/>
+          <p:cNvSpPr txBox="1"/>
+          <p:nvPr/>
+        </p:nvSpPr>
+        <p:spPr>
+          <a:xfrm>
+            <a:off x="9189720" y="3200400"/>
+            <a:ext cx="2697480" cy="457200"/>
+          </a:xfrm>
+          <a:prstGeom prst="rect">
+            <a:avLst/>
+          </a:prstGeom>
+          <a:noFill/>
+        </p:spPr>
+        <p:txBody>
+          <a:bodyPr wrap="square" lIns="0" rIns="0" tIns="0" bIns="0" anchor="t">
+            <a:spAutoFit/>
+          </a:bodyPr>
+          <a:lstStyle/>
+          <a:p>
+            <a:pPr algn="ctr">
+              <a:lnSpc>
+                <a:spcPct val="130000"/>
+              </a:lnSpc>
+            </a:pPr>
+            <a:r>
+              <a:rPr sz="2000" b="0" i="0">
+                <a:solidFill>
+                  <a:srgbClr val="1F2937"/>
+                </a:solidFill>
+                <a:latin typeface="Cambria"/>
+              </a:rPr>
+              <a:t>件</a:t>
+            </a:r>
+          </a:p>
+        </p:txBody>
+      </p:sp>
+      <p:sp>
+        <p:nvSpPr>
+          <p:cNvPr id="24" name="TextBox 23"/>
+          <p:cNvSpPr txBox="1"/>
+          <p:nvPr/>
+        </p:nvSpPr>
+        <p:spPr>
+          <a:xfrm>
+            <a:off x="9372600" y="3840480"/>
+            <a:ext cx="2331720" cy="1005840"/>
+          </a:xfrm>
+          <a:prstGeom prst="rect">
+            <a:avLst/>
+          </a:prstGeom>
+          <a:noFill/>
+        </p:spPr>
+        <p:txBody>
+          <a:bodyPr wrap="square" lIns="0" rIns="0" tIns="0" bIns="0" anchor="t">
+            <a:spAutoFit/>
+          </a:bodyPr>
+          <a:lstStyle/>
+          <a:p>
+            <a:pPr algn="ctr">
+              <a:lnSpc>
+                <a:spcPct val="140000"/>
+              </a:lnSpc>
+            </a:pPr>
+            <a:r>
+              <a:rPr sz="1200" b="0" i="0">
+                <a:solidFill>
+                  <a:srgbClr val="5B6472"/>
+                </a:solidFill>
+                <a:latin typeface="Calibri"/>
+              </a:rPr>
+              <a:t>「悪いものリスト」を
+自動で取り込んで照合</a:t>
+            </a:r>
+          </a:p>
+        </p:txBody>
+      </p:sp>
+      <p:sp>
+        <p:nvSpPr>
+          <p:cNvPr id="25" name="Rounded Rectangle 24"/>
+          <p:cNvSpPr/>
+          <p:nvPr/>
+        </p:nvSpPr>
+        <p:spPr>
+          <a:xfrm>
+            <a:off x="548640" y="5440680"/>
+            <a:ext cx="11064240" cy="1005840"/>
+          </a:xfrm>
+          <a:prstGeom prst="roundRect">
+            <a:avLst/>
+          </a:prstGeom>
+          <a:solidFill>
+            <a:srgbClr val="E8F0FE"/>
+          </a:solidFill>
+          <a:ln w="9525">
+            <a:solidFill>
+              <a:srgbClr val="E8F0FE"/>
+            </a:solidFill>
+          </a:ln>
+          <a:effectLst/>
+        </p:spPr>
+        <p:style>
+          <a:lnRef idx="1">
+            <a:schemeClr val="accent1"/>
+          </a:lnRef>
+          <a:fillRef idx="3">
+            <a:schemeClr val="accent1"/>
+          </a:fillRef>
+          <a:effectRef idx="2">
+            <a:schemeClr val="accent1"/>
+          </a:effectRef>
+          <a:fontRef idx="minor">
+            <a:schemeClr val="lt1"/>
+          </a:fontRef>
+        </p:style>
+        <p:txBody>
+          <a:bodyPr rtlCol="0" anchor="ctr"/>
+          <a:lstStyle/>
+          <a:p>
+            <a:pPr algn="ctr"/>
+          </a:p>
+        </p:txBody>
+      </p:sp>
+      <p:sp>
+        <p:nvSpPr>
+          <p:cNvPr id="26" name="TextBox 25"/>
+          <p:cNvSpPr txBox="1"/>
+          <p:nvPr/>
+        </p:nvSpPr>
+        <p:spPr>
+          <a:xfrm>
+            <a:off x="868680" y="5440680"/>
+            <a:ext cx="10515600" cy="1005840"/>
+          </a:xfrm>
+          <a:prstGeom prst="rect">
+            <a:avLst/>
+          </a:prstGeom>
+          <a:noFill/>
+        </p:spPr>
+        <p:txBody>
+          <a:bodyPr wrap="square" lIns="0" rIns="0" tIns="0" bIns="0" anchor="ctr">
             <a:spAutoFit/>
           </a:bodyPr>
           <a:lstStyle/>
@@ -10732,169 +12034,52 @@
               </a:lnSpc>
             </a:pPr>
             <a:r>
-              <a:rPr sz="1300" b="0" i="0">
-                <a:solidFill>
-                  <a:srgbClr val="CADCFC"/>
+              <a:rPr sz="1400" b="0" i="0">
+                <a:solidFill>
+                  <a:srgbClr val="1F2937"/>
                 </a:solidFill>
                 <a:latin typeface="Calibri"/>
               </a:rPr>
-              <a:t>成果物はすべて GitHub で公開しています</a:t>
-            </a:r>
-          </a:p>
-        </p:txBody>
-      </p:sp>
-      <p:sp>
-        <p:nvSpPr>
-          <p:cNvPr id="7" name="TextBox 6"/>
-          <p:cNvSpPr txBox="1"/>
-          <p:nvPr/>
-        </p:nvSpPr>
-        <p:spPr>
-          <a:xfrm>
-            <a:off x="2834640" y="4114800"/>
-            <a:ext cx="6492240" cy="548640"/>
-          </a:xfrm>
-          <a:prstGeom prst="rect">
-            <a:avLst/>
-          </a:prstGeom>
-          <a:noFill/>
-        </p:spPr>
-        <p:txBody>
-          <a:bodyPr wrap="square" lIns="0" rIns="0" tIns="0" bIns="0" anchor="t">
-            <a:spAutoFit/>
-          </a:bodyPr>
-          <a:lstStyle/>
-          <a:p>
-            <a:pPr algn="l">
-              <a:lnSpc>
-                <a:spcPct val="130000"/>
-              </a:lnSpc>
-            </a:pPr>
-            <a:r>
-              <a:rPr sz="2400" b="1" i="0">
-                <a:solidFill>
-                  <a:srgbClr val="FFFFFF"/>
-                </a:solidFill>
-                <a:latin typeface="Consolas"/>
-              </a:rPr>
-              <a:t>github.com/Assy2005/hayabusa-plus</a:t>
-            </a:r>
-          </a:p>
-        </p:txBody>
-      </p:sp>
-      <p:sp>
-        <p:nvSpPr>
-          <p:cNvPr id="8" name="TextBox 7"/>
-          <p:cNvSpPr txBox="1"/>
-          <p:nvPr/>
-        </p:nvSpPr>
-        <p:spPr>
-          <a:xfrm>
-            <a:off x="2834640" y="4754880"/>
-            <a:ext cx="6492240" cy="365760"/>
-          </a:xfrm>
-          <a:prstGeom prst="rect">
-            <a:avLst/>
-          </a:prstGeom>
-          <a:noFill/>
-        </p:spPr>
-        <p:txBody>
-          <a:bodyPr wrap="square" lIns="0" rIns="0" tIns="0" bIns="0" anchor="t">
-            <a:spAutoFit/>
-          </a:bodyPr>
-          <a:lstStyle/>
-          <a:p>
-            <a:pPr algn="l">
-              <a:lnSpc>
-                <a:spcPct val="130000"/>
-              </a:lnSpc>
-            </a:pPr>
-            <a:r>
-              <a:rPr sz="1300" b="0" i="0">
-                <a:solidFill>
-                  <a:srgbClr val="CADCFC"/>
+              <a:t>🚀 今後:  時間の流れを追った相関分析 (「A の後に B が起きたら怪しい」) や、AI による検知ルールの自動生成へ。</a:t>
+            </a:r>
+          </a:p>
+        </p:txBody>
+      </p:sp>
+      <p:sp>
+        <p:nvSpPr>
+          <p:cNvPr id="27" name="TextBox 26"/>
+          <p:cNvSpPr txBox="1"/>
+          <p:nvPr/>
+        </p:nvSpPr>
+        <p:spPr>
+          <a:xfrm>
+            <a:off x="10972800" y="6446520"/>
+            <a:ext cx="914400" cy="274320"/>
+          </a:xfrm>
+          <a:prstGeom prst="rect">
+            <a:avLst/>
+          </a:prstGeom>
+          <a:noFill/>
+        </p:spPr>
+        <p:txBody>
+          <a:bodyPr wrap="square" lIns="0" rIns="0" tIns="0" bIns="0" anchor="t">
+            <a:spAutoFit/>
+          </a:bodyPr>
+          <a:lstStyle/>
+          <a:p>
+            <a:pPr algn="r">
+              <a:lnSpc>
+                <a:spcPct val="130000"/>
+              </a:lnSpc>
+            </a:pPr>
+            <a:r>
+              <a:rPr sz="900" b="0" i="0">
+                <a:solidFill>
+                  <a:srgbClr val="5B6472"/>
                 </a:solidFill>
                 <a:latin typeface="Calibri"/>
               </a:rPr>
-              <a:t>ソースコード・検知ルール・設計書・この資料まで、どなたでも使えます (OSS)。</a:t>
-            </a:r>
-          </a:p>
-        </p:txBody>
-      </p:sp>
-      <p:sp>
-        <p:nvSpPr>
-          <p:cNvPr id="9" name="TextBox 8"/>
-          <p:cNvSpPr txBox="1"/>
-          <p:nvPr/>
-        </p:nvSpPr>
-        <p:spPr>
-          <a:xfrm>
-            <a:off x="2834640" y="5120640"/>
-            <a:ext cx="6492240" cy="365760"/>
-          </a:xfrm>
-          <a:prstGeom prst="rect">
-            <a:avLst/>
-          </a:prstGeom>
-          <a:noFill/>
-        </p:spPr>
-        <p:txBody>
-          <a:bodyPr wrap="square" lIns="0" rIns="0" tIns="0" bIns="0" anchor="t">
-            <a:spAutoFit/>
-          </a:bodyPr>
-          <a:lstStyle/>
-          <a:p>
-            <a:pPr algn="l">
-              <a:lnSpc>
-                <a:spcPct val="130000"/>
-              </a:lnSpc>
-            </a:pPr>
-            <a:r>
-              <a:rPr sz="1200" b="0" i="1">
-                <a:solidFill>
-                  <a:srgbClr val="CADCFC"/>
-                </a:solidFill>
-                <a:latin typeface="Calibri"/>
-              </a:rPr>
-              <a:t>zip をダウンロード → 展開 → 実行、ですぐ試せます</a:t>
-            </a:r>
-          </a:p>
-        </p:txBody>
-      </p:sp>
-      <p:sp>
-        <p:nvSpPr>
-          <p:cNvPr id="10" name="TextBox 9"/>
-          <p:cNvSpPr txBox="1"/>
-          <p:nvPr/>
-        </p:nvSpPr>
-        <p:spPr>
-          <a:xfrm>
-            <a:off x="548640" y="6217920"/>
-            <a:ext cx="10972800" cy="365760"/>
-          </a:xfrm>
-          <a:prstGeom prst="rect">
-            <a:avLst/>
-          </a:prstGeom>
-          <a:noFill/>
-        </p:spPr>
-        <p:txBody>
-          <a:bodyPr wrap="square" lIns="0" rIns="0" tIns="0" bIns="0" anchor="t">
-            <a:spAutoFit/>
-          </a:bodyPr>
-          <a:lstStyle/>
-          <a:p>
-            <a:pPr algn="ctr">
-              <a:lnSpc>
-                <a:spcPct val="130000"/>
-              </a:lnSpc>
-            </a:pPr>
-            <a:r>
-              <a:rPr sz="1200" b="0" i="1">
-                <a:solidFill>
-                  <a:srgbClr val="CADCFC"/>
-                </a:solidFill>
-                <a:latin typeface="Calibri"/>
-              </a:rPr>
-              <a:t>お手元の Windows PC のログで、ぜひ一度。</a:t>
+              <a:t>15 / 16</a:t>
             </a:r>
           </a:p>
         </p:txBody>
@@ -10932,7 +12117,7 @@
             <a:avLst/>
           </a:prstGeom>
           <a:solidFill>
-            <a:srgbClr val="F4F6FA"/>
+            <a:srgbClr val="1B254F"/>
           </a:solidFill>
           <a:ln>
             <a:noFill/>
@@ -10969,95 +12154,97 @@
         </p:nvSpPr>
         <p:spPr>
           <a:xfrm>
-            <a:off x="548640" y="347472"/>
-            <a:ext cx="10972800" cy="274320"/>
-          </a:xfrm>
-          <a:prstGeom prst="rect">
-            <a:avLst/>
-          </a:prstGeom>
-          <a:noFill/>
-        </p:spPr>
-        <p:txBody>
-          <a:bodyPr wrap="square" lIns="0" rIns="0" tIns="0" bIns="0" anchor="t">
-            <a:spAutoFit/>
-          </a:bodyPr>
-          <a:lstStyle/>
-          <a:p>
-            <a:pPr algn="l">
-              <a:lnSpc>
-                <a:spcPct val="130000"/>
-              </a:lnSpc>
-            </a:pPr>
-            <a:r>
-              <a:rPr sz="1100" b="1" i="0">
-                <a:solidFill>
-                  <a:srgbClr val="2563EB"/>
+            <a:off x="548640" y="1371600"/>
+            <a:ext cx="10972800" cy="1097280"/>
+          </a:xfrm>
+          <a:prstGeom prst="rect">
+            <a:avLst/>
+          </a:prstGeom>
+          <a:noFill/>
+        </p:spPr>
+        <p:txBody>
+          <a:bodyPr wrap="square" lIns="0" rIns="0" tIns="0" bIns="0" anchor="t">
+            <a:spAutoFit/>
+          </a:bodyPr>
+          <a:lstStyle/>
+          <a:p>
+            <a:pPr algn="ctr">
+              <a:lnSpc>
+                <a:spcPct val="130000"/>
+              </a:lnSpc>
+            </a:pPr>
+            <a:r>
+              <a:rPr sz="5600" b="1" i="0">
+                <a:solidFill>
+                  <a:srgbClr val="FFFFFF"/>
+                </a:solidFill>
+                <a:latin typeface="Cambria"/>
+              </a:rPr>
+              <a:t>ありがとうございました</a:t>
+            </a:r>
+          </a:p>
+        </p:txBody>
+      </p:sp>
+      <p:sp>
+        <p:nvSpPr>
+          <p:cNvPr id="4" name="TextBox 3"/>
+          <p:cNvSpPr txBox="1"/>
+          <p:nvPr/>
+        </p:nvSpPr>
+        <p:spPr>
+          <a:xfrm>
+            <a:off x="548640" y="2468880"/>
+            <a:ext cx="10972800" cy="548640"/>
+          </a:xfrm>
+          <a:prstGeom prst="rect">
+            <a:avLst/>
+          </a:prstGeom>
+          <a:noFill/>
+        </p:spPr>
+        <p:txBody>
+          <a:bodyPr wrap="square" lIns="0" rIns="0" tIns="0" bIns="0" anchor="t">
+            <a:spAutoFit/>
+          </a:bodyPr>
+          <a:lstStyle/>
+          <a:p>
+            <a:pPr algn="ctr">
+              <a:lnSpc>
+                <a:spcPct val="130000"/>
+              </a:lnSpc>
+            </a:pPr>
+            <a:r>
+              <a:rPr sz="2200" b="0" i="1">
+                <a:solidFill>
+                  <a:srgbClr val="CADCFC"/>
                 </a:solidFill>
                 <a:latin typeface="Calibri"/>
               </a:rPr>
-              <a:t>Q&amp;A 用   — 攻撃の流れに沿って整理</a:t>
-            </a:r>
-          </a:p>
-        </p:txBody>
-      </p:sp>
-      <p:sp>
-        <p:nvSpPr>
-          <p:cNvPr id="4" name="TextBox 3"/>
-          <p:cNvSpPr txBox="1"/>
-          <p:nvPr/>
-        </p:nvSpPr>
-        <p:spPr>
-          <a:xfrm>
-            <a:off x="548640" y="621792"/>
-            <a:ext cx="11155680" cy="640080"/>
-          </a:xfrm>
-          <a:prstGeom prst="rect">
-            <a:avLst/>
-          </a:prstGeom>
-          <a:noFill/>
-        </p:spPr>
-        <p:txBody>
-          <a:bodyPr wrap="square" lIns="0" rIns="0" tIns="0" bIns="0" anchor="t">
-            <a:spAutoFit/>
-          </a:bodyPr>
-          <a:lstStyle/>
-          <a:p>
-            <a:pPr algn="l">
-              <a:lnSpc>
-                <a:spcPct val="130000"/>
-              </a:lnSpc>
-            </a:pPr>
-            <a:r>
-              <a:rPr sz="2800" b="1" i="0">
-                <a:solidFill>
-                  <a:srgbClr val="1F2937"/>
-                </a:solidFill>
-                <a:latin typeface="Cambria"/>
-              </a:rPr>
-              <a:t>付録: 同梱している検知ルール 13 本</a:t>
-            </a:r>
-          </a:p>
-        </p:txBody>
-      </p:sp>
-      <p:sp>
-        <p:nvSpPr>
-          <p:cNvPr id="5" name="Oval 4"/>
+              <a:t>ご質問・フィードバックをお願いします</a:t>
+            </a:r>
+          </a:p>
+        </p:txBody>
+      </p:sp>
+      <p:sp>
+        <p:nvSpPr>
+          <p:cNvPr id="5" name="Rounded Rectangle 4"/>
           <p:cNvSpPr/>
           <p:nvPr/>
         </p:nvSpPr>
         <p:spPr>
           <a:xfrm>
-            <a:off x="8275320" y="502920"/>
-            <a:ext cx="146304" cy="146304"/>
-          </a:xfrm>
-          <a:prstGeom prst="ellipse">
+            <a:off x="2560320" y="3566160"/>
+            <a:ext cx="7040880" cy="2011680"/>
+          </a:xfrm>
+          <a:prstGeom prst="roundRect">
             <a:avLst/>
           </a:prstGeom>
           <a:solidFill>
-            <a:srgbClr val="DC2626"/>
+            <a:srgbClr val="273366"/>
           </a:solidFill>
-          <a:ln>
-            <a:noFill/>
+          <a:ln w="9525">
+            <a:solidFill>
+              <a:srgbClr val="273366"/>
+            </a:solidFill>
           </a:ln>
           <a:effectLst/>
         </p:spPr>
@@ -11091,16 +12278,16 @@
         </p:nvSpPr>
         <p:spPr>
           <a:xfrm>
-            <a:off x="8485632" y="457200"/>
-            <a:ext cx="1554480" cy="274320"/>
-          </a:xfrm>
-          <a:prstGeom prst="rect">
-            <a:avLst/>
-          </a:prstGeom>
-          <a:noFill/>
-        </p:spPr>
-        <p:txBody>
-          <a:bodyPr wrap="square" lIns="0" rIns="0" tIns="0" bIns="0" anchor="ctr">
+            <a:off x="2834640" y="3749039"/>
+            <a:ext cx="6492240" cy="365760"/>
+          </a:xfrm>
+          <a:prstGeom prst="rect">
+            <a:avLst/>
+          </a:prstGeom>
+          <a:noFill/>
+        </p:spPr>
+        <p:txBody>
+          <a:bodyPr wrap="square" lIns="0" rIns="0" tIns="0" bIns="0" anchor="t">
             <a:spAutoFit/>
           </a:bodyPr>
           <a:lstStyle/>
@@ -11111,58 +12298,53 @@
               </a:lnSpc>
             </a:pPr>
             <a:r>
-              <a:rPr sz="1000" b="0" i="0">
-                <a:solidFill>
-                  <a:srgbClr val="5B6472"/>
+              <a:rPr sz="1300" b="0" i="0">
+                <a:solidFill>
+                  <a:srgbClr val="CADCFC"/>
                 </a:solidFill>
                 <a:latin typeface="Calibri"/>
               </a:rPr>
-              <a:t>critical (最重要)</a:t>
-            </a:r>
-          </a:p>
-        </p:txBody>
-      </p:sp>
-      <p:sp>
-        <p:nvSpPr>
-          <p:cNvPr id="7" name="Oval 6"/>
-          <p:cNvSpPr/>
-          <p:nvPr/>
-        </p:nvSpPr>
-        <p:spPr>
-          <a:xfrm>
-            <a:off x="10149840" y="502920"/>
-            <a:ext cx="146304" cy="146304"/>
-          </a:xfrm>
-          <a:prstGeom prst="ellipse">
-            <a:avLst/>
-          </a:prstGeom>
-          <a:solidFill>
-            <a:srgbClr val="EA580C"/>
-          </a:solidFill>
-          <a:ln>
-            <a:noFill/>
-          </a:ln>
-          <a:effectLst/>
-        </p:spPr>
-        <p:style>
-          <a:lnRef idx="1">
-            <a:schemeClr val="accent1"/>
-          </a:lnRef>
-          <a:fillRef idx="3">
-            <a:schemeClr val="accent1"/>
-          </a:fillRef>
-          <a:effectRef idx="2">
-            <a:schemeClr val="accent1"/>
-          </a:effectRef>
-          <a:fontRef idx="minor">
-            <a:schemeClr val="lt1"/>
-          </a:fontRef>
-        </p:style>
-        <p:txBody>
-          <a:bodyPr rtlCol="0" anchor="ctr"/>
-          <a:lstStyle/>
-          <a:p>
-            <a:pPr algn="ctr"/>
+              <a:t>成果物はすべて GitHub で公開しています</a:t>
+            </a:r>
+          </a:p>
+        </p:txBody>
+      </p:sp>
+      <p:sp>
+        <p:nvSpPr>
+          <p:cNvPr id="7" name="TextBox 6"/>
+          <p:cNvSpPr txBox="1"/>
+          <p:nvPr/>
+        </p:nvSpPr>
+        <p:spPr>
+          <a:xfrm>
+            <a:off x="2834640" y="4114800"/>
+            <a:ext cx="6492240" cy="548640"/>
+          </a:xfrm>
+          <a:prstGeom prst="rect">
+            <a:avLst/>
+          </a:prstGeom>
+          <a:noFill/>
+        </p:spPr>
+        <p:txBody>
+          <a:bodyPr wrap="square" lIns="0" rIns="0" tIns="0" bIns="0" anchor="t">
+            <a:spAutoFit/>
+          </a:bodyPr>
+          <a:lstStyle/>
+          <a:p>
+            <a:pPr algn="l">
+              <a:lnSpc>
+                <a:spcPct val="130000"/>
+              </a:lnSpc>
+            </a:pPr>
+            <a:r>
+              <a:rPr sz="2400" b="1" i="0">
+                <a:solidFill>
+                  <a:srgbClr val="FFFFFF"/>
+                </a:solidFill>
+                <a:latin typeface="Consolas"/>
+              </a:rPr>
+              <a:t>github.com/Assy2005/hayabusa-plus</a:t>
+            </a:r>
           </a:p>
         </p:txBody>
       </p:sp>
@@ -11174,16 +12356,16 @@
         </p:nvSpPr>
         <p:spPr>
           <a:xfrm>
-            <a:off x="10360152" y="457200"/>
-            <a:ext cx="1280160" cy="274320"/>
-          </a:xfrm>
-          <a:prstGeom prst="rect">
-            <a:avLst/>
-          </a:prstGeom>
-          <a:noFill/>
-        </p:spPr>
-        <p:txBody>
-          <a:bodyPr wrap="square" lIns="0" rIns="0" tIns="0" bIns="0" anchor="ctr">
+            <a:off x="2834640" y="4754880"/>
+            <a:ext cx="6492240" cy="365760"/>
+          </a:xfrm>
+          <a:prstGeom prst="rect">
+            <a:avLst/>
+          </a:prstGeom>
+          <a:noFill/>
+        </p:spPr>
+        <p:txBody>
+          <a:bodyPr wrap="square" lIns="0" rIns="0" tIns="0" bIns="0" anchor="t">
             <a:spAutoFit/>
           </a:bodyPr>
           <a:lstStyle/>
@@ -11194,117 +12376,27 @@
               </a:lnSpc>
             </a:pPr>
             <a:r>
-              <a:rPr sz="1000" b="0" i="0">
-                <a:solidFill>
-                  <a:srgbClr val="5B6472"/>
+              <a:rPr sz="1300" b="0" i="0">
+                <a:solidFill>
+                  <a:srgbClr val="CADCFC"/>
                 </a:solidFill>
                 <a:latin typeface="Calibri"/>
               </a:rPr>
-              <a:t>high (重要)</a:t>
-            </a:r>
-          </a:p>
-        </p:txBody>
-      </p:sp>
-      <p:sp>
-        <p:nvSpPr>
-          <p:cNvPr id="9" name="Rounded Rectangle 8"/>
-          <p:cNvSpPr/>
-          <p:nvPr/>
-        </p:nvSpPr>
-        <p:spPr>
-          <a:xfrm>
-            <a:off x="548640" y="1783080"/>
-            <a:ext cx="5349240" cy="2240280"/>
-          </a:xfrm>
-          <a:prstGeom prst="roundRect">
-            <a:avLst/>
-          </a:prstGeom>
-          <a:solidFill>
-            <a:srgbClr val="FFFFFF"/>
-          </a:solidFill>
-          <a:ln w="9525">
-            <a:solidFill>
-              <a:srgbClr val="DDE3EE"/>
-            </a:solidFill>
-          </a:ln>
-          <a:effectLst/>
-        </p:spPr>
-        <p:style>
-          <a:lnRef idx="1">
-            <a:schemeClr val="accent1"/>
-          </a:lnRef>
-          <a:fillRef idx="3">
-            <a:schemeClr val="accent1"/>
-          </a:fillRef>
-          <a:effectRef idx="2">
-            <a:schemeClr val="accent1"/>
-          </a:effectRef>
-          <a:fontRef idx="minor">
-            <a:schemeClr val="lt1"/>
-          </a:fontRef>
-        </p:style>
-        <p:txBody>
-          <a:bodyPr rtlCol="0" anchor="ctr"/>
-          <a:lstStyle/>
-          <a:p>
-            <a:pPr algn="ctr"/>
-          </a:p>
-        </p:txBody>
-      </p:sp>
-      <p:sp>
-        <p:nvSpPr>
-          <p:cNvPr id="10" name="Rectangle 9"/>
-          <p:cNvSpPr/>
-          <p:nvPr/>
-        </p:nvSpPr>
-        <p:spPr>
-          <a:xfrm>
-            <a:off x="548640" y="1783080"/>
-            <a:ext cx="73152" cy="2240280"/>
-          </a:xfrm>
-          <a:prstGeom prst="rect">
-            <a:avLst/>
-          </a:prstGeom>
-          <a:solidFill>
-            <a:srgbClr val="2563EB"/>
-          </a:solidFill>
-          <a:ln>
-            <a:noFill/>
-          </a:ln>
-          <a:effectLst/>
-        </p:spPr>
-        <p:style>
-          <a:lnRef idx="1">
-            <a:schemeClr val="accent1"/>
-          </a:lnRef>
-          <a:fillRef idx="3">
-            <a:schemeClr val="accent1"/>
-          </a:fillRef>
-          <a:effectRef idx="2">
-            <a:schemeClr val="accent1"/>
-          </a:effectRef>
-          <a:fontRef idx="minor">
-            <a:schemeClr val="lt1"/>
-          </a:fontRef>
-        </p:style>
-        <p:txBody>
-          <a:bodyPr rtlCol="0" anchor="ctr"/>
-          <a:lstStyle/>
-          <a:p>
-            <a:pPr algn="ctr"/>
-          </a:p>
-        </p:txBody>
-      </p:sp>
-      <p:sp>
-        <p:nvSpPr>
-          <p:cNvPr id="11" name="TextBox 10"/>
-          <p:cNvSpPr txBox="1"/>
-          <p:nvPr/>
-        </p:nvSpPr>
-        <p:spPr>
-          <a:xfrm>
-            <a:off x="804672" y="1929384"/>
-            <a:ext cx="4937759" cy="411480"/>
+              <a:t>ソースコード・検知ルール・設計書・この資料まで、どなたでも使えます (OSS)。</a:t>
+            </a:r>
+          </a:p>
+        </p:txBody>
+      </p:sp>
+      <p:sp>
+        <p:nvSpPr>
+          <p:cNvPr id="9" name="TextBox 8"/>
+          <p:cNvSpPr txBox="1"/>
+          <p:nvPr/>
+        </p:nvSpPr>
+        <p:spPr>
+          <a:xfrm>
+            <a:off x="2834640" y="5120640"/>
+            <a:ext cx="6492240" cy="365760"/>
           </a:xfrm>
           <a:prstGeom prst="rect">
             <a:avLst/>
@@ -11323,1518 +12415,52 @@
               </a:lnSpc>
             </a:pPr>
             <a:r>
-              <a:rPr sz="1400" b="1" i="0">
-                <a:solidFill>
-                  <a:srgbClr val="1D4ED8"/>
-                </a:solidFill>
-                <a:latin typeface="Cambria"/>
-              </a:rPr>
-              <a:t>① 外から入る・動く・つながる</a:t>
-            </a:r>
-          </a:p>
-        </p:txBody>
-      </p:sp>
-      <p:sp>
-        <p:nvSpPr>
-          <p:cNvPr id="12" name="Oval 11"/>
-          <p:cNvSpPr/>
-          <p:nvPr/>
-        </p:nvSpPr>
-        <p:spPr>
-          <a:xfrm>
-            <a:off x="822959" y="2505456"/>
-            <a:ext cx="109728" cy="109728"/>
-          </a:xfrm>
-          <a:prstGeom prst="ellipse">
-            <a:avLst/>
-          </a:prstGeom>
-          <a:solidFill>
-            <a:srgbClr val="DC2626"/>
-          </a:solidFill>
-          <a:ln>
-            <a:noFill/>
-          </a:ln>
-          <a:effectLst/>
-        </p:spPr>
-        <p:style>
-          <a:lnRef idx="1">
-            <a:schemeClr val="accent1"/>
-          </a:lnRef>
-          <a:fillRef idx="3">
-            <a:schemeClr val="accent1"/>
-          </a:fillRef>
-          <a:effectRef idx="2">
-            <a:schemeClr val="accent1"/>
-          </a:effectRef>
-          <a:fontRef idx="minor">
-            <a:schemeClr val="lt1"/>
-          </a:fontRef>
-        </p:style>
-        <p:txBody>
-          <a:bodyPr rtlCol="0" anchor="ctr"/>
-          <a:lstStyle/>
-          <a:p>
-            <a:pPr algn="ctr"/>
-          </a:p>
-        </p:txBody>
-      </p:sp>
-      <p:sp>
-        <p:nvSpPr>
-          <p:cNvPr id="13" name="TextBox 12"/>
-          <p:cNvSpPr txBox="1"/>
-          <p:nvPr/>
-        </p:nvSpPr>
-        <p:spPr>
-          <a:xfrm>
-            <a:off x="1042416" y="2441448"/>
-            <a:ext cx="4636007" cy="365760"/>
-          </a:xfrm>
-          <a:prstGeom prst="rect">
-            <a:avLst/>
-          </a:prstGeom>
-          <a:noFill/>
-        </p:spPr>
-        <p:txBody>
-          <a:bodyPr wrap="square" lIns="0" rIns="0" tIns="0" bIns="0" anchor="t">
-            <a:spAutoFit/>
-          </a:bodyPr>
-          <a:lstStyle/>
-          <a:p>
-            <a:pPr algn="l">
-              <a:lnSpc>
-                <a:spcPct val="110000"/>
-              </a:lnSpc>
-            </a:pPr>
-            <a:r>
-              <a:rPr sz="1050" b="0" i="0">
-                <a:solidFill>
-                  <a:srgbClr val="1F2937"/>
+              <a:rPr sz="1200" b="0" i="1">
+                <a:solidFill>
+                  <a:srgbClr val="CADCFC"/>
                 </a:solidFill>
                 <a:latin typeface="Calibri"/>
               </a:rPr>
-              <a:t>既知のマルウェアそのものが実行された (MalwareBazaar 照合)</a:t>
-            </a:r>
-          </a:p>
-        </p:txBody>
-      </p:sp>
-      <p:sp>
-        <p:nvSpPr>
-          <p:cNvPr id="14" name="Oval 13"/>
-          <p:cNvSpPr/>
-          <p:nvPr/>
-        </p:nvSpPr>
-        <p:spPr>
-          <a:xfrm>
-            <a:off x="822959" y="2889503"/>
-            <a:ext cx="109728" cy="109728"/>
-          </a:xfrm>
-          <a:prstGeom prst="ellipse">
-            <a:avLst/>
-          </a:prstGeom>
-          <a:solidFill>
-            <a:srgbClr val="DC2626"/>
-          </a:solidFill>
-          <a:ln>
-            <a:noFill/>
-          </a:ln>
-          <a:effectLst/>
-        </p:spPr>
-        <p:style>
-          <a:lnRef idx="1">
-            <a:schemeClr val="accent1"/>
-          </a:lnRef>
-          <a:fillRef idx="3">
-            <a:schemeClr val="accent1"/>
-          </a:fillRef>
-          <a:effectRef idx="2">
-            <a:schemeClr val="accent1"/>
-          </a:effectRef>
-          <a:fontRef idx="minor">
-            <a:schemeClr val="lt1"/>
-          </a:fontRef>
-        </p:style>
-        <p:txBody>
-          <a:bodyPr rtlCol="0" anchor="ctr"/>
-          <a:lstStyle/>
-          <a:p>
-            <a:pPr algn="ctr"/>
-          </a:p>
-        </p:txBody>
-      </p:sp>
-      <p:sp>
-        <p:nvSpPr>
-          <p:cNvPr id="15" name="TextBox 14"/>
-          <p:cNvSpPr txBox="1"/>
-          <p:nvPr/>
-        </p:nvSpPr>
-        <p:spPr>
-          <a:xfrm>
-            <a:off x="1042416" y="2825496"/>
-            <a:ext cx="4636007" cy="365760"/>
-          </a:xfrm>
-          <a:prstGeom prst="rect">
-            <a:avLst/>
-          </a:prstGeom>
-          <a:noFill/>
-        </p:spPr>
-        <p:txBody>
-          <a:bodyPr wrap="square" lIns="0" rIns="0" tIns="0" bIns="0" anchor="t">
-            <a:spAutoFit/>
-          </a:bodyPr>
-          <a:lstStyle/>
-          <a:p>
-            <a:pPr algn="l">
-              <a:lnSpc>
-                <a:spcPct val="110000"/>
-              </a:lnSpc>
-            </a:pPr>
-            <a:r>
-              <a:rPr sz="1050" b="0" i="0">
-                <a:solidFill>
-                  <a:srgbClr val="1F2937"/>
+              <a:t>zip をダウンロード → 展開 → 実行、ですぐ試せます</a:t>
+            </a:r>
+          </a:p>
+        </p:txBody>
+      </p:sp>
+      <p:sp>
+        <p:nvSpPr>
+          <p:cNvPr id="10" name="TextBox 9"/>
+          <p:cNvSpPr txBox="1"/>
+          <p:nvPr/>
+        </p:nvSpPr>
+        <p:spPr>
+          <a:xfrm>
+            <a:off x="548640" y="6217920"/>
+            <a:ext cx="10972800" cy="365760"/>
+          </a:xfrm>
+          <a:prstGeom prst="rect">
+            <a:avLst/>
+          </a:prstGeom>
+          <a:noFill/>
+        </p:spPr>
+        <p:txBody>
+          <a:bodyPr wrap="square" lIns="0" rIns="0" tIns="0" bIns="0" anchor="t">
+            <a:spAutoFit/>
+          </a:bodyPr>
+          <a:lstStyle/>
+          <a:p>
+            <a:pPr algn="ctr">
+              <a:lnSpc>
+                <a:spcPct val="130000"/>
+              </a:lnSpc>
+            </a:pPr>
+            <a:r>
+              <a:rPr sz="1200" b="0" i="1">
+                <a:solidFill>
+                  <a:srgbClr val="CADCFC"/>
                 </a:solidFill>
                 <a:latin typeface="Calibri"/>
               </a:rPr>
-              <a:t>指令サーバ (C2) として知られる場所への通信 (URLhaus 照合)</a:t>
-            </a:r>
-          </a:p>
-        </p:txBody>
-      </p:sp>
-      <p:sp>
-        <p:nvSpPr>
-          <p:cNvPr id="16" name="Oval 15"/>
-          <p:cNvSpPr/>
-          <p:nvPr/>
-        </p:nvSpPr>
-        <p:spPr>
-          <a:xfrm>
-            <a:off x="822959" y="3273551"/>
-            <a:ext cx="109728" cy="109728"/>
-          </a:xfrm>
-          <a:prstGeom prst="ellipse">
-            <a:avLst/>
-          </a:prstGeom>
-          <a:solidFill>
-            <a:srgbClr val="DC2626"/>
-          </a:solidFill>
-          <a:ln>
-            <a:noFill/>
-          </a:ln>
-          <a:effectLst/>
-        </p:spPr>
-        <p:style>
-          <a:lnRef idx="1">
-            <a:schemeClr val="accent1"/>
-          </a:lnRef>
-          <a:fillRef idx="3">
-            <a:schemeClr val="accent1"/>
-          </a:fillRef>
-          <a:effectRef idx="2">
-            <a:schemeClr val="accent1"/>
-          </a:effectRef>
-          <a:fontRef idx="minor">
-            <a:schemeClr val="lt1"/>
-          </a:fontRef>
-        </p:style>
-        <p:txBody>
-          <a:bodyPr rtlCol="0" anchor="ctr"/>
-          <a:lstStyle/>
-          <a:p>
-            <a:pPr algn="ctr"/>
-          </a:p>
-        </p:txBody>
-      </p:sp>
-      <p:sp>
-        <p:nvSpPr>
-          <p:cNvPr id="17" name="TextBox 16"/>
-          <p:cNvSpPr txBox="1"/>
-          <p:nvPr/>
-        </p:nvSpPr>
-        <p:spPr>
-          <a:xfrm>
-            <a:off x="1042416" y="3209544"/>
-            <a:ext cx="4636007" cy="365760"/>
-          </a:xfrm>
-          <a:prstGeom prst="rect">
-            <a:avLst/>
-          </a:prstGeom>
-          <a:noFill/>
-        </p:spPr>
-        <p:txBody>
-          <a:bodyPr wrap="square" lIns="0" rIns="0" tIns="0" bIns="0" anchor="t">
-            <a:spAutoFit/>
-          </a:bodyPr>
-          <a:lstStyle/>
-          <a:p>
-            <a:pPr algn="l">
-              <a:lnSpc>
-                <a:spcPct val="110000"/>
-              </a:lnSpc>
-            </a:pPr>
-            <a:r>
-              <a:rPr sz="1050" b="0" i="0">
-                <a:solidFill>
-                  <a:srgbClr val="1F2937"/>
-                </a:solidFill>
-                <a:latin typeface="Calibri"/>
-              </a:rPr>
-              <a:t>正規ツール certutil を悪用して外部からファイルを取得</a:t>
-            </a:r>
-          </a:p>
-        </p:txBody>
-      </p:sp>
-      <p:sp>
-        <p:nvSpPr>
-          <p:cNvPr id="18" name="Oval 17"/>
-          <p:cNvSpPr/>
-          <p:nvPr/>
-        </p:nvSpPr>
-        <p:spPr>
-          <a:xfrm>
-            <a:off x="822959" y="3657599"/>
-            <a:ext cx="109728" cy="109728"/>
-          </a:xfrm>
-          <a:prstGeom prst="ellipse">
-            <a:avLst/>
-          </a:prstGeom>
-          <a:solidFill>
-            <a:srgbClr val="DC2626"/>
-          </a:solidFill>
-          <a:ln>
-            <a:noFill/>
-          </a:ln>
-          <a:effectLst/>
-        </p:spPr>
-        <p:style>
-          <a:lnRef idx="1">
-            <a:schemeClr val="accent1"/>
-          </a:lnRef>
-          <a:fillRef idx="3">
-            <a:schemeClr val="accent1"/>
-          </a:fillRef>
-          <a:effectRef idx="2">
-            <a:schemeClr val="accent1"/>
-          </a:effectRef>
-          <a:fontRef idx="minor">
-            <a:schemeClr val="lt1"/>
-          </a:fontRef>
-        </p:style>
-        <p:txBody>
-          <a:bodyPr rtlCol="0" anchor="ctr"/>
-          <a:lstStyle/>
-          <a:p>
-            <a:pPr algn="ctr"/>
-          </a:p>
-        </p:txBody>
-      </p:sp>
-      <p:sp>
-        <p:nvSpPr>
-          <p:cNvPr id="19" name="TextBox 18"/>
-          <p:cNvSpPr txBox="1"/>
-          <p:nvPr/>
-        </p:nvSpPr>
-        <p:spPr>
-          <a:xfrm>
-            <a:off x="1042416" y="3593591"/>
-            <a:ext cx="4636007" cy="365760"/>
-          </a:xfrm>
-          <a:prstGeom prst="rect">
-            <a:avLst/>
-          </a:prstGeom>
-          <a:noFill/>
-        </p:spPr>
-        <p:txBody>
-          <a:bodyPr wrap="square" lIns="0" rIns="0" tIns="0" bIns="0" anchor="t">
-            <a:spAutoFit/>
-          </a:bodyPr>
-          <a:lstStyle/>
-          <a:p>
-            <a:pPr algn="l">
-              <a:lnSpc>
-                <a:spcPct val="110000"/>
-              </a:lnSpc>
-            </a:pPr>
-            <a:r>
-              <a:rPr sz="1050" b="0" i="0">
-                <a:solidFill>
-                  <a:srgbClr val="1F2937"/>
-                </a:solidFill>
-                <a:latin typeface="Calibri"/>
-              </a:rPr>
-              <a:t>悪用が知られた脆弱ドライバの読み込み (LOLDrivers 照合)</a:t>
-            </a:r>
-          </a:p>
-        </p:txBody>
-      </p:sp>
-      <p:sp>
-        <p:nvSpPr>
-          <p:cNvPr id="20" name="Rounded Rectangle 19"/>
-          <p:cNvSpPr/>
-          <p:nvPr/>
-        </p:nvSpPr>
-        <p:spPr>
-          <a:xfrm>
-            <a:off x="6291072" y="1783080"/>
-            <a:ext cx="5349240" cy="2240280"/>
-          </a:xfrm>
-          <a:prstGeom prst="roundRect">
-            <a:avLst/>
-          </a:prstGeom>
-          <a:solidFill>
-            <a:srgbClr val="FFFFFF"/>
-          </a:solidFill>
-          <a:ln w="9525">
-            <a:solidFill>
-              <a:srgbClr val="DDE3EE"/>
-            </a:solidFill>
-          </a:ln>
-          <a:effectLst/>
-        </p:spPr>
-        <p:style>
-          <a:lnRef idx="1">
-            <a:schemeClr val="accent1"/>
-          </a:lnRef>
-          <a:fillRef idx="3">
-            <a:schemeClr val="accent1"/>
-          </a:fillRef>
-          <a:effectRef idx="2">
-            <a:schemeClr val="accent1"/>
-          </a:effectRef>
-          <a:fontRef idx="minor">
-            <a:schemeClr val="lt1"/>
-          </a:fontRef>
-        </p:style>
-        <p:txBody>
-          <a:bodyPr rtlCol="0" anchor="ctr"/>
-          <a:lstStyle/>
-          <a:p>
-            <a:pPr algn="ctr"/>
-          </a:p>
-        </p:txBody>
-      </p:sp>
-      <p:sp>
-        <p:nvSpPr>
-          <p:cNvPr id="21" name="Rectangle 20"/>
-          <p:cNvSpPr/>
-          <p:nvPr/>
-        </p:nvSpPr>
-        <p:spPr>
-          <a:xfrm>
-            <a:off x="6291072" y="1783080"/>
-            <a:ext cx="73152" cy="2240280"/>
-          </a:xfrm>
-          <a:prstGeom prst="rect">
-            <a:avLst/>
-          </a:prstGeom>
-          <a:solidFill>
-            <a:srgbClr val="2563EB"/>
-          </a:solidFill>
-          <a:ln>
-            <a:noFill/>
-          </a:ln>
-          <a:effectLst/>
-        </p:spPr>
-        <p:style>
-          <a:lnRef idx="1">
-            <a:schemeClr val="accent1"/>
-          </a:lnRef>
-          <a:fillRef idx="3">
-            <a:schemeClr val="accent1"/>
-          </a:fillRef>
-          <a:effectRef idx="2">
-            <a:schemeClr val="accent1"/>
-          </a:effectRef>
-          <a:fontRef idx="minor">
-            <a:schemeClr val="lt1"/>
-          </a:fontRef>
-        </p:style>
-        <p:txBody>
-          <a:bodyPr rtlCol="0" anchor="ctr"/>
-          <a:lstStyle/>
-          <a:p>
-            <a:pPr algn="ctr"/>
-          </a:p>
-        </p:txBody>
-      </p:sp>
-      <p:sp>
-        <p:nvSpPr>
-          <p:cNvPr id="22" name="TextBox 21"/>
-          <p:cNvSpPr txBox="1"/>
-          <p:nvPr/>
-        </p:nvSpPr>
-        <p:spPr>
-          <a:xfrm>
-            <a:off x="6547104" y="1929384"/>
-            <a:ext cx="4937759" cy="411480"/>
-          </a:xfrm>
-          <a:prstGeom prst="rect">
-            <a:avLst/>
-          </a:prstGeom>
-          <a:noFill/>
-        </p:spPr>
-        <p:txBody>
-          <a:bodyPr wrap="square" lIns="0" rIns="0" tIns="0" bIns="0" anchor="t">
-            <a:spAutoFit/>
-          </a:bodyPr>
-          <a:lstStyle/>
-          <a:p>
-            <a:pPr algn="l">
-              <a:lnSpc>
-                <a:spcPct val="130000"/>
-              </a:lnSpc>
-            </a:pPr>
-            <a:r>
-              <a:rPr sz="1400" b="1" i="0">
-                <a:solidFill>
-                  <a:srgbClr val="1D4ED8"/>
-                </a:solidFill>
-                <a:latin typeface="Cambria"/>
-              </a:rPr>
-              <a:t>② 盗む・住み着く</a:t>
-            </a:r>
-          </a:p>
-        </p:txBody>
-      </p:sp>
-      <p:sp>
-        <p:nvSpPr>
-          <p:cNvPr id="23" name="Oval 22"/>
-          <p:cNvSpPr/>
-          <p:nvPr/>
-        </p:nvSpPr>
-        <p:spPr>
-          <a:xfrm>
-            <a:off x="6565392" y="2505456"/>
-            <a:ext cx="109728" cy="109728"/>
-          </a:xfrm>
-          <a:prstGeom prst="ellipse">
-            <a:avLst/>
-          </a:prstGeom>
-          <a:solidFill>
-            <a:srgbClr val="DC2626"/>
-          </a:solidFill>
-          <a:ln>
-            <a:noFill/>
-          </a:ln>
-          <a:effectLst/>
-        </p:spPr>
-        <p:style>
-          <a:lnRef idx="1">
-            <a:schemeClr val="accent1"/>
-          </a:lnRef>
-          <a:fillRef idx="3">
-            <a:schemeClr val="accent1"/>
-          </a:fillRef>
-          <a:effectRef idx="2">
-            <a:schemeClr val="accent1"/>
-          </a:effectRef>
-          <a:fontRef idx="minor">
-            <a:schemeClr val="lt1"/>
-          </a:fontRef>
-        </p:style>
-        <p:txBody>
-          <a:bodyPr rtlCol="0" anchor="ctr"/>
-          <a:lstStyle/>
-          <a:p>
-            <a:pPr algn="ctr"/>
-          </a:p>
-        </p:txBody>
-      </p:sp>
-      <p:sp>
-        <p:nvSpPr>
-          <p:cNvPr id="24" name="TextBox 23"/>
-          <p:cNvSpPr txBox="1"/>
-          <p:nvPr/>
-        </p:nvSpPr>
-        <p:spPr>
-          <a:xfrm>
-            <a:off x="6784848" y="2441448"/>
-            <a:ext cx="4636007" cy="365760"/>
-          </a:xfrm>
-          <a:prstGeom prst="rect">
-            <a:avLst/>
-          </a:prstGeom>
-          <a:noFill/>
-        </p:spPr>
-        <p:txBody>
-          <a:bodyPr wrap="square" lIns="0" rIns="0" tIns="0" bIns="0" anchor="t">
-            <a:spAutoFit/>
-          </a:bodyPr>
-          <a:lstStyle/>
-          <a:p>
-            <a:pPr algn="l">
-              <a:lnSpc>
-                <a:spcPct val="110000"/>
-              </a:lnSpc>
-            </a:pPr>
-            <a:r>
-              <a:rPr sz="1050" b="0" i="0">
-                <a:solidFill>
-                  <a:srgbClr val="1F2937"/>
-                </a:solidFill>
-                <a:latin typeface="Calibri"/>
-              </a:rPr>
-              <a:t>ログイン情報の抜き取り (LSASS のメモリダンプ)</a:t>
-            </a:r>
-          </a:p>
-        </p:txBody>
-      </p:sp>
-      <p:sp>
-        <p:nvSpPr>
-          <p:cNvPr id="25" name="Oval 24"/>
-          <p:cNvSpPr/>
-          <p:nvPr/>
-        </p:nvSpPr>
-        <p:spPr>
-          <a:xfrm>
-            <a:off x="6565392" y="2889503"/>
-            <a:ext cx="109728" cy="109728"/>
-          </a:xfrm>
-          <a:prstGeom prst="ellipse">
-            <a:avLst/>
-          </a:prstGeom>
-          <a:solidFill>
-            <a:srgbClr val="EA580C"/>
-          </a:solidFill>
-          <a:ln>
-            <a:noFill/>
-          </a:ln>
-          <a:effectLst/>
-        </p:spPr>
-        <p:style>
-          <a:lnRef idx="1">
-            <a:schemeClr val="accent1"/>
-          </a:lnRef>
-          <a:fillRef idx="3">
-            <a:schemeClr val="accent1"/>
-          </a:fillRef>
-          <a:effectRef idx="2">
-            <a:schemeClr val="accent1"/>
-          </a:effectRef>
-          <a:fontRef idx="minor">
-            <a:schemeClr val="lt1"/>
-          </a:fontRef>
-        </p:style>
-        <p:txBody>
-          <a:bodyPr rtlCol="0" anchor="ctr"/>
-          <a:lstStyle/>
-          <a:p>
-            <a:pPr algn="ctr"/>
-          </a:p>
-        </p:txBody>
-      </p:sp>
-      <p:sp>
-        <p:nvSpPr>
-          <p:cNvPr id="26" name="TextBox 25"/>
-          <p:cNvSpPr txBox="1"/>
-          <p:nvPr/>
-        </p:nvSpPr>
-        <p:spPr>
-          <a:xfrm>
-            <a:off x="6784848" y="2825496"/>
-            <a:ext cx="4636007" cy="365760"/>
-          </a:xfrm>
-          <a:prstGeom prst="rect">
-            <a:avLst/>
-          </a:prstGeom>
-          <a:noFill/>
-        </p:spPr>
-        <p:txBody>
-          <a:bodyPr wrap="square" lIns="0" rIns="0" tIns="0" bIns="0" anchor="t">
-            <a:spAutoFit/>
-          </a:bodyPr>
-          <a:lstStyle/>
-          <a:p>
-            <a:pPr algn="l">
-              <a:lnSpc>
-                <a:spcPct val="110000"/>
-              </a:lnSpc>
-            </a:pPr>
-            <a:r>
-              <a:rPr sz="1050" b="0" i="0">
-                <a:solidFill>
-                  <a:srgbClr val="1F2937"/>
-                </a:solidFill>
-                <a:latin typeface="Calibri"/>
-              </a:rPr>
-              <a:t>書き換え可能な場所のプログラムをサービス登録して常駐</a:t>
-            </a:r>
-          </a:p>
-        </p:txBody>
-      </p:sp>
-      <p:sp>
-        <p:nvSpPr>
-          <p:cNvPr id="27" name="Oval 26"/>
-          <p:cNvSpPr/>
-          <p:nvPr/>
-        </p:nvSpPr>
-        <p:spPr>
-          <a:xfrm>
-            <a:off x="6565392" y="3273551"/>
-            <a:ext cx="109728" cy="109728"/>
-          </a:xfrm>
-          <a:prstGeom prst="ellipse">
-            <a:avLst/>
-          </a:prstGeom>
-          <a:solidFill>
-            <a:srgbClr val="EA580C"/>
-          </a:solidFill>
-          <a:ln>
-            <a:noFill/>
-          </a:ln>
-          <a:effectLst/>
-        </p:spPr>
-        <p:style>
-          <a:lnRef idx="1">
-            <a:schemeClr val="accent1"/>
-          </a:lnRef>
-          <a:fillRef idx="3">
-            <a:schemeClr val="accent1"/>
-          </a:fillRef>
-          <a:effectRef idx="2">
-            <a:schemeClr val="accent1"/>
-          </a:effectRef>
-          <a:fontRef idx="minor">
-            <a:schemeClr val="lt1"/>
-          </a:fontRef>
-        </p:style>
-        <p:txBody>
-          <a:bodyPr rtlCol="0" anchor="ctr"/>
-          <a:lstStyle/>
-          <a:p>
-            <a:pPr algn="ctr"/>
-          </a:p>
-        </p:txBody>
-      </p:sp>
-      <p:sp>
-        <p:nvSpPr>
-          <p:cNvPr id="28" name="TextBox 27"/>
-          <p:cNvSpPr txBox="1"/>
-          <p:nvPr/>
-        </p:nvSpPr>
-        <p:spPr>
-          <a:xfrm>
-            <a:off x="6784848" y="3209544"/>
-            <a:ext cx="4636007" cy="365760"/>
-          </a:xfrm>
-          <a:prstGeom prst="rect">
-            <a:avLst/>
-          </a:prstGeom>
-          <a:noFill/>
-        </p:spPr>
-        <p:txBody>
-          <a:bodyPr wrap="square" lIns="0" rIns="0" tIns="0" bIns="0" anchor="t">
-            <a:spAutoFit/>
-          </a:bodyPr>
-          <a:lstStyle/>
-          <a:p>
-            <a:pPr algn="l">
-              <a:lnSpc>
-                <a:spcPct val="110000"/>
-              </a:lnSpc>
-            </a:pPr>
-            <a:r>
-              <a:rPr sz="1050" b="0" i="0">
-                <a:solidFill>
-                  <a:srgbClr val="1F2937"/>
-                </a:solidFill>
-                <a:latin typeface="Calibri"/>
-              </a:rPr>
-              <a:t>WMI で「出来事をきっかけに自動起動」を仕込む</a:t>
-            </a:r>
-          </a:p>
-        </p:txBody>
-      </p:sp>
-      <p:sp>
-        <p:nvSpPr>
-          <p:cNvPr id="29" name="Rounded Rectangle 28"/>
-          <p:cNvSpPr/>
-          <p:nvPr/>
-        </p:nvSpPr>
-        <p:spPr>
-          <a:xfrm>
-            <a:off x="548640" y="4114800"/>
-            <a:ext cx="5349240" cy="2240280"/>
-          </a:xfrm>
-          <a:prstGeom prst="roundRect">
-            <a:avLst/>
-          </a:prstGeom>
-          <a:solidFill>
-            <a:srgbClr val="FFFFFF"/>
-          </a:solidFill>
-          <a:ln w="9525">
-            <a:solidFill>
-              <a:srgbClr val="DDE3EE"/>
-            </a:solidFill>
-          </a:ln>
-          <a:effectLst/>
-        </p:spPr>
-        <p:style>
-          <a:lnRef idx="1">
-            <a:schemeClr val="accent1"/>
-          </a:lnRef>
-          <a:fillRef idx="3">
-            <a:schemeClr val="accent1"/>
-          </a:fillRef>
-          <a:effectRef idx="2">
-            <a:schemeClr val="accent1"/>
-          </a:effectRef>
-          <a:fontRef idx="minor">
-            <a:schemeClr val="lt1"/>
-          </a:fontRef>
-        </p:style>
-        <p:txBody>
-          <a:bodyPr rtlCol="0" anchor="ctr"/>
-          <a:lstStyle/>
-          <a:p>
-            <a:pPr algn="ctr"/>
-          </a:p>
-        </p:txBody>
-      </p:sp>
-      <p:sp>
-        <p:nvSpPr>
-          <p:cNvPr id="30" name="Rectangle 29"/>
-          <p:cNvSpPr/>
-          <p:nvPr/>
-        </p:nvSpPr>
-        <p:spPr>
-          <a:xfrm>
-            <a:off x="548640" y="4114800"/>
-            <a:ext cx="73152" cy="2240280"/>
-          </a:xfrm>
-          <a:prstGeom prst="rect">
-            <a:avLst/>
-          </a:prstGeom>
-          <a:solidFill>
-            <a:srgbClr val="2563EB"/>
-          </a:solidFill>
-          <a:ln>
-            <a:noFill/>
-          </a:ln>
-          <a:effectLst/>
-        </p:spPr>
-        <p:style>
-          <a:lnRef idx="1">
-            <a:schemeClr val="accent1"/>
-          </a:lnRef>
-          <a:fillRef idx="3">
-            <a:schemeClr val="accent1"/>
-          </a:fillRef>
-          <a:effectRef idx="2">
-            <a:schemeClr val="accent1"/>
-          </a:effectRef>
-          <a:fontRef idx="minor">
-            <a:schemeClr val="lt1"/>
-          </a:fontRef>
-        </p:style>
-        <p:txBody>
-          <a:bodyPr rtlCol="0" anchor="ctr"/>
-          <a:lstStyle/>
-          <a:p>
-            <a:pPr algn="ctr"/>
-          </a:p>
-        </p:txBody>
-      </p:sp>
-      <p:sp>
-        <p:nvSpPr>
-          <p:cNvPr id="31" name="TextBox 30"/>
-          <p:cNvSpPr txBox="1"/>
-          <p:nvPr/>
-        </p:nvSpPr>
-        <p:spPr>
-          <a:xfrm>
-            <a:off x="804672" y="4261104"/>
-            <a:ext cx="4937759" cy="411480"/>
-          </a:xfrm>
-          <a:prstGeom prst="rect">
-            <a:avLst/>
-          </a:prstGeom>
-          <a:noFill/>
-        </p:spPr>
-        <p:txBody>
-          <a:bodyPr wrap="square" lIns="0" rIns="0" tIns="0" bIns="0" anchor="t">
-            <a:spAutoFit/>
-          </a:bodyPr>
-          <a:lstStyle/>
-          <a:p>
-            <a:pPr algn="l">
-              <a:lnSpc>
-                <a:spcPct val="130000"/>
-              </a:lnSpc>
-            </a:pPr>
-            <a:r>
-              <a:rPr sz="1400" b="1" i="0">
-                <a:solidFill>
-                  <a:srgbClr val="1D4ED8"/>
-                </a:solidFill>
-                <a:latin typeface="Cambria"/>
-              </a:rPr>
-              <a:t>③ 監視を無力化する</a:t>
-            </a:r>
-          </a:p>
-        </p:txBody>
-      </p:sp>
-      <p:sp>
-        <p:nvSpPr>
-          <p:cNvPr id="32" name="Oval 31"/>
-          <p:cNvSpPr/>
-          <p:nvPr/>
-        </p:nvSpPr>
-        <p:spPr>
-          <a:xfrm>
-            <a:off x="822959" y="4837176"/>
-            <a:ext cx="109728" cy="109728"/>
-          </a:xfrm>
-          <a:prstGeom prst="ellipse">
-            <a:avLst/>
-          </a:prstGeom>
-          <a:solidFill>
-            <a:srgbClr val="EA580C"/>
-          </a:solidFill>
-          <a:ln>
-            <a:noFill/>
-          </a:ln>
-          <a:effectLst/>
-        </p:spPr>
-        <p:style>
-          <a:lnRef idx="1">
-            <a:schemeClr val="accent1"/>
-          </a:lnRef>
-          <a:fillRef idx="3">
-            <a:schemeClr val="accent1"/>
-          </a:fillRef>
-          <a:effectRef idx="2">
-            <a:schemeClr val="accent1"/>
-          </a:effectRef>
-          <a:fontRef idx="minor">
-            <a:schemeClr val="lt1"/>
-          </a:fontRef>
-        </p:style>
-        <p:txBody>
-          <a:bodyPr rtlCol="0" anchor="ctr"/>
-          <a:lstStyle/>
-          <a:p>
-            <a:pPr algn="ctr"/>
-          </a:p>
-        </p:txBody>
-      </p:sp>
-      <p:sp>
-        <p:nvSpPr>
-          <p:cNvPr id="33" name="TextBox 32"/>
-          <p:cNvSpPr txBox="1"/>
-          <p:nvPr/>
-        </p:nvSpPr>
-        <p:spPr>
-          <a:xfrm>
-            <a:off x="1042416" y="4773168"/>
-            <a:ext cx="4636007" cy="365760"/>
-          </a:xfrm>
-          <a:prstGeom prst="rect">
-            <a:avLst/>
-          </a:prstGeom>
-          <a:noFill/>
-        </p:spPr>
-        <p:txBody>
-          <a:bodyPr wrap="square" lIns="0" rIns="0" tIns="0" bIns="0" anchor="t">
-            <a:spAutoFit/>
-          </a:bodyPr>
-          <a:lstStyle/>
-          <a:p>
-            <a:pPr algn="l">
-              <a:lnSpc>
-                <a:spcPct val="110000"/>
-              </a:lnSpc>
-            </a:pPr>
-            <a:r>
-              <a:rPr sz="1050" b="0" i="0">
-                <a:solidFill>
-                  <a:srgbClr val="1F2937"/>
-                </a:solidFill>
-                <a:latin typeface="Calibri"/>
-              </a:rPr>
-              <a:t>PowerShell のウイルス検査 (AMSI) を無力化</a:t>
-            </a:r>
-          </a:p>
-        </p:txBody>
-      </p:sp>
-      <p:sp>
-        <p:nvSpPr>
-          <p:cNvPr id="34" name="Oval 33"/>
-          <p:cNvSpPr/>
-          <p:nvPr/>
-        </p:nvSpPr>
-        <p:spPr>
-          <a:xfrm>
-            <a:off x="822959" y="5221224"/>
-            <a:ext cx="109728" cy="109728"/>
-          </a:xfrm>
-          <a:prstGeom prst="ellipse">
-            <a:avLst/>
-          </a:prstGeom>
-          <a:solidFill>
-            <a:srgbClr val="DC2626"/>
-          </a:solidFill>
-          <a:ln>
-            <a:noFill/>
-          </a:ln>
-          <a:effectLst/>
-        </p:spPr>
-        <p:style>
-          <a:lnRef idx="1">
-            <a:schemeClr val="accent1"/>
-          </a:lnRef>
-          <a:fillRef idx="3">
-            <a:schemeClr val="accent1"/>
-          </a:fillRef>
-          <a:effectRef idx="2">
-            <a:schemeClr val="accent1"/>
-          </a:effectRef>
-          <a:fontRef idx="minor">
-            <a:schemeClr val="lt1"/>
-          </a:fontRef>
-        </p:style>
-        <p:txBody>
-          <a:bodyPr rtlCol="0" anchor="ctr"/>
-          <a:lstStyle/>
-          <a:p>
-            <a:pPr algn="ctr"/>
-          </a:p>
-        </p:txBody>
-      </p:sp>
-      <p:sp>
-        <p:nvSpPr>
-          <p:cNvPr id="35" name="TextBox 34"/>
-          <p:cNvSpPr txBox="1"/>
-          <p:nvPr/>
-        </p:nvSpPr>
-        <p:spPr>
-          <a:xfrm>
-            <a:off x="1042416" y="5157216"/>
-            <a:ext cx="4636007" cy="365760"/>
-          </a:xfrm>
-          <a:prstGeom prst="rect">
-            <a:avLst/>
-          </a:prstGeom>
-          <a:noFill/>
-        </p:spPr>
-        <p:txBody>
-          <a:bodyPr wrap="square" lIns="0" rIns="0" tIns="0" bIns="0" anchor="t">
-            <a:spAutoFit/>
-          </a:bodyPr>
-          <a:lstStyle/>
-          <a:p>
-            <a:pPr algn="l">
-              <a:lnSpc>
-                <a:spcPct val="110000"/>
-              </a:lnSpc>
-            </a:pPr>
-            <a:r>
-              <a:rPr sz="1050" b="0" i="0">
-                <a:solidFill>
-                  <a:srgbClr val="1F2937"/>
-                </a:solidFill>
-                <a:latin typeface="Calibri"/>
-              </a:rPr>
-              <a:t>ログ記録サービスそのものを停止・無効化</a:t>
-            </a:r>
-          </a:p>
-        </p:txBody>
-      </p:sp>
-      <p:sp>
-        <p:nvSpPr>
-          <p:cNvPr id="36" name="Oval 35"/>
-          <p:cNvSpPr/>
-          <p:nvPr/>
-        </p:nvSpPr>
-        <p:spPr>
-          <a:xfrm>
-            <a:off x="822959" y="5605272"/>
-            <a:ext cx="109728" cy="109728"/>
-          </a:xfrm>
-          <a:prstGeom prst="ellipse">
-            <a:avLst/>
-          </a:prstGeom>
-          <a:solidFill>
-            <a:srgbClr val="EA580C"/>
-          </a:solidFill>
-          <a:ln>
-            <a:noFill/>
-          </a:ln>
-          <a:effectLst/>
-        </p:spPr>
-        <p:style>
-          <a:lnRef idx="1">
-            <a:schemeClr val="accent1"/>
-          </a:lnRef>
-          <a:fillRef idx="3">
-            <a:schemeClr val="accent1"/>
-          </a:fillRef>
-          <a:effectRef idx="2">
-            <a:schemeClr val="accent1"/>
-          </a:effectRef>
-          <a:fontRef idx="minor">
-            <a:schemeClr val="lt1"/>
-          </a:fontRef>
-        </p:style>
-        <p:txBody>
-          <a:bodyPr rtlCol="0" anchor="ctr"/>
-          <a:lstStyle/>
-          <a:p>
-            <a:pPr algn="ctr"/>
-          </a:p>
-        </p:txBody>
-      </p:sp>
-      <p:sp>
-        <p:nvSpPr>
-          <p:cNvPr id="37" name="TextBox 36"/>
-          <p:cNvSpPr txBox="1"/>
-          <p:nvPr/>
-        </p:nvSpPr>
-        <p:spPr>
-          <a:xfrm>
-            <a:off x="1042416" y="5541264"/>
-            <a:ext cx="4636007" cy="365760"/>
-          </a:xfrm>
-          <a:prstGeom prst="rect">
-            <a:avLst/>
-          </a:prstGeom>
-          <a:noFill/>
-        </p:spPr>
-        <p:txBody>
-          <a:bodyPr wrap="square" lIns="0" rIns="0" tIns="0" bIns="0" anchor="t">
-            <a:spAutoFit/>
-          </a:bodyPr>
-          <a:lstStyle/>
-          <a:p>
-            <a:pPr algn="l">
-              <a:lnSpc>
-                <a:spcPct val="110000"/>
-              </a:lnSpc>
-            </a:pPr>
-            <a:r>
-              <a:rPr sz="1050" b="0" i="0">
-                <a:solidFill>
-                  <a:srgbClr val="1F2937"/>
-                </a:solidFill>
-                <a:latin typeface="Calibri"/>
-              </a:rPr>
-              <a:t>監査設定から記録項目を外して “見えなく” する</a:t>
-            </a:r>
-          </a:p>
-        </p:txBody>
-      </p:sp>
-      <p:sp>
-        <p:nvSpPr>
-          <p:cNvPr id="38" name="Rounded Rectangle 37"/>
-          <p:cNvSpPr/>
-          <p:nvPr/>
-        </p:nvSpPr>
-        <p:spPr>
-          <a:xfrm>
-            <a:off x="6291072" y="4114800"/>
-            <a:ext cx="5349240" cy="2240280"/>
-          </a:xfrm>
-          <a:prstGeom prst="roundRect">
-            <a:avLst/>
-          </a:prstGeom>
-          <a:solidFill>
-            <a:srgbClr val="FFFFFF"/>
-          </a:solidFill>
-          <a:ln w="9525">
-            <a:solidFill>
-              <a:srgbClr val="DDE3EE"/>
-            </a:solidFill>
-          </a:ln>
-          <a:effectLst/>
-        </p:spPr>
-        <p:style>
-          <a:lnRef idx="1">
-            <a:schemeClr val="accent1"/>
-          </a:lnRef>
-          <a:fillRef idx="3">
-            <a:schemeClr val="accent1"/>
-          </a:fillRef>
-          <a:effectRef idx="2">
-            <a:schemeClr val="accent1"/>
-          </a:effectRef>
-          <a:fontRef idx="minor">
-            <a:schemeClr val="lt1"/>
-          </a:fontRef>
-        </p:style>
-        <p:txBody>
-          <a:bodyPr rtlCol="0" anchor="ctr"/>
-          <a:lstStyle/>
-          <a:p>
-            <a:pPr algn="ctr"/>
-          </a:p>
-        </p:txBody>
-      </p:sp>
-      <p:sp>
-        <p:nvSpPr>
-          <p:cNvPr id="39" name="Rectangle 38"/>
-          <p:cNvSpPr/>
-          <p:nvPr/>
-        </p:nvSpPr>
-        <p:spPr>
-          <a:xfrm>
-            <a:off x="6291072" y="4114800"/>
-            <a:ext cx="73152" cy="2240280"/>
-          </a:xfrm>
-          <a:prstGeom prst="rect">
-            <a:avLst/>
-          </a:prstGeom>
-          <a:solidFill>
-            <a:srgbClr val="2563EB"/>
-          </a:solidFill>
-          <a:ln>
-            <a:noFill/>
-          </a:ln>
-          <a:effectLst/>
-        </p:spPr>
-        <p:style>
-          <a:lnRef idx="1">
-            <a:schemeClr val="accent1"/>
-          </a:lnRef>
-          <a:fillRef idx="3">
-            <a:schemeClr val="accent1"/>
-          </a:fillRef>
-          <a:effectRef idx="2">
-            <a:schemeClr val="accent1"/>
-          </a:effectRef>
-          <a:fontRef idx="minor">
-            <a:schemeClr val="lt1"/>
-          </a:fontRef>
-        </p:style>
-        <p:txBody>
-          <a:bodyPr rtlCol="0" anchor="ctr"/>
-          <a:lstStyle/>
-          <a:p>
-            <a:pPr algn="ctr"/>
-          </a:p>
-        </p:txBody>
-      </p:sp>
-      <p:sp>
-        <p:nvSpPr>
-          <p:cNvPr id="40" name="TextBox 39"/>
-          <p:cNvSpPr txBox="1"/>
-          <p:nvPr/>
-        </p:nvSpPr>
-        <p:spPr>
-          <a:xfrm>
-            <a:off x="6547104" y="4261104"/>
-            <a:ext cx="4937759" cy="411480"/>
-          </a:xfrm>
-          <a:prstGeom prst="rect">
-            <a:avLst/>
-          </a:prstGeom>
-          <a:noFill/>
-        </p:spPr>
-        <p:txBody>
-          <a:bodyPr wrap="square" lIns="0" rIns="0" tIns="0" bIns="0" anchor="t">
-            <a:spAutoFit/>
-          </a:bodyPr>
-          <a:lstStyle/>
-          <a:p>
-            <a:pPr algn="l">
-              <a:lnSpc>
-                <a:spcPct val="130000"/>
-              </a:lnSpc>
-            </a:pPr>
-            <a:r>
-              <a:rPr sz="1400" b="1" i="0">
-                <a:solidFill>
-                  <a:srgbClr val="1D4ED8"/>
-                </a:solidFill>
-                <a:latin typeface="Cambria"/>
-              </a:rPr>
-              <a:t>④ 証拠を消す</a:t>
-            </a:r>
-          </a:p>
-        </p:txBody>
-      </p:sp>
-      <p:sp>
-        <p:nvSpPr>
-          <p:cNvPr id="41" name="Oval 40"/>
-          <p:cNvSpPr/>
-          <p:nvPr/>
-        </p:nvSpPr>
-        <p:spPr>
-          <a:xfrm>
-            <a:off x="6565392" y="4837176"/>
-            <a:ext cx="109728" cy="109728"/>
-          </a:xfrm>
-          <a:prstGeom prst="ellipse">
-            <a:avLst/>
-          </a:prstGeom>
-          <a:solidFill>
-            <a:srgbClr val="EA580C"/>
-          </a:solidFill>
-          <a:ln>
-            <a:noFill/>
-          </a:ln>
-          <a:effectLst/>
-        </p:spPr>
-        <p:style>
-          <a:lnRef idx="1">
-            <a:schemeClr val="accent1"/>
-          </a:lnRef>
-          <a:fillRef idx="3">
-            <a:schemeClr val="accent1"/>
-          </a:fillRef>
-          <a:effectRef idx="2">
-            <a:schemeClr val="accent1"/>
-          </a:effectRef>
-          <a:fontRef idx="minor">
-            <a:schemeClr val="lt1"/>
-          </a:fontRef>
-        </p:style>
-        <p:txBody>
-          <a:bodyPr rtlCol="0" anchor="ctr"/>
-          <a:lstStyle/>
-          <a:p>
-            <a:pPr algn="ctr"/>
-          </a:p>
-        </p:txBody>
-      </p:sp>
-      <p:sp>
-        <p:nvSpPr>
-          <p:cNvPr id="42" name="TextBox 41"/>
-          <p:cNvSpPr txBox="1"/>
-          <p:nvPr/>
-        </p:nvSpPr>
-        <p:spPr>
-          <a:xfrm>
-            <a:off x="6784848" y="4773168"/>
-            <a:ext cx="4636007" cy="365760"/>
-          </a:xfrm>
-          <a:prstGeom prst="rect">
-            <a:avLst/>
-          </a:prstGeom>
-          <a:noFill/>
-        </p:spPr>
-        <p:txBody>
-          <a:bodyPr wrap="square" lIns="0" rIns="0" tIns="0" bIns="0" anchor="t">
-            <a:spAutoFit/>
-          </a:bodyPr>
-          <a:lstStyle/>
-          <a:p>
-            <a:pPr algn="l">
-              <a:lnSpc>
-                <a:spcPct val="110000"/>
-              </a:lnSpc>
-            </a:pPr>
-            <a:r>
-              <a:rPr sz="1050" b="0" i="0">
-                <a:solidFill>
-                  <a:srgbClr val="1F2937"/>
-                </a:solidFill>
-                <a:latin typeface="Calibri"/>
-              </a:rPr>
-              <a:t>wevtutil などでイベントログをまるごと消去</a:t>
-            </a:r>
-          </a:p>
-        </p:txBody>
-      </p:sp>
-      <p:sp>
-        <p:nvSpPr>
-          <p:cNvPr id="43" name="Oval 42"/>
-          <p:cNvSpPr/>
-          <p:nvPr/>
-        </p:nvSpPr>
-        <p:spPr>
-          <a:xfrm>
-            <a:off x="6565392" y="5221224"/>
-            <a:ext cx="109728" cy="109728"/>
-          </a:xfrm>
-          <a:prstGeom prst="ellipse">
-            <a:avLst/>
-          </a:prstGeom>
-          <a:solidFill>
-            <a:srgbClr val="DC2626"/>
-          </a:solidFill>
-          <a:ln>
-            <a:noFill/>
-          </a:ln>
-          <a:effectLst/>
-        </p:spPr>
-        <p:style>
-          <a:lnRef idx="1">
-            <a:schemeClr val="accent1"/>
-          </a:lnRef>
-          <a:fillRef idx="3">
-            <a:schemeClr val="accent1"/>
-          </a:fillRef>
-          <a:effectRef idx="2">
-            <a:schemeClr val="accent1"/>
-          </a:effectRef>
-          <a:fontRef idx="minor">
-            <a:schemeClr val="lt1"/>
-          </a:fontRef>
-        </p:style>
-        <p:txBody>
-          <a:bodyPr rtlCol="0" anchor="ctr"/>
-          <a:lstStyle/>
-          <a:p>
-            <a:pPr algn="ctr"/>
-          </a:p>
-        </p:txBody>
-      </p:sp>
-      <p:sp>
-        <p:nvSpPr>
-          <p:cNvPr id="44" name="TextBox 43"/>
-          <p:cNvSpPr txBox="1"/>
-          <p:nvPr/>
-        </p:nvSpPr>
-        <p:spPr>
-          <a:xfrm>
-            <a:off x="6784848" y="5157216"/>
-            <a:ext cx="4636007" cy="365760"/>
-          </a:xfrm>
-          <a:prstGeom prst="rect">
-            <a:avLst/>
-          </a:prstGeom>
-          <a:noFill/>
-        </p:spPr>
-        <p:txBody>
-          <a:bodyPr wrap="square" lIns="0" rIns="0" tIns="0" bIns="0" anchor="t">
-            <a:spAutoFit/>
-          </a:bodyPr>
-          <a:lstStyle/>
-          <a:p>
-            <a:pPr algn="l">
-              <a:lnSpc>
-                <a:spcPct val="110000"/>
-              </a:lnSpc>
-            </a:pPr>
-            <a:r>
-              <a:rPr sz="1050" b="0" i="0">
-                <a:solidFill>
-                  <a:srgbClr val="1F2937"/>
-                </a:solidFill>
-                <a:latin typeface="Calibri"/>
-              </a:rPr>
-              <a:t>監査を変えた直後にログ消去、という “合わせ技”</a:t>
-            </a:r>
-          </a:p>
-        </p:txBody>
-      </p:sp>
-      <p:sp>
-        <p:nvSpPr>
-          <p:cNvPr id="45" name="Oval 44"/>
-          <p:cNvSpPr/>
-          <p:nvPr/>
-        </p:nvSpPr>
-        <p:spPr>
-          <a:xfrm>
-            <a:off x="6565392" y="5605272"/>
-            <a:ext cx="109728" cy="109728"/>
-          </a:xfrm>
-          <a:prstGeom prst="ellipse">
-            <a:avLst/>
-          </a:prstGeom>
-          <a:solidFill>
-            <a:srgbClr val="DC2626"/>
-          </a:solidFill>
-          <a:ln>
-            <a:noFill/>
-          </a:ln>
-          <a:effectLst/>
-        </p:spPr>
-        <p:style>
-          <a:lnRef idx="1">
-            <a:schemeClr val="accent1"/>
-          </a:lnRef>
-          <a:fillRef idx="3">
-            <a:schemeClr val="accent1"/>
-          </a:fillRef>
-          <a:effectRef idx="2">
-            <a:schemeClr val="accent1"/>
-          </a:effectRef>
-          <a:fontRef idx="minor">
-            <a:schemeClr val="lt1"/>
-          </a:fontRef>
-        </p:style>
-        <p:txBody>
-          <a:bodyPr rtlCol="0" anchor="ctr"/>
-          <a:lstStyle/>
-          <a:p>
-            <a:pPr algn="ctr"/>
-          </a:p>
-        </p:txBody>
-      </p:sp>
-      <p:sp>
-        <p:nvSpPr>
-          <p:cNvPr id="46" name="TextBox 45"/>
-          <p:cNvSpPr txBox="1"/>
-          <p:nvPr/>
-        </p:nvSpPr>
-        <p:spPr>
-          <a:xfrm>
-            <a:off x="6784848" y="5541264"/>
-            <a:ext cx="4636007" cy="365760"/>
-          </a:xfrm>
-          <a:prstGeom prst="rect">
-            <a:avLst/>
-          </a:prstGeom>
-          <a:noFill/>
-        </p:spPr>
-        <p:txBody>
-          <a:bodyPr wrap="square" lIns="0" rIns="0" tIns="0" bIns="0" anchor="t">
-            <a:spAutoFit/>
-          </a:bodyPr>
-          <a:lstStyle/>
-          <a:p>
-            <a:pPr algn="l">
-              <a:lnSpc>
-                <a:spcPct val="110000"/>
-              </a:lnSpc>
-            </a:pPr>
-            <a:r>
-              <a:rPr sz="1050" b="0" i="0">
-                <a:solidFill>
-                  <a:srgbClr val="1F2937"/>
-                </a:solidFill>
-                <a:latin typeface="Calibri"/>
-              </a:rPr>
-              <a:t>復元用スナップショットの削除 (ランサムの前兆)</a:t>
-            </a:r>
-          </a:p>
-        </p:txBody>
-      </p:sp>
-      <p:sp>
-        <p:nvSpPr>
-          <p:cNvPr id="47" name="TextBox 46"/>
-          <p:cNvSpPr txBox="1"/>
-          <p:nvPr/>
-        </p:nvSpPr>
-        <p:spPr>
-          <a:xfrm>
-            <a:off x="10972800" y="6446520"/>
-            <a:ext cx="914400" cy="274320"/>
-          </a:xfrm>
-          <a:prstGeom prst="rect">
-            <a:avLst/>
-          </a:prstGeom>
-          <a:noFill/>
-        </p:spPr>
-        <p:txBody>
-          <a:bodyPr wrap="square" lIns="0" rIns="0" tIns="0" bIns="0" anchor="t">
-            <a:spAutoFit/>
-          </a:bodyPr>
-          <a:lstStyle/>
-          <a:p>
-            <a:pPr algn="r">
-              <a:lnSpc>
-                <a:spcPct val="130000"/>
-              </a:lnSpc>
-            </a:pPr>
-            <a:r>
-              <a:rPr sz="900" b="0" i="0">
-                <a:solidFill>
-                  <a:srgbClr val="5B6472"/>
-                </a:solidFill>
-                <a:latin typeface="Calibri"/>
-              </a:rPr>
-              <a:t>付録</a:t>
+              <a:t>お手元の Windows PC のログで、ぜひ一度。</a:t>
             </a:r>
           </a:p>
         </p:txBody>
@@ -12935,7 +12561,7 @@
                 </a:solidFill>
                 <a:latin typeface="Calibri"/>
               </a:rPr>
-              <a:t>付録 — 想定問答 (Q&amp;A)</a:t>
+              <a:t>Q&amp;A 用   — 攻撃の流れに沿って整理</a:t>
             </a:r>
           </a:p>
         </p:txBody>
@@ -12974,21 +12600,187 @@
                 </a:solidFill>
                 <a:latin typeface="Cambria"/>
               </a:rPr>
-              <a:t>よくある質問 ①  立ち位置・差分</a:t>
-            </a:r>
-          </a:p>
-        </p:txBody>
-      </p:sp>
-      <p:sp>
-        <p:nvSpPr>
-          <p:cNvPr id="5" name="Rounded Rectangle 4"/>
+              <a:t>付録: 同梱している検知ルール 13 本</a:t>
+            </a:r>
+          </a:p>
+        </p:txBody>
+      </p:sp>
+      <p:sp>
+        <p:nvSpPr>
+          <p:cNvPr id="5" name="Oval 4"/>
           <p:cNvSpPr/>
           <p:nvPr/>
         </p:nvSpPr>
         <p:spPr>
           <a:xfrm>
+            <a:off x="8275320" y="502920"/>
+            <a:ext cx="146304" cy="146304"/>
+          </a:xfrm>
+          <a:prstGeom prst="ellipse">
+            <a:avLst/>
+          </a:prstGeom>
+          <a:solidFill>
+            <a:srgbClr val="DC2626"/>
+          </a:solidFill>
+          <a:ln>
+            <a:noFill/>
+          </a:ln>
+          <a:effectLst/>
+        </p:spPr>
+        <p:style>
+          <a:lnRef idx="1">
+            <a:schemeClr val="accent1"/>
+          </a:lnRef>
+          <a:fillRef idx="3">
+            <a:schemeClr val="accent1"/>
+          </a:fillRef>
+          <a:effectRef idx="2">
+            <a:schemeClr val="accent1"/>
+          </a:effectRef>
+          <a:fontRef idx="minor">
+            <a:schemeClr val="lt1"/>
+          </a:fontRef>
+        </p:style>
+        <p:txBody>
+          <a:bodyPr rtlCol="0" anchor="ctr"/>
+          <a:lstStyle/>
+          <a:p>
+            <a:pPr algn="ctr"/>
+          </a:p>
+        </p:txBody>
+      </p:sp>
+      <p:sp>
+        <p:nvSpPr>
+          <p:cNvPr id="6" name="TextBox 5"/>
+          <p:cNvSpPr txBox="1"/>
+          <p:nvPr/>
+        </p:nvSpPr>
+        <p:spPr>
+          <a:xfrm>
+            <a:off x="8485632" y="457200"/>
+            <a:ext cx="1554480" cy="274320"/>
+          </a:xfrm>
+          <a:prstGeom prst="rect">
+            <a:avLst/>
+          </a:prstGeom>
+          <a:noFill/>
+        </p:spPr>
+        <p:txBody>
+          <a:bodyPr wrap="square" lIns="0" rIns="0" tIns="0" bIns="0" anchor="ctr">
+            <a:spAutoFit/>
+          </a:bodyPr>
+          <a:lstStyle/>
+          <a:p>
+            <a:pPr algn="l">
+              <a:lnSpc>
+                <a:spcPct val="130000"/>
+              </a:lnSpc>
+            </a:pPr>
+            <a:r>
+              <a:rPr sz="1000" b="0" i="0">
+                <a:solidFill>
+                  <a:srgbClr val="5B6472"/>
+                </a:solidFill>
+                <a:latin typeface="Calibri"/>
+              </a:rPr>
+              <a:t>critical (最重要)</a:t>
+            </a:r>
+          </a:p>
+        </p:txBody>
+      </p:sp>
+      <p:sp>
+        <p:nvSpPr>
+          <p:cNvPr id="7" name="Oval 6"/>
+          <p:cNvSpPr/>
+          <p:nvPr/>
+        </p:nvSpPr>
+        <p:spPr>
+          <a:xfrm>
+            <a:off x="10149840" y="502920"/>
+            <a:ext cx="146304" cy="146304"/>
+          </a:xfrm>
+          <a:prstGeom prst="ellipse">
+            <a:avLst/>
+          </a:prstGeom>
+          <a:solidFill>
+            <a:srgbClr val="EA580C"/>
+          </a:solidFill>
+          <a:ln>
+            <a:noFill/>
+          </a:ln>
+          <a:effectLst/>
+        </p:spPr>
+        <p:style>
+          <a:lnRef idx="1">
+            <a:schemeClr val="accent1"/>
+          </a:lnRef>
+          <a:fillRef idx="3">
+            <a:schemeClr val="accent1"/>
+          </a:fillRef>
+          <a:effectRef idx="2">
+            <a:schemeClr val="accent1"/>
+          </a:effectRef>
+          <a:fontRef idx="minor">
+            <a:schemeClr val="lt1"/>
+          </a:fontRef>
+        </p:style>
+        <p:txBody>
+          <a:bodyPr rtlCol="0" anchor="ctr"/>
+          <a:lstStyle/>
+          <a:p>
+            <a:pPr algn="ctr"/>
+          </a:p>
+        </p:txBody>
+      </p:sp>
+      <p:sp>
+        <p:nvSpPr>
+          <p:cNvPr id="8" name="TextBox 7"/>
+          <p:cNvSpPr txBox="1"/>
+          <p:nvPr/>
+        </p:nvSpPr>
+        <p:spPr>
+          <a:xfrm>
+            <a:off x="10360152" y="457200"/>
+            <a:ext cx="1280160" cy="274320"/>
+          </a:xfrm>
+          <a:prstGeom prst="rect">
+            <a:avLst/>
+          </a:prstGeom>
+          <a:noFill/>
+        </p:spPr>
+        <p:txBody>
+          <a:bodyPr wrap="square" lIns="0" rIns="0" tIns="0" bIns="0" anchor="ctr">
+            <a:spAutoFit/>
+          </a:bodyPr>
+          <a:lstStyle/>
+          <a:p>
+            <a:pPr algn="l">
+              <a:lnSpc>
+                <a:spcPct val="130000"/>
+              </a:lnSpc>
+            </a:pPr>
+            <a:r>
+              <a:rPr sz="1000" b="0" i="0">
+                <a:solidFill>
+                  <a:srgbClr val="5B6472"/>
+                </a:solidFill>
+                <a:latin typeface="Calibri"/>
+              </a:rPr>
+              <a:t>high (重要)</a:t>
+            </a:r>
+          </a:p>
+        </p:txBody>
+      </p:sp>
+      <p:sp>
+        <p:nvSpPr>
+          <p:cNvPr id="9" name="Rounded Rectangle 8"/>
+          <p:cNvSpPr/>
+          <p:nvPr/>
+        </p:nvSpPr>
+        <p:spPr>
+          <a:xfrm>
             <a:off x="548640" y="1783080"/>
-            <a:ext cx="11091672" cy="1386840"/>
+            <a:ext cx="5349240" cy="2240280"/>
           </a:xfrm>
           <a:prstGeom prst="roundRect">
             <a:avLst/>
@@ -13027,14 +12819,14 @@
       </p:sp>
       <p:sp>
         <p:nvSpPr>
-          <p:cNvPr id="6" name="Rectangle 5"/>
+          <p:cNvPr id="10" name="Rectangle 9"/>
           <p:cNvSpPr/>
           <p:nvPr/>
         </p:nvSpPr>
         <p:spPr>
           <a:xfrm>
             <a:off x="548640" y="1783080"/>
-            <a:ext cx="73152" cy="1386840"/>
+            <a:ext cx="73152" cy="2240280"/>
           </a:xfrm>
           <a:prstGeom prst="rect">
             <a:avLst/>
@@ -13071,14 +12863,14 @@
       </p:sp>
       <p:sp>
         <p:nvSpPr>
-          <p:cNvPr id="7" name="TextBox 6"/>
-          <p:cNvSpPr txBox="1"/>
-          <p:nvPr/>
-        </p:nvSpPr>
-        <p:spPr>
-          <a:xfrm>
-            <a:off x="868680" y="1929384"/>
-            <a:ext cx="10515600" cy="457200"/>
+          <p:cNvPr id="11" name="TextBox 10"/>
+          <p:cNvSpPr txBox="1"/>
+          <p:nvPr/>
+        </p:nvSpPr>
+        <p:spPr>
+          <a:xfrm>
+            <a:off x="804672" y="1929384"/>
+            <a:ext cx="4937759" cy="411480"/>
           </a:xfrm>
           <a:prstGeom prst="rect">
             <a:avLst/>
@@ -13097,27 +12889,154 @@
               </a:lnSpc>
             </a:pPr>
             <a:r>
-              <a:rPr sz="1500" b="1" i="0">
+              <a:rPr sz="1400" b="1" i="0">
+                <a:solidFill>
+                  <a:srgbClr val="1D4ED8"/>
+                </a:solidFill>
+                <a:latin typeface="Cambria"/>
+              </a:rPr>
+              <a:t>① 外から入る・動く・つながる</a:t>
+            </a:r>
+          </a:p>
+        </p:txBody>
+      </p:sp>
+      <p:sp>
+        <p:nvSpPr>
+          <p:cNvPr id="12" name="Oval 11"/>
+          <p:cNvSpPr/>
+          <p:nvPr/>
+        </p:nvSpPr>
+        <p:spPr>
+          <a:xfrm>
+            <a:off x="822959" y="2505456"/>
+            <a:ext cx="109728" cy="109728"/>
+          </a:xfrm>
+          <a:prstGeom prst="ellipse">
+            <a:avLst/>
+          </a:prstGeom>
+          <a:solidFill>
+            <a:srgbClr val="DC2626"/>
+          </a:solidFill>
+          <a:ln>
+            <a:noFill/>
+          </a:ln>
+          <a:effectLst/>
+        </p:spPr>
+        <p:style>
+          <a:lnRef idx="1">
+            <a:schemeClr val="accent1"/>
+          </a:lnRef>
+          <a:fillRef idx="3">
+            <a:schemeClr val="accent1"/>
+          </a:fillRef>
+          <a:effectRef idx="2">
+            <a:schemeClr val="accent1"/>
+          </a:effectRef>
+          <a:fontRef idx="minor">
+            <a:schemeClr val="lt1"/>
+          </a:fontRef>
+        </p:style>
+        <p:txBody>
+          <a:bodyPr rtlCol="0" anchor="ctr"/>
+          <a:lstStyle/>
+          <a:p>
+            <a:pPr algn="ctr"/>
+          </a:p>
+        </p:txBody>
+      </p:sp>
+      <p:sp>
+        <p:nvSpPr>
+          <p:cNvPr id="13" name="TextBox 12"/>
+          <p:cNvSpPr txBox="1"/>
+          <p:nvPr/>
+        </p:nvSpPr>
+        <p:spPr>
+          <a:xfrm>
+            <a:off x="1042416" y="2441448"/>
+            <a:ext cx="4636007" cy="365760"/>
+          </a:xfrm>
+          <a:prstGeom prst="rect">
+            <a:avLst/>
+          </a:prstGeom>
+          <a:noFill/>
+        </p:spPr>
+        <p:txBody>
+          <a:bodyPr wrap="square" lIns="0" rIns="0" tIns="0" bIns="0" anchor="t">
+            <a:spAutoFit/>
+          </a:bodyPr>
+          <a:lstStyle/>
+          <a:p>
+            <a:pPr algn="l">
+              <a:lnSpc>
+                <a:spcPct val="110000"/>
+              </a:lnSpc>
+            </a:pPr>
+            <a:r>
+              <a:rPr sz="1050" b="0" i="0">
                 <a:solidFill>
                   <a:srgbClr val="1F2937"/>
                 </a:solidFill>
-                <a:latin typeface="Cambria"/>
-              </a:rPr>
-              <a:t>Q.  既存の Hayabusa と何が違うの?</a:t>
-            </a:r>
-          </a:p>
-        </p:txBody>
-      </p:sp>
-      <p:sp>
-        <p:nvSpPr>
-          <p:cNvPr id="8" name="TextBox 7"/>
-          <p:cNvSpPr txBox="1"/>
-          <p:nvPr/>
-        </p:nvSpPr>
-        <p:spPr>
-          <a:xfrm>
-            <a:off x="868680" y="2386584"/>
-            <a:ext cx="10469880" cy="673608"/>
+                <a:latin typeface="Calibri"/>
+              </a:rPr>
+              <a:t>既知のマルウェアそのものが実行された (MalwareBazaar 照合)</a:t>
+            </a:r>
+          </a:p>
+        </p:txBody>
+      </p:sp>
+      <p:sp>
+        <p:nvSpPr>
+          <p:cNvPr id="14" name="Oval 13"/>
+          <p:cNvSpPr/>
+          <p:nvPr/>
+        </p:nvSpPr>
+        <p:spPr>
+          <a:xfrm>
+            <a:off x="822959" y="2889503"/>
+            <a:ext cx="109728" cy="109728"/>
+          </a:xfrm>
+          <a:prstGeom prst="ellipse">
+            <a:avLst/>
+          </a:prstGeom>
+          <a:solidFill>
+            <a:srgbClr val="DC2626"/>
+          </a:solidFill>
+          <a:ln>
+            <a:noFill/>
+          </a:ln>
+          <a:effectLst/>
+        </p:spPr>
+        <p:style>
+          <a:lnRef idx="1">
+            <a:schemeClr val="accent1"/>
+          </a:lnRef>
+          <a:fillRef idx="3">
+            <a:schemeClr val="accent1"/>
+          </a:fillRef>
+          <a:effectRef idx="2">
+            <a:schemeClr val="accent1"/>
+          </a:effectRef>
+          <a:fontRef idx="minor">
+            <a:schemeClr val="lt1"/>
+          </a:fontRef>
+        </p:style>
+        <p:txBody>
+          <a:bodyPr rtlCol="0" anchor="ctr"/>
+          <a:lstStyle/>
+          <a:p>
+            <a:pPr algn="ctr"/>
+          </a:p>
+        </p:txBody>
+      </p:sp>
+      <p:sp>
+        <p:nvSpPr>
+          <p:cNvPr id="15" name="TextBox 14"/>
+          <p:cNvSpPr txBox="1"/>
+          <p:nvPr/>
+        </p:nvSpPr>
+        <p:spPr>
+          <a:xfrm>
+            <a:off x="1042416" y="2825496"/>
+            <a:ext cx="4636007" cy="365760"/>
           </a:xfrm>
           <a:prstGeom prst="rect">
             <a:avLst/>
@@ -13132,31 +13051,197 @@
           <a:p>
             <a:pPr algn="l">
               <a:lnSpc>
-                <a:spcPct val="132000"/>
-              </a:lnSpc>
-            </a:pPr>
-            <a:r>
-              <a:rPr sz="1250" b="0" i="0">
-                <a:solidFill>
-                  <a:srgbClr val="5B6472"/>
+                <a:spcPct val="110000"/>
+              </a:lnSpc>
+            </a:pPr>
+            <a:r>
+              <a:rPr sz="1050" b="0" i="0">
+                <a:solidFill>
+                  <a:srgbClr val="1F2937"/>
                 </a:solidFill>
                 <a:latin typeface="Calibri"/>
               </a:rPr>
-              <a:t>A.  検知エンジンに lookup 文法を追加し、攻撃を見抜くルールを 13 本自作。さらに結果を日本語で読み解く GUI、振る舞い分析、IoC の自動取り込みを足した。土台の検知力は活かしつつ「専門家でなくても使える形」にしたのが差分。</a:t>
-            </a:r>
-          </a:p>
-        </p:txBody>
-      </p:sp>
-      <p:sp>
-        <p:nvSpPr>
-          <p:cNvPr id="9" name="Rounded Rectangle 8"/>
+              <a:t>指令サーバ (C2) として知られる場所への通信 (URLhaus 照合)</a:t>
+            </a:r>
+          </a:p>
+        </p:txBody>
+      </p:sp>
+      <p:sp>
+        <p:nvSpPr>
+          <p:cNvPr id="16" name="Oval 15"/>
           <p:cNvSpPr/>
           <p:nvPr/>
         </p:nvSpPr>
         <p:spPr>
           <a:xfrm>
-            <a:off x="548640" y="3316224"/>
-            <a:ext cx="11091672" cy="1386840"/>
+            <a:off x="822959" y="3273551"/>
+            <a:ext cx="109728" cy="109728"/>
+          </a:xfrm>
+          <a:prstGeom prst="ellipse">
+            <a:avLst/>
+          </a:prstGeom>
+          <a:solidFill>
+            <a:srgbClr val="DC2626"/>
+          </a:solidFill>
+          <a:ln>
+            <a:noFill/>
+          </a:ln>
+          <a:effectLst/>
+        </p:spPr>
+        <p:style>
+          <a:lnRef idx="1">
+            <a:schemeClr val="accent1"/>
+          </a:lnRef>
+          <a:fillRef idx="3">
+            <a:schemeClr val="accent1"/>
+          </a:fillRef>
+          <a:effectRef idx="2">
+            <a:schemeClr val="accent1"/>
+          </a:effectRef>
+          <a:fontRef idx="minor">
+            <a:schemeClr val="lt1"/>
+          </a:fontRef>
+        </p:style>
+        <p:txBody>
+          <a:bodyPr rtlCol="0" anchor="ctr"/>
+          <a:lstStyle/>
+          <a:p>
+            <a:pPr algn="ctr"/>
+          </a:p>
+        </p:txBody>
+      </p:sp>
+      <p:sp>
+        <p:nvSpPr>
+          <p:cNvPr id="17" name="TextBox 16"/>
+          <p:cNvSpPr txBox="1"/>
+          <p:nvPr/>
+        </p:nvSpPr>
+        <p:spPr>
+          <a:xfrm>
+            <a:off x="1042416" y="3209544"/>
+            <a:ext cx="4636007" cy="365760"/>
+          </a:xfrm>
+          <a:prstGeom prst="rect">
+            <a:avLst/>
+          </a:prstGeom>
+          <a:noFill/>
+        </p:spPr>
+        <p:txBody>
+          <a:bodyPr wrap="square" lIns="0" rIns="0" tIns="0" bIns="0" anchor="t">
+            <a:spAutoFit/>
+          </a:bodyPr>
+          <a:lstStyle/>
+          <a:p>
+            <a:pPr algn="l">
+              <a:lnSpc>
+                <a:spcPct val="110000"/>
+              </a:lnSpc>
+            </a:pPr>
+            <a:r>
+              <a:rPr sz="1050" b="0" i="0">
+                <a:solidFill>
+                  <a:srgbClr val="1F2937"/>
+                </a:solidFill>
+                <a:latin typeface="Calibri"/>
+              </a:rPr>
+              <a:t>正規ツール certutil を悪用して外部からファイルを取得</a:t>
+            </a:r>
+          </a:p>
+        </p:txBody>
+      </p:sp>
+      <p:sp>
+        <p:nvSpPr>
+          <p:cNvPr id="18" name="Oval 17"/>
+          <p:cNvSpPr/>
+          <p:nvPr/>
+        </p:nvSpPr>
+        <p:spPr>
+          <a:xfrm>
+            <a:off x="822959" y="3657599"/>
+            <a:ext cx="109728" cy="109728"/>
+          </a:xfrm>
+          <a:prstGeom prst="ellipse">
+            <a:avLst/>
+          </a:prstGeom>
+          <a:solidFill>
+            <a:srgbClr val="DC2626"/>
+          </a:solidFill>
+          <a:ln>
+            <a:noFill/>
+          </a:ln>
+          <a:effectLst/>
+        </p:spPr>
+        <p:style>
+          <a:lnRef idx="1">
+            <a:schemeClr val="accent1"/>
+          </a:lnRef>
+          <a:fillRef idx="3">
+            <a:schemeClr val="accent1"/>
+          </a:fillRef>
+          <a:effectRef idx="2">
+            <a:schemeClr val="accent1"/>
+          </a:effectRef>
+          <a:fontRef idx="minor">
+            <a:schemeClr val="lt1"/>
+          </a:fontRef>
+        </p:style>
+        <p:txBody>
+          <a:bodyPr rtlCol="0" anchor="ctr"/>
+          <a:lstStyle/>
+          <a:p>
+            <a:pPr algn="ctr"/>
+          </a:p>
+        </p:txBody>
+      </p:sp>
+      <p:sp>
+        <p:nvSpPr>
+          <p:cNvPr id="19" name="TextBox 18"/>
+          <p:cNvSpPr txBox="1"/>
+          <p:nvPr/>
+        </p:nvSpPr>
+        <p:spPr>
+          <a:xfrm>
+            <a:off x="1042416" y="3593591"/>
+            <a:ext cx="4636007" cy="365760"/>
+          </a:xfrm>
+          <a:prstGeom prst="rect">
+            <a:avLst/>
+          </a:prstGeom>
+          <a:noFill/>
+        </p:spPr>
+        <p:txBody>
+          <a:bodyPr wrap="square" lIns="0" rIns="0" tIns="0" bIns="0" anchor="t">
+            <a:spAutoFit/>
+          </a:bodyPr>
+          <a:lstStyle/>
+          <a:p>
+            <a:pPr algn="l">
+              <a:lnSpc>
+                <a:spcPct val="110000"/>
+              </a:lnSpc>
+            </a:pPr>
+            <a:r>
+              <a:rPr sz="1050" b="0" i="0">
+                <a:solidFill>
+                  <a:srgbClr val="1F2937"/>
+                </a:solidFill>
+                <a:latin typeface="Calibri"/>
+              </a:rPr>
+              <a:t>悪用が知られた脆弱ドライバの読み込み (LOLDrivers 照合)</a:t>
+            </a:r>
+          </a:p>
+        </p:txBody>
+      </p:sp>
+      <p:sp>
+        <p:nvSpPr>
+          <p:cNvPr id="20" name="Rounded Rectangle 19"/>
+          <p:cNvSpPr/>
+          <p:nvPr/>
+        </p:nvSpPr>
+        <p:spPr>
+          <a:xfrm>
+            <a:off x="6291072" y="1783080"/>
+            <a:ext cx="5349240" cy="2240280"/>
           </a:xfrm>
           <a:prstGeom prst="roundRect">
             <a:avLst/>
@@ -13195,14 +13280,14 @@
       </p:sp>
       <p:sp>
         <p:nvSpPr>
-          <p:cNvPr id="10" name="Rectangle 9"/>
+          <p:cNvPr id="21" name="Rectangle 20"/>
           <p:cNvSpPr/>
           <p:nvPr/>
         </p:nvSpPr>
         <p:spPr>
           <a:xfrm>
-            <a:off x="548640" y="3316224"/>
-            <a:ext cx="73152" cy="1386840"/>
+            <a:off x="6291072" y="1783080"/>
+            <a:ext cx="73152" cy="2240280"/>
           </a:xfrm>
           <a:prstGeom prst="rect">
             <a:avLst/>
@@ -13239,14 +13324,14 @@
       </p:sp>
       <p:sp>
         <p:nvSpPr>
-          <p:cNvPr id="11" name="TextBox 10"/>
-          <p:cNvSpPr txBox="1"/>
-          <p:nvPr/>
-        </p:nvSpPr>
-        <p:spPr>
-          <a:xfrm>
-            <a:off x="868680" y="3462528"/>
-            <a:ext cx="10515600" cy="457200"/>
+          <p:cNvPr id="22" name="TextBox 21"/>
+          <p:cNvSpPr txBox="1"/>
+          <p:nvPr/>
+        </p:nvSpPr>
+        <p:spPr>
+          <a:xfrm>
+            <a:off x="6547104" y="1929384"/>
+            <a:ext cx="4937759" cy="411480"/>
           </a:xfrm>
           <a:prstGeom prst="rect">
             <a:avLst/>
@@ -13265,27 +13350,154 @@
               </a:lnSpc>
             </a:pPr>
             <a:r>
-              <a:rPr sz="1500" b="1" i="0">
+              <a:rPr sz="1400" b="1" i="0">
+                <a:solidFill>
+                  <a:srgbClr val="1D4ED8"/>
+                </a:solidFill>
+                <a:latin typeface="Cambria"/>
+              </a:rPr>
+              <a:t>② 盗む・住み着く</a:t>
+            </a:r>
+          </a:p>
+        </p:txBody>
+      </p:sp>
+      <p:sp>
+        <p:nvSpPr>
+          <p:cNvPr id="23" name="Oval 22"/>
+          <p:cNvSpPr/>
+          <p:nvPr/>
+        </p:nvSpPr>
+        <p:spPr>
+          <a:xfrm>
+            <a:off x="6565392" y="2505456"/>
+            <a:ext cx="109728" cy="109728"/>
+          </a:xfrm>
+          <a:prstGeom prst="ellipse">
+            <a:avLst/>
+          </a:prstGeom>
+          <a:solidFill>
+            <a:srgbClr val="DC2626"/>
+          </a:solidFill>
+          <a:ln>
+            <a:noFill/>
+          </a:ln>
+          <a:effectLst/>
+        </p:spPr>
+        <p:style>
+          <a:lnRef idx="1">
+            <a:schemeClr val="accent1"/>
+          </a:lnRef>
+          <a:fillRef idx="3">
+            <a:schemeClr val="accent1"/>
+          </a:fillRef>
+          <a:effectRef idx="2">
+            <a:schemeClr val="accent1"/>
+          </a:effectRef>
+          <a:fontRef idx="minor">
+            <a:schemeClr val="lt1"/>
+          </a:fontRef>
+        </p:style>
+        <p:txBody>
+          <a:bodyPr rtlCol="0" anchor="ctr"/>
+          <a:lstStyle/>
+          <a:p>
+            <a:pPr algn="ctr"/>
+          </a:p>
+        </p:txBody>
+      </p:sp>
+      <p:sp>
+        <p:nvSpPr>
+          <p:cNvPr id="24" name="TextBox 23"/>
+          <p:cNvSpPr txBox="1"/>
+          <p:nvPr/>
+        </p:nvSpPr>
+        <p:spPr>
+          <a:xfrm>
+            <a:off x="6784848" y="2441448"/>
+            <a:ext cx="4636007" cy="365760"/>
+          </a:xfrm>
+          <a:prstGeom prst="rect">
+            <a:avLst/>
+          </a:prstGeom>
+          <a:noFill/>
+        </p:spPr>
+        <p:txBody>
+          <a:bodyPr wrap="square" lIns="0" rIns="0" tIns="0" bIns="0" anchor="t">
+            <a:spAutoFit/>
+          </a:bodyPr>
+          <a:lstStyle/>
+          <a:p>
+            <a:pPr algn="l">
+              <a:lnSpc>
+                <a:spcPct val="110000"/>
+              </a:lnSpc>
+            </a:pPr>
+            <a:r>
+              <a:rPr sz="1050" b="0" i="0">
                 <a:solidFill>
                   <a:srgbClr val="1F2937"/>
                 </a:solidFill>
-                <a:latin typeface="Cambria"/>
-              </a:rPr>
-              <a:t>Q.  SIEM や商用 EDR と何が違うの?</a:t>
-            </a:r>
-          </a:p>
-        </p:txBody>
-      </p:sp>
-      <p:sp>
-        <p:nvSpPr>
-          <p:cNvPr id="12" name="TextBox 11"/>
-          <p:cNvSpPr txBox="1"/>
-          <p:nvPr/>
-        </p:nvSpPr>
-        <p:spPr>
-          <a:xfrm>
-            <a:off x="868680" y="3919728"/>
-            <a:ext cx="10469880" cy="673608"/>
+                <a:latin typeface="Calibri"/>
+              </a:rPr>
+              <a:t>ログイン情報の抜き取り (LSASS のメモリダンプ)</a:t>
+            </a:r>
+          </a:p>
+        </p:txBody>
+      </p:sp>
+      <p:sp>
+        <p:nvSpPr>
+          <p:cNvPr id="25" name="Oval 24"/>
+          <p:cNvSpPr/>
+          <p:nvPr/>
+        </p:nvSpPr>
+        <p:spPr>
+          <a:xfrm>
+            <a:off x="6565392" y="2889503"/>
+            <a:ext cx="109728" cy="109728"/>
+          </a:xfrm>
+          <a:prstGeom prst="ellipse">
+            <a:avLst/>
+          </a:prstGeom>
+          <a:solidFill>
+            <a:srgbClr val="EA580C"/>
+          </a:solidFill>
+          <a:ln>
+            <a:noFill/>
+          </a:ln>
+          <a:effectLst/>
+        </p:spPr>
+        <p:style>
+          <a:lnRef idx="1">
+            <a:schemeClr val="accent1"/>
+          </a:lnRef>
+          <a:fillRef idx="3">
+            <a:schemeClr val="accent1"/>
+          </a:fillRef>
+          <a:effectRef idx="2">
+            <a:schemeClr val="accent1"/>
+          </a:effectRef>
+          <a:fontRef idx="minor">
+            <a:schemeClr val="lt1"/>
+          </a:fontRef>
+        </p:style>
+        <p:txBody>
+          <a:bodyPr rtlCol="0" anchor="ctr"/>
+          <a:lstStyle/>
+          <a:p>
+            <a:pPr algn="ctr"/>
+          </a:p>
+        </p:txBody>
+      </p:sp>
+      <p:sp>
+        <p:nvSpPr>
+          <p:cNvPr id="26" name="TextBox 25"/>
+          <p:cNvSpPr txBox="1"/>
+          <p:nvPr/>
+        </p:nvSpPr>
+        <p:spPr>
+          <a:xfrm>
+            <a:off x="6784848" y="2825496"/>
+            <a:ext cx="4636007" cy="365760"/>
           </a:xfrm>
           <a:prstGeom prst="rect">
             <a:avLst/>
@@ -13300,31 +13512,114 @@
           <a:p>
             <a:pPr algn="l">
               <a:lnSpc>
-                <a:spcPct val="132000"/>
-              </a:lnSpc>
-            </a:pPr>
-            <a:r>
-              <a:rPr sz="1250" b="0" i="0">
-                <a:solidFill>
-                  <a:srgbClr val="5B6472"/>
+                <a:spcPct val="110000"/>
+              </a:lnSpc>
+            </a:pPr>
+            <a:r>
+              <a:rPr sz="1050" b="0" i="0">
+                <a:solidFill>
+                  <a:srgbClr val="1F2937"/>
                 </a:solidFill>
                 <a:latin typeface="Calibri"/>
               </a:rPr>
-              <a:t>A.  導入ゼロ・オフライン・無料で、PC 1 台に展開すればすぐ動く。大規模な常時監視ではなく「インシデント時に手元で素早く調べる」用途に振り切っている。</a:t>
-            </a:r>
-          </a:p>
-        </p:txBody>
-      </p:sp>
-      <p:sp>
-        <p:nvSpPr>
-          <p:cNvPr id="13" name="Rounded Rectangle 12"/>
+              <a:t>書き換え可能な場所のプログラムをサービス登録して常駐</a:t>
+            </a:r>
+          </a:p>
+        </p:txBody>
+      </p:sp>
+      <p:sp>
+        <p:nvSpPr>
+          <p:cNvPr id="27" name="Oval 26"/>
           <p:cNvSpPr/>
           <p:nvPr/>
         </p:nvSpPr>
         <p:spPr>
           <a:xfrm>
-            <a:off x="548640" y="4849368"/>
-            <a:ext cx="11091672" cy="1386840"/>
+            <a:off x="6565392" y="3273551"/>
+            <a:ext cx="109728" cy="109728"/>
+          </a:xfrm>
+          <a:prstGeom prst="ellipse">
+            <a:avLst/>
+          </a:prstGeom>
+          <a:solidFill>
+            <a:srgbClr val="EA580C"/>
+          </a:solidFill>
+          <a:ln>
+            <a:noFill/>
+          </a:ln>
+          <a:effectLst/>
+        </p:spPr>
+        <p:style>
+          <a:lnRef idx="1">
+            <a:schemeClr val="accent1"/>
+          </a:lnRef>
+          <a:fillRef idx="3">
+            <a:schemeClr val="accent1"/>
+          </a:fillRef>
+          <a:effectRef idx="2">
+            <a:schemeClr val="accent1"/>
+          </a:effectRef>
+          <a:fontRef idx="minor">
+            <a:schemeClr val="lt1"/>
+          </a:fontRef>
+        </p:style>
+        <p:txBody>
+          <a:bodyPr rtlCol="0" anchor="ctr"/>
+          <a:lstStyle/>
+          <a:p>
+            <a:pPr algn="ctr"/>
+          </a:p>
+        </p:txBody>
+      </p:sp>
+      <p:sp>
+        <p:nvSpPr>
+          <p:cNvPr id="28" name="TextBox 27"/>
+          <p:cNvSpPr txBox="1"/>
+          <p:nvPr/>
+        </p:nvSpPr>
+        <p:spPr>
+          <a:xfrm>
+            <a:off x="6784848" y="3209544"/>
+            <a:ext cx="4636007" cy="365760"/>
+          </a:xfrm>
+          <a:prstGeom prst="rect">
+            <a:avLst/>
+          </a:prstGeom>
+          <a:noFill/>
+        </p:spPr>
+        <p:txBody>
+          <a:bodyPr wrap="square" lIns="0" rIns="0" tIns="0" bIns="0" anchor="t">
+            <a:spAutoFit/>
+          </a:bodyPr>
+          <a:lstStyle/>
+          <a:p>
+            <a:pPr algn="l">
+              <a:lnSpc>
+                <a:spcPct val="110000"/>
+              </a:lnSpc>
+            </a:pPr>
+            <a:r>
+              <a:rPr sz="1050" b="0" i="0">
+                <a:solidFill>
+                  <a:srgbClr val="1F2937"/>
+                </a:solidFill>
+                <a:latin typeface="Calibri"/>
+              </a:rPr>
+              <a:t>WMI で「出来事をきっかけに自動起動」を仕込む</a:t>
+            </a:r>
+          </a:p>
+        </p:txBody>
+      </p:sp>
+      <p:sp>
+        <p:nvSpPr>
+          <p:cNvPr id="29" name="Rounded Rectangle 28"/>
+          <p:cNvSpPr/>
+          <p:nvPr/>
+        </p:nvSpPr>
+        <p:spPr>
+          <a:xfrm>
+            <a:off x="548640" y="4114800"/>
+            <a:ext cx="5349240" cy="2240280"/>
           </a:xfrm>
           <a:prstGeom prst="roundRect">
             <a:avLst/>
@@ -13363,14 +13658,14 @@
       </p:sp>
       <p:sp>
         <p:nvSpPr>
-          <p:cNvPr id="14" name="Rectangle 13"/>
+          <p:cNvPr id="30" name="Rectangle 29"/>
           <p:cNvSpPr/>
           <p:nvPr/>
         </p:nvSpPr>
         <p:spPr>
           <a:xfrm>
-            <a:off x="548640" y="4849368"/>
-            <a:ext cx="73152" cy="1386840"/>
+            <a:off x="548640" y="4114800"/>
+            <a:ext cx="73152" cy="2240280"/>
           </a:xfrm>
           <a:prstGeom prst="rect">
             <a:avLst/>
@@ -13407,14 +13702,14 @@
       </p:sp>
       <p:sp>
         <p:nvSpPr>
-          <p:cNvPr id="15" name="TextBox 14"/>
-          <p:cNvSpPr txBox="1"/>
-          <p:nvPr/>
-        </p:nvSpPr>
-        <p:spPr>
-          <a:xfrm>
-            <a:off x="868680" y="4995672"/>
-            <a:ext cx="10515600" cy="457200"/>
+          <p:cNvPr id="31" name="TextBox 30"/>
+          <p:cNvSpPr txBox="1"/>
+          <p:nvPr/>
+        </p:nvSpPr>
+        <p:spPr>
+          <a:xfrm>
+            <a:off x="804672" y="4261104"/>
+            <a:ext cx="4937759" cy="411480"/>
           </a:xfrm>
           <a:prstGeom prst="rect">
             <a:avLst/>
@@ -13433,27 +13728,449 @@
               </a:lnSpc>
             </a:pPr>
             <a:r>
-              <a:rPr sz="1500" b="1" i="0">
+              <a:rPr sz="1400" b="1" i="0">
+                <a:solidFill>
+                  <a:srgbClr val="1D4ED8"/>
+                </a:solidFill>
+                <a:latin typeface="Cambria"/>
+              </a:rPr>
+              <a:t>③ 監視を無力化する</a:t>
+            </a:r>
+          </a:p>
+        </p:txBody>
+      </p:sp>
+      <p:sp>
+        <p:nvSpPr>
+          <p:cNvPr id="32" name="Oval 31"/>
+          <p:cNvSpPr/>
+          <p:nvPr/>
+        </p:nvSpPr>
+        <p:spPr>
+          <a:xfrm>
+            <a:off x="822959" y="4837176"/>
+            <a:ext cx="109728" cy="109728"/>
+          </a:xfrm>
+          <a:prstGeom prst="ellipse">
+            <a:avLst/>
+          </a:prstGeom>
+          <a:solidFill>
+            <a:srgbClr val="EA580C"/>
+          </a:solidFill>
+          <a:ln>
+            <a:noFill/>
+          </a:ln>
+          <a:effectLst/>
+        </p:spPr>
+        <p:style>
+          <a:lnRef idx="1">
+            <a:schemeClr val="accent1"/>
+          </a:lnRef>
+          <a:fillRef idx="3">
+            <a:schemeClr val="accent1"/>
+          </a:fillRef>
+          <a:effectRef idx="2">
+            <a:schemeClr val="accent1"/>
+          </a:effectRef>
+          <a:fontRef idx="minor">
+            <a:schemeClr val="lt1"/>
+          </a:fontRef>
+        </p:style>
+        <p:txBody>
+          <a:bodyPr rtlCol="0" anchor="ctr"/>
+          <a:lstStyle/>
+          <a:p>
+            <a:pPr algn="ctr"/>
+          </a:p>
+        </p:txBody>
+      </p:sp>
+      <p:sp>
+        <p:nvSpPr>
+          <p:cNvPr id="33" name="TextBox 32"/>
+          <p:cNvSpPr txBox="1"/>
+          <p:nvPr/>
+        </p:nvSpPr>
+        <p:spPr>
+          <a:xfrm>
+            <a:off x="1042416" y="4773168"/>
+            <a:ext cx="4636007" cy="365760"/>
+          </a:xfrm>
+          <a:prstGeom prst="rect">
+            <a:avLst/>
+          </a:prstGeom>
+          <a:noFill/>
+        </p:spPr>
+        <p:txBody>
+          <a:bodyPr wrap="square" lIns="0" rIns="0" tIns="0" bIns="0" anchor="t">
+            <a:spAutoFit/>
+          </a:bodyPr>
+          <a:lstStyle/>
+          <a:p>
+            <a:pPr algn="l">
+              <a:lnSpc>
+                <a:spcPct val="110000"/>
+              </a:lnSpc>
+            </a:pPr>
+            <a:r>
+              <a:rPr sz="1050" b="0" i="0">
                 <a:solidFill>
                   <a:srgbClr val="1F2937"/>
                 </a:solidFill>
+                <a:latin typeface="Calibri"/>
+              </a:rPr>
+              <a:t>PowerShell のウイルス検査 (AMSI) を無力化</a:t>
+            </a:r>
+          </a:p>
+        </p:txBody>
+      </p:sp>
+      <p:sp>
+        <p:nvSpPr>
+          <p:cNvPr id="34" name="Oval 33"/>
+          <p:cNvSpPr/>
+          <p:nvPr/>
+        </p:nvSpPr>
+        <p:spPr>
+          <a:xfrm>
+            <a:off x="822959" y="5221224"/>
+            <a:ext cx="109728" cy="109728"/>
+          </a:xfrm>
+          <a:prstGeom prst="ellipse">
+            <a:avLst/>
+          </a:prstGeom>
+          <a:solidFill>
+            <a:srgbClr val="DC2626"/>
+          </a:solidFill>
+          <a:ln>
+            <a:noFill/>
+          </a:ln>
+          <a:effectLst/>
+        </p:spPr>
+        <p:style>
+          <a:lnRef idx="1">
+            <a:schemeClr val="accent1"/>
+          </a:lnRef>
+          <a:fillRef idx="3">
+            <a:schemeClr val="accent1"/>
+          </a:fillRef>
+          <a:effectRef idx="2">
+            <a:schemeClr val="accent1"/>
+          </a:effectRef>
+          <a:fontRef idx="minor">
+            <a:schemeClr val="lt1"/>
+          </a:fontRef>
+        </p:style>
+        <p:txBody>
+          <a:bodyPr rtlCol="0" anchor="ctr"/>
+          <a:lstStyle/>
+          <a:p>
+            <a:pPr algn="ctr"/>
+          </a:p>
+        </p:txBody>
+      </p:sp>
+      <p:sp>
+        <p:nvSpPr>
+          <p:cNvPr id="35" name="TextBox 34"/>
+          <p:cNvSpPr txBox="1"/>
+          <p:nvPr/>
+        </p:nvSpPr>
+        <p:spPr>
+          <a:xfrm>
+            <a:off x="1042416" y="5157216"/>
+            <a:ext cx="4636007" cy="365760"/>
+          </a:xfrm>
+          <a:prstGeom prst="rect">
+            <a:avLst/>
+          </a:prstGeom>
+          <a:noFill/>
+        </p:spPr>
+        <p:txBody>
+          <a:bodyPr wrap="square" lIns="0" rIns="0" tIns="0" bIns="0" anchor="t">
+            <a:spAutoFit/>
+          </a:bodyPr>
+          <a:lstStyle/>
+          <a:p>
+            <a:pPr algn="l">
+              <a:lnSpc>
+                <a:spcPct val="110000"/>
+              </a:lnSpc>
+            </a:pPr>
+            <a:r>
+              <a:rPr sz="1050" b="0" i="0">
+                <a:solidFill>
+                  <a:srgbClr val="1F2937"/>
+                </a:solidFill>
+                <a:latin typeface="Calibri"/>
+              </a:rPr>
+              <a:t>ログ記録サービスそのものを停止・無効化</a:t>
+            </a:r>
+          </a:p>
+        </p:txBody>
+      </p:sp>
+      <p:sp>
+        <p:nvSpPr>
+          <p:cNvPr id="36" name="Oval 35"/>
+          <p:cNvSpPr/>
+          <p:nvPr/>
+        </p:nvSpPr>
+        <p:spPr>
+          <a:xfrm>
+            <a:off x="822959" y="5605272"/>
+            <a:ext cx="109728" cy="109728"/>
+          </a:xfrm>
+          <a:prstGeom prst="ellipse">
+            <a:avLst/>
+          </a:prstGeom>
+          <a:solidFill>
+            <a:srgbClr val="EA580C"/>
+          </a:solidFill>
+          <a:ln>
+            <a:noFill/>
+          </a:ln>
+          <a:effectLst/>
+        </p:spPr>
+        <p:style>
+          <a:lnRef idx="1">
+            <a:schemeClr val="accent1"/>
+          </a:lnRef>
+          <a:fillRef idx="3">
+            <a:schemeClr val="accent1"/>
+          </a:fillRef>
+          <a:effectRef idx="2">
+            <a:schemeClr val="accent1"/>
+          </a:effectRef>
+          <a:fontRef idx="minor">
+            <a:schemeClr val="lt1"/>
+          </a:fontRef>
+        </p:style>
+        <p:txBody>
+          <a:bodyPr rtlCol="0" anchor="ctr"/>
+          <a:lstStyle/>
+          <a:p>
+            <a:pPr algn="ctr"/>
+          </a:p>
+        </p:txBody>
+      </p:sp>
+      <p:sp>
+        <p:nvSpPr>
+          <p:cNvPr id="37" name="TextBox 36"/>
+          <p:cNvSpPr txBox="1"/>
+          <p:nvPr/>
+        </p:nvSpPr>
+        <p:spPr>
+          <a:xfrm>
+            <a:off x="1042416" y="5541264"/>
+            <a:ext cx="4636007" cy="365760"/>
+          </a:xfrm>
+          <a:prstGeom prst="rect">
+            <a:avLst/>
+          </a:prstGeom>
+          <a:noFill/>
+        </p:spPr>
+        <p:txBody>
+          <a:bodyPr wrap="square" lIns="0" rIns="0" tIns="0" bIns="0" anchor="t">
+            <a:spAutoFit/>
+          </a:bodyPr>
+          <a:lstStyle/>
+          <a:p>
+            <a:pPr algn="l">
+              <a:lnSpc>
+                <a:spcPct val="110000"/>
+              </a:lnSpc>
+            </a:pPr>
+            <a:r>
+              <a:rPr sz="1050" b="0" i="0">
+                <a:solidFill>
+                  <a:srgbClr val="1F2937"/>
+                </a:solidFill>
+                <a:latin typeface="Calibri"/>
+              </a:rPr>
+              <a:t>監査設定から記録項目を外して “見えなく” する</a:t>
+            </a:r>
+          </a:p>
+        </p:txBody>
+      </p:sp>
+      <p:sp>
+        <p:nvSpPr>
+          <p:cNvPr id="38" name="Rounded Rectangle 37"/>
+          <p:cNvSpPr/>
+          <p:nvPr/>
+        </p:nvSpPr>
+        <p:spPr>
+          <a:xfrm>
+            <a:off x="6291072" y="4114800"/>
+            <a:ext cx="5349240" cy="2240280"/>
+          </a:xfrm>
+          <a:prstGeom prst="roundRect">
+            <a:avLst/>
+          </a:prstGeom>
+          <a:solidFill>
+            <a:srgbClr val="FFFFFF"/>
+          </a:solidFill>
+          <a:ln w="9525">
+            <a:solidFill>
+              <a:srgbClr val="DDE3EE"/>
+            </a:solidFill>
+          </a:ln>
+          <a:effectLst/>
+        </p:spPr>
+        <p:style>
+          <a:lnRef idx="1">
+            <a:schemeClr val="accent1"/>
+          </a:lnRef>
+          <a:fillRef idx="3">
+            <a:schemeClr val="accent1"/>
+          </a:fillRef>
+          <a:effectRef idx="2">
+            <a:schemeClr val="accent1"/>
+          </a:effectRef>
+          <a:fontRef idx="minor">
+            <a:schemeClr val="lt1"/>
+          </a:fontRef>
+        </p:style>
+        <p:txBody>
+          <a:bodyPr rtlCol="0" anchor="ctr"/>
+          <a:lstStyle/>
+          <a:p>
+            <a:pPr algn="ctr"/>
+          </a:p>
+        </p:txBody>
+      </p:sp>
+      <p:sp>
+        <p:nvSpPr>
+          <p:cNvPr id="39" name="Rectangle 38"/>
+          <p:cNvSpPr/>
+          <p:nvPr/>
+        </p:nvSpPr>
+        <p:spPr>
+          <a:xfrm>
+            <a:off x="6291072" y="4114800"/>
+            <a:ext cx="73152" cy="2240280"/>
+          </a:xfrm>
+          <a:prstGeom prst="rect">
+            <a:avLst/>
+          </a:prstGeom>
+          <a:solidFill>
+            <a:srgbClr val="2563EB"/>
+          </a:solidFill>
+          <a:ln>
+            <a:noFill/>
+          </a:ln>
+          <a:effectLst/>
+        </p:spPr>
+        <p:style>
+          <a:lnRef idx="1">
+            <a:schemeClr val="accent1"/>
+          </a:lnRef>
+          <a:fillRef idx="3">
+            <a:schemeClr val="accent1"/>
+          </a:fillRef>
+          <a:effectRef idx="2">
+            <a:schemeClr val="accent1"/>
+          </a:effectRef>
+          <a:fontRef idx="minor">
+            <a:schemeClr val="lt1"/>
+          </a:fontRef>
+        </p:style>
+        <p:txBody>
+          <a:bodyPr rtlCol="0" anchor="ctr"/>
+          <a:lstStyle/>
+          <a:p>
+            <a:pPr algn="ctr"/>
+          </a:p>
+        </p:txBody>
+      </p:sp>
+      <p:sp>
+        <p:nvSpPr>
+          <p:cNvPr id="40" name="TextBox 39"/>
+          <p:cNvSpPr txBox="1"/>
+          <p:nvPr/>
+        </p:nvSpPr>
+        <p:spPr>
+          <a:xfrm>
+            <a:off x="6547104" y="4261104"/>
+            <a:ext cx="4937759" cy="411480"/>
+          </a:xfrm>
+          <a:prstGeom prst="rect">
+            <a:avLst/>
+          </a:prstGeom>
+          <a:noFill/>
+        </p:spPr>
+        <p:txBody>
+          <a:bodyPr wrap="square" lIns="0" rIns="0" tIns="0" bIns="0" anchor="t">
+            <a:spAutoFit/>
+          </a:bodyPr>
+          <a:lstStyle/>
+          <a:p>
+            <a:pPr algn="l">
+              <a:lnSpc>
+                <a:spcPct val="130000"/>
+              </a:lnSpc>
+            </a:pPr>
+            <a:r>
+              <a:rPr sz="1400" b="1" i="0">
+                <a:solidFill>
+                  <a:srgbClr val="1D4ED8"/>
+                </a:solidFill>
                 <a:latin typeface="Cambria"/>
               </a:rPr>
-              <a:t>Q.  Sigma ルールはそのまま使える? 独自拡張で互換は壊れない?</a:t>
-            </a:r>
-          </a:p>
-        </p:txBody>
-      </p:sp>
-      <p:sp>
-        <p:nvSpPr>
-          <p:cNvPr id="16" name="TextBox 15"/>
-          <p:cNvSpPr txBox="1"/>
-          <p:nvPr/>
-        </p:nvSpPr>
-        <p:spPr>
-          <a:xfrm>
-            <a:off x="868680" y="5452872"/>
-            <a:ext cx="10469880" cy="673608"/>
+              <a:t>④ 証拠を消す</a:t>
+            </a:r>
+          </a:p>
+        </p:txBody>
+      </p:sp>
+      <p:sp>
+        <p:nvSpPr>
+          <p:cNvPr id="41" name="Oval 40"/>
+          <p:cNvSpPr/>
+          <p:nvPr/>
+        </p:nvSpPr>
+        <p:spPr>
+          <a:xfrm>
+            <a:off x="6565392" y="4837176"/>
+            <a:ext cx="109728" cy="109728"/>
+          </a:xfrm>
+          <a:prstGeom prst="ellipse">
+            <a:avLst/>
+          </a:prstGeom>
+          <a:solidFill>
+            <a:srgbClr val="EA580C"/>
+          </a:solidFill>
+          <a:ln>
+            <a:noFill/>
+          </a:ln>
+          <a:effectLst/>
+        </p:spPr>
+        <p:style>
+          <a:lnRef idx="1">
+            <a:schemeClr val="accent1"/>
+          </a:lnRef>
+          <a:fillRef idx="3">
+            <a:schemeClr val="accent1"/>
+          </a:fillRef>
+          <a:effectRef idx="2">
+            <a:schemeClr val="accent1"/>
+          </a:effectRef>
+          <a:fontRef idx="minor">
+            <a:schemeClr val="lt1"/>
+          </a:fontRef>
+        </p:style>
+        <p:txBody>
+          <a:bodyPr rtlCol="0" anchor="ctr"/>
+          <a:lstStyle/>
+          <a:p>
+            <a:pPr algn="ctr"/>
+          </a:p>
+        </p:txBody>
+      </p:sp>
+      <p:sp>
+        <p:nvSpPr>
+          <p:cNvPr id="42" name="TextBox 41"/>
+          <p:cNvSpPr txBox="1"/>
+          <p:nvPr/>
+        </p:nvSpPr>
+        <p:spPr>
+          <a:xfrm>
+            <a:off x="6784848" y="4773168"/>
+            <a:ext cx="4636007" cy="365760"/>
           </a:xfrm>
           <a:prstGeom prst="rect">
             <a:avLst/>
@@ -13468,24 +14185,190 @@
           <a:p>
             <a:pPr algn="l">
               <a:lnSpc>
-                <a:spcPct val="132000"/>
-              </a:lnSpc>
-            </a:pPr>
-            <a:r>
-              <a:rPr sz="1250" b="0" i="0">
-                <a:solidFill>
-                  <a:srgbClr val="5B6472"/>
+                <a:spcPct val="110000"/>
+              </a:lnSpc>
+            </a:pPr>
+            <a:r>
+              <a:rPr sz="1050" b="0" i="0">
+                <a:solidFill>
+                  <a:srgbClr val="1F2937"/>
                 </a:solidFill>
                 <a:latin typeface="Calibri"/>
               </a:rPr>
-              <a:t>A.  世界共通の Sigma 約 5,000 本に加え、自作 13 本が使える。lookup は独自拡張だが、上流の Hayabusa は知らない記法を無視するだけなので互換は壊れない。</a:t>
-            </a:r>
-          </a:p>
-        </p:txBody>
-      </p:sp>
-      <p:sp>
-        <p:nvSpPr>
-          <p:cNvPr id="17" name="TextBox 16"/>
+              <a:t>wevtutil などでイベントログをまるごと消去</a:t>
+            </a:r>
+          </a:p>
+        </p:txBody>
+      </p:sp>
+      <p:sp>
+        <p:nvSpPr>
+          <p:cNvPr id="43" name="Oval 42"/>
+          <p:cNvSpPr/>
+          <p:nvPr/>
+        </p:nvSpPr>
+        <p:spPr>
+          <a:xfrm>
+            <a:off x="6565392" y="5221224"/>
+            <a:ext cx="109728" cy="109728"/>
+          </a:xfrm>
+          <a:prstGeom prst="ellipse">
+            <a:avLst/>
+          </a:prstGeom>
+          <a:solidFill>
+            <a:srgbClr val="DC2626"/>
+          </a:solidFill>
+          <a:ln>
+            <a:noFill/>
+          </a:ln>
+          <a:effectLst/>
+        </p:spPr>
+        <p:style>
+          <a:lnRef idx="1">
+            <a:schemeClr val="accent1"/>
+          </a:lnRef>
+          <a:fillRef idx="3">
+            <a:schemeClr val="accent1"/>
+          </a:fillRef>
+          <a:effectRef idx="2">
+            <a:schemeClr val="accent1"/>
+          </a:effectRef>
+          <a:fontRef idx="minor">
+            <a:schemeClr val="lt1"/>
+          </a:fontRef>
+        </p:style>
+        <p:txBody>
+          <a:bodyPr rtlCol="0" anchor="ctr"/>
+          <a:lstStyle/>
+          <a:p>
+            <a:pPr algn="ctr"/>
+          </a:p>
+        </p:txBody>
+      </p:sp>
+      <p:sp>
+        <p:nvSpPr>
+          <p:cNvPr id="44" name="TextBox 43"/>
+          <p:cNvSpPr txBox="1"/>
+          <p:nvPr/>
+        </p:nvSpPr>
+        <p:spPr>
+          <a:xfrm>
+            <a:off x="6784848" y="5157216"/>
+            <a:ext cx="4636007" cy="365760"/>
+          </a:xfrm>
+          <a:prstGeom prst="rect">
+            <a:avLst/>
+          </a:prstGeom>
+          <a:noFill/>
+        </p:spPr>
+        <p:txBody>
+          <a:bodyPr wrap="square" lIns="0" rIns="0" tIns="0" bIns="0" anchor="t">
+            <a:spAutoFit/>
+          </a:bodyPr>
+          <a:lstStyle/>
+          <a:p>
+            <a:pPr algn="l">
+              <a:lnSpc>
+                <a:spcPct val="110000"/>
+              </a:lnSpc>
+            </a:pPr>
+            <a:r>
+              <a:rPr sz="1050" b="0" i="0">
+                <a:solidFill>
+                  <a:srgbClr val="1F2937"/>
+                </a:solidFill>
+                <a:latin typeface="Calibri"/>
+              </a:rPr>
+              <a:t>監査を変えた直後にログ消去、という “合わせ技”</a:t>
+            </a:r>
+          </a:p>
+        </p:txBody>
+      </p:sp>
+      <p:sp>
+        <p:nvSpPr>
+          <p:cNvPr id="45" name="Oval 44"/>
+          <p:cNvSpPr/>
+          <p:nvPr/>
+        </p:nvSpPr>
+        <p:spPr>
+          <a:xfrm>
+            <a:off x="6565392" y="5605272"/>
+            <a:ext cx="109728" cy="109728"/>
+          </a:xfrm>
+          <a:prstGeom prst="ellipse">
+            <a:avLst/>
+          </a:prstGeom>
+          <a:solidFill>
+            <a:srgbClr val="DC2626"/>
+          </a:solidFill>
+          <a:ln>
+            <a:noFill/>
+          </a:ln>
+          <a:effectLst/>
+        </p:spPr>
+        <p:style>
+          <a:lnRef idx="1">
+            <a:schemeClr val="accent1"/>
+          </a:lnRef>
+          <a:fillRef idx="3">
+            <a:schemeClr val="accent1"/>
+          </a:fillRef>
+          <a:effectRef idx="2">
+            <a:schemeClr val="accent1"/>
+          </a:effectRef>
+          <a:fontRef idx="minor">
+            <a:schemeClr val="lt1"/>
+          </a:fontRef>
+        </p:style>
+        <p:txBody>
+          <a:bodyPr rtlCol="0" anchor="ctr"/>
+          <a:lstStyle/>
+          <a:p>
+            <a:pPr algn="ctr"/>
+          </a:p>
+        </p:txBody>
+      </p:sp>
+      <p:sp>
+        <p:nvSpPr>
+          <p:cNvPr id="46" name="TextBox 45"/>
+          <p:cNvSpPr txBox="1"/>
+          <p:nvPr/>
+        </p:nvSpPr>
+        <p:spPr>
+          <a:xfrm>
+            <a:off x="6784848" y="5541264"/>
+            <a:ext cx="4636007" cy="365760"/>
+          </a:xfrm>
+          <a:prstGeom prst="rect">
+            <a:avLst/>
+          </a:prstGeom>
+          <a:noFill/>
+        </p:spPr>
+        <p:txBody>
+          <a:bodyPr wrap="square" lIns="0" rIns="0" tIns="0" bIns="0" anchor="t">
+            <a:spAutoFit/>
+          </a:bodyPr>
+          <a:lstStyle/>
+          <a:p>
+            <a:pPr algn="l">
+              <a:lnSpc>
+                <a:spcPct val="110000"/>
+              </a:lnSpc>
+            </a:pPr>
+            <a:r>
+              <a:rPr sz="1050" b="0" i="0">
+                <a:solidFill>
+                  <a:srgbClr val="1F2937"/>
+                </a:solidFill>
+                <a:latin typeface="Calibri"/>
+              </a:rPr>
+              <a:t>復元用スナップショットの削除 (ランサムの前兆)</a:t>
+            </a:r>
+          </a:p>
+        </p:txBody>
+      </p:sp>
+      <p:sp>
+        <p:nvSpPr>
+          <p:cNvPr id="47" name="TextBox 46"/>
           <p:cNvSpPr txBox="1"/>
           <p:nvPr/>
         </p:nvSpPr>
@@ -13657,7 +14540,7 @@
                 </a:solidFill>
                 <a:latin typeface="Cambria"/>
               </a:rPr>
-              <a:t>よくある質問 ②  精度・性能・運用</a:t>
+              <a:t>よくある質問 ①  立ち位置・差分</a:t>
             </a:r>
           </a:p>
         </p:txBody>
@@ -13786,7 +14669,7 @@
                 </a:solidFill>
                 <a:latin typeface="Cambria"/>
               </a:rPr>
-              <a:t>Q.  誤検知は多くならないの?</a:t>
+              <a:t>Q.  既存の Hayabusa と何が違うの?</a:t>
             </a:r>
           </a:p>
         </p:txBody>
@@ -13825,7 +14708,7 @@
                 </a:solidFill>
                 <a:latin typeface="Calibri"/>
               </a:rPr>
-              <a:t>A.  単一の特徴では鳴らさず複数条件の AND で判定。各ルールに誤検知例を明記し、ゴールデンイメージの許可リストや、GUI 上での TP/FP 判定・抑制で運用しながら絞り込める。</a:t>
+              <a:t>A.  検知エンジンに lookup 文法を追加し、攻撃を見抜くルールを 13 本自作。さらに結果を日本語で読み解く GUI、振る舞い分析、IoC の自動取り込みを足した。土台の検知力は活かしつつ「専門家でなくても使える形」にしたのが差分。</a:t>
             </a:r>
           </a:p>
         </p:txBody>
@@ -13954,7 +14837,7 @@
                 </a:solidFill>
                 <a:latin typeface="Cambria"/>
               </a:rPr>
-              <a:t>Q.  速度や扱える規模は?</a:t>
+              <a:t>Q.  SIEM や商用 EDR と何が違うの?</a:t>
             </a:r>
           </a:p>
         </p:txBody>
@@ -13993,7 +14876,7 @@
                 </a:solidFill>
                 <a:latin typeface="Calibri"/>
               </a:rPr>
-              <a:t>A.  Rust 製で数万件を数十秒。lookup は起動時に 1 回だけリストを読み込み O(1) で照合するため、リストが増えても速度はほぼ一定（本デモでも 1.2 万件超を処理）。</a:t>
+              <a:t>A.  導入ゼロ・オフライン・無料で、PC 1 台に展開すればすぐ動く。大規模な常時監視ではなく「インシデント時に手元で素早く調べる」用途に振り切っている。</a:t>
             </a:r>
           </a:p>
         </p:txBody>
@@ -14122,7 +15005,7 @@
                 </a:solidFill>
                 <a:latin typeface="Cambria"/>
               </a:rPr>
-              <a:t>Q.  IoC リストはどうやって最新に保つ?</a:t>
+              <a:t>Q.  Sigma ルールはそのまま使える? 独自拡張で互換は壊れない?</a:t>
             </a:r>
           </a:p>
         </p:txBody>
@@ -14161,7 +15044,7 @@
                 </a:solidFill>
                 <a:latin typeface="Calibri"/>
               </a:rPr>
-              <a:t>A.  feeds.yml に宣言し、ボタン 1 つで取得・正規化 (loldrivers / MalwareBazaar / URLhaus / Feodo)。取得失敗時は前回分を保持し、カバレッジを空にしない設計。</a:t>
+              <a:t>A.  世界共通の Sigma 約 5,000 本に加え、自作 13 本が使える。lookup は独自拡張だが、上流の Hayabusa は知らない記法を無視するだけなので互換は壊れない。</a:t>
             </a:r>
           </a:p>
         </p:txBody>
@@ -14340,7 +15223,7 @@
                 </a:solidFill>
                 <a:latin typeface="Cambria"/>
               </a:rPr>
-              <a:t>よくある質問 ③  安全性・未知の攻撃・今後</a:t>
+              <a:t>よくある質問 ②  精度・性能・運用</a:t>
             </a:r>
           </a:p>
         </p:txBody>
@@ -14469,7 +15352,7 @@
                 </a:solidFill>
                 <a:latin typeface="Cambria"/>
               </a:rPr>
-              <a:t>Q.  データは外部に送られない? 安全?</a:t>
+              <a:t>Q.  誤検知は多くならないの?</a:t>
             </a:r>
           </a:p>
         </p:txBody>
@@ -14508,7 +15391,7 @@
                 </a:solidFill>
                 <a:latin typeface="Calibri"/>
               </a:rPr>
-              <a:t>A.  localhost 限定バインドで外部送信なし、追加ソフトも不要。自 PC のライブ解析は管理者権限＋明示チェック時のみ。DNS リバインドや CSRF への対策も実装済み。</a:t>
+              <a:t>A.  単一の特徴では鳴らさず複数条件の AND で判定。各ルールに誤検知例を明記し、ゴールデンイメージの許可リストや、GUI 上での TP/FP 判定・抑制で運用しながら絞り込める。</a:t>
             </a:r>
           </a:p>
         </p:txBody>
@@ -14637,7 +15520,7 @@
                 </a:solidFill>
                 <a:latin typeface="Cambria"/>
               </a:rPr>
-              <a:t>Q.  未知の攻撃 (ゼロデイ) は検知できる?</a:t>
+              <a:t>Q.  速度や扱える規模は?</a:t>
             </a:r>
           </a:p>
         </p:txBody>
@@ -14676,7 +15559,7 @@
                 </a:solidFill>
                 <a:latin typeface="Calibri"/>
               </a:rPr>
-              <a:t>A.  ルールは既知の手口に強い。未知は振る舞い分析（急増・拡散・沈黙・時間外）で「いつもと違う」を拾う、という二段構えでカバーする。</a:t>
+              <a:t>A.  Rust 製で数万件を数十秒。lookup は起動時に 1 回だけリストを読み込み O(1) で照合するため、リストが増えても速度はほぼ一定（本デモでも 1.2 万件超を処理）。</a:t>
             </a:r>
           </a:p>
         </p:txBody>
@@ -14805,7 +15688,7 @@
                 </a:solidFill>
                 <a:latin typeface="Cambria"/>
               </a:rPr>
-              <a:t>Q.  今後の発展は?</a:t>
+              <a:t>Q.  IoC リストはどうやって最新に保つ?</a:t>
             </a:r>
           </a:p>
         </p:txBody>
@@ -14844,7 +15727,7 @@
                 </a:solidFill>
                 <a:latin typeface="Calibri"/>
               </a:rPr>
-              <a:t>A.  時間の流れを追った相関分析（「A の後に B が起きたら怪しい」）や、AI による検知ルールの自動生成へ。</a:t>
+              <a:t>A.  feeds.yml に宣言し、ボタン 1 つで取得・正規化 (loldrivers / MalwareBazaar / URLhaus / Feodo)。取得失敗時は前回分を保持し、カバレッジを空にしない設計。</a:t>
             </a:r>
           </a:p>
         </p:txBody>
@@ -15551,7 +16434,690 @@
                 </a:solidFill>
                 <a:latin typeface="Calibri"/>
               </a:rPr>
-              <a:t>2 / 15</a:t>
+              <a:t>2 / 16</a:t>
+            </a:r>
+          </a:p>
+        </p:txBody>
+      </p:sp>
+    </p:spTree>
+  </p:cSld>
+  <p:clrMapOvr>
+    <a:masterClrMapping/>
+  </p:clrMapOvr>
+</p:sld>
+</file>
+
+<file path=ppt/slides/slide20.xml><?xml version="1.0" encoding="utf-8"?>
+<p:sld xmlns:a="http://schemas.openxmlformats.org/drawingml/2006/main" xmlns:p="http://schemas.openxmlformats.org/presentationml/2006/main" xmlns:r="http://schemas.openxmlformats.org/officeDocument/2006/relationships">
+  <p:cSld>
+    <p:spTree>
+      <p:nvGrpSpPr>
+        <p:cNvPr id="1" name=""/>
+        <p:cNvGrpSpPr/>
+        <p:nvPr/>
+      </p:nvGrpSpPr>
+      <p:grpSpPr/>
+      <p:sp>
+        <p:nvSpPr>
+          <p:cNvPr id="2" name="Rectangle 1"/>
+          <p:cNvSpPr/>
+          <p:nvPr/>
+        </p:nvSpPr>
+        <p:spPr>
+          <a:xfrm>
+            <a:off x="0" y="0"/>
+            <a:ext cx="12191695" cy="6858000"/>
+          </a:xfrm>
+          <a:prstGeom prst="rect">
+            <a:avLst/>
+          </a:prstGeom>
+          <a:solidFill>
+            <a:srgbClr val="F4F6FA"/>
+          </a:solidFill>
+          <a:ln>
+            <a:noFill/>
+          </a:ln>
+          <a:effectLst/>
+        </p:spPr>
+        <p:style>
+          <a:lnRef idx="1">
+            <a:schemeClr val="accent1"/>
+          </a:lnRef>
+          <a:fillRef idx="3">
+            <a:schemeClr val="accent1"/>
+          </a:fillRef>
+          <a:effectRef idx="2">
+            <a:schemeClr val="accent1"/>
+          </a:effectRef>
+          <a:fontRef idx="minor">
+            <a:schemeClr val="lt1"/>
+          </a:fontRef>
+        </p:style>
+        <p:txBody>
+          <a:bodyPr rtlCol="0" anchor="ctr"/>
+          <a:lstStyle/>
+          <a:p>
+            <a:pPr algn="ctr"/>
+          </a:p>
+        </p:txBody>
+      </p:sp>
+      <p:sp>
+        <p:nvSpPr>
+          <p:cNvPr id="3" name="TextBox 2"/>
+          <p:cNvSpPr txBox="1"/>
+          <p:nvPr/>
+        </p:nvSpPr>
+        <p:spPr>
+          <a:xfrm>
+            <a:off x="548640" y="347472"/>
+            <a:ext cx="10972800" cy="274320"/>
+          </a:xfrm>
+          <a:prstGeom prst="rect">
+            <a:avLst/>
+          </a:prstGeom>
+          <a:noFill/>
+        </p:spPr>
+        <p:txBody>
+          <a:bodyPr wrap="square" lIns="0" rIns="0" tIns="0" bIns="0" anchor="t">
+            <a:spAutoFit/>
+          </a:bodyPr>
+          <a:lstStyle/>
+          <a:p>
+            <a:pPr algn="l">
+              <a:lnSpc>
+                <a:spcPct val="130000"/>
+              </a:lnSpc>
+            </a:pPr>
+            <a:r>
+              <a:rPr sz="1100" b="1" i="0">
+                <a:solidFill>
+                  <a:srgbClr val="2563EB"/>
+                </a:solidFill>
+                <a:latin typeface="Calibri"/>
+              </a:rPr>
+              <a:t>付録 — 想定問答 (Q&amp;A)</a:t>
+            </a:r>
+          </a:p>
+        </p:txBody>
+      </p:sp>
+      <p:sp>
+        <p:nvSpPr>
+          <p:cNvPr id="4" name="TextBox 3"/>
+          <p:cNvSpPr txBox="1"/>
+          <p:nvPr/>
+        </p:nvSpPr>
+        <p:spPr>
+          <a:xfrm>
+            <a:off x="548640" y="621792"/>
+            <a:ext cx="11155680" cy="640080"/>
+          </a:xfrm>
+          <a:prstGeom prst="rect">
+            <a:avLst/>
+          </a:prstGeom>
+          <a:noFill/>
+        </p:spPr>
+        <p:txBody>
+          <a:bodyPr wrap="square" lIns="0" rIns="0" tIns="0" bIns="0" anchor="t">
+            <a:spAutoFit/>
+          </a:bodyPr>
+          <a:lstStyle/>
+          <a:p>
+            <a:pPr algn="l">
+              <a:lnSpc>
+                <a:spcPct val="130000"/>
+              </a:lnSpc>
+            </a:pPr>
+            <a:r>
+              <a:rPr sz="2800" b="1" i="0">
+                <a:solidFill>
+                  <a:srgbClr val="1F2937"/>
+                </a:solidFill>
+                <a:latin typeface="Cambria"/>
+              </a:rPr>
+              <a:t>よくある質問 ③  安全性・未知の攻撃・今後</a:t>
+            </a:r>
+          </a:p>
+        </p:txBody>
+      </p:sp>
+      <p:sp>
+        <p:nvSpPr>
+          <p:cNvPr id="5" name="Rounded Rectangle 4"/>
+          <p:cNvSpPr/>
+          <p:nvPr/>
+        </p:nvSpPr>
+        <p:spPr>
+          <a:xfrm>
+            <a:off x="548640" y="1783080"/>
+            <a:ext cx="11091672" cy="1386840"/>
+          </a:xfrm>
+          <a:prstGeom prst="roundRect">
+            <a:avLst/>
+          </a:prstGeom>
+          <a:solidFill>
+            <a:srgbClr val="FFFFFF"/>
+          </a:solidFill>
+          <a:ln w="9525">
+            <a:solidFill>
+              <a:srgbClr val="DDE3EE"/>
+            </a:solidFill>
+          </a:ln>
+          <a:effectLst/>
+        </p:spPr>
+        <p:style>
+          <a:lnRef idx="1">
+            <a:schemeClr val="accent1"/>
+          </a:lnRef>
+          <a:fillRef idx="3">
+            <a:schemeClr val="accent1"/>
+          </a:fillRef>
+          <a:effectRef idx="2">
+            <a:schemeClr val="accent1"/>
+          </a:effectRef>
+          <a:fontRef idx="minor">
+            <a:schemeClr val="lt1"/>
+          </a:fontRef>
+        </p:style>
+        <p:txBody>
+          <a:bodyPr rtlCol="0" anchor="ctr"/>
+          <a:lstStyle/>
+          <a:p>
+            <a:pPr algn="ctr"/>
+          </a:p>
+        </p:txBody>
+      </p:sp>
+      <p:sp>
+        <p:nvSpPr>
+          <p:cNvPr id="6" name="Rectangle 5"/>
+          <p:cNvSpPr/>
+          <p:nvPr/>
+        </p:nvSpPr>
+        <p:spPr>
+          <a:xfrm>
+            <a:off x="548640" y="1783080"/>
+            <a:ext cx="73152" cy="1386840"/>
+          </a:xfrm>
+          <a:prstGeom prst="rect">
+            <a:avLst/>
+          </a:prstGeom>
+          <a:solidFill>
+            <a:srgbClr val="2563EB"/>
+          </a:solidFill>
+          <a:ln>
+            <a:noFill/>
+          </a:ln>
+          <a:effectLst/>
+        </p:spPr>
+        <p:style>
+          <a:lnRef idx="1">
+            <a:schemeClr val="accent1"/>
+          </a:lnRef>
+          <a:fillRef idx="3">
+            <a:schemeClr val="accent1"/>
+          </a:fillRef>
+          <a:effectRef idx="2">
+            <a:schemeClr val="accent1"/>
+          </a:effectRef>
+          <a:fontRef idx="minor">
+            <a:schemeClr val="lt1"/>
+          </a:fontRef>
+        </p:style>
+        <p:txBody>
+          <a:bodyPr rtlCol="0" anchor="ctr"/>
+          <a:lstStyle/>
+          <a:p>
+            <a:pPr algn="ctr"/>
+          </a:p>
+        </p:txBody>
+      </p:sp>
+      <p:sp>
+        <p:nvSpPr>
+          <p:cNvPr id="7" name="TextBox 6"/>
+          <p:cNvSpPr txBox="1"/>
+          <p:nvPr/>
+        </p:nvSpPr>
+        <p:spPr>
+          <a:xfrm>
+            <a:off x="868680" y="1929384"/>
+            <a:ext cx="10515600" cy="457200"/>
+          </a:xfrm>
+          <a:prstGeom prst="rect">
+            <a:avLst/>
+          </a:prstGeom>
+          <a:noFill/>
+        </p:spPr>
+        <p:txBody>
+          <a:bodyPr wrap="square" lIns="0" rIns="0" tIns="0" bIns="0" anchor="t">
+            <a:spAutoFit/>
+          </a:bodyPr>
+          <a:lstStyle/>
+          <a:p>
+            <a:pPr algn="l">
+              <a:lnSpc>
+                <a:spcPct val="130000"/>
+              </a:lnSpc>
+            </a:pPr>
+            <a:r>
+              <a:rPr sz="1500" b="1" i="0">
+                <a:solidFill>
+                  <a:srgbClr val="1F2937"/>
+                </a:solidFill>
+                <a:latin typeface="Cambria"/>
+              </a:rPr>
+              <a:t>Q.  データは外部に送られない? 安全?</a:t>
+            </a:r>
+          </a:p>
+        </p:txBody>
+      </p:sp>
+      <p:sp>
+        <p:nvSpPr>
+          <p:cNvPr id="8" name="TextBox 7"/>
+          <p:cNvSpPr txBox="1"/>
+          <p:nvPr/>
+        </p:nvSpPr>
+        <p:spPr>
+          <a:xfrm>
+            <a:off x="868680" y="2386584"/>
+            <a:ext cx="10469880" cy="673608"/>
+          </a:xfrm>
+          <a:prstGeom prst="rect">
+            <a:avLst/>
+          </a:prstGeom>
+          <a:noFill/>
+        </p:spPr>
+        <p:txBody>
+          <a:bodyPr wrap="square" lIns="0" rIns="0" tIns="0" bIns="0" anchor="t">
+            <a:spAutoFit/>
+          </a:bodyPr>
+          <a:lstStyle/>
+          <a:p>
+            <a:pPr algn="l">
+              <a:lnSpc>
+                <a:spcPct val="132000"/>
+              </a:lnSpc>
+            </a:pPr>
+            <a:r>
+              <a:rPr sz="1250" b="0" i="0">
+                <a:solidFill>
+                  <a:srgbClr val="5B6472"/>
+                </a:solidFill>
+                <a:latin typeface="Calibri"/>
+              </a:rPr>
+              <a:t>A.  localhost 限定バインドで外部送信なし、追加ソフトも不要。自 PC のライブ解析は管理者権限＋明示チェック時のみ。DNS リバインドや CSRF への対策も実装済み。</a:t>
+            </a:r>
+          </a:p>
+        </p:txBody>
+      </p:sp>
+      <p:sp>
+        <p:nvSpPr>
+          <p:cNvPr id="9" name="Rounded Rectangle 8"/>
+          <p:cNvSpPr/>
+          <p:nvPr/>
+        </p:nvSpPr>
+        <p:spPr>
+          <a:xfrm>
+            <a:off x="548640" y="3316224"/>
+            <a:ext cx="11091672" cy="1386840"/>
+          </a:xfrm>
+          <a:prstGeom prst="roundRect">
+            <a:avLst/>
+          </a:prstGeom>
+          <a:solidFill>
+            <a:srgbClr val="FFFFFF"/>
+          </a:solidFill>
+          <a:ln w="9525">
+            <a:solidFill>
+              <a:srgbClr val="DDE3EE"/>
+            </a:solidFill>
+          </a:ln>
+          <a:effectLst/>
+        </p:spPr>
+        <p:style>
+          <a:lnRef idx="1">
+            <a:schemeClr val="accent1"/>
+          </a:lnRef>
+          <a:fillRef idx="3">
+            <a:schemeClr val="accent1"/>
+          </a:fillRef>
+          <a:effectRef idx="2">
+            <a:schemeClr val="accent1"/>
+          </a:effectRef>
+          <a:fontRef idx="minor">
+            <a:schemeClr val="lt1"/>
+          </a:fontRef>
+        </p:style>
+        <p:txBody>
+          <a:bodyPr rtlCol="0" anchor="ctr"/>
+          <a:lstStyle/>
+          <a:p>
+            <a:pPr algn="ctr"/>
+          </a:p>
+        </p:txBody>
+      </p:sp>
+      <p:sp>
+        <p:nvSpPr>
+          <p:cNvPr id="10" name="Rectangle 9"/>
+          <p:cNvSpPr/>
+          <p:nvPr/>
+        </p:nvSpPr>
+        <p:spPr>
+          <a:xfrm>
+            <a:off x="548640" y="3316224"/>
+            <a:ext cx="73152" cy="1386840"/>
+          </a:xfrm>
+          <a:prstGeom prst="rect">
+            <a:avLst/>
+          </a:prstGeom>
+          <a:solidFill>
+            <a:srgbClr val="2563EB"/>
+          </a:solidFill>
+          <a:ln>
+            <a:noFill/>
+          </a:ln>
+          <a:effectLst/>
+        </p:spPr>
+        <p:style>
+          <a:lnRef idx="1">
+            <a:schemeClr val="accent1"/>
+          </a:lnRef>
+          <a:fillRef idx="3">
+            <a:schemeClr val="accent1"/>
+          </a:fillRef>
+          <a:effectRef idx="2">
+            <a:schemeClr val="accent1"/>
+          </a:effectRef>
+          <a:fontRef idx="minor">
+            <a:schemeClr val="lt1"/>
+          </a:fontRef>
+        </p:style>
+        <p:txBody>
+          <a:bodyPr rtlCol="0" anchor="ctr"/>
+          <a:lstStyle/>
+          <a:p>
+            <a:pPr algn="ctr"/>
+          </a:p>
+        </p:txBody>
+      </p:sp>
+      <p:sp>
+        <p:nvSpPr>
+          <p:cNvPr id="11" name="TextBox 10"/>
+          <p:cNvSpPr txBox="1"/>
+          <p:nvPr/>
+        </p:nvSpPr>
+        <p:spPr>
+          <a:xfrm>
+            <a:off x="868680" y="3462528"/>
+            <a:ext cx="10515600" cy="457200"/>
+          </a:xfrm>
+          <a:prstGeom prst="rect">
+            <a:avLst/>
+          </a:prstGeom>
+          <a:noFill/>
+        </p:spPr>
+        <p:txBody>
+          <a:bodyPr wrap="square" lIns="0" rIns="0" tIns="0" bIns="0" anchor="t">
+            <a:spAutoFit/>
+          </a:bodyPr>
+          <a:lstStyle/>
+          <a:p>
+            <a:pPr algn="l">
+              <a:lnSpc>
+                <a:spcPct val="130000"/>
+              </a:lnSpc>
+            </a:pPr>
+            <a:r>
+              <a:rPr sz="1500" b="1" i="0">
+                <a:solidFill>
+                  <a:srgbClr val="1F2937"/>
+                </a:solidFill>
+                <a:latin typeface="Cambria"/>
+              </a:rPr>
+              <a:t>Q.  未知の攻撃 (ゼロデイ) は検知できる?</a:t>
+            </a:r>
+          </a:p>
+        </p:txBody>
+      </p:sp>
+      <p:sp>
+        <p:nvSpPr>
+          <p:cNvPr id="12" name="TextBox 11"/>
+          <p:cNvSpPr txBox="1"/>
+          <p:nvPr/>
+        </p:nvSpPr>
+        <p:spPr>
+          <a:xfrm>
+            <a:off x="868680" y="3919728"/>
+            <a:ext cx="10469880" cy="673608"/>
+          </a:xfrm>
+          <a:prstGeom prst="rect">
+            <a:avLst/>
+          </a:prstGeom>
+          <a:noFill/>
+        </p:spPr>
+        <p:txBody>
+          <a:bodyPr wrap="square" lIns="0" rIns="0" tIns="0" bIns="0" anchor="t">
+            <a:spAutoFit/>
+          </a:bodyPr>
+          <a:lstStyle/>
+          <a:p>
+            <a:pPr algn="l">
+              <a:lnSpc>
+                <a:spcPct val="132000"/>
+              </a:lnSpc>
+            </a:pPr>
+            <a:r>
+              <a:rPr sz="1250" b="0" i="0">
+                <a:solidFill>
+                  <a:srgbClr val="5B6472"/>
+                </a:solidFill>
+                <a:latin typeface="Calibri"/>
+              </a:rPr>
+              <a:t>A.  ルールは既知の手口に強い。未知は振る舞い分析（急増・拡散・沈黙・時間外）で「いつもと違う」を拾う、という二段構えでカバーする。</a:t>
+            </a:r>
+          </a:p>
+        </p:txBody>
+      </p:sp>
+      <p:sp>
+        <p:nvSpPr>
+          <p:cNvPr id="13" name="Rounded Rectangle 12"/>
+          <p:cNvSpPr/>
+          <p:nvPr/>
+        </p:nvSpPr>
+        <p:spPr>
+          <a:xfrm>
+            <a:off x="548640" y="4849368"/>
+            <a:ext cx="11091672" cy="1386840"/>
+          </a:xfrm>
+          <a:prstGeom prst="roundRect">
+            <a:avLst/>
+          </a:prstGeom>
+          <a:solidFill>
+            <a:srgbClr val="FFFFFF"/>
+          </a:solidFill>
+          <a:ln w="9525">
+            <a:solidFill>
+              <a:srgbClr val="DDE3EE"/>
+            </a:solidFill>
+          </a:ln>
+          <a:effectLst/>
+        </p:spPr>
+        <p:style>
+          <a:lnRef idx="1">
+            <a:schemeClr val="accent1"/>
+          </a:lnRef>
+          <a:fillRef idx="3">
+            <a:schemeClr val="accent1"/>
+          </a:fillRef>
+          <a:effectRef idx="2">
+            <a:schemeClr val="accent1"/>
+          </a:effectRef>
+          <a:fontRef idx="minor">
+            <a:schemeClr val="lt1"/>
+          </a:fontRef>
+        </p:style>
+        <p:txBody>
+          <a:bodyPr rtlCol="0" anchor="ctr"/>
+          <a:lstStyle/>
+          <a:p>
+            <a:pPr algn="ctr"/>
+          </a:p>
+        </p:txBody>
+      </p:sp>
+      <p:sp>
+        <p:nvSpPr>
+          <p:cNvPr id="14" name="Rectangle 13"/>
+          <p:cNvSpPr/>
+          <p:nvPr/>
+        </p:nvSpPr>
+        <p:spPr>
+          <a:xfrm>
+            <a:off x="548640" y="4849368"/>
+            <a:ext cx="73152" cy="1386840"/>
+          </a:xfrm>
+          <a:prstGeom prst="rect">
+            <a:avLst/>
+          </a:prstGeom>
+          <a:solidFill>
+            <a:srgbClr val="2563EB"/>
+          </a:solidFill>
+          <a:ln>
+            <a:noFill/>
+          </a:ln>
+          <a:effectLst/>
+        </p:spPr>
+        <p:style>
+          <a:lnRef idx="1">
+            <a:schemeClr val="accent1"/>
+          </a:lnRef>
+          <a:fillRef idx="3">
+            <a:schemeClr val="accent1"/>
+          </a:fillRef>
+          <a:effectRef idx="2">
+            <a:schemeClr val="accent1"/>
+          </a:effectRef>
+          <a:fontRef idx="minor">
+            <a:schemeClr val="lt1"/>
+          </a:fontRef>
+        </p:style>
+        <p:txBody>
+          <a:bodyPr rtlCol="0" anchor="ctr"/>
+          <a:lstStyle/>
+          <a:p>
+            <a:pPr algn="ctr"/>
+          </a:p>
+        </p:txBody>
+      </p:sp>
+      <p:sp>
+        <p:nvSpPr>
+          <p:cNvPr id="15" name="TextBox 14"/>
+          <p:cNvSpPr txBox="1"/>
+          <p:nvPr/>
+        </p:nvSpPr>
+        <p:spPr>
+          <a:xfrm>
+            <a:off x="868680" y="4995672"/>
+            <a:ext cx="10515600" cy="457200"/>
+          </a:xfrm>
+          <a:prstGeom prst="rect">
+            <a:avLst/>
+          </a:prstGeom>
+          <a:noFill/>
+        </p:spPr>
+        <p:txBody>
+          <a:bodyPr wrap="square" lIns="0" rIns="0" tIns="0" bIns="0" anchor="t">
+            <a:spAutoFit/>
+          </a:bodyPr>
+          <a:lstStyle/>
+          <a:p>
+            <a:pPr algn="l">
+              <a:lnSpc>
+                <a:spcPct val="130000"/>
+              </a:lnSpc>
+            </a:pPr>
+            <a:r>
+              <a:rPr sz="1500" b="1" i="0">
+                <a:solidFill>
+                  <a:srgbClr val="1F2937"/>
+                </a:solidFill>
+                <a:latin typeface="Cambria"/>
+              </a:rPr>
+              <a:t>Q.  今後の発展は?</a:t>
+            </a:r>
+          </a:p>
+        </p:txBody>
+      </p:sp>
+      <p:sp>
+        <p:nvSpPr>
+          <p:cNvPr id="16" name="TextBox 15"/>
+          <p:cNvSpPr txBox="1"/>
+          <p:nvPr/>
+        </p:nvSpPr>
+        <p:spPr>
+          <a:xfrm>
+            <a:off x="868680" y="5452872"/>
+            <a:ext cx="10469880" cy="673608"/>
+          </a:xfrm>
+          <a:prstGeom prst="rect">
+            <a:avLst/>
+          </a:prstGeom>
+          <a:noFill/>
+        </p:spPr>
+        <p:txBody>
+          <a:bodyPr wrap="square" lIns="0" rIns="0" tIns="0" bIns="0" anchor="t">
+            <a:spAutoFit/>
+          </a:bodyPr>
+          <a:lstStyle/>
+          <a:p>
+            <a:pPr algn="l">
+              <a:lnSpc>
+                <a:spcPct val="132000"/>
+              </a:lnSpc>
+            </a:pPr>
+            <a:r>
+              <a:rPr sz="1250" b="0" i="0">
+                <a:solidFill>
+                  <a:srgbClr val="5B6472"/>
+                </a:solidFill>
+                <a:latin typeface="Calibri"/>
+              </a:rPr>
+              <a:t>A.  時間の流れを追った相関分析（「A の後に B が起きたら怪しい」）や、AI による検知ルールの自動生成へ。</a:t>
+            </a:r>
+          </a:p>
+        </p:txBody>
+      </p:sp>
+      <p:sp>
+        <p:nvSpPr>
+          <p:cNvPr id="17" name="TextBox 16"/>
+          <p:cNvSpPr txBox="1"/>
+          <p:nvPr/>
+        </p:nvSpPr>
+        <p:spPr>
+          <a:xfrm>
+            <a:off x="10972800" y="6446520"/>
+            <a:ext cx="914400" cy="274320"/>
+          </a:xfrm>
+          <a:prstGeom prst="rect">
+            <a:avLst/>
+          </a:prstGeom>
+          <a:noFill/>
+        </p:spPr>
+        <p:txBody>
+          <a:bodyPr wrap="square" lIns="0" rIns="0" tIns="0" bIns="0" anchor="t">
+            <a:spAutoFit/>
+          </a:bodyPr>
+          <a:lstStyle/>
+          <a:p>
+            <a:pPr algn="r">
+              <a:lnSpc>
+                <a:spcPct val="130000"/>
+              </a:lnSpc>
+            </a:pPr>
+            <a:r>
+              <a:rPr sz="900" b="0" i="0">
+                <a:solidFill>
+                  <a:srgbClr val="5B6472"/>
+                </a:solidFill>
+                <a:latin typeface="Calibri"/>
+              </a:rPr>
+              <a:t>付録</a:t>
             </a:r>
           </a:p>
         </p:txBody>
@@ -16529,7 +18095,7 @@
                 </a:solidFill>
                 <a:latin typeface="Calibri"/>
               </a:rPr>
-              <a:t>3 / 15</a:t>
+              <a:t>3 / 16</a:t>
             </a:r>
           </a:p>
         </p:txBody>
@@ -17395,7 +18961,7 @@
                 </a:solidFill>
                 <a:latin typeface="Calibri"/>
               </a:rPr>
-              <a:t>4 / 15</a:t>
+              <a:t>4 / 16</a:t>
             </a:r>
           </a:p>
         </p:txBody>
@@ -18279,7 +19845,7 @@
                 </a:solidFill>
                 <a:latin typeface="Calibri"/>
               </a:rPr>
-              <a:t>5 / 15</a:t>
+              <a:t>5 / 16</a:t>
             </a:r>
           </a:p>
         </p:txBody>
@@ -19709,7 +21275,7 @@
                 </a:solidFill>
                 <a:latin typeface="Calibri"/>
               </a:rPr>
-              <a:t>6 / 15</a:t>
+              <a:t>6 / 16</a:t>
             </a:r>
           </a:p>
         </p:txBody>
@@ -20812,7 +22378,7 @@
                 </a:solidFill>
                 <a:latin typeface="Calibri"/>
               </a:rPr>
-              <a:t>7 / 15</a:t>
+              <a:t>7 / 16</a:t>
             </a:r>
           </a:p>
         </p:txBody>
@@ -22446,7 +24012,7 @@
                 </a:solidFill>
                 <a:latin typeface="Calibri"/>
               </a:rPr>
-              <a:t>8 / 15</a:t>
+              <a:t>8 / 16</a:t>
             </a:r>
           </a:p>
         </p:txBody>
@@ -23737,7 +25303,7 @@
                 </a:solidFill>
                 <a:latin typeface="Calibri"/>
               </a:rPr>
-              <a:t>9 / 15</a:t>
+              <a:t>9 / 16</a:t>
             </a:r>
           </a:p>
         </p:txBody>

--- a/docs/presentation/pptx/hayabusa-plus.pptx
+++ b/docs/presentation/pptx/hayabusa-plus.pptx
@@ -846,17 +846,17 @@
           <a:lstStyle/>
           <a:p>
             <a:r>
-              <a:t>ここから実際の画面でお見せします。サンプルログを読み込んで、調査の流れを見ていただきます。</a:t>
-            </a:r>
-          </a:p>
-          <a:p>
-            <a:r>
-              <a:t>(デモ: スキャン実行 → ダッシュボードで全体把握 → 検知の日本語解説 → ホスト別の危険度ランキング、の順に見せる)</a:t>
-            </a:r>
-          </a:p>
-          <a:p>
-            <a:r>
-              <a:t>※ ライブが不調なときは、スライド中央の動画をクリックすれば同じ流れの録画 (約 38 秒・字幕つき) が再生されます。</a:t>
+              <a:t>研究として「で、効果は?」に答えるスライドです。</a:t>
+            </a:r>
+          </a:p>
+          <a:p>
+            <a:r>
+              <a:t>核心の自作 lookup 拡張は、既知の悪用ドライバのハッシュを仕込んだ検証用ログで critical 検知を確認できました ── ルール本文を変えずに外部リスト側だけで検知できる、という仕組みの実証です。</a:t>
+            </a:r>
+          </a:p>
+          <a:p>
+            <a:r>
+              <a:t>さらに公開されている攻撃サンプル 6 種を読み込ませると 5 種で脅威を検知。なおここでの発火は上流ルールと自作分の合算で、自作 13 ルールは対応する痕跡を含むログで鳴る設計、という点も正直に添えてあります。</a:t>
             </a:r>
           </a:p>
         </p:txBody>
@@ -926,17 +926,17 @@
           <a:lstStyle/>
           <a:p>
             <a:r>
-              <a:t>研究として「で、効果は?」に答えるスライドです。</a:t>
-            </a:r>
-          </a:p>
-          <a:p>
-            <a:r>
-              <a:t>核心の自作 lookup 拡張は、既知の悪用ドライバのハッシュを仕込んだ検証用ログで critical 検知を確認できました ── ルール本文を変えずに外部リスト側だけで検知できる、という仕組みの実証です。</a:t>
-            </a:r>
-          </a:p>
-          <a:p>
-            <a:r>
-              <a:t>さらに公開されている攻撃サンプル 6 種を読み込ませると 5 種で脅威を検知。なおここでの発火は上流ルールと自作分の合算で、自作 13 ルールは対応する痕跡を含むログで鳴る設計、という点も正直に添えてあります。</a:t>
+              <a:t>ここから実際の画面でお見せします。サンプルログを読み込んで、調査の流れを見ていただきます。</a:t>
+            </a:r>
+          </a:p>
+          <a:p>
+            <a:r>
+              <a:t>(デモ: スキャン実行 → ダッシュボードで全体把握 → 検知の日本語解説 → ホスト別の危険度ランキング、の順に見せる)</a:t>
+            </a:r>
+          </a:p>
+          <a:p>
+            <a:r>
+              <a:t>※ ライブが不調なときは、スライド中央の動画をクリックすれば同じ流れの録画 (約 38 秒・字幕つき) が再生されます。</a:t>
             </a:r>
           </a:p>
         </p:txBody>
@@ -5159,13 +5159,13 @@
               </a:lnSpc>
             </a:pPr>
             <a:r>
-              <a:rPr sz="1500" b="0" i="0">
+              <a:rPr sz="1600" b="0" i="0">
                 <a:solidFill>
                   <a:srgbClr val="FFFFFF"/>
                 </a:solidFill>
                 <a:latin typeface="Calibri"/>
               </a:rPr>
-              <a:t>発表者: （氏名）   ・   所属: （学科 / 研究室）   ・   2026-06-18</a:t>
+              <a:t>発表者: 島崎朝日   ・   所属: 小林研究室</a:t>
             </a:r>
           </a:p>
         </p:txBody>

--- a/docs/presentation/pptx/hayabusa-plus.pptx
+++ b/docs/presentation/pptx/hayabusa-plus.pptx
@@ -846,17 +846,17 @@
           <a:lstStyle/>
           <a:p>
             <a:r>
-              <a:t>研究として「で、効果は?」に答えるスライドです。</a:t>
-            </a:r>
-          </a:p>
-          <a:p>
-            <a:r>
-              <a:t>核心の自作 lookup 拡張は、既知の悪用ドライバのハッシュを仕込んだ検証用ログで critical 検知を確認できました ── ルール本文を変えずに外部リスト側だけで検知できる、という仕組みの実証です。</a:t>
-            </a:r>
-          </a:p>
-          <a:p>
-            <a:r>
-              <a:t>さらに公開されている攻撃サンプル 6 種を読み込ませると 5 種で脅威を検知。なおここでの発火は上流ルールと自作分の合算で、自作 13 ルールは対応する痕跡を含むログで鳴る設計、という点も正直に添えてあります。</a:t>
+              <a:t>研究として大事な「で、効果は?」にお答えします。</a:t>
+            </a:r>
+          </a:p>
+          <a:p>
+            <a:r>
+              <a:t>まず核心の自作 lookup 拡張です。既知の悪用ドライバのハッシュを仕込んだ検証用ログを読み込ませると、critical で検知できました。ルール本文は 1 行も変えず、外部のリスト側だけで検知できる ── この仕組みが狙いどおり動くことを確認できた、ということです。</a:t>
+            </a:r>
+          </a:p>
+          <a:p>
+            <a:r>
+              <a:t>次に、公開されている攻撃サンプル 6 種で試すと、5 種で脅威を検知できました。ひとつ正直にお伝えすると、ここで鳴っているのは上流ルールと自作分の合算で、自作 13 ルールは対応する痕跡が出たときに鳴る設計です。ですので「すべてを自作ルールで捕まえた」とは申しません。</a:t>
             </a:r>
           </a:p>
         </p:txBody>

--- a/docs/presentation/pptx/hayabusa-plus.pptx
+++ b/docs/presentation/pptx/hayabusa-plus.pptx
@@ -846,17 +846,17 @@
           <a:lstStyle/>
           <a:p>
             <a:r>
-              <a:t>研究として大事な「で、効果は?」にお答えします。</a:t>
-            </a:r>
-          </a:p>
-          <a:p>
-            <a:r>
-              <a:t>まず核心の自作 lookup 拡張です。既知の悪用ドライバのハッシュを仕込んだ検証用ログを読み込ませると、critical で検知できました。ルール本文は 1 行も変えず、外部のリスト側だけで検知できる ── この仕組みが狙いどおり動くことを確認できた、ということです。</a:t>
-            </a:r>
-          </a:p>
-          <a:p>
-            <a:r>
-              <a:t>次に、公開されている攻撃サンプル 6 種で試すと、5 種で脅威を検知できました。ひとつ正直にお伝えすると、ここで鳴っているのは上流ルールと自作分の合算で、自作 13 ルールは対応する痕跡が出たときに鳴る設計です。ですので「すべてを自作ルールで捕まえた」とは申しません。</a:t>
+              <a:t>ここは「で、結局ちゃんと効くの?」に答えるスライドです。</a:t>
+            </a:r>
+          </a:p>
+          <a:p>
+            <a:r>
+              <a:t>まず自作した lookup 拡張から。悪用ドライバの“指紋”をわざと仕込んだログを読ませてみたら、ちゃんと critical で引っかかりました。ルールは 1 行も書き換えず、リスト側を差し替えるだけ。狙いどおり動きました。</a:t>
+            </a:r>
+          </a:p>
+          <a:p>
+            <a:r>
+              <a:t>次に、公開されている攻撃サンプル 6 種で試したら、5 種で検知できました。ここだけ正直に言うと、鳴っているのは既存ルールと自作分の合わせ技で、自作の13 本は“その痕跡が出たとき”に鳴る作りです。なので「全部うちのルールで捕まえた」とまでは言いません。</a:t>
             </a:r>
           </a:p>
         </p:txBody>
@@ -10666,7 +10666,7 @@
                 </a:solidFill>
                 <a:latin typeface="Calibri"/>
               </a:rPr>
-              <a:t>※ ここでの発火は上流 Sigma ルールと自作分の合算。自作の 13 ルールは対応する痕跡（Sysmon EID 1 の wevtutil 等）を含むログで発火する設計。</a:t>
+              <a:t>※ ②で鳴ったのは既存ルールと自作分の合わせ技。自作の 13 本は、対応する痕跡（wevtutil 等）が出たログで鳴る作りです。</a:t>
             </a:r>
           </a:p>
         </p:txBody>
@@ -10705,7 +10705,7 @@
                 </a:solidFill>
                 <a:latin typeface="Calibri"/>
               </a:rPr>
-              <a:t>実際のログを読み込ませ、平文ではなく検知として浮かび上がることを確認。</a:t>
+              <a:t>実際のログを読ませて、危ない動きがちゃんと “検知” として浮かび上がるか確かめました。</a:t>
             </a:r>
           </a:p>
         </p:txBody>
